--- a/Arquitectura de Sistemas Computacionales/Clases/Clase 8 - Monitoreo optimizacion y CI-CD/Presentacion.pptx
+++ b/Arquitectura de Sistemas Computacionales/Clases/Clase 8 - Monitoreo optimizacion y CI-CD/Presentacion.pptx
@@ -17,6 +17,26 @@
     <p:sldId id="265" r:id="rId16"/>
     <p:sldId id="266" r:id="rId17"/>
     <p:sldId id="267" r:id="rId18"/>
+    <p:sldId id="268" r:id="rId19"/>
+    <p:sldId id="269" r:id="rId20"/>
+    <p:sldId id="270" r:id="rId21"/>
+    <p:sldId id="271" r:id="rId22"/>
+    <p:sldId id="272" r:id="rId23"/>
+    <p:sldId id="273" r:id="rId24"/>
+    <p:sldId id="274" r:id="rId25"/>
+    <p:sldId id="275" r:id="rId26"/>
+    <p:sldId id="276" r:id="rId27"/>
+    <p:sldId id="277" r:id="rId28"/>
+    <p:sldId id="278" r:id="rId29"/>
+    <p:sldId id="279" r:id="rId30"/>
+    <p:sldId id="280" r:id="rId31"/>
+    <p:sldId id="281" r:id="rId32"/>
+    <p:sldId id="282" r:id="rId33"/>
+    <p:sldId id="283" r:id="rId34"/>
+    <p:sldId id="284" r:id="rId35"/>
+    <p:sldId id="285" r:id="rId36"/>
+    <p:sldId id="286" r:id="rId37"/>
+    <p:sldId id="287" r:id="rId38"/>
   </p:sldIdLst>
   <p:sldSz cx="12191695" cy="6858000" type="screen4x3"/>
   <p:notesSz cx="6858000" cy="9144000"/>
@@ -3575,7 +3595,7 @@
                 </a:solidFill>
                 <a:latin typeface="Calibri"/>
               </a:rPr>
-              <a:t>Manos a la obra (paso a paso)</a:t>
+              <a:t>Entrega continua y despliegue continuo: la sigla CD es ambigua (2/2)</a:t>
             </a:r>
           </a:p>
         </p:txBody>
@@ -3608,22 +3628,13 @@
               </a:spcAft>
             </a:pPr>
             <a:r>
-              <a:rPr sz="2000" b="1" i="0">
-                <a:solidFill>
-                  <a:srgbClr val="333333"/>
-                </a:solidFill>
-                <a:latin typeface="Calibri"/>
-              </a:rPr>
-              <a:t>1.</a:t>
-            </a:r>
-            <a:r>
               <a:rPr sz="2000" b="0" i="0">
                 <a:solidFill>
                   <a:srgbClr val="333333"/>
                 </a:solidFill>
                 <a:latin typeface="Calibri"/>
               </a:rPr>
-              <a:t> Paso 1: escriba en la pregunta 7 el contenido completo del ci.yml con disparadores, entorno y los pasos de construccion, prueba y despliegue simulado, usando la imagen y el puerto del Dockerfile del Corte 1; verifique que ningun secreto quede escrito en claro dentro del YAML.</a:t>
+              <a:t>–   Y hay que anunciar como se califica esa frontera, porque es contraintuitivo para el estudiante que cree que reconocer un limite es admitir una carencia: la pregunta 9 SUMA un punto por ubicar correctamente el propio trabajo y decir que llega hasta «listo para desplegar», y DESCUENTA la mitad de la pregunta a quien afirme haber construido CD.</a:t>
             </a:r>
           </a:p>
           <a:p>
@@ -3639,93 +3650,7 @@
                 </a:solidFill>
                 <a:latin typeface="Calibri"/>
               </a:rPr>
-              <a:t>–   </a:t>
-            </a:r>
-            <a:r>
-              <a:rPr sz="2000" b="1" i="0">
-                <a:solidFill>
-                  <a:srgbClr val="333333"/>
-                </a:solidFill>
-                <a:latin typeface="Calibri"/>
-              </a:rPr>
-              <a:t>2.</a:t>
-            </a:r>
-            <a:r>
-              <a:rPr sz="2000" b="0" i="0">
-                <a:solidFill>
-                  <a:srgbClr val="333333"/>
-                </a:solidFill>
-                <a:latin typeface="Calibri"/>
-              </a:rPr>
-              <a:t> Paso 2: explique en la pregunta 8 que se compila o instala, que se ejecuta en la prueba y con que condicion el pipeline debe fallar; hagase la prueba mental de que error tendria que introducir para que el check salga rojo, y si no encuentra ninguno, su pipeline todavia no valida nada.</a:t>
-            </a:r>
-          </a:p>
-          <a:p>
-            <a:pPr>
-              <a:spcAft>
-                <a:spcPts val="800"/>
-              </a:spcAft>
-            </a:pPr>
-            <a:r>
-              <a:rPr sz="2000" b="0" i="0">
-                <a:solidFill>
-                  <a:srgbClr val="333333"/>
-                </a:solidFill>
-                <a:latin typeface="Calibri"/>
-              </a:rPr>
-              <a:t>–   </a:t>
-            </a:r>
-            <a:r>
-              <a:rPr sz="2000" b="1" i="0">
-                <a:solidFill>
-                  <a:srgbClr val="333333"/>
-                </a:solidFill>
-                <a:latin typeface="Calibri"/>
-              </a:rPr>
-              <a:t>3.</a:t>
-            </a:r>
-            <a:r>
-              <a:rPr sz="2000" b="0" i="0">
-                <a:solidFill>
-                  <a:srgbClr val="333333"/>
-                </a:solidFill>
-                <a:latin typeface="Calibri"/>
-              </a:rPr>
-              <a:t> Paso 3: distinga en la pregunta 9 que valida CI y que hace CD, ubique cual de los dos construyo y diga que le faltaria para CD real; reconocer que su pipeline llega hasta «listo para desplegar» suma puntos, afirmar que ya tiene CD los resta.</a:t>
-            </a:r>
-          </a:p>
-          <a:p>
-            <a:pPr>
-              <a:spcAft>
-                <a:spcPts val="800"/>
-              </a:spcAft>
-            </a:pPr>
-            <a:r>
-              <a:rPr sz="2000" b="0" i="0">
-                <a:solidFill>
-                  <a:srgbClr val="333333"/>
-                </a:solidFill>
-                <a:latin typeface="Calibri"/>
-              </a:rPr>
-              <a:t>–   </a:t>
-            </a:r>
-            <a:r>
-              <a:rPr sz="2000" b="1" i="0">
-                <a:solidFill>
-                  <a:srgbClr val="333333"/>
-                </a:solidFill>
-                <a:latin typeface="Calibri"/>
-              </a:rPr>
-              <a:t>4.</a:t>
-            </a:r>
-            <a:r>
-              <a:rPr sz="2000" b="0" i="0">
-                <a:solidFill>
-                  <a:srgbClr val="333333"/>
-                </a:solidFill>
-                <a:latin typeface="Calibri"/>
-              </a:rPr>
-              <a:t> Paso 4: liste en la pregunta 10 entre 4 y 6 senales con su umbral, atadas a operaciones de su dominio, y verifique que al menos una sea un registro y no una metrica numerica; una senal sin umbral no sirve para operar y no suma.</a:t>
+              <a:t>–   La forma tipica del error es tener un paso llamado deploy que solo imprime un mensaje y concluir que ya hay despliegue continuo; el nombre del paso no despliega nada.</a:t>
             </a:r>
           </a:p>
         </p:txBody>
@@ -3906,109 +3831,21 @@
                 </a:solidFill>
                 <a:latin typeface="Calibri"/>
               </a:rPr>
-              <a:t>Para continuar (PI)</a:t>
-            </a:r>
-          </a:p>
-        </p:txBody>
-      </p:sp>
-      <p:sp>
-        <p:nvSpPr>
-          <p:cNvPr id="5" name="Rounded Rectangle 4"/>
-          <p:cNvSpPr/>
-          <p:nvPr/>
-        </p:nvSpPr>
-        <p:spPr>
-          <a:xfrm>
-            <a:off x="457200" y="1261872"/>
-            <a:ext cx="11277295" cy="1051560"/>
-          </a:xfrm>
-          <a:prstGeom prst="roundRect">
-            <a:avLst>
-              <a:gd name="adj" fmla="val 12000"/>
-            </a:avLst>
-          </a:prstGeom>
-          <a:solidFill>
-            <a:srgbClr val="E8F4FA"/>
-          </a:solidFill>
-          <a:ln>
-            <a:noFill/>
-          </a:ln>
-        </p:spPr>
-        <p:style>
-          <a:lnRef idx="1">
-            <a:schemeClr val="accent1"/>
-          </a:lnRef>
-          <a:fillRef idx="3">
-            <a:schemeClr val="accent1"/>
-          </a:fillRef>
-          <a:effectRef idx="2">
-            <a:schemeClr val="accent1"/>
-          </a:effectRef>
-          <a:fontRef idx="minor">
-            <a:schemeClr val="lt1"/>
-          </a:fontRef>
-        </p:style>
-        <p:txBody>
-          <a:bodyPr rtlCol="0" anchor="ctr"/>
-          <a:lstStyle/>
-          <a:p>
-            <a:pPr algn="ctr"/>
-          </a:p>
-        </p:txBody>
-      </p:sp>
-      <p:sp>
-        <p:nvSpPr>
-          <p:cNvPr id="6" name="Rectangle 5"/>
-          <p:cNvSpPr/>
-          <p:nvPr/>
-        </p:nvSpPr>
-        <p:spPr>
-          <a:xfrm>
-            <a:off x="457200" y="1261872"/>
-            <a:ext cx="128016" cy="1051560"/>
-          </a:xfrm>
-          <a:prstGeom prst="rect">
-            <a:avLst/>
-          </a:prstGeom>
-          <a:solidFill>
-            <a:srgbClr val="269CCB"/>
-          </a:solidFill>
-          <a:ln>
-            <a:noFill/>
-          </a:ln>
-        </p:spPr>
-        <p:style>
-          <a:lnRef idx="1">
-            <a:schemeClr val="accent1"/>
-          </a:lnRef>
-          <a:fillRef idx="3">
-            <a:schemeClr val="accent1"/>
-          </a:fillRef>
-          <a:effectRef idx="2">
-            <a:schemeClr val="accent1"/>
-          </a:effectRef>
-          <a:fontRef idx="minor">
-            <a:schemeClr val="lt1"/>
-          </a:fontRef>
-        </p:style>
-        <p:txBody>
-          <a:bodyPr rtlCol="0" anchor="ctr"/>
-          <a:lstStyle/>
-          <a:p>
-            <a:pPr algn="ctr"/>
-          </a:p>
-        </p:txBody>
-      </p:sp>
-      <p:sp>
-        <p:nvSpPr>
-          <p:cNvPr id="7" name="TextBox 6"/>
+              <a:t>GitHub Actions en cinco palabras (1/2)</a:t>
+            </a:r>
+          </a:p>
+        </p:txBody>
+      </p:sp>
+      <p:sp>
+        <p:nvSpPr>
+          <p:cNvPr id="5" name="TextBox 4"/>
           <p:cNvSpPr txBox="1"/>
           <p:nvPr/>
         </p:nvSpPr>
         <p:spPr>
           <a:xfrm>
-            <a:off x="777240" y="1399031"/>
-            <a:ext cx="10774375" cy="822959"/>
+            <a:off x="457200" y="1170432"/>
+            <a:ext cx="11277295" cy="5230368"/>
           </a:xfrm>
           <a:prstGeom prst="rect">
             <a:avLst/>
@@ -4021,313 +3858,106 @@
           </a:bodyPr>
           <a:lstStyle/>
           <a:p>
-            <a:r>
-              <a:rPr sz="1200" b="1" i="0">
-                <a:solidFill>
-                  <a:srgbClr val="269CCB"/>
-                </a:solidFill>
-                <a:latin typeface="Calibri"/>
-              </a:rPr>
-              <a:t>Info</a:t>
-            </a:r>
-          </a:p>
-          <a:p>
-            <a:pPr>
-              <a:spcBef>
-                <a:spcPts val="400"/>
-              </a:spcBef>
-            </a:pPr>
-            <a:r>
-              <a:rPr sz="1400" b="0" i="0">
-                <a:solidFill>
-                  <a:srgbClr val="333333"/>
-                </a:solidFill>
-                <a:latin typeface="Calibri"/>
-              </a:rPr>
-              <a:t>Entregable: .github/workflows/ci.yml + sección Monitoreo/CI del informe</a:t>
-            </a:r>
-          </a:p>
-        </p:txBody>
-      </p:sp>
-      <p:sp>
-        <p:nvSpPr>
-          <p:cNvPr id="8" name="Rounded Rectangle 7"/>
-          <p:cNvSpPr/>
-          <p:nvPr/>
-        </p:nvSpPr>
-        <p:spPr>
-          <a:xfrm>
-            <a:off x="457200" y="2478024"/>
-            <a:ext cx="11277295" cy="1051560"/>
-          </a:xfrm>
-          <a:prstGeom prst="roundRect">
-            <a:avLst>
-              <a:gd name="adj" fmla="val 12000"/>
-            </a:avLst>
-          </a:prstGeom>
-          <a:solidFill>
-            <a:srgbClr val="FFF8E1"/>
-          </a:solidFill>
-          <a:ln>
-            <a:noFill/>
-          </a:ln>
-        </p:spPr>
-        <p:style>
-          <a:lnRef idx="1">
-            <a:schemeClr val="accent1"/>
-          </a:lnRef>
-          <a:fillRef idx="3">
-            <a:schemeClr val="accent1"/>
-          </a:fillRef>
-          <a:effectRef idx="2">
-            <a:schemeClr val="accent1"/>
-          </a:effectRef>
-          <a:fontRef idx="minor">
-            <a:schemeClr val="lt1"/>
-          </a:fontRef>
-        </p:style>
-        <p:txBody>
-          <a:bodyPr rtlCol="0" anchor="ctr"/>
-          <a:lstStyle/>
-          <a:p>
-            <a:pPr algn="ctr"/>
-          </a:p>
-        </p:txBody>
-      </p:sp>
-      <p:sp>
-        <p:nvSpPr>
-          <p:cNvPr id="9" name="Rectangle 8"/>
-          <p:cNvSpPr/>
-          <p:nvPr/>
-        </p:nvSpPr>
-        <p:spPr>
-          <a:xfrm>
-            <a:off x="457200" y="2478024"/>
-            <a:ext cx="128016" cy="1051560"/>
-          </a:xfrm>
-          <a:prstGeom prst="rect">
-            <a:avLst/>
-          </a:prstGeom>
-          <a:solidFill>
-            <a:srgbClr val="FFD000"/>
-          </a:solidFill>
-          <a:ln>
-            <a:noFill/>
-          </a:ln>
-        </p:spPr>
-        <p:style>
-          <a:lnRef idx="1">
-            <a:schemeClr val="accent1"/>
-          </a:lnRef>
-          <a:fillRef idx="3">
-            <a:schemeClr val="accent1"/>
-          </a:fillRef>
-          <a:effectRef idx="2">
-            <a:schemeClr val="accent1"/>
-          </a:effectRef>
-          <a:fontRef idx="minor">
-            <a:schemeClr val="lt1"/>
-          </a:fontRef>
-        </p:style>
-        <p:txBody>
-          <a:bodyPr rtlCol="0" anchor="ctr"/>
-          <a:lstStyle/>
-          <a:p>
-            <a:pPr algn="ctr"/>
-          </a:p>
-        </p:txBody>
-      </p:sp>
-      <p:sp>
-        <p:nvSpPr>
-          <p:cNvPr id="10" name="TextBox 9"/>
-          <p:cNvSpPr txBox="1"/>
-          <p:nvPr/>
-        </p:nvSpPr>
-        <p:spPr>
-          <a:xfrm>
-            <a:off x="777240" y="2615184"/>
-            <a:ext cx="10774375" cy="822959"/>
-          </a:xfrm>
-          <a:prstGeom prst="rect">
-            <a:avLst/>
-          </a:prstGeom>
-          <a:noFill/>
-        </p:spPr>
-        <p:txBody>
-          <a:bodyPr wrap="square">
-            <a:spAutoFit/>
-          </a:bodyPr>
-          <a:lstStyle/>
-          <a:p>
-            <a:r>
-              <a:rPr sz="1200" b="1" i="0">
-                <a:solidFill>
-                  <a:srgbClr val="FFD000"/>
-                </a:solidFill>
-                <a:latin typeface="Calibri"/>
-              </a:rPr>
-              <a:t>Aclaración</a:t>
-            </a:r>
-          </a:p>
-          <a:p>
-            <a:pPr>
-              <a:spcBef>
-                <a:spcPts val="400"/>
-              </a:spcBef>
-            </a:pPr>
-            <a:r>
-              <a:rPr sz="1400" b="0" i="0">
-                <a:solidFill>
-                  <a:srgbClr val="333333"/>
-                </a:solidFill>
-                <a:latin typeface="Calibri"/>
-              </a:rPr>
-              <a:t>Subir evidencias al paquete CloudLite (Drive/repo) y a la plataforma del curso en la fecha que indique el docente.</a:t>
-            </a:r>
-          </a:p>
-        </p:txBody>
-      </p:sp>
-      <p:sp>
-        <p:nvSpPr>
-          <p:cNvPr id="11" name="Rounded Rectangle 10"/>
-          <p:cNvSpPr/>
-          <p:nvPr/>
-        </p:nvSpPr>
-        <p:spPr>
-          <a:xfrm>
-            <a:off x="457200" y="3694176"/>
-            <a:ext cx="11277295" cy="1051560"/>
-          </a:xfrm>
-          <a:prstGeom prst="roundRect">
-            <a:avLst>
-              <a:gd name="adj" fmla="val 12000"/>
-            </a:avLst>
-          </a:prstGeom>
-          <a:solidFill>
-            <a:srgbClr val="FBE4E4"/>
-          </a:solidFill>
-          <a:ln>
-            <a:noFill/>
-          </a:ln>
-        </p:spPr>
-        <p:style>
-          <a:lnRef idx="1">
-            <a:schemeClr val="accent1"/>
-          </a:lnRef>
-          <a:fillRef idx="3">
-            <a:schemeClr val="accent1"/>
-          </a:fillRef>
-          <a:effectRef idx="2">
-            <a:schemeClr val="accent1"/>
-          </a:effectRef>
-          <a:fontRef idx="minor">
-            <a:schemeClr val="lt1"/>
-          </a:fontRef>
-        </p:style>
-        <p:txBody>
-          <a:bodyPr rtlCol="0" anchor="ctr"/>
-          <a:lstStyle/>
-          <a:p>
-            <a:pPr algn="ctr"/>
-          </a:p>
-        </p:txBody>
-      </p:sp>
-      <p:sp>
-        <p:nvSpPr>
-          <p:cNvPr id="12" name="Rectangle 11"/>
-          <p:cNvSpPr/>
-          <p:nvPr/>
-        </p:nvSpPr>
-        <p:spPr>
-          <a:xfrm>
-            <a:off x="457200" y="3694176"/>
-            <a:ext cx="128016" cy="1051560"/>
-          </a:xfrm>
-          <a:prstGeom prst="rect">
-            <a:avLst/>
-          </a:prstGeom>
-          <a:solidFill>
-            <a:srgbClr val="A02030"/>
-          </a:solidFill>
-          <a:ln>
-            <a:noFill/>
-          </a:ln>
-        </p:spPr>
-        <p:style>
-          <a:lnRef idx="1">
-            <a:schemeClr val="accent1"/>
-          </a:lnRef>
-          <a:fillRef idx="3">
-            <a:schemeClr val="accent1"/>
-          </a:fillRef>
-          <a:effectRef idx="2">
-            <a:schemeClr val="accent1"/>
-          </a:effectRef>
-          <a:fontRef idx="minor">
-            <a:schemeClr val="lt1"/>
-          </a:fontRef>
-        </p:style>
-        <p:txBody>
-          <a:bodyPr rtlCol="0" anchor="ctr"/>
-          <a:lstStyle/>
-          <a:p>
-            <a:pPr algn="ctr"/>
-          </a:p>
-        </p:txBody>
-      </p:sp>
-      <p:sp>
-        <p:nvSpPr>
-          <p:cNvPr id="13" name="TextBox 12"/>
-          <p:cNvSpPr txBox="1"/>
-          <p:nvPr/>
-        </p:nvSpPr>
-        <p:spPr>
-          <a:xfrm>
-            <a:off x="777240" y="3831336"/>
-            <a:ext cx="10774375" cy="822959"/>
-          </a:xfrm>
-          <a:prstGeom prst="rect">
-            <a:avLst/>
-          </a:prstGeom>
-          <a:noFill/>
-        </p:spPr>
-        <p:txBody>
-          <a:bodyPr wrap="square">
-            <a:spAutoFit/>
-          </a:bodyPr>
-          <a:lstStyle/>
-          <a:p>
-            <a:r>
-              <a:rPr sz="1200" b="1" i="0">
-                <a:solidFill>
-                  <a:srgbClr val="A02030"/>
-                </a:solidFill>
-                <a:latin typeface="Calibri"/>
-              </a:rPr>
-              <a:t>Atención</a:t>
-            </a:r>
-          </a:p>
-          <a:p>
-            <a:pPr>
-              <a:spcBef>
-                <a:spcPts val="400"/>
-              </a:spcBef>
-            </a:pPr>
-            <a:r>
-              <a:rPr sz="1400" b="0" i="0">
-                <a:solidFill>
-                  <a:srgbClr val="333333"/>
-                </a:solidFill>
-                <a:latin typeface="Calibri"/>
-              </a:rPr>
-              <a:t>Sin cloud de pago ni instalaciones obligatorias de hipervisores/Docker Desktop.</a:t>
-            </a:r>
-          </a:p>
-        </p:txBody>
-      </p:sp>
-      <p:sp>
-        <p:nvSpPr>
-          <p:cNvPr id="14" name="TextBox 13"/>
+            <a:pPr>
+              <a:spcAft>
+                <a:spcPts val="800"/>
+              </a:spcAft>
+            </a:pPr>
+            <a:r>
+              <a:rPr sz="2000" b="0" i="0">
+                <a:solidFill>
+                  <a:srgbClr val="333333"/>
+                </a:solidFill>
+                <a:latin typeface="Calibri"/>
+              </a:rPr>
+              <a:t>–   GitHub Actions es la herramienta del dia porque es gratis, corre en el navegador y produce evidencia verificable.</a:t>
+            </a:r>
+          </a:p>
+          <a:p>
+            <a:pPr>
+              <a:spcAft>
+                <a:spcPts val="800"/>
+              </a:spcAft>
+            </a:pPr>
+            <a:r>
+              <a:rPr sz="2000" b="0" i="0">
+                <a:solidFill>
+                  <a:srgbClr val="333333"/>
+                </a:solidFill>
+                <a:latin typeface="Calibri"/>
+              </a:rPr>
+              <a:t>–   Su vocabulario tiene cinco palabras.</a:t>
+            </a:r>
+          </a:p>
+          <a:p>
+            <a:pPr>
+              <a:spcAft>
+                <a:spcPts val="800"/>
+              </a:spcAft>
+            </a:pPr>
+            <a:r>
+              <a:rPr sz="2000" b="0" i="0">
+                <a:solidFill>
+                  <a:srgbClr val="333333"/>
+                </a:solidFill>
+                <a:latin typeface="Calibri"/>
+              </a:rPr>
+              <a:t>–   Un workflow es un archivo YAML en la carpeta.github/workflows; el nombre es libre y ci.yml es la convencion.</a:t>
+            </a:r>
+          </a:p>
+          <a:p>
+            <a:pPr>
+              <a:spcAft>
+                <a:spcPts val="800"/>
+              </a:spcAft>
+            </a:pPr>
+            <a:r>
+              <a:rPr sz="2000" b="0" i="0">
+                <a:solidFill>
+                  <a:srgbClr val="333333"/>
+                </a:solidFill>
+                <a:latin typeface="Calibri"/>
+              </a:rPr>
+              <a:t>–   El evento o disparador declara cuando corre: on push para cada subida, on pull_request para cada propuesta de cambio, workflow_dispatch para un boton manual, schedule para una hora fija.</a:t>
+            </a:r>
+          </a:p>
+          <a:p>
+            <a:pPr>
+              <a:spcAft>
+                <a:spcPts val="800"/>
+              </a:spcAft>
+            </a:pPr>
+            <a:r>
+              <a:rPr sz="2000" b="0" i="0">
+                <a:solidFill>
+                  <a:srgbClr val="333333"/>
+                </a:solidFill>
+                <a:latin typeface="Calibri"/>
+              </a:rPr>
+              <a:t>–   Un job es un conjunto de pasos que corre en un runner, una maquina virtual limpia que se crea para esa ejecucion y se destruye al terminar.</a:t>
+            </a:r>
+          </a:p>
+          <a:p>
+            <a:pPr>
+              <a:spcAft>
+                <a:spcPts val="800"/>
+              </a:spcAft>
+            </a:pPr>
+            <a:r>
+              <a:rPr sz="2000" b="0" i="0">
+                <a:solidFill>
+                  <a:srgbClr val="333333"/>
+                </a:solidFill>
+                <a:latin typeface="Calibri"/>
+              </a:rPr>
+              <a:t>–   Un step es un comando o el uso de una action, unidad reutilizable publicada por otros.</a:t>
+            </a:r>
+          </a:p>
+        </p:txBody>
+      </p:sp>
+      <p:sp>
+        <p:nvSpPr>
+          <p:cNvPr id="6" name="TextBox 5"/>
           <p:cNvSpPr txBox="1"/>
           <p:nvPr/>
         </p:nvSpPr>
@@ -4395,13 +4025,13 @@
         <p:spPr>
           <a:xfrm>
             <a:off x="0" y="0"/>
-            <a:ext cx="12191695" cy="164592"/>
+            <a:ext cx="12191695" cy="960120"/>
           </a:xfrm>
           <a:prstGeom prst="rect">
             <a:avLst/>
           </a:prstGeom>
           <a:solidFill>
-            <a:srgbClr val="269CCB"/>
+            <a:srgbClr val="095292"/>
           </a:solidFill>
           <a:ln>
             <a:noFill/>
@@ -4429,30 +4059,49 @@
           </a:p>
         </p:txBody>
       </p:sp>
-      <p:pic>
-        <p:nvPicPr>
-          <p:cNvPr id="3" name="Picture 2" descr="logo_uniajc_color.png"/>
-          <p:cNvPicPr>
-            <a:picLocks noChangeAspect="1"/>
-          </p:cNvPicPr>
-          <p:nvPr/>
-        </p:nvPicPr>
-        <p:blipFill>
-          <a:blip r:embed="rId2"/>
-          <a:stretch>
-            <a:fillRect/>
-          </a:stretch>
-        </p:blipFill>
-        <p:spPr>
-          <a:xfrm>
-            <a:off x="10271455" y="5998464"/>
-            <a:ext cx="1463040" cy="643233"/>
-          </a:xfrm>
-          <a:prstGeom prst="rect">
-            <a:avLst/>
-          </a:prstGeom>
-        </p:spPr>
-      </p:pic>
+      <p:sp>
+        <p:nvSpPr>
+          <p:cNvPr id="3" name="Rectangle 2"/>
+          <p:cNvSpPr/>
+          <p:nvPr/>
+        </p:nvSpPr>
+        <p:spPr>
+          <a:xfrm>
+            <a:off x="0" y="960120"/>
+            <a:ext cx="12191695" cy="41148"/>
+          </a:xfrm>
+          <a:prstGeom prst="rect">
+            <a:avLst/>
+          </a:prstGeom>
+          <a:solidFill>
+            <a:srgbClr val="FFD000"/>
+          </a:solidFill>
+          <a:ln>
+            <a:noFill/>
+          </a:ln>
+        </p:spPr>
+        <p:style>
+          <a:lnRef idx="1">
+            <a:schemeClr val="accent1"/>
+          </a:lnRef>
+          <a:fillRef idx="3">
+            <a:schemeClr val="accent1"/>
+          </a:fillRef>
+          <a:effectRef idx="2">
+            <a:schemeClr val="accent1"/>
+          </a:effectRef>
+          <a:fontRef idx="minor">
+            <a:schemeClr val="lt1"/>
+          </a:fontRef>
+        </p:style>
+        <p:txBody>
+          <a:bodyPr rtlCol="0" anchor="ctr"/>
+          <a:lstStyle/>
+          <a:p>
+            <a:pPr algn="ctr"/>
+          </a:p>
+        </p:txBody>
+      </p:sp>
       <p:sp>
         <p:nvSpPr>
           <p:cNvPr id="4" name="TextBox 3"/>
@@ -4461,41 +4110,8 @@
         </p:nvSpPr>
         <p:spPr>
           <a:xfrm>
-            <a:off x="457200" y="1737360"/>
-            <a:ext cx="11277295" cy="1097280"/>
-          </a:xfrm>
-          <a:prstGeom prst="rect">
-            <a:avLst/>
-          </a:prstGeom>
-          <a:noFill/>
-        </p:spPr>
-        <p:txBody>
-          <a:bodyPr wrap="square" anchor="ctr"/>
-          <a:lstStyle/>
-          <a:p>
-            <a:pPr algn="ctr"/>
-            <a:r>
-              <a:rPr sz="3400" b="1" i="0">
-                <a:solidFill>
-                  <a:srgbClr val="095292"/>
-                </a:solidFill>
-                <a:latin typeface="Calibri"/>
-              </a:rPr>
-              <a:t>Clase 8 · PI en movimiento</a:t>
-            </a:r>
-          </a:p>
-        </p:txBody>
-      </p:sp>
-      <p:sp>
-        <p:nvSpPr>
-          <p:cNvPr id="5" name="TextBox 4"/>
-          <p:cNvSpPr txBox="1"/>
-          <p:nvPr/>
-        </p:nvSpPr>
-        <p:spPr>
-          <a:xfrm>
-            <a:off x="457200" y="3017520"/>
-            <a:ext cx="11277295" cy="1645920"/>
+            <a:off x="457200" y="164592"/>
+            <a:ext cx="11277295" cy="502920"/>
           </a:xfrm>
           <a:prstGeom prst="rect">
             <a:avLst/>
@@ -4508,65 +4124,28 @@
           </a:bodyPr>
           <a:lstStyle/>
           <a:p>
-            <a:pPr algn="ctr">
-              <a:spcAft>
-                <a:spcPts val="600"/>
-              </a:spcAft>
-            </a:pPr>
-            <a:r>
-              <a:rPr sz="1600" b="0" i="0">
-                <a:solidFill>
-                  <a:srgbClr val="333333"/>
-                </a:solidFill>
-                <a:latin typeface="Calibri"/>
-              </a:rPr>
-              <a:t>Workflow Actions (build/test/simulate) + métricas de monitoreo del PI</a:t>
-            </a:r>
-          </a:p>
-          <a:p>
-            <a:pPr algn="ctr">
-              <a:spcAft>
-                <a:spcPts val="600"/>
-              </a:spcAft>
-            </a:pPr>
-            <a:r>
-              <a:rPr sz="1600" b="0" i="0">
-                <a:solidFill>
-                  <a:srgbClr val="333333"/>
-                </a:solidFill>
-                <a:latin typeface="Calibri"/>
-              </a:rPr>
-              <a:t>Evidencia: .github/workflows/ci.yml + sección Monitoreo/CI del informe</a:t>
-            </a:r>
-          </a:p>
-          <a:p>
-            <a:pPr algn="ctr">
-              <a:spcAft>
-                <a:spcPts val="600"/>
-              </a:spcAft>
-            </a:pPr>
-            <a:r>
-              <a:rPr sz="1600" b="0" i="0">
-                <a:solidFill>
-                  <a:srgbClr val="333333"/>
-                </a:solidFill>
-                <a:latin typeface="Calibri"/>
-              </a:rPr>
-              <a:t>Siguiente paso = siguiente hito del PI CloudLite</a:t>
-            </a:r>
-          </a:p>
-        </p:txBody>
-      </p:sp>
-      <p:sp>
-        <p:nvSpPr>
-          <p:cNvPr id="6" name="TextBox 5"/>
+            <a:r>
+              <a:rPr sz="2600" b="1" i="0">
+                <a:solidFill>
+                  <a:srgbClr val="FFFFFF"/>
+                </a:solidFill>
+                <a:latin typeface="Calibri"/>
+              </a:rPr>
+              <a:t>GitHub Actions en cinco palabras (2/2)</a:t>
+            </a:r>
+          </a:p>
+        </p:txBody>
+      </p:sp>
+      <p:sp>
+        <p:nvSpPr>
+          <p:cNvPr id="5" name="TextBox 4"/>
           <p:cNvSpPr txBox="1"/>
           <p:nvPr/>
         </p:nvSpPr>
         <p:spPr>
           <a:xfrm>
-            <a:off x="457200" y="4754880"/>
-            <a:ext cx="11277295" cy="640080"/>
+            <a:off x="457200" y="1170432"/>
+            <a:ext cx="11277295" cy="5230368"/>
           </a:xfrm>
           <a:prstGeom prst="rect">
             <a:avLst/>
@@ -4579,15 +4158,2106 @@
           </a:bodyPr>
           <a:lstStyle/>
           <a:p>
+            <a:pPr>
+              <a:spcAft>
+                <a:spcPts val="800"/>
+              </a:spcAft>
+            </a:pPr>
+            <a:r>
+              <a:rPr sz="2000" b="0" i="0">
+                <a:solidFill>
+                  <a:srgbClr val="333333"/>
+                </a:solidFill>
+                <a:latin typeface="Calibri"/>
+              </a:rPr>
+              <a:t>–   Que el runner sea limpio y efimero es el punto pedagogico central: demuestra que la construccion no depende de nada instalado a mano en el portatil de nadie.</a:t>
+            </a:r>
+          </a:p>
+          <a:p>
+            <a:pPr>
+              <a:spcAft>
+                <a:spcPts val="800"/>
+              </a:spcAft>
+            </a:pPr>
+            <a:r>
+              <a:rPr sz="2000" b="0" i="0">
+                <a:solidFill>
+                  <a:srgbClr val="333333"/>
+                </a:solidFill>
+                <a:latin typeface="Calibri"/>
+              </a:rPr>
+              <a:t>–   Advertencias: el YAML se indenta con espacios y nunca con tabulaciones, causa numero uno de un pipeline que no arranca</a:t>
+            </a:r>
+          </a:p>
+          <a:p>
+            <a:pPr>
+              <a:spcAft>
+                <a:spcPts val="800"/>
+              </a:spcAft>
+            </a:pPr>
+            <a:r>
+              <a:rPr sz="2000" b="0" i="0">
+                <a:solidFill>
+                  <a:srgbClr val="333333"/>
+                </a:solidFill>
+                <a:latin typeface="Calibri"/>
+              </a:rPr>
+              <a:t>–   Y en el nivel gratuito los repositorios publicos tienen minutos ilimitados mientras los privados tienen una cuota del orden de 2000 minutos al mes, cifra que conviene confirmar en la pagina de facturacion porque el proveedor la cambia.</a:t>
+            </a:r>
+          </a:p>
+        </p:txBody>
+      </p:sp>
+      <p:sp>
+        <p:nvSpPr>
+          <p:cNvPr id="6" name="TextBox 5"/>
+          <p:cNvSpPr txBox="1"/>
+          <p:nvPr/>
+        </p:nvSpPr>
+        <p:spPr>
+          <a:xfrm>
+            <a:off x="11185855" y="6473952"/>
+            <a:ext cx="640080" cy="274320"/>
+          </a:xfrm>
+          <a:prstGeom prst="rect">
+            <a:avLst/>
+          </a:prstGeom>
+          <a:noFill/>
+        </p:spPr>
+        <p:txBody>
+          <a:bodyPr wrap="square">
+            <a:spAutoFit/>
+          </a:bodyPr>
+          <a:lstStyle/>
+          <a:p>
+            <a:pPr algn="r"/>
+            <a:r>
+              <a:rPr sz="1100" b="0" i="0">
+                <a:solidFill>
+                  <a:srgbClr val="666666"/>
+                </a:solidFill>
+                <a:latin typeface="Calibri"/>
+              </a:rPr>
+              <a:t>12</a:t>
+            </a:r>
+          </a:p>
+        </p:txBody>
+      </p:sp>
+    </p:spTree>
+  </p:cSld>
+  <p:clrMapOvr>
+    <a:masterClrMapping/>
+  </p:clrMapOvr>
+</p:sld>
+</file>
+
+<file path=ppt/slides/slide13.xml><?xml version="1.0" encoding="utf-8"?>
+<p:sld xmlns:a="http://schemas.openxmlformats.org/drawingml/2006/main" xmlns:p="http://schemas.openxmlformats.org/presentationml/2006/main" xmlns:r="http://schemas.openxmlformats.org/officeDocument/2006/relationships">
+  <p:cSld>
+    <p:bg>
+      <p:bgPr>
+        <a:solidFill>
+          <a:srgbClr val="FFFFFF"/>
+        </a:solidFill>
+        <a:effectLst/>
+      </p:bgPr>
+    </p:bg>
+    <p:spTree>
+      <p:nvGrpSpPr>
+        <p:cNvPr id="1" name=""/>
+        <p:cNvGrpSpPr/>
+        <p:nvPr/>
+      </p:nvGrpSpPr>
+      <p:grpSpPr/>
+      <p:sp>
+        <p:nvSpPr>
+          <p:cNvPr id="2" name="Rectangle 1"/>
+          <p:cNvSpPr/>
+          <p:nvPr/>
+        </p:nvSpPr>
+        <p:spPr>
+          <a:xfrm>
+            <a:off x="0" y="0"/>
+            <a:ext cx="12191695" cy="960120"/>
+          </a:xfrm>
+          <a:prstGeom prst="rect">
+            <a:avLst/>
+          </a:prstGeom>
+          <a:solidFill>
+            <a:srgbClr val="095292"/>
+          </a:solidFill>
+          <a:ln>
+            <a:noFill/>
+          </a:ln>
+        </p:spPr>
+        <p:style>
+          <a:lnRef idx="1">
+            <a:schemeClr val="accent1"/>
+          </a:lnRef>
+          <a:fillRef idx="3">
+            <a:schemeClr val="accent1"/>
+          </a:fillRef>
+          <a:effectRef idx="2">
+            <a:schemeClr val="accent1"/>
+          </a:effectRef>
+          <a:fontRef idx="minor">
+            <a:schemeClr val="lt1"/>
+          </a:fontRef>
+        </p:style>
+        <p:txBody>
+          <a:bodyPr rtlCol="0" anchor="ctr"/>
+          <a:lstStyle/>
+          <a:p>
             <a:pPr algn="ctr"/>
-            <a:r>
-              <a:rPr sz="2000" b="1" i="0">
-                <a:solidFill>
-                  <a:srgbClr val="269CCB"/>
-                </a:solidFill>
-                <a:latin typeface="Calibri"/>
-              </a:rPr>
-              <a:t>Teoría al servicio del proyecto</a:t>
+          </a:p>
+        </p:txBody>
+      </p:sp>
+      <p:sp>
+        <p:nvSpPr>
+          <p:cNvPr id="3" name="Rectangle 2"/>
+          <p:cNvSpPr/>
+          <p:nvPr/>
+        </p:nvSpPr>
+        <p:spPr>
+          <a:xfrm>
+            <a:off x="0" y="960120"/>
+            <a:ext cx="12191695" cy="41148"/>
+          </a:xfrm>
+          <a:prstGeom prst="rect">
+            <a:avLst/>
+          </a:prstGeom>
+          <a:solidFill>
+            <a:srgbClr val="FFD000"/>
+          </a:solidFill>
+          <a:ln>
+            <a:noFill/>
+          </a:ln>
+        </p:spPr>
+        <p:style>
+          <a:lnRef idx="1">
+            <a:schemeClr val="accent1"/>
+          </a:lnRef>
+          <a:fillRef idx="3">
+            <a:schemeClr val="accent1"/>
+          </a:fillRef>
+          <a:effectRef idx="2">
+            <a:schemeClr val="accent1"/>
+          </a:effectRef>
+          <a:fontRef idx="minor">
+            <a:schemeClr val="lt1"/>
+          </a:fontRef>
+        </p:style>
+        <p:txBody>
+          <a:bodyPr rtlCol="0" anchor="ctr"/>
+          <a:lstStyle/>
+          <a:p>
+            <a:pPr algn="ctr"/>
+          </a:p>
+        </p:txBody>
+      </p:sp>
+      <p:sp>
+        <p:nvSpPr>
+          <p:cNvPr id="4" name="TextBox 3"/>
+          <p:cNvSpPr txBox="1"/>
+          <p:nvPr/>
+        </p:nvSpPr>
+        <p:spPr>
+          <a:xfrm>
+            <a:off x="457200" y="164592"/>
+            <a:ext cx="11277295" cy="502920"/>
+          </a:xfrm>
+          <a:prstGeom prst="rect">
+            <a:avLst/>
+          </a:prstGeom>
+          <a:noFill/>
+        </p:spPr>
+        <p:txBody>
+          <a:bodyPr wrap="square">
+            <a:spAutoFit/>
+          </a:bodyPr>
+          <a:lstStyle/>
+          <a:p>
+            <a:r>
+              <a:rPr sz="2600" b="1" i="0">
+                <a:solidFill>
+                  <a:srgbClr val="FFFFFF"/>
+                </a:solidFill>
+                <a:latin typeface="Calibri"/>
+              </a:rPr>
+              <a:t>Los tres bloques que la pregunta 7 califica, y el orden de los pasos (1/2)</a:t>
+            </a:r>
+          </a:p>
+        </p:txBody>
+      </p:sp>
+      <p:sp>
+        <p:nvSpPr>
+          <p:cNvPr id="5" name="TextBox 4"/>
+          <p:cNvSpPr txBox="1"/>
+          <p:nvPr/>
+        </p:nvSpPr>
+        <p:spPr>
+          <a:xfrm>
+            <a:off x="457200" y="1170432"/>
+            <a:ext cx="11277295" cy="5230368"/>
+          </a:xfrm>
+          <a:prstGeom prst="rect">
+            <a:avLst/>
+          </a:prstGeom>
+          <a:noFill/>
+        </p:spPr>
+        <p:txBody>
+          <a:bodyPr wrap="square">
+            <a:spAutoFit/>
+          </a:bodyPr>
+          <a:lstStyle/>
+          <a:p>
+            <a:pPr>
+              <a:spcAft>
+                <a:spcPts val="800"/>
+              </a:spcAft>
+            </a:pPr>
+            <a:r>
+              <a:rPr sz="2000" b="0" i="0">
+                <a:solidFill>
+                  <a:srgbClr val="333333"/>
+                </a:solidFill>
+                <a:latin typeface="Calibri"/>
+              </a:rPr>
+              <a:t>–   La pregunta 7 no pide «un workflow»: pide tres bloques nombrados y tres pasos en orden, y el reparto de sus 10 puntos hay que dictarlo tal cual porque decide como se estudia.</a:t>
+            </a:r>
+          </a:p>
+          <a:p>
+            <a:pPr>
+              <a:spcAft>
+                <a:spcPts val="800"/>
+              </a:spcAft>
+            </a:pPr>
+            <a:r>
+              <a:rPr sz="2000" b="0" i="0">
+                <a:solidFill>
+                  <a:srgbClr val="333333"/>
+                </a:solidFill>
+                <a:latin typeface="Calibri"/>
+              </a:rPr>
+              <a:t>–   Dos puntos son los DISPARADORES, es decir la clave on, y basta con on push y pull_request bien escritos.</a:t>
+            </a:r>
+          </a:p>
+          <a:p>
+            <a:pPr>
+              <a:spcAft>
+                <a:spcPts val="800"/>
+              </a:spcAft>
+            </a:pPr>
+            <a:r>
+              <a:rPr sz="2000" b="0" i="0">
+                <a:solidFill>
+                  <a:srgbClr val="333333"/>
+                </a:solidFill>
+                <a:latin typeface="Calibri"/>
+              </a:rPr>
+              <a:t>–   Un punto y medio es el ENTORNO de ejecucion, la clave runs-on, tipicamente ubuntu-latest; es el bloque que el estudiante omite mas y el mas facil de recuperar.</a:t>
+            </a:r>
+          </a:p>
+          <a:p>
+            <a:pPr>
+              <a:spcAft>
+                <a:spcPts val="800"/>
+              </a:spcAft>
+            </a:pPr>
+            <a:r>
+              <a:rPr sz="2000" b="0" i="0">
+                <a:solidFill>
+                  <a:srgbClr val="333333"/>
+                </a:solidFill>
+                <a:latin typeface="Calibri"/>
+              </a:rPr>
+              <a:t>–   Cuatro puntos, casi la mitad, son los tres PASOS presentes y en ORDEN: construccion, prueba y despliegue simulado.</a:t>
+            </a:r>
+          </a:p>
+          <a:p>
+            <a:pPr>
+              <a:spcAft>
+                <a:spcPts val="800"/>
+              </a:spcAft>
+            </a:pPr>
+            <a:r>
+              <a:rPr sz="2000" b="0" i="0">
+                <a:solidFill>
+                  <a:srgbClr val="333333"/>
+                </a:solidFill>
+                <a:latin typeface="Calibri"/>
+              </a:rPr>
+              <a:t>–   El orden no es capricho ni estetica: probar antes de construir no prueba el artefacto que se va a entregar, y desplegar antes de probar es exactamente lo que la integracion continua existe para impedir.</a:t>
+            </a:r>
+          </a:p>
+        </p:txBody>
+      </p:sp>
+      <p:sp>
+        <p:nvSpPr>
+          <p:cNvPr id="6" name="TextBox 5"/>
+          <p:cNvSpPr txBox="1"/>
+          <p:nvPr/>
+        </p:nvSpPr>
+        <p:spPr>
+          <a:xfrm>
+            <a:off x="11185855" y="6473952"/>
+            <a:ext cx="640080" cy="274320"/>
+          </a:xfrm>
+          <a:prstGeom prst="rect">
+            <a:avLst/>
+          </a:prstGeom>
+          <a:noFill/>
+        </p:spPr>
+        <p:txBody>
+          <a:bodyPr wrap="square">
+            <a:spAutoFit/>
+          </a:bodyPr>
+          <a:lstStyle/>
+          <a:p>
+            <a:pPr algn="r"/>
+            <a:r>
+              <a:rPr sz="1100" b="0" i="0">
+                <a:solidFill>
+                  <a:srgbClr val="666666"/>
+                </a:solidFill>
+                <a:latin typeface="Calibri"/>
+              </a:rPr>
+              <a:t>13</a:t>
+            </a:r>
+          </a:p>
+        </p:txBody>
+      </p:sp>
+    </p:spTree>
+  </p:cSld>
+  <p:clrMapOvr>
+    <a:masterClrMapping/>
+  </p:clrMapOvr>
+</p:sld>
+</file>
+
+<file path=ppt/slides/slide14.xml><?xml version="1.0" encoding="utf-8"?>
+<p:sld xmlns:a="http://schemas.openxmlformats.org/drawingml/2006/main" xmlns:p="http://schemas.openxmlformats.org/presentationml/2006/main" xmlns:r="http://schemas.openxmlformats.org/officeDocument/2006/relationships">
+  <p:cSld>
+    <p:bg>
+      <p:bgPr>
+        <a:solidFill>
+          <a:srgbClr val="FFFFFF"/>
+        </a:solidFill>
+        <a:effectLst/>
+      </p:bgPr>
+    </p:bg>
+    <p:spTree>
+      <p:nvGrpSpPr>
+        <p:cNvPr id="1" name=""/>
+        <p:cNvGrpSpPr/>
+        <p:nvPr/>
+      </p:nvGrpSpPr>
+      <p:grpSpPr/>
+      <p:sp>
+        <p:nvSpPr>
+          <p:cNvPr id="2" name="Rectangle 1"/>
+          <p:cNvSpPr/>
+          <p:nvPr/>
+        </p:nvSpPr>
+        <p:spPr>
+          <a:xfrm>
+            <a:off x="0" y="0"/>
+            <a:ext cx="12191695" cy="960120"/>
+          </a:xfrm>
+          <a:prstGeom prst="rect">
+            <a:avLst/>
+          </a:prstGeom>
+          <a:solidFill>
+            <a:srgbClr val="095292"/>
+          </a:solidFill>
+          <a:ln>
+            <a:noFill/>
+          </a:ln>
+        </p:spPr>
+        <p:style>
+          <a:lnRef idx="1">
+            <a:schemeClr val="accent1"/>
+          </a:lnRef>
+          <a:fillRef idx="3">
+            <a:schemeClr val="accent1"/>
+          </a:fillRef>
+          <a:effectRef idx="2">
+            <a:schemeClr val="accent1"/>
+          </a:effectRef>
+          <a:fontRef idx="minor">
+            <a:schemeClr val="lt1"/>
+          </a:fontRef>
+        </p:style>
+        <p:txBody>
+          <a:bodyPr rtlCol="0" anchor="ctr"/>
+          <a:lstStyle/>
+          <a:p>
+            <a:pPr algn="ctr"/>
+          </a:p>
+        </p:txBody>
+      </p:sp>
+      <p:sp>
+        <p:nvSpPr>
+          <p:cNvPr id="3" name="Rectangle 2"/>
+          <p:cNvSpPr/>
+          <p:nvPr/>
+        </p:nvSpPr>
+        <p:spPr>
+          <a:xfrm>
+            <a:off x="0" y="960120"/>
+            <a:ext cx="12191695" cy="41148"/>
+          </a:xfrm>
+          <a:prstGeom prst="rect">
+            <a:avLst/>
+          </a:prstGeom>
+          <a:solidFill>
+            <a:srgbClr val="FFD000"/>
+          </a:solidFill>
+          <a:ln>
+            <a:noFill/>
+          </a:ln>
+        </p:spPr>
+        <p:style>
+          <a:lnRef idx="1">
+            <a:schemeClr val="accent1"/>
+          </a:lnRef>
+          <a:fillRef idx="3">
+            <a:schemeClr val="accent1"/>
+          </a:fillRef>
+          <a:effectRef idx="2">
+            <a:schemeClr val="accent1"/>
+          </a:effectRef>
+          <a:fontRef idx="minor">
+            <a:schemeClr val="lt1"/>
+          </a:fontRef>
+        </p:style>
+        <p:txBody>
+          <a:bodyPr rtlCol="0" anchor="ctr"/>
+          <a:lstStyle/>
+          <a:p>
+            <a:pPr algn="ctr"/>
+          </a:p>
+        </p:txBody>
+      </p:sp>
+      <p:sp>
+        <p:nvSpPr>
+          <p:cNvPr id="4" name="TextBox 3"/>
+          <p:cNvSpPr txBox="1"/>
+          <p:nvPr/>
+        </p:nvSpPr>
+        <p:spPr>
+          <a:xfrm>
+            <a:off x="457200" y="164592"/>
+            <a:ext cx="11277295" cy="502920"/>
+          </a:xfrm>
+          <a:prstGeom prst="rect">
+            <a:avLst/>
+          </a:prstGeom>
+          <a:noFill/>
+        </p:spPr>
+        <p:txBody>
+          <a:bodyPr wrap="square">
+            <a:spAutoFit/>
+          </a:bodyPr>
+          <a:lstStyle/>
+          <a:p>
+            <a:r>
+              <a:rPr sz="2600" b="1" i="0">
+                <a:solidFill>
+                  <a:srgbClr val="FFFFFF"/>
+                </a:solidFill>
+                <a:latin typeface="Calibri"/>
+              </a:rPr>
+              <a:t>Los tres bloques que la pregunta 7 califica, y el orden de los pasos (2/2)</a:t>
+            </a:r>
+          </a:p>
+        </p:txBody>
+      </p:sp>
+      <p:sp>
+        <p:nvSpPr>
+          <p:cNvPr id="5" name="TextBox 4"/>
+          <p:cNvSpPr txBox="1"/>
+          <p:nvPr/>
+        </p:nvSpPr>
+        <p:spPr>
+          <a:xfrm>
+            <a:off x="457200" y="1170432"/>
+            <a:ext cx="11277295" cy="5230368"/>
+          </a:xfrm>
+          <a:prstGeom prst="rect">
+            <a:avLst/>
+          </a:prstGeom>
+          <a:noFill/>
+        </p:spPr>
+        <p:txBody>
+          <a:bodyPr wrap="square">
+            <a:spAutoFit/>
+          </a:bodyPr>
+          <a:lstStyle/>
+          <a:p>
+            <a:pPr>
+              <a:spcAft>
+                <a:spcPts val="800"/>
+              </a:spcAft>
+            </a:pPr>
+            <a:r>
+              <a:rPr sz="2000" b="0" i="0">
+                <a:solidFill>
+                  <a:srgbClr val="333333"/>
+                </a:solidFill>
+                <a:latin typeface="Calibri"/>
+              </a:rPr>
+              <a:t>–   Un punto y medio adicional es que el paso de despliegue este ROTULADO como simulado y no prometa un despliegue real; con escribir «Despliegue SIMULADO (no despliega a ningun servidor)» en el nombre del paso se cumple.</a:t>
+            </a:r>
+          </a:p>
+          <a:p>
+            <a:pPr>
+              <a:spcAft>
+                <a:spcPts val="800"/>
+              </a:spcAft>
+            </a:pPr>
+            <a:r>
+              <a:rPr sz="2000" b="0" i="0">
+                <a:solidFill>
+                  <a:srgbClr val="333333"/>
+                </a:solidFill>
+                <a:latin typeface="Calibri"/>
+              </a:rPr>
+              <a:t>–   Y un punto es la coherencia con el Dockerfile del Corte 1: la misma imagen y el mismo puerto, es decir cloudlite-api con su etiqueta 0.1.0 y el 8080 del EXPOSE de la Clase 3.</a:t>
+            </a:r>
+          </a:p>
+          <a:p>
+            <a:pPr>
+              <a:spcAft>
+                <a:spcPts val="800"/>
+              </a:spcAft>
+            </a:pPr>
+            <a:r>
+              <a:rPr sz="2000" b="0" i="0">
+                <a:solidFill>
+                  <a:srgbClr val="333333"/>
+                </a:solidFill>
+                <a:latin typeface="Calibri"/>
+              </a:rPr>
+              <a:t>–   Falta la sancion, que conviene anunciar dos veces: la pregunta vale CERO completa si aparece un secreto escrito en claro dentro del YAML, sin importar lo bien que este el resto.</a:t>
+            </a:r>
+          </a:p>
+          <a:p>
+            <a:pPr>
+              <a:spcAft>
+                <a:spcPts val="800"/>
+              </a:spcAft>
+            </a:pPr>
+            <a:r>
+              <a:rPr sz="2000" b="0" i="0">
+                <a:solidFill>
+                  <a:srgbClr val="333333"/>
+                </a:solidFill>
+                <a:latin typeface="Calibri"/>
+              </a:rPr>
+              <a:t>–   Es la misma politica que el estudiante escribio en la pregunta 3 del Corte 2, y esta es la clase donde se comprueba si la cumple.</a:t>
+            </a:r>
+          </a:p>
+        </p:txBody>
+      </p:sp>
+      <p:sp>
+        <p:nvSpPr>
+          <p:cNvPr id="6" name="TextBox 5"/>
+          <p:cNvSpPr txBox="1"/>
+          <p:nvPr/>
+        </p:nvSpPr>
+        <p:spPr>
+          <a:xfrm>
+            <a:off x="11185855" y="6473952"/>
+            <a:ext cx="640080" cy="274320"/>
+          </a:xfrm>
+          <a:prstGeom prst="rect">
+            <a:avLst/>
+          </a:prstGeom>
+          <a:noFill/>
+        </p:spPr>
+        <p:txBody>
+          <a:bodyPr wrap="square">
+            <a:spAutoFit/>
+          </a:bodyPr>
+          <a:lstStyle/>
+          <a:p>
+            <a:pPr algn="r"/>
+            <a:r>
+              <a:rPr sz="1100" b="0" i="0">
+                <a:solidFill>
+                  <a:srgbClr val="666666"/>
+                </a:solidFill>
+                <a:latin typeface="Calibri"/>
+              </a:rPr>
+              <a:t>14</a:t>
+            </a:r>
+          </a:p>
+        </p:txBody>
+      </p:sp>
+    </p:spTree>
+  </p:cSld>
+  <p:clrMapOvr>
+    <a:masterClrMapping/>
+  </p:clrMapOvr>
+</p:sld>
+</file>
+
+<file path=ppt/slides/slide15.xml><?xml version="1.0" encoding="utf-8"?>
+<p:sld xmlns:a="http://schemas.openxmlformats.org/drawingml/2006/main" xmlns:p="http://schemas.openxmlformats.org/presentationml/2006/main" xmlns:r="http://schemas.openxmlformats.org/officeDocument/2006/relationships">
+  <p:cSld>
+    <p:bg>
+      <p:bgPr>
+        <a:solidFill>
+          <a:srgbClr val="FFFFFF"/>
+        </a:solidFill>
+        <a:effectLst/>
+      </p:bgPr>
+    </p:bg>
+    <p:spTree>
+      <p:nvGrpSpPr>
+        <p:cNvPr id="1" name=""/>
+        <p:cNvGrpSpPr/>
+        <p:nvPr/>
+      </p:nvGrpSpPr>
+      <p:grpSpPr/>
+      <p:sp>
+        <p:nvSpPr>
+          <p:cNvPr id="2" name="Rectangle 1"/>
+          <p:cNvSpPr/>
+          <p:nvPr/>
+        </p:nvSpPr>
+        <p:spPr>
+          <a:xfrm>
+            <a:off x="0" y="0"/>
+            <a:ext cx="12191695" cy="960120"/>
+          </a:xfrm>
+          <a:prstGeom prst="rect">
+            <a:avLst/>
+          </a:prstGeom>
+          <a:solidFill>
+            <a:srgbClr val="095292"/>
+          </a:solidFill>
+          <a:ln>
+            <a:noFill/>
+          </a:ln>
+        </p:spPr>
+        <p:style>
+          <a:lnRef idx="1">
+            <a:schemeClr val="accent1"/>
+          </a:lnRef>
+          <a:fillRef idx="3">
+            <a:schemeClr val="accent1"/>
+          </a:fillRef>
+          <a:effectRef idx="2">
+            <a:schemeClr val="accent1"/>
+          </a:effectRef>
+          <a:fontRef idx="minor">
+            <a:schemeClr val="lt1"/>
+          </a:fontRef>
+        </p:style>
+        <p:txBody>
+          <a:bodyPr rtlCol="0" anchor="ctr"/>
+          <a:lstStyle/>
+          <a:p>
+            <a:pPr algn="ctr"/>
+          </a:p>
+        </p:txBody>
+      </p:sp>
+      <p:sp>
+        <p:nvSpPr>
+          <p:cNvPr id="3" name="Rectangle 2"/>
+          <p:cNvSpPr/>
+          <p:nvPr/>
+        </p:nvSpPr>
+        <p:spPr>
+          <a:xfrm>
+            <a:off x="0" y="960120"/>
+            <a:ext cx="12191695" cy="41148"/>
+          </a:xfrm>
+          <a:prstGeom prst="rect">
+            <a:avLst/>
+          </a:prstGeom>
+          <a:solidFill>
+            <a:srgbClr val="FFD000"/>
+          </a:solidFill>
+          <a:ln>
+            <a:noFill/>
+          </a:ln>
+        </p:spPr>
+        <p:style>
+          <a:lnRef idx="1">
+            <a:schemeClr val="accent1"/>
+          </a:lnRef>
+          <a:fillRef idx="3">
+            <a:schemeClr val="accent1"/>
+          </a:fillRef>
+          <a:effectRef idx="2">
+            <a:schemeClr val="accent1"/>
+          </a:effectRef>
+          <a:fontRef idx="minor">
+            <a:schemeClr val="lt1"/>
+          </a:fontRef>
+        </p:style>
+        <p:txBody>
+          <a:bodyPr rtlCol="0" anchor="ctr"/>
+          <a:lstStyle/>
+          <a:p>
+            <a:pPr algn="ctr"/>
+          </a:p>
+        </p:txBody>
+      </p:sp>
+      <p:sp>
+        <p:nvSpPr>
+          <p:cNvPr id="4" name="TextBox 3"/>
+          <p:cNvSpPr txBox="1"/>
+          <p:nvPr/>
+        </p:nvSpPr>
+        <p:spPr>
+          <a:xfrm>
+            <a:off x="457200" y="164592"/>
+            <a:ext cx="11277295" cy="502920"/>
+          </a:xfrm>
+          <a:prstGeom prst="rect">
+            <a:avLst/>
+          </a:prstGeom>
+          <a:noFill/>
+        </p:spPr>
+        <p:txBody>
+          <a:bodyPr wrap="square">
+            <a:spAutoFit/>
+          </a:bodyPr>
+          <a:lstStyle/>
+          <a:p>
+            <a:r>
+              <a:rPr sz="2600" b="1" i="0">
+                <a:solidFill>
+                  <a:srgbClr val="FFFFFF"/>
+                </a:solidFill>
+                <a:latin typeface="Calibri"/>
+              </a:rPr>
+              <a:t>Monitorear y observar: la segunda mitad cambia de lado (1/2)</a:t>
+            </a:r>
+          </a:p>
+        </p:txBody>
+      </p:sp>
+      <p:sp>
+        <p:nvSpPr>
+          <p:cNvPr id="5" name="TextBox 4"/>
+          <p:cNvSpPr txBox="1"/>
+          <p:nvPr/>
+        </p:nvSpPr>
+        <p:spPr>
+          <a:xfrm>
+            <a:off x="457200" y="1170432"/>
+            <a:ext cx="11277295" cy="5230368"/>
+          </a:xfrm>
+          <a:prstGeom prst="rect">
+            <a:avLst/>
+          </a:prstGeom>
+          <a:noFill/>
+        </p:spPr>
+        <p:txBody>
+          <a:bodyPr wrap="square">
+            <a:spAutoFit/>
+          </a:bodyPr>
+          <a:lstStyle/>
+          <a:p>
+            <a:pPr>
+              <a:spcAft>
+                <a:spcPts val="800"/>
+              </a:spcAft>
+            </a:pPr>
+            <a:r>
+              <a:rPr sz="2000" b="0" i="0">
+                <a:solidFill>
+                  <a:srgbClr val="333333"/>
+                </a:solidFill>
+                <a:latin typeface="Calibri"/>
+              </a:rPr>
+              <a:t>–   La segunda mitad de la clase cambia de lado: ya no se trata de validar antes, sino de saber que pasa despues.</a:t>
+            </a:r>
+          </a:p>
+          <a:p>
+            <a:pPr>
+              <a:spcAft>
+                <a:spcPts val="800"/>
+              </a:spcAft>
+            </a:pPr>
+            <a:r>
+              <a:rPr sz="2000" b="0" i="0">
+                <a:solidFill>
+                  <a:srgbClr val="333333"/>
+                </a:solidFill>
+                <a:latin typeface="Calibri"/>
+              </a:rPr>
+              <a:t>–   Monitorear es vigilar indicadores decididos de antemano; observabilidad es la capacidad de responder preguntas nuevas sobre el sistema a partir de lo que el sistema emite, sin agregar codigo por cada duda.</a:t>
+            </a:r>
+          </a:p>
+          <a:p>
+            <a:pPr>
+              <a:spcAft>
+                <a:spcPts val="800"/>
+              </a:spcAft>
+            </a:pPr>
+            <a:r>
+              <a:rPr sz="2000" b="0" i="0">
+                <a:solidFill>
+                  <a:srgbClr val="333333"/>
+                </a:solidFill>
+                <a:latin typeface="Calibri"/>
+              </a:rPr>
+              <a:t>–   Se apoya en tres tipos de senal.</a:t>
+            </a:r>
+          </a:p>
+          <a:p>
+            <a:pPr>
+              <a:spcAft>
+                <a:spcPts val="800"/>
+              </a:spcAft>
+            </a:pPr>
+            <a:r>
+              <a:rPr sz="2000" b="0" i="0">
+                <a:solidFill>
+                  <a:srgbClr val="333333"/>
+                </a:solidFill>
+                <a:latin typeface="Calibri"/>
+              </a:rPr>
+              <a:t>–   Las metricas son numeros medidos en el tiempo, baratas porque se agregan, y detectan que algo cambio.</a:t>
+            </a:r>
+          </a:p>
+          <a:p>
+            <a:pPr>
+              <a:spcAft>
+                <a:spcPts val="800"/>
+              </a:spcAft>
+            </a:pPr>
+            <a:r>
+              <a:rPr sz="2000" b="0" i="0">
+                <a:solidFill>
+                  <a:srgbClr val="333333"/>
+                </a:solidFill>
+                <a:latin typeface="Calibri"/>
+              </a:rPr>
+              <a:t>–   Los logs, o registros, son eventos discretos con contexto, caros en volumen, y explican por que cambio.</a:t>
+            </a:r>
+          </a:p>
+          <a:p>
+            <a:pPr>
+              <a:spcAft>
+                <a:spcPts val="800"/>
+              </a:spcAft>
+            </a:pPr>
+            <a:r>
+              <a:rPr sz="2000" b="0" i="0">
+                <a:solidFill>
+                  <a:srgbClr val="333333"/>
+                </a:solidFill>
+                <a:latin typeface="Calibri"/>
+              </a:rPr>
+              <a:t>–   Las trazas siguen el recorrido de una sola peticion por varios servicios y son necesarias porque la Clase 4 convirtio el sistema en distribuido: cuando la peticion pasa por la API y por el servicio de notificaciones, saber cual de los dos tardo es imposible con metricas agregadas.</a:t>
+            </a:r>
+          </a:p>
+        </p:txBody>
+      </p:sp>
+      <p:sp>
+        <p:nvSpPr>
+          <p:cNvPr id="6" name="TextBox 5"/>
+          <p:cNvSpPr txBox="1"/>
+          <p:nvPr/>
+        </p:nvSpPr>
+        <p:spPr>
+          <a:xfrm>
+            <a:off x="11185855" y="6473952"/>
+            <a:ext cx="640080" cy="274320"/>
+          </a:xfrm>
+          <a:prstGeom prst="rect">
+            <a:avLst/>
+          </a:prstGeom>
+          <a:noFill/>
+        </p:spPr>
+        <p:txBody>
+          <a:bodyPr wrap="square">
+            <a:spAutoFit/>
+          </a:bodyPr>
+          <a:lstStyle/>
+          <a:p>
+            <a:pPr algn="r"/>
+            <a:r>
+              <a:rPr sz="1100" b="0" i="0">
+                <a:solidFill>
+                  <a:srgbClr val="666666"/>
+                </a:solidFill>
+                <a:latin typeface="Calibri"/>
+              </a:rPr>
+              <a:t>15</a:t>
+            </a:r>
+          </a:p>
+        </p:txBody>
+      </p:sp>
+    </p:spTree>
+  </p:cSld>
+  <p:clrMapOvr>
+    <a:masterClrMapping/>
+  </p:clrMapOvr>
+</p:sld>
+</file>
+
+<file path=ppt/slides/slide16.xml><?xml version="1.0" encoding="utf-8"?>
+<p:sld xmlns:a="http://schemas.openxmlformats.org/drawingml/2006/main" xmlns:p="http://schemas.openxmlformats.org/presentationml/2006/main" xmlns:r="http://schemas.openxmlformats.org/officeDocument/2006/relationships">
+  <p:cSld>
+    <p:bg>
+      <p:bgPr>
+        <a:solidFill>
+          <a:srgbClr val="FFFFFF"/>
+        </a:solidFill>
+        <a:effectLst/>
+      </p:bgPr>
+    </p:bg>
+    <p:spTree>
+      <p:nvGrpSpPr>
+        <p:cNvPr id="1" name=""/>
+        <p:cNvGrpSpPr/>
+        <p:nvPr/>
+      </p:nvGrpSpPr>
+      <p:grpSpPr/>
+      <p:sp>
+        <p:nvSpPr>
+          <p:cNvPr id="2" name="Rectangle 1"/>
+          <p:cNvSpPr/>
+          <p:nvPr/>
+        </p:nvSpPr>
+        <p:spPr>
+          <a:xfrm>
+            <a:off x="0" y="0"/>
+            <a:ext cx="12191695" cy="960120"/>
+          </a:xfrm>
+          <a:prstGeom prst="rect">
+            <a:avLst/>
+          </a:prstGeom>
+          <a:solidFill>
+            <a:srgbClr val="095292"/>
+          </a:solidFill>
+          <a:ln>
+            <a:noFill/>
+          </a:ln>
+        </p:spPr>
+        <p:style>
+          <a:lnRef idx="1">
+            <a:schemeClr val="accent1"/>
+          </a:lnRef>
+          <a:fillRef idx="3">
+            <a:schemeClr val="accent1"/>
+          </a:fillRef>
+          <a:effectRef idx="2">
+            <a:schemeClr val="accent1"/>
+          </a:effectRef>
+          <a:fontRef idx="minor">
+            <a:schemeClr val="lt1"/>
+          </a:fontRef>
+        </p:style>
+        <p:txBody>
+          <a:bodyPr rtlCol="0" anchor="ctr"/>
+          <a:lstStyle/>
+          <a:p>
+            <a:pPr algn="ctr"/>
+          </a:p>
+        </p:txBody>
+      </p:sp>
+      <p:sp>
+        <p:nvSpPr>
+          <p:cNvPr id="3" name="Rectangle 2"/>
+          <p:cNvSpPr/>
+          <p:nvPr/>
+        </p:nvSpPr>
+        <p:spPr>
+          <a:xfrm>
+            <a:off x="0" y="960120"/>
+            <a:ext cx="12191695" cy="41148"/>
+          </a:xfrm>
+          <a:prstGeom prst="rect">
+            <a:avLst/>
+          </a:prstGeom>
+          <a:solidFill>
+            <a:srgbClr val="FFD000"/>
+          </a:solidFill>
+          <a:ln>
+            <a:noFill/>
+          </a:ln>
+        </p:spPr>
+        <p:style>
+          <a:lnRef idx="1">
+            <a:schemeClr val="accent1"/>
+          </a:lnRef>
+          <a:fillRef idx="3">
+            <a:schemeClr val="accent1"/>
+          </a:fillRef>
+          <a:effectRef idx="2">
+            <a:schemeClr val="accent1"/>
+          </a:effectRef>
+          <a:fontRef idx="minor">
+            <a:schemeClr val="lt1"/>
+          </a:fontRef>
+        </p:style>
+        <p:txBody>
+          <a:bodyPr rtlCol="0" anchor="ctr"/>
+          <a:lstStyle/>
+          <a:p>
+            <a:pPr algn="ctr"/>
+          </a:p>
+        </p:txBody>
+      </p:sp>
+      <p:sp>
+        <p:nvSpPr>
+          <p:cNvPr id="4" name="TextBox 3"/>
+          <p:cNvSpPr txBox="1"/>
+          <p:nvPr/>
+        </p:nvSpPr>
+        <p:spPr>
+          <a:xfrm>
+            <a:off x="457200" y="164592"/>
+            <a:ext cx="11277295" cy="502920"/>
+          </a:xfrm>
+          <a:prstGeom prst="rect">
+            <a:avLst/>
+          </a:prstGeom>
+          <a:noFill/>
+        </p:spPr>
+        <p:txBody>
+          <a:bodyPr wrap="square">
+            <a:spAutoFit/>
+          </a:bodyPr>
+          <a:lstStyle/>
+          <a:p>
+            <a:r>
+              <a:rPr sz="2600" b="1" i="0">
+                <a:solidFill>
+                  <a:srgbClr val="FFFFFF"/>
+                </a:solidFill>
+                <a:latin typeface="Calibri"/>
+              </a:rPr>
+              <a:t>Monitorear y observar: la segunda mitad cambia de lado (2/2)</a:t>
+            </a:r>
+          </a:p>
+        </p:txBody>
+      </p:sp>
+      <p:sp>
+        <p:nvSpPr>
+          <p:cNvPr id="5" name="TextBox 4"/>
+          <p:cNvSpPr txBox="1"/>
+          <p:nvPr/>
+        </p:nvSpPr>
+        <p:spPr>
+          <a:xfrm>
+            <a:off x="457200" y="1170432"/>
+            <a:ext cx="11277295" cy="5230368"/>
+          </a:xfrm>
+          <a:prstGeom prst="rect">
+            <a:avLst/>
+          </a:prstGeom>
+          <a:noFill/>
+        </p:spPr>
+        <p:txBody>
+          <a:bodyPr wrap="square">
+            <a:spAutoFit/>
+          </a:bodyPr>
+          <a:lstStyle/>
+          <a:p>
+            <a:pPr>
+              <a:spcAft>
+                <a:spcPts val="800"/>
+              </a:spcAft>
+            </a:pPr>
+            <a:r>
+              <a:rPr sz="2000" b="0" i="0">
+                <a:solidFill>
+                  <a:srgbClr val="333333"/>
+                </a:solidFill>
+                <a:latin typeface="Calibri"/>
+              </a:rPr>
+              <a:t>–   La distincion entre metrica y registro no es teorica hoy: la pregunta 10 da un punto por que al menos una de las senales listadas sea un REGISTRO y no una metrica numerica, es decir algo que se escribe para poder reconstruir que paso despues.</a:t>
+            </a:r>
+          </a:p>
+          <a:p>
+            <a:pPr>
+              <a:spcAft>
+                <a:spcPts val="800"/>
+              </a:spcAft>
+            </a:pPr>
+            <a:r>
+              <a:rPr sz="2000" b="0" i="0">
+                <a:solidFill>
+                  <a:srgbClr val="333333"/>
+                </a:solidFill>
+                <a:latin typeface="Calibri"/>
+              </a:rPr>
+              <a:t>–   La practica minima documentable es el log estructurado: cada linea es un objeto con campos fijos como fecha, nivel, identificador de peticion, ruta, codigo de estado y duracion en milisegundos.</a:t>
+            </a:r>
+          </a:p>
+          <a:p>
+            <a:pPr>
+              <a:spcAft>
+                <a:spcPts val="800"/>
+              </a:spcAft>
+            </a:pPr>
+            <a:r>
+              <a:rPr sz="2000" b="0" i="0">
+                <a:solidFill>
+                  <a:srgbClr val="333333"/>
+                </a:solidFill>
+                <a:latin typeface="Calibri"/>
+              </a:rPr>
+              <a:t>–   Con ese identificador propagado entre servicios se reconstruye el recorrido: una traza pobre, pero real.</a:t>
+            </a:r>
+          </a:p>
+        </p:txBody>
+      </p:sp>
+      <p:sp>
+        <p:nvSpPr>
+          <p:cNvPr id="6" name="TextBox 5"/>
+          <p:cNvSpPr txBox="1"/>
+          <p:nvPr/>
+        </p:nvSpPr>
+        <p:spPr>
+          <a:xfrm>
+            <a:off x="11185855" y="6473952"/>
+            <a:ext cx="640080" cy="274320"/>
+          </a:xfrm>
+          <a:prstGeom prst="rect">
+            <a:avLst/>
+          </a:prstGeom>
+          <a:noFill/>
+        </p:spPr>
+        <p:txBody>
+          <a:bodyPr wrap="square">
+            <a:spAutoFit/>
+          </a:bodyPr>
+          <a:lstStyle/>
+          <a:p>
+            <a:pPr algn="r"/>
+            <a:r>
+              <a:rPr sz="1100" b="0" i="0">
+                <a:solidFill>
+                  <a:srgbClr val="666666"/>
+                </a:solidFill>
+                <a:latin typeface="Calibri"/>
+              </a:rPr>
+              <a:t>16</a:t>
+            </a:r>
+          </a:p>
+        </p:txBody>
+      </p:sp>
+    </p:spTree>
+  </p:cSld>
+  <p:clrMapOvr>
+    <a:masterClrMapping/>
+  </p:clrMapOvr>
+</p:sld>
+</file>
+
+<file path=ppt/slides/slide17.xml><?xml version="1.0" encoding="utf-8"?>
+<p:sld xmlns:a="http://schemas.openxmlformats.org/drawingml/2006/main" xmlns:p="http://schemas.openxmlformats.org/presentationml/2006/main" xmlns:r="http://schemas.openxmlformats.org/officeDocument/2006/relationships">
+  <p:cSld>
+    <p:bg>
+      <p:bgPr>
+        <a:solidFill>
+          <a:srgbClr val="FFFFFF"/>
+        </a:solidFill>
+        <a:effectLst/>
+      </p:bgPr>
+    </p:bg>
+    <p:spTree>
+      <p:nvGrpSpPr>
+        <p:cNvPr id="1" name=""/>
+        <p:cNvGrpSpPr/>
+        <p:nvPr/>
+      </p:nvGrpSpPr>
+      <p:grpSpPr/>
+      <p:sp>
+        <p:nvSpPr>
+          <p:cNvPr id="2" name="Rectangle 1"/>
+          <p:cNvSpPr/>
+          <p:nvPr/>
+        </p:nvSpPr>
+        <p:spPr>
+          <a:xfrm>
+            <a:off x="0" y="0"/>
+            <a:ext cx="12191695" cy="960120"/>
+          </a:xfrm>
+          <a:prstGeom prst="rect">
+            <a:avLst/>
+          </a:prstGeom>
+          <a:solidFill>
+            <a:srgbClr val="095292"/>
+          </a:solidFill>
+          <a:ln>
+            <a:noFill/>
+          </a:ln>
+        </p:spPr>
+        <p:style>
+          <a:lnRef idx="1">
+            <a:schemeClr val="accent1"/>
+          </a:lnRef>
+          <a:fillRef idx="3">
+            <a:schemeClr val="accent1"/>
+          </a:fillRef>
+          <a:effectRef idx="2">
+            <a:schemeClr val="accent1"/>
+          </a:effectRef>
+          <a:fontRef idx="minor">
+            <a:schemeClr val="lt1"/>
+          </a:fontRef>
+        </p:style>
+        <p:txBody>
+          <a:bodyPr rtlCol="0" anchor="ctr"/>
+          <a:lstStyle/>
+          <a:p>
+            <a:pPr algn="ctr"/>
+          </a:p>
+        </p:txBody>
+      </p:sp>
+      <p:sp>
+        <p:nvSpPr>
+          <p:cNvPr id="3" name="Rectangle 2"/>
+          <p:cNvSpPr/>
+          <p:nvPr/>
+        </p:nvSpPr>
+        <p:spPr>
+          <a:xfrm>
+            <a:off x="0" y="960120"/>
+            <a:ext cx="12191695" cy="41148"/>
+          </a:xfrm>
+          <a:prstGeom prst="rect">
+            <a:avLst/>
+          </a:prstGeom>
+          <a:solidFill>
+            <a:srgbClr val="FFD000"/>
+          </a:solidFill>
+          <a:ln>
+            <a:noFill/>
+          </a:ln>
+        </p:spPr>
+        <p:style>
+          <a:lnRef idx="1">
+            <a:schemeClr val="accent1"/>
+          </a:lnRef>
+          <a:fillRef idx="3">
+            <a:schemeClr val="accent1"/>
+          </a:fillRef>
+          <a:effectRef idx="2">
+            <a:schemeClr val="accent1"/>
+          </a:effectRef>
+          <a:fontRef idx="minor">
+            <a:schemeClr val="lt1"/>
+          </a:fontRef>
+        </p:style>
+        <p:txBody>
+          <a:bodyPr rtlCol="0" anchor="ctr"/>
+          <a:lstStyle/>
+          <a:p>
+            <a:pPr algn="ctr"/>
+          </a:p>
+        </p:txBody>
+      </p:sp>
+      <p:sp>
+        <p:nvSpPr>
+          <p:cNvPr id="4" name="TextBox 3"/>
+          <p:cNvSpPr txBox="1"/>
+          <p:nvPr/>
+        </p:nvSpPr>
+        <p:spPr>
+          <a:xfrm>
+            <a:off x="457200" y="164592"/>
+            <a:ext cx="11277295" cy="502920"/>
+          </a:xfrm>
+          <a:prstGeom prst="rect">
+            <a:avLst/>
+          </a:prstGeom>
+          <a:noFill/>
+        </p:spPr>
+        <p:txBody>
+          <a:bodyPr wrap="square">
+            <a:spAutoFit/>
+          </a:bodyPr>
+          <a:lstStyle/>
+          <a:p>
+            <a:r>
+              <a:rPr sz="2600" b="1" i="0">
+                <a:solidFill>
+                  <a:srgbClr val="FFFFFF"/>
+                </a:solidFill>
+                <a:latin typeface="Calibri"/>
+              </a:rPr>
+              <a:t>Las cuatro senales de oro, con definicion operativa</a:t>
+            </a:r>
+          </a:p>
+        </p:txBody>
+      </p:sp>
+      <p:sp>
+        <p:nvSpPr>
+          <p:cNvPr id="5" name="TextBox 4"/>
+          <p:cNvSpPr txBox="1"/>
+          <p:nvPr/>
+        </p:nvSpPr>
+        <p:spPr>
+          <a:xfrm>
+            <a:off x="457200" y="1170432"/>
+            <a:ext cx="11277295" cy="5230368"/>
+          </a:xfrm>
+          <a:prstGeom prst="rect">
+            <a:avLst/>
+          </a:prstGeom>
+          <a:noFill/>
+        </p:spPr>
+        <p:txBody>
+          <a:bodyPr wrap="square">
+            <a:spAutoFit/>
+          </a:bodyPr>
+          <a:lstStyle/>
+          <a:p>
+            <a:pPr>
+              <a:spcAft>
+                <a:spcPts val="800"/>
+              </a:spcAft>
+            </a:pPr>
+            <a:r>
+              <a:rPr sz="2000" b="0" i="0">
+                <a:solidFill>
+                  <a:srgbClr val="333333"/>
+                </a:solidFill>
+                <a:latin typeface="Calibri"/>
+              </a:rPr>
+              <a:t>–   Las cuatro senales de oro son latencia, trafico, errores y saturacion, y cada una necesita definicion operativa.</a:t>
+            </a:r>
+          </a:p>
+          <a:p>
+            <a:pPr>
+              <a:spcAft>
+                <a:spcPts val="800"/>
+              </a:spcAft>
+            </a:pPr>
+            <a:r>
+              <a:rPr sz="2000" b="0" i="0">
+                <a:solidFill>
+                  <a:srgbClr val="333333"/>
+                </a:solidFill>
+                <a:latin typeface="Calibri"/>
+              </a:rPr>
+              <a:t>–   Trafico es cuanta demanda llega, en peticiones por segundo o por minuto.</a:t>
+            </a:r>
+          </a:p>
+          <a:p>
+            <a:pPr>
+              <a:spcAft>
+                <a:spcPts val="800"/>
+              </a:spcAft>
+            </a:pPr>
+            <a:r>
+              <a:rPr sz="2000" b="0" i="0">
+                <a:solidFill>
+                  <a:srgbClr val="333333"/>
+                </a:solidFill>
+                <a:latin typeface="Calibri"/>
+              </a:rPr>
+              <a:t>–   Saturacion es que tan cerca esta el recurso mas escaso de su limite: CPU, memoria, disco o, en la mayoria de las APIs reales, las conexiones libres del pool de la base de datos</a:t>
+            </a:r>
+          </a:p>
+          <a:p>
+            <a:pPr>
+              <a:spcAft>
+                <a:spcPts val="800"/>
+              </a:spcAft>
+            </a:pPr>
+            <a:r>
+              <a:rPr sz="2000" b="0" i="0">
+                <a:solidFill>
+                  <a:srgbClr val="333333"/>
+                </a:solidFill>
+                <a:latin typeface="Calibri"/>
+              </a:rPr>
+              <a:t>–   La convencion es alertar cuando un recurso pasa del 70 u 80 por ciento sostenido, y es convencion, no ley.</a:t>
+            </a:r>
+          </a:p>
+          <a:p>
+            <a:pPr>
+              <a:spcAft>
+                <a:spcPts val="800"/>
+              </a:spcAft>
+            </a:pPr>
+            <a:r>
+              <a:rPr sz="2000" b="0" i="0">
+                <a:solidFill>
+                  <a:srgbClr val="333333"/>
+                </a:solidFill>
+                <a:latin typeface="Calibri"/>
+              </a:rPr>
+              <a:t>–   Latencia merece explicacion aparte porque introduce el percentil, el valor por debajo del cual cae un porcentaje dado de las mediciones: si el p95 de la API es 300 milisegundos</a:t>
+            </a:r>
+          </a:p>
+          <a:p>
+            <a:pPr>
+              <a:spcAft>
+                <a:spcPts val="800"/>
+              </a:spcAft>
+            </a:pPr>
+            <a:r>
+              <a:rPr sz="2000" b="0" i="0">
+                <a:solidFill>
+                  <a:srgbClr val="333333"/>
+                </a:solidFill>
+                <a:latin typeface="Calibri"/>
+              </a:rPr>
+              <a:t>–   95 de cada 100 peticiones respondieron en 300 milisegundos o menos y 5 tardaron mas.</a:t>
+            </a:r>
+          </a:p>
+          <a:p>
+            <a:pPr>
+              <a:spcAft>
+                <a:spcPts val="800"/>
+              </a:spcAft>
+            </a:pPr>
+            <a:r>
+              <a:rPr sz="2000" b="0" i="0">
+                <a:solidFill>
+                  <a:srgbClr val="333333"/>
+                </a:solidFill>
+                <a:latin typeface="Calibri"/>
+              </a:rPr>
+              <a:t>–   Es mas honesto que el promedio, y el ejemplo lo prueba: 99 peticiones de 50 milisegundos y una de 5 segundos dan un promedio de 99 milisegundos, que parece excelente, mientras el p99 es 5 segundos y corresponde a un usuario mirando una pantalla congelada.</a:t>
+            </a:r>
+          </a:p>
+        </p:txBody>
+      </p:sp>
+      <p:sp>
+        <p:nvSpPr>
+          <p:cNvPr id="6" name="TextBox 5"/>
+          <p:cNvSpPr txBox="1"/>
+          <p:nvPr/>
+        </p:nvSpPr>
+        <p:spPr>
+          <a:xfrm>
+            <a:off x="11185855" y="6473952"/>
+            <a:ext cx="640080" cy="274320"/>
+          </a:xfrm>
+          <a:prstGeom prst="rect">
+            <a:avLst/>
+          </a:prstGeom>
+          <a:noFill/>
+        </p:spPr>
+        <p:txBody>
+          <a:bodyPr wrap="square">
+            <a:spAutoFit/>
+          </a:bodyPr>
+          <a:lstStyle/>
+          <a:p>
+            <a:pPr algn="r"/>
+            <a:r>
+              <a:rPr sz="1100" b="0" i="0">
+                <a:solidFill>
+                  <a:srgbClr val="666666"/>
+                </a:solidFill>
+                <a:latin typeface="Calibri"/>
+              </a:rPr>
+              <a:t>17</a:t>
+            </a:r>
+          </a:p>
+        </p:txBody>
+      </p:sp>
+    </p:spTree>
+  </p:cSld>
+  <p:clrMapOvr>
+    <a:masterClrMapping/>
+  </p:clrMapOvr>
+</p:sld>
+</file>
+
+<file path=ppt/slides/slide18.xml><?xml version="1.0" encoding="utf-8"?>
+<p:sld xmlns:a="http://schemas.openxmlformats.org/drawingml/2006/main" xmlns:p="http://schemas.openxmlformats.org/presentationml/2006/main" xmlns:r="http://schemas.openxmlformats.org/officeDocument/2006/relationships">
+  <p:cSld>
+    <p:bg>
+      <p:bgPr>
+        <a:solidFill>
+          <a:srgbClr val="FFFFFF"/>
+        </a:solidFill>
+        <a:effectLst/>
+      </p:bgPr>
+    </p:bg>
+    <p:spTree>
+      <p:nvGrpSpPr>
+        <p:cNvPr id="1" name=""/>
+        <p:cNvGrpSpPr/>
+        <p:nvPr/>
+      </p:nvGrpSpPr>
+      <p:grpSpPr/>
+      <p:sp>
+        <p:nvSpPr>
+          <p:cNvPr id="2" name="Rectangle 1"/>
+          <p:cNvSpPr/>
+          <p:nvPr/>
+        </p:nvSpPr>
+        <p:spPr>
+          <a:xfrm>
+            <a:off x="0" y="0"/>
+            <a:ext cx="12191695" cy="960120"/>
+          </a:xfrm>
+          <a:prstGeom prst="rect">
+            <a:avLst/>
+          </a:prstGeom>
+          <a:solidFill>
+            <a:srgbClr val="095292"/>
+          </a:solidFill>
+          <a:ln>
+            <a:noFill/>
+          </a:ln>
+        </p:spPr>
+        <p:style>
+          <a:lnRef idx="1">
+            <a:schemeClr val="accent1"/>
+          </a:lnRef>
+          <a:fillRef idx="3">
+            <a:schemeClr val="accent1"/>
+          </a:fillRef>
+          <a:effectRef idx="2">
+            <a:schemeClr val="accent1"/>
+          </a:effectRef>
+          <a:fontRef idx="minor">
+            <a:schemeClr val="lt1"/>
+          </a:fontRef>
+        </p:style>
+        <p:txBody>
+          <a:bodyPr rtlCol="0" anchor="ctr"/>
+          <a:lstStyle/>
+          <a:p>
+            <a:pPr algn="ctr"/>
+          </a:p>
+        </p:txBody>
+      </p:sp>
+      <p:sp>
+        <p:nvSpPr>
+          <p:cNvPr id="3" name="Rectangle 2"/>
+          <p:cNvSpPr/>
+          <p:nvPr/>
+        </p:nvSpPr>
+        <p:spPr>
+          <a:xfrm>
+            <a:off x="0" y="960120"/>
+            <a:ext cx="12191695" cy="41148"/>
+          </a:xfrm>
+          <a:prstGeom prst="rect">
+            <a:avLst/>
+          </a:prstGeom>
+          <a:solidFill>
+            <a:srgbClr val="FFD000"/>
+          </a:solidFill>
+          <a:ln>
+            <a:noFill/>
+          </a:ln>
+        </p:spPr>
+        <p:style>
+          <a:lnRef idx="1">
+            <a:schemeClr val="accent1"/>
+          </a:lnRef>
+          <a:fillRef idx="3">
+            <a:schemeClr val="accent1"/>
+          </a:fillRef>
+          <a:effectRef idx="2">
+            <a:schemeClr val="accent1"/>
+          </a:effectRef>
+          <a:fontRef idx="minor">
+            <a:schemeClr val="lt1"/>
+          </a:fontRef>
+        </p:style>
+        <p:txBody>
+          <a:bodyPr rtlCol="0" anchor="ctr"/>
+          <a:lstStyle/>
+          <a:p>
+            <a:pPr algn="ctr"/>
+          </a:p>
+        </p:txBody>
+      </p:sp>
+      <p:sp>
+        <p:nvSpPr>
+          <p:cNvPr id="4" name="TextBox 3"/>
+          <p:cNvSpPr txBox="1"/>
+          <p:nvPr/>
+        </p:nvSpPr>
+        <p:spPr>
+          <a:xfrm>
+            <a:off x="457200" y="164592"/>
+            <a:ext cx="11277295" cy="502920"/>
+          </a:xfrm>
+          <a:prstGeom prst="rect">
+            <a:avLst/>
+          </a:prstGeom>
+          <a:noFill/>
+        </p:spPr>
+        <p:txBody>
+          <a:bodyPr wrap="square">
+            <a:spAutoFit/>
+          </a:bodyPr>
+          <a:lstStyle/>
+          <a:p>
+            <a:r>
+              <a:rPr sz="2600" b="1" i="0">
+                <a:solidFill>
+                  <a:srgbClr val="FFFFFF"/>
+                </a:solidFill>
+                <a:latin typeface="Calibri"/>
+              </a:rPr>
+              <a:t>La tabla de senales de la pregunta 10, con sus tres columnas exactas (1/2)</a:t>
+            </a:r>
+          </a:p>
+        </p:txBody>
+      </p:sp>
+      <p:sp>
+        <p:nvSpPr>
+          <p:cNvPr id="5" name="TextBox 4"/>
+          <p:cNvSpPr txBox="1"/>
+          <p:nvPr/>
+        </p:nvSpPr>
+        <p:spPr>
+          <a:xfrm>
+            <a:off x="457200" y="1170432"/>
+            <a:ext cx="11277295" cy="5230368"/>
+          </a:xfrm>
+          <a:prstGeom prst="rect">
+            <a:avLst/>
+          </a:prstGeom>
+          <a:noFill/>
+        </p:spPr>
+        <p:txBody>
+          <a:bodyPr wrap="square">
+            <a:spAutoFit/>
+          </a:bodyPr>
+          <a:lstStyle/>
+          <a:p>
+            <a:pPr>
+              <a:spcAft>
+                <a:spcPts val="800"/>
+              </a:spcAft>
+            </a:pPr>
+            <a:r>
+              <a:rPr sz="2000" b="0" i="0">
+                <a:solidFill>
+                  <a:srgbClr val="333333"/>
+                </a:solidFill>
+                <a:latin typeface="Calibri"/>
+              </a:rPr>
+              <a:t>–   El entregable de la segunda mitad es una tabla de entre 4 y 6 filas, y el formato que califica la pregunta 10 tiene TRES columnas cuyos nombres hay que dictar: «Senal», «Que se mide en MI dominio» y «Umbral u objetivo».</a:t>
+            </a:r>
+          </a:p>
+          <a:p>
+            <a:pPr>
+              <a:spcAft>
+                <a:spcPts val="800"/>
+              </a:spcAft>
+            </a:pPr>
+            <a:r>
+              <a:rPr sz="2000" b="0" i="0">
+                <a:solidFill>
+                  <a:srgbClr val="333333"/>
+                </a:solidFill>
+                <a:latin typeface="Calibri"/>
+              </a:rPr>
+              <a:t>–   El reparto de sus 6 puntos es un punto por senal bien formada con su umbral hasta la cuarta, hasta un punto adicional entre las senales quinta y sexta, y un punto por que al menos una sea un registro.</a:t>
+            </a:r>
+          </a:p>
+          <a:p>
+            <a:pPr>
+              <a:spcAft>
+                <a:spcPts val="800"/>
+              </a:spcAft>
+            </a:pPr>
+            <a:r>
+              <a:rPr sz="2000" b="0" i="0">
+                <a:solidFill>
+                  <a:srgbClr val="333333"/>
+                </a:solidFill>
+                <a:latin typeface="Calibri"/>
+              </a:rPr>
+              <a:t>–   La regla que decide la mitad de la nota se dice en una frase: una senal sin umbral NO SUMA, aunque este bien elegida.</a:t>
+            </a:r>
+          </a:p>
+          <a:p>
+            <a:pPr>
+              <a:spcAft>
+                <a:spcPts val="800"/>
+              </a:spcAft>
+            </a:pPr>
+            <a:r>
+              <a:rPr sz="2000" b="0" i="0">
+                <a:solidFill>
+                  <a:srgbClr val="333333"/>
+                </a:solidFill>
+                <a:latin typeface="Calibri"/>
+              </a:rPr>
+              <a:t>–   «Medimos la latencia» no permite decidir nada</a:t>
+            </a:r>
+          </a:p>
+          <a:p>
+            <a:pPr>
+              <a:spcAft>
+                <a:spcPts val="800"/>
+              </a:spcAft>
+            </a:pPr>
+            <a:r>
+              <a:rPr sz="2000" b="0" i="0">
+                <a:solidFill>
+                  <a:srgbClr val="333333"/>
+                </a:solidFill>
+                <a:latin typeface="Calibri"/>
+              </a:rPr>
+              <a:t>–   «el listado de disponibilidad debe responder en menos de 400 milisegundos y si pasa de 800 se revisa» si, porque define cuando hay que actuar.</a:t>
+            </a:r>
+          </a:p>
+          <a:p>
+            <a:pPr>
+              <a:spcAft>
+                <a:spcPts val="800"/>
+              </a:spcAft>
+            </a:pPr>
+            <a:r>
+              <a:rPr sz="2000" b="0" i="0">
+                <a:solidFill>
+                  <a:srgbClr val="333333"/>
+                </a:solidFill>
+                <a:latin typeface="Calibri"/>
+              </a:rPr>
+              <a:t>–   El umbral puede ser discutible, y hay que decir que se acepta discutible: lo que no puede es faltar.</a:t>
+            </a:r>
+          </a:p>
+          <a:p>
+            <a:pPr>
+              <a:spcAft>
+                <a:spcPts val="800"/>
+              </a:spcAft>
+            </a:pPr>
+            <a:r>
+              <a:rPr sz="2000" b="0" i="0">
+                <a:solidFill>
+                  <a:srgbClr val="333333"/>
+                </a:solidFill>
+                <a:latin typeface="Calibri"/>
+              </a:rPr>
+              <a:t>–   La segunda columna tambien se califica: se descuenta si las senales no se refieren a operaciones del dominio propio, asi que «el sistema» no es una respuesta y «el listado de disponibilidad de canchas» o «el registro de una reserva» si.</a:t>
+            </a:r>
+          </a:p>
+        </p:txBody>
+      </p:sp>
+      <p:sp>
+        <p:nvSpPr>
+          <p:cNvPr id="6" name="TextBox 5"/>
+          <p:cNvSpPr txBox="1"/>
+          <p:nvPr/>
+        </p:nvSpPr>
+        <p:spPr>
+          <a:xfrm>
+            <a:off x="11185855" y="6473952"/>
+            <a:ext cx="640080" cy="274320"/>
+          </a:xfrm>
+          <a:prstGeom prst="rect">
+            <a:avLst/>
+          </a:prstGeom>
+          <a:noFill/>
+        </p:spPr>
+        <p:txBody>
+          <a:bodyPr wrap="square">
+            <a:spAutoFit/>
+          </a:bodyPr>
+          <a:lstStyle/>
+          <a:p>
+            <a:pPr algn="r"/>
+            <a:r>
+              <a:rPr sz="1100" b="0" i="0">
+                <a:solidFill>
+                  <a:srgbClr val="666666"/>
+                </a:solidFill>
+                <a:latin typeface="Calibri"/>
+              </a:rPr>
+              <a:t>18</a:t>
+            </a:r>
+          </a:p>
+        </p:txBody>
+      </p:sp>
+    </p:spTree>
+  </p:cSld>
+  <p:clrMapOvr>
+    <a:masterClrMapping/>
+  </p:clrMapOvr>
+</p:sld>
+</file>
+
+<file path=ppt/slides/slide19.xml><?xml version="1.0" encoding="utf-8"?>
+<p:sld xmlns:a="http://schemas.openxmlformats.org/drawingml/2006/main" xmlns:p="http://schemas.openxmlformats.org/presentationml/2006/main" xmlns:r="http://schemas.openxmlformats.org/officeDocument/2006/relationships">
+  <p:cSld>
+    <p:bg>
+      <p:bgPr>
+        <a:solidFill>
+          <a:srgbClr val="FFFFFF"/>
+        </a:solidFill>
+        <a:effectLst/>
+      </p:bgPr>
+    </p:bg>
+    <p:spTree>
+      <p:nvGrpSpPr>
+        <p:cNvPr id="1" name=""/>
+        <p:cNvGrpSpPr/>
+        <p:nvPr/>
+      </p:nvGrpSpPr>
+      <p:grpSpPr/>
+      <p:sp>
+        <p:nvSpPr>
+          <p:cNvPr id="2" name="Rectangle 1"/>
+          <p:cNvSpPr/>
+          <p:nvPr/>
+        </p:nvSpPr>
+        <p:spPr>
+          <a:xfrm>
+            <a:off x="0" y="0"/>
+            <a:ext cx="12191695" cy="960120"/>
+          </a:xfrm>
+          <a:prstGeom prst="rect">
+            <a:avLst/>
+          </a:prstGeom>
+          <a:solidFill>
+            <a:srgbClr val="095292"/>
+          </a:solidFill>
+          <a:ln>
+            <a:noFill/>
+          </a:ln>
+        </p:spPr>
+        <p:style>
+          <a:lnRef idx="1">
+            <a:schemeClr val="accent1"/>
+          </a:lnRef>
+          <a:fillRef idx="3">
+            <a:schemeClr val="accent1"/>
+          </a:fillRef>
+          <a:effectRef idx="2">
+            <a:schemeClr val="accent1"/>
+          </a:effectRef>
+          <a:fontRef idx="minor">
+            <a:schemeClr val="lt1"/>
+          </a:fontRef>
+        </p:style>
+        <p:txBody>
+          <a:bodyPr rtlCol="0" anchor="ctr"/>
+          <a:lstStyle/>
+          <a:p>
+            <a:pPr algn="ctr"/>
+          </a:p>
+        </p:txBody>
+      </p:sp>
+      <p:sp>
+        <p:nvSpPr>
+          <p:cNvPr id="3" name="Rectangle 2"/>
+          <p:cNvSpPr/>
+          <p:nvPr/>
+        </p:nvSpPr>
+        <p:spPr>
+          <a:xfrm>
+            <a:off x="0" y="960120"/>
+            <a:ext cx="12191695" cy="41148"/>
+          </a:xfrm>
+          <a:prstGeom prst="rect">
+            <a:avLst/>
+          </a:prstGeom>
+          <a:solidFill>
+            <a:srgbClr val="FFD000"/>
+          </a:solidFill>
+          <a:ln>
+            <a:noFill/>
+          </a:ln>
+        </p:spPr>
+        <p:style>
+          <a:lnRef idx="1">
+            <a:schemeClr val="accent1"/>
+          </a:lnRef>
+          <a:fillRef idx="3">
+            <a:schemeClr val="accent1"/>
+          </a:fillRef>
+          <a:effectRef idx="2">
+            <a:schemeClr val="accent1"/>
+          </a:effectRef>
+          <a:fontRef idx="minor">
+            <a:schemeClr val="lt1"/>
+          </a:fontRef>
+        </p:style>
+        <p:txBody>
+          <a:bodyPr rtlCol="0" anchor="ctr"/>
+          <a:lstStyle/>
+          <a:p>
+            <a:pPr algn="ctr"/>
+          </a:p>
+        </p:txBody>
+      </p:sp>
+      <p:sp>
+        <p:nvSpPr>
+          <p:cNvPr id="4" name="TextBox 3"/>
+          <p:cNvSpPr txBox="1"/>
+          <p:nvPr/>
+        </p:nvSpPr>
+        <p:spPr>
+          <a:xfrm>
+            <a:off x="457200" y="164592"/>
+            <a:ext cx="11277295" cy="502920"/>
+          </a:xfrm>
+          <a:prstGeom prst="rect">
+            <a:avLst/>
+          </a:prstGeom>
+          <a:noFill/>
+        </p:spPr>
+        <p:txBody>
+          <a:bodyPr wrap="square">
+            <a:spAutoFit/>
+          </a:bodyPr>
+          <a:lstStyle/>
+          <a:p>
+            <a:r>
+              <a:rPr sz="2600" b="1" i="0">
+                <a:solidFill>
+                  <a:srgbClr val="FFFFFF"/>
+                </a:solidFill>
+                <a:latin typeface="Calibri"/>
+              </a:rPr>
+              <a:t>La tabla de senales de la pregunta 10, con sus tres columnas exactas (2/2)</a:t>
+            </a:r>
+          </a:p>
+        </p:txBody>
+      </p:sp>
+      <p:sp>
+        <p:nvSpPr>
+          <p:cNvPr id="5" name="TextBox 4"/>
+          <p:cNvSpPr txBox="1"/>
+          <p:nvPr/>
+        </p:nvSpPr>
+        <p:spPr>
+          <a:xfrm>
+            <a:off x="457200" y="1170432"/>
+            <a:ext cx="11277295" cy="5230368"/>
+          </a:xfrm>
+          <a:prstGeom prst="rect">
+            <a:avLst/>
+          </a:prstGeom>
+          <a:noFill/>
+        </p:spPr>
+        <p:txBody>
+          <a:bodyPr wrap="square">
+            <a:spAutoFit/>
+          </a:bodyPr>
+          <a:lstStyle/>
+          <a:p>
+            <a:pPr>
+              <a:spcAft>
+                <a:spcPts val="800"/>
+              </a:spcAft>
+            </a:pPr>
+            <a:r>
+              <a:rPr sz="2000" b="0" i="0">
+                <a:solidFill>
+                  <a:srgbClr val="333333"/>
+                </a:solidFill>
+                <a:latin typeface="Calibri"/>
+              </a:rPr>
+              <a:t>–   Falta una advertencia de formato: en clase vale la pena preguntar siempre que se HACE cuando se cruza el umbral, porque es lo que convierte una lista de metricas en un plan de operacion</a:t>
+            </a:r>
+          </a:p>
+          <a:p>
+            <a:pPr>
+              <a:spcAft>
+                <a:spcPts val="800"/>
+              </a:spcAft>
+            </a:pPr>
+            <a:r>
+              <a:rPr sz="2000" b="0" i="0">
+                <a:solidFill>
+                  <a:srgbClr val="333333"/>
+                </a:solidFill>
+                <a:latin typeface="Calibri"/>
+              </a:rPr>
+              <a:t>–   Pero ese «que se hace» NO es una cuarta columna de la respuesta; se escribe dentro del umbral, como en el ejemplo del listado.</a:t>
+            </a:r>
+          </a:p>
+          <a:p>
+            <a:pPr>
+              <a:spcAft>
+                <a:spcPts val="800"/>
+              </a:spcAft>
+            </a:pPr>
+            <a:r>
+              <a:rPr sz="2000" b="0" i="0">
+                <a:solidFill>
+                  <a:srgbClr val="333333"/>
+                </a:solidFill>
+                <a:latin typeface="Calibri"/>
+              </a:rPr>
+              <a:t>–   Ahi entra la optimizacion de la segunda mitad del tema: paginar, con veinte a cincuenta elementos por pagina, porque un endpoint que devuelve cincuenta mil registros es problema de latencia y de memoria; indexar la columna por la que se filtra</a:t>
+            </a:r>
+          </a:p>
+          <a:p>
+            <a:pPr>
+              <a:spcAft>
+                <a:spcPts val="800"/>
+              </a:spcAft>
+            </a:pPr>
+            <a:r>
+              <a:rPr sz="2000" b="0" i="0">
+                <a:solidFill>
+                  <a:srgbClr val="333333"/>
+                </a:solidFill>
+                <a:latin typeface="Calibri"/>
+              </a:rPr>
+              <a:t>–   Porque sin indice el motor recorre la tabla completa; cachear lecturas repetidas, donde una tasa de acierto del 90 por ciento significa que nueve de cada diez lecturas no llegan a la base</a:t>
+            </a:r>
+          </a:p>
+          <a:p>
+            <a:pPr>
+              <a:spcAft>
+                <a:spcPts val="800"/>
+              </a:spcAft>
+            </a:pPr>
+            <a:r>
+              <a:rPr sz="2000" b="0" i="0">
+                <a:solidFill>
+                  <a:srgbClr val="333333"/>
+                </a:solidFill>
+                <a:latin typeface="Calibri"/>
+              </a:rPr>
+              <a:t>–   Y limitar la tasa de peticiones, el control de denegacion de servicio de la Clase 6.</a:t>
+            </a:r>
+          </a:p>
+        </p:txBody>
+      </p:sp>
+      <p:sp>
+        <p:nvSpPr>
+          <p:cNvPr id="6" name="TextBox 5"/>
+          <p:cNvSpPr txBox="1"/>
+          <p:nvPr/>
+        </p:nvSpPr>
+        <p:spPr>
+          <a:xfrm>
+            <a:off x="11185855" y="6473952"/>
+            <a:ext cx="640080" cy="274320"/>
+          </a:xfrm>
+          <a:prstGeom prst="rect">
+            <a:avLst/>
+          </a:prstGeom>
+          <a:noFill/>
+        </p:spPr>
+        <p:txBody>
+          <a:bodyPr wrap="square">
+            <a:spAutoFit/>
+          </a:bodyPr>
+          <a:lstStyle/>
+          <a:p>
+            <a:pPr algn="r"/>
+            <a:r>
+              <a:rPr sz="1100" b="0" i="0">
+                <a:solidFill>
+                  <a:srgbClr val="666666"/>
+                </a:solidFill>
+                <a:latin typeface="Calibri"/>
+              </a:rPr>
+              <a:t>19</a:t>
             </a:r>
           </a:p>
         </p:txBody>
@@ -4947,6 +6617,3733 @@
 </p:sld>
 </file>
 
+<file path=ppt/slides/slide20.xml><?xml version="1.0" encoding="utf-8"?>
+<p:sld xmlns:a="http://schemas.openxmlformats.org/drawingml/2006/main" xmlns:p="http://schemas.openxmlformats.org/presentationml/2006/main" xmlns:r="http://schemas.openxmlformats.org/officeDocument/2006/relationships">
+  <p:cSld>
+    <p:bg>
+      <p:bgPr>
+        <a:solidFill>
+          <a:srgbClr val="FFFFFF"/>
+        </a:solidFill>
+        <a:effectLst/>
+      </p:bgPr>
+    </p:bg>
+    <p:spTree>
+      <p:nvGrpSpPr>
+        <p:cNvPr id="1" name=""/>
+        <p:cNvGrpSpPr/>
+        <p:nvPr/>
+      </p:nvGrpSpPr>
+      <p:grpSpPr/>
+      <p:sp>
+        <p:nvSpPr>
+          <p:cNvPr id="2" name="Rectangle 1"/>
+          <p:cNvSpPr/>
+          <p:nvPr/>
+        </p:nvSpPr>
+        <p:spPr>
+          <a:xfrm>
+            <a:off x="0" y="0"/>
+            <a:ext cx="12191695" cy="960120"/>
+          </a:xfrm>
+          <a:prstGeom prst="rect">
+            <a:avLst/>
+          </a:prstGeom>
+          <a:solidFill>
+            <a:srgbClr val="095292"/>
+          </a:solidFill>
+          <a:ln>
+            <a:noFill/>
+          </a:ln>
+        </p:spPr>
+        <p:style>
+          <a:lnRef idx="1">
+            <a:schemeClr val="accent1"/>
+          </a:lnRef>
+          <a:fillRef idx="3">
+            <a:schemeClr val="accent1"/>
+          </a:fillRef>
+          <a:effectRef idx="2">
+            <a:schemeClr val="accent1"/>
+          </a:effectRef>
+          <a:fontRef idx="minor">
+            <a:schemeClr val="lt1"/>
+          </a:fontRef>
+        </p:style>
+        <p:txBody>
+          <a:bodyPr rtlCol="0" anchor="ctr"/>
+          <a:lstStyle/>
+          <a:p>
+            <a:pPr algn="ctr"/>
+          </a:p>
+        </p:txBody>
+      </p:sp>
+      <p:sp>
+        <p:nvSpPr>
+          <p:cNvPr id="3" name="Rectangle 2"/>
+          <p:cNvSpPr/>
+          <p:nvPr/>
+        </p:nvSpPr>
+        <p:spPr>
+          <a:xfrm>
+            <a:off x="0" y="960120"/>
+            <a:ext cx="12191695" cy="41148"/>
+          </a:xfrm>
+          <a:prstGeom prst="rect">
+            <a:avLst/>
+          </a:prstGeom>
+          <a:solidFill>
+            <a:srgbClr val="FFD000"/>
+          </a:solidFill>
+          <a:ln>
+            <a:noFill/>
+          </a:ln>
+        </p:spPr>
+        <p:style>
+          <a:lnRef idx="1">
+            <a:schemeClr val="accent1"/>
+          </a:lnRef>
+          <a:fillRef idx="3">
+            <a:schemeClr val="accent1"/>
+          </a:fillRef>
+          <a:effectRef idx="2">
+            <a:schemeClr val="accent1"/>
+          </a:effectRef>
+          <a:fontRef idx="minor">
+            <a:schemeClr val="lt1"/>
+          </a:fontRef>
+        </p:style>
+        <p:txBody>
+          <a:bodyPr rtlCol="0" anchor="ctr"/>
+          <a:lstStyle/>
+          <a:p>
+            <a:pPr algn="ctr"/>
+          </a:p>
+        </p:txBody>
+      </p:sp>
+      <p:sp>
+        <p:nvSpPr>
+          <p:cNvPr id="4" name="TextBox 3"/>
+          <p:cNvSpPr txBox="1"/>
+          <p:nvPr/>
+        </p:nvSpPr>
+        <p:spPr>
+          <a:xfrm>
+            <a:off x="457200" y="164592"/>
+            <a:ext cx="11277295" cy="502920"/>
+          </a:xfrm>
+          <a:prstGeom prst="rect">
+            <a:avLst/>
+          </a:prstGeom>
+          <a:noFill/>
+        </p:spPr>
+        <p:txBody>
+          <a:bodyPr wrap="square">
+            <a:spAutoFit/>
+          </a:bodyPr>
+          <a:lstStyle/>
+          <a:p>
+            <a:r>
+              <a:rPr sz="2600" b="1" i="0">
+                <a:solidFill>
+                  <a:srgbClr val="FFFFFF"/>
+                </a:solidFill>
+                <a:latin typeface="Calibri"/>
+              </a:rPr>
+              <a:t>El pipeline del stub de CloudLite, paso por paso (1/2)</a:t>
+            </a:r>
+          </a:p>
+        </p:txBody>
+      </p:sp>
+      <p:sp>
+        <p:nvSpPr>
+          <p:cNvPr id="5" name="TextBox 4"/>
+          <p:cNvSpPr txBox="1"/>
+          <p:nvPr/>
+        </p:nvSpPr>
+        <p:spPr>
+          <a:xfrm>
+            <a:off x="457200" y="1170432"/>
+            <a:ext cx="11277295" cy="5230368"/>
+          </a:xfrm>
+          <a:prstGeom prst="rect">
+            <a:avLst/>
+          </a:prstGeom>
+          <a:noFill/>
+        </p:spPr>
+        <p:txBody>
+          <a:bodyPr wrap="square">
+            <a:spAutoFit/>
+          </a:bodyPr>
+          <a:lstStyle/>
+          <a:p>
+            <a:pPr>
+              <a:spcAft>
+                <a:spcPts val="800"/>
+              </a:spcAft>
+            </a:pPr>
+            <a:r>
+              <a:rPr sz="2000" b="0" i="0">
+                <a:solidFill>
+                  <a:srgbClr val="333333"/>
+                </a:solidFill>
+                <a:latin typeface="Calibri"/>
+              </a:rPr>
+              <a:t>–   El ejemplo concreto es el pipeline del stub de CloudLite, que ya existe desde la Clase 3 como Dockerfile y contenedor, y la diapositiva del ci.yml es el molde que se puede copiar.</a:t>
+            </a:r>
+          </a:p>
+          <a:p>
+            <a:pPr>
+              <a:spcAft>
+                <a:spcPts val="800"/>
+              </a:spcAft>
+            </a:pPr>
+            <a:r>
+              <a:rPr sz="2000" b="0" i="0">
+                <a:solidFill>
+                  <a:srgbClr val="333333"/>
+                </a:solidFill>
+                <a:latin typeface="Calibri"/>
+              </a:rPr>
+              <a:t>–   El workflow se dispara en push y en pull_request.</a:t>
+            </a:r>
+          </a:p>
+          <a:p>
+            <a:pPr>
+              <a:spcAft>
+                <a:spcPts val="800"/>
+              </a:spcAft>
+            </a:pPr>
+            <a:r>
+              <a:rPr sz="2000" b="0" i="0">
+                <a:solidFill>
+                  <a:srgbClr val="333333"/>
+                </a:solidFill>
+                <a:latin typeface="Calibri"/>
+              </a:rPr>
+              <a:t>–   Un job corre en ubuntu-latest y hace, en este orden: descargar el codigo con la action de checkout, instalar el runtime con la action de setup del lenguaje</a:t>
+            </a:r>
+          </a:p>
+          <a:p>
+            <a:pPr>
+              <a:spcAft>
+                <a:spcPts val="800"/>
+              </a:spcAft>
+            </a:pPr>
+            <a:r>
+              <a:rPr sz="2000" b="0" i="0">
+                <a:solidFill>
+                  <a:srgbClr val="333333"/>
+                </a:solidFill>
+                <a:latin typeface="Calibri"/>
+              </a:rPr>
+              <a:t>–   Un paso Construir que instala dependencias y ejecuta docker build con la imagen etiquetada, un paso Probar que corre las pruebas</a:t>
+            </a:r>
+          </a:p>
+          <a:p>
+            <a:pPr>
+              <a:spcAft>
+                <a:spcPts val="800"/>
+              </a:spcAft>
+            </a:pPr>
+            <a:r>
+              <a:rPr sz="2000" b="0" i="0">
+                <a:solidFill>
+                  <a:srgbClr val="333333"/>
+                </a:solidFill>
+                <a:latin typeface="Calibri"/>
+              </a:rPr>
+              <a:t>–   Y un paso final rotulado como despliegue simulado que imprime la etiqueta de version y publica un artefacto, un archivo que queda guardado junto a la corrida.</a:t>
+            </a:r>
+          </a:p>
+        </p:txBody>
+      </p:sp>
+      <p:sp>
+        <p:nvSpPr>
+          <p:cNvPr id="6" name="TextBox 5"/>
+          <p:cNvSpPr txBox="1"/>
+          <p:nvPr/>
+        </p:nvSpPr>
+        <p:spPr>
+          <a:xfrm>
+            <a:off x="11185855" y="6473952"/>
+            <a:ext cx="640080" cy="274320"/>
+          </a:xfrm>
+          <a:prstGeom prst="rect">
+            <a:avLst/>
+          </a:prstGeom>
+          <a:noFill/>
+        </p:spPr>
+        <p:txBody>
+          <a:bodyPr wrap="square">
+            <a:spAutoFit/>
+          </a:bodyPr>
+          <a:lstStyle/>
+          <a:p>
+            <a:pPr algn="r"/>
+            <a:r>
+              <a:rPr sz="1100" b="0" i="0">
+                <a:solidFill>
+                  <a:srgbClr val="666666"/>
+                </a:solidFill>
+                <a:latin typeface="Calibri"/>
+              </a:rPr>
+              <a:t>20</a:t>
+            </a:r>
+          </a:p>
+        </p:txBody>
+      </p:sp>
+    </p:spTree>
+  </p:cSld>
+  <p:clrMapOvr>
+    <a:masterClrMapping/>
+  </p:clrMapOvr>
+</p:sld>
+</file>
+
+<file path=ppt/slides/slide21.xml><?xml version="1.0" encoding="utf-8"?>
+<p:sld xmlns:a="http://schemas.openxmlformats.org/drawingml/2006/main" xmlns:p="http://schemas.openxmlformats.org/presentationml/2006/main" xmlns:r="http://schemas.openxmlformats.org/officeDocument/2006/relationships">
+  <p:cSld>
+    <p:bg>
+      <p:bgPr>
+        <a:solidFill>
+          <a:srgbClr val="FFFFFF"/>
+        </a:solidFill>
+        <a:effectLst/>
+      </p:bgPr>
+    </p:bg>
+    <p:spTree>
+      <p:nvGrpSpPr>
+        <p:cNvPr id="1" name=""/>
+        <p:cNvGrpSpPr/>
+        <p:nvPr/>
+      </p:nvGrpSpPr>
+      <p:grpSpPr/>
+      <p:sp>
+        <p:nvSpPr>
+          <p:cNvPr id="2" name="Rectangle 1"/>
+          <p:cNvSpPr/>
+          <p:nvPr/>
+        </p:nvSpPr>
+        <p:spPr>
+          <a:xfrm>
+            <a:off x="0" y="0"/>
+            <a:ext cx="12191695" cy="960120"/>
+          </a:xfrm>
+          <a:prstGeom prst="rect">
+            <a:avLst/>
+          </a:prstGeom>
+          <a:solidFill>
+            <a:srgbClr val="095292"/>
+          </a:solidFill>
+          <a:ln>
+            <a:noFill/>
+          </a:ln>
+        </p:spPr>
+        <p:style>
+          <a:lnRef idx="1">
+            <a:schemeClr val="accent1"/>
+          </a:lnRef>
+          <a:fillRef idx="3">
+            <a:schemeClr val="accent1"/>
+          </a:fillRef>
+          <a:effectRef idx="2">
+            <a:schemeClr val="accent1"/>
+          </a:effectRef>
+          <a:fontRef idx="minor">
+            <a:schemeClr val="lt1"/>
+          </a:fontRef>
+        </p:style>
+        <p:txBody>
+          <a:bodyPr rtlCol="0" anchor="ctr"/>
+          <a:lstStyle/>
+          <a:p>
+            <a:pPr algn="ctr"/>
+          </a:p>
+        </p:txBody>
+      </p:sp>
+      <p:sp>
+        <p:nvSpPr>
+          <p:cNvPr id="3" name="Rectangle 2"/>
+          <p:cNvSpPr/>
+          <p:nvPr/>
+        </p:nvSpPr>
+        <p:spPr>
+          <a:xfrm>
+            <a:off x="0" y="960120"/>
+            <a:ext cx="12191695" cy="41148"/>
+          </a:xfrm>
+          <a:prstGeom prst="rect">
+            <a:avLst/>
+          </a:prstGeom>
+          <a:solidFill>
+            <a:srgbClr val="FFD000"/>
+          </a:solidFill>
+          <a:ln>
+            <a:noFill/>
+          </a:ln>
+        </p:spPr>
+        <p:style>
+          <a:lnRef idx="1">
+            <a:schemeClr val="accent1"/>
+          </a:lnRef>
+          <a:fillRef idx="3">
+            <a:schemeClr val="accent1"/>
+          </a:fillRef>
+          <a:effectRef idx="2">
+            <a:schemeClr val="accent1"/>
+          </a:effectRef>
+          <a:fontRef idx="minor">
+            <a:schemeClr val="lt1"/>
+          </a:fontRef>
+        </p:style>
+        <p:txBody>
+          <a:bodyPr rtlCol="0" anchor="ctr"/>
+          <a:lstStyle/>
+          <a:p>
+            <a:pPr algn="ctr"/>
+          </a:p>
+        </p:txBody>
+      </p:sp>
+      <p:sp>
+        <p:nvSpPr>
+          <p:cNvPr id="4" name="TextBox 3"/>
+          <p:cNvSpPr txBox="1"/>
+          <p:nvPr/>
+        </p:nvSpPr>
+        <p:spPr>
+          <a:xfrm>
+            <a:off x="457200" y="164592"/>
+            <a:ext cx="11277295" cy="502920"/>
+          </a:xfrm>
+          <a:prstGeom prst="rect">
+            <a:avLst/>
+          </a:prstGeom>
+          <a:noFill/>
+        </p:spPr>
+        <p:txBody>
+          <a:bodyPr wrap="square">
+            <a:spAutoFit/>
+          </a:bodyPr>
+          <a:lstStyle/>
+          <a:p>
+            <a:r>
+              <a:rPr sz="2600" b="1" i="0">
+                <a:solidFill>
+                  <a:srgbClr val="FFFFFF"/>
+                </a:solidFill>
+                <a:latin typeface="Calibri"/>
+              </a:rPr>
+              <a:t>El pipeline del stub de CloudLite, paso por paso (2/2)</a:t>
+            </a:r>
+          </a:p>
+        </p:txBody>
+      </p:sp>
+      <p:sp>
+        <p:nvSpPr>
+          <p:cNvPr id="5" name="TextBox 4"/>
+          <p:cNvSpPr txBox="1"/>
+          <p:nvPr/>
+        </p:nvSpPr>
+        <p:spPr>
+          <a:xfrm>
+            <a:off x="457200" y="1170432"/>
+            <a:ext cx="11277295" cy="5230368"/>
+          </a:xfrm>
+          <a:prstGeom prst="rect">
+            <a:avLst/>
+          </a:prstGeom>
+          <a:noFill/>
+        </p:spPr>
+        <p:txBody>
+          <a:bodyPr wrap="square">
+            <a:spAutoFit/>
+          </a:bodyPr>
+          <a:lstStyle/>
+          <a:p>
+            <a:pPr>
+              <a:spcAft>
+                <a:spcPts val="800"/>
+              </a:spcAft>
+            </a:pPr>
+            <a:r>
+              <a:rPr sz="2000" b="0" i="0">
+                <a:solidFill>
+                  <a:srgbClr val="333333"/>
+                </a:solidFill>
+                <a:latin typeface="Calibri"/>
+              </a:rPr>
+              <a:t>–   Que docker build forme parte de la construccion tiene un valor extra que conviene senalar: comprueba en cada cambio que el Dockerfile sigue siendo valido, que es una de las cosas que se rompen en silencio.</a:t>
+            </a:r>
+          </a:p>
+          <a:p>
+            <a:pPr>
+              <a:spcAft>
+                <a:spcPts val="800"/>
+              </a:spcAft>
+            </a:pPr>
+            <a:r>
+              <a:rPr sz="2000" b="0" i="0">
+                <a:solidFill>
+                  <a:srgbClr val="333333"/>
+                </a:solidFill>
+                <a:latin typeface="Calibri"/>
+              </a:rPr>
+              <a:t>–   La evidencia del entregable es doble: el archivo ci.yml en el repositorio y la captura de una corrida en verde con los nombres de los pasos visibles</a:t>
+            </a:r>
+          </a:p>
+          <a:p>
+            <a:pPr>
+              <a:spcAft>
+                <a:spcPts val="800"/>
+              </a:spcAft>
+            </a:pPr>
+            <a:r>
+              <a:rPr sz="2000" b="0" i="0">
+                <a:solidFill>
+                  <a:srgbClr val="333333"/>
+                </a:solidFill>
+                <a:latin typeface="Calibri"/>
+              </a:rPr>
+              <a:t>–   Si Actions falla por cuota o por red se acepta el YAML con la explicacion paso por paso, pero eso es plan B y hay que decir que lo es.</a:t>
+            </a:r>
+          </a:p>
+        </p:txBody>
+      </p:sp>
+      <p:sp>
+        <p:nvSpPr>
+          <p:cNvPr id="6" name="TextBox 5"/>
+          <p:cNvSpPr txBox="1"/>
+          <p:nvPr/>
+        </p:nvSpPr>
+        <p:spPr>
+          <a:xfrm>
+            <a:off x="11185855" y="6473952"/>
+            <a:ext cx="640080" cy="274320"/>
+          </a:xfrm>
+          <a:prstGeom prst="rect">
+            <a:avLst/>
+          </a:prstGeom>
+          <a:noFill/>
+        </p:spPr>
+        <p:txBody>
+          <a:bodyPr wrap="square">
+            <a:spAutoFit/>
+          </a:bodyPr>
+          <a:lstStyle/>
+          <a:p>
+            <a:pPr algn="r"/>
+            <a:r>
+              <a:rPr sz="1100" b="0" i="0">
+                <a:solidFill>
+                  <a:srgbClr val="666666"/>
+                </a:solidFill>
+                <a:latin typeface="Calibri"/>
+              </a:rPr>
+              <a:t>21</a:t>
+            </a:r>
+          </a:p>
+        </p:txBody>
+      </p:sp>
+    </p:spTree>
+  </p:cSld>
+  <p:clrMapOvr>
+    <a:masterClrMapping/>
+  </p:clrMapOvr>
+</p:sld>
+</file>
+
+<file path=ppt/slides/slide22.xml><?xml version="1.0" encoding="utf-8"?>
+<p:sld xmlns:a="http://schemas.openxmlformats.org/drawingml/2006/main" xmlns:p="http://schemas.openxmlformats.org/presentationml/2006/main" xmlns:r="http://schemas.openxmlformats.org/officeDocument/2006/relationships">
+  <p:cSld>
+    <p:bg>
+      <p:bgPr>
+        <a:solidFill>
+          <a:srgbClr val="FFFFFF"/>
+        </a:solidFill>
+        <a:effectLst/>
+      </p:bgPr>
+    </p:bg>
+    <p:spTree>
+      <p:nvGrpSpPr>
+        <p:cNvPr id="1" name=""/>
+        <p:cNvGrpSpPr/>
+        <p:nvPr/>
+      </p:nvGrpSpPr>
+      <p:grpSpPr/>
+      <p:sp>
+        <p:nvSpPr>
+          <p:cNvPr id="2" name="Rectangle 1"/>
+          <p:cNvSpPr/>
+          <p:nvPr/>
+        </p:nvSpPr>
+        <p:spPr>
+          <a:xfrm>
+            <a:off x="0" y="0"/>
+            <a:ext cx="12191695" cy="960120"/>
+          </a:xfrm>
+          <a:prstGeom prst="rect">
+            <a:avLst/>
+          </a:prstGeom>
+          <a:solidFill>
+            <a:srgbClr val="095292"/>
+          </a:solidFill>
+          <a:ln>
+            <a:noFill/>
+          </a:ln>
+        </p:spPr>
+        <p:style>
+          <a:lnRef idx="1">
+            <a:schemeClr val="accent1"/>
+          </a:lnRef>
+          <a:fillRef idx="3">
+            <a:schemeClr val="accent1"/>
+          </a:fillRef>
+          <a:effectRef idx="2">
+            <a:schemeClr val="accent1"/>
+          </a:effectRef>
+          <a:fontRef idx="minor">
+            <a:schemeClr val="lt1"/>
+          </a:fontRef>
+        </p:style>
+        <p:txBody>
+          <a:bodyPr rtlCol="0" anchor="ctr"/>
+          <a:lstStyle/>
+          <a:p>
+            <a:pPr algn="ctr"/>
+          </a:p>
+        </p:txBody>
+      </p:sp>
+      <p:sp>
+        <p:nvSpPr>
+          <p:cNvPr id="3" name="Rectangle 2"/>
+          <p:cNvSpPr/>
+          <p:nvPr/>
+        </p:nvSpPr>
+        <p:spPr>
+          <a:xfrm>
+            <a:off x="0" y="960120"/>
+            <a:ext cx="12191695" cy="41148"/>
+          </a:xfrm>
+          <a:prstGeom prst="rect">
+            <a:avLst/>
+          </a:prstGeom>
+          <a:solidFill>
+            <a:srgbClr val="FFD000"/>
+          </a:solidFill>
+          <a:ln>
+            <a:noFill/>
+          </a:ln>
+        </p:spPr>
+        <p:style>
+          <a:lnRef idx="1">
+            <a:schemeClr val="accent1"/>
+          </a:lnRef>
+          <a:fillRef idx="3">
+            <a:schemeClr val="accent1"/>
+          </a:fillRef>
+          <a:effectRef idx="2">
+            <a:schemeClr val="accent1"/>
+          </a:effectRef>
+          <a:fontRef idx="minor">
+            <a:schemeClr val="lt1"/>
+          </a:fontRef>
+        </p:style>
+        <p:txBody>
+          <a:bodyPr rtlCol="0" anchor="ctr"/>
+          <a:lstStyle/>
+          <a:p>
+            <a:pPr algn="ctr"/>
+          </a:p>
+        </p:txBody>
+      </p:sp>
+      <p:sp>
+        <p:nvSpPr>
+          <p:cNvPr id="4" name="TextBox 3"/>
+          <p:cNvSpPr txBox="1"/>
+          <p:nvPr/>
+        </p:nvSpPr>
+        <p:spPr>
+          <a:xfrm>
+            <a:off x="457200" y="164592"/>
+            <a:ext cx="11277295" cy="502920"/>
+          </a:xfrm>
+          <a:prstGeom prst="rect">
+            <a:avLst/>
+          </a:prstGeom>
+          <a:noFill/>
+        </p:spPr>
+        <p:txBody>
+          <a:bodyPr wrap="square">
+            <a:spAutoFit/>
+          </a:bodyPr>
+          <a:lstStyle/>
+          <a:p>
+            <a:r>
+              <a:rPr sz="2600" b="1" i="0">
+                <a:solidFill>
+                  <a:srgbClr val="FFFFFF"/>
+                </a:solidFill>
+                <a:latin typeface="Calibri"/>
+              </a:rPr>
+              <a:t>La condicion de fallo: la pregunta que separa un CI de una decoracion verde (1/2)</a:t>
+            </a:r>
+          </a:p>
+        </p:txBody>
+      </p:sp>
+      <p:sp>
+        <p:nvSpPr>
+          <p:cNvPr id="5" name="TextBox 4"/>
+          <p:cNvSpPr txBox="1"/>
+          <p:nvPr/>
+        </p:nvSpPr>
+        <p:spPr>
+          <a:xfrm>
+            <a:off x="457200" y="1170432"/>
+            <a:ext cx="11277295" cy="5230368"/>
+          </a:xfrm>
+          <a:prstGeom prst="rect">
+            <a:avLst/>
+          </a:prstGeom>
+          <a:noFill/>
+        </p:spPr>
+        <p:txBody>
+          <a:bodyPr wrap="square">
+            <a:spAutoFit/>
+          </a:bodyPr>
+          <a:lstStyle/>
+          <a:p>
+            <a:pPr>
+              <a:spcAft>
+                <a:spcPts val="800"/>
+              </a:spcAft>
+            </a:pPr>
+            <a:r>
+              <a:rPr sz="2000" b="0" i="0">
+                <a:solidFill>
+                  <a:srgbClr val="333333"/>
+                </a:solidFill>
+                <a:latin typeface="Calibri"/>
+              </a:rPr>
+              <a:t>–   La pregunta 8 vale 5 puntos y no pregunta por CI en general: pregunta por el ci.yml del estudiante, en tres campos.</a:t>
+            </a:r>
+          </a:p>
+          <a:p>
+            <a:pPr>
+              <a:spcAft>
+                <a:spcPts val="800"/>
+              </a:spcAft>
+            </a:pPr>
+            <a:r>
+              <a:rPr sz="2000" b="0" i="0">
+                <a:solidFill>
+                  <a:srgbClr val="333333"/>
+                </a:solidFill>
+                <a:latin typeface="Calibri"/>
+              </a:rPr>
+              <a:t>–   Uno y medio, que se compila o se instala.</a:t>
+            </a:r>
+          </a:p>
+          <a:p>
+            <a:pPr>
+              <a:spcAft>
+                <a:spcPts val="800"/>
+              </a:spcAft>
+            </a:pPr>
+            <a:r>
+              <a:rPr sz="2000" b="0" i="0">
+                <a:solidFill>
+                  <a:srgbClr val="333333"/>
+                </a:solidFill>
+                <a:latin typeface="Calibri"/>
+              </a:rPr>
+              <a:t>–   Uno y medio, que se ejecuta en la prueba y que comprueba exactamente.</a:t>
+            </a:r>
+          </a:p>
+          <a:p>
+            <a:pPr>
+              <a:spcAft>
+                <a:spcPts val="800"/>
+              </a:spcAft>
+            </a:pPr>
+            <a:r>
+              <a:rPr sz="2000" b="0" i="0">
+                <a:solidFill>
+                  <a:srgbClr val="333333"/>
+                </a:solidFill>
+                <a:latin typeface="Calibri"/>
+              </a:rPr>
+              <a:t>–   Y dos puntos, el corazon de la pregunta, con que condicion el pipeline debe FALLAR.</a:t>
+            </a:r>
+          </a:p>
+          <a:p>
+            <a:pPr>
+              <a:spcAft>
+                <a:spcPts val="800"/>
+              </a:spcAft>
+            </a:pPr>
+            <a:r>
+              <a:rPr sz="2000" b="0" i="0">
+                <a:solidFill>
+                  <a:srgbClr val="333333"/>
+                </a:solidFill>
+                <a:latin typeface="Calibri"/>
+              </a:rPr>
+              <a:t>–   Ese ultimo campo vale CERO si el pipeline no puede fallar nunca, y hay que explicar por que no es una crueldad de la rubrica: un workflow cuyo unico paso imprime un mensaje de exito siempre sale verde</a:t>
+            </a:r>
+          </a:p>
+          <a:p>
+            <a:pPr>
+              <a:spcAft>
+                <a:spcPts val="800"/>
+              </a:spcAft>
+            </a:pPr>
+            <a:r>
+              <a:rPr sz="2000" b="0" i="0">
+                <a:solidFill>
+                  <a:srgbClr val="333333"/>
+                </a:solidFill>
+                <a:latin typeface="Calibri"/>
+              </a:rPr>
+              <a:t>–   Y un check que siempre sale verde no aporta ninguna informacion; es una decoracion.</a:t>
+            </a:r>
+          </a:p>
+        </p:txBody>
+      </p:sp>
+      <p:sp>
+        <p:nvSpPr>
+          <p:cNvPr id="6" name="TextBox 5"/>
+          <p:cNvSpPr txBox="1"/>
+          <p:nvPr/>
+        </p:nvSpPr>
+        <p:spPr>
+          <a:xfrm>
+            <a:off x="11185855" y="6473952"/>
+            <a:ext cx="640080" cy="274320"/>
+          </a:xfrm>
+          <a:prstGeom prst="rect">
+            <a:avLst/>
+          </a:prstGeom>
+          <a:noFill/>
+        </p:spPr>
+        <p:txBody>
+          <a:bodyPr wrap="square">
+            <a:spAutoFit/>
+          </a:bodyPr>
+          <a:lstStyle/>
+          <a:p>
+            <a:pPr algn="r"/>
+            <a:r>
+              <a:rPr sz="1100" b="0" i="0">
+                <a:solidFill>
+                  <a:srgbClr val="666666"/>
+                </a:solidFill>
+                <a:latin typeface="Calibri"/>
+              </a:rPr>
+              <a:t>22</a:t>
+            </a:r>
+          </a:p>
+        </p:txBody>
+      </p:sp>
+    </p:spTree>
+  </p:cSld>
+  <p:clrMapOvr>
+    <a:masterClrMapping/>
+  </p:clrMapOvr>
+</p:sld>
+</file>
+
+<file path=ppt/slides/slide23.xml><?xml version="1.0" encoding="utf-8"?>
+<p:sld xmlns:a="http://schemas.openxmlformats.org/drawingml/2006/main" xmlns:p="http://schemas.openxmlformats.org/presentationml/2006/main" xmlns:r="http://schemas.openxmlformats.org/officeDocument/2006/relationships">
+  <p:cSld>
+    <p:bg>
+      <p:bgPr>
+        <a:solidFill>
+          <a:srgbClr val="FFFFFF"/>
+        </a:solidFill>
+        <a:effectLst/>
+      </p:bgPr>
+    </p:bg>
+    <p:spTree>
+      <p:nvGrpSpPr>
+        <p:cNvPr id="1" name=""/>
+        <p:cNvGrpSpPr/>
+        <p:nvPr/>
+      </p:nvGrpSpPr>
+      <p:grpSpPr/>
+      <p:sp>
+        <p:nvSpPr>
+          <p:cNvPr id="2" name="Rectangle 1"/>
+          <p:cNvSpPr/>
+          <p:nvPr/>
+        </p:nvSpPr>
+        <p:spPr>
+          <a:xfrm>
+            <a:off x="0" y="0"/>
+            <a:ext cx="12191695" cy="960120"/>
+          </a:xfrm>
+          <a:prstGeom prst="rect">
+            <a:avLst/>
+          </a:prstGeom>
+          <a:solidFill>
+            <a:srgbClr val="095292"/>
+          </a:solidFill>
+          <a:ln>
+            <a:noFill/>
+          </a:ln>
+        </p:spPr>
+        <p:style>
+          <a:lnRef idx="1">
+            <a:schemeClr val="accent1"/>
+          </a:lnRef>
+          <a:fillRef idx="3">
+            <a:schemeClr val="accent1"/>
+          </a:fillRef>
+          <a:effectRef idx="2">
+            <a:schemeClr val="accent1"/>
+          </a:effectRef>
+          <a:fontRef idx="minor">
+            <a:schemeClr val="lt1"/>
+          </a:fontRef>
+        </p:style>
+        <p:txBody>
+          <a:bodyPr rtlCol="0" anchor="ctr"/>
+          <a:lstStyle/>
+          <a:p>
+            <a:pPr algn="ctr"/>
+          </a:p>
+        </p:txBody>
+      </p:sp>
+      <p:sp>
+        <p:nvSpPr>
+          <p:cNvPr id="3" name="Rectangle 2"/>
+          <p:cNvSpPr/>
+          <p:nvPr/>
+        </p:nvSpPr>
+        <p:spPr>
+          <a:xfrm>
+            <a:off x="0" y="960120"/>
+            <a:ext cx="12191695" cy="41148"/>
+          </a:xfrm>
+          <a:prstGeom prst="rect">
+            <a:avLst/>
+          </a:prstGeom>
+          <a:solidFill>
+            <a:srgbClr val="FFD000"/>
+          </a:solidFill>
+          <a:ln>
+            <a:noFill/>
+          </a:ln>
+        </p:spPr>
+        <p:style>
+          <a:lnRef idx="1">
+            <a:schemeClr val="accent1"/>
+          </a:lnRef>
+          <a:fillRef idx="3">
+            <a:schemeClr val="accent1"/>
+          </a:fillRef>
+          <a:effectRef idx="2">
+            <a:schemeClr val="accent1"/>
+          </a:effectRef>
+          <a:fontRef idx="minor">
+            <a:schemeClr val="lt1"/>
+          </a:fontRef>
+        </p:style>
+        <p:txBody>
+          <a:bodyPr rtlCol="0" anchor="ctr"/>
+          <a:lstStyle/>
+          <a:p>
+            <a:pPr algn="ctr"/>
+          </a:p>
+        </p:txBody>
+      </p:sp>
+      <p:sp>
+        <p:nvSpPr>
+          <p:cNvPr id="4" name="TextBox 3"/>
+          <p:cNvSpPr txBox="1"/>
+          <p:nvPr/>
+        </p:nvSpPr>
+        <p:spPr>
+          <a:xfrm>
+            <a:off x="457200" y="164592"/>
+            <a:ext cx="11277295" cy="502920"/>
+          </a:xfrm>
+          <a:prstGeom prst="rect">
+            <a:avLst/>
+          </a:prstGeom>
+          <a:noFill/>
+        </p:spPr>
+        <p:txBody>
+          <a:bodyPr wrap="square">
+            <a:spAutoFit/>
+          </a:bodyPr>
+          <a:lstStyle/>
+          <a:p>
+            <a:r>
+              <a:rPr sz="2600" b="1" i="0">
+                <a:solidFill>
+                  <a:srgbClr val="FFFFFF"/>
+                </a:solidFill>
+                <a:latin typeface="Calibri"/>
+              </a:rPr>
+              <a:t>La condicion de fallo: la pregunta que separa un CI de una decoracion verde (2/2)</a:t>
+            </a:r>
+          </a:p>
+        </p:txBody>
+      </p:sp>
+      <p:sp>
+        <p:nvSpPr>
+          <p:cNvPr id="5" name="TextBox 4"/>
+          <p:cNvSpPr txBox="1"/>
+          <p:nvPr/>
+        </p:nvSpPr>
+        <p:spPr>
+          <a:xfrm>
+            <a:off x="457200" y="1170432"/>
+            <a:ext cx="11277295" cy="5230368"/>
+          </a:xfrm>
+          <a:prstGeom prst="rect">
+            <a:avLst/>
+          </a:prstGeom>
+          <a:noFill/>
+        </p:spPr>
+        <p:txBody>
+          <a:bodyPr wrap="square">
+            <a:spAutoFit/>
+          </a:bodyPr>
+          <a:lstStyle/>
+          <a:p>
+            <a:pPr>
+              <a:spcAft>
+                <a:spcPts val="800"/>
+              </a:spcAft>
+            </a:pPr>
+            <a:r>
+              <a:rPr sz="2000" b="0" i="0">
+                <a:solidFill>
+                  <a:srgbClr val="333333"/>
+                </a:solidFill>
+                <a:latin typeface="Calibri"/>
+              </a:rPr>
+              <a:t>–   Si la respuesta no aparece en diez segundos, el pipeline no valida nada todavia.</a:t>
+            </a:r>
+          </a:p>
+          <a:p>
+            <a:pPr>
+              <a:spcAft>
+                <a:spcPts val="800"/>
+              </a:spcAft>
+            </a:pPr>
+            <a:r>
+              <a:rPr sz="2000" b="0" i="0">
+                <a:solidFill>
+                  <a:srgbClr val="333333"/>
+                </a:solidFill>
+                <a:latin typeface="Calibri"/>
+              </a:rPr>
+              <a:t>–   Aqui es donde aparece la pregunta previsible del grupo, y hay que salir a su encuentro: para que escribir pruebas de un stub que casi no hace nada.</a:t>
+            </a:r>
+          </a:p>
+          <a:p>
+            <a:pPr>
+              <a:spcAft>
+                <a:spcPts val="800"/>
+              </a:spcAft>
+            </a:pPr>
+            <a:r>
+              <a:rPr sz="2000" b="0" i="0">
+                <a:solidFill>
+                  <a:srgbClr val="333333"/>
+                </a:solidFill>
+                <a:latin typeface="Calibri"/>
+              </a:rPr>
+              <a:t>–   La respuesta es que una sola prueba que verifique que el endpoint /health responde 200 detecta la clase de error mas costosa en operacion</a:t>
+            </a:r>
+          </a:p>
+          <a:p>
+            <a:pPr>
+              <a:spcAft>
+                <a:spcPts val="800"/>
+              </a:spcAft>
+            </a:pPr>
+            <a:r>
+              <a:rPr sz="2000" b="0" i="0">
+                <a:solidFill>
+                  <a:srgbClr val="333333"/>
+                </a:solidFill>
+                <a:latin typeface="Calibri"/>
+              </a:rPr>
+              <a:t>–   Que la aplicacion ya no arranca; y con eso la condicion de fallo se escribe sola: el check sale rojo si /health deja de responder 200, si falta una dependencia declarada o si el docker build no compila.</a:t>
+            </a:r>
+          </a:p>
+        </p:txBody>
+      </p:sp>
+      <p:sp>
+        <p:nvSpPr>
+          <p:cNvPr id="6" name="TextBox 5"/>
+          <p:cNvSpPr txBox="1"/>
+          <p:nvPr/>
+        </p:nvSpPr>
+        <p:spPr>
+          <a:xfrm>
+            <a:off x="11185855" y="6473952"/>
+            <a:ext cx="640080" cy="274320"/>
+          </a:xfrm>
+          <a:prstGeom prst="rect">
+            <a:avLst/>
+          </a:prstGeom>
+          <a:noFill/>
+        </p:spPr>
+        <p:txBody>
+          <a:bodyPr wrap="square">
+            <a:spAutoFit/>
+          </a:bodyPr>
+          <a:lstStyle/>
+          <a:p>
+            <a:pPr algn="r"/>
+            <a:r>
+              <a:rPr sz="1100" b="0" i="0">
+                <a:solidFill>
+                  <a:srgbClr val="666666"/>
+                </a:solidFill>
+                <a:latin typeface="Calibri"/>
+              </a:rPr>
+              <a:t>23</a:t>
+            </a:r>
+          </a:p>
+        </p:txBody>
+      </p:sp>
+    </p:spTree>
+  </p:cSld>
+  <p:clrMapOvr>
+    <a:masterClrMapping/>
+  </p:clrMapOvr>
+</p:sld>
+</file>
+
+<file path=ppt/slides/slide24.xml><?xml version="1.0" encoding="utf-8"?>
+<p:sld xmlns:a="http://schemas.openxmlformats.org/drawingml/2006/main" xmlns:p="http://schemas.openxmlformats.org/presentationml/2006/main" xmlns:r="http://schemas.openxmlformats.org/officeDocument/2006/relationships">
+  <p:cSld>
+    <p:bg>
+      <p:bgPr>
+        <a:solidFill>
+          <a:srgbClr val="FFFFFF"/>
+        </a:solidFill>
+        <a:effectLst/>
+      </p:bgPr>
+    </p:bg>
+    <p:spTree>
+      <p:nvGrpSpPr>
+        <p:cNvPr id="1" name=""/>
+        <p:cNvGrpSpPr/>
+        <p:nvPr/>
+      </p:nvGrpSpPr>
+      <p:grpSpPr/>
+      <p:sp>
+        <p:nvSpPr>
+          <p:cNvPr id="2" name="Rectangle 1"/>
+          <p:cNvSpPr/>
+          <p:nvPr/>
+        </p:nvSpPr>
+        <p:spPr>
+          <a:xfrm>
+            <a:off x="0" y="0"/>
+            <a:ext cx="12191695" cy="960120"/>
+          </a:xfrm>
+          <a:prstGeom prst="rect">
+            <a:avLst/>
+          </a:prstGeom>
+          <a:solidFill>
+            <a:srgbClr val="095292"/>
+          </a:solidFill>
+          <a:ln>
+            <a:noFill/>
+          </a:ln>
+        </p:spPr>
+        <p:style>
+          <a:lnRef idx="1">
+            <a:schemeClr val="accent1"/>
+          </a:lnRef>
+          <a:fillRef idx="3">
+            <a:schemeClr val="accent1"/>
+          </a:fillRef>
+          <a:effectRef idx="2">
+            <a:schemeClr val="accent1"/>
+          </a:effectRef>
+          <a:fontRef idx="minor">
+            <a:schemeClr val="lt1"/>
+          </a:fontRef>
+        </p:style>
+        <p:txBody>
+          <a:bodyPr rtlCol="0" anchor="ctr"/>
+          <a:lstStyle/>
+          <a:p>
+            <a:pPr algn="ctr"/>
+          </a:p>
+        </p:txBody>
+      </p:sp>
+      <p:sp>
+        <p:nvSpPr>
+          <p:cNvPr id="3" name="Rectangle 2"/>
+          <p:cNvSpPr/>
+          <p:nvPr/>
+        </p:nvSpPr>
+        <p:spPr>
+          <a:xfrm>
+            <a:off x="0" y="960120"/>
+            <a:ext cx="12191695" cy="41148"/>
+          </a:xfrm>
+          <a:prstGeom prst="rect">
+            <a:avLst/>
+          </a:prstGeom>
+          <a:solidFill>
+            <a:srgbClr val="FFD000"/>
+          </a:solidFill>
+          <a:ln>
+            <a:noFill/>
+          </a:ln>
+        </p:spPr>
+        <p:style>
+          <a:lnRef idx="1">
+            <a:schemeClr val="accent1"/>
+          </a:lnRef>
+          <a:fillRef idx="3">
+            <a:schemeClr val="accent1"/>
+          </a:fillRef>
+          <a:effectRef idx="2">
+            <a:schemeClr val="accent1"/>
+          </a:effectRef>
+          <a:fontRef idx="minor">
+            <a:schemeClr val="lt1"/>
+          </a:fontRef>
+        </p:style>
+        <p:txBody>
+          <a:bodyPr rtlCol="0" anchor="ctr"/>
+          <a:lstStyle/>
+          <a:p>
+            <a:pPr algn="ctr"/>
+          </a:p>
+        </p:txBody>
+      </p:sp>
+      <p:sp>
+        <p:nvSpPr>
+          <p:cNvPr id="4" name="TextBox 3"/>
+          <p:cNvSpPr txBox="1"/>
+          <p:nvPr/>
+        </p:nvSpPr>
+        <p:spPr>
+          <a:xfrm>
+            <a:off x="457200" y="164592"/>
+            <a:ext cx="11277295" cy="502920"/>
+          </a:xfrm>
+          <a:prstGeom prst="rect">
+            <a:avLst/>
+          </a:prstGeom>
+          <a:noFill/>
+        </p:spPr>
+        <p:txBody>
+          <a:bodyPr wrap="square">
+            <a:spAutoFit/>
+          </a:bodyPr>
+          <a:lstStyle/>
+          <a:p>
+            <a:r>
+              <a:rPr sz="2600" b="1" i="0">
+                <a:solidFill>
+                  <a:srgbClr val="FFFFFF"/>
+                </a:solidFill>
+                <a:latin typeface="Calibri"/>
+              </a:rPr>
+              <a:t>Donde se ejecuta de verdad la politica de secretos de la Clase 6</a:t>
+            </a:r>
+          </a:p>
+        </p:txBody>
+      </p:sp>
+      <p:sp>
+        <p:nvSpPr>
+          <p:cNvPr id="5" name="TextBox 4"/>
+          <p:cNvSpPr txBox="1"/>
+          <p:nvPr/>
+        </p:nvSpPr>
+        <p:spPr>
+          <a:xfrm>
+            <a:off x="457200" y="1170432"/>
+            <a:ext cx="11277295" cy="5230368"/>
+          </a:xfrm>
+          <a:prstGeom prst="rect">
+            <a:avLst/>
+          </a:prstGeom>
+          <a:noFill/>
+        </p:spPr>
+        <p:txBody>
+          <a:bodyPr wrap="square">
+            <a:spAutoFit/>
+          </a:bodyPr>
+          <a:lstStyle/>
+          <a:p>
+            <a:pPr>
+              <a:spcAft>
+                <a:spcPts val="800"/>
+              </a:spcAft>
+            </a:pPr>
+            <a:r>
+              <a:rPr sz="1900" b="0" i="0">
+                <a:solidFill>
+                  <a:srgbClr val="333333"/>
+                </a:solidFill>
+                <a:latin typeface="Calibri"/>
+              </a:rPr>
+              <a:t>–   El pipeline es tambien donde se ejecuta de verdad la politica de secretos escrita en la Clase 6.</a:t>
+            </a:r>
+          </a:p>
+          <a:p>
+            <a:pPr>
+              <a:spcAft>
+                <a:spcPts val="800"/>
+              </a:spcAft>
+            </a:pPr>
+            <a:r>
+              <a:rPr sz="1900" b="0" i="0">
+                <a:solidFill>
+                  <a:srgbClr val="333333"/>
+                </a:solidFill>
+                <a:latin typeface="Calibri"/>
+              </a:rPr>
+              <a:t>–   Los valores sensibles se guardan en el repositorio bajo Settings, Secrets and variables, Actions; el workflow los referencia por nombre y la plataforma los inyecta como variables de entorno solo durante la corrida.</a:t>
+            </a:r>
+          </a:p>
+          <a:p>
+            <a:pPr>
+              <a:spcAft>
+                <a:spcPts val="800"/>
+              </a:spcAft>
+            </a:pPr>
+            <a:r>
+              <a:rPr sz="1900" b="0" i="0">
+                <a:solidFill>
+                  <a:srgbClr val="333333"/>
+                </a:solidFill>
+                <a:latin typeface="Calibri"/>
+              </a:rPr>
+              <a:t>–   Dos detalles evitan sustos.</a:t>
+            </a:r>
+          </a:p>
+          <a:p>
+            <a:pPr>
+              <a:spcAft>
+                <a:spcPts val="800"/>
+              </a:spcAft>
+            </a:pPr>
+            <a:r>
+              <a:rPr sz="1900" b="0" i="0">
+                <a:solidFill>
+                  <a:srgbClr val="333333"/>
+                </a:solidFill>
+                <a:latin typeface="Calibri"/>
+              </a:rPr>
+              <a:t>–   La plataforma enmascara los secretos en el registro de salida, pero enmascarar no es impedir la fuga: si un paso imprime el valor transformado, por ejemplo codificado, sale en claro; la regla es no imprimir secretos nunca.</a:t>
+            </a:r>
+          </a:p>
+          <a:p>
+            <a:pPr>
+              <a:spcAft>
+                <a:spcPts val="800"/>
+              </a:spcAft>
+            </a:pPr>
+            <a:r>
+              <a:rPr sz="1900" b="0" i="0">
+                <a:solidFill>
+                  <a:srgbClr val="333333"/>
+                </a:solidFill>
+                <a:latin typeface="Calibri"/>
+              </a:rPr>
+              <a:t>–   Y por diseno los secretos no se entregan a las corridas disparadas por un pull_request que viene de un fork, para que un extrano no pueda proponer un cambio que los imprima.</a:t>
+            </a:r>
+          </a:p>
+          <a:p>
+            <a:pPr>
+              <a:spcAft>
+                <a:spcPts val="800"/>
+              </a:spcAft>
+            </a:pPr>
+            <a:r>
+              <a:rPr sz="1900" b="0" i="0">
+                <a:solidFill>
+                  <a:srgbClr val="333333"/>
+                </a:solidFill>
+                <a:latin typeface="Calibri"/>
+              </a:rPr>
+              <a:t>–   La consecuencia practica es que la validacion de un cambio externo no puede depender de credenciales, y por eso las pruebas del stub deben correr sin acceso a servicios reales, con valores ficticios o un doble simulado.</a:t>
+            </a:r>
+          </a:p>
+          <a:p>
+            <a:pPr>
+              <a:spcAft>
+                <a:spcPts val="800"/>
+              </a:spcAft>
+            </a:pPr>
+            <a:r>
+              <a:rPr sz="1900" b="0" i="0">
+                <a:solidFill>
+                  <a:srgbClr val="333333"/>
+                </a:solidFill>
+                <a:latin typeface="Calibri"/>
+              </a:rPr>
+              <a:t>–   Y el recordatorio de calificacion: un secreto en claro en el YAML no descuenta, anula la pregunta 7 entera.</a:t>
+            </a:r>
+          </a:p>
+        </p:txBody>
+      </p:sp>
+      <p:sp>
+        <p:nvSpPr>
+          <p:cNvPr id="6" name="TextBox 5"/>
+          <p:cNvSpPr txBox="1"/>
+          <p:nvPr/>
+        </p:nvSpPr>
+        <p:spPr>
+          <a:xfrm>
+            <a:off x="11185855" y="6473952"/>
+            <a:ext cx="640080" cy="274320"/>
+          </a:xfrm>
+          <a:prstGeom prst="rect">
+            <a:avLst/>
+          </a:prstGeom>
+          <a:noFill/>
+        </p:spPr>
+        <p:txBody>
+          <a:bodyPr wrap="square">
+            <a:spAutoFit/>
+          </a:bodyPr>
+          <a:lstStyle/>
+          <a:p>
+            <a:pPr algn="r"/>
+            <a:r>
+              <a:rPr sz="1100" b="0" i="0">
+                <a:solidFill>
+                  <a:srgbClr val="666666"/>
+                </a:solidFill>
+                <a:latin typeface="Calibri"/>
+              </a:rPr>
+              <a:t>24</a:t>
+            </a:r>
+          </a:p>
+        </p:txBody>
+      </p:sp>
+    </p:spTree>
+  </p:cSld>
+  <p:clrMapOvr>
+    <a:masterClrMapping/>
+  </p:clrMapOvr>
+</p:sld>
+</file>
+
+<file path=ppt/slides/slide25.xml><?xml version="1.0" encoding="utf-8"?>
+<p:sld xmlns:a="http://schemas.openxmlformats.org/drawingml/2006/main" xmlns:p="http://schemas.openxmlformats.org/presentationml/2006/main" xmlns:r="http://schemas.openxmlformats.org/officeDocument/2006/relationships">
+  <p:cSld>
+    <p:bg>
+      <p:bgPr>
+        <a:solidFill>
+          <a:srgbClr val="FFFFFF"/>
+        </a:solidFill>
+        <a:effectLst/>
+      </p:bgPr>
+    </p:bg>
+    <p:spTree>
+      <p:nvGrpSpPr>
+        <p:cNvPr id="1" name=""/>
+        <p:cNvGrpSpPr/>
+        <p:nvPr/>
+      </p:nvGrpSpPr>
+      <p:grpSpPr/>
+      <p:sp>
+        <p:nvSpPr>
+          <p:cNvPr id="2" name="Rectangle 1"/>
+          <p:cNvSpPr/>
+          <p:nvPr/>
+        </p:nvSpPr>
+        <p:spPr>
+          <a:xfrm>
+            <a:off x="0" y="0"/>
+            <a:ext cx="12191695" cy="960120"/>
+          </a:xfrm>
+          <a:prstGeom prst="rect">
+            <a:avLst/>
+          </a:prstGeom>
+          <a:solidFill>
+            <a:srgbClr val="095292"/>
+          </a:solidFill>
+          <a:ln>
+            <a:noFill/>
+          </a:ln>
+        </p:spPr>
+        <p:style>
+          <a:lnRef idx="1">
+            <a:schemeClr val="accent1"/>
+          </a:lnRef>
+          <a:fillRef idx="3">
+            <a:schemeClr val="accent1"/>
+          </a:fillRef>
+          <a:effectRef idx="2">
+            <a:schemeClr val="accent1"/>
+          </a:effectRef>
+          <a:fontRef idx="minor">
+            <a:schemeClr val="lt1"/>
+          </a:fontRef>
+        </p:style>
+        <p:txBody>
+          <a:bodyPr rtlCol="0" anchor="ctr"/>
+          <a:lstStyle/>
+          <a:p>
+            <a:pPr algn="ctr"/>
+          </a:p>
+        </p:txBody>
+      </p:sp>
+      <p:sp>
+        <p:nvSpPr>
+          <p:cNvPr id="3" name="Rectangle 2"/>
+          <p:cNvSpPr/>
+          <p:nvPr/>
+        </p:nvSpPr>
+        <p:spPr>
+          <a:xfrm>
+            <a:off x="0" y="960120"/>
+            <a:ext cx="12191695" cy="41148"/>
+          </a:xfrm>
+          <a:prstGeom prst="rect">
+            <a:avLst/>
+          </a:prstGeom>
+          <a:solidFill>
+            <a:srgbClr val="FFD000"/>
+          </a:solidFill>
+          <a:ln>
+            <a:noFill/>
+          </a:ln>
+        </p:spPr>
+        <p:style>
+          <a:lnRef idx="1">
+            <a:schemeClr val="accent1"/>
+          </a:lnRef>
+          <a:fillRef idx="3">
+            <a:schemeClr val="accent1"/>
+          </a:fillRef>
+          <a:effectRef idx="2">
+            <a:schemeClr val="accent1"/>
+          </a:effectRef>
+          <a:fontRef idx="minor">
+            <a:schemeClr val="lt1"/>
+          </a:fontRef>
+        </p:style>
+        <p:txBody>
+          <a:bodyPr rtlCol="0" anchor="ctr"/>
+          <a:lstStyle/>
+          <a:p>
+            <a:pPr algn="ctr"/>
+          </a:p>
+        </p:txBody>
+      </p:sp>
+      <p:sp>
+        <p:nvSpPr>
+          <p:cNvPr id="4" name="TextBox 3"/>
+          <p:cNvSpPr txBox="1"/>
+          <p:nvPr/>
+        </p:nvSpPr>
+        <p:spPr>
+          <a:xfrm>
+            <a:off x="457200" y="164592"/>
+            <a:ext cx="11277295" cy="502920"/>
+          </a:xfrm>
+          <a:prstGeom prst="rect">
+            <a:avLst/>
+          </a:prstGeom>
+          <a:noFill/>
+        </p:spPr>
+        <p:txBody>
+          <a:bodyPr wrap="square">
+            <a:spAutoFit/>
+          </a:bodyPr>
+          <a:lstStyle/>
+          <a:p>
+            <a:r>
+              <a:rPr sz="2600" b="1" i="0">
+                <a:solidFill>
+                  <a:srgbClr val="FFFFFF"/>
+                </a:solidFill>
+                <a:latin typeface="Calibri"/>
+              </a:rPr>
+              <a:t>Preguntas frecuentes del grupo (1/2)</a:t>
+            </a:r>
+          </a:p>
+        </p:txBody>
+      </p:sp>
+      <p:sp>
+        <p:nvSpPr>
+          <p:cNvPr id="5" name="TextBox 4"/>
+          <p:cNvSpPr txBox="1"/>
+          <p:nvPr/>
+        </p:nvSpPr>
+        <p:spPr>
+          <a:xfrm>
+            <a:off x="457200" y="1170432"/>
+            <a:ext cx="11277295" cy="5230368"/>
+          </a:xfrm>
+          <a:prstGeom prst="rect">
+            <a:avLst/>
+          </a:prstGeom>
+          <a:noFill/>
+        </p:spPr>
+        <p:txBody>
+          <a:bodyPr wrap="square">
+            <a:spAutoFit/>
+          </a:bodyPr>
+          <a:lstStyle/>
+          <a:p>
+            <a:pPr>
+              <a:spcAft>
+                <a:spcPts val="800"/>
+              </a:spcAft>
+            </a:pPr>
+            <a:r>
+              <a:rPr sz="2000" b="0" i="0">
+                <a:solidFill>
+                  <a:srgbClr val="333333"/>
+                </a:solidFill>
+                <a:latin typeface="Calibri"/>
+              </a:rPr>
+              <a:t>–   Cuatro que aparecen todos los semestres.</a:t>
+            </a:r>
+          </a:p>
+          <a:p>
+            <a:pPr>
+              <a:spcAft>
+                <a:spcPts val="800"/>
+              </a:spcAft>
+            </a:pPr>
+            <a:r>
+              <a:rPr sz="2000" b="0" i="0">
+                <a:solidFill>
+                  <a:srgbClr val="333333"/>
+                </a:solidFill>
+                <a:latin typeface="Calibri"/>
+              </a:rPr>
+              <a:t>–   «Si no tenemos usuarios reales, que monitoreamos?» El entregable es el plan, no los datos: la pregunta pide que senales observaria en una produccion hipotetica, con sus umbrales.</a:t>
+            </a:r>
+          </a:p>
+          <a:p>
+            <a:pPr>
+              <a:spcAft>
+                <a:spcPts val="800"/>
+              </a:spcAft>
+            </a:pPr>
+            <a:r>
+              <a:rPr sz="2000" b="0" i="0">
+                <a:solidFill>
+                  <a:srgbClr val="333333"/>
+                </a:solidFill>
+                <a:latin typeface="Calibri"/>
+              </a:rPr>
+              <a:t>–   Y algo si es real: el chequeo de salud que consulta el balanceador de la Clase 7 ya es monitoreo, y el check de Actions ya es una senal de que el sistema construye.</a:t>
+            </a:r>
+          </a:p>
+          <a:p>
+            <a:pPr>
+              <a:spcAft>
+                <a:spcPts val="800"/>
+              </a:spcAft>
+            </a:pPr>
+            <a:r>
+              <a:rPr sz="2000" b="0" i="0">
+                <a:solidFill>
+                  <a:srgbClr val="333333"/>
+                </a:solidFill>
+                <a:latin typeface="Calibri"/>
+              </a:rPr>
+              <a:t>–   «De donde saco los umbrales si nunca he medido?» De tres fuentes legitimas, y conviene nombrarlas: una convencion del oficio citada como tal, por ejemplo 300 milisegundos de p95 o el 80 por ciento de saturacion</a:t>
+            </a:r>
+          </a:p>
+          <a:p>
+            <a:pPr>
+              <a:spcAft>
+                <a:spcPts val="800"/>
+              </a:spcAft>
+            </a:pPr>
+            <a:r>
+              <a:rPr sz="2000" b="0" i="0">
+                <a:solidFill>
+                  <a:srgbClr val="333333"/>
+                </a:solidFill>
+                <a:latin typeface="Calibri"/>
+              </a:rPr>
+              <a:t>–   Una expectativa del usuario redactada en el dominio, por ejemplo que una reserva no tarde mas de dos segundos; o una aritmetica de servilleta a partir del escenario de carga, que es justamente lo que se formaliza en la Clase 12.</a:t>
+            </a:r>
+          </a:p>
+        </p:txBody>
+      </p:sp>
+      <p:sp>
+        <p:nvSpPr>
+          <p:cNvPr id="6" name="TextBox 5"/>
+          <p:cNvSpPr txBox="1"/>
+          <p:nvPr/>
+        </p:nvSpPr>
+        <p:spPr>
+          <a:xfrm>
+            <a:off x="11185855" y="6473952"/>
+            <a:ext cx="640080" cy="274320"/>
+          </a:xfrm>
+          <a:prstGeom prst="rect">
+            <a:avLst/>
+          </a:prstGeom>
+          <a:noFill/>
+        </p:spPr>
+        <p:txBody>
+          <a:bodyPr wrap="square">
+            <a:spAutoFit/>
+          </a:bodyPr>
+          <a:lstStyle/>
+          <a:p>
+            <a:pPr algn="r"/>
+            <a:r>
+              <a:rPr sz="1100" b="0" i="0">
+                <a:solidFill>
+                  <a:srgbClr val="666666"/>
+                </a:solidFill>
+                <a:latin typeface="Calibri"/>
+              </a:rPr>
+              <a:t>25</a:t>
+            </a:r>
+          </a:p>
+        </p:txBody>
+      </p:sp>
+    </p:spTree>
+  </p:cSld>
+  <p:clrMapOvr>
+    <a:masterClrMapping/>
+  </p:clrMapOvr>
+</p:sld>
+</file>
+
+<file path=ppt/slides/slide26.xml><?xml version="1.0" encoding="utf-8"?>
+<p:sld xmlns:a="http://schemas.openxmlformats.org/drawingml/2006/main" xmlns:p="http://schemas.openxmlformats.org/presentationml/2006/main" xmlns:r="http://schemas.openxmlformats.org/officeDocument/2006/relationships">
+  <p:cSld>
+    <p:bg>
+      <p:bgPr>
+        <a:solidFill>
+          <a:srgbClr val="FFFFFF"/>
+        </a:solidFill>
+        <a:effectLst/>
+      </p:bgPr>
+    </p:bg>
+    <p:spTree>
+      <p:nvGrpSpPr>
+        <p:cNvPr id="1" name=""/>
+        <p:cNvGrpSpPr/>
+        <p:nvPr/>
+      </p:nvGrpSpPr>
+      <p:grpSpPr/>
+      <p:sp>
+        <p:nvSpPr>
+          <p:cNvPr id="2" name="Rectangle 1"/>
+          <p:cNvSpPr/>
+          <p:nvPr/>
+        </p:nvSpPr>
+        <p:spPr>
+          <a:xfrm>
+            <a:off x="0" y="0"/>
+            <a:ext cx="12191695" cy="960120"/>
+          </a:xfrm>
+          <a:prstGeom prst="rect">
+            <a:avLst/>
+          </a:prstGeom>
+          <a:solidFill>
+            <a:srgbClr val="095292"/>
+          </a:solidFill>
+          <a:ln>
+            <a:noFill/>
+          </a:ln>
+        </p:spPr>
+        <p:style>
+          <a:lnRef idx="1">
+            <a:schemeClr val="accent1"/>
+          </a:lnRef>
+          <a:fillRef idx="3">
+            <a:schemeClr val="accent1"/>
+          </a:fillRef>
+          <a:effectRef idx="2">
+            <a:schemeClr val="accent1"/>
+          </a:effectRef>
+          <a:fontRef idx="minor">
+            <a:schemeClr val="lt1"/>
+          </a:fontRef>
+        </p:style>
+        <p:txBody>
+          <a:bodyPr rtlCol="0" anchor="ctr"/>
+          <a:lstStyle/>
+          <a:p>
+            <a:pPr algn="ctr"/>
+          </a:p>
+        </p:txBody>
+      </p:sp>
+      <p:sp>
+        <p:nvSpPr>
+          <p:cNvPr id="3" name="Rectangle 2"/>
+          <p:cNvSpPr/>
+          <p:nvPr/>
+        </p:nvSpPr>
+        <p:spPr>
+          <a:xfrm>
+            <a:off x="0" y="960120"/>
+            <a:ext cx="12191695" cy="41148"/>
+          </a:xfrm>
+          <a:prstGeom prst="rect">
+            <a:avLst/>
+          </a:prstGeom>
+          <a:solidFill>
+            <a:srgbClr val="FFD000"/>
+          </a:solidFill>
+          <a:ln>
+            <a:noFill/>
+          </a:ln>
+        </p:spPr>
+        <p:style>
+          <a:lnRef idx="1">
+            <a:schemeClr val="accent1"/>
+          </a:lnRef>
+          <a:fillRef idx="3">
+            <a:schemeClr val="accent1"/>
+          </a:fillRef>
+          <a:effectRef idx="2">
+            <a:schemeClr val="accent1"/>
+          </a:effectRef>
+          <a:fontRef idx="minor">
+            <a:schemeClr val="lt1"/>
+          </a:fontRef>
+        </p:style>
+        <p:txBody>
+          <a:bodyPr rtlCol="0" anchor="ctr"/>
+          <a:lstStyle/>
+          <a:p>
+            <a:pPr algn="ctr"/>
+          </a:p>
+        </p:txBody>
+      </p:sp>
+      <p:sp>
+        <p:nvSpPr>
+          <p:cNvPr id="4" name="TextBox 3"/>
+          <p:cNvSpPr txBox="1"/>
+          <p:nvPr/>
+        </p:nvSpPr>
+        <p:spPr>
+          <a:xfrm>
+            <a:off x="457200" y="164592"/>
+            <a:ext cx="11277295" cy="502920"/>
+          </a:xfrm>
+          <a:prstGeom prst="rect">
+            <a:avLst/>
+          </a:prstGeom>
+          <a:noFill/>
+        </p:spPr>
+        <p:txBody>
+          <a:bodyPr wrap="square">
+            <a:spAutoFit/>
+          </a:bodyPr>
+          <a:lstStyle/>
+          <a:p>
+            <a:r>
+              <a:rPr sz="2600" b="1" i="0">
+                <a:solidFill>
+                  <a:srgbClr val="FFFFFF"/>
+                </a:solidFill>
+                <a:latin typeface="Calibri"/>
+              </a:rPr>
+              <a:t>Preguntas frecuentes del grupo (2/2)</a:t>
+            </a:r>
+          </a:p>
+        </p:txBody>
+      </p:sp>
+      <p:sp>
+        <p:nvSpPr>
+          <p:cNvPr id="5" name="TextBox 4"/>
+          <p:cNvSpPr txBox="1"/>
+          <p:nvPr/>
+        </p:nvSpPr>
+        <p:spPr>
+          <a:xfrm>
+            <a:off x="457200" y="1170432"/>
+            <a:ext cx="11277295" cy="5230368"/>
+          </a:xfrm>
+          <a:prstGeom prst="rect">
+            <a:avLst/>
+          </a:prstGeom>
+          <a:noFill/>
+        </p:spPr>
+        <p:txBody>
+          <a:bodyPr wrap="square">
+            <a:spAutoFit/>
+          </a:bodyPr>
+          <a:lstStyle/>
+          <a:p>
+            <a:pPr>
+              <a:spcAft>
+                <a:spcPts val="800"/>
+              </a:spcAft>
+            </a:pPr>
+            <a:r>
+              <a:rPr sz="2000" b="0" i="0">
+                <a:solidFill>
+                  <a:srgbClr val="333333"/>
+                </a:solidFill>
+                <a:latin typeface="Calibri"/>
+              </a:rPr>
+              <a:t>–   Un umbral justificado asi vale, aunque despues la medicion lo corrija.</a:t>
+            </a:r>
+          </a:p>
+          <a:p>
+            <a:pPr>
+              <a:spcAft>
+                <a:spcPts val="800"/>
+              </a:spcAft>
+            </a:pPr>
+            <a:r>
+              <a:rPr sz="2000" b="0" i="0">
+                <a:solidFill>
+                  <a:srgbClr val="333333"/>
+                </a:solidFill>
+                <a:latin typeface="Calibri"/>
+              </a:rPr>
+              <a:t>–   «Mi proyecto no tiene pruebas automatizadas, que pongo en el paso Probar?» Una prueba, aunque sea una: que el proceso arranca y que /health responde 200.</a:t>
+            </a:r>
+          </a:p>
+          <a:p>
+            <a:pPr>
+              <a:spcAft>
+                <a:spcPts val="800"/>
+              </a:spcAft>
+            </a:pPr>
+            <a:r>
+              <a:rPr sz="2000" b="0" i="0">
+                <a:solidFill>
+                  <a:srgbClr val="333333"/>
+                </a:solidFill>
+                <a:latin typeface="Calibri"/>
+              </a:rPr>
+              <a:t>–   Es preferible una prueba real y pequena a tres pruebas inventadas que no se ejecutan, porque la pregunta 8 evalua si el pipeline puede fallar.</a:t>
+            </a:r>
+          </a:p>
+          <a:p>
+            <a:pPr>
+              <a:spcAft>
+                <a:spcPts val="800"/>
+              </a:spcAft>
+            </a:pPr>
+            <a:r>
+              <a:rPr sz="2000" b="0" i="0">
+                <a:solidFill>
+                  <a:srgbClr val="333333"/>
+                </a:solidFill>
+                <a:latin typeface="Calibri"/>
+              </a:rPr>
+              <a:t>–   «Puedo poner solo metricas numericas?» No sin perder un punto: al menos una senal tiene que ser un registro.</a:t>
+            </a:r>
+          </a:p>
+          <a:p>
+            <a:pPr>
+              <a:spcAft>
+                <a:spcPts val="800"/>
+              </a:spcAft>
+            </a:pPr>
+            <a:r>
+              <a:rPr sz="2000" b="0" i="0">
+                <a:solidFill>
+                  <a:srgbClr val="333333"/>
+                </a:solidFill>
+                <a:latin typeface="Calibri"/>
+              </a:rPr>
+              <a:t>–   La mas facil de justificar es el log de los rechazos de negocio del propio dominio, que ademas es la unica forma de contestar despues por que se rechazo una operacion concreta.</a:t>
+            </a:r>
+          </a:p>
+        </p:txBody>
+      </p:sp>
+      <p:sp>
+        <p:nvSpPr>
+          <p:cNvPr id="6" name="TextBox 5"/>
+          <p:cNvSpPr txBox="1"/>
+          <p:nvPr/>
+        </p:nvSpPr>
+        <p:spPr>
+          <a:xfrm>
+            <a:off x="11185855" y="6473952"/>
+            <a:ext cx="640080" cy="274320"/>
+          </a:xfrm>
+          <a:prstGeom prst="rect">
+            <a:avLst/>
+          </a:prstGeom>
+          <a:noFill/>
+        </p:spPr>
+        <p:txBody>
+          <a:bodyPr wrap="square">
+            <a:spAutoFit/>
+          </a:bodyPr>
+          <a:lstStyle/>
+          <a:p>
+            <a:pPr algn="r"/>
+            <a:r>
+              <a:rPr sz="1100" b="0" i="0">
+                <a:solidFill>
+                  <a:srgbClr val="666666"/>
+                </a:solidFill>
+                <a:latin typeface="Calibri"/>
+              </a:rPr>
+              <a:t>26</a:t>
+            </a:r>
+          </a:p>
+        </p:txBody>
+      </p:sp>
+    </p:spTree>
+  </p:cSld>
+  <p:clrMapOvr>
+    <a:masterClrMapping/>
+  </p:clrMapOvr>
+</p:sld>
+</file>
+
+<file path=ppt/slides/slide27.xml><?xml version="1.0" encoding="utf-8"?>
+<p:sld xmlns:a="http://schemas.openxmlformats.org/drawingml/2006/main" xmlns:p="http://schemas.openxmlformats.org/presentationml/2006/main" xmlns:r="http://schemas.openxmlformats.org/officeDocument/2006/relationships">
+  <p:cSld>
+    <p:bg>
+      <p:bgPr>
+        <a:solidFill>
+          <a:srgbClr val="FFFFFF"/>
+        </a:solidFill>
+        <a:effectLst/>
+      </p:bgPr>
+    </p:bg>
+    <p:spTree>
+      <p:nvGrpSpPr>
+        <p:cNvPr id="1" name=""/>
+        <p:cNvGrpSpPr/>
+        <p:nvPr/>
+      </p:nvGrpSpPr>
+      <p:grpSpPr/>
+      <p:sp>
+        <p:nvSpPr>
+          <p:cNvPr id="2" name="Rectangle 1"/>
+          <p:cNvSpPr/>
+          <p:nvPr/>
+        </p:nvSpPr>
+        <p:spPr>
+          <a:xfrm>
+            <a:off x="0" y="0"/>
+            <a:ext cx="12191695" cy="960120"/>
+          </a:xfrm>
+          <a:prstGeom prst="rect">
+            <a:avLst/>
+          </a:prstGeom>
+          <a:solidFill>
+            <a:srgbClr val="095292"/>
+          </a:solidFill>
+          <a:ln>
+            <a:noFill/>
+          </a:ln>
+        </p:spPr>
+        <p:style>
+          <a:lnRef idx="1">
+            <a:schemeClr val="accent1"/>
+          </a:lnRef>
+          <a:fillRef idx="3">
+            <a:schemeClr val="accent1"/>
+          </a:fillRef>
+          <a:effectRef idx="2">
+            <a:schemeClr val="accent1"/>
+          </a:effectRef>
+          <a:fontRef idx="minor">
+            <a:schemeClr val="lt1"/>
+          </a:fontRef>
+        </p:style>
+        <p:txBody>
+          <a:bodyPr rtlCol="0" anchor="ctr"/>
+          <a:lstStyle/>
+          <a:p>
+            <a:pPr algn="ctr"/>
+          </a:p>
+        </p:txBody>
+      </p:sp>
+      <p:sp>
+        <p:nvSpPr>
+          <p:cNvPr id="3" name="Rectangle 2"/>
+          <p:cNvSpPr/>
+          <p:nvPr/>
+        </p:nvSpPr>
+        <p:spPr>
+          <a:xfrm>
+            <a:off x="0" y="960120"/>
+            <a:ext cx="12191695" cy="41148"/>
+          </a:xfrm>
+          <a:prstGeom prst="rect">
+            <a:avLst/>
+          </a:prstGeom>
+          <a:solidFill>
+            <a:srgbClr val="FFD000"/>
+          </a:solidFill>
+          <a:ln>
+            <a:noFill/>
+          </a:ln>
+        </p:spPr>
+        <p:style>
+          <a:lnRef idx="1">
+            <a:schemeClr val="accent1"/>
+          </a:lnRef>
+          <a:fillRef idx="3">
+            <a:schemeClr val="accent1"/>
+          </a:fillRef>
+          <a:effectRef idx="2">
+            <a:schemeClr val="accent1"/>
+          </a:effectRef>
+          <a:fontRef idx="minor">
+            <a:schemeClr val="lt1"/>
+          </a:fontRef>
+        </p:style>
+        <p:txBody>
+          <a:bodyPr rtlCol="0" anchor="ctr"/>
+          <a:lstStyle/>
+          <a:p>
+            <a:pPr algn="ctr"/>
+          </a:p>
+        </p:txBody>
+      </p:sp>
+      <p:sp>
+        <p:nvSpPr>
+          <p:cNvPr id="4" name="TextBox 3"/>
+          <p:cNvSpPr txBox="1"/>
+          <p:nvPr/>
+        </p:nvSpPr>
+        <p:spPr>
+          <a:xfrm>
+            <a:off x="457200" y="164592"/>
+            <a:ext cx="11277295" cy="502920"/>
+          </a:xfrm>
+          <a:prstGeom prst="rect">
+            <a:avLst/>
+          </a:prstGeom>
+          <a:noFill/>
+        </p:spPr>
+        <p:txBody>
+          <a:bodyPr wrap="square">
+            <a:spAutoFit/>
+          </a:bodyPr>
+          <a:lstStyle/>
+          <a:p>
+            <a:r>
+              <a:rPr sz="2600" b="1" i="0">
+                <a:solidFill>
+                  <a:srgbClr val="FFFFFF"/>
+                </a:solidFill>
+                <a:latin typeface="Calibri"/>
+              </a:rPr>
+              <a:t>.github/workflows/ci.yml — CI real, no un echo</a:t>
+            </a:r>
+          </a:p>
+        </p:txBody>
+      </p:sp>
+      <p:sp>
+        <p:nvSpPr>
+          <p:cNvPr id="5" name="Rounded Rectangle 4"/>
+          <p:cNvSpPr/>
+          <p:nvPr/>
+        </p:nvSpPr>
+        <p:spPr>
+          <a:xfrm>
+            <a:off x="457200" y="1261872"/>
+            <a:ext cx="11277295" cy="4773168"/>
+          </a:xfrm>
+          <a:prstGeom prst="roundRect">
+            <a:avLst>
+              <a:gd name="adj" fmla="val 12000"/>
+            </a:avLst>
+          </a:prstGeom>
+          <a:solidFill>
+            <a:srgbClr val="1E2A38"/>
+          </a:solidFill>
+          <a:ln>
+            <a:noFill/>
+          </a:ln>
+        </p:spPr>
+        <p:style>
+          <a:lnRef idx="1">
+            <a:schemeClr val="accent1"/>
+          </a:lnRef>
+          <a:fillRef idx="3">
+            <a:schemeClr val="accent1"/>
+          </a:fillRef>
+          <a:effectRef idx="2">
+            <a:schemeClr val="accent1"/>
+          </a:effectRef>
+          <a:fontRef idx="minor">
+            <a:schemeClr val="lt1"/>
+          </a:fontRef>
+        </p:style>
+        <p:txBody>
+          <a:bodyPr rtlCol="0" anchor="ctr"/>
+          <a:lstStyle/>
+          <a:p>
+            <a:pPr algn="ctr"/>
+          </a:p>
+        </p:txBody>
+      </p:sp>
+      <p:sp>
+        <p:nvSpPr>
+          <p:cNvPr id="6" name="Rectangle 5"/>
+          <p:cNvSpPr/>
+          <p:nvPr/>
+        </p:nvSpPr>
+        <p:spPr>
+          <a:xfrm>
+            <a:off x="457200" y="1261872"/>
+            <a:ext cx="11277295" cy="320040"/>
+          </a:xfrm>
+          <a:prstGeom prst="rect">
+            <a:avLst/>
+          </a:prstGeom>
+          <a:solidFill>
+            <a:srgbClr val="095292"/>
+          </a:solidFill>
+          <a:ln>
+            <a:noFill/>
+          </a:ln>
+        </p:spPr>
+        <p:style>
+          <a:lnRef idx="1">
+            <a:schemeClr val="accent1"/>
+          </a:lnRef>
+          <a:fillRef idx="3">
+            <a:schemeClr val="accent1"/>
+          </a:fillRef>
+          <a:effectRef idx="2">
+            <a:schemeClr val="accent1"/>
+          </a:effectRef>
+          <a:fontRef idx="minor">
+            <a:schemeClr val="lt1"/>
+          </a:fontRef>
+        </p:style>
+        <p:txBody>
+          <a:bodyPr rtlCol="0" anchor="ctr"/>
+          <a:lstStyle/>
+          <a:p>
+            <a:pPr algn="ctr"/>
+          </a:p>
+        </p:txBody>
+      </p:sp>
+      <p:sp>
+        <p:nvSpPr>
+          <p:cNvPr id="7" name="TextBox 6"/>
+          <p:cNvSpPr txBox="1"/>
+          <p:nvPr/>
+        </p:nvSpPr>
+        <p:spPr>
+          <a:xfrm>
+            <a:off x="685800" y="1307592"/>
+            <a:ext cx="10820095" cy="256032"/>
+          </a:xfrm>
+          <a:prstGeom prst="rect">
+            <a:avLst/>
+          </a:prstGeom>
+          <a:noFill/>
+        </p:spPr>
+        <p:txBody>
+          <a:bodyPr wrap="square" anchor="ctr"/>
+          <a:lstStyle/>
+          <a:p>
+            <a:r>
+              <a:rPr sz="1000" b="1" i="0">
+                <a:solidFill>
+                  <a:srgbClr val="269CCB"/>
+                </a:solidFill>
+                <a:latin typeface="Calibri"/>
+              </a:rPr>
+              <a:t>● ● ●</a:t>
+            </a:r>
+          </a:p>
+        </p:txBody>
+      </p:sp>
+      <p:sp>
+        <p:nvSpPr>
+          <p:cNvPr id="8" name="TextBox 7"/>
+          <p:cNvSpPr txBox="1"/>
+          <p:nvPr/>
+        </p:nvSpPr>
+        <p:spPr>
+          <a:xfrm>
+            <a:off x="777240" y="1719072"/>
+            <a:ext cx="10637215" cy="4133087"/>
+          </a:xfrm>
+          <a:prstGeom prst="rect">
+            <a:avLst/>
+          </a:prstGeom>
+          <a:noFill/>
+        </p:spPr>
+        <p:txBody>
+          <a:bodyPr wrap="square">
+            <a:spAutoFit/>
+          </a:bodyPr>
+          <a:lstStyle/>
+          <a:p>
+            <a:pPr>
+              <a:spcAft>
+                <a:spcPts val="400"/>
+              </a:spcAft>
+            </a:pPr>
+            <a:r>
+              <a:rPr sz="1400" b="0" i="0">
+                <a:solidFill>
+                  <a:srgbClr val="FFFFFF"/>
+                </a:solidFill>
+                <a:latin typeface="Calibri"/>
+              </a:rPr>
+              <a:t>name: CI</a:t>
+            </a:r>
+          </a:p>
+          <a:p>
+            <a:pPr>
+              <a:spcAft>
+                <a:spcPts val="400"/>
+              </a:spcAft>
+            </a:pPr>
+            <a:r>
+              <a:rPr sz="1400" b="0" i="0">
+                <a:solidFill>
+                  <a:srgbClr val="FFFFFF"/>
+                </a:solidFill>
+                <a:latin typeface="Calibri"/>
+              </a:rPr>
+              <a:t>on: [push, pull_request]          # 1. disparadores</a:t>
+            </a:r>
+          </a:p>
+          <a:p>
+            <a:pPr>
+              <a:spcAft>
+                <a:spcPts val="400"/>
+              </a:spcAft>
+            </a:pPr>
+            <a:r>
+              <a:rPr sz="1400" b="0" i="0">
+                <a:solidFill>
+                  <a:srgbClr val="FFFFFF"/>
+                </a:solidFill>
+                <a:latin typeface="Calibri"/>
+              </a:rPr>
+              <a:t>jobs:</a:t>
+            </a:r>
+          </a:p>
+          <a:p>
+            <a:pPr>
+              <a:spcAft>
+                <a:spcPts val="400"/>
+              </a:spcAft>
+            </a:pPr>
+            <a:r>
+              <a:rPr sz="1400" b="0" i="0">
+                <a:solidFill>
+                  <a:srgbClr val="FFFFFF"/>
+                </a:solidFill>
+                <a:latin typeface="Calibri"/>
+              </a:rPr>
+              <a:t>  build:</a:t>
+            </a:r>
+          </a:p>
+          <a:p>
+            <a:pPr>
+              <a:spcAft>
+                <a:spcPts val="400"/>
+              </a:spcAft>
+            </a:pPr>
+            <a:r>
+              <a:rPr sz="1400" b="0" i="0">
+                <a:solidFill>
+                  <a:srgbClr val="FFFFFF"/>
+                </a:solidFill>
+                <a:latin typeface="Calibri"/>
+              </a:rPr>
+              <a:t>    runs-on: ubuntu-latest        # 2. entorno de ejecucion</a:t>
+            </a:r>
+          </a:p>
+          <a:p>
+            <a:pPr>
+              <a:spcAft>
+                <a:spcPts val="400"/>
+              </a:spcAft>
+            </a:pPr>
+            <a:r>
+              <a:rPr sz="1400" b="0" i="0">
+                <a:solidFill>
+                  <a:srgbClr val="FFFFFF"/>
+                </a:solidFill>
+                <a:latin typeface="Calibri"/>
+              </a:rPr>
+              <a:t>    steps:</a:t>
+            </a:r>
+          </a:p>
+          <a:p>
+            <a:pPr>
+              <a:spcAft>
+                <a:spcPts val="400"/>
+              </a:spcAft>
+            </a:pPr>
+            <a:r>
+              <a:rPr sz="1400" b="0" i="0">
+                <a:solidFill>
+                  <a:srgbClr val="FFFFFF"/>
+                </a:solidFill>
+                <a:latin typeface="Calibri"/>
+              </a:rPr>
+              <a:t>      - uses: actions/checkout@v4</a:t>
+            </a:r>
+          </a:p>
+          <a:p>
+            <a:pPr>
+              <a:spcAft>
+                <a:spcPts val="400"/>
+              </a:spcAft>
+            </a:pPr>
+            <a:r>
+              <a:rPr sz="1400" b="0" i="0">
+                <a:solidFill>
+                  <a:srgbClr val="FFFFFF"/>
+                </a:solidFill>
+                <a:latin typeface="Calibri"/>
+              </a:rPr>
+              <a:t>      - uses: actions/setup-node@v4</a:t>
+            </a:r>
+          </a:p>
+          <a:p>
+            <a:pPr>
+              <a:spcAft>
+                <a:spcPts val="400"/>
+              </a:spcAft>
+            </a:pPr>
+            <a:r>
+              <a:rPr sz="1400" b="0" i="0">
+                <a:solidFill>
+                  <a:srgbClr val="FFFFFF"/>
+                </a:solidFill>
+                <a:latin typeface="Calibri"/>
+              </a:rPr>
+              <a:t>        with: { node-version: '20' }</a:t>
+            </a:r>
+          </a:p>
+          <a:p>
+            <a:pPr>
+              <a:spcAft>
+                <a:spcPts val="400"/>
+              </a:spcAft>
+            </a:pPr>
+            <a:r>
+              <a:rPr sz="1400" b="0" i="0">
+                <a:solidFill>
+                  <a:srgbClr val="FFFFFF"/>
+                </a:solidFill>
+                <a:latin typeface="Calibri"/>
+              </a:rPr>
+              <a:t>      - name: Construir</a:t>
+            </a:r>
+          </a:p>
+          <a:p>
+            <a:pPr>
+              <a:spcAft>
+                <a:spcPts val="400"/>
+              </a:spcAft>
+            </a:pPr>
+            <a:r>
+              <a:rPr sz="1400" b="0" i="0">
+                <a:solidFill>
+                  <a:srgbClr val="FFFFFF"/>
+                </a:solidFill>
+                <a:latin typeface="Calibri"/>
+              </a:rPr>
+              <a:t>        run: npm ci &amp;&amp; docker build -t cloudlite-api:0.1.0.</a:t>
+            </a:r>
+          </a:p>
+          <a:p>
+            <a:pPr>
+              <a:spcAft>
+                <a:spcPts val="400"/>
+              </a:spcAft>
+            </a:pPr>
+            <a:r>
+              <a:rPr sz="1400" b="0" i="0">
+                <a:solidFill>
+                  <a:srgbClr val="FFFFFF"/>
+                </a:solidFill>
+                <a:latin typeface="Calibri"/>
+              </a:rPr>
+              <a:t>      - name: Probar</a:t>
+            </a:r>
+          </a:p>
+          <a:p>
+            <a:pPr>
+              <a:spcAft>
+                <a:spcPts val="400"/>
+              </a:spcAft>
+            </a:pPr>
+            <a:r>
+              <a:rPr sz="1400" b="0" i="0">
+                <a:solidFill>
+                  <a:srgbClr val="FFFFFF"/>
+                </a:solidFill>
+                <a:latin typeface="Calibri"/>
+              </a:rPr>
+              <a:t>        run: npm test              # &lt;- si esto no puede fallar, no es CI</a:t>
+            </a:r>
+          </a:p>
+          <a:p>
+            <a:pPr>
+              <a:spcAft>
+                <a:spcPts val="400"/>
+              </a:spcAft>
+            </a:pPr>
+            <a:r>
+              <a:rPr sz="1400" b="0" i="0">
+                <a:solidFill>
+                  <a:srgbClr val="FFFFFF"/>
+                </a:solidFill>
+                <a:latin typeface="Calibri"/>
+              </a:rPr>
+              <a:t>      - name: Despliegue SIMULADO (no despliega a ningun servidor)</a:t>
+            </a:r>
+          </a:p>
+          <a:p>
+            <a:pPr>
+              <a:spcAft>
+                <a:spcPts val="400"/>
+              </a:spcAft>
+            </a:pPr>
+            <a:r>
+              <a:rPr sz="1400" b="0" i="0">
+                <a:solidFill>
+                  <a:srgbClr val="FFFFFF"/>
+                </a:solidFill>
+                <a:latin typeface="Calibri"/>
+              </a:rPr>
+              <a:t>        run: echo "Artefacto cloudlite-api:0.1.0 listo para desplegar"</a:t>
+            </a:r>
+          </a:p>
+        </p:txBody>
+      </p:sp>
+      <p:sp>
+        <p:nvSpPr>
+          <p:cNvPr id="9" name="TextBox 8"/>
+          <p:cNvSpPr txBox="1"/>
+          <p:nvPr/>
+        </p:nvSpPr>
+        <p:spPr>
+          <a:xfrm>
+            <a:off x="457200" y="6080760"/>
+            <a:ext cx="11277295" cy="320040"/>
+          </a:xfrm>
+          <a:prstGeom prst="rect">
+            <a:avLst/>
+          </a:prstGeom>
+          <a:noFill/>
+        </p:spPr>
+        <p:txBody>
+          <a:bodyPr wrap="square">
+            <a:spAutoFit/>
+          </a:bodyPr>
+          <a:lstStyle/>
+          <a:p>
+            <a:pPr algn="ctr"/>
+            <a:r>
+              <a:rPr sz="1200" b="0" i="1">
+                <a:solidFill>
+                  <a:srgbClr val="666666"/>
+                </a:solidFill>
+                <a:latin typeface="Calibri"/>
+              </a:rPr>
+              <a:t>Los tres pasos, en orden, y el ultimo rotulado como simulado. Secretos con ${{ secrets.NOMBRE }}, NUNCA en claro dentro del YAML.</a:t>
+            </a:r>
+          </a:p>
+        </p:txBody>
+      </p:sp>
+      <p:sp>
+        <p:nvSpPr>
+          <p:cNvPr id="10" name="TextBox 9"/>
+          <p:cNvSpPr txBox="1"/>
+          <p:nvPr/>
+        </p:nvSpPr>
+        <p:spPr>
+          <a:xfrm>
+            <a:off x="11185855" y="6473952"/>
+            <a:ext cx="640080" cy="274320"/>
+          </a:xfrm>
+          <a:prstGeom prst="rect">
+            <a:avLst/>
+          </a:prstGeom>
+          <a:noFill/>
+        </p:spPr>
+        <p:txBody>
+          <a:bodyPr wrap="square">
+            <a:spAutoFit/>
+          </a:bodyPr>
+          <a:lstStyle/>
+          <a:p>
+            <a:pPr algn="r"/>
+            <a:r>
+              <a:rPr sz="1100" b="0" i="0">
+                <a:solidFill>
+                  <a:srgbClr val="666666"/>
+                </a:solidFill>
+                <a:latin typeface="Calibri"/>
+              </a:rPr>
+              <a:t>27</a:t>
+            </a:r>
+          </a:p>
+        </p:txBody>
+      </p:sp>
+    </p:spTree>
+  </p:cSld>
+  <p:clrMapOvr>
+    <a:masterClrMapping/>
+  </p:clrMapOvr>
+</p:sld>
+</file>
+
+<file path=ppt/slides/slide28.xml><?xml version="1.0" encoding="utf-8"?>
+<p:sld xmlns:a="http://schemas.openxmlformats.org/drawingml/2006/main" xmlns:p="http://schemas.openxmlformats.org/presentationml/2006/main" xmlns:r="http://schemas.openxmlformats.org/officeDocument/2006/relationships">
+  <p:cSld>
+    <p:bg>
+      <p:bgPr>
+        <a:solidFill>
+          <a:srgbClr val="FFFFFF"/>
+        </a:solidFill>
+        <a:effectLst/>
+      </p:bgPr>
+    </p:bg>
+    <p:spTree>
+      <p:nvGrpSpPr>
+        <p:cNvPr id="1" name=""/>
+        <p:cNvGrpSpPr/>
+        <p:nvPr/>
+      </p:nvGrpSpPr>
+      <p:grpSpPr/>
+      <p:sp>
+        <p:nvSpPr>
+          <p:cNvPr id="2" name="Rectangle 1"/>
+          <p:cNvSpPr/>
+          <p:nvPr/>
+        </p:nvSpPr>
+        <p:spPr>
+          <a:xfrm>
+            <a:off x="0" y="0"/>
+            <a:ext cx="12191695" cy="1170432"/>
+          </a:xfrm>
+          <a:prstGeom prst="rect">
+            <a:avLst/>
+          </a:prstGeom>
+          <a:solidFill>
+            <a:srgbClr val="095292"/>
+          </a:solidFill>
+          <a:ln>
+            <a:noFill/>
+          </a:ln>
+        </p:spPr>
+        <p:style>
+          <a:lnRef idx="1">
+            <a:schemeClr val="accent1"/>
+          </a:lnRef>
+          <a:fillRef idx="3">
+            <a:schemeClr val="accent1"/>
+          </a:fillRef>
+          <a:effectRef idx="2">
+            <a:schemeClr val="accent1"/>
+          </a:effectRef>
+          <a:fontRef idx="minor">
+            <a:schemeClr val="lt1"/>
+          </a:fontRef>
+        </p:style>
+        <p:txBody>
+          <a:bodyPr rtlCol="0" anchor="ctr"/>
+          <a:lstStyle/>
+          <a:p>
+            <a:pPr algn="ctr"/>
+          </a:p>
+        </p:txBody>
+      </p:sp>
+      <p:sp>
+        <p:nvSpPr>
+          <p:cNvPr id="3" name="Rectangle 2"/>
+          <p:cNvSpPr/>
+          <p:nvPr/>
+        </p:nvSpPr>
+        <p:spPr>
+          <a:xfrm>
+            <a:off x="0" y="1170432"/>
+            <a:ext cx="12191695" cy="41148"/>
+          </a:xfrm>
+          <a:prstGeom prst="rect">
+            <a:avLst/>
+          </a:prstGeom>
+          <a:solidFill>
+            <a:srgbClr val="FFD000"/>
+          </a:solidFill>
+          <a:ln>
+            <a:noFill/>
+          </a:ln>
+        </p:spPr>
+        <p:style>
+          <a:lnRef idx="1">
+            <a:schemeClr val="accent1"/>
+          </a:lnRef>
+          <a:fillRef idx="3">
+            <a:schemeClr val="accent1"/>
+          </a:fillRef>
+          <a:effectRef idx="2">
+            <a:schemeClr val="accent1"/>
+          </a:effectRef>
+          <a:fontRef idx="minor">
+            <a:schemeClr val="lt1"/>
+          </a:fontRef>
+        </p:style>
+        <p:txBody>
+          <a:bodyPr rtlCol="0" anchor="ctr"/>
+          <a:lstStyle/>
+          <a:p>
+            <a:pPr algn="ctr"/>
+          </a:p>
+        </p:txBody>
+      </p:sp>
+      <p:sp>
+        <p:nvSpPr>
+          <p:cNvPr id="4" name="TextBox 3"/>
+          <p:cNvSpPr txBox="1"/>
+          <p:nvPr/>
+        </p:nvSpPr>
+        <p:spPr>
+          <a:xfrm>
+            <a:off x="457200" y="164592"/>
+            <a:ext cx="11277295" cy="384048"/>
+          </a:xfrm>
+          <a:prstGeom prst="rect">
+            <a:avLst/>
+          </a:prstGeom>
+          <a:noFill/>
+        </p:spPr>
+        <p:txBody>
+          <a:bodyPr wrap="square">
+            <a:spAutoFit/>
+          </a:bodyPr>
+          <a:lstStyle/>
+          <a:p>
+            <a:r>
+              <a:rPr sz="2600" b="1" i="0">
+                <a:solidFill>
+                  <a:srgbClr val="FFFFFF"/>
+                </a:solidFill>
+                <a:latin typeface="Calibri"/>
+              </a:rPr>
+              <a:t>Herramientas de hoy</a:t>
+            </a:r>
+          </a:p>
+        </p:txBody>
+      </p:sp>
+      <p:sp>
+        <p:nvSpPr>
+          <p:cNvPr id="5" name="TextBox 4"/>
+          <p:cNvSpPr txBox="1"/>
+          <p:nvPr/>
+        </p:nvSpPr>
+        <p:spPr>
+          <a:xfrm>
+            <a:off x="457200" y="566928"/>
+            <a:ext cx="11277295" cy="411480"/>
+          </a:xfrm>
+          <a:prstGeom prst="rect">
+            <a:avLst/>
+          </a:prstGeom>
+          <a:noFill/>
+        </p:spPr>
+        <p:txBody>
+          <a:bodyPr wrap="square">
+            <a:spAutoFit/>
+          </a:bodyPr>
+          <a:lstStyle/>
+          <a:p>
+            <a:r>
+              <a:rPr sz="1400" b="0" i="0">
+                <a:solidFill>
+                  <a:srgbClr val="B8D8EE"/>
+                </a:solidFill>
+                <a:latin typeface="Calibri"/>
+              </a:rPr>
+              <a:t>Gratis · navegador o free tier · sin cuenta de pago</a:t>
+            </a:r>
+          </a:p>
+        </p:txBody>
+      </p:sp>
+      <p:sp>
+        <p:nvSpPr>
+          <p:cNvPr id="6" name="Rounded Rectangle 5"/>
+          <p:cNvSpPr/>
+          <p:nvPr/>
+        </p:nvSpPr>
+        <p:spPr>
+          <a:xfrm>
+            <a:off x="457200" y="1591056"/>
+            <a:ext cx="3624986" cy="2331720"/>
+          </a:xfrm>
+          <a:prstGeom prst="roundRect">
+            <a:avLst>
+              <a:gd name="adj" fmla="val 12000"/>
+            </a:avLst>
+          </a:prstGeom>
+          <a:solidFill>
+            <a:srgbClr val="F2F2F2"/>
+          </a:solidFill>
+          <a:ln>
+            <a:noFill/>
+          </a:ln>
+        </p:spPr>
+        <p:style>
+          <a:lnRef idx="1">
+            <a:schemeClr val="accent1"/>
+          </a:lnRef>
+          <a:fillRef idx="3">
+            <a:schemeClr val="accent1"/>
+          </a:fillRef>
+          <a:effectRef idx="2">
+            <a:schemeClr val="accent1"/>
+          </a:effectRef>
+          <a:fontRef idx="minor">
+            <a:schemeClr val="lt1"/>
+          </a:fontRef>
+        </p:style>
+        <p:txBody>
+          <a:bodyPr rtlCol="0" anchor="ctr"/>
+          <a:lstStyle/>
+          <a:p>
+            <a:pPr algn="ctr"/>
+          </a:p>
+        </p:txBody>
+      </p:sp>
+      <p:sp>
+        <p:nvSpPr>
+          <p:cNvPr id="7" name="Rectangle 6"/>
+          <p:cNvSpPr/>
+          <p:nvPr/>
+        </p:nvSpPr>
+        <p:spPr>
+          <a:xfrm>
+            <a:off x="457200" y="1591056"/>
+            <a:ext cx="3624986" cy="64008"/>
+          </a:xfrm>
+          <a:prstGeom prst="rect">
+            <a:avLst/>
+          </a:prstGeom>
+          <a:solidFill>
+            <a:srgbClr val="095292"/>
+          </a:solidFill>
+          <a:ln>
+            <a:noFill/>
+          </a:ln>
+        </p:spPr>
+        <p:style>
+          <a:lnRef idx="1">
+            <a:schemeClr val="accent1"/>
+          </a:lnRef>
+          <a:fillRef idx="3">
+            <a:schemeClr val="accent1"/>
+          </a:fillRef>
+          <a:effectRef idx="2">
+            <a:schemeClr val="accent1"/>
+          </a:effectRef>
+          <a:fontRef idx="minor">
+            <a:schemeClr val="lt1"/>
+          </a:fontRef>
+        </p:style>
+        <p:txBody>
+          <a:bodyPr rtlCol="0" anchor="ctr"/>
+          <a:lstStyle/>
+          <a:p>
+            <a:pPr algn="ctr"/>
+          </a:p>
+        </p:txBody>
+      </p:sp>
+      <p:sp>
+        <p:nvSpPr>
+          <p:cNvPr id="8" name="Rectangle 7"/>
+          <p:cNvSpPr/>
+          <p:nvPr/>
+        </p:nvSpPr>
+        <p:spPr>
+          <a:xfrm>
+            <a:off x="457200" y="1655064"/>
+            <a:ext cx="3624986" cy="27432"/>
+          </a:xfrm>
+          <a:prstGeom prst="rect">
+            <a:avLst/>
+          </a:prstGeom>
+          <a:solidFill>
+            <a:srgbClr val="FFD000"/>
+          </a:solidFill>
+          <a:ln>
+            <a:noFill/>
+          </a:ln>
+        </p:spPr>
+        <p:style>
+          <a:lnRef idx="1">
+            <a:schemeClr val="accent1"/>
+          </a:lnRef>
+          <a:fillRef idx="3">
+            <a:schemeClr val="accent1"/>
+          </a:fillRef>
+          <a:effectRef idx="2">
+            <a:schemeClr val="accent1"/>
+          </a:effectRef>
+          <a:fontRef idx="minor">
+            <a:schemeClr val="lt1"/>
+          </a:fontRef>
+        </p:style>
+        <p:txBody>
+          <a:bodyPr rtlCol="0" anchor="ctr"/>
+          <a:lstStyle/>
+          <a:p>
+            <a:pPr algn="ctr"/>
+          </a:p>
+        </p:txBody>
+      </p:sp>
+      <p:pic>
+        <p:nvPicPr>
+          <p:cNvPr id="9" name="Picture 8" descr="github_actions.png"/>
+          <p:cNvPicPr>
+            <a:picLocks noChangeAspect="1"/>
+          </p:cNvPicPr>
+          <p:nvPr/>
+        </p:nvPicPr>
+        <p:blipFill>
+          <a:blip r:embed="rId2"/>
+          <a:stretch>
+            <a:fillRect/>
+          </a:stretch>
+        </p:blipFill>
+        <p:spPr>
+          <a:xfrm>
+            <a:off x="1643329" y="1847087"/>
+            <a:ext cx="1252728" cy="1252728"/>
+          </a:xfrm>
+          <a:prstGeom prst="rect">
+            <a:avLst/>
+          </a:prstGeom>
+        </p:spPr>
+      </p:pic>
+      <p:sp>
+        <p:nvSpPr>
+          <p:cNvPr id="10" name="TextBox 9"/>
+          <p:cNvSpPr txBox="1"/>
+          <p:nvPr/>
+        </p:nvSpPr>
+        <p:spPr>
+          <a:xfrm>
+            <a:off x="530352" y="3191256"/>
+            <a:ext cx="3478682" cy="621792"/>
+          </a:xfrm>
+          <a:prstGeom prst="rect">
+            <a:avLst/>
+          </a:prstGeom>
+          <a:noFill/>
+        </p:spPr>
+        <p:txBody>
+          <a:bodyPr wrap="square" anchor="t"/>
+          <a:lstStyle/>
+          <a:p>
+            <a:pPr algn="ctr"/>
+            <a:r>
+              <a:rPr sz="1300" b="1" i="0">
+                <a:solidFill>
+                  <a:srgbClr val="095292"/>
+                </a:solidFill>
+                <a:latin typeface="Calibri"/>
+              </a:rPr>
+              <a:t>GitHub Actions</a:t>
+            </a:r>
+          </a:p>
+          <a:p>
+            <a:pPr algn="ctr">
+              <a:spcBef>
+                <a:spcPts val="200"/>
+              </a:spcBef>
+            </a:pPr>
+            <a:r>
+              <a:rPr sz="1000" b="0" i="0">
+                <a:solidFill>
+                  <a:srgbClr val="666666"/>
+                </a:solidFill>
+                <a:latin typeface="Calibri"/>
+              </a:rPr>
+              <a:t>CI del PI</a:t>
+            </a:r>
+          </a:p>
+        </p:txBody>
+      </p:sp>
+      <p:sp>
+        <p:nvSpPr>
+          <p:cNvPr id="11" name="Rounded Rectangle 10"/>
+          <p:cNvSpPr/>
+          <p:nvPr/>
+        </p:nvSpPr>
+        <p:spPr>
+          <a:xfrm>
+            <a:off x="4283354" y="1591056"/>
+            <a:ext cx="3624986" cy="2331720"/>
+          </a:xfrm>
+          <a:prstGeom prst="roundRect">
+            <a:avLst>
+              <a:gd name="adj" fmla="val 12000"/>
+            </a:avLst>
+          </a:prstGeom>
+          <a:solidFill>
+            <a:srgbClr val="F2F2F2"/>
+          </a:solidFill>
+          <a:ln>
+            <a:noFill/>
+          </a:ln>
+        </p:spPr>
+        <p:style>
+          <a:lnRef idx="1">
+            <a:schemeClr val="accent1"/>
+          </a:lnRef>
+          <a:fillRef idx="3">
+            <a:schemeClr val="accent1"/>
+          </a:fillRef>
+          <a:effectRef idx="2">
+            <a:schemeClr val="accent1"/>
+          </a:effectRef>
+          <a:fontRef idx="minor">
+            <a:schemeClr val="lt1"/>
+          </a:fontRef>
+        </p:style>
+        <p:txBody>
+          <a:bodyPr rtlCol="0" anchor="ctr"/>
+          <a:lstStyle/>
+          <a:p>
+            <a:pPr algn="ctr"/>
+          </a:p>
+        </p:txBody>
+      </p:sp>
+      <p:sp>
+        <p:nvSpPr>
+          <p:cNvPr id="12" name="Rectangle 11"/>
+          <p:cNvSpPr/>
+          <p:nvPr/>
+        </p:nvSpPr>
+        <p:spPr>
+          <a:xfrm>
+            <a:off x="4283354" y="1591056"/>
+            <a:ext cx="3624986" cy="64008"/>
+          </a:xfrm>
+          <a:prstGeom prst="rect">
+            <a:avLst/>
+          </a:prstGeom>
+          <a:solidFill>
+            <a:srgbClr val="095292"/>
+          </a:solidFill>
+          <a:ln>
+            <a:noFill/>
+          </a:ln>
+        </p:spPr>
+        <p:style>
+          <a:lnRef idx="1">
+            <a:schemeClr val="accent1"/>
+          </a:lnRef>
+          <a:fillRef idx="3">
+            <a:schemeClr val="accent1"/>
+          </a:fillRef>
+          <a:effectRef idx="2">
+            <a:schemeClr val="accent1"/>
+          </a:effectRef>
+          <a:fontRef idx="minor">
+            <a:schemeClr val="lt1"/>
+          </a:fontRef>
+        </p:style>
+        <p:txBody>
+          <a:bodyPr rtlCol="0" anchor="ctr"/>
+          <a:lstStyle/>
+          <a:p>
+            <a:pPr algn="ctr"/>
+          </a:p>
+        </p:txBody>
+      </p:sp>
+      <p:sp>
+        <p:nvSpPr>
+          <p:cNvPr id="13" name="Rectangle 12"/>
+          <p:cNvSpPr/>
+          <p:nvPr/>
+        </p:nvSpPr>
+        <p:spPr>
+          <a:xfrm>
+            <a:off x="4283354" y="1655064"/>
+            <a:ext cx="3624986" cy="27432"/>
+          </a:xfrm>
+          <a:prstGeom prst="rect">
+            <a:avLst/>
+          </a:prstGeom>
+          <a:solidFill>
+            <a:srgbClr val="FFD000"/>
+          </a:solidFill>
+          <a:ln>
+            <a:noFill/>
+          </a:ln>
+        </p:spPr>
+        <p:style>
+          <a:lnRef idx="1">
+            <a:schemeClr val="accent1"/>
+          </a:lnRef>
+          <a:fillRef idx="3">
+            <a:schemeClr val="accent1"/>
+          </a:fillRef>
+          <a:effectRef idx="2">
+            <a:schemeClr val="accent1"/>
+          </a:effectRef>
+          <a:fontRef idx="minor">
+            <a:schemeClr val="lt1"/>
+          </a:fontRef>
+        </p:style>
+        <p:txBody>
+          <a:bodyPr rtlCol="0" anchor="ctr"/>
+          <a:lstStyle/>
+          <a:p>
+            <a:pPr algn="ctr"/>
+          </a:p>
+        </p:txBody>
+      </p:sp>
+      <p:pic>
+        <p:nvPicPr>
+          <p:cNvPr id="14" name="Picture 13" descr="google_docs.png"/>
+          <p:cNvPicPr>
+            <a:picLocks noChangeAspect="1"/>
+          </p:cNvPicPr>
+          <p:nvPr/>
+        </p:nvPicPr>
+        <p:blipFill>
+          <a:blip r:embed="rId3"/>
+          <a:stretch>
+            <a:fillRect/>
+          </a:stretch>
+        </p:blipFill>
+        <p:spPr>
+          <a:xfrm>
+            <a:off x="5469483" y="1847087"/>
+            <a:ext cx="1252728" cy="1252728"/>
+          </a:xfrm>
+          <a:prstGeom prst="rect">
+            <a:avLst/>
+          </a:prstGeom>
+        </p:spPr>
+      </p:pic>
+      <p:sp>
+        <p:nvSpPr>
+          <p:cNvPr id="15" name="TextBox 14"/>
+          <p:cNvSpPr txBox="1"/>
+          <p:nvPr/>
+        </p:nvSpPr>
+        <p:spPr>
+          <a:xfrm>
+            <a:off x="4356506" y="3191256"/>
+            <a:ext cx="3478682" cy="621792"/>
+          </a:xfrm>
+          <a:prstGeom prst="rect">
+            <a:avLst/>
+          </a:prstGeom>
+          <a:noFill/>
+        </p:spPr>
+        <p:txBody>
+          <a:bodyPr wrap="square" anchor="t"/>
+          <a:lstStyle/>
+          <a:p>
+            <a:pPr algn="ctr"/>
+            <a:r>
+              <a:rPr sz="1300" b="1" i="0">
+                <a:solidFill>
+                  <a:srgbClr val="095292"/>
+                </a:solidFill>
+                <a:latin typeface="Calibri"/>
+              </a:rPr>
+              <a:t>Google Docs</a:t>
+            </a:r>
+          </a:p>
+          <a:p>
+            <a:pPr algn="ctr">
+              <a:spcBef>
+                <a:spcPts val="200"/>
+              </a:spcBef>
+            </a:pPr>
+            <a:r>
+              <a:rPr sz="1000" b="0" i="0">
+                <a:solidFill>
+                  <a:srgbClr val="666666"/>
+                </a:solidFill>
+                <a:latin typeface="Calibri"/>
+              </a:rPr>
+              <a:t>Informe PI</a:t>
+            </a:r>
+          </a:p>
+        </p:txBody>
+      </p:sp>
+      <p:sp>
+        <p:nvSpPr>
+          <p:cNvPr id="16" name="Rounded Rectangle 15"/>
+          <p:cNvSpPr/>
+          <p:nvPr/>
+        </p:nvSpPr>
+        <p:spPr>
+          <a:xfrm>
+            <a:off x="8109508" y="1591056"/>
+            <a:ext cx="3624986" cy="2331720"/>
+          </a:xfrm>
+          <a:prstGeom prst="roundRect">
+            <a:avLst>
+              <a:gd name="adj" fmla="val 12000"/>
+            </a:avLst>
+          </a:prstGeom>
+          <a:solidFill>
+            <a:srgbClr val="F2F2F2"/>
+          </a:solidFill>
+          <a:ln>
+            <a:noFill/>
+          </a:ln>
+        </p:spPr>
+        <p:style>
+          <a:lnRef idx="1">
+            <a:schemeClr val="accent1"/>
+          </a:lnRef>
+          <a:fillRef idx="3">
+            <a:schemeClr val="accent1"/>
+          </a:fillRef>
+          <a:effectRef idx="2">
+            <a:schemeClr val="accent1"/>
+          </a:effectRef>
+          <a:fontRef idx="minor">
+            <a:schemeClr val="lt1"/>
+          </a:fontRef>
+        </p:style>
+        <p:txBody>
+          <a:bodyPr rtlCol="0" anchor="ctr"/>
+          <a:lstStyle/>
+          <a:p>
+            <a:pPr algn="ctr"/>
+          </a:p>
+        </p:txBody>
+      </p:sp>
+      <p:sp>
+        <p:nvSpPr>
+          <p:cNvPr id="17" name="Rectangle 16"/>
+          <p:cNvSpPr/>
+          <p:nvPr/>
+        </p:nvSpPr>
+        <p:spPr>
+          <a:xfrm>
+            <a:off x="8109508" y="1591056"/>
+            <a:ext cx="3624986" cy="64008"/>
+          </a:xfrm>
+          <a:prstGeom prst="rect">
+            <a:avLst/>
+          </a:prstGeom>
+          <a:solidFill>
+            <a:srgbClr val="095292"/>
+          </a:solidFill>
+          <a:ln>
+            <a:noFill/>
+          </a:ln>
+        </p:spPr>
+        <p:style>
+          <a:lnRef idx="1">
+            <a:schemeClr val="accent1"/>
+          </a:lnRef>
+          <a:fillRef idx="3">
+            <a:schemeClr val="accent1"/>
+          </a:fillRef>
+          <a:effectRef idx="2">
+            <a:schemeClr val="accent1"/>
+          </a:effectRef>
+          <a:fontRef idx="minor">
+            <a:schemeClr val="lt1"/>
+          </a:fontRef>
+        </p:style>
+        <p:txBody>
+          <a:bodyPr rtlCol="0" anchor="ctr"/>
+          <a:lstStyle/>
+          <a:p>
+            <a:pPr algn="ctr"/>
+          </a:p>
+        </p:txBody>
+      </p:sp>
+      <p:sp>
+        <p:nvSpPr>
+          <p:cNvPr id="18" name="Rectangle 17"/>
+          <p:cNvSpPr/>
+          <p:nvPr/>
+        </p:nvSpPr>
+        <p:spPr>
+          <a:xfrm>
+            <a:off x="8109508" y="1655064"/>
+            <a:ext cx="3624986" cy="27432"/>
+          </a:xfrm>
+          <a:prstGeom prst="rect">
+            <a:avLst/>
+          </a:prstGeom>
+          <a:solidFill>
+            <a:srgbClr val="FFD000"/>
+          </a:solidFill>
+          <a:ln>
+            <a:noFill/>
+          </a:ln>
+        </p:spPr>
+        <p:style>
+          <a:lnRef idx="1">
+            <a:schemeClr val="accent1"/>
+          </a:lnRef>
+          <a:fillRef idx="3">
+            <a:schemeClr val="accent1"/>
+          </a:fillRef>
+          <a:effectRef idx="2">
+            <a:schemeClr val="accent1"/>
+          </a:effectRef>
+          <a:fontRef idx="minor">
+            <a:schemeClr val="lt1"/>
+          </a:fontRef>
+        </p:style>
+        <p:txBody>
+          <a:bodyPr rtlCol="0" anchor="ctr"/>
+          <a:lstStyle/>
+          <a:p>
+            <a:pPr algn="ctr"/>
+          </a:p>
+        </p:txBody>
+      </p:sp>
+      <p:pic>
+        <p:nvPicPr>
+          <p:cNvPr id="19" name="Picture 18" descr="examlab.png"/>
+          <p:cNvPicPr>
+            <a:picLocks noChangeAspect="1"/>
+          </p:cNvPicPr>
+          <p:nvPr/>
+        </p:nvPicPr>
+        <p:blipFill>
+          <a:blip r:embed="rId4"/>
+          <a:stretch>
+            <a:fillRect/>
+          </a:stretch>
+        </p:blipFill>
+        <p:spPr>
+          <a:xfrm>
+            <a:off x="9295638" y="1847087"/>
+            <a:ext cx="1252728" cy="1252728"/>
+          </a:xfrm>
+          <a:prstGeom prst="rect">
+            <a:avLst/>
+          </a:prstGeom>
+        </p:spPr>
+      </p:pic>
+      <p:sp>
+        <p:nvSpPr>
+          <p:cNvPr id="20" name="TextBox 19"/>
+          <p:cNvSpPr txBox="1"/>
+          <p:nvPr/>
+        </p:nvSpPr>
+        <p:spPr>
+          <a:xfrm>
+            <a:off x="8182660" y="3191256"/>
+            <a:ext cx="3478682" cy="621792"/>
+          </a:xfrm>
+          <a:prstGeom prst="rect">
+            <a:avLst/>
+          </a:prstGeom>
+          <a:noFill/>
+        </p:spPr>
+        <p:txBody>
+          <a:bodyPr wrap="square" anchor="t"/>
+          <a:lstStyle/>
+          <a:p>
+            <a:pPr algn="ctr"/>
+            <a:r>
+              <a:rPr sz="1300" b="1" i="0">
+                <a:solidFill>
+                  <a:srgbClr val="095292"/>
+                </a:solidFill>
+                <a:latin typeface="Calibri"/>
+              </a:rPr>
+              <a:t>la plataforma del curso</a:t>
+            </a:r>
+          </a:p>
+          <a:p>
+            <a:pPr algn="ctr">
+              <a:spcBef>
+                <a:spcPts val="200"/>
+              </a:spcBef>
+            </a:pPr>
+            <a:r>
+              <a:rPr sz="1000" b="0" i="0">
+                <a:solidFill>
+                  <a:srgbClr val="666666"/>
+                </a:solidFill>
+                <a:latin typeface="Calibri"/>
+              </a:rPr>
+              <a:t>Donde se entrega</a:t>
+            </a:r>
+          </a:p>
+        </p:txBody>
+      </p:sp>
+      <p:sp>
+        <p:nvSpPr>
+          <p:cNvPr id="21" name="TextBox 20"/>
+          <p:cNvSpPr txBox="1"/>
+          <p:nvPr/>
+        </p:nvSpPr>
+        <p:spPr>
+          <a:xfrm>
+            <a:off x="11185855" y="6473952"/>
+            <a:ext cx="640080" cy="274320"/>
+          </a:xfrm>
+          <a:prstGeom prst="rect">
+            <a:avLst/>
+          </a:prstGeom>
+          <a:noFill/>
+        </p:spPr>
+        <p:txBody>
+          <a:bodyPr wrap="square">
+            <a:spAutoFit/>
+          </a:bodyPr>
+          <a:lstStyle/>
+          <a:p>
+            <a:pPr algn="r"/>
+            <a:r>
+              <a:rPr sz="1100" b="0" i="0">
+                <a:solidFill>
+                  <a:srgbClr val="666666"/>
+                </a:solidFill>
+                <a:latin typeface="Calibri"/>
+              </a:rPr>
+              <a:t>28</a:t>
+            </a:r>
+          </a:p>
+        </p:txBody>
+      </p:sp>
+    </p:spTree>
+  </p:cSld>
+  <p:clrMapOvr>
+    <a:masterClrMapping/>
+  </p:clrMapOvr>
+</p:sld>
+</file>
+
+<file path=ppt/slides/slide29.xml><?xml version="1.0" encoding="utf-8"?>
+<p:sld xmlns:a="http://schemas.openxmlformats.org/drawingml/2006/main" xmlns:p="http://schemas.openxmlformats.org/presentationml/2006/main" xmlns:r="http://schemas.openxmlformats.org/officeDocument/2006/relationships">
+  <p:cSld>
+    <p:bg>
+      <p:bgPr>
+        <a:solidFill>
+          <a:srgbClr val="FFFFFF"/>
+        </a:solidFill>
+        <a:effectLst/>
+      </p:bgPr>
+    </p:bg>
+    <p:spTree>
+      <p:nvGrpSpPr>
+        <p:cNvPr id="1" name=""/>
+        <p:cNvGrpSpPr/>
+        <p:nvPr/>
+      </p:nvGrpSpPr>
+      <p:grpSpPr/>
+      <p:sp>
+        <p:nvSpPr>
+          <p:cNvPr id="2" name="Rectangle 1"/>
+          <p:cNvSpPr/>
+          <p:nvPr/>
+        </p:nvSpPr>
+        <p:spPr>
+          <a:xfrm>
+            <a:off x="0" y="0"/>
+            <a:ext cx="12191695" cy="960120"/>
+          </a:xfrm>
+          <a:prstGeom prst="rect">
+            <a:avLst/>
+          </a:prstGeom>
+          <a:solidFill>
+            <a:srgbClr val="095292"/>
+          </a:solidFill>
+          <a:ln>
+            <a:noFill/>
+          </a:ln>
+        </p:spPr>
+        <p:style>
+          <a:lnRef idx="1">
+            <a:schemeClr val="accent1"/>
+          </a:lnRef>
+          <a:fillRef idx="3">
+            <a:schemeClr val="accent1"/>
+          </a:fillRef>
+          <a:effectRef idx="2">
+            <a:schemeClr val="accent1"/>
+          </a:effectRef>
+          <a:fontRef idx="minor">
+            <a:schemeClr val="lt1"/>
+          </a:fontRef>
+        </p:style>
+        <p:txBody>
+          <a:bodyPr rtlCol="0" anchor="ctr"/>
+          <a:lstStyle/>
+          <a:p>
+            <a:pPr algn="ctr"/>
+          </a:p>
+        </p:txBody>
+      </p:sp>
+      <p:sp>
+        <p:nvSpPr>
+          <p:cNvPr id="3" name="Rectangle 2"/>
+          <p:cNvSpPr/>
+          <p:nvPr/>
+        </p:nvSpPr>
+        <p:spPr>
+          <a:xfrm>
+            <a:off x="0" y="960120"/>
+            <a:ext cx="12191695" cy="41148"/>
+          </a:xfrm>
+          <a:prstGeom prst="rect">
+            <a:avLst/>
+          </a:prstGeom>
+          <a:solidFill>
+            <a:srgbClr val="FFD000"/>
+          </a:solidFill>
+          <a:ln>
+            <a:noFill/>
+          </a:ln>
+        </p:spPr>
+        <p:style>
+          <a:lnRef idx="1">
+            <a:schemeClr val="accent1"/>
+          </a:lnRef>
+          <a:fillRef idx="3">
+            <a:schemeClr val="accent1"/>
+          </a:fillRef>
+          <a:effectRef idx="2">
+            <a:schemeClr val="accent1"/>
+          </a:effectRef>
+          <a:fontRef idx="minor">
+            <a:schemeClr val="lt1"/>
+          </a:fontRef>
+        </p:style>
+        <p:txBody>
+          <a:bodyPr rtlCol="0" anchor="ctr"/>
+          <a:lstStyle/>
+          <a:p>
+            <a:pPr algn="ctr"/>
+          </a:p>
+        </p:txBody>
+      </p:sp>
+      <p:sp>
+        <p:nvSpPr>
+          <p:cNvPr id="4" name="TextBox 3"/>
+          <p:cNvSpPr txBox="1"/>
+          <p:nvPr/>
+        </p:nvSpPr>
+        <p:spPr>
+          <a:xfrm>
+            <a:off x="457200" y="164592"/>
+            <a:ext cx="11277295" cy="502920"/>
+          </a:xfrm>
+          <a:prstGeom prst="rect">
+            <a:avLst/>
+          </a:prstGeom>
+          <a:noFill/>
+        </p:spPr>
+        <p:txBody>
+          <a:bodyPr wrap="square">
+            <a:spAutoFit/>
+          </a:bodyPr>
+          <a:lstStyle/>
+          <a:p>
+            <a:r>
+              <a:rPr sz="2600" b="1" i="0">
+                <a:solidFill>
+                  <a:srgbClr val="FFFFFF"/>
+                </a:solidFill>
+                <a:latin typeface="Calibri"/>
+              </a:rPr>
+              <a:t>PI CloudLite — entregable de hoy</a:t>
+            </a:r>
+          </a:p>
+        </p:txBody>
+      </p:sp>
+      <p:sp>
+        <p:nvSpPr>
+          <p:cNvPr id="5" name="TextBox 4"/>
+          <p:cNvSpPr txBox="1"/>
+          <p:nvPr/>
+        </p:nvSpPr>
+        <p:spPr>
+          <a:xfrm>
+            <a:off x="457200" y="1170432"/>
+            <a:ext cx="11277295" cy="5230368"/>
+          </a:xfrm>
+          <a:prstGeom prst="rect">
+            <a:avLst/>
+          </a:prstGeom>
+          <a:noFill/>
+        </p:spPr>
+        <p:txBody>
+          <a:bodyPr wrap="square">
+            <a:spAutoFit/>
+          </a:bodyPr>
+          <a:lstStyle/>
+          <a:p>
+            <a:pPr>
+              <a:spcAft>
+                <a:spcPts val="800"/>
+              </a:spcAft>
+            </a:pPr>
+            <a:r>
+              <a:rPr sz="2000" b="0" i="0">
+                <a:solidFill>
+                  <a:srgbClr val="333333"/>
+                </a:solidFill>
+                <a:latin typeface="Calibri"/>
+              </a:rPr>
+              <a:t>–   </a:t>
+            </a:r>
+            <a:r>
+              <a:rPr sz="2000" b="1" i="0">
+                <a:solidFill>
+                  <a:srgbClr val="333333"/>
+                </a:solidFill>
+                <a:latin typeface="Calibri"/>
+              </a:rPr>
+              <a:t>Entregable:</a:t>
+            </a:r>
+            <a:r>
+              <a:rPr sz="2000" b="0" i="0">
+                <a:solidFill>
+                  <a:srgbClr val="333333"/>
+                </a:solidFill>
+                <a:latin typeface="Calibri"/>
+              </a:rPr>
+              <a:t> .github/workflows/ci.yml + sección Monitoreo/CI del informe</a:t>
+            </a:r>
+          </a:p>
+          <a:p>
+            <a:pPr>
+              <a:spcAft>
+                <a:spcPts val="800"/>
+              </a:spcAft>
+            </a:pPr>
+            <a:r>
+              <a:rPr sz="2000" b="0" i="0">
+                <a:solidFill>
+                  <a:srgbClr val="333333"/>
+                </a:solidFill>
+                <a:latin typeface="Calibri"/>
+              </a:rPr>
+              <a:t>–   Herramienta: </a:t>
+            </a:r>
+            <a:r>
+              <a:rPr sz="2000" b="1" i="0">
+                <a:solidFill>
+                  <a:srgbClr val="333333"/>
+                </a:solidFill>
+                <a:latin typeface="Calibri"/>
+              </a:rPr>
+              <a:t>GitHub Actions · Google Docs</a:t>
+            </a:r>
+          </a:p>
+          <a:p>
+            <a:pPr>
+              <a:spcAft>
+                <a:spcPts val="800"/>
+              </a:spcAft>
+            </a:pPr>
+            <a:r>
+              <a:rPr sz="2000" b="0" i="0">
+                <a:solidFill>
+                  <a:srgbClr val="333333"/>
+                </a:solidFill>
+                <a:latin typeface="Calibri"/>
+              </a:rPr>
+              <a:t>–   Todo lo que construyan hoy entra al </a:t>
+            </a:r>
+            <a:r>
+              <a:rPr sz="2000" b="1" i="0">
+                <a:solidFill>
+                  <a:srgbClr val="333333"/>
+                </a:solidFill>
+                <a:latin typeface="Calibri"/>
+              </a:rPr>
+              <a:t>informe/repo del PI</a:t>
+            </a:r>
+            <a:r>
+              <a:rPr sz="2000" b="0" i="0">
+                <a:solidFill>
+                  <a:srgbClr val="333333"/>
+                </a:solidFill>
+                <a:latin typeface="Calibri"/>
+              </a:rPr>
+              <a:t> (no es lab suelto).</a:t>
+            </a:r>
+          </a:p>
+          <a:p>
+            <a:pPr>
+              <a:spcAft>
+                <a:spcPts val="800"/>
+              </a:spcAft>
+            </a:pPr>
+            <a:r>
+              <a:rPr sz="2000" b="0" i="0">
+                <a:solidFill>
+                  <a:srgbClr val="333333"/>
+                </a:solidFill>
+                <a:latin typeface="Calibri"/>
+              </a:rPr>
+              <a:t>–   Individual por defecto · el docente puede autorizar equipos de 2–3; la entrega en la plataforma del curso siempre es individual.</a:t>
+            </a:r>
+          </a:p>
+        </p:txBody>
+      </p:sp>
+      <p:sp>
+        <p:nvSpPr>
+          <p:cNvPr id="6" name="TextBox 5"/>
+          <p:cNvSpPr txBox="1"/>
+          <p:nvPr/>
+        </p:nvSpPr>
+        <p:spPr>
+          <a:xfrm>
+            <a:off x="11185855" y="6473952"/>
+            <a:ext cx="640080" cy="274320"/>
+          </a:xfrm>
+          <a:prstGeom prst="rect">
+            <a:avLst/>
+          </a:prstGeom>
+          <a:noFill/>
+        </p:spPr>
+        <p:txBody>
+          <a:bodyPr wrap="square">
+            <a:spAutoFit/>
+          </a:bodyPr>
+          <a:lstStyle/>
+          <a:p>
+            <a:pPr algn="r"/>
+            <a:r>
+              <a:rPr sz="1100" b="0" i="0">
+                <a:solidFill>
+                  <a:srgbClr val="666666"/>
+                </a:solidFill>
+                <a:latin typeface="Calibri"/>
+              </a:rPr>
+              <a:t>29</a:t>
+            </a:r>
+          </a:p>
+        </p:txBody>
+      </p:sp>
+    </p:spTree>
+  </p:cSld>
+  <p:clrMapOvr>
+    <a:masterClrMapping/>
+  </p:clrMapOvr>
+</p:sld>
+</file>
+
 <file path=ppt/slides/slide3.xml><?xml version="1.0" encoding="utf-8"?>
 <p:sld xmlns:a="http://schemas.openxmlformats.org/drawingml/2006/main" xmlns:p="http://schemas.openxmlformats.org/presentationml/2006/main" xmlns:r="http://schemas.openxmlformats.org/officeDocument/2006/relationships">
   <p:cSld>
@@ -5187,6 +10584,1164 @@
                 <a:latin typeface="Calibri"/>
               </a:rPr>
               <a:t>3</a:t>
+            </a:r>
+          </a:p>
+        </p:txBody>
+      </p:sp>
+    </p:spTree>
+  </p:cSld>
+  <p:clrMapOvr>
+    <a:masterClrMapping/>
+  </p:clrMapOvr>
+</p:sld>
+</file>
+
+<file path=ppt/slides/slide30.xml><?xml version="1.0" encoding="utf-8"?>
+<p:sld xmlns:a="http://schemas.openxmlformats.org/drawingml/2006/main" xmlns:p="http://schemas.openxmlformats.org/presentationml/2006/main" xmlns:r="http://schemas.openxmlformats.org/officeDocument/2006/relationships">
+  <p:cSld>
+    <p:bg>
+      <p:bgPr>
+        <a:solidFill>
+          <a:srgbClr val="FFFFFF"/>
+        </a:solidFill>
+        <a:effectLst/>
+      </p:bgPr>
+    </p:bg>
+    <p:spTree>
+      <p:nvGrpSpPr>
+        <p:cNvPr id="1" name=""/>
+        <p:cNvGrpSpPr/>
+        <p:nvPr/>
+      </p:nvGrpSpPr>
+      <p:grpSpPr/>
+      <p:sp>
+        <p:nvSpPr>
+          <p:cNvPr id="2" name="Rectangle 1"/>
+          <p:cNvSpPr/>
+          <p:nvPr/>
+        </p:nvSpPr>
+        <p:spPr>
+          <a:xfrm>
+            <a:off x="0" y="0"/>
+            <a:ext cx="12191695" cy="960120"/>
+          </a:xfrm>
+          <a:prstGeom prst="rect">
+            <a:avLst/>
+          </a:prstGeom>
+          <a:solidFill>
+            <a:srgbClr val="095292"/>
+          </a:solidFill>
+          <a:ln>
+            <a:noFill/>
+          </a:ln>
+        </p:spPr>
+        <p:style>
+          <a:lnRef idx="1">
+            <a:schemeClr val="accent1"/>
+          </a:lnRef>
+          <a:fillRef idx="3">
+            <a:schemeClr val="accent1"/>
+          </a:fillRef>
+          <a:effectRef idx="2">
+            <a:schemeClr val="accent1"/>
+          </a:effectRef>
+          <a:fontRef idx="minor">
+            <a:schemeClr val="lt1"/>
+          </a:fontRef>
+        </p:style>
+        <p:txBody>
+          <a:bodyPr rtlCol="0" anchor="ctr"/>
+          <a:lstStyle/>
+          <a:p>
+            <a:pPr algn="ctr"/>
+          </a:p>
+        </p:txBody>
+      </p:sp>
+      <p:sp>
+        <p:nvSpPr>
+          <p:cNvPr id="3" name="Rectangle 2"/>
+          <p:cNvSpPr/>
+          <p:nvPr/>
+        </p:nvSpPr>
+        <p:spPr>
+          <a:xfrm>
+            <a:off x="0" y="960120"/>
+            <a:ext cx="12191695" cy="41148"/>
+          </a:xfrm>
+          <a:prstGeom prst="rect">
+            <a:avLst/>
+          </a:prstGeom>
+          <a:solidFill>
+            <a:srgbClr val="FFD000"/>
+          </a:solidFill>
+          <a:ln>
+            <a:noFill/>
+          </a:ln>
+        </p:spPr>
+        <p:style>
+          <a:lnRef idx="1">
+            <a:schemeClr val="accent1"/>
+          </a:lnRef>
+          <a:fillRef idx="3">
+            <a:schemeClr val="accent1"/>
+          </a:fillRef>
+          <a:effectRef idx="2">
+            <a:schemeClr val="accent1"/>
+          </a:effectRef>
+          <a:fontRef idx="minor">
+            <a:schemeClr val="lt1"/>
+          </a:fontRef>
+        </p:style>
+        <p:txBody>
+          <a:bodyPr rtlCol="0" anchor="ctr"/>
+          <a:lstStyle/>
+          <a:p>
+            <a:pPr algn="ctr"/>
+          </a:p>
+        </p:txBody>
+      </p:sp>
+      <p:sp>
+        <p:nvSpPr>
+          <p:cNvPr id="4" name="TextBox 3"/>
+          <p:cNvSpPr txBox="1"/>
+          <p:nvPr/>
+        </p:nvSpPr>
+        <p:spPr>
+          <a:xfrm>
+            <a:off x="457200" y="164592"/>
+            <a:ext cx="11277295" cy="502920"/>
+          </a:xfrm>
+          <a:prstGeom prst="rect">
+            <a:avLst/>
+          </a:prstGeom>
+          <a:noFill/>
+        </p:spPr>
+        <p:txBody>
+          <a:bodyPr wrap="square">
+            <a:spAutoFit/>
+          </a:bodyPr>
+          <a:lstStyle/>
+          <a:p>
+            <a:r>
+              <a:rPr sz="2600" b="1" i="0">
+                <a:solidFill>
+                  <a:srgbClr val="FFFFFF"/>
+                </a:solidFill>
+                <a:latin typeface="Calibri"/>
+              </a:rPr>
+              <a:t>Manos a la obra (paso a paso)</a:t>
+            </a:r>
+          </a:p>
+        </p:txBody>
+      </p:sp>
+      <p:sp>
+        <p:nvSpPr>
+          <p:cNvPr id="5" name="TextBox 4"/>
+          <p:cNvSpPr txBox="1"/>
+          <p:nvPr/>
+        </p:nvSpPr>
+        <p:spPr>
+          <a:xfrm>
+            <a:off x="457200" y="1170432"/>
+            <a:ext cx="11277295" cy="5230368"/>
+          </a:xfrm>
+          <a:prstGeom prst="rect">
+            <a:avLst/>
+          </a:prstGeom>
+          <a:noFill/>
+        </p:spPr>
+        <p:txBody>
+          <a:bodyPr wrap="square">
+            <a:spAutoFit/>
+          </a:bodyPr>
+          <a:lstStyle/>
+          <a:p>
+            <a:pPr>
+              <a:spcAft>
+                <a:spcPts val="800"/>
+              </a:spcAft>
+            </a:pPr>
+            <a:r>
+              <a:rPr sz="2000" b="1" i="0">
+                <a:solidFill>
+                  <a:srgbClr val="333333"/>
+                </a:solidFill>
+                <a:latin typeface="Calibri"/>
+              </a:rPr>
+              <a:t>1.</a:t>
+            </a:r>
+            <a:r>
+              <a:rPr sz="2000" b="0" i="0">
+                <a:solidFill>
+                  <a:srgbClr val="333333"/>
+                </a:solidFill>
+                <a:latin typeface="Calibri"/>
+              </a:rPr>
+              <a:t> Paso 1: escriba en la pregunta 7 el contenido completo del ci.yml con disparadores, entorno y los pasos de construccion, prueba y despliegue simulado, usando la imagen y el puerto del Dockerfile del Corte 1; verifique que ningun secreto quede escrito en claro dentro del YAML.</a:t>
+            </a:r>
+          </a:p>
+          <a:p>
+            <a:pPr>
+              <a:spcAft>
+                <a:spcPts val="800"/>
+              </a:spcAft>
+            </a:pPr>
+            <a:r>
+              <a:rPr sz="2000" b="0" i="0">
+                <a:solidFill>
+                  <a:srgbClr val="333333"/>
+                </a:solidFill>
+                <a:latin typeface="Calibri"/>
+              </a:rPr>
+              <a:t>–   </a:t>
+            </a:r>
+            <a:r>
+              <a:rPr sz="2000" b="1" i="0">
+                <a:solidFill>
+                  <a:srgbClr val="333333"/>
+                </a:solidFill>
+                <a:latin typeface="Calibri"/>
+              </a:rPr>
+              <a:t>2.</a:t>
+            </a:r>
+            <a:r>
+              <a:rPr sz="2000" b="0" i="0">
+                <a:solidFill>
+                  <a:srgbClr val="333333"/>
+                </a:solidFill>
+                <a:latin typeface="Calibri"/>
+              </a:rPr>
+              <a:t> Paso 2: explique en la pregunta 8 que se compila o instala, que se ejecuta en la prueba y con que condicion el pipeline debe fallar; hagase la prueba mental de que error tendria que introducir para que el check salga rojo, y si no encuentra ninguno, su pipeline todavia no valida nada.</a:t>
+            </a:r>
+          </a:p>
+          <a:p>
+            <a:pPr>
+              <a:spcAft>
+                <a:spcPts val="800"/>
+              </a:spcAft>
+            </a:pPr>
+            <a:r>
+              <a:rPr sz="2000" b="0" i="0">
+                <a:solidFill>
+                  <a:srgbClr val="333333"/>
+                </a:solidFill>
+                <a:latin typeface="Calibri"/>
+              </a:rPr>
+              <a:t>–   </a:t>
+            </a:r>
+            <a:r>
+              <a:rPr sz="2000" b="1" i="0">
+                <a:solidFill>
+                  <a:srgbClr val="333333"/>
+                </a:solidFill>
+                <a:latin typeface="Calibri"/>
+              </a:rPr>
+              <a:t>3.</a:t>
+            </a:r>
+            <a:r>
+              <a:rPr sz="2000" b="0" i="0">
+                <a:solidFill>
+                  <a:srgbClr val="333333"/>
+                </a:solidFill>
+                <a:latin typeface="Calibri"/>
+              </a:rPr>
+              <a:t> Paso 3: distinga en la pregunta 9 que valida CI y que hace CD, ubique cual de los dos construyo y diga que le faltaria para CD real; reconocer que su pipeline llega hasta «listo para desplegar» suma puntos, afirmar que ya tiene CD los resta.</a:t>
+            </a:r>
+          </a:p>
+          <a:p>
+            <a:pPr>
+              <a:spcAft>
+                <a:spcPts val="800"/>
+              </a:spcAft>
+            </a:pPr>
+            <a:r>
+              <a:rPr sz="2000" b="0" i="0">
+                <a:solidFill>
+                  <a:srgbClr val="333333"/>
+                </a:solidFill>
+                <a:latin typeface="Calibri"/>
+              </a:rPr>
+              <a:t>–   </a:t>
+            </a:r>
+            <a:r>
+              <a:rPr sz="2000" b="1" i="0">
+                <a:solidFill>
+                  <a:srgbClr val="333333"/>
+                </a:solidFill>
+                <a:latin typeface="Calibri"/>
+              </a:rPr>
+              <a:t>4.</a:t>
+            </a:r>
+            <a:r>
+              <a:rPr sz="2000" b="0" i="0">
+                <a:solidFill>
+                  <a:srgbClr val="333333"/>
+                </a:solidFill>
+                <a:latin typeface="Calibri"/>
+              </a:rPr>
+              <a:t> Paso 4: liste en la pregunta 10 entre 4 y 6 senales con su umbral, atadas a operaciones de su dominio, y verifique que al menos una sea un registro y no una metrica numerica; una senal sin umbral no sirve para operar y no suma.</a:t>
+            </a:r>
+          </a:p>
+        </p:txBody>
+      </p:sp>
+      <p:sp>
+        <p:nvSpPr>
+          <p:cNvPr id="6" name="TextBox 5"/>
+          <p:cNvSpPr txBox="1"/>
+          <p:nvPr/>
+        </p:nvSpPr>
+        <p:spPr>
+          <a:xfrm>
+            <a:off x="11185855" y="6473952"/>
+            <a:ext cx="640080" cy="274320"/>
+          </a:xfrm>
+          <a:prstGeom prst="rect">
+            <a:avLst/>
+          </a:prstGeom>
+          <a:noFill/>
+        </p:spPr>
+        <p:txBody>
+          <a:bodyPr wrap="square">
+            <a:spAutoFit/>
+          </a:bodyPr>
+          <a:lstStyle/>
+          <a:p>
+            <a:pPr algn="r"/>
+            <a:r>
+              <a:rPr sz="1100" b="0" i="0">
+                <a:solidFill>
+                  <a:srgbClr val="666666"/>
+                </a:solidFill>
+                <a:latin typeface="Calibri"/>
+              </a:rPr>
+              <a:t>30</a:t>
+            </a:r>
+          </a:p>
+        </p:txBody>
+      </p:sp>
+    </p:spTree>
+  </p:cSld>
+  <p:clrMapOvr>
+    <a:masterClrMapping/>
+  </p:clrMapOvr>
+</p:sld>
+</file>
+
+<file path=ppt/slides/slide31.xml><?xml version="1.0" encoding="utf-8"?>
+<p:sld xmlns:a="http://schemas.openxmlformats.org/drawingml/2006/main" xmlns:p="http://schemas.openxmlformats.org/presentationml/2006/main" xmlns:r="http://schemas.openxmlformats.org/officeDocument/2006/relationships">
+  <p:cSld>
+    <p:bg>
+      <p:bgPr>
+        <a:solidFill>
+          <a:srgbClr val="FFFFFF"/>
+        </a:solidFill>
+        <a:effectLst/>
+      </p:bgPr>
+    </p:bg>
+    <p:spTree>
+      <p:nvGrpSpPr>
+        <p:cNvPr id="1" name=""/>
+        <p:cNvGrpSpPr/>
+        <p:nvPr/>
+      </p:nvGrpSpPr>
+      <p:grpSpPr/>
+      <p:sp>
+        <p:nvSpPr>
+          <p:cNvPr id="2" name="Rectangle 1"/>
+          <p:cNvSpPr/>
+          <p:nvPr/>
+        </p:nvSpPr>
+        <p:spPr>
+          <a:xfrm>
+            <a:off x="0" y="0"/>
+            <a:ext cx="12191695" cy="960120"/>
+          </a:xfrm>
+          <a:prstGeom prst="rect">
+            <a:avLst/>
+          </a:prstGeom>
+          <a:solidFill>
+            <a:srgbClr val="095292"/>
+          </a:solidFill>
+          <a:ln>
+            <a:noFill/>
+          </a:ln>
+        </p:spPr>
+        <p:style>
+          <a:lnRef idx="1">
+            <a:schemeClr val="accent1"/>
+          </a:lnRef>
+          <a:fillRef idx="3">
+            <a:schemeClr val="accent1"/>
+          </a:fillRef>
+          <a:effectRef idx="2">
+            <a:schemeClr val="accent1"/>
+          </a:effectRef>
+          <a:fontRef idx="minor">
+            <a:schemeClr val="lt1"/>
+          </a:fontRef>
+        </p:style>
+        <p:txBody>
+          <a:bodyPr rtlCol="0" anchor="ctr"/>
+          <a:lstStyle/>
+          <a:p>
+            <a:pPr algn="ctr"/>
+          </a:p>
+        </p:txBody>
+      </p:sp>
+      <p:sp>
+        <p:nvSpPr>
+          <p:cNvPr id="3" name="Rectangle 2"/>
+          <p:cNvSpPr/>
+          <p:nvPr/>
+        </p:nvSpPr>
+        <p:spPr>
+          <a:xfrm>
+            <a:off x="0" y="960120"/>
+            <a:ext cx="12191695" cy="41148"/>
+          </a:xfrm>
+          <a:prstGeom prst="rect">
+            <a:avLst/>
+          </a:prstGeom>
+          <a:solidFill>
+            <a:srgbClr val="FFD000"/>
+          </a:solidFill>
+          <a:ln>
+            <a:noFill/>
+          </a:ln>
+        </p:spPr>
+        <p:style>
+          <a:lnRef idx="1">
+            <a:schemeClr val="accent1"/>
+          </a:lnRef>
+          <a:fillRef idx="3">
+            <a:schemeClr val="accent1"/>
+          </a:fillRef>
+          <a:effectRef idx="2">
+            <a:schemeClr val="accent1"/>
+          </a:effectRef>
+          <a:fontRef idx="minor">
+            <a:schemeClr val="lt1"/>
+          </a:fontRef>
+        </p:style>
+        <p:txBody>
+          <a:bodyPr rtlCol="0" anchor="ctr"/>
+          <a:lstStyle/>
+          <a:p>
+            <a:pPr algn="ctr"/>
+          </a:p>
+        </p:txBody>
+      </p:sp>
+      <p:sp>
+        <p:nvSpPr>
+          <p:cNvPr id="4" name="TextBox 3"/>
+          <p:cNvSpPr txBox="1"/>
+          <p:nvPr/>
+        </p:nvSpPr>
+        <p:spPr>
+          <a:xfrm>
+            <a:off x="457200" y="164592"/>
+            <a:ext cx="11277295" cy="502920"/>
+          </a:xfrm>
+          <a:prstGeom prst="rect">
+            <a:avLst/>
+          </a:prstGeom>
+          <a:noFill/>
+        </p:spPr>
+        <p:txBody>
+          <a:bodyPr wrap="square">
+            <a:spAutoFit/>
+          </a:bodyPr>
+          <a:lstStyle/>
+          <a:p>
+            <a:r>
+              <a:rPr sz="2600" b="1" i="0">
+                <a:solidFill>
+                  <a:srgbClr val="FFFFFF"/>
+                </a:solidFill>
+                <a:latin typeface="Calibri"/>
+              </a:rPr>
+              <a:t>Para continuar (PI)</a:t>
+            </a:r>
+          </a:p>
+        </p:txBody>
+      </p:sp>
+      <p:sp>
+        <p:nvSpPr>
+          <p:cNvPr id="5" name="Rounded Rectangle 4"/>
+          <p:cNvSpPr/>
+          <p:nvPr/>
+        </p:nvSpPr>
+        <p:spPr>
+          <a:xfrm>
+            <a:off x="457200" y="1261872"/>
+            <a:ext cx="11277295" cy="1051560"/>
+          </a:xfrm>
+          <a:prstGeom prst="roundRect">
+            <a:avLst>
+              <a:gd name="adj" fmla="val 12000"/>
+            </a:avLst>
+          </a:prstGeom>
+          <a:solidFill>
+            <a:srgbClr val="E8F4FA"/>
+          </a:solidFill>
+          <a:ln>
+            <a:noFill/>
+          </a:ln>
+        </p:spPr>
+        <p:style>
+          <a:lnRef idx="1">
+            <a:schemeClr val="accent1"/>
+          </a:lnRef>
+          <a:fillRef idx="3">
+            <a:schemeClr val="accent1"/>
+          </a:fillRef>
+          <a:effectRef idx="2">
+            <a:schemeClr val="accent1"/>
+          </a:effectRef>
+          <a:fontRef idx="minor">
+            <a:schemeClr val="lt1"/>
+          </a:fontRef>
+        </p:style>
+        <p:txBody>
+          <a:bodyPr rtlCol="0" anchor="ctr"/>
+          <a:lstStyle/>
+          <a:p>
+            <a:pPr algn="ctr"/>
+          </a:p>
+        </p:txBody>
+      </p:sp>
+      <p:sp>
+        <p:nvSpPr>
+          <p:cNvPr id="6" name="Rectangle 5"/>
+          <p:cNvSpPr/>
+          <p:nvPr/>
+        </p:nvSpPr>
+        <p:spPr>
+          <a:xfrm>
+            <a:off x="457200" y="1261872"/>
+            <a:ext cx="128016" cy="1051560"/>
+          </a:xfrm>
+          <a:prstGeom prst="rect">
+            <a:avLst/>
+          </a:prstGeom>
+          <a:solidFill>
+            <a:srgbClr val="269CCB"/>
+          </a:solidFill>
+          <a:ln>
+            <a:noFill/>
+          </a:ln>
+        </p:spPr>
+        <p:style>
+          <a:lnRef idx="1">
+            <a:schemeClr val="accent1"/>
+          </a:lnRef>
+          <a:fillRef idx="3">
+            <a:schemeClr val="accent1"/>
+          </a:fillRef>
+          <a:effectRef idx="2">
+            <a:schemeClr val="accent1"/>
+          </a:effectRef>
+          <a:fontRef idx="minor">
+            <a:schemeClr val="lt1"/>
+          </a:fontRef>
+        </p:style>
+        <p:txBody>
+          <a:bodyPr rtlCol="0" anchor="ctr"/>
+          <a:lstStyle/>
+          <a:p>
+            <a:pPr algn="ctr"/>
+          </a:p>
+        </p:txBody>
+      </p:sp>
+      <p:sp>
+        <p:nvSpPr>
+          <p:cNvPr id="7" name="TextBox 6"/>
+          <p:cNvSpPr txBox="1"/>
+          <p:nvPr/>
+        </p:nvSpPr>
+        <p:spPr>
+          <a:xfrm>
+            <a:off x="777240" y="1399031"/>
+            <a:ext cx="10774375" cy="822959"/>
+          </a:xfrm>
+          <a:prstGeom prst="rect">
+            <a:avLst/>
+          </a:prstGeom>
+          <a:noFill/>
+        </p:spPr>
+        <p:txBody>
+          <a:bodyPr wrap="square">
+            <a:spAutoFit/>
+          </a:bodyPr>
+          <a:lstStyle/>
+          <a:p>
+            <a:r>
+              <a:rPr sz="1200" b="1" i="0">
+                <a:solidFill>
+                  <a:srgbClr val="269CCB"/>
+                </a:solidFill>
+                <a:latin typeface="Calibri"/>
+              </a:rPr>
+              <a:t>Info</a:t>
+            </a:r>
+          </a:p>
+          <a:p>
+            <a:pPr>
+              <a:spcBef>
+                <a:spcPts val="400"/>
+              </a:spcBef>
+            </a:pPr>
+            <a:r>
+              <a:rPr sz="1400" b="0" i="0">
+                <a:solidFill>
+                  <a:srgbClr val="333333"/>
+                </a:solidFill>
+                <a:latin typeface="Calibri"/>
+              </a:rPr>
+              <a:t>Entregable: .github/workflows/ci.yml + sección Monitoreo/CI del informe</a:t>
+            </a:r>
+          </a:p>
+        </p:txBody>
+      </p:sp>
+      <p:sp>
+        <p:nvSpPr>
+          <p:cNvPr id="8" name="Rounded Rectangle 7"/>
+          <p:cNvSpPr/>
+          <p:nvPr/>
+        </p:nvSpPr>
+        <p:spPr>
+          <a:xfrm>
+            <a:off x="457200" y="2478024"/>
+            <a:ext cx="11277295" cy="1051560"/>
+          </a:xfrm>
+          <a:prstGeom prst="roundRect">
+            <a:avLst>
+              <a:gd name="adj" fmla="val 12000"/>
+            </a:avLst>
+          </a:prstGeom>
+          <a:solidFill>
+            <a:srgbClr val="FFF8E1"/>
+          </a:solidFill>
+          <a:ln>
+            <a:noFill/>
+          </a:ln>
+        </p:spPr>
+        <p:style>
+          <a:lnRef idx="1">
+            <a:schemeClr val="accent1"/>
+          </a:lnRef>
+          <a:fillRef idx="3">
+            <a:schemeClr val="accent1"/>
+          </a:fillRef>
+          <a:effectRef idx="2">
+            <a:schemeClr val="accent1"/>
+          </a:effectRef>
+          <a:fontRef idx="minor">
+            <a:schemeClr val="lt1"/>
+          </a:fontRef>
+        </p:style>
+        <p:txBody>
+          <a:bodyPr rtlCol="0" anchor="ctr"/>
+          <a:lstStyle/>
+          <a:p>
+            <a:pPr algn="ctr"/>
+          </a:p>
+        </p:txBody>
+      </p:sp>
+      <p:sp>
+        <p:nvSpPr>
+          <p:cNvPr id="9" name="Rectangle 8"/>
+          <p:cNvSpPr/>
+          <p:nvPr/>
+        </p:nvSpPr>
+        <p:spPr>
+          <a:xfrm>
+            <a:off x="457200" y="2478024"/>
+            <a:ext cx="128016" cy="1051560"/>
+          </a:xfrm>
+          <a:prstGeom prst="rect">
+            <a:avLst/>
+          </a:prstGeom>
+          <a:solidFill>
+            <a:srgbClr val="FFD000"/>
+          </a:solidFill>
+          <a:ln>
+            <a:noFill/>
+          </a:ln>
+        </p:spPr>
+        <p:style>
+          <a:lnRef idx="1">
+            <a:schemeClr val="accent1"/>
+          </a:lnRef>
+          <a:fillRef idx="3">
+            <a:schemeClr val="accent1"/>
+          </a:fillRef>
+          <a:effectRef idx="2">
+            <a:schemeClr val="accent1"/>
+          </a:effectRef>
+          <a:fontRef idx="minor">
+            <a:schemeClr val="lt1"/>
+          </a:fontRef>
+        </p:style>
+        <p:txBody>
+          <a:bodyPr rtlCol="0" anchor="ctr"/>
+          <a:lstStyle/>
+          <a:p>
+            <a:pPr algn="ctr"/>
+          </a:p>
+        </p:txBody>
+      </p:sp>
+      <p:sp>
+        <p:nvSpPr>
+          <p:cNvPr id="10" name="TextBox 9"/>
+          <p:cNvSpPr txBox="1"/>
+          <p:nvPr/>
+        </p:nvSpPr>
+        <p:spPr>
+          <a:xfrm>
+            <a:off x="777240" y="2615184"/>
+            <a:ext cx="10774375" cy="822959"/>
+          </a:xfrm>
+          <a:prstGeom prst="rect">
+            <a:avLst/>
+          </a:prstGeom>
+          <a:noFill/>
+        </p:spPr>
+        <p:txBody>
+          <a:bodyPr wrap="square">
+            <a:spAutoFit/>
+          </a:bodyPr>
+          <a:lstStyle/>
+          <a:p>
+            <a:r>
+              <a:rPr sz="1200" b="1" i="0">
+                <a:solidFill>
+                  <a:srgbClr val="FFD000"/>
+                </a:solidFill>
+                <a:latin typeface="Calibri"/>
+              </a:rPr>
+              <a:t>Aclaración</a:t>
+            </a:r>
+          </a:p>
+          <a:p>
+            <a:pPr>
+              <a:spcBef>
+                <a:spcPts val="400"/>
+              </a:spcBef>
+            </a:pPr>
+            <a:r>
+              <a:rPr sz="1400" b="0" i="0">
+                <a:solidFill>
+                  <a:srgbClr val="333333"/>
+                </a:solidFill>
+                <a:latin typeface="Calibri"/>
+              </a:rPr>
+              <a:t>Subir evidencias al paquete CloudLite (Drive/repo) y a la plataforma del curso en la fecha que indique el docente.</a:t>
+            </a:r>
+          </a:p>
+        </p:txBody>
+      </p:sp>
+      <p:sp>
+        <p:nvSpPr>
+          <p:cNvPr id="11" name="Rounded Rectangle 10"/>
+          <p:cNvSpPr/>
+          <p:nvPr/>
+        </p:nvSpPr>
+        <p:spPr>
+          <a:xfrm>
+            <a:off x="457200" y="3694176"/>
+            <a:ext cx="11277295" cy="1051560"/>
+          </a:xfrm>
+          <a:prstGeom prst="roundRect">
+            <a:avLst>
+              <a:gd name="adj" fmla="val 12000"/>
+            </a:avLst>
+          </a:prstGeom>
+          <a:solidFill>
+            <a:srgbClr val="FBE4E4"/>
+          </a:solidFill>
+          <a:ln>
+            <a:noFill/>
+          </a:ln>
+        </p:spPr>
+        <p:style>
+          <a:lnRef idx="1">
+            <a:schemeClr val="accent1"/>
+          </a:lnRef>
+          <a:fillRef idx="3">
+            <a:schemeClr val="accent1"/>
+          </a:fillRef>
+          <a:effectRef idx="2">
+            <a:schemeClr val="accent1"/>
+          </a:effectRef>
+          <a:fontRef idx="minor">
+            <a:schemeClr val="lt1"/>
+          </a:fontRef>
+        </p:style>
+        <p:txBody>
+          <a:bodyPr rtlCol="0" anchor="ctr"/>
+          <a:lstStyle/>
+          <a:p>
+            <a:pPr algn="ctr"/>
+          </a:p>
+        </p:txBody>
+      </p:sp>
+      <p:sp>
+        <p:nvSpPr>
+          <p:cNvPr id="12" name="Rectangle 11"/>
+          <p:cNvSpPr/>
+          <p:nvPr/>
+        </p:nvSpPr>
+        <p:spPr>
+          <a:xfrm>
+            <a:off x="457200" y="3694176"/>
+            <a:ext cx="128016" cy="1051560"/>
+          </a:xfrm>
+          <a:prstGeom prst="rect">
+            <a:avLst/>
+          </a:prstGeom>
+          <a:solidFill>
+            <a:srgbClr val="A02030"/>
+          </a:solidFill>
+          <a:ln>
+            <a:noFill/>
+          </a:ln>
+        </p:spPr>
+        <p:style>
+          <a:lnRef idx="1">
+            <a:schemeClr val="accent1"/>
+          </a:lnRef>
+          <a:fillRef idx="3">
+            <a:schemeClr val="accent1"/>
+          </a:fillRef>
+          <a:effectRef idx="2">
+            <a:schemeClr val="accent1"/>
+          </a:effectRef>
+          <a:fontRef idx="minor">
+            <a:schemeClr val="lt1"/>
+          </a:fontRef>
+        </p:style>
+        <p:txBody>
+          <a:bodyPr rtlCol="0" anchor="ctr"/>
+          <a:lstStyle/>
+          <a:p>
+            <a:pPr algn="ctr"/>
+          </a:p>
+        </p:txBody>
+      </p:sp>
+      <p:sp>
+        <p:nvSpPr>
+          <p:cNvPr id="13" name="TextBox 12"/>
+          <p:cNvSpPr txBox="1"/>
+          <p:nvPr/>
+        </p:nvSpPr>
+        <p:spPr>
+          <a:xfrm>
+            <a:off x="777240" y="3831336"/>
+            <a:ext cx="10774375" cy="822959"/>
+          </a:xfrm>
+          <a:prstGeom prst="rect">
+            <a:avLst/>
+          </a:prstGeom>
+          <a:noFill/>
+        </p:spPr>
+        <p:txBody>
+          <a:bodyPr wrap="square">
+            <a:spAutoFit/>
+          </a:bodyPr>
+          <a:lstStyle/>
+          <a:p>
+            <a:r>
+              <a:rPr sz="1200" b="1" i="0">
+                <a:solidFill>
+                  <a:srgbClr val="A02030"/>
+                </a:solidFill>
+                <a:latin typeface="Calibri"/>
+              </a:rPr>
+              <a:t>Atención</a:t>
+            </a:r>
+          </a:p>
+          <a:p>
+            <a:pPr>
+              <a:spcBef>
+                <a:spcPts val="400"/>
+              </a:spcBef>
+            </a:pPr>
+            <a:r>
+              <a:rPr sz="1400" b="0" i="0">
+                <a:solidFill>
+                  <a:srgbClr val="333333"/>
+                </a:solidFill>
+                <a:latin typeface="Calibri"/>
+              </a:rPr>
+              <a:t>Sin cloud de pago ni instalaciones obligatorias de hipervisores/Docker Desktop.</a:t>
+            </a:r>
+          </a:p>
+        </p:txBody>
+      </p:sp>
+      <p:sp>
+        <p:nvSpPr>
+          <p:cNvPr id="14" name="TextBox 13"/>
+          <p:cNvSpPr txBox="1"/>
+          <p:nvPr/>
+        </p:nvSpPr>
+        <p:spPr>
+          <a:xfrm>
+            <a:off x="11185855" y="6473952"/>
+            <a:ext cx="640080" cy="274320"/>
+          </a:xfrm>
+          <a:prstGeom prst="rect">
+            <a:avLst/>
+          </a:prstGeom>
+          <a:noFill/>
+        </p:spPr>
+        <p:txBody>
+          <a:bodyPr wrap="square">
+            <a:spAutoFit/>
+          </a:bodyPr>
+          <a:lstStyle/>
+          <a:p>
+            <a:pPr algn="r"/>
+            <a:r>
+              <a:rPr sz="1100" b="0" i="0">
+                <a:solidFill>
+                  <a:srgbClr val="666666"/>
+                </a:solidFill>
+                <a:latin typeface="Calibri"/>
+              </a:rPr>
+              <a:t>31</a:t>
+            </a:r>
+          </a:p>
+        </p:txBody>
+      </p:sp>
+    </p:spTree>
+  </p:cSld>
+  <p:clrMapOvr>
+    <a:masterClrMapping/>
+  </p:clrMapOvr>
+</p:sld>
+</file>
+
+<file path=ppt/slides/slide32.xml><?xml version="1.0" encoding="utf-8"?>
+<p:sld xmlns:a="http://schemas.openxmlformats.org/drawingml/2006/main" xmlns:p="http://schemas.openxmlformats.org/presentationml/2006/main" xmlns:r="http://schemas.openxmlformats.org/officeDocument/2006/relationships">
+  <p:cSld>
+    <p:bg>
+      <p:bgPr>
+        <a:solidFill>
+          <a:srgbClr val="FFFFFF"/>
+        </a:solidFill>
+        <a:effectLst/>
+      </p:bgPr>
+    </p:bg>
+    <p:spTree>
+      <p:nvGrpSpPr>
+        <p:cNvPr id="1" name=""/>
+        <p:cNvGrpSpPr/>
+        <p:nvPr/>
+      </p:nvGrpSpPr>
+      <p:grpSpPr/>
+      <p:sp>
+        <p:nvSpPr>
+          <p:cNvPr id="2" name="Rectangle 1"/>
+          <p:cNvSpPr/>
+          <p:nvPr/>
+        </p:nvSpPr>
+        <p:spPr>
+          <a:xfrm>
+            <a:off x="0" y="0"/>
+            <a:ext cx="12191695" cy="164592"/>
+          </a:xfrm>
+          <a:prstGeom prst="rect">
+            <a:avLst/>
+          </a:prstGeom>
+          <a:solidFill>
+            <a:srgbClr val="269CCB"/>
+          </a:solidFill>
+          <a:ln>
+            <a:noFill/>
+          </a:ln>
+        </p:spPr>
+        <p:style>
+          <a:lnRef idx="1">
+            <a:schemeClr val="accent1"/>
+          </a:lnRef>
+          <a:fillRef idx="3">
+            <a:schemeClr val="accent1"/>
+          </a:fillRef>
+          <a:effectRef idx="2">
+            <a:schemeClr val="accent1"/>
+          </a:effectRef>
+          <a:fontRef idx="minor">
+            <a:schemeClr val="lt1"/>
+          </a:fontRef>
+        </p:style>
+        <p:txBody>
+          <a:bodyPr rtlCol="0" anchor="ctr"/>
+          <a:lstStyle/>
+          <a:p>
+            <a:pPr algn="ctr"/>
+          </a:p>
+        </p:txBody>
+      </p:sp>
+      <p:pic>
+        <p:nvPicPr>
+          <p:cNvPr id="3" name="Picture 2" descr="logo_uniajc_color.png"/>
+          <p:cNvPicPr>
+            <a:picLocks noChangeAspect="1"/>
+          </p:cNvPicPr>
+          <p:nvPr/>
+        </p:nvPicPr>
+        <p:blipFill>
+          <a:blip r:embed="rId2"/>
+          <a:stretch>
+            <a:fillRect/>
+          </a:stretch>
+        </p:blipFill>
+        <p:spPr>
+          <a:xfrm>
+            <a:off x="10271455" y="5998464"/>
+            <a:ext cx="1463040" cy="643233"/>
+          </a:xfrm>
+          <a:prstGeom prst="rect">
+            <a:avLst/>
+          </a:prstGeom>
+        </p:spPr>
+      </p:pic>
+      <p:sp>
+        <p:nvSpPr>
+          <p:cNvPr id="4" name="TextBox 3"/>
+          <p:cNvSpPr txBox="1"/>
+          <p:nvPr/>
+        </p:nvSpPr>
+        <p:spPr>
+          <a:xfrm>
+            <a:off x="457200" y="1737360"/>
+            <a:ext cx="11277295" cy="1097280"/>
+          </a:xfrm>
+          <a:prstGeom prst="rect">
+            <a:avLst/>
+          </a:prstGeom>
+          <a:noFill/>
+        </p:spPr>
+        <p:txBody>
+          <a:bodyPr wrap="square" anchor="ctr"/>
+          <a:lstStyle/>
+          <a:p>
+            <a:pPr algn="ctr"/>
+            <a:r>
+              <a:rPr sz="3400" b="1" i="0">
+                <a:solidFill>
+                  <a:srgbClr val="095292"/>
+                </a:solidFill>
+                <a:latin typeface="Calibri"/>
+              </a:rPr>
+              <a:t>Clase 8 · PI en movimiento</a:t>
+            </a:r>
+          </a:p>
+        </p:txBody>
+      </p:sp>
+      <p:sp>
+        <p:nvSpPr>
+          <p:cNvPr id="5" name="TextBox 4"/>
+          <p:cNvSpPr txBox="1"/>
+          <p:nvPr/>
+        </p:nvSpPr>
+        <p:spPr>
+          <a:xfrm>
+            <a:off x="457200" y="3017520"/>
+            <a:ext cx="11277295" cy="1645920"/>
+          </a:xfrm>
+          <a:prstGeom prst="rect">
+            <a:avLst/>
+          </a:prstGeom>
+          <a:noFill/>
+        </p:spPr>
+        <p:txBody>
+          <a:bodyPr wrap="square">
+            <a:spAutoFit/>
+          </a:bodyPr>
+          <a:lstStyle/>
+          <a:p>
+            <a:pPr algn="ctr">
+              <a:spcAft>
+                <a:spcPts val="600"/>
+              </a:spcAft>
+            </a:pPr>
+            <a:r>
+              <a:rPr sz="1600" b="0" i="0">
+                <a:solidFill>
+                  <a:srgbClr val="333333"/>
+                </a:solidFill>
+                <a:latin typeface="Calibri"/>
+              </a:rPr>
+              <a:t>Workflow Actions (build/test/simulate) + métricas de monitoreo del PI</a:t>
+            </a:r>
+          </a:p>
+          <a:p>
+            <a:pPr algn="ctr">
+              <a:spcAft>
+                <a:spcPts val="600"/>
+              </a:spcAft>
+            </a:pPr>
+            <a:r>
+              <a:rPr sz="1600" b="0" i="0">
+                <a:solidFill>
+                  <a:srgbClr val="333333"/>
+                </a:solidFill>
+                <a:latin typeface="Calibri"/>
+              </a:rPr>
+              <a:t>Evidencia: .github/workflows/ci.yml + sección Monitoreo/CI del informe</a:t>
+            </a:r>
+          </a:p>
+          <a:p>
+            <a:pPr algn="ctr">
+              <a:spcAft>
+                <a:spcPts val="600"/>
+              </a:spcAft>
+            </a:pPr>
+            <a:r>
+              <a:rPr sz="1600" b="0" i="0">
+                <a:solidFill>
+                  <a:srgbClr val="333333"/>
+                </a:solidFill>
+                <a:latin typeface="Calibri"/>
+              </a:rPr>
+              <a:t>Siguiente paso = siguiente hito del PI CloudLite</a:t>
+            </a:r>
+          </a:p>
+        </p:txBody>
+      </p:sp>
+      <p:sp>
+        <p:nvSpPr>
+          <p:cNvPr id="6" name="TextBox 5"/>
+          <p:cNvSpPr txBox="1"/>
+          <p:nvPr/>
+        </p:nvSpPr>
+        <p:spPr>
+          <a:xfrm>
+            <a:off x="457200" y="4754880"/>
+            <a:ext cx="11277295" cy="640080"/>
+          </a:xfrm>
+          <a:prstGeom prst="rect">
+            <a:avLst/>
+          </a:prstGeom>
+          <a:noFill/>
+        </p:spPr>
+        <p:txBody>
+          <a:bodyPr wrap="square">
+            <a:spAutoFit/>
+          </a:bodyPr>
+          <a:lstStyle/>
+          <a:p>
+            <a:pPr algn="ctr"/>
+            <a:r>
+              <a:rPr sz="2000" b="1" i="0">
+                <a:solidFill>
+                  <a:srgbClr val="269CCB"/>
+                </a:solidFill>
+                <a:latin typeface="Calibri"/>
+              </a:rPr>
+              <a:t>Teoría al servicio del proyecto</a:t>
             </a:r>
           </a:p>
         </p:txBody>
@@ -6336,141 +12891,21 @@
                 </a:solidFill>
                 <a:latin typeface="Calibri"/>
               </a:rPr>
-              <a:t>.github/workflows/ci.yml — CI real, no un echo</a:t>
-            </a:r>
-          </a:p>
-        </p:txBody>
-      </p:sp>
-      <p:sp>
-        <p:nvSpPr>
-          <p:cNvPr id="5" name="Rounded Rectangle 4"/>
-          <p:cNvSpPr/>
-          <p:nvPr/>
-        </p:nvSpPr>
-        <p:spPr>
-          <a:xfrm>
-            <a:off x="457200" y="1261872"/>
-            <a:ext cx="11277295" cy="4773168"/>
-          </a:xfrm>
-          <a:prstGeom prst="roundRect">
-            <a:avLst>
-              <a:gd name="adj" fmla="val 12000"/>
-            </a:avLst>
-          </a:prstGeom>
-          <a:solidFill>
-            <a:srgbClr val="1E2A38"/>
-          </a:solidFill>
-          <a:ln>
-            <a:noFill/>
-          </a:ln>
-        </p:spPr>
-        <p:style>
-          <a:lnRef idx="1">
-            <a:schemeClr val="accent1"/>
-          </a:lnRef>
-          <a:fillRef idx="3">
-            <a:schemeClr val="accent1"/>
-          </a:fillRef>
-          <a:effectRef idx="2">
-            <a:schemeClr val="accent1"/>
-          </a:effectRef>
-          <a:fontRef idx="minor">
-            <a:schemeClr val="lt1"/>
-          </a:fontRef>
-        </p:style>
-        <p:txBody>
-          <a:bodyPr rtlCol="0" anchor="ctr"/>
-          <a:lstStyle/>
-          <a:p>
-            <a:pPr algn="ctr"/>
-          </a:p>
-        </p:txBody>
-      </p:sp>
-      <p:sp>
-        <p:nvSpPr>
-          <p:cNvPr id="6" name="Rectangle 5"/>
-          <p:cNvSpPr/>
-          <p:nvPr/>
-        </p:nvSpPr>
-        <p:spPr>
-          <a:xfrm>
-            <a:off x="457200" y="1261872"/>
-            <a:ext cx="11277295" cy="320040"/>
-          </a:xfrm>
-          <a:prstGeom prst="rect">
-            <a:avLst/>
-          </a:prstGeom>
-          <a:solidFill>
-            <a:srgbClr val="095292"/>
-          </a:solidFill>
-          <a:ln>
-            <a:noFill/>
-          </a:ln>
-        </p:spPr>
-        <p:style>
-          <a:lnRef idx="1">
-            <a:schemeClr val="accent1"/>
-          </a:lnRef>
-          <a:fillRef idx="3">
-            <a:schemeClr val="accent1"/>
-          </a:fillRef>
-          <a:effectRef idx="2">
-            <a:schemeClr val="accent1"/>
-          </a:effectRef>
-          <a:fontRef idx="minor">
-            <a:schemeClr val="lt1"/>
-          </a:fontRef>
-        </p:style>
-        <p:txBody>
-          <a:bodyPr rtlCol="0" anchor="ctr"/>
-          <a:lstStyle/>
-          <a:p>
-            <a:pPr algn="ctr"/>
-          </a:p>
-        </p:txBody>
-      </p:sp>
-      <p:sp>
-        <p:nvSpPr>
-          <p:cNvPr id="7" name="TextBox 6"/>
+              <a:t>Integracion continua: el problema que resuelve, en definicion operativa (1/2)</a:t>
+            </a:r>
+          </a:p>
+        </p:txBody>
+      </p:sp>
+      <p:sp>
+        <p:nvSpPr>
+          <p:cNvPr id="5" name="TextBox 4"/>
           <p:cNvSpPr txBox="1"/>
           <p:nvPr/>
         </p:nvSpPr>
         <p:spPr>
           <a:xfrm>
-            <a:off x="685800" y="1307592"/>
-            <a:ext cx="10820095" cy="256032"/>
-          </a:xfrm>
-          <a:prstGeom prst="rect">
-            <a:avLst/>
-          </a:prstGeom>
-          <a:noFill/>
-        </p:spPr>
-        <p:txBody>
-          <a:bodyPr wrap="square" anchor="ctr"/>
-          <a:lstStyle/>
-          <a:p>
-            <a:r>
-              <a:rPr sz="1000" b="1" i="0">
-                <a:solidFill>
-                  <a:srgbClr val="269CCB"/>
-                </a:solidFill>
-                <a:latin typeface="Calibri"/>
-              </a:rPr>
-              <a:t>● ● ●</a:t>
-            </a:r>
-          </a:p>
-        </p:txBody>
-      </p:sp>
-      <p:sp>
-        <p:nvSpPr>
-          <p:cNvPr id="8" name="TextBox 7"/>
-          <p:cNvSpPr txBox="1"/>
-          <p:nvPr/>
-        </p:nvSpPr>
-        <p:spPr>
-          <a:xfrm>
-            <a:off x="777240" y="1719072"/>
-            <a:ext cx="10637215" cy="4133087"/>
+            <a:off x="457200" y="1170432"/>
+            <a:ext cx="11277295" cy="5230368"/>
           </a:xfrm>
           <a:prstGeom prst="rect">
             <a:avLst/>
@@ -6485,283 +12920,72 @@
           <a:p>
             <a:pPr>
               <a:spcAft>
-                <a:spcPts val="400"/>
-              </a:spcAft>
-            </a:pPr>
-            <a:r>
-              <a:rPr sz="1400" b="0" i="0">
-                <a:solidFill>
-                  <a:srgbClr val="FFFFFF"/>
-                </a:solidFill>
-                <a:latin typeface="Calibri"/>
-              </a:rPr>
-              <a:t>name: CI</a:t>
-            </a:r>
-          </a:p>
-          <a:p>
-            <a:pPr>
-              <a:spcAft>
-                <a:spcPts val="400"/>
-              </a:spcAft>
-            </a:pPr>
-            <a:r>
-              <a:rPr sz="1400" b="0" i="0">
-                <a:solidFill>
-                  <a:srgbClr val="FFFFFF"/>
-                </a:solidFill>
-                <a:latin typeface="Calibri"/>
-              </a:rPr>
-              <a:t>on: [push, pull_request]          # 1. disparadores</a:t>
-            </a:r>
-          </a:p>
-          <a:p>
-            <a:pPr>
-              <a:spcAft>
-                <a:spcPts val="400"/>
-              </a:spcAft>
-            </a:pPr>
-            <a:r>
-              <a:rPr sz="1400" b="0" i="0">
-                <a:solidFill>
-                  <a:srgbClr val="FFFFFF"/>
-                </a:solidFill>
-                <a:latin typeface="Calibri"/>
-              </a:rPr>
-              <a:t>jobs:</a:t>
-            </a:r>
-          </a:p>
-          <a:p>
-            <a:pPr>
-              <a:spcAft>
-                <a:spcPts val="400"/>
-              </a:spcAft>
-            </a:pPr>
-            <a:r>
-              <a:rPr sz="1400" b="0" i="0">
-                <a:solidFill>
-                  <a:srgbClr val="FFFFFF"/>
-                </a:solidFill>
-                <a:latin typeface="Calibri"/>
-              </a:rPr>
-              <a:t>  build:</a:t>
-            </a:r>
-          </a:p>
-          <a:p>
-            <a:pPr>
-              <a:spcAft>
-                <a:spcPts val="400"/>
-              </a:spcAft>
-            </a:pPr>
-            <a:r>
-              <a:rPr sz="1400" b="0" i="0">
-                <a:solidFill>
-                  <a:srgbClr val="FFFFFF"/>
-                </a:solidFill>
-                <a:latin typeface="Calibri"/>
-              </a:rPr>
-              <a:t>    runs-on: ubuntu-latest        # 2. entorno de ejecucion</a:t>
-            </a:r>
-          </a:p>
-          <a:p>
-            <a:pPr>
-              <a:spcAft>
-                <a:spcPts val="400"/>
-              </a:spcAft>
-            </a:pPr>
-            <a:r>
-              <a:rPr sz="1400" b="0" i="0">
-                <a:solidFill>
-                  <a:srgbClr val="FFFFFF"/>
-                </a:solidFill>
-                <a:latin typeface="Calibri"/>
-              </a:rPr>
-              <a:t>    steps:</a:t>
-            </a:r>
-          </a:p>
-          <a:p>
-            <a:pPr>
-              <a:spcAft>
-                <a:spcPts val="400"/>
-              </a:spcAft>
-            </a:pPr>
-            <a:r>
-              <a:rPr sz="1400" b="0" i="0">
-                <a:solidFill>
-                  <a:srgbClr val="FFFFFF"/>
-                </a:solidFill>
-                <a:latin typeface="Calibri"/>
-              </a:rPr>
-              <a:t>      - uses: actions/checkout@v4</a:t>
-            </a:r>
-          </a:p>
-          <a:p>
-            <a:pPr>
-              <a:spcAft>
-                <a:spcPts val="400"/>
-              </a:spcAft>
-            </a:pPr>
-            <a:r>
-              <a:rPr sz="1400" b="0" i="0">
-                <a:solidFill>
-                  <a:srgbClr val="FFFFFF"/>
-                </a:solidFill>
-                <a:latin typeface="Calibri"/>
-              </a:rPr>
-              <a:t>      - uses: actions/setup-node@v4</a:t>
-            </a:r>
-          </a:p>
-          <a:p>
-            <a:pPr>
-              <a:spcAft>
-                <a:spcPts val="400"/>
-              </a:spcAft>
-            </a:pPr>
-            <a:r>
-              <a:rPr sz="1400" b="0" i="0">
-                <a:solidFill>
-                  <a:srgbClr val="FFFFFF"/>
-                </a:solidFill>
-                <a:latin typeface="Calibri"/>
-              </a:rPr>
-              <a:t>        with: { node-version: '20' }</a:t>
-            </a:r>
-          </a:p>
-          <a:p>
-            <a:pPr>
-              <a:spcAft>
-                <a:spcPts val="400"/>
-              </a:spcAft>
-            </a:pPr>
-            <a:r>
-              <a:rPr sz="1400" b="0" i="0">
-                <a:solidFill>
-                  <a:srgbClr val="FFFFFF"/>
-                </a:solidFill>
-                <a:latin typeface="Calibri"/>
-              </a:rPr>
-              <a:t>      - name: Construir</a:t>
-            </a:r>
-          </a:p>
-          <a:p>
-            <a:pPr>
-              <a:spcAft>
-                <a:spcPts val="400"/>
-              </a:spcAft>
-            </a:pPr>
-            <a:r>
-              <a:rPr sz="1400" b="0" i="0">
-                <a:solidFill>
-                  <a:srgbClr val="FFFFFF"/>
-                </a:solidFill>
-                <a:latin typeface="Calibri"/>
-              </a:rPr>
-              <a:t>        run: npm ci &amp;&amp; docker build -t cloudlite-api:0.1.0.</a:t>
-            </a:r>
-          </a:p>
-          <a:p>
-            <a:pPr>
-              <a:spcAft>
-                <a:spcPts val="400"/>
-              </a:spcAft>
-            </a:pPr>
-            <a:r>
-              <a:rPr sz="1400" b="0" i="0">
-                <a:solidFill>
-                  <a:srgbClr val="FFFFFF"/>
-                </a:solidFill>
-                <a:latin typeface="Calibri"/>
-              </a:rPr>
-              <a:t>      - name: Probar</a:t>
-            </a:r>
-          </a:p>
-          <a:p>
-            <a:pPr>
-              <a:spcAft>
-                <a:spcPts val="400"/>
-              </a:spcAft>
-            </a:pPr>
-            <a:r>
-              <a:rPr sz="1400" b="0" i="0">
-                <a:solidFill>
-                  <a:srgbClr val="FFFFFF"/>
-                </a:solidFill>
-                <a:latin typeface="Calibri"/>
-              </a:rPr>
-              <a:t>        run: npm test              # &lt;- si esto no puede fallar, no es CI</a:t>
-            </a:r>
-          </a:p>
-          <a:p>
-            <a:pPr>
-              <a:spcAft>
-                <a:spcPts val="400"/>
-              </a:spcAft>
-            </a:pPr>
-            <a:r>
-              <a:rPr sz="1400" b="0" i="0">
-                <a:solidFill>
-                  <a:srgbClr val="FFFFFF"/>
-                </a:solidFill>
-                <a:latin typeface="Calibri"/>
-              </a:rPr>
-              <a:t>      - name: Despliegue SIMULADO (no despliega a ningun servidor)</a:t>
-            </a:r>
-          </a:p>
-          <a:p>
-            <a:pPr>
-              <a:spcAft>
-                <a:spcPts val="400"/>
-              </a:spcAft>
-            </a:pPr>
-            <a:r>
-              <a:rPr sz="1400" b="0" i="0">
-                <a:solidFill>
-                  <a:srgbClr val="FFFFFF"/>
-                </a:solidFill>
-                <a:latin typeface="Calibri"/>
-              </a:rPr>
-              <a:t>        run: echo "Artefacto cloudlite-api:0.1.0 listo para desplegar"</a:t>
-            </a:r>
-          </a:p>
-        </p:txBody>
-      </p:sp>
-      <p:sp>
-        <p:nvSpPr>
-          <p:cNvPr id="9" name="TextBox 8"/>
-          <p:cNvSpPr txBox="1"/>
-          <p:nvPr/>
-        </p:nvSpPr>
-        <p:spPr>
-          <a:xfrm>
-            <a:off x="457200" y="6080760"/>
-            <a:ext cx="11277295" cy="320040"/>
-          </a:xfrm>
-          <a:prstGeom prst="rect">
-            <a:avLst/>
-          </a:prstGeom>
-          <a:noFill/>
-        </p:spPr>
-        <p:txBody>
-          <a:bodyPr wrap="square">
-            <a:spAutoFit/>
-          </a:bodyPr>
-          <a:lstStyle/>
-          <a:p>
-            <a:pPr algn="ctr"/>
-            <a:r>
-              <a:rPr sz="1200" b="0" i="1">
-                <a:solidFill>
-                  <a:srgbClr val="666666"/>
-                </a:solidFill>
-                <a:latin typeface="Calibri"/>
-              </a:rPr>
-              <a:t>Los tres pasos, en orden, y el ultimo rotulado como simulado. Secretos con ${{ secrets.NOMBRE }}, NUNCA en claro dentro del YAML.</a:t>
-            </a:r>
-          </a:p>
-        </p:txBody>
-      </p:sp>
-      <p:sp>
-        <p:nvSpPr>
-          <p:cNvPr id="10" name="TextBox 9"/>
+                <a:spcPts val="800"/>
+              </a:spcAft>
+            </a:pPr>
+            <a:r>
+              <a:rPr sz="2000" b="0" i="0">
+                <a:solidFill>
+                  <a:srgbClr val="333333"/>
+                </a:solidFill>
+                <a:latin typeface="Calibri"/>
+              </a:rPr>
+              <a:t>–   Esta clase junta dos temas que parecen distintos y son el mismo asunto en dos momentos: automatizar la verificacion antes de que un cambio llegue a los usuarios, y observar el sistema despues de que llego.</a:t>
+            </a:r>
+          </a:p>
+          <a:p>
+            <a:pPr>
+              <a:spcAft>
+                <a:spcPts val="800"/>
+              </a:spcAft>
+            </a:pPr>
+            <a:r>
+              <a:rPr sz="2000" b="0" i="0">
+                <a:solidFill>
+                  <a:srgbClr val="333333"/>
+                </a:solidFill>
+                <a:latin typeface="Calibri"/>
+              </a:rPr>
+              <a:t>–   El problema que resuelve la integracion continua tiene nombre historico, infierno de integracion: varios desarrolladores trabajan semanas por separado y al juntar el codigo aparecen conflictos y fallas que nadie sabe de donde vienen.</a:t>
+            </a:r>
+          </a:p>
+          <a:p>
+            <a:pPr>
+              <a:spcAft>
+                <a:spcPts val="800"/>
+              </a:spcAft>
+            </a:pPr>
+            <a:r>
+              <a:rPr sz="2000" b="0" i="0">
+                <a:solidFill>
+                  <a:srgbClr val="333333"/>
+                </a:solidFill>
+                <a:latin typeface="Calibri"/>
+              </a:rPr>
+              <a:t>–   Su version cotidiana en un equipo de estudiantes es la frase «en mi maquina funciona».</a:t>
+            </a:r>
+          </a:p>
+          <a:p>
+            <a:pPr>
+              <a:spcAft>
+                <a:spcPts val="800"/>
+              </a:spcAft>
+            </a:pPr>
+            <a:r>
+              <a:rPr sz="2000" b="0" i="0">
+                <a:solidFill>
+                  <a:srgbClr val="333333"/>
+                </a:solidFill>
+                <a:latin typeface="Calibri"/>
+              </a:rPr>
+              <a:t>–   Integracion continua, definida operativamente, es esto: cada vez que alguien sube un cambio al repositorio, un servidor automatico toma el codigo en un entorno limpio, lo construye, le corre las pruebas y avisa en minutos si algo se rompio.</a:t>
+            </a:r>
+          </a:p>
+        </p:txBody>
+      </p:sp>
+      <p:sp>
+        <p:nvSpPr>
+          <p:cNvPr id="6" name="TextBox 5"/>
           <p:cNvSpPr txBox="1"/>
           <p:nvPr/>
         </p:nvSpPr>
@@ -6829,7 +13053,7 @@
         <p:spPr>
           <a:xfrm>
             <a:off x="0" y="0"/>
-            <a:ext cx="12191695" cy="1170432"/>
+            <a:ext cx="12191695" cy="960120"/>
           </a:xfrm>
           <a:prstGeom prst="rect">
             <a:avLst/>
@@ -6871,7 +13095,7 @@
         </p:nvSpPr>
         <p:spPr>
           <a:xfrm>
-            <a:off x="0" y="1170432"/>
+            <a:off x="0" y="960120"/>
             <a:ext cx="12191695" cy="41148"/>
           </a:xfrm>
           <a:prstGeom prst="rect">
@@ -6915,7 +13139,7 @@
         <p:spPr>
           <a:xfrm>
             <a:off x="457200" y="164592"/>
-            <a:ext cx="11277295" cy="384048"/>
+            <a:ext cx="11277295" cy="502920"/>
           </a:xfrm>
           <a:prstGeom prst="rect">
             <a:avLst/>
@@ -6935,7 +13159,7 @@
                 </a:solidFill>
                 <a:latin typeface="Calibri"/>
               </a:rPr>
-              <a:t>Herramientas de hoy</a:t>
+              <a:t>Integracion continua: el problema que resuelve, en definicion operativa (2/2)</a:t>
             </a:r>
           </a:p>
         </p:txBody>
@@ -6948,8 +13172,8 @@
         </p:nvSpPr>
         <p:spPr>
           <a:xfrm>
-            <a:off x="457200" y="566928"/>
-            <a:ext cx="11277295" cy="411480"/>
+            <a:off x="457200" y="1170432"/>
+            <a:ext cx="11277295" cy="5230368"/>
           </a:xfrm>
           <a:prstGeom prst="rect">
             <a:avLst/>
@@ -6962,633 +13186,58 @@
           </a:bodyPr>
           <a:lstStyle/>
           <a:p>
-            <a:r>
-              <a:rPr sz="1400" b="0" i="0">
-                <a:solidFill>
-                  <a:srgbClr val="B8D8EE"/>
-                </a:solidFill>
-                <a:latin typeface="Calibri"/>
-              </a:rPr>
-              <a:t>Gratis · navegador o free tier · sin cuenta de pago</a:t>
-            </a:r>
-          </a:p>
-        </p:txBody>
-      </p:sp>
-      <p:sp>
-        <p:nvSpPr>
-          <p:cNvPr id="6" name="Rounded Rectangle 5"/>
-          <p:cNvSpPr/>
-          <p:nvPr/>
-        </p:nvSpPr>
-        <p:spPr>
-          <a:xfrm>
-            <a:off x="457200" y="1591056"/>
-            <a:ext cx="3624986" cy="2331720"/>
-          </a:xfrm>
-          <a:prstGeom prst="roundRect">
-            <a:avLst>
-              <a:gd name="adj" fmla="val 12000"/>
-            </a:avLst>
-          </a:prstGeom>
-          <a:solidFill>
-            <a:srgbClr val="F2F2F2"/>
-          </a:solidFill>
-          <a:ln>
-            <a:noFill/>
-          </a:ln>
-        </p:spPr>
-        <p:style>
-          <a:lnRef idx="1">
-            <a:schemeClr val="accent1"/>
-          </a:lnRef>
-          <a:fillRef idx="3">
-            <a:schemeClr val="accent1"/>
-          </a:fillRef>
-          <a:effectRef idx="2">
-            <a:schemeClr val="accent1"/>
-          </a:effectRef>
-          <a:fontRef idx="minor">
-            <a:schemeClr val="lt1"/>
-          </a:fontRef>
-        </p:style>
-        <p:txBody>
-          <a:bodyPr rtlCol="0" anchor="ctr"/>
-          <a:lstStyle/>
-          <a:p>
-            <a:pPr algn="ctr"/>
-          </a:p>
-        </p:txBody>
-      </p:sp>
-      <p:sp>
-        <p:nvSpPr>
-          <p:cNvPr id="7" name="Rectangle 6"/>
-          <p:cNvSpPr/>
-          <p:nvPr/>
-        </p:nvSpPr>
-        <p:spPr>
-          <a:xfrm>
-            <a:off x="457200" y="1591056"/>
-            <a:ext cx="3624986" cy="64008"/>
-          </a:xfrm>
-          <a:prstGeom prst="rect">
-            <a:avLst/>
-          </a:prstGeom>
-          <a:solidFill>
-            <a:srgbClr val="095292"/>
-          </a:solidFill>
-          <a:ln>
-            <a:noFill/>
-          </a:ln>
-        </p:spPr>
-        <p:style>
-          <a:lnRef idx="1">
-            <a:schemeClr val="accent1"/>
-          </a:lnRef>
-          <a:fillRef idx="3">
-            <a:schemeClr val="accent1"/>
-          </a:fillRef>
-          <a:effectRef idx="2">
-            <a:schemeClr val="accent1"/>
-          </a:effectRef>
-          <a:fontRef idx="minor">
-            <a:schemeClr val="lt1"/>
-          </a:fontRef>
-        </p:style>
-        <p:txBody>
-          <a:bodyPr rtlCol="0" anchor="ctr"/>
-          <a:lstStyle/>
-          <a:p>
-            <a:pPr algn="ctr"/>
-          </a:p>
-        </p:txBody>
-      </p:sp>
-      <p:sp>
-        <p:nvSpPr>
-          <p:cNvPr id="8" name="Rectangle 7"/>
-          <p:cNvSpPr/>
-          <p:nvPr/>
-        </p:nvSpPr>
-        <p:spPr>
-          <a:xfrm>
-            <a:off x="457200" y="1655064"/>
-            <a:ext cx="3624986" cy="27432"/>
-          </a:xfrm>
-          <a:prstGeom prst="rect">
-            <a:avLst/>
-          </a:prstGeom>
-          <a:solidFill>
-            <a:srgbClr val="FFD000"/>
-          </a:solidFill>
-          <a:ln>
-            <a:noFill/>
-          </a:ln>
-        </p:spPr>
-        <p:style>
-          <a:lnRef idx="1">
-            <a:schemeClr val="accent1"/>
-          </a:lnRef>
-          <a:fillRef idx="3">
-            <a:schemeClr val="accent1"/>
-          </a:fillRef>
-          <a:effectRef idx="2">
-            <a:schemeClr val="accent1"/>
-          </a:effectRef>
-          <a:fontRef idx="minor">
-            <a:schemeClr val="lt1"/>
-          </a:fontRef>
-        </p:style>
-        <p:txBody>
-          <a:bodyPr rtlCol="0" anchor="ctr"/>
-          <a:lstStyle/>
-          <a:p>
-            <a:pPr algn="ctr"/>
-          </a:p>
-        </p:txBody>
-      </p:sp>
-      <p:pic>
-        <p:nvPicPr>
-          <p:cNvPr id="9" name="Picture 8" descr="github_actions.png"/>
-          <p:cNvPicPr>
-            <a:picLocks noChangeAspect="1"/>
-          </p:cNvPicPr>
-          <p:nvPr/>
-        </p:nvPicPr>
-        <p:blipFill>
-          <a:blip r:embed="rId2"/>
-          <a:stretch>
-            <a:fillRect/>
-          </a:stretch>
-        </p:blipFill>
-        <p:spPr>
-          <a:xfrm>
-            <a:off x="1643329" y="1847087"/>
-            <a:ext cx="1252728" cy="1252728"/>
-          </a:xfrm>
-          <a:prstGeom prst="rect">
-            <a:avLst/>
-          </a:prstGeom>
-        </p:spPr>
-      </p:pic>
-      <p:sp>
-        <p:nvSpPr>
-          <p:cNvPr id="10" name="TextBox 9"/>
-          <p:cNvSpPr txBox="1"/>
-          <p:nvPr/>
-        </p:nvSpPr>
-        <p:spPr>
-          <a:xfrm>
-            <a:off x="530352" y="3191256"/>
-            <a:ext cx="3478682" cy="621792"/>
-          </a:xfrm>
-          <a:prstGeom prst="rect">
-            <a:avLst/>
-          </a:prstGeom>
-          <a:noFill/>
-        </p:spPr>
-        <p:txBody>
-          <a:bodyPr wrap="square" anchor="t"/>
-          <a:lstStyle/>
-          <a:p>
-            <a:pPr algn="ctr"/>
-            <a:r>
-              <a:rPr sz="1300" b="1" i="0">
-                <a:solidFill>
-                  <a:srgbClr val="095292"/>
-                </a:solidFill>
-                <a:latin typeface="Calibri"/>
-              </a:rPr>
-              <a:t>GitHub Actions</a:t>
-            </a:r>
-          </a:p>
-          <a:p>
-            <a:pPr algn="ctr">
-              <a:spcBef>
-                <a:spcPts val="200"/>
-              </a:spcBef>
-            </a:pPr>
-            <a:r>
-              <a:rPr sz="1000" b="0" i="0">
-                <a:solidFill>
-                  <a:srgbClr val="666666"/>
-                </a:solidFill>
-                <a:latin typeface="Calibri"/>
-              </a:rPr>
-              <a:t>CI del PI</a:t>
-            </a:r>
-          </a:p>
-        </p:txBody>
-      </p:sp>
-      <p:sp>
-        <p:nvSpPr>
-          <p:cNvPr id="11" name="Rounded Rectangle 10"/>
-          <p:cNvSpPr/>
-          <p:nvPr/>
-        </p:nvSpPr>
-        <p:spPr>
-          <a:xfrm>
-            <a:off x="4283354" y="1591056"/>
-            <a:ext cx="3624986" cy="2331720"/>
-          </a:xfrm>
-          <a:prstGeom prst="roundRect">
-            <a:avLst>
-              <a:gd name="adj" fmla="val 12000"/>
-            </a:avLst>
-          </a:prstGeom>
-          <a:solidFill>
-            <a:srgbClr val="F2F2F2"/>
-          </a:solidFill>
-          <a:ln>
-            <a:noFill/>
-          </a:ln>
-        </p:spPr>
-        <p:style>
-          <a:lnRef idx="1">
-            <a:schemeClr val="accent1"/>
-          </a:lnRef>
-          <a:fillRef idx="3">
-            <a:schemeClr val="accent1"/>
-          </a:fillRef>
-          <a:effectRef idx="2">
-            <a:schemeClr val="accent1"/>
-          </a:effectRef>
-          <a:fontRef idx="minor">
-            <a:schemeClr val="lt1"/>
-          </a:fontRef>
-        </p:style>
-        <p:txBody>
-          <a:bodyPr rtlCol="0" anchor="ctr"/>
-          <a:lstStyle/>
-          <a:p>
-            <a:pPr algn="ctr"/>
-          </a:p>
-        </p:txBody>
-      </p:sp>
-      <p:sp>
-        <p:nvSpPr>
-          <p:cNvPr id="12" name="Rectangle 11"/>
-          <p:cNvSpPr/>
-          <p:nvPr/>
-        </p:nvSpPr>
-        <p:spPr>
-          <a:xfrm>
-            <a:off x="4283354" y="1591056"/>
-            <a:ext cx="3624986" cy="64008"/>
-          </a:xfrm>
-          <a:prstGeom prst="rect">
-            <a:avLst/>
-          </a:prstGeom>
-          <a:solidFill>
-            <a:srgbClr val="095292"/>
-          </a:solidFill>
-          <a:ln>
-            <a:noFill/>
-          </a:ln>
-        </p:spPr>
-        <p:style>
-          <a:lnRef idx="1">
-            <a:schemeClr val="accent1"/>
-          </a:lnRef>
-          <a:fillRef idx="3">
-            <a:schemeClr val="accent1"/>
-          </a:fillRef>
-          <a:effectRef idx="2">
-            <a:schemeClr val="accent1"/>
-          </a:effectRef>
-          <a:fontRef idx="minor">
-            <a:schemeClr val="lt1"/>
-          </a:fontRef>
-        </p:style>
-        <p:txBody>
-          <a:bodyPr rtlCol="0" anchor="ctr"/>
-          <a:lstStyle/>
-          <a:p>
-            <a:pPr algn="ctr"/>
-          </a:p>
-        </p:txBody>
-      </p:sp>
-      <p:sp>
-        <p:nvSpPr>
-          <p:cNvPr id="13" name="Rectangle 12"/>
-          <p:cNvSpPr/>
-          <p:nvPr/>
-        </p:nvSpPr>
-        <p:spPr>
-          <a:xfrm>
-            <a:off x="4283354" y="1655064"/>
-            <a:ext cx="3624986" cy="27432"/>
-          </a:xfrm>
-          <a:prstGeom prst="rect">
-            <a:avLst/>
-          </a:prstGeom>
-          <a:solidFill>
-            <a:srgbClr val="FFD000"/>
-          </a:solidFill>
-          <a:ln>
-            <a:noFill/>
-          </a:ln>
-        </p:spPr>
-        <p:style>
-          <a:lnRef idx="1">
-            <a:schemeClr val="accent1"/>
-          </a:lnRef>
-          <a:fillRef idx="3">
-            <a:schemeClr val="accent1"/>
-          </a:fillRef>
-          <a:effectRef idx="2">
-            <a:schemeClr val="accent1"/>
-          </a:effectRef>
-          <a:fontRef idx="minor">
-            <a:schemeClr val="lt1"/>
-          </a:fontRef>
-        </p:style>
-        <p:txBody>
-          <a:bodyPr rtlCol="0" anchor="ctr"/>
-          <a:lstStyle/>
-          <a:p>
-            <a:pPr algn="ctr"/>
-          </a:p>
-        </p:txBody>
-      </p:sp>
-      <p:pic>
-        <p:nvPicPr>
-          <p:cNvPr id="14" name="Picture 13" descr="google_docs.png"/>
-          <p:cNvPicPr>
-            <a:picLocks noChangeAspect="1"/>
-          </p:cNvPicPr>
-          <p:nvPr/>
-        </p:nvPicPr>
-        <p:blipFill>
-          <a:blip r:embed="rId3"/>
-          <a:stretch>
-            <a:fillRect/>
-          </a:stretch>
-        </p:blipFill>
-        <p:spPr>
-          <a:xfrm>
-            <a:off x="5469483" y="1847087"/>
-            <a:ext cx="1252728" cy="1252728"/>
-          </a:xfrm>
-          <a:prstGeom prst="rect">
-            <a:avLst/>
-          </a:prstGeom>
-        </p:spPr>
-      </p:pic>
-      <p:sp>
-        <p:nvSpPr>
-          <p:cNvPr id="15" name="TextBox 14"/>
-          <p:cNvSpPr txBox="1"/>
-          <p:nvPr/>
-        </p:nvSpPr>
-        <p:spPr>
-          <a:xfrm>
-            <a:off x="4356506" y="3191256"/>
-            <a:ext cx="3478682" cy="621792"/>
-          </a:xfrm>
-          <a:prstGeom prst="rect">
-            <a:avLst/>
-          </a:prstGeom>
-          <a:noFill/>
-        </p:spPr>
-        <p:txBody>
-          <a:bodyPr wrap="square" anchor="t"/>
-          <a:lstStyle/>
-          <a:p>
-            <a:pPr algn="ctr"/>
-            <a:r>
-              <a:rPr sz="1300" b="1" i="0">
-                <a:solidFill>
-                  <a:srgbClr val="095292"/>
-                </a:solidFill>
-                <a:latin typeface="Calibri"/>
-              </a:rPr>
-              <a:t>Google Docs</a:t>
-            </a:r>
-          </a:p>
-          <a:p>
-            <a:pPr algn="ctr">
-              <a:spcBef>
-                <a:spcPts val="200"/>
-              </a:spcBef>
-            </a:pPr>
-            <a:r>
-              <a:rPr sz="1000" b="0" i="0">
-                <a:solidFill>
-                  <a:srgbClr val="666666"/>
-                </a:solidFill>
-                <a:latin typeface="Calibri"/>
-              </a:rPr>
-              <a:t>Informe PI</a:t>
-            </a:r>
-          </a:p>
-        </p:txBody>
-      </p:sp>
-      <p:sp>
-        <p:nvSpPr>
-          <p:cNvPr id="16" name="Rounded Rectangle 15"/>
-          <p:cNvSpPr/>
-          <p:nvPr/>
-        </p:nvSpPr>
-        <p:spPr>
-          <a:xfrm>
-            <a:off x="8109508" y="1591056"/>
-            <a:ext cx="3624986" cy="2331720"/>
-          </a:xfrm>
-          <a:prstGeom prst="roundRect">
-            <a:avLst>
-              <a:gd name="adj" fmla="val 12000"/>
-            </a:avLst>
-          </a:prstGeom>
-          <a:solidFill>
-            <a:srgbClr val="F2F2F2"/>
-          </a:solidFill>
-          <a:ln>
-            <a:noFill/>
-          </a:ln>
-        </p:spPr>
-        <p:style>
-          <a:lnRef idx="1">
-            <a:schemeClr val="accent1"/>
-          </a:lnRef>
-          <a:fillRef idx="3">
-            <a:schemeClr val="accent1"/>
-          </a:fillRef>
-          <a:effectRef idx="2">
-            <a:schemeClr val="accent1"/>
-          </a:effectRef>
-          <a:fontRef idx="minor">
-            <a:schemeClr val="lt1"/>
-          </a:fontRef>
-        </p:style>
-        <p:txBody>
-          <a:bodyPr rtlCol="0" anchor="ctr"/>
-          <a:lstStyle/>
-          <a:p>
-            <a:pPr algn="ctr"/>
-          </a:p>
-        </p:txBody>
-      </p:sp>
-      <p:sp>
-        <p:nvSpPr>
-          <p:cNvPr id="17" name="Rectangle 16"/>
-          <p:cNvSpPr/>
-          <p:nvPr/>
-        </p:nvSpPr>
-        <p:spPr>
-          <a:xfrm>
-            <a:off x="8109508" y="1591056"/>
-            <a:ext cx="3624986" cy="64008"/>
-          </a:xfrm>
-          <a:prstGeom prst="rect">
-            <a:avLst/>
-          </a:prstGeom>
-          <a:solidFill>
-            <a:srgbClr val="095292"/>
-          </a:solidFill>
-          <a:ln>
-            <a:noFill/>
-          </a:ln>
-        </p:spPr>
-        <p:style>
-          <a:lnRef idx="1">
-            <a:schemeClr val="accent1"/>
-          </a:lnRef>
-          <a:fillRef idx="3">
-            <a:schemeClr val="accent1"/>
-          </a:fillRef>
-          <a:effectRef idx="2">
-            <a:schemeClr val="accent1"/>
-          </a:effectRef>
-          <a:fontRef idx="minor">
-            <a:schemeClr val="lt1"/>
-          </a:fontRef>
-        </p:style>
-        <p:txBody>
-          <a:bodyPr rtlCol="0" anchor="ctr"/>
-          <a:lstStyle/>
-          <a:p>
-            <a:pPr algn="ctr"/>
-          </a:p>
-        </p:txBody>
-      </p:sp>
-      <p:sp>
-        <p:nvSpPr>
-          <p:cNvPr id="18" name="Rectangle 17"/>
-          <p:cNvSpPr/>
-          <p:nvPr/>
-        </p:nvSpPr>
-        <p:spPr>
-          <a:xfrm>
-            <a:off x="8109508" y="1655064"/>
-            <a:ext cx="3624986" cy="27432"/>
-          </a:xfrm>
-          <a:prstGeom prst="rect">
-            <a:avLst/>
-          </a:prstGeom>
-          <a:solidFill>
-            <a:srgbClr val="FFD000"/>
-          </a:solidFill>
-          <a:ln>
-            <a:noFill/>
-          </a:ln>
-        </p:spPr>
-        <p:style>
-          <a:lnRef idx="1">
-            <a:schemeClr val="accent1"/>
-          </a:lnRef>
-          <a:fillRef idx="3">
-            <a:schemeClr val="accent1"/>
-          </a:fillRef>
-          <a:effectRef idx="2">
-            <a:schemeClr val="accent1"/>
-          </a:effectRef>
-          <a:fontRef idx="minor">
-            <a:schemeClr val="lt1"/>
-          </a:fontRef>
-        </p:style>
-        <p:txBody>
-          <a:bodyPr rtlCol="0" anchor="ctr"/>
-          <a:lstStyle/>
-          <a:p>
-            <a:pPr algn="ctr"/>
-          </a:p>
-        </p:txBody>
-      </p:sp>
-      <p:pic>
-        <p:nvPicPr>
-          <p:cNvPr id="19" name="Picture 18" descr="examlab.png"/>
-          <p:cNvPicPr>
-            <a:picLocks noChangeAspect="1"/>
-          </p:cNvPicPr>
-          <p:nvPr/>
-        </p:nvPicPr>
-        <p:blipFill>
-          <a:blip r:embed="rId4"/>
-          <a:stretch>
-            <a:fillRect/>
-          </a:stretch>
-        </p:blipFill>
-        <p:spPr>
-          <a:xfrm>
-            <a:off x="9295638" y="1847087"/>
-            <a:ext cx="1252728" cy="1252728"/>
-          </a:xfrm>
-          <a:prstGeom prst="rect">
-            <a:avLst/>
-          </a:prstGeom>
-        </p:spPr>
-      </p:pic>
-      <p:sp>
-        <p:nvSpPr>
-          <p:cNvPr id="20" name="TextBox 19"/>
-          <p:cNvSpPr txBox="1"/>
-          <p:nvPr/>
-        </p:nvSpPr>
-        <p:spPr>
-          <a:xfrm>
-            <a:off x="8182660" y="3191256"/>
-            <a:ext cx="3478682" cy="621792"/>
-          </a:xfrm>
-          <a:prstGeom prst="rect">
-            <a:avLst/>
-          </a:prstGeom>
-          <a:noFill/>
-        </p:spPr>
-        <p:txBody>
-          <a:bodyPr wrap="square" anchor="t"/>
-          <a:lstStyle/>
-          <a:p>
-            <a:pPr algn="ctr"/>
-            <a:r>
-              <a:rPr sz="1300" b="1" i="0">
-                <a:solidFill>
-                  <a:srgbClr val="095292"/>
-                </a:solidFill>
-                <a:latin typeface="Calibri"/>
-              </a:rPr>
-              <a:t>la plataforma del curso</a:t>
-            </a:r>
-          </a:p>
-          <a:p>
-            <a:pPr algn="ctr">
-              <a:spcBef>
-                <a:spcPts val="200"/>
-              </a:spcBef>
-            </a:pPr>
-            <a:r>
-              <a:rPr sz="1000" b="0" i="0">
-                <a:solidFill>
-                  <a:srgbClr val="666666"/>
-                </a:solidFill>
-                <a:latin typeface="Calibri"/>
-              </a:rPr>
-              <a:t>Donde se entrega</a:t>
-            </a:r>
-          </a:p>
-        </p:txBody>
-      </p:sp>
-      <p:sp>
-        <p:nvSpPr>
-          <p:cNvPr id="21" name="TextBox 20"/>
+            <a:pPr>
+              <a:spcAft>
+                <a:spcPts val="800"/>
+              </a:spcAft>
+            </a:pPr>
+            <a:r>
+              <a:rPr sz="2000" b="0" i="0">
+                <a:solidFill>
+                  <a:srgbClr val="333333"/>
+                </a:solidFill>
+                <a:latin typeface="Calibri"/>
+              </a:rPr>
+              <a:t>–   El valor no esta en la automatizacion sino en el intervalo de retroalimentacion: encontrar el error tres minutos despues de escribirlo, cuando el autor recuerda que hizo, cuesta una fraccion de hallarlo tres semanas despues en el computador de otra persona.</a:t>
+            </a:r>
+          </a:p>
+          <a:p>
+            <a:pPr>
+              <a:spcAft>
+                <a:spcPts val="800"/>
+              </a:spcAft>
+            </a:pPr>
+            <a:r>
+              <a:rPr sz="2000" b="0" i="0">
+                <a:solidFill>
+                  <a:srgbClr val="333333"/>
+                </a:solidFill>
+                <a:latin typeface="Calibri"/>
+              </a:rPr>
+              <a:t>–   Lo que se califica hoy son 25 de los 100 puntos de la actividad del Corte 2, en cuatro preguntas: 10 puntos el contenido completo del ci.yml</a:t>
+            </a:r>
+          </a:p>
+          <a:p>
+            <a:pPr>
+              <a:spcAft>
+                <a:spcPts val="800"/>
+              </a:spcAft>
+            </a:pPr>
+            <a:r>
+              <a:rPr sz="2000" b="0" i="0">
+                <a:solidFill>
+                  <a:srgbClr val="333333"/>
+                </a:solidFill>
+                <a:latin typeface="Calibri"/>
+              </a:rPr>
+              <a:t>–   5 explicar que hace de verdad la construccion y la prueba y con que condicion el pipeline debe fallar, 4 distinguir CI de CD y ubicar hasta donde llego el propio trabajo, y 6 la tabla de senales de monitoreo con umbral.</a:t>
+            </a:r>
+          </a:p>
+        </p:txBody>
+      </p:sp>
+      <p:sp>
+        <p:nvSpPr>
+          <p:cNvPr id="6" name="TextBox 5"/>
           <p:cNvSpPr txBox="1"/>
           <p:nvPr/>
         </p:nvSpPr>
@@ -7762,7 +13411,7 @@
                 </a:solidFill>
                 <a:latin typeface="Calibri"/>
               </a:rPr>
-              <a:t>PI CloudLite — entregable de hoy</a:t>
+              <a:t>Entrega continua y despliegue continuo: la sigla CD es ambigua (1/2)</a:t>
             </a:r>
           </a:p>
         </p:txBody>
@@ -7801,17 +13450,15 @@
                 </a:solidFill>
                 <a:latin typeface="Calibri"/>
               </a:rPr>
-              <a:t>–   </a:t>
-            </a:r>
-            <a:r>
-              <a:rPr sz="2000" b="1" i="0">
-                <a:solidFill>
-                  <a:srgbClr val="333333"/>
-                </a:solidFill>
-                <a:latin typeface="Calibri"/>
-              </a:rPr>
-              <a:t>Entregable:</a:t>
-            </a:r>
+              <a:t>–   La sigla CD es ambigua y ahi esta la confusion que hay que desarmar en el primer minuto.</a:t>
+            </a:r>
+          </a:p>
+          <a:p>
+            <a:pPr>
+              <a:spcAft>
+                <a:spcPts val="800"/>
+              </a:spcAft>
+            </a:pPr>
             <a:r>
               <a:rPr sz="2000" b="0" i="0">
                 <a:solidFill>
@@ -7819,7 +13466,7 @@
                 </a:solidFill>
                 <a:latin typeface="Calibri"/>
               </a:rPr>
-              <a:t> .github/workflows/ci.yml + sección Monitoreo/CI del informe</a:t>
+              <a:t>–   Entrega continua significa que cada cambio que pasa la validacion queda listo para desplegarse, empaquetado y probado, pero un humano decide cuando se aprieta el boton.</a:t>
             </a:r>
           </a:p>
           <a:p>
@@ -7835,16 +13482,7 @@
                 </a:solidFill>
                 <a:latin typeface="Calibri"/>
               </a:rPr>
-              <a:t>–   Herramienta: </a:t>
-            </a:r>
-            <a:r>
-              <a:rPr sz="2000" b="1" i="0">
-                <a:solidFill>
-                  <a:srgbClr val="333333"/>
-                </a:solidFill>
-                <a:latin typeface="Calibri"/>
-              </a:rPr>
-              <a:t>GitHub Actions · Google Docs</a:t>
+              <a:t>–   Despliegue continuo significa que ese ultimo paso tambien es automatico y el cambio llega a produccion sin intervencion.</a:t>
             </a:r>
           </a:p>
           <a:p>
@@ -7860,17 +13498,15 @@
                 </a:solidFill>
                 <a:latin typeface="Calibri"/>
               </a:rPr>
-              <a:t>–   Todo lo que construyan hoy entra al </a:t>
-            </a:r>
-            <a:r>
-              <a:rPr sz="2000" b="1" i="0">
-                <a:solidFill>
-                  <a:srgbClr val="333333"/>
-                </a:solidFill>
-                <a:latin typeface="Calibri"/>
-              </a:rPr>
-              <a:t>informe/repo del PI</a:t>
-            </a:r>
+              <a:t>–   Las dos comparten la sigla CD, no son lo mismo, y ninguna es sinonimo de integracion continua: CI valida, CD entrega o despliega.</a:t>
+            </a:r>
+          </a:p>
+          <a:p>
+            <a:pPr>
+              <a:spcAft>
+                <a:spcPts val="800"/>
+              </a:spcAft>
+            </a:pPr>
             <a:r>
               <a:rPr sz="2000" b="0" i="0">
                 <a:solidFill>
@@ -7878,7 +13514,7 @@
                 </a:solidFill>
                 <a:latin typeface="Calibri"/>
               </a:rPr>
-              <a:t> (no es lab suelto).</a:t>
+              <a:t>–   Se puede tener CI sin nada de CD, y es lo que se construye hoy porque el curso no usa infraestructura de pago ni pide tarjeta de credito.</a:t>
             </a:r>
           </a:p>
           <a:p>
@@ -7894,7 +13530,7 @@
                 </a:solidFill>
                 <a:latin typeface="Calibri"/>
               </a:rPr>
-              <a:t>–   Individual por defecto · el docente puede autorizar equipos de 2–3; la entrega en la plataforma del curso siempre es individual.</a:t>
+              <a:t>–   El pipeline llega hasta «listo para desplegar» y la etapa final imprime un mensaje y publica un artefacto en lugar de subir a un servidor real.</a:t>
             </a:r>
           </a:p>
         </p:txBody>

--- a/Arquitectura de Sistemas Computacionales/Clases/Clase 8 - Monitoreo optimizacion y CI-CD/Presentacion.pptx
+++ b/Arquitectura de Sistemas Computacionales/Clases/Clase 8 - Monitoreo optimizacion y CI-CD/Presentacion.pptx
@@ -3595,7 +3595,7 @@
                 </a:solidFill>
                 <a:latin typeface="Calibri"/>
               </a:rPr>
-              <a:t>Entrega continua y despliegue continuo: la sigla CD es ambigua (2/2)</a:t>
+              <a:t>GitHub Actions en cinco palabras (1/2)</a:t>
             </a:r>
           </a:p>
         </p:txBody>
@@ -3634,7 +3634,7 @@
                 </a:solidFill>
                 <a:latin typeface="Calibri"/>
               </a:rPr>
-              <a:t>–   Y hay que anunciar como se califica esa frontera, porque es contraintuitivo para el estudiante que cree que reconocer un limite es admitir una carencia: la pregunta 9 SUMA un punto por ubicar correctamente el propio trabajo y decir que llega hasta «listo para desplegar», y DESCUENTA la mitad de la pregunta a quien afirme haber construido CD.</a:t>
+              <a:t>–   GitHub Actions es la herramienta del dia porque es gratis, corre en el navegador y produce evidencia verificable.</a:t>
             </a:r>
           </a:p>
           <a:p>
@@ -3650,7 +3650,55 @@
                 </a:solidFill>
                 <a:latin typeface="Calibri"/>
               </a:rPr>
-              <a:t>–   La forma tipica del error es tener un paso llamado deploy que solo imprime un mensaje y concluir que ya hay despliegue continuo; el nombre del paso no despliega nada.</a:t>
+              <a:t>–   Un workflow es un archivo YAML en la carpeta.github/workflows; el nombre es libre y ci.yml es la convencion.</a:t>
+            </a:r>
+          </a:p>
+          <a:p>
+            <a:pPr>
+              <a:spcAft>
+                <a:spcPts val="800"/>
+              </a:spcAft>
+            </a:pPr>
+            <a:r>
+              <a:rPr sz="2000" b="0" i="0">
+                <a:solidFill>
+                  <a:srgbClr val="333333"/>
+                </a:solidFill>
+                <a:latin typeface="Calibri"/>
+              </a:rPr>
+              <a:t>–   El evento o disparador declara cuando corre: on push para cada subida, on pull_request para cada propuesta de cambio, workflow_dispatch para un boton manual, schedule para una hora fija.</a:t>
+            </a:r>
+          </a:p>
+          <a:p>
+            <a:pPr>
+              <a:spcAft>
+                <a:spcPts val="800"/>
+              </a:spcAft>
+            </a:pPr>
+            <a:r>
+              <a:rPr sz="2000" b="0" i="0">
+                <a:solidFill>
+                  <a:srgbClr val="333333"/>
+                </a:solidFill>
+                <a:latin typeface="Calibri"/>
+              </a:rPr>
+              <a:t>–   Un job es un conjunto de pasos que corre en un runner, una maquina virtual limpia que se crea para esa ejecucion y se destruye al terminar.</a:t>
+            </a:r>
+          </a:p>
+          <a:p>
+            <a:pPr>
+              <a:spcAft>
+                <a:spcPts val="800"/>
+              </a:spcAft>
+            </a:pPr>
+            <a:r>
+              <a:rPr sz="2000" b="0" i="0">
+                <a:solidFill>
+                  <a:srgbClr val="333333"/>
+                </a:solidFill>
+                <a:latin typeface="Calibri"/>
+              </a:rPr>
+              <a:t>–   Un step es un comando o el uso de una action, unidad reutilizable publicada por otros.</a:t>
             </a:r>
           </a:p>
         </p:txBody>
@@ -3831,7 +3879,7 @@
                 </a:solidFill>
                 <a:latin typeface="Calibri"/>
               </a:rPr>
-              <a:t>GitHub Actions en cinco palabras (1/2)</a:t>
+              <a:t>GitHub Actions en cinco palabras (2/2)</a:t>
             </a:r>
           </a:p>
         </p:txBody>
@@ -3870,7 +3918,7 @@
                 </a:solidFill>
                 <a:latin typeface="Calibri"/>
               </a:rPr>
-              <a:t>–   GitHub Actions es la herramienta del dia porque es gratis, corre en el navegador y produce evidencia verificable.</a:t>
+              <a:t>–   Que el runner sea limpio y efimero es el punto pedagogico central: demuestra que la construccion no depende de nada instalado a mano en el portatil de nadie.</a:t>
             </a:r>
           </a:p>
           <a:p>
@@ -3886,7 +3934,7 @@
                 </a:solidFill>
                 <a:latin typeface="Calibri"/>
               </a:rPr>
-              <a:t>–   Su vocabulario tiene cinco palabras.</a:t>
+              <a:t>–   Advertencias: el YAML se indenta con espacios y nunca con tabulaciones, causa numero uno de un pipeline que no arranca</a:t>
             </a:r>
           </a:p>
           <a:p>
@@ -3902,55 +3950,7 @@
                 </a:solidFill>
                 <a:latin typeface="Calibri"/>
               </a:rPr>
-              <a:t>–   Un workflow es un archivo YAML en la carpeta.github/workflows; el nombre es libre y ci.yml es la convencion.</a:t>
-            </a:r>
-          </a:p>
-          <a:p>
-            <a:pPr>
-              <a:spcAft>
-                <a:spcPts val="800"/>
-              </a:spcAft>
-            </a:pPr>
-            <a:r>
-              <a:rPr sz="2000" b="0" i="0">
-                <a:solidFill>
-                  <a:srgbClr val="333333"/>
-                </a:solidFill>
-                <a:latin typeface="Calibri"/>
-              </a:rPr>
-              <a:t>–   El evento o disparador declara cuando corre: on push para cada subida, on pull_request para cada propuesta de cambio, workflow_dispatch para un boton manual, schedule para una hora fija.</a:t>
-            </a:r>
-          </a:p>
-          <a:p>
-            <a:pPr>
-              <a:spcAft>
-                <a:spcPts val="800"/>
-              </a:spcAft>
-            </a:pPr>
-            <a:r>
-              <a:rPr sz="2000" b="0" i="0">
-                <a:solidFill>
-                  <a:srgbClr val="333333"/>
-                </a:solidFill>
-                <a:latin typeface="Calibri"/>
-              </a:rPr>
-              <a:t>–   Un job es un conjunto de pasos que corre en un runner, una maquina virtual limpia que se crea para esa ejecucion y se destruye al terminar.</a:t>
-            </a:r>
-          </a:p>
-          <a:p>
-            <a:pPr>
-              <a:spcAft>
-                <a:spcPts val="800"/>
-              </a:spcAft>
-            </a:pPr>
-            <a:r>
-              <a:rPr sz="2000" b="0" i="0">
-                <a:solidFill>
-                  <a:srgbClr val="333333"/>
-                </a:solidFill>
-                <a:latin typeface="Calibri"/>
-              </a:rPr>
-              <a:t>–   Un step es un comando o el uso de una action, unidad reutilizable publicada por otros.</a:t>
+              <a:t>–   Y en el nivel gratuito los repositorios publicos tienen minutos ilimitados mientras los privados tienen una cuota del orden de 2000 minutos al mes, cifra que conviene confirmar en la pagina de facturacion porque el proveedor la cambia.</a:t>
             </a:r>
           </a:p>
         </p:txBody>
@@ -4131,7 +4131,7 @@
                 </a:solidFill>
                 <a:latin typeface="Calibri"/>
               </a:rPr>
-              <a:t>GitHub Actions en cinco palabras (2/2)</a:t>
+              <a:t>Los tres bloques que la pregunta 7 califica, y el orden de los pasos (1/2)</a:t>
             </a:r>
           </a:p>
         </p:txBody>
@@ -4170,7 +4170,7 @@
                 </a:solidFill>
                 <a:latin typeface="Calibri"/>
               </a:rPr>
-              <a:t>–   Que el runner sea limpio y efimero es el punto pedagogico central: demuestra que la construccion no depende de nada instalado a mano en el portatil de nadie.</a:t>
+              <a:t>–   La pregunta 7 no pide «un workflow»: pide tres bloques nombrados y tres pasos en orden, y el reparto de sus 10 puntos hay que dictarlo tal cual porque decide como se estudia.</a:t>
             </a:r>
           </a:p>
           <a:p>
@@ -4186,7 +4186,7 @@
                 </a:solidFill>
                 <a:latin typeface="Calibri"/>
               </a:rPr>
-              <a:t>–   Advertencias: el YAML se indenta con espacios y nunca con tabulaciones, causa numero uno de un pipeline que no arranca</a:t>
+              <a:t>–   Dos puntos son los DISPARADORES, es decir la clave on, y basta con on push y pull_request bien escritos.</a:t>
             </a:r>
           </a:p>
           <a:p>
@@ -4202,7 +4202,39 @@
                 </a:solidFill>
                 <a:latin typeface="Calibri"/>
               </a:rPr>
-              <a:t>–   Y en el nivel gratuito los repositorios publicos tienen minutos ilimitados mientras los privados tienen una cuota del orden de 2000 minutos al mes, cifra que conviene confirmar en la pagina de facturacion porque el proveedor la cambia.</a:t>
+              <a:t>–   Un punto y medio es el ENTORNO de ejecucion, la clave runs-on, tipicamente ubuntu-latest; es el bloque que el estudiante omite mas y el mas facil de recuperar.</a:t>
+            </a:r>
+          </a:p>
+          <a:p>
+            <a:pPr>
+              <a:spcAft>
+                <a:spcPts val="800"/>
+              </a:spcAft>
+            </a:pPr>
+            <a:r>
+              <a:rPr sz="2000" b="0" i="0">
+                <a:solidFill>
+                  <a:srgbClr val="333333"/>
+                </a:solidFill>
+                <a:latin typeface="Calibri"/>
+              </a:rPr>
+              <a:t>–   Cuatro puntos, casi la mitad, son los tres PASOS presentes y en ORDEN: construccion, prueba y despliegue simulado.</a:t>
+            </a:r>
+          </a:p>
+          <a:p>
+            <a:pPr>
+              <a:spcAft>
+                <a:spcPts val="800"/>
+              </a:spcAft>
+            </a:pPr>
+            <a:r>
+              <a:rPr sz="2000" b="0" i="0">
+                <a:solidFill>
+                  <a:srgbClr val="333333"/>
+                </a:solidFill>
+                <a:latin typeface="Calibri"/>
+              </a:rPr>
+              <a:t>–   El orden no es capricho ni estetica: probar antes de construir no prueba el artefacto que se va a entregar, y desplegar antes de probar es exactamente lo que la integracion continua existe para impedir.</a:t>
             </a:r>
           </a:p>
         </p:txBody>
@@ -4383,7 +4415,7 @@
                 </a:solidFill>
                 <a:latin typeface="Calibri"/>
               </a:rPr>
-              <a:t>Los tres bloques que la pregunta 7 califica, y el orden de los pasos (1/2)</a:t>
+              <a:t>Los tres bloques que la pregunta 7 califica, y el orden de los pasos (2/2)</a:t>
             </a:r>
           </a:p>
         </p:txBody>
@@ -4422,7 +4454,7 @@
                 </a:solidFill>
                 <a:latin typeface="Calibri"/>
               </a:rPr>
-              <a:t>–   La pregunta 7 no pide «un workflow»: pide tres bloques nombrados y tres pasos en orden, y el reparto de sus 10 puntos hay que dictarlo tal cual porque decide como se estudia.</a:t>
+              <a:t>–   Un punto y medio adicional es que el paso de despliegue este ROTULADO como simulado y no prometa un despliegue real; con escribir «Despliegue SIMULADO (no despliega a ningun servidor)» en el nombre del paso se cumple.</a:t>
             </a:r>
           </a:p>
           <a:p>
@@ -4438,7 +4470,7 @@
                 </a:solidFill>
                 <a:latin typeface="Calibri"/>
               </a:rPr>
-              <a:t>–   Dos puntos son los DISPARADORES, es decir la clave on, y basta con on push y pull_request bien escritos.</a:t>
+              <a:t>–   Y un punto es la coherencia con el Dockerfile del Corte 1: la misma imagen y el mismo puerto, es decir cloudlite-api con su etiqueta 0.1.0 y el 8080 del EXPOSE de la Clase 3.</a:t>
             </a:r>
           </a:p>
           <a:p>
@@ -4454,7 +4486,7 @@
                 </a:solidFill>
                 <a:latin typeface="Calibri"/>
               </a:rPr>
-              <a:t>–   Un punto y medio es el ENTORNO de ejecucion, la clave runs-on, tipicamente ubuntu-latest; es el bloque que el estudiante omite mas y el mas facil de recuperar.</a:t>
+              <a:t>–   Falta la sancion, que conviene anunciar dos veces: la pregunta vale CERO completa si aparece un secreto escrito en claro dentro del YAML, sin importar lo bien que este el resto.</a:t>
             </a:r>
           </a:p>
           <a:p>
@@ -4470,23 +4502,7 @@
                 </a:solidFill>
                 <a:latin typeface="Calibri"/>
               </a:rPr>
-              <a:t>–   Cuatro puntos, casi la mitad, son los tres PASOS presentes y en ORDEN: construccion, prueba y despliegue simulado.</a:t>
-            </a:r>
-          </a:p>
-          <a:p>
-            <a:pPr>
-              <a:spcAft>
-                <a:spcPts val="800"/>
-              </a:spcAft>
-            </a:pPr>
-            <a:r>
-              <a:rPr sz="2000" b="0" i="0">
-                <a:solidFill>
-                  <a:srgbClr val="333333"/>
-                </a:solidFill>
-                <a:latin typeface="Calibri"/>
-              </a:rPr>
-              <a:t>–   El orden no es capricho ni estetica: probar antes de construir no prueba el artefacto que se va a entregar, y desplegar antes de probar es exactamente lo que la integracion continua existe para impedir.</a:t>
+              <a:t>–   Es la misma politica que el estudiante escribio en la pregunta 3 del Corte 2, y esta es la clase donde se comprueba si la cumple.</a:t>
             </a:r>
           </a:p>
         </p:txBody>
@@ -4667,7 +4683,7 @@
                 </a:solidFill>
                 <a:latin typeface="Calibri"/>
               </a:rPr>
-              <a:t>Los tres bloques que la pregunta 7 califica, y el orden de los pasos (2/2)</a:t>
+              <a:t>Monitorear y observar: la segunda mitad cambia de lado (1/2)</a:t>
             </a:r>
           </a:p>
         </p:txBody>
@@ -4706,7 +4722,7 @@
                 </a:solidFill>
                 <a:latin typeface="Calibri"/>
               </a:rPr>
-              <a:t>–   Un punto y medio adicional es que el paso de despliegue este ROTULADO como simulado y no prometa un despliegue real; con escribir «Despliegue SIMULADO (no despliega a ningun servidor)» en el nombre del paso se cumple.</a:t>
+              <a:t>–   La segunda mitad de la clase cambia de lado: ya no se trata de validar antes, sino de saber que pasa despues.</a:t>
             </a:r>
           </a:p>
           <a:p>
@@ -4722,7 +4738,7 @@
                 </a:solidFill>
                 <a:latin typeface="Calibri"/>
               </a:rPr>
-              <a:t>–   Y un punto es la coherencia con el Dockerfile del Corte 1: la misma imagen y el mismo puerto, es decir cloudlite-api con su etiqueta 0.1.0 y el 8080 del EXPOSE de la Clase 3.</a:t>
+              <a:t>–   Monitorear es vigilar indicadores decididos de antemano; observabilidad es la capacidad de responder preguntas nuevas sobre el sistema a partir de lo que el sistema emite, sin agregar codigo por cada duda.</a:t>
             </a:r>
           </a:p>
           <a:p>
@@ -4738,7 +4754,7 @@
                 </a:solidFill>
                 <a:latin typeface="Calibri"/>
               </a:rPr>
-              <a:t>–   Falta la sancion, que conviene anunciar dos veces: la pregunta vale CERO completa si aparece un secreto escrito en claro dentro del YAML, sin importar lo bien que este el resto.</a:t>
+              <a:t>–   Las metricas son numeros medidos en el tiempo, baratas porque se agregan, y detectan que algo cambio.</a:t>
             </a:r>
           </a:p>
           <a:p>
@@ -4754,7 +4770,23 @@
                 </a:solidFill>
                 <a:latin typeface="Calibri"/>
               </a:rPr>
-              <a:t>–   Es la misma politica que el estudiante escribio en la pregunta 3 del Corte 2, y esta es la clase donde se comprueba si la cumple.</a:t>
+              <a:t>–   Los logs, o registros, son eventos discretos con contexto, caros en volumen, y explican por que cambio.</a:t>
+            </a:r>
+          </a:p>
+          <a:p>
+            <a:pPr>
+              <a:spcAft>
+                <a:spcPts val="800"/>
+              </a:spcAft>
+            </a:pPr>
+            <a:r>
+              <a:rPr sz="2000" b="0" i="0">
+                <a:solidFill>
+                  <a:srgbClr val="333333"/>
+                </a:solidFill>
+                <a:latin typeface="Calibri"/>
+              </a:rPr>
+              <a:t>–   Las trazas siguen el recorrido de una sola peticion por varios servicios y son necesarias porque la Clase 4 convirtio el sistema en distribuido: cuando la peticion pasa por la API y por el servicio de notificaciones, saber cual de los dos tardo es imposible con metricas agregadas.</a:t>
             </a:r>
           </a:p>
         </p:txBody>
@@ -4935,7 +4967,7 @@
                 </a:solidFill>
                 <a:latin typeface="Calibri"/>
               </a:rPr>
-              <a:t>Monitorear y observar: la segunda mitad cambia de lado (1/2)</a:t>
+              <a:t>Monitorear y observar: la segunda mitad cambia de lado (2/2)</a:t>
             </a:r>
           </a:p>
         </p:txBody>
@@ -4974,7 +5006,7 @@
                 </a:solidFill>
                 <a:latin typeface="Calibri"/>
               </a:rPr>
-              <a:t>–   La segunda mitad de la clase cambia de lado: ya no se trata de validar antes, sino de saber que pasa despues.</a:t>
+              <a:t>–   La distincion entre metrica y registro no es teorica hoy: la pregunta 10 da un punto por que al menos una de las senales listadas sea un REGISTRO y no una metrica numerica, es decir algo que se escribe para poder reconstruir que paso despues.</a:t>
             </a:r>
           </a:p>
           <a:p>
@@ -4990,7 +5022,7 @@
                 </a:solidFill>
                 <a:latin typeface="Calibri"/>
               </a:rPr>
-              <a:t>–   Monitorear es vigilar indicadores decididos de antemano; observabilidad es la capacidad de responder preguntas nuevas sobre el sistema a partir de lo que el sistema emite, sin agregar codigo por cada duda.</a:t>
+              <a:t>–   La practica minima documentable es el log estructurado: cada linea es un objeto con campos fijos como fecha, nivel, identificador de peticion, ruta, codigo de estado y duracion en milisegundos.</a:t>
             </a:r>
           </a:p>
           <a:p>
@@ -5006,55 +5038,7 @@
                 </a:solidFill>
                 <a:latin typeface="Calibri"/>
               </a:rPr>
-              <a:t>–   Se apoya en tres tipos de senal.</a:t>
-            </a:r>
-          </a:p>
-          <a:p>
-            <a:pPr>
-              <a:spcAft>
-                <a:spcPts val="800"/>
-              </a:spcAft>
-            </a:pPr>
-            <a:r>
-              <a:rPr sz="2000" b="0" i="0">
-                <a:solidFill>
-                  <a:srgbClr val="333333"/>
-                </a:solidFill>
-                <a:latin typeface="Calibri"/>
-              </a:rPr>
-              <a:t>–   Las metricas son numeros medidos en el tiempo, baratas porque se agregan, y detectan que algo cambio.</a:t>
-            </a:r>
-          </a:p>
-          <a:p>
-            <a:pPr>
-              <a:spcAft>
-                <a:spcPts val="800"/>
-              </a:spcAft>
-            </a:pPr>
-            <a:r>
-              <a:rPr sz="2000" b="0" i="0">
-                <a:solidFill>
-                  <a:srgbClr val="333333"/>
-                </a:solidFill>
-                <a:latin typeface="Calibri"/>
-              </a:rPr>
-              <a:t>–   Los logs, o registros, son eventos discretos con contexto, caros en volumen, y explican por que cambio.</a:t>
-            </a:r>
-          </a:p>
-          <a:p>
-            <a:pPr>
-              <a:spcAft>
-                <a:spcPts val="800"/>
-              </a:spcAft>
-            </a:pPr>
-            <a:r>
-              <a:rPr sz="2000" b="0" i="0">
-                <a:solidFill>
-                  <a:srgbClr val="333333"/>
-                </a:solidFill>
-                <a:latin typeface="Calibri"/>
-              </a:rPr>
-              <a:t>–   Las trazas siguen el recorrido de una sola peticion por varios servicios y son necesarias porque la Clase 4 convirtio el sistema en distribuido: cuando la peticion pasa por la API y por el servicio de notificaciones, saber cual de los dos tardo es imposible con metricas agregadas.</a:t>
+              <a:t>–   Con ese identificador propagado entre servicios se reconstruye el recorrido: una traza pobre, pero real.</a:t>
             </a:r>
           </a:p>
         </p:txBody>
@@ -5235,7 +5219,7 @@
                 </a:solidFill>
                 <a:latin typeface="Calibri"/>
               </a:rPr>
-              <a:t>Monitorear y observar: la segunda mitad cambia de lado (2/2)</a:t>
+              <a:t>Las cuatro senales de oro, con definicion operativa (1/2)</a:t>
             </a:r>
           </a:p>
         </p:txBody>
@@ -5274,7 +5258,7 @@
                 </a:solidFill>
                 <a:latin typeface="Calibri"/>
               </a:rPr>
-              <a:t>–   La distincion entre metrica y registro no es teorica hoy: la pregunta 10 da un punto por que al menos una de las senales listadas sea un REGISTRO y no una metrica numerica, es decir algo que se escribe para poder reconstruir que paso despues.</a:t>
+              <a:t>–   Las cuatro senales de oro son latencia, trafico, errores y saturacion, y cada una necesita definicion operativa.</a:t>
             </a:r>
           </a:p>
           <a:p>
@@ -5290,7 +5274,7 @@
                 </a:solidFill>
                 <a:latin typeface="Calibri"/>
               </a:rPr>
-              <a:t>–   La practica minima documentable es el log estructurado: cada linea es un objeto con campos fijos como fecha, nivel, identificador de peticion, ruta, codigo de estado y duracion en milisegundos.</a:t>
+              <a:t>–   Trafico es cuanta demanda llega, en peticiones por segundo o por minuto.</a:t>
             </a:r>
           </a:p>
           <a:p>
@@ -5306,7 +5290,39 @@
                 </a:solidFill>
                 <a:latin typeface="Calibri"/>
               </a:rPr>
-              <a:t>–   Con ese identificador propagado entre servicios se reconstruye el recorrido: una traza pobre, pero real.</a:t>
+              <a:t>–   Saturacion es que tan cerca esta el recurso mas escaso de su limite: CPU, memoria, disco o, en la mayoria de las APIs reales, las conexiones libres del pool de la base de datos</a:t>
+            </a:r>
+          </a:p>
+          <a:p>
+            <a:pPr>
+              <a:spcAft>
+                <a:spcPts val="800"/>
+              </a:spcAft>
+            </a:pPr>
+            <a:r>
+              <a:rPr sz="2000" b="0" i="0">
+                <a:solidFill>
+                  <a:srgbClr val="333333"/>
+                </a:solidFill>
+                <a:latin typeface="Calibri"/>
+              </a:rPr>
+              <a:t>–   La convencion es alertar cuando un recurso pasa del 70 u 80 por ciento sostenido, y es convencion, no ley.</a:t>
+            </a:r>
+          </a:p>
+          <a:p>
+            <a:pPr>
+              <a:spcAft>
+                <a:spcPts val="800"/>
+              </a:spcAft>
+            </a:pPr>
+            <a:r>
+              <a:rPr sz="2000" b="0" i="0">
+                <a:solidFill>
+                  <a:srgbClr val="333333"/>
+                </a:solidFill>
+                <a:latin typeface="Calibri"/>
+              </a:rPr>
+              <a:t>–   Latencia merece explicacion aparte porque introduce el percentil, el valor por debajo del cual cae un porcentaje dado de las mediciones: si el p95 de la API es 300 milisegundos</a:t>
             </a:r>
           </a:p>
         </p:txBody>
@@ -5487,7 +5503,7 @@
                 </a:solidFill>
                 <a:latin typeface="Calibri"/>
               </a:rPr>
-              <a:t>Las cuatro senales de oro, con definicion operativa</a:t>
+              <a:t>Las cuatro senales de oro, con definicion operativa (2/2)</a:t>
             </a:r>
           </a:p>
         </p:txBody>
@@ -5513,86 +5529,6 @@
             <a:spAutoFit/>
           </a:bodyPr>
           <a:lstStyle/>
-          <a:p>
-            <a:pPr>
-              <a:spcAft>
-                <a:spcPts val="800"/>
-              </a:spcAft>
-            </a:pPr>
-            <a:r>
-              <a:rPr sz="2000" b="0" i="0">
-                <a:solidFill>
-                  <a:srgbClr val="333333"/>
-                </a:solidFill>
-                <a:latin typeface="Calibri"/>
-              </a:rPr>
-              <a:t>–   Las cuatro senales de oro son latencia, trafico, errores y saturacion, y cada una necesita definicion operativa.</a:t>
-            </a:r>
-          </a:p>
-          <a:p>
-            <a:pPr>
-              <a:spcAft>
-                <a:spcPts val="800"/>
-              </a:spcAft>
-            </a:pPr>
-            <a:r>
-              <a:rPr sz="2000" b="0" i="0">
-                <a:solidFill>
-                  <a:srgbClr val="333333"/>
-                </a:solidFill>
-                <a:latin typeface="Calibri"/>
-              </a:rPr>
-              <a:t>–   Trafico es cuanta demanda llega, en peticiones por segundo o por minuto.</a:t>
-            </a:r>
-          </a:p>
-          <a:p>
-            <a:pPr>
-              <a:spcAft>
-                <a:spcPts val="800"/>
-              </a:spcAft>
-            </a:pPr>
-            <a:r>
-              <a:rPr sz="2000" b="0" i="0">
-                <a:solidFill>
-                  <a:srgbClr val="333333"/>
-                </a:solidFill>
-                <a:latin typeface="Calibri"/>
-              </a:rPr>
-              <a:t>–   Saturacion es que tan cerca esta el recurso mas escaso de su limite: CPU, memoria, disco o, en la mayoria de las APIs reales, las conexiones libres del pool de la base de datos</a:t>
-            </a:r>
-          </a:p>
-          <a:p>
-            <a:pPr>
-              <a:spcAft>
-                <a:spcPts val="800"/>
-              </a:spcAft>
-            </a:pPr>
-            <a:r>
-              <a:rPr sz="2000" b="0" i="0">
-                <a:solidFill>
-                  <a:srgbClr val="333333"/>
-                </a:solidFill>
-                <a:latin typeface="Calibri"/>
-              </a:rPr>
-              <a:t>–   La convencion es alertar cuando un recurso pasa del 70 u 80 por ciento sostenido, y es convencion, no ley.</a:t>
-            </a:r>
-          </a:p>
-          <a:p>
-            <a:pPr>
-              <a:spcAft>
-                <a:spcPts val="800"/>
-              </a:spcAft>
-            </a:pPr>
-            <a:r>
-              <a:rPr sz="2000" b="0" i="0">
-                <a:solidFill>
-                  <a:srgbClr val="333333"/>
-                </a:solidFill>
-                <a:latin typeface="Calibri"/>
-              </a:rPr>
-              <a:t>–   Latencia merece explicacion aparte porque introduce el percentil, el valor por debajo del cual cae un porcentaje dado de las mediciones: si el p95 de la API es 300 milisegundos</a:t>
-            </a:r>
-          </a:p>
           <a:p>
             <a:pPr>
               <a:spcAft>
@@ -5890,55 +5826,7 @@
                 </a:solidFill>
                 <a:latin typeface="Calibri"/>
               </a:rPr>
-              <a:t>–   «Medimos la latencia» no permite decidir nada</a:t>
-            </a:r>
-          </a:p>
-          <a:p>
-            <a:pPr>
-              <a:spcAft>
-                <a:spcPts val="800"/>
-              </a:spcAft>
-            </a:pPr>
-            <a:r>
-              <a:rPr sz="2000" b="0" i="0">
-                <a:solidFill>
-                  <a:srgbClr val="333333"/>
-                </a:solidFill>
-                <a:latin typeface="Calibri"/>
-              </a:rPr>
               <a:t>–   «el listado de disponibilidad debe responder en menos de 400 milisegundos y si pasa de 800 se revisa» si, porque define cuando hay que actuar.</a:t>
-            </a:r>
-          </a:p>
-          <a:p>
-            <a:pPr>
-              <a:spcAft>
-                <a:spcPts val="800"/>
-              </a:spcAft>
-            </a:pPr>
-            <a:r>
-              <a:rPr sz="2000" b="0" i="0">
-                <a:solidFill>
-                  <a:srgbClr val="333333"/>
-                </a:solidFill>
-                <a:latin typeface="Calibri"/>
-              </a:rPr>
-              <a:t>–   El umbral puede ser discutible, y hay que decir que se acepta discutible: lo que no puede es faltar.</a:t>
-            </a:r>
-          </a:p>
-          <a:p>
-            <a:pPr>
-              <a:spcAft>
-                <a:spcPts val="800"/>
-              </a:spcAft>
-            </a:pPr>
-            <a:r>
-              <a:rPr sz="2000" b="0" i="0">
-                <a:solidFill>
-                  <a:srgbClr val="333333"/>
-                </a:solidFill>
-                <a:latin typeface="Calibri"/>
-              </a:rPr>
-              <a:t>–   La segunda columna tambien se califica: se descuenta si las senales no se refieren a operaciones del dominio propio, asi que «el sistema» no es una respuesta y «el listado de disponibilidad de canchas» o «el registro de una reserva» si.</a:t>
             </a:r>
           </a:p>
         </p:txBody>
@@ -6158,7 +6046,7 @@
                 </a:solidFill>
                 <a:latin typeface="Calibri"/>
               </a:rPr>
-              <a:t>–   Falta una advertencia de formato: en clase vale la pena preguntar siempre que se HACE cuando se cruza el umbral, porque es lo que convierte una lista de metricas en un plan de operacion</a:t>
+              <a:t>–   El umbral puede ser discutible, y hay que decir que se acepta discutible: lo que no puede es faltar.</a:t>
             </a:r>
           </a:p>
           <a:p>
@@ -6174,7 +6062,7 @@
                 </a:solidFill>
                 <a:latin typeface="Calibri"/>
               </a:rPr>
-              <a:t>–   Pero ese «que se hace» NO es una cuarta columna de la respuesta; se escribe dentro del umbral, como en el ejemplo del listado.</a:t>
+              <a:t>–   La segunda columna tambien se califica: se descuenta si las senales no se refieren a operaciones del dominio propio, asi que «el sistema» no es una respuesta y «el listado de disponibilidad de canchas» o «el registro de una reserva» si.</a:t>
             </a:r>
           </a:p>
           <a:p>
@@ -6190,7 +6078,7 @@
                 </a:solidFill>
                 <a:latin typeface="Calibri"/>
               </a:rPr>
-              <a:t>–   Ahi entra la optimizacion de la segunda mitad del tema: paginar, con veinte a cincuenta elementos por pagina, porque un endpoint que devuelve cincuenta mil registros es problema de latencia y de memoria; indexar la columna por la que se filtra</a:t>
+              <a:t>–   Falta una advertencia de formato: en clase vale la pena preguntar siempre que se HACE cuando se cruza el umbral, porque es lo que convierte una lista de metricas en un plan de operacion</a:t>
             </a:r>
           </a:p>
           <a:p>
@@ -6206,23 +6094,7 @@
                 </a:solidFill>
                 <a:latin typeface="Calibri"/>
               </a:rPr>
-              <a:t>–   Porque sin indice el motor recorre la tabla completa; cachear lecturas repetidas, donde una tasa de acierto del 90 por ciento significa que nueve de cada diez lecturas no llegan a la base</a:t>
-            </a:r>
-          </a:p>
-          <a:p>
-            <a:pPr>
-              <a:spcAft>
-                <a:spcPts val="800"/>
-              </a:spcAft>
-            </a:pPr>
-            <a:r>
-              <a:rPr sz="2000" b="0" i="0">
-                <a:solidFill>
-                  <a:srgbClr val="333333"/>
-                </a:solidFill>
-                <a:latin typeface="Calibri"/>
-              </a:rPr>
-              <a:t>–   Y limitar la tasa de peticiones, el control de denegacion de servicio de la Clase 6.</a:t>
+              <a:t>–   Pero ese «que se hace» NO es una cuarta columna de la respuesta; se escribe dentro del umbral, como en el ejemplo del listado.</a:t>
             </a:r>
           </a:p>
         </p:txBody>
@@ -6805,22 +6677,6 @@
                 </a:solidFill>
                 <a:latin typeface="Calibri"/>
               </a:rPr>
-              <a:t>–   El workflow se dispara en push y en pull_request.</a:t>
-            </a:r>
-          </a:p>
-          <a:p>
-            <a:pPr>
-              <a:spcAft>
-                <a:spcPts val="800"/>
-              </a:spcAft>
-            </a:pPr>
-            <a:r>
-              <a:rPr sz="2000" b="0" i="0">
-                <a:solidFill>
-                  <a:srgbClr val="333333"/>
-                </a:solidFill>
-                <a:latin typeface="Calibri"/>
-              </a:rPr>
               <a:t>–   Un job corre en ubuntu-latest y hace, en este orden: descargar el codigo con la action de checkout, instalar el runtime con la action de setup del lenguaje</a:t>
             </a:r>
           </a:p>
@@ -7286,7 +7142,7 @@
                 </a:solidFill>
                 <a:latin typeface="Calibri"/>
               </a:rPr>
-              <a:t>La condicion de fallo: la pregunta que separa un CI de una decoracion verde (1/2)</a:t>
+              <a:t>La condicion de fallo: la pregunta que separa un CI de una decoracion verde</a:t>
             </a:r>
           </a:p>
         </p:txBody>
@@ -7341,7 +7197,7 @@
                 </a:solidFill>
                 <a:latin typeface="Calibri"/>
               </a:rPr>
-              <a:t>–   Uno y medio, que se compila o se instala.</a:t>
+              <a:t>–   Y dos puntos, el corazon de la pregunta, con que condicion el pipeline debe FALLAR.</a:t>
             </a:r>
           </a:p>
           <a:p>
@@ -7357,7 +7213,7 @@
                 </a:solidFill>
                 <a:latin typeface="Calibri"/>
               </a:rPr>
-              <a:t>–   Uno y medio, que se ejecuta en la prueba y que comprueba exactamente.</a:t>
+              <a:t>–   Ese ultimo campo vale CERO si el pipeline no puede fallar nunca, y hay que explicar por que no es una crueldad de la rubrica: un workflow cuyo unico paso imprime un mensaje de exito siempre sale verde</a:t>
             </a:r>
           </a:p>
           <a:p>
@@ -7373,7 +7229,7 @@
                 </a:solidFill>
                 <a:latin typeface="Calibri"/>
               </a:rPr>
-              <a:t>–   Y dos puntos, el corazon de la pregunta, con que condicion el pipeline debe FALLAR.</a:t>
+              <a:t>–   Y un check que siempre sale verde no aporta ninguna informacion; es una decoracion.</a:t>
             </a:r>
           </a:p>
           <a:p>
@@ -7389,23 +7245,7 @@
                 </a:solidFill>
                 <a:latin typeface="Calibri"/>
               </a:rPr>
-              <a:t>–   Ese ultimo campo vale CERO si el pipeline no puede fallar nunca, y hay que explicar por que no es una crueldad de la rubrica: un workflow cuyo unico paso imprime un mensaje de exito siempre sale verde</a:t>
-            </a:r>
-          </a:p>
-          <a:p>
-            <a:pPr>
-              <a:spcAft>
-                <a:spcPts val="800"/>
-              </a:spcAft>
-            </a:pPr>
-            <a:r>
-              <a:rPr sz="2000" b="0" i="0">
-                <a:solidFill>
-                  <a:srgbClr val="333333"/>
-                </a:solidFill>
-                <a:latin typeface="Calibri"/>
-              </a:rPr>
-              <a:t>–   Y un check que siempre sale verde no aporta ninguna informacion; es una decoracion.</a:t>
+              <a:t>–   Aqui es donde aparece la pregunta previsible del grupo, y hay que salir a su encuentro: para que escribir pruebas de un stub que casi no hace nada.</a:t>
             </a:r>
           </a:p>
         </p:txBody>
@@ -7586,7 +7426,7 @@
                 </a:solidFill>
                 <a:latin typeface="Calibri"/>
               </a:rPr>
-              <a:t>La condicion de fallo: la pregunta que separa un CI de una decoracion verde (2/2)</a:t>
+              <a:t>Donde se ejecuta de verdad la politica de secretos de la Clase 6 (1/2)</a:t>
             </a:r>
           </a:p>
         </p:txBody>
@@ -7625,7 +7465,7 @@
                 </a:solidFill>
                 <a:latin typeface="Calibri"/>
               </a:rPr>
-              <a:t>–   Si la respuesta no aparece en diez segundos, el pipeline no valida nada todavia.</a:t>
+              <a:t>–   El pipeline es tambien donde se ejecuta de verdad la politica de secretos escrita en la Clase 6.</a:t>
             </a:r>
           </a:p>
           <a:p>
@@ -7641,7 +7481,7 @@
                 </a:solidFill>
                 <a:latin typeface="Calibri"/>
               </a:rPr>
-              <a:t>–   Aqui es donde aparece la pregunta previsible del grupo, y hay que salir a su encuentro: para que escribir pruebas de un stub que casi no hace nada.</a:t>
+              <a:t>–   La plataforma enmascara los secretos en el registro de salida, pero enmascarar no es impedir la fuga: si un paso imprime el valor transformado, por ejemplo codificado, sale en claro; la regla es no imprimir secretos nunca.</a:t>
             </a:r>
           </a:p>
           <a:p>
@@ -7657,23 +7497,7 @@
                 </a:solidFill>
                 <a:latin typeface="Calibri"/>
               </a:rPr>
-              <a:t>–   La respuesta es que una sola prueba que verifique que el endpoint /health responde 200 detecta la clase de error mas costosa en operacion</a:t>
-            </a:r>
-          </a:p>
-          <a:p>
-            <a:pPr>
-              <a:spcAft>
-                <a:spcPts val="800"/>
-              </a:spcAft>
-            </a:pPr>
-            <a:r>
-              <a:rPr sz="2000" b="0" i="0">
-                <a:solidFill>
-                  <a:srgbClr val="333333"/>
-                </a:solidFill>
-                <a:latin typeface="Calibri"/>
-              </a:rPr>
-              <a:t>–   Que la aplicacion ya no arranca; y con eso la condicion de fallo se escribe sola: el check sale rojo si /health deja de responder 200, si falta una dependencia declarada o si el docker build no compila.</a:t>
+              <a:t>–   Y por diseno los secretos no se entregan a las corridas disparadas por un pull_request que viene de un fork, para que un extrano no pueda proponer un cambio que los imprima.</a:t>
             </a:r>
           </a:p>
         </p:txBody>
@@ -7854,7 +7678,7 @@
                 </a:solidFill>
                 <a:latin typeface="Calibri"/>
               </a:rPr>
-              <a:t>Donde se ejecuta de verdad la politica de secretos de la Clase 6</a:t>
+              <a:t>Donde se ejecuta de verdad la politica de secretos de la Clase 6 (2/2)</a:t>
             </a:r>
           </a:p>
         </p:txBody>
@@ -7887,13 +7711,13 @@
               </a:spcAft>
             </a:pPr>
             <a:r>
-              <a:rPr sz="1900" b="0" i="0">
-                <a:solidFill>
-                  <a:srgbClr val="333333"/>
-                </a:solidFill>
-                <a:latin typeface="Calibri"/>
-              </a:rPr>
-              <a:t>–   El pipeline es tambien donde se ejecuta de verdad la politica de secretos escrita en la Clase 6.</a:t>
+              <a:rPr sz="2000" b="0" i="0">
+                <a:solidFill>
+                  <a:srgbClr val="333333"/>
+                </a:solidFill>
+                <a:latin typeface="Calibri"/>
+              </a:rPr>
+              <a:t>–   La consecuencia practica es que la validacion de un cambio externo no puede depender de credenciales, y por eso las pruebas del stub deben correr sin acceso a servicios reales, con valores ficticios o un doble simulado.</a:t>
             </a:r>
           </a:p>
           <a:p>
@@ -7903,87 +7727,7 @@
               </a:spcAft>
             </a:pPr>
             <a:r>
-              <a:rPr sz="1900" b="0" i="0">
-                <a:solidFill>
-                  <a:srgbClr val="333333"/>
-                </a:solidFill>
-                <a:latin typeface="Calibri"/>
-              </a:rPr>
-              <a:t>–   Los valores sensibles se guardan en el repositorio bajo Settings, Secrets and variables, Actions; el workflow los referencia por nombre y la plataforma los inyecta como variables de entorno solo durante la corrida.</a:t>
-            </a:r>
-          </a:p>
-          <a:p>
-            <a:pPr>
-              <a:spcAft>
-                <a:spcPts val="800"/>
-              </a:spcAft>
-            </a:pPr>
-            <a:r>
-              <a:rPr sz="1900" b="0" i="0">
-                <a:solidFill>
-                  <a:srgbClr val="333333"/>
-                </a:solidFill>
-                <a:latin typeface="Calibri"/>
-              </a:rPr>
-              <a:t>–   Dos detalles evitan sustos.</a:t>
-            </a:r>
-          </a:p>
-          <a:p>
-            <a:pPr>
-              <a:spcAft>
-                <a:spcPts val="800"/>
-              </a:spcAft>
-            </a:pPr>
-            <a:r>
-              <a:rPr sz="1900" b="0" i="0">
-                <a:solidFill>
-                  <a:srgbClr val="333333"/>
-                </a:solidFill>
-                <a:latin typeface="Calibri"/>
-              </a:rPr>
-              <a:t>–   La plataforma enmascara los secretos en el registro de salida, pero enmascarar no es impedir la fuga: si un paso imprime el valor transformado, por ejemplo codificado, sale en claro; la regla es no imprimir secretos nunca.</a:t>
-            </a:r>
-          </a:p>
-          <a:p>
-            <a:pPr>
-              <a:spcAft>
-                <a:spcPts val="800"/>
-              </a:spcAft>
-            </a:pPr>
-            <a:r>
-              <a:rPr sz="1900" b="0" i="0">
-                <a:solidFill>
-                  <a:srgbClr val="333333"/>
-                </a:solidFill>
-                <a:latin typeface="Calibri"/>
-              </a:rPr>
-              <a:t>–   Y por diseno los secretos no se entregan a las corridas disparadas por un pull_request que viene de un fork, para que un extrano no pueda proponer un cambio que los imprima.</a:t>
-            </a:r>
-          </a:p>
-          <a:p>
-            <a:pPr>
-              <a:spcAft>
-                <a:spcPts val="800"/>
-              </a:spcAft>
-            </a:pPr>
-            <a:r>
-              <a:rPr sz="1900" b="0" i="0">
-                <a:solidFill>
-                  <a:srgbClr val="333333"/>
-                </a:solidFill>
-                <a:latin typeface="Calibri"/>
-              </a:rPr>
-              <a:t>–   La consecuencia practica es que la validacion de un cambio externo no puede depender de credenciales, y por eso las pruebas del stub deben correr sin acceso a servicios reales, con valores ficticios o un doble simulado.</a:t>
-            </a:r>
-          </a:p>
-          <a:p>
-            <a:pPr>
-              <a:spcAft>
-                <a:spcPts val="800"/>
-              </a:spcAft>
-            </a:pPr>
-            <a:r>
-              <a:rPr sz="1900" b="0" i="0">
+              <a:rPr sz="2000" b="0" i="0">
                 <a:solidFill>
                   <a:srgbClr val="333333"/>
                 </a:solidFill>
@@ -8209,22 +7953,6 @@
                 </a:solidFill>
                 <a:latin typeface="Calibri"/>
               </a:rPr>
-              <a:t>–   Cuatro que aparecen todos los semestres.</a:t>
-            </a:r>
-          </a:p>
-          <a:p>
-            <a:pPr>
-              <a:spcAft>
-                <a:spcPts val="800"/>
-              </a:spcAft>
-            </a:pPr>
-            <a:r>
-              <a:rPr sz="2000" b="0" i="0">
-                <a:solidFill>
-                  <a:srgbClr val="333333"/>
-                </a:solidFill>
-                <a:latin typeface="Calibri"/>
-              </a:rPr>
               <a:t>–   «Si no tenemos usuarios reales, que monitoreamos?» El entregable es el plan, no los datos: la pregunta pide que senales observaria en una produccion hipotetica, con sus umbrales.</a:t>
             </a:r>
           </a:p>
@@ -8493,22 +8221,6 @@
                 </a:solidFill>
                 <a:latin typeface="Calibri"/>
               </a:rPr>
-              <a:t>–   Un umbral justificado asi vale, aunque despues la medicion lo corrija.</a:t>
-            </a:r>
-          </a:p>
-          <a:p>
-            <a:pPr>
-              <a:spcAft>
-                <a:spcPts val="800"/>
-              </a:spcAft>
-            </a:pPr>
-            <a:r>
-              <a:rPr sz="2000" b="0" i="0">
-                <a:solidFill>
-                  <a:srgbClr val="333333"/>
-                </a:solidFill>
-                <a:latin typeface="Calibri"/>
-              </a:rPr>
               <a:t>–   «Mi proyecto no tiene pruebas automatizadas, que pongo en el paso Probar?» Una prueba, aunque sea una: que el proceso arranca y que /health responde 200.</a:t>
             </a:r>
           </a:p>
@@ -12965,22 +12677,6 @@
               <a:t>–   Su version cotidiana en un equipo de estudiantes es la frase «en mi maquina funciona».</a:t>
             </a:r>
           </a:p>
-          <a:p>
-            <a:pPr>
-              <a:spcAft>
-                <a:spcPts val="800"/>
-              </a:spcAft>
-            </a:pPr>
-            <a:r>
-              <a:rPr sz="2000" b="0" i="0">
-                <a:solidFill>
-                  <a:srgbClr val="333333"/>
-                </a:solidFill>
-                <a:latin typeface="Calibri"/>
-              </a:rPr>
-              <a:t>–   Integracion continua, definida operativamente, es esto: cada vez que alguien sube un cambio al repositorio, un servidor automatico toma el codigo en un entorno limpio, lo construye, le corre las pruebas y avisa en minutos si algo se rompio.</a:t>
-            </a:r>
-          </a:p>
         </p:txBody>
       </p:sp>
       <p:sp>
@@ -13198,7 +12894,7 @@
                 </a:solidFill>
                 <a:latin typeface="Calibri"/>
               </a:rPr>
-              <a:t>–   El valor no esta en la automatizacion sino en el intervalo de retroalimentacion: encontrar el error tres minutos despues de escribirlo, cuando el autor recuerda que hizo, cuesta una fraccion de hallarlo tres semanas despues en el computador de otra persona.</a:t>
+              <a:t>–   Integracion continua, definida operativamente, es esto: cada vez que alguien sube un cambio al repositorio, un servidor automatico toma el codigo en un entorno limpio, lo construye, le corre las pruebas y avisa en minutos si algo se rompio.</a:t>
             </a:r>
           </a:p>
           <a:p>
@@ -13214,23 +12910,7 @@
                 </a:solidFill>
                 <a:latin typeface="Calibri"/>
               </a:rPr>
-              <a:t>–   Lo que se califica hoy son 25 de los 100 puntos de la actividad del Corte 2, en cuatro preguntas: 10 puntos el contenido completo del ci.yml</a:t>
-            </a:r>
-          </a:p>
-          <a:p>
-            <a:pPr>
-              <a:spcAft>
-                <a:spcPts val="800"/>
-              </a:spcAft>
-            </a:pPr>
-            <a:r>
-              <a:rPr sz="2000" b="0" i="0">
-                <a:solidFill>
-                  <a:srgbClr val="333333"/>
-                </a:solidFill>
-                <a:latin typeface="Calibri"/>
-              </a:rPr>
-              <a:t>–   5 explicar que hace de verdad la construccion y la prueba y con que condicion el pipeline debe fallar, 4 distinguir CI de CD y ubicar hasta donde llego el propio trabajo, y 6 la tabla de senales de monitoreo con umbral.</a:t>
+              <a:t>–   El valor no esta en la automatizacion sino en el intervalo de retroalimentacion: encontrar el error tres minutos despues de escribirlo, cuando el autor recuerda que hizo, cuesta una fraccion de hallarlo tres semanas despues en el computador de otra persona.</a:t>
             </a:r>
           </a:p>
         </p:txBody>
@@ -13411,7 +13091,7 @@
                 </a:solidFill>
                 <a:latin typeface="Calibri"/>
               </a:rPr>
-              <a:t>Entrega continua y despliegue continuo: la sigla CD es ambigua (1/2)</a:t>
+              <a:t>Entrega continua y despliegue continuo: la sigla CD es ambigua</a:t>
             </a:r>
           </a:p>
         </p:txBody>
@@ -13466,7 +13146,7 @@
                 </a:solidFill>
                 <a:latin typeface="Calibri"/>
               </a:rPr>
-              <a:t>–   Entrega continua significa que cada cambio que pasa la validacion queda listo para desplegarse, empaquetado y probado, pero un humano decide cuando se aprieta el boton.</a:t>
+              <a:t>–   Despliegue continuo significa que ese ultimo paso tambien es automatico y el cambio llega a produccion sin intervencion.</a:t>
             </a:r>
           </a:p>
           <a:p>
@@ -13482,7 +13162,7 @@
                 </a:solidFill>
                 <a:latin typeface="Calibri"/>
               </a:rPr>
-              <a:t>–   Despliegue continuo significa que ese ultimo paso tambien es automatico y el cambio llega a produccion sin intervencion.</a:t>
+              <a:t>–   Las dos comparten la sigla CD, no son lo mismo, y ninguna es sinonimo de integracion continua: CI valida, CD entrega o despliega.</a:t>
             </a:r>
           </a:p>
           <a:p>
@@ -13498,7 +13178,7 @@
                 </a:solidFill>
                 <a:latin typeface="Calibri"/>
               </a:rPr>
-              <a:t>–   Las dos comparten la sigla CD, no son lo mismo, y ninguna es sinonimo de integracion continua: CI valida, CD entrega o despliega.</a:t>
+              <a:t>–   Se puede tener CI sin nada de CD, y es lo que se construye hoy porque el curso no usa infraestructura de pago ni pide tarjeta de credito.</a:t>
             </a:r>
           </a:p>
           <a:p>
@@ -13514,7 +13194,7 @@
                 </a:solidFill>
                 <a:latin typeface="Calibri"/>
               </a:rPr>
-              <a:t>–   Se puede tener CI sin nada de CD, y es lo que se construye hoy porque el curso no usa infraestructura de pago ni pide tarjeta de credito.</a:t>
+              <a:t>–   Y hay que anunciar como se califica esa frontera, porque es contraintuitivo para el estudiante que cree que reconocer un limite es admitir una carencia: la pregunta 9 SUMA un punto por ubicar correctamente el propio trabajo y decir que llega hasta «listo para desplegar», y DESCUENTA la mitad de la pregunta a quien afirme haber construido CD.</a:t>
             </a:r>
           </a:p>
           <a:p>
@@ -13530,7 +13210,7 @@
                 </a:solidFill>
                 <a:latin typeface="Calibri"/>
               </a:rPr>
-              <a:t>–   El pipeline llega hasta «listo para desplegar» y la etapa final imprime un mensaje y publica un artefacto en lugar de subir a un servidor real.</a:t>
+              <a:t>–   La forma tipica del error es tener un paso llamado deploy que solo imprime un mensaje y concluir que ya hay despliegue continuo; el nombre del paso no despliega nada.</a:t>
             </a:r>
           </a:p>
         </p:txBody>

--- a/Arquitectura de Sistemas Computacionales/Clases/Clase 8 - Monitoreo optimizacion y CI-CD/Presentacion.pptx
+++ b/Arquitectura de Sistemas Computacionales/Clases/Clase 8 - Monitoreo optimizacion y CI-CD/Presentacion.pptx
@@ -37,6 +37,8 @@
     <p:sldId id="285" r:id="rId36"/>
     <p:sldId id="286" r:id="rId37"/>
     <p:sldId id="287" r:id="rId38"/>
+    <p:sldId id="288" r:id="rId39"/>
+    <p:sldId id="289" r:id="rId40"/>
   </p:sldIdLst>
   <p:sldSz cx="12191695" cy="6858000" type="screen4x3"/>
   <p:notesSz cx="6858000" cy="9144000"/>
@@ -8450,7 +8452,7 @@
                 </a:solidFill>
                 <a:latin typeface="Calibri"/>
               </a:rPr>
-              <a:t>.github/workflows/ci.yml — CI real, no un echo</a:t>
+              <a:t>El workflow de CI: el archivo completo</a:t>
             </a:r>
           </a:p>
         </p:txBody>
@@ -8464,7 +8466,7 @@
         <p:spPr>
           <a:xfrm>
             <a:off x="457200" y="1261872"/>
-            <a:ext cx="11277295" cy="4773168"/>
+            <a:ext cx="11277295" cy="5093208"/>
           </a:xfrm>
           <a:prstGeom prst="roundRect">
             <a:avLst>
@@ -8584,7 +8586,7 @@
         <p:spPr>
           <a:xfrm>
             <a:off x="777240" y="1719072"/>
-            <a:ext cx="10637215" cy="4133087"/>
+            <a:ext cx="5181447" cy="4453128"/>
           </a:xfrm>
           <a:prstGeom prst="rect">
             <a:avLst/>
@@ -8609,6 +8611,22 @@
                 </a:solidFill>
                 <a:latin typeface="Calibri"/>
               </a:rPr>
+              <a:t># .github/workflows/ci.yml</a:t>
+            </a:r>
+          </a:p>
+          <a:p>
+            <a:pPr>
+              <a:spcAft>
+                <a:spcPts val="400"/>
+              </a:spcAft>
+            </a:pPr>
+            <a:r>
+              <a:rPr sz="1400" b="0" i="0">
+                <a:solidFill>
+                  <a:srgbClr val="FFFFFF"/>
+                </a:solidFill>
+                <a:latin typeface="Calibri"/>
+              </a:rPr>
               <a:t>name: CI</a:t>
             </a:r>
           </a:p>
@@ -8625,7 +8643,7 @@
                 </a:solidFill>
                 <a:latin typeface="Calibri"/>
               </a:rPr>
-              <a:t>on: [push, pull_request]          # 1. disparadores</a:t>
+              <a:t/>
             </a:r>
           </a:p>
           <a:p>
@@ -8641,6 +8659,86 @@
                 </a:solidFill>
                 <a:latin typeface="Calibri"/>
               </a:rPr>
+              <a:t>on:</a:t>
+            </a:r>
+          </a:p>
+          <a:p>
+            <a:pPr>
+              <a:spcAft>
+                <a:spcPts val="400"/>
+              </a:spcAft>
+            </a:pPr>
+            <a:r>
+              <a:rPr sz="1400" b="0" i="0">
+                <a:solidFill>
+                  <a:srgbClr val="FFFFFF"/>
+                </a:solidFill>
+                <a:latin typeface="Calibri"/>
+              </a:rPr>
+              <a:t>  push:</a:t>
+            </a:r>
+          </a:p>
+          <a:p>
+            <a:pPr>
+              <a:spcAft>
+                <a:spcPts val="400"/>
+              </a:spcAft>
+            </a:pPr>
+            <a:r>
+              <a:rPr sz="1400" b="0" i="0">
+                <a:solidFill>
+                  <a:srgbClr val="FFFFFF"/>
+                </a:solidFill>
+                <a:latin typeface="Calibri"/>
+              </a:rPr>
+              <a:t>    branches: [main]</a:t>
+            </a:r>
+          </a:p>
+          <a:p>
+            <a:pPr>
+              <a:spcAft>
+                <a:spcPts val="400"/>
+              </a:spcAft>
+            </a:pPr>
+            <a:r>
+              <a:rPr sz="1400" b="0" i="0">
+                <a:solidFill>
+                  <a:srgbClr val="FFFFFF"/>
+                </a:solidFill>
+                <a:latin typeface="Calibri"/>
+              </a:rPr>
+              <a:t>  pull_request:</a:t>
+            </a:r>
+          </a:p>
+          <a:p>
+            <a:pPr>
+              <a:spcAft>
+                <a:spcPts val="400"/>
+              </a:spcAft>
+            </a:pPr>
+            <a:r>
+              <a:rPr sz="1400" b="0" i="0">
+                <a:solidFill>
+                  <a:srgbClr val="FFFFFF"/>
+                </a:solidFill>
+                <a:latin typeface="Calibri"/>
+              </a:rPr>
+              <a:t/>
+            </a:r>
+          </a:p>
+          <a:p>
+            <a:pPr>
+              <a:spcAft>
+                <a:spcPts val="400"/>
+              </a:spcAft>
+            </a:pPr>
+            <a:r>
+              <a:rPr sz="1400" b="0" i="0">
+                <a:solidFill>
+                  <a:srgbClr val="FFFFFF"/>
+                </a:solidFill>
+                <a:latin typeface="Calibri"/>
+              </a:rPr>
               <a:t>jobs:</a:t>
             </a:r>
           </a:p>
@@ -8657,7 +8755,7 @@
                 </a:solidFill>
                 <a:latin typeface="Calibri"/>
               </a:rPr>
-              <a:t>  build:</a:t>
+              <a:t>  construir-y-probar:</a:t>
             </a:r>
           </a:p>
           <a:p>
@@ -8673,167 +8771,7 @@
                 </a:solidFill>
                 <a:latin typeface="Calibri"/>
               </a:rPr>
-              <a:t>    runs-on: ubuntu-latest        # 2. entorno de ejecucion</a:t>
-            </a:r>
-          </a:p>
-          <a:p>
-            <a:pPr>
-              <a:spcAft>
-                <a:spcPts val="400"/>
-              </a:spcAft>
-            </a:pPr>
-            <a:r>
-              <a:rPr sz="1400" b="0" i="0">
-                <a:solidFill>
-                  <a:srgbClr val="FFFFFF"/>
-                </a:solidFill>
-                <a:latin typeface="Calibri"/>
-              </a:rPr>
-              <a:t>    steps:</a:t>
-            </a:r>
-          </a:p>
-          <a:p>
-            <a:pPr>
-              <a:spcAft>
-                <a:spcPts val="400"/>
-              </a:spcAft>
-            </a:pPr>
-            <a:r>
-              <a:rPr sz="1400" b="0" i="0">
-                <a:solidFill>
-                  <a:srgbClr val="FFFFFF"/>
-                </a:solidFill>
-                <a:latin typeface="Calibri"/>
-              </a:rPr>
-              <a:t>      - uses: actions/checkout@v4</a:t>
-            </a:r>
-          </a:p>
-          <a:p>
-            <a:pPr>
-              <a:spcAft>
-                <a:spcPts val="400"/>
-              </a:spcAft>
-            </a:pPr>
-            <a:r>
-              <a:rPr sz="1400" b="0" i="0">
-                <a:solidFill>
-                  <a:srgbClr val="FFFFFF"/>
-                </a:solidFill>
-                <a:latin typeface="Calibri"/>
-              </a:rPr>
-              <a:t>      - uses: actions/setup-node@v4</a:t>
-            </a:r>
-          </a:p>
-          <a:p>
-            <a:pPr>
-              <a:spcAft>
-                <a:spcPts val="400"/>
-              </a:spcAft>
-            </a:pPr>
-            <a:r>
-              <a:rPr sz="1400" b="0" i="0">
-                <a:solidFill>
-                  <a:srgbClr val="FFFFFF"/>
-                </a:solidFill>
-                <a:latin typeface="Calibri"/>
-              </a:rPr>
-              <a:t>        with: { node-version: '20' }</a:t>
-            </a:r>
-          </a:p>
-          <a:p>
-            <a:pPr>
-              <a:spcAft>
-                <a:spcPts val="400"/>
-              </a:spcAft>
-            </a:pPr>
-            <a:r>
-              <a:rPr sz="1400" b="0" i="0">
-                <a:solidFill>
-                  <a:srgbClr val="FFFFFF"/>
-                </a:solidFill>
-                <a:latin typeface="Calibri"/>
-              </a:rPr>
-              <a:t>      - name: Construir</a:t>
-            </a:r>
-          </a:p>
-          <a:p>
-            <a:pPr>
-              <a:spcAft>
-                <a:spcPts val="400"/>
-              </a:spcAft>
-            </a:pPr>
-            <a:r>
-              <a:rPr sz="1400" b="0" i="0">
-                <a:solidFill>
-                  <a:srgbClr val="FFFFFF"/>
-                </a:solidFill>
-                <a:latin typeface="Calibri"/>
-              </a:rPr>
-              <a:t>        run: npm ci &amp;&amp; docker build -t cloudlite-api:0.1.0.</a:t>
-            </a:r>
-          </a:p>
-          <a:p>
-            <a:pPr>
-              <a:spcAft>
-                <a:spcPts val="400"/>
-              </a:spcAft>
-            </a:pPr>
-            <a:r>
-              <a:rPr sz="1400" b="0" i="0">
-                <a:solidFill>
-                  <a:srgbClr val="FFFFFF"/>
-                </a:solidFill>
-                <a:latin typeface="Calibri"/>
-              </a:rPr>
-              <a:t>      - name: Probar</a:t>
-            </a:r>
-          </a:p>
-          <a:p>
-            <a:pPr>
-              <a:spcAft>
-                <a:spcPts val="400"/>
-              </a:spcAft>
-            </a:pPr>
-            <a:r>
-              <a:rPr sz="1400" b="0" i="0">
-                <a:solidFill>
-                  <a:srgbClr val="FFFFFF"/>
-                </a:solidFill>
-                <a:latin typeface="Calibri"/>
-              </a:rPr>
-              <a:t>        run: npm test              # &lt;- si esto no puede fallar, no es CI</a:t>
-            </a:r>
-          </a:p>
-          <a:p>
-            <a:pPr>
-              <a:spcAft>
-                <a:spcPts val="400"/>
-              </a:spcAft>
-            </a:pPr>
-            <a:r>
-              <a:rPr sz="1400" b="0" i="0">
-                <a:solidFill>
-                  <a:srgbClr val="FFFFFF"/>
-                </a:solidFill>
-                <a:latin typeface="Calibri"/>
-              </a:rPr>
-              <a:t>      - name: Despliegue SIMULADO (no despliega a ningun servidor)</a:t>
-            </a:r>
-          </a:p>
-          <a:p>
-            <a:pPr>
-              <a:spcAft>
-                <a:spcPts val="400"/>
-              </a:spcAft>
-            </a:pPr>
-            <a:r>
-              <a:rPr sz="1400" b="0" i="0">
-                <a:solidFill>
-                  <a:srgbClr val="FFFFFF"/>
-                </a:solidFill>
-                <a:latin typeface="Calibri"/>
-              </a:rPr>
-              <a:t>        run: echo "Artefacto cloudlite-api:0.1.0 listo para desplegar"</a:t>
+              <a:t>    runs-on: ubuntu-latest</a:t>
             </a:r>
           </a:p>
         </p:txBody>
@@ -8846,8 +8784,8 @@
         </p:nvSpPr>
         <p:spPr>
           <a:xfrm>
-            <a:off x="457200" y="6080760"/>
-            <a:ext cx="11277295" cy="320040"/>
+            <a:off x="6233007" y="1719072"/>
+            <a:ext cx="5181447" cy="4453128"/>
           </a:xfrm>
           <a:prstGeom prst="rect">
             <a:avLst/>
@@ -8860,15 +8798,179 @@
           </a:bodyPr>
           <a:lstStyle/>
           <a:p>
-            <a:pPr algn="ctr"/>
-            <a:r>
-              <a:rPr sz="1200" b="0" i="1">
-                <a:solidFill>
-                  <a:srgbClr val="666666"/>
-                </a:solidFill>
-                <a:latin typeface="Calibri"/>
-              </a:rPr>
-              <a:t>Los tres pasos, en orden, y el ultimo rotulado como simulado. Secretos con ${{ secrets.NOMBRE }}, NUNCA en claro dentro del YAML.</a:t>
+            <a:pPr>
+              <a:spcAft>
+                <a:spcPts val="400"/>
+              </a:spcAft>
+            </a:pPr>
+            <a:r>
+              <a:rPr sz="1400" b="0" i="0">
+                <a:solidFill>
+                  <a:srgbClr val="FFFFFF"/>
+                </a:solidFill>
+                <a:latin typeface="Calibri"/>
+              </a:rPr>
+              <a:t>    steps:</a:t>
+            </a:r>
+          </a:p>
+          <a:p>
+            <a:pPr>
+              <a:spcAft>
+                <a:spcPts val="400"/>
+              </a:spcAft>
+            </a:pPr>
+            <a:r>
+              <a:rPr sz="1400" b="0" i="0">
+                <a:solidFill>
+                  <a:srgbClr val="FFFFFF"/>
+                </a:solidFill>
+                <a:latin typeface="Calibri"/>
+              </a:rPr>
+              <a:t>      - uses: actions/checkout@v4</a:t>
+            </a:r>
+          </a:p>
+          <a:p>
+            <a:pPr>
+              <a:spcAft>
+                <a:spcPts val="400"/>
+              </a:spcAft>
+            </a:pPr>
+            <a:r>
+              <a:rPr sz="1400" b="0" i="0">
+                <a:solidFill>
+                  <a:srgbClr val="FFFFFF"/>
+                </a:solidFill>
+                <a:latin typeface="Calibri"/>
+              </a:rPr>
+              <a:t/>
+            </a:r>
+          </a:p>
+          <a:p>
+            <a:pPr>
+              <a:spcAft>
+                <a:spcPts val="400"/>
+              </a:spcAft>
+            </a:pPr>
+            <a:r>
+              <a:rPr sz="1400" b="0" i="0">
+                <a:solidFill>
+                  <a:srgbClr val="FFFFFF"/>
+                </a:solidFill>
+                <a:latin typeface="Calibri"/>
+              </a:rPr>
+              <a:t>      - uses: actions/setup-node@v4</a:t>
+            </a:r>
+          </a:p>
+          <a:p>
+            <a:pPr>
+              <a:spcAft>
+                <a:spcPts val="400"/>
+              </a:spcAft>
+            </a:pPr>
+            <a:r>
+              <a:rPr sz="1400" b="0" i="0">
+                <a:solidFill>
+                  <a:srgbClr val="FFFFFF"/>
+                </a:solidFill>
+                <a:latin typeface="Calibri"/>
+              </a:rPr>
+              <a:t>        with:</a:t>
+            </a:r>
+          </a:p>
+          <a:p>
+            <a:pPr>
+              <a:spcAft>
+                <a:spcPts val="400"/>
+              </a:spcAft>
+            </a:pPr>
+            <a:r>
+              <a:rPr sz="1400" b="0" i="0">
+                <a:solidFill>
+                  <a:srgbClr val="FFFFFF"/>
+                </a:solidFill>
+                <a:latin typeface="Calibri"/>
+              </a:rPr>
+              <a:t>          node-version: '20'</a:t>
+            </a:r>
+          </a:p>
+          <a:p>
+            <a:pPr>
+              <a:spcAft>
+                <a:spcPts val="400"/>
+              </a:spcAft>
+            </a:pPr>
+            <a:r>
+              <a:rPr sz="1400" b="0" i="0">
+                <a:solidFill>
+                  <a:srgbClr val="FFFFFF"/>
+                </a:solidFill>
+                <a:latin typeface="Calibri"/>
+              </a:rPr>
+              <a:t>          cache: 'npm'</a:t>
+            </a:r>
+          </a:p>
+          <a:p>
+            <a:pPr>
+              <a:spcAft>
+                <a:spcPts val="400"/>
+              </a:spcAft>
+            </a:pPr>
+            <a:r>
+              <a:rPr sz="1400" b="0" i="0">
+                <a:solidFill>
+                  <a:srgbClr val="FFFFFF"/>
+                </a:solidFill>
+                <a:latin typeface="Calibri"/>
+              </a:rPr>
+              <a:t/>
+            </a:r>
+          </a:p>
+          <a:p>
+            <a:pPr>
+              <a:spcAft>
+                <a:spcPts val="400"/>
+              </a:spcAft>
+            </a:pPr>
+            <a:r>
+              <a:rPr sz="1400" b="0" i="0">
+                <a:solidFill>
+                  <a:srgbClr val="FFFFFF"/>
+                </a:solidFill>
+                <a:latin typeface="Calibri"/>
+              </a:rPr>
+              <a:t>      - run: npm ci</a:t>
+            </a:r>
+          </a:p>
+          <a:p>
+            <a:pPr>
+              <a:spcAft>
+                <a:spcPts val="400"/>
+              </a:spcAft>
+            </a:pPr>
+            <a:r>
+              <a:rPr sz="1400" b="0" i="0">
+                <a:solidFill>
+                  <a:srgbClr val="FFFFFF"/>
+                </a:solidFill>
+                <a:latin typeface="Calibri"/>
+              </a:rPr>
+              <a:t>      - run: npm test -- --ci</a:t>
+            </a:r>
+          </a:p>
+          <a:p>
+            <a:pPr>
+              <a:spcAft>
+                <a:spcPts val="400"/>
+              </a:spcAft>
+            </a:pPr>
+            <a:r>
+              <a:rPr sz="1400" b="0" i="0">
+                <a:solidFill>
+                  <a:srgbClr val="FFFFFF"/>
+                </a:solidFill>
+                <a:latin typeface="Calibri"/>
+              </a:rPr>
+              <a:t>      - run: docker build -t cloudlite-api:${{ github.sha }}.</a:t>
             </a:r>
           </a:p>
         </p:txBody>
@@ -8943,7 +9045,7 @@
         <p:spPr>
           <a:xfrm>
             <a:off x="0" y="0"/>
-            <a:ext cx="12191695" cy="1170432"/>
+            <a:ext cx="12191695" cy="960120"/>
           </a:xfrm>
           <a:prstGeom prst="rect">
             <a:avLst/>
@@ -8985,7 +9087,7 @@
         </p:nvSpPr>
         <p:spPr>
           <a:xfrm>
-            <a:off x="0" y="1170432"/>
+            <a:off x="0" y="960120"/>
             <a:ext cx="12191695" cy="41148"/>
           </a:xfrm>
           <a:prstGeom prst="rect">
@@ -9029,7 +9131,7 @@
         <p:spPr>
           <a:xfrm>
             <a:off x="457200" y="164592"/>
-            <a:ext cx="11277295" cy="384048"/>
+            <a:ext cx="11277295" cy="502920"/>
           </a:xfrm>
           <a:prstGeom prst="rect">
             <a:avLst/>
@@ -9049,55 +9151,21 @@
                 </a:solidFill>
                 <a:latin typeface="Calibri"/>
               </a:rPr>
-              <a:t>Herramientas de hoy</a:t>
-            </a:r>
-          </a:p>
-        </p:txBody>
-      </p:sp>
-      <p:sp>
-        <p:nvSpPr>
-          <p:cNvPr id="5" name="TextBox 4"/>
-          <p:cNvSpPr txBox="1"/>
-          <p:nvPr/>
-        </p:nvSpPr>
-        <p:spPr>
-          <a:xfrm>
-            <a:off x="457200" y="566928"/>
-            <a:ext cx="11277295" cy="411480"/>
-          </a:xfrm>
-          <a:prstGeom prst="rect">
-            <a:avLst/>
-          </a:prstGeom>
-          <a:noFill/>
-        </p:spPr>
-        <p:txBody>
-          <a:bodyPr wrap="square">
-            <a:spAutoFit/>
-          </a:bodyPr>
-          <a:lstStyle/>
-          <a:p>
-            <a:r>
-              <a:rPr sz="1400" b="0" i="0">
-                <a:solidFill>
-                  <a:srgbClr val="B8D8EE"/>
-                </a:solidFill>
-                <a:latin typeface="Calibri"/>
-              </a:rPr>
-              <a:t>Gratis · navegador o free tier · sin cuenta de pago</a:t>
-            </a:r>
-          </a:p>
-        </p:txBody>
-      </p:sp>
-      <p:sp>
-        <p:nvSpPr>
-          <p:cNvPr id="6" name="Rounded Rectangle 5"/>
+              <a:t>Los secretos en el workflow, y hasta donde llega el pipeline</a:t>
+            </a:r>
+          </a:p>
+        </p:txBody>
+      </p:sp>
+      <p:sp>
+        <p:nvSpPr>
+          <p:cNvPr id="5" name="Rounded Rectangle 4"/>
           <p:cNvSpPr/>
           <p:nvPr/>
         </p:nvSpPr>
         <p:spPr>
           <a:xfrm>
-            <a:off x="457200" y="1591056"/>
-            <a:ext cx="3624986" cy="2331720"/>
+            <a:off x="457200" y="1261872"/>
+            <a:ext cx="11277295" cy="5093208"/>
           </a:xfrm>
           <a:prstGeom prst="roundRect">
             <a:avLst>
@@ -9105,7 +9173,7 @@
             </a:avLst>
           </a:prstGeom>
           <a:solidFill>
-            <a:srgbClr val="F2F2F2"/>
+            <a:srgbClr val="1E2A38"/>
           </a:solidFill>
           <a:ln>
             <a:noFill/>
@@ -9135,14 +9203,14 @@
       </p:sp>
       <p:sp>
         <p:nvSpPr>
-          <p:cNvPr id="7" name="Rectangle 6"/>
+          <p:cNvPr id="6" name="Rectangle 5"/>
           <p:cNvSpPr/>
           <p:nvPr/>
         </p:nvSpPr>
         <p:spPr>
           <a:xfrm>
-            <a:off x="457200" y="1591056"/>
-            <a:ext cx="3624986" cy="64008"/>
+            <a:off x="457200" y="1261872"/>
+            <a:ext cx="11277295" cy="320040"/>
           </a:xfrm>
           <a:prstGeom prst="rect">
             <a:avLst/>
@@ -9178,81 +9246,14 @@
       </p:sp>
       <p:sp>
         <p:nvSpPr>
-          <p:cNvPr id="8" name="Rectangle 7"/>
-          <p:cNvSpPr/>
-          <p:nvPr/>
-        </p:nvSpPr>
-        <p:spPr>
-          <a:xfrm>
-            <a:off x="457200" y="1655064"/>
-            <a:ext cx="3624986" cy="27432"/>
-          </a:xfrm>
-          <a:prstGeom prst="rect">
-            <a:avLst/>
-          </a:prstGeom>
-          <a:solidFill>
-            <a:srgbClr val="FFD000"/>
-          </a:solidFill>
-          <a:ln>
-            <a:noFill/>
-          </a:ln>
-        </p:spPr>
-        <p:style>
-          <a:lnRef idx="1">
-            <a:schemeClr val="accent1"/>
-          </a:lnRef>
-          <a:fillRef idx="3">
-            <a:schemeClr val="accent1"/>
-          </a:fillRef>
-          <a:effectRef idx="2">
-            <a:schemeClr val="accent1"/>
-          </a:effectRef>
-          <a:fontRef idx="minor">
-            <a:schemeClr val="lt1"/>
-          </a:fontRef>
-        </p:style>
-        <p:txBody>
-          <a:bodyPr rtlCol="0" anchor="ctr"/>
-          <a:lstStyle/>
-          <a:p>
-            <a:pPr algn="ctr"/>
-          </a:p>
-        </p:txBody>
-      </p:sp>
-      <p:pic>
-        <p:nvPicPr>
-          <p:cNvPr id="9" name="Picture 8" descr="github_actions.png"/>
-          <p:cNvPicPr>
-            <a:picLocks noChangeAspect="1"/>
-          </p:cNvPicPr>
-          <p:nvPr/>
-        </p:nvPicPr>
-        <p:blipFill>
-          <a:blip r:embed="rId2"/>
-          <a:stretch>
-            <a:fillRect/>
-          </a:stretch>
-        </p:blipFill>
-        <p:spPr>
-          <a:xfrm>
-            <a:off x="1643329" y="1847087"/>
-            <a:ext cx="1252728" cy="1252728"/>
-          </a:xfrm>
-          <a:prstGeom prst="rect">
-            <a:avLst/>
-          </a:prstGeom>
-        </p:spPr>
-      </p:pic>
-      <p:sp>
-        <p:nvSpPr>
-          <p:cNvPr id="10" name="TextBox 9"/>
+          <p:cNvPr id="7" name="TextBox 6"/>
           <p:cNvSpPr txBox="1"/>
           <p:nvPr/>
         </p:nvSpPr>
         <p:spPr>
           <a:xfrm>
-            <a:off x="530352" y="3191256"/>
-            <a:ext cx="3478682" cy="621792"/>
+            <a:off x="685800" y="1307592"/>
+            <a:ext cx="10820095" cy="256032"/>
           </a:xfrm>
           <a:prstGeom prst="rect">
             <a:avLst/>
@@ -9260,203 +9261,31 @@
           <a:noFill/>
         </p:spPr>
         <p:txBody>
-          <a:bodyPr wrap="square" anchor="t"/>
-          <a:lstStyle/>
-          <a:p>
-            <a:pPr algn="ctr"/>
-            <a:r>
-              <a:rPr sz="1300" b="1" i="0">
-                <a:solidFill>
-                  <a:srgbClr val="095292"/>
-                </a:solidFill>
-                <a:latin typeface="Calibri"/>
-              </a:rPr>
-              <a:t>GitHub Actions</a:t>
-            </a:r>
-          </a:p>
-          <a:p>
-            <a:pPr algn="ctr">
-              <a:spcBef>
-                <a:spcPts val="200"/>
-              </a:spcBef>
-            </a:pPr>
-            <a:r>
-              <a:rPr sz="1000" b="0" i="0">
-                <a:solidFill>
-                  <a:srgbClr val="666666"/>
-                </a:solidFill>
-                <a:latin typeface="Calibri"/>
-              </a:rPr>
-              <a:t>CI del PI</a:t>
-            </a:r>
-          </a:p>
-        </p:txBody>
-      </p:sp>
-      <p:sp>
-        <p:nvSpPr>
-          <p:cNvPr id="11" name="Rounded Rectangle 10"/>
-          <p:cNvSpPr/>
-          <p:nvPr/>
-        </p:nvSpPr>
-        <p:spPr>
-          <a:xfrm>
-            <a:off x="4283354" y="1591056"/>
-            <a:ext cx="3624986" cy="2331720"/>
-          </a:xfrm>
-          <a:prstGeom prst="roundRect">
-            <a:avLst>
-              <a:gd name="adj" fmla="val 12000"/>
-            </a:avLst>
-          </a:prstGeom>
-          <a:solidFill>
-            <a:srgbClr val="F2F2F2"/>
-          </a:solidFill>
-          <a:ln>
-            <a:noFill/>
-          </a:ln>
-        </p:spPr>
-        <p:style>
-          <a:lnRef idx="1">
-            <a:schemeClr val="accent1"/>
-          </a:lnRef>
-          <a:fillRef idx="3">
-            <a:schemeClr val="accent1"/>
-          </a:fillRef>
-          <a:effectRef idx="2">
-            <a:schemeClr val="accent1"/>
-          </a:effectRef>
-          <a:fontRef idx="minor">
-            <a:schemeClr val="lt1"/>
-          </a:fontRef>
-        </p:style>
-        <p:txBody>
-          <a:bodyPr rtlCol="0" anchor="ctr"/>
-          <a:lstStyle/>
-          <a:p>
-            <a:pPr algn="ctr"/>
-          </a:p>
-        </p:txBody>
-      </p:sp>
-      <p:sp>
-        <p:nvSpPr>
-          <p:cNvPr id="12" name="Rectangle 11"/>
-          <p:cNvSpPr/>
-          <p:nvPr/>
-        </p:nvSpPr>
-        <p:spPr>
-          <a:xfrm>
-            <a:off x="4283354" y="1591056"/>
-            <a:ext cx="3624986" cy="64008"/>
-          </a:xfrm>
-          <a:prstGeom prst="rect">
-            <a:avLst/>
-          </a:prstGeom>
-          <a:solidFill>
-            <a:srgbClr val="095292"/>
-          </a:solidFill>
-          <a:ln>
-            <a:noFill/>
-          </a:ln>
-        </p:spPr>
-        <p:style>
-          <a:lnRef idx="1">
-            <a:schemeClr val="accent1"/>
-          </a:lnRef>
-          <a:fillRef idx="3">
-            <a:schemeClr val="accent1"/>
-          </a:fillRef>
-          <a:effectRef idx="2">
-            <a:schemeClr val="accent1"/>
-          </a:effectRef>
-          <a:fontRef idx="minor">
-            <a:schemeClr val="lt1"/>
-          </a:fontRef>
-        </p:style>
-        <p:txBody>
-          <a:bodyPr rtlCol="0" anchor="ctr"/>
-          <a:lstStyle/>
-          <a:p>
-            <a:pPr algn="ctr"/>
-          </a:p>
-        </p:txBody>
-      </p:sp>
-      <p:sp>
-        <p:nvSpPr>
-          <p:cNvPr id="13" name="Rectangle 12"/>
-          <p:cNvSpPr/>
-          <p:nvPr/>
-        </p:nvSpPr>
-        <p:spPr>
-          <a:xfrm>
-            <a:off x="4283354" y="1655064"/>
-            <a:ext cx="3624986" cy="27432"/>
-          </a:xfrm>
-          <a:prstGeom prst="rect">
-            <a:avLst/>
-          </a:prstGeom>
-          <a:solidFill>
-            <a:srgbClr val="FFD000"/>
-          </a:solidFill>
-          <a:ln>
-            <a:noFill/>
-          </a:ln>
-        </p:spPr>
-        <p:style>
-          <a:lnRef idx="1">
-            <a:schemeClr val="accent1"/>
-          </a:lnRef>
-          <a:fillRef idx="3">
-            <a:schemeClr val="accent1"/>
-          </a:fillRef>
-          <a:effectRef idx="2">
-            <a:schemeClr val="accent1"/>
-          </a:effectRef>
-          <a:fontRef idx="minor">
-            <a:schemeClr val="lt1"/>
-          </a:fontRef>
-        </p:style>
-        <p:txBody>
-          <a:bodyPr rtlCol="0" anchor="ctr"/>
-          <a:lstStyle/>
-          <a:p>
-            <a:pPr algn="ctr"/>
-          </a:p>
-        </p:txBody>
-      </p:sp>
-      <p:pic>
-        <p:nvPicPr>
-          <p:cNvPr id="14" name="Picture 13" descr="google_docs.png"/>
-          <p:cNvPicPr>
-            <a:picLocks noChangeAspect="1"/>
-          </p:cNvPicPr>
-          <p:nvPr/>
-        </p:nvPicPr>
-        <p:blipFill>
-          <a:blip r:embed="rId3"/>
-          <a:stretch>
-            <a:fillRect/>
-          </a:stretch>
-        </p:blipFill>
-        <p:spPr>
-          <a:xfrm>
-            <a:off x="5469483" y="1847087"/>
-            <a:ext cx="1252728" cy="1252728"/>
-          </a:xfrm>
-          <a:prstGeom prst="rect">
-            <a:avLst/>
-          </a:prstGeom>
-        </p:spPr>
-      </p:pic>
-      <p:sp>
-        <p:nvSpPr>
-          <p:cNvPr id="15" name="TextBox 14"/>
+          <a:bodyPr wrap="square" anchor="ctr"/>
+          <a:lstStyle/>
+          <a:p>
+            <a:r>
+              <a:rPr sz="1000" b="1" i="0">
+                <a:solidFill>
+                  <a:srgbClr val="269CCB"/>
+                </a:solidFill>
+                <a:latin typeface="Calibri"/>
+              </a:rPr>
+              <a:t>● ● ●</a:t>
+            </a:r>
+          </a:p>
+        </p:txBody>
+      </p:sp>
+      <p:sp>
+        <p:nvSpPr>
+          <p:cNvPr id="8" name="TextBox 7"/>
           <p:cNvSpPr txBox="1"/>
           <p:nvPr/>
         </p:nvSpPr>
         <p:spPr>
           <a:xfrm>
-            <a:off x="4356506" y="3191256"/>
-            <a:ext cx="3478682" cy="621792"/>
+            <a:off x="777240" y="1719072"/>
+            <a:ext cx="10637215" cy="4453128"/>
           </a:xfrm>
           <a:prstGeom prst="rect">
             <a:avLst/>
@@ -9464,245 +9293,175 @@
           <a:noFill/>
         </p:spPr>
         <p:txBody>
-          <a:bodyPr wrap="square" anchor="t"/>
-          <a:lstStyle/>
-          <a:p>
-            <a:pPr algn="ctr"/>
-            <a:r>
-              <a:rPr sz="1300" b="1" i="0">
-                <a:solidFill>
-                  <a:srgbClr val="095292"/>
-                </a:solidFill>
-                <a:latin typeface="Calibri"/>
-              </a:rPr>
-              <a:t>Google Docs</a:t>
-            </a:r>
-          </a:p>
-          <a:p>
-            <a:pPr algn="ctr">
-              <a:spcBef>
-                <a:spcPts val="200"/>
-              </a:spcBef>
-            </a:pPr>
-            <a:r>
-              <a:rPr sz="1000" b="0" i="0">
-                <a:solidFill>
-                  <a:srgbClr val="666666"/>
-                </a:solidFill>
-                <a:latin typeface="Calibri"/>
-              </a:rPr>
-              <a:t>Informe PI</a:t>
-            </a:r>
-          </a:p>
-        </p:txBody>
-      </p:sp>
-      <p:sp>
-        <p:nvSpPr>
-          <p:cNvPr id="16" name="Rounded Rectangle 15"/>
-          <p:cNvSpPr/>
-          <p:nvPr/>
-        </p:nvSpPr>
-        <p:spPr>
-          <a:xfrm>
-            <a:off x="8109508" y="1591056"/>
-            <a:ext cx="3624986" cy="2331720"/>
-          </a:xfrm>
-          <a:prstGeom prst="roundRect">
-            <a:avLst>
-              <a:gd name="adj" fmla="val 12000"/>
-            </a:avLst>
-          </a:prstGeom>
-          <a:solidFill>
-            <a:srgbClr val="F2F2F2"/>
-          </a:solidFill>
-          <a:ln>
-            <a:noFill/>
-          </a:ln>
-        </p:spPr>
-        <p:style>
-          <a:lnRef idx="1">
-            <a:schemeClr val="accent1"/>
-          </a:lnRef>
-          <a:fillRef idx="3">
-            <a:schemeClr val="accent1"/>
-          </a:fillRef>
-          <a:effectRef idx="2">
-            <a:schemeClr val="accent1"/>
-          </a:effectRef>
-          <a:fontRef idx="minor">
-            <a:schemeClr val="lt1"/>
-          </a:fontRef>
-        </p:style>
-        <p:txBody>
-          <a:bodyPr rtlCol="0" anchor="ctr"/>
-          <a:lstStyle/>
-          <a:p>
-            <a:pPr algn="ctr"/>
-          </a:p>
-        </p:txBody>
-      </p:sp>
-      <p:sp>
-        <p:nvSpPr>
-          <p:cNvPr id="17" name="Rectangle 16"/>
-          <p:cNvSpPr/>
-          <p:nvPr/>
-        </p:nvSpPr>
-        <p:spPr>
-          <a:xfrm>
-            <a:off x="8109508" y="1591056"/>
-            <a:ext cx="3624986" cy="64008"/>
-          </a:xfrm>
-          <a:prstGeom prst="rect">
-            <a:avLst/>
-          </a:prstGeom>
-          <a:solidFill>
-            <a:srgbClr val="095292"/>
-          </a:solidFill>
-          <a:ln>
-            <a:noFill/>
-          </a:ln>
-        </p:spPr>
-        <p:style>
-          <a:lnRef idx="1">
-            <a:schemeClr val="accent1"/>
-          </a:lnRef>
-          <a:fillRef idx="3">
-            <a:schemeClr val="accent1"/>
-          </a:fillRef>
-          <a:effectRef idx="2">
-            <a:schemeClr val="accent1"/>
-          </a:effectRef>
-          <a:fontRef idx="minor">
-            <a:schemeClr val="lt1"/>
-          </a:fontRef>
-        </p:style>
-        <p:txBody>
-          <a:bodyPr rtlCol="0" anchor="ctr"/>
-          <a:lstStyle/>
-          <a:p>
-            <a:pPr algn="ctr"/>
-          </a:p>
-        </p:txBody>
-      </p:sp>
-      <p:sp>
-        <p:nvSpPr>
-          <p:cNvPr id="18" name="Rectangle 17"/>
-          <p:cNvSpPr/>
-          <p:nvPr/>
-        </p:nvSpPr>
-        <p:spPr>
-          <a:xfrm>
-            <a:off x="8109508" y="1655064"/>
-            <a:ext cx="3624986" cy="27432"/>
-          </a:xfrm>
-          <a:prstGeom prst="rect">
-            <a:avLst/>
-          </a:prstGeom>
-          <a:solidFill>
-            <a:srgbClr val="FFD000"/>
-          </a:solidFill>
-          <a:ln>
-            <a:noFill/>
-          </a:ln>
-        </p:spPr>
-        <p:style>
-          <a:lnRef idx="1">
-            <a:schemeClr val="accent1"/>
-          </a:lnRef>
-          <a:fillRef idx="3">
-            <a:schemeClr val="accent1"/>
-          </a:fillRef>
-          <a:effectRef idx="2">
-            <a:schemeClr val="accent1"/>
-          </a:effectRef>
-          <a:fontRef idx="minor">
-            <a:schemeClr val="lt1"/>
-          </a:fontRef>
-        </p:style>
-        <p:txBody>
-          <a:bodyPr rtlCol="0" anchor="ctr"/>
-          <a:lstStyle/>
-          <a:p>
-            <a:pPr algn="ctr"/>
-          </a:p>
-        </p:txBody>
-      </p:sp>
-      <p:pic>
-        <p:nvPicPr>
-          <p:cNvPr id="19" name="Picture 18" descr="examlab.png"/>
-          <p:cNvPicPr>
-            <a:picLocks noChangeAspect="1"/>
-          </p:cNvPicPr>
-          <p:nvPr/>
-        </p:nvPicPr>
-        <p:blipFill>
-          <a:blip r:embed="rId4"/>
-          <a:stretch>
-            <a:fillRect/>
-          </a:stretch>
-        </p:blipFill>
-        <p:spPr>
-          <a:xfrm>
-            <a:off x="9295638" y="1847087"/>
-            <a:ext cx="1252728" cy="1252728"/>
-          </a:xfrm>
-          <a:prstGeom prst="rect">
-            <a:avLst/>
-          </a:prstGeom>
-        </p:spPr>
-      </p:pic>
-      <p:sp>
-        <p:nvSpPr>
-          <p:cNvPr id="20" name="TextBox 19"/>
-          <p:cNvSpPr txBox="1"/>
-          <p:nvPr/>
-        </p:nvSpPr>
-        <p:spPr>
-          <a:xfrm>
-            <a:off x="8182660" y="3191256"/>
-            <a:ext cx="3478682" cy="621792"/>
-          </a:xfrm>
-          <a:prstGeom prst="rect">
-            <a:avLst/>
-          </a:prstGeom>
-          <a:noFill/>
-        </p:spPr>
-        <p:txBody>
-          <a:bodyPr wrap="square" anchor="t"/>
-          <a:lstStyle/>
-          <a:p>
-            <a:pPr algn="ctr"/>
-            <a:r>
-              <a:rPr sz="1300" b="1" i="0">
-                <a:solidFill>
-                  <a:srgbClr val="095292"/>
-                </a:solidFill>
-                <a:latin typeface="Calibri"/>
-              </a:rPr>
-              <a:t>la plataforma del curso</a:t>
-            </a:r>
-          </a:p>
-          <a:p>
-            <a:pPr algn="ctr">
-              <a:spcBef>
-                <a:spcPts val="200"/>
-              </a:spcBef>
-            </a:pPr>
-            <a:r>
-              <a:rPr sz="1000" b="0" i="0">
-                <a:solidFill>
-                  <a:srgbClr val="666666"/>
-                </a:solidFill>
-                <a:latin typeface="Calibri"/>
-              </a:rPr>
-              <a:t>Donde se entrega</a:t>
-            </a:r>
-          </a:p>
-        </p:txBody>
-      </p:sp>
-      <p:sp>
-        <p:nvSpPr>
-          <p:cNvPr id="21" name="TextBox 20"/>
+          <a:bodyPr wrap="square">
+            <a:spAutoFit/>
+          </a:bodyPr>
+          <a:lstStyle/>
+          <a:p>
+            <a:pPr>
+              <a:spcAft>
+                <a:spcPts val="400"/>
+              </a:spcAft>
+            </a:pPr>
+            <a:r>
+              <a:rPr sz="1400" b="0" i="0">
+                <a:solidFill>
+                  <a:srgbClr val="FFFFFF"/>
+                </a:solidFill>
+                <a:latin typeface="Calibri"/>
+              </a:rPr>
+              <a:t>      - name: Desplegar</a:t>
+            </a:r>
+          </a:p>
+          <a:p>
+            <a:pPr>
+              <a:spcAft>
+                <a:spcPts val="400"/>
+              </a:spcAft>
+            </a:pPr>
+            <a:r>
+              <a:rPr sz="1400" b="0" i="0">
+                <a:solidFill>
+                  <a:srgbClr val="FFFFFF"/>
+                </a:solidFill>
+                <a:latin typeface="Calibri"/>
+              </a:rPr>
+              <a:t>        env:</a:t>
+            </a:r>
+          </a:p>
+          <a:p>
+            <a:pPr>
+              <a:spcAft>
+                <a:spcPts val="400"/>
+              </a:spcAft>
+            </a:pPr>
+            <a:r>
+              <a:rPr sz="1400" b="0" i="0">
+                <a:solidFill>
+                  <a:srgbClr val="FFFFFF"/>
+                </a:solidFill>
+                <a:latin typeface="Calibri"/>
+              </a:rPr>
+              <a:t>          TOKEN: ${{ secrets.DEPLOY_TOKEN }}   # del almacen, nunca en claro</a:t>
+            </a:r>
+          </a:p>
+          <a:p>
+            <a:pPr>
+              <a:spcAft>
+                <a:spcPts val="400"/>
+              </a:spcAft>
+            </a:pPr>
+            <a:r>
+              <a:rPr sz="1400" b="0" i="0">
+                <a:solidFill>
+                  <a:srgbClr val="FFFFFF"/>
+                </a:solidFill>
+                <a:latin typeface="Calibri"/>
+              </a:rPr>
+              <a:t>        run: ./deploy.sh</a:t>
+            </a:r>
+          </a:p>
+          <a:p>
+            <a:pPr>
+              <a:spcAft>
+                <a:spcPts val="400"/>
+              </a:spcAft>
+            </a:pPr>
+            <a:r>
+              <a:rPr sz="1400" b="0" i="0">
+                <a:solidFill>
+                  <a:srgbClr val="FFFFFF"/>
+                </a:solidFill>
+                <a:latin typeface="Calibri"/>
+              </a:rPr>
+              <a:t/>
+            </a:r>
+          </a:p>
+          <a:p>
+            <a:pPr>
+              <a:spcAft>
+                <a:spcPts val="400"/>
+              </a:spcAft>
+            </a:pPr>
+            <a:r>
+              <a:rPr sz="1400" b="0" i="0">
+                <a:solidFill>
+                  <a:srgbClr val="FFFFFF"/>
+                </a:solidFill>
+                <a:latin typeface="Calibri"/>
+              </a:rPr>
+              <a:t># CI  = construir y probar en cada push. Esto SI es realista aqui.</a:t>
+            </a:r>
+          </a:p>
+          <a:p>
+            <a:pPr>
+              <a:spcAft>
+                <a:spcPts val="400"/>
+              </a:spcAft>
+            </a:pPr>
+            <a:r>
+              <a:rPr sz="1400" b="0" i="0">
+                <a:solidFill>
+                  <a:srgbClr val="FFFFFF"/>
+                </a:solidFill>
+                <a:latin typeface="Calibri"/>
+              </a:rPr>
+              <a:t># CD  = desplegar automaticamente a produccion. Necesita un proveedor</a:t>
+            </a:r>
+          </a:p>
+          <a:p>
+            <a:pPr>
+              <a:spcAft>
+                <a:spcPts val="400"/>
+              </a:spcAft>
+            </a:pPr>
+            <a:r>
+              <a:rPr sz="1400" b="0" i="0">
+                <a:solidFill>
+                  <a:srgbClr val="FFFFFF"/>
+                </a:solidFill>
+                <a:latin typeface="Calibri"/>
+              </a:rPr>
+              <a:t>#       con credenciales, asi que en el PI se declara como SIMULADO</a:t>
+            </a:r>
+          </a:p>
+          <a:p>
+            <a:pPr>
+              <a:spcAft>
+                <a:spcPts val="400"/>
+              </a:spcAft>
+            </a:pPr>
+            <a:r>
+              <a:rPr sz="1400" b="0" i="0">
+                <a:solidFill>
+                  <a:srgbClr val="FFFFFF"/>
+                </a:solidFill>
+                <a:latin typeface="Calibri"/>
+              </a:rPr>
+              <a:t>#       y el ultimo paso se rotula como tal. Decirlo vale puntos;</a:t>
+            </a:r>
+          </a:p>
+          <a:p>
+            <a:pPr>
+              <a:spcAft>
+                <a:spcPts val="400"/>
+              </a:spcAft>
+            </a:pPr>
+            <a:r>
+              <a:rPr sz="1400" b="0" i="0">
+                <a:solidFill>
+                  <a:srgbClr val="FFFFFF"/>
+                </a:solidFill>
+                <a:latin typeface="Calibri"/>
+              </a:rPr>
+              <a:t>#       fingirlo los quita.</a:t>
+            </a:r>
+          </a:p>
+        </p:txBody>
+      </p:sp>
+      <p:sp>
+        <p:nvSpPr>
+          <p:cNvPr id="9" name="TextBox 8"/>
           <p:cNvSpPr txBox="1"/>
           <p:nvPr/>
         </p:nvSpPr>
@@ -9876,21 +9635,141 @@
                 </a:solidFill>
                 <a:latin typeface="Calibri"/>
               </a:rPr>
-              <a:t>PI CloudLite — entregable de hoy</a:t>
-            </a:r>
-          </a:p>
-        </p:txBody>
-      </p:sp>
-      <p:sp>
-        <p:nvSpPr>
-          <p:cNvPr id="5" name="TextBox 4"/>
+              <a:t>.github/workflows/ci.yml — CI real, no un echo</a:t>
+            </a:r>
+          </a:p>
+        </p:txBody>
+      </p:sp>
+      <p:sp>
+        <p:nvSpPr>
+          <p:cNvPr id="5" name="Rounded Rectangle 4"/>
+          <p:cNvSpPr/>
+          <p:nvPr/>
+        </p:nvSpPr>
+        <p:spPr>
+          <a:xfrm>
+            <a:off x="457200" y="1261872"/>
+            <a:ext cx="11277295" cy="4773168"/>
+          </a:xfrm>
+          <a:prstGeom prst="roundRect">
+            <a:avLst>
+              <a:gd name="adj" fmla="val 12000"/>
+            </a:avLst>
+          </a:prstGeom>
+          <a:solidFill>
+            <a:srgbClr val="1E2A38"/>
+          </a:solidFill>
+          <a:ln>
+            <a:noFill/>
+          </a:ln>
+        </p:spPr>
+        <p:style>
+          <a:lnRef idx="1">
+            <a:schemeClr val="accent1"/>
+          </a:lnRef>
+          <a:fillRef idx="3">
+            <a:schemeClr val="accent1"/>
+          </a:fillRef>
+          <a:effectRef idx="2">
+            <a:schemeClr val="accent1"/>
+          </a:effectRef>
+          <a:fontRef idx="minor">
+            <a:schemeClr val="lt1"/>
+          </a:fontRef>
+        </p:style>
+        <p:txBody>
+          <a:bodyPr rtlCol="0" anchor="ctr"/>
+          <a:lstStyle/>
+          <a:p>
+            <a:pPr algn="ctr"/>
+          </a:p>
+        </p:txBody>
+      </p:sp>
+      <p:sp>
+        <p:nvSpPr>
+          <p:cNvPr id="6" name="Rectangle 5"/>
+          <p:cNvSpPr/>
+          <p:nvPr/>
+        </p:nvSpPr>
+        <p:spPr>
+          <a:xfrm>
+            <a:off x="457200" y="1261872"/>
+            <a:ext cx="11277295" cy="320040"/>
+          </a:xfrm>
+          <a:prstGeom prst="rect">
+            <a:avLst/>
+          </a:prstGeom>
+          <a:solidFill>
+            <a:srgbClr val="095292"/>
+          </a:solidFill>
+          <a:ln>
+            <a:noFill/>
+          </a:ln>
+        </p:spPr>
+        <p:style>
+          <a:lnRef idx="1">
+            <a:schemeClr val="accent1"/>
+          </a:lnRef>
+          <a:fillRef idx="3">
+            <a:schemeClr val="accent1"/>
+          </a:fillRef>
+          <a:effectRef idx="2">
+            <a:schemeClr val="accent1"/>
+          </a:effectRef>
+          <a:fontRef idx="minor">
+            <a:schemeClr val="lt1"/>
+          </a:fontRef>
+        </p:style>
+        <p:txBody>
+          <a:bodyPr rtlCol="0" anchor="ctr"/>
+          <a:lstStyle/>
+          <a:p>
+            <a:pPr algn="ctr"/>
+          </a:p>
+        </p:txBody>
+      </p:sp>
+      <p:sp>
+        <p:nvSpPr>
+          <p:cNvPr id="7" name="TextBox 6"/>
           <p:cNvSpPr txBox="1"/>
           <p:nvPr/>
         </p:nvSpPr>
         <p:spPr>
           <a:xfrm>
-            <a:off x="457200" y="1170432"/>
-            <a:ext cx="11277295" cy="5230368"/>
+            <a:off x="685800" y="1307592"/>
+            <a:ext cx="10820095" cy="256032"/>
+          </a:xfrm>
+          <a:prstGeom prst="rect">
+            <a:avLst/>
+          </a:prstGeom>
+          <a:noFill/>
+        </p:spPr>
+        <p:txBody>
+          <a:bodyPr wrap="square" anchor="ctr"/>
+          <a:lstStyle/>
+          <a:p>
+            <a:r>
+              <a:rPr sz="1000" b="1" i="0">
+                <a:solidFill>
+                  <a:srgbClr val="269CCB"/>
+                </a:solidFill>
+                <a:latin typeface="Calibri"/>
+              </a:rPr>
+              <a:t>● ● ●</a:t>
+            </a:r>
+          </a:p>
+        </p:txBody>
+      </p:sp>
+      <p:sp>
+        <p:nvSpPr>
+          <p:cNvPr id="8" name="TextBox 7"/>
+          <p:cNvSpPr txBox="1"/>
+          <p:nvPr/>
+        </p:nvSpPr>
+        <p:spPr>
+          <a:xfrm>
+            <a:off x="777240" y="1719072"/>
+            <a:ext cx="10637215" cy="4133087"/>
           </a:xfrm>
           <a:prstGeom prst="rect">
             <a:avLst/>
@@ -9905,117 +9784,283 @@
           <a:p>
             <a:pPr>
               <a:spcAft>
-                <a:spcPts val="800"/>
-              </a:spcAft>
-            </a:pPr>
-            <a:r>
-              <a:rPr sz="2000" b="0" i="0">
-                <a:solidFill>
-                  <a:srgbClr val="333333"/>
-                </a:solidFill>
-                <a:latin typeface="Calibri"/>
-              </a:rPr>
-              <a:t>–   </a:t>
-            </a:r>
-            <a:r>
-              <a:rPr sz="2000" b="1" i="0">
-                <a:solidFill>
-                  <a:srgbClr val="333333"/>
-                </a:solidFill>
-                <a:latin typeface="Calibri"/>
-              </a:rPr>
-              <a:t>Entregable:</a:t>
-            </a:r>
-            <a:r>
-              <a:rPr sz="2000" b="0" i="0">
-                <a:solidFill>
-                  <a:srgbClr val="333333"/>
-                </a:solidFill>
-                <a:latin typeface="Calibri"/>
-              </a:rPr>
-              <a:t> .github/workflows/ci.yml + sección Monitoreo/CI del informe</a:t>
-            </a:r>
-          </a:p>
-          <a:p>
-            <a:pPr>
-              <a:spcAft>
-                <a:spcPts val="800"/>
-              </a:spcAft>
-            </a:pPr>
-            <a:r>
-              <a:rPr sz="2000" b="0" i="0">
-                <a:solidFill>
-                  <a:srgbClr val="333333"/>
-                </a:solidFill>
-                <a:latin typeface="Calibri"/>
-              </a:rPr>
-              <a:t>–   Herramienta: </a:t>
-            </a:r>
-            <a:r>
-              <a:rPr sz="2000" b="1" i="0">
-                <a:solidFill>
-                  <a:srgbClr val="333333"/>
-                </a:solidFill>
-                <a:latin typeface="Calibri"/>
-              </a:rPr>
-              <a:t>GitHub Actions · Google Docs</a:t>
-            </a:r>
-          </a:p>
-          <a:p>
-            <a:pPr>
-              <a:spcAft>
-                <a:spcPts val="800"/>
-              </a:spcAft>
-            </a:pPr>
-            <a:r>
-              <a:rPr sz="2000" b="0" i="0">
-                <a:solidFill>
-                  <a:srgbClr val="333333"/>
-                </a:solidFill>
-                <a:latin typeface="Calibri"/>
-              </a:rPr>
-              <a:t>–   Todo lo que construyan hoy entra al </a:t>
-            </a:r>
-            <a:r>
-              <a:rPr sz="2000" b="1" i="0">
-                <a:solidFill>
-                  <a:srgbClr val="333333"/>
-                </a:solidFill>
-                <a:latin typeface="Calibri"/>
-              </a:rPr>
-              <a:t>informe/repo del PI</a:t>
-            </a:r>
-            <a:r>
-              <a:rPr sz="2000" b="0" i="0">
-                <a:solidFill>
-                  <a:srgbClr val="333333"/>
-                </a:solidFill>
-                <a:latin typeface="Calibri"/>
-              </a:rPr>
-              <a:t> (no es lab suelto).</a:t>
-            </a:r>
-          </a:p>
-          <a:p>
-            <a:pPr>
-              <a:spcAft>
-                <a:spcPts val="800"/>
-              </a:spcAft>
-            </a:pPr>
-            <a:r>
-              <a:rPr sz="2000" b="0" i="0">
-                <a:solidFill>
-                  <a:srgbClr val="333333"/>
-                </a:solidFill>
-                <a:latin typeface="Calibri"/>
-              </a:rPr>
-              <a:t>–   Individual por defecto · el docente puede autorizar equipos de 2–3; la entrega en la plataforma del curso siempre es individual.</a:t>
-            </a:r>
-          </a:p>
-        </p:txBody>
-      </p:sp>
-      <p:sp>
-        <p:nvSpPr>
-          <p:cNvPr id="6" name="TextBox 5"/>
+                <a:spcPts val="400"/>
+              </a:spcAft>
+            </a:pPr>
+            <a:r>
+              <a:rPr sz="1400" b="0" i="0">
+                <a:solidFill>
+                  <a:srgbClr val="FFFFFF"/>
+                </a:solidFill>
+                <a:latin typeface="Calibri"/>
+              </a:rPr>
+              <a:t>name: CI</a:t>
+            </a:r>
+          </a:p>
+          <a:p>
+            <a:pPr>
+              <a:spcAft>
+                <a:spcPts val="400"/>
+              </a:spcAft>
+            </a:pPr>
+            <a:r>
+              <a:rPr sz="1400" b="0" i="0">
+                <a:solidFill>
+                  <a:srgbClr val="FFFFFF"/>
+                </a:solidFill>
+                <a:latin typeface="Calibri"/>
+              </a:rPr>
+              <a:t>on: [push, pull_request]          # 1. disparadores</a:t>
+            </a:r>
+          </a:p>
+          <a:p>
+            <a:pPr>
+              <a:spcAft>
+                <a:spcPts val="400"/>
+              </a:spcAft>
+            </a:pPr>
+            <a:r>
+              <a:rPr sz="1400" b="0" i="0">
+                <a:solidFill>
+                  <a:srgbClr val="FFFFFF"/>
+                </a:solidFill>
+                <a:latin typeface="Calibri"/>
+              </a:rPr>
+              <a:t>jobs:</a:t>
+            </a:r>
+          </a:p>
+          <a:p>
+            <a:pPr>
+              <a:spcAft>
+                <a:spcPts val="400"/>
+              </a:spcAft>
+            </a:pPr>
+            <a:r>
+              <a:rPr sz="1400" b="0" i="0">
+                <a:solidFill>
+                  <a:srgbClr val="FFFFFF"/>
+                </a:solidFill>
+                <a:latin typeface="Calibri"/>
+              </a:rPr>
+              <a:t>  build:</a:t>
+            </a:r>
+          </a:p>
+          <a:p>
+            <a:pPr>
+              <a:spcAft>
+                <a:spcPts val="400"/>
+              </a:spcAft>
+            </a:pPr>
+            <a:r>
+              <a:rPr sz="1400" b="0" i="0">
+                <a:solidFill>
+                  <a:srgbClr val="FFFFFF"/>
+                </a:solidFill>
+                <a:latin typeface="Calibri"/>
+              </a:rPr>
+              <a:t>    runs-on: ubuntu-latest        # 2. entorno de ejecucion</a:t>
+            </a:r>
+          </a:p>
+          <a:p>
+            <a:pPr>
+              <a:spcAft>
+                <a:spcPts val="400"/>
+              </a:spcAft>
+            </a:pPr>
+            <a:r>
+              <a:rPr sz="1400" b="0" i="0">
+                <a:solidFill>
+                  <a:srgbClr val="FFFFFF"/>
+                </a:solidFill>
+                <a:latin typeface="Calibri"/>
+              </a:rPr>
+              <a:t>    steps:</a:t>
+            </a:r>
+          </a:p>
+          <a:p>
+            <a:pPr>
+              <a:spcAft>
+                <a:spcPts val="400"/>
+              </a:spcAft>
+            </a:pPr>
+            <a:r>
+              <a:rPr sz="1400" b="0" i="0">
+                <a:solidFill>
+                  <a:srgbClr val="FFFFFF"/>
+                </a:solidFill>
+                <a:latin typeface="Calibri"/>
+              </a:rPr>
+              <a:t>      - uses: actions/checkout@v4</a:t>
+            </a:r>
+          </a:p>
+          <a:p>
+            <a:pPr>
+              <a:spcAft>
+                <a:spcPts val="400"/>
+              </a:spcAft>
+            </a:pPr>
+            <a:r>
+              <a:rPr sz="1400" b="0" i="0">
+                <a:solidFill>
+                  <a:srgbClr val="FFFFFF"/>
+                </a:solidFill>
+                <a:latin typeface="Calibri"/>
+              </a:rPr>
+              <a:t>      - uses: actions/setup-node@v4</a:t>
+            </a:r>
+          </a:p>
+          <a:p>
+            <a:pPr>
+              <a:spcAft>
+                <a:spcPts val="400"/>
+              </a:spcAft>
+            </a:pPr>
+            <a:r>
+              <a:rPr sz="1400" b="0" i="0">
+                <a:solidFill>
+                  <a:srgbClr val="FFFFFF"/>
+                </a:solidFill>
+                <a:latin typeface="Calibri"/>
+              </a:rPr>
+              <a:t>        with: { node-version: '20' }</a:t>
+            </a:r>
+          </a:p>
+          <a:p>
+            <a:pPr>
+              <a:spcAft>
+                <a:spcPts val="400"/>
+              </a:spcAft>
+            </a:pPr>
+            <a:r>
+              <a:rPr sz="1400" b="0" i="0">
+                <a:solidFill>
+                  <a:srgbClr val="FFFFFF"/>
+                </a:solidFill>
+                <a:latin typeface="Calibri"/>
+              </a:rPr>
+              <a:t>      - name: Construir</a:t>
+            </a:r>
+          </a:p>
+          <a:p>
+            <a:pPr>
+              <a:spcAft>
+                <a:spcPts val="400"/>
+              </a:spcAft>
+            </a:pPr>
+            <a:r>
+              <a:rPr sz="1400" b="0" i="0">
+                <a:solidFill>
+                  <a:srgbClr val="FFFFFF"/>
+                </a:solidFill>
+                <a:latin typeface="Calibri"/>
+              </a:rPr>
+              <a:t>        run: npm ci &amp;&amp; docker build -t cloudlite-api:0.1.0.</a:t>
+            </a:r>
+          </a:p>
+          <a:p>
+            <a:pPr>
+              <a:spcAft>
+                <a:spcPts val="400"/>
+              </a:spcAft>
+            </a:pPr>
+            <a:r>
+              <a:rPr sz="1400" b="0" i="0">
+                <a:solidFill>
+                  <a:srgbClr val="FFFFFF"/>
+                </a:solidFill>
+                <a:latin typeface="Calibri"/>
+              </a:rPr>
+              <a:t>      - name: Probar</a:t>
+            </a:r>
+          </a:p>
+          <a:p>
+            <a:pPr>
+              <a:spcAft>
+                <a:spcPts val="400"/>
+              </a:spcAft>
+            </a:pPr>
+            <a:r>
+              <a:rPr sz="1400" b="0" i="0">
+                <a:solidFill>
+                  <a:srgbClr val="FFFFFF"/>
+                </a:solidFill>
+                <a:latin typeface="Calibri"/>
+              </a:rPr>
+              <a:t>        run: npm test              # &lt;- si esto no puede fallar, no es CI</a:t>
+            </a:r>
+          </a:p>
+          <a:p>
+            <a:pPr>
+              <a:spcAft>
+                <a:spcPts val="400"/>
+              </a:spcAft>
+            </a:pPr>
+            <a:r>
+              <a:rPr sz="1400" b="0" i="0">
+                <a:solidFill>
+                  <a:srgbClr val="FFFFFF"/>
+                </a:solidFill>
+                <a:latin typeface="Calibri"/>
+              </a:rPr>
+              <a:t>      - name: Despliegue SIMULADO (no despliega a ningun servidor)</a:t>
+            </a:r>
+          </a:p>
+          <a:p>
+            <a:pPr>
+              <a:spcAft>
+                <a:spcPts val="400"/>
+              </a:spcAft>
+            </a:pPr>
+            <a:r>
+              <a:rPr sz="1400" b="0" i="0">
+                <a:solidFill>
+                  <a:srgbClr val="FFFFFF"/>
+                </a:solidFill>
+                <a:latin typeface="Calibri"/>
+              </a:rPr>
+              <a:t>        run: echo "Artefacto cloudlite-api:0.1.0 listo para desplegar"</a:t>
+            </a:r>
+          </a:p>
+        </p:txBody>
+      </p:sp>
+      <p:sp>
+        <p:nvSpPr>
+          <p:cNvPr id="9" name="TextBox 8"/>
+          <p:cNvSpPr txBox="1"/>
+          <p:nvPr/>
+        </p:nvSpPr>
+        <p:spPr>
+          <a:xfrm>
+            <a:off x="457200" y="6080760"/>
+            <a:ext cx="11277295" cy="320040"/>
+          </a:xfrm>
+          <a:prstGeom prst="rect">
+            <a:avLst/>
+          </a:prstGeom>
+          <a:noFill/>
+        </p:spPr>
+        <p:txBody>
+          <a:bodyPr wrap="square">
+            <a:spAutoFit/>
+          </a:bodyPr>
+          <a:lstStyle/>
+          <a:p>
+            <a:pPr algn="ctr"/>
+            <a:r>
+              <a:rPr sz="1200" b="0" i="1">
+                <a:solidFill>
+                  <a:srgbClr val="666666"/>
+                </a:solidFill>
+                <a:latin typeface="Calibri"/>
+              </a:rPr>
+              <a:t>Los tres pasos, en orden, y el ultimo rotulado como simulado. Secretos con ${{ secrets.NOMBRE }}, NUNCA en claro dentro del YAML.</a:t>
+            </a:r>
+          </a:p>
+        </p:txBody>
+      </p:sp>
+      <p:sp>
+        <p:nvSpPr>
+          <p:cNvPr id="10" name="TextBox 9"/>
           <p:cNvSpPr txBox="1"/>
           <p:nvPr/>
         </p:nvSpPr>
@@ -10335,7 +10380,7 @@
         <p:spPr>
           <a:xfrm>
             <a:off x="0" y="0"/>
-            <a:ext cx="12191695" cy="960120"/>
+            <a:ext cx="12191695" cy="1170432"/>
           </a:xfrm>
           <a:prstGeom prst="rect">
             <a:avLst/>
@@ -10377,7 +10422,7 @@
         </p:nvSpPr>
         <p:spPr>
           <a:xfrm>
-            <a:off x="0" y="960120"/>
+            <a:off x="0" y="1170432"/>
             <a:ext cx="12191695" cy="41148"/>
           </a:xfrm>
           <a:prstGeom prst="rect">
@@ -10421,7 +10466,7 @@
         <p:spPr>
           <a:xfrm>
             <a:off x="457200" y="164592"/>
-            <a:ext cx="11277295" cy="502920"/>
+            <a:ext cx="11277295" cy="384048"/>
           </a:xfrm>
           <a:prstGeom prst="rect">
             <a:avLst/>
@@ -10441,7 +10486,7 @@
                 </a:solidFill>
                 <a:latin typeface="Calibri"/>
               </a:rPr>
-              <a:t>Manos a la obra (paso a paso)</a:t>
+              <a:t>Herramientas de hoy</a:t>
             </a:r>
           </a:p>
         </p:txBody>
@@ -10454,8 +10499,8 @@
         </p:nvSpPr>
         <p:spPr>
           <a:xfrm>
-            <a:off x="457200" y="1170432"/>
-            <a:ext cx="11277295" cy="5230368"/>
+            <a:off x="457200" y="566928"/>
+            <a:ext cx="11277295" cy="411480"/>
           </a:xfrm>
           <a:prstGeom prst="rect">
             <a:avLst/>
@@ -10468,137 +10513,633 @@
           </a:bodyPr>
           <a:lstStyle/>
           <a:p>
-            <a:pPr>
-              <a:spcAft>
-                <a:spcPts val="800"/>
-              </a:spcAft>
-            </a:pPr>
-            <a:r>
-              <a:rPr sz="2000" b="1" i="0">
-                <a:solidFill>
-                  <a:srgbClr val="333333"/>
-                </a:solidFill>
-                <a:latin typeface="Calibri"/>
-              </a:rPr>
-              <a:t>1.</a:t>
-            </a:r>
-            <a:r>
-              <a:rPr sz="2000" b="0" i="0">
-                <a:solidFill>
-                  <a:srgbClr val="333333"/>
-                </a:solidFill>
-                <a:latin typeface="Calibri"/>
-              </a:rPr>
-              <a:t> Paso 1: escriba en la pregunta 7 el contenido completo del ci.yml con disparadores, entorno y los pasos de construccion, prueba y despliegue simulado, usando la imagen y el puerto del Dockerfile del Corte 1; verifique que ningun secreto quede escrito en claro dentro del YAML.</a:t>
-            </a:r>
-          </a:p>
-          <a:p>
-            <a:pPr>
-              <a:spcAft>
-                <a:spcPts val="800"/>
-              </a:spcAft>
-            </a:pPr>
-            <a:r>
-              <a:rPr sz="2000" b="0" i="0">
-                <a:solidFill>
-                  <a:srgbClr val="333333"/>
-                </a:solidFill>
-                <a:latin typeface="Calibri"/>
-              </a:rPr>
-              <a:t>–   </a:t>
-            </a:r>
-            <a:r>
-              <a:rPr sz="2000" b="1" i="0">
-                <a:solidFill>
-                  <a:srgbClr val="333333"/>
-                </a:solidFill>
-                <a:latin typeface="Calibri"/>
-              </a:rPr>
-              <a:t>2.</a:t>
-            </a:r>
-            <a:r>
-              <a:rPr sz="2000" b="0" i="0">
-                <a:solidFill>
-                  <a:srgbClr val="333333"/>
-                </a:solidFill>
-                <a:latin typeface="Calibri"/>
-              </a:rPr>
-              <a:t> Paso 2: explique en la pregunta 8 que se compila o instala, que se ejecuta en la prueba y con que condicion el pipeline debe fallar; hagase la prueba mental de que error tendria que introducir para que el check salga rojo, y si no encuentra ninguno, su pipeline todavia no valida nada.</a:t>
-            </a:r>
-          </a:p>
-          <a:p>
-            <a:pPr>
-              <a:spcAft>
-                <a:spcPts val="800"/>
-              </a:spcAft>
-            </a:pPr>
-            <a:r>
-              <a:rPr sz="2000" b="0" i="0">
-                <a:solidFill>
-                  <a:srgbClr val="333333"/>
-                </a:solidFill>
-                <a:latin typeface="Calibri"/>
-              </a:rPr>
-              <a:t>–   </a:t>
-            </a:r>
-            <a:r>
-              <a:rPr sz="2000" b="1" i="0">
-                <a:solidFill>
-                  <a:srgbClr val="333333"/>
-                </a:solidFill>
-                <a:latin typeface="Calibri"/>
-              </a:rPr>
-              <a:t>3.</a:t>
-            </a:r>
-            <a:r>
-              <a:rPr sz="2000" b="0" i="0">
-                <a:solidFill>
-                  <a:srgbClr val="333333"/>
-                </a:solidFill>
-                <a:latin typeface="Calibri"/>
-              </a:rPr>
-              <a:t> Paso 3: distinga en la pregunta 9 que valida CI y que hace CD, ubique cual de los dos construyo y diga que le faltaria para CD real; reconocer que su pipeline llega hasta «listo para desplegar» suma puntos, afirmar que ya tiene CD los resta.</a:t>
-            </a:r>
-          </a:p>
-          <a:p>
-            <a:pPr>
-              <a:spcAft>
-                <a:spcPts val="800"/>
-              </a:spcAft>
-            </a:pPr>
-            <a:r>
-              <a:rPr sz="2000" b="0" i="0">
-                <a:solidFill>
-                  <a:srgbClr val="333333"/>
-                </a:solidFill>
-                <a:latin typeface="Calibri"/>
-              </a:rPr>
-              <a:t>–   </a:t>
-            </a:r>
-            <a:r>
-              <a:rPr sz="2000" b="1" i="0">
-                <a:solidFill>
-                  <a:srgbClr val="333333"/>
-                </a:solidFill>
-                <a:latin typeface="Calibri"/>
-              </a:rPr>
-              <a:t>4.</a:t>
-            </a:r>
-            <a:r>
-              <a:rPr sz="2000" b="0" i="0">
-                <a:solidFill>
-                  <a:srgbClr val="333333"/>
-                </a:solidFill>
-                <a:latin typeface="Calibri"/>
-              </a:rPr>
-              <a:t> Paso 4: liste en la pregunta 10 entre 4 y 6 senales con su umbral, atadas a operaciones de su dominio, y verifique que al menos una sea un registro y no una metrica numerica; una senal sin umbral no sirve para operar y no suma.</a:t>
-            </a:r>
-          </a:p>
-        </p:txBody>
-      </p:sp>
-      <p:sp>
-        <p:nvSpPr>
-          <p:cNvPr id="6" name="TextBox 5"/>
+            <a:r>
+              <a:rPr sz="1400" b="0" i="0">
+                <a:solidFill>
+                  <a:srgbClr val="B8D8EE"/>
+                </a:solidFill>
+                <a:latin typeface="Calibri"/>
+              </a:rPr>
+              <a:t>Gratis · navegador o free tier · sin cuenta de pago</a:t>
+            </a:r>
+          </a:p>
+        </p:txBody>
+      </p:sp>
+      <p:sp>
+        <p:nvSpPr>
+          <p:cNvPr id="6" name="Rounded Rectangle 5"/>
+          <p:cNvSpPr/>
+          <p:nvPr/>
+        </p:nvSpPr>
+        <p:spPr>
+          <a:xfrm>
+            <a:off x="457200" y="1591056"/>
+            <a:ext cx="3624986" cy="2331720"/>
+          </a:xfrm>
+          <a:prstGeom prst="roundRect">
+            <a:avLst>
+              <a:gd name="adj" fmla="val 12000"/>
+            </a:avLst>
+          </a:prstGeom>
+          <a:solidFill>
+            <a:srgbClr val="F2F2F2"/>
+          </a:solidFill>
+          <a:ln>
+            <a:noFill/>
+          </a:ln>
+        </p:spPr>
+        <p:style>
+          <a:lnRef idx="1">
+            <a:schemeClr val="accent1"/>
+          </a:lnRef>
+          <a:fillRef idx="3">
+            <a:schemeClr val="accent1"/>
+          </a:fillRef>
+          <a:effectRef idx="2">
+            <a:schemeClr val="accent1"/>
+          </a:effectRef>
+          <a:fontRef idx="minor">
+            <a:schemeClr val="lt1"/>
+          </a:fontRef>
+        </p:style>
+        <p:txBody>
+          <a:bodyPr rtlCol="0" anchor="ctr"/>
+          <a:lstStyle/>
+          <a:p>
+            <a:pPr algn="ctr"/>
+          </a:p>
+        </p:txBody>
+      </p:sp>
+      <p:sp>
+        <p:nvSpPr>
+          <p:cNvPr id="7" name="Rectangle 6"/>
+          <p:cNvSpPr/>
+          <p:nvPr/>
+        </p:nvSpPr>
+        <p:spPr>
+          <a:xfrm>
+            <a:off x="457200" y="1591056"/>
+            <a:ext cx="3624986" cy="64008"/>
+          </a:xfrm>
+          <a:prstGeom prst="rect">
+            <a:avLst/>
+          </a:prstGeom>
+          <a:solidFill>
+            <a:srgbClr val="095292"/>
+          </a:solidFill>
+          <a:ln>
+            <a:noFill/>
+          </a:ln>
+        </p:spPr>
+        <p:style>
+          <a:lnRef idx="1">
+            <a:schemeClr val="accent1"/>
+          </a:lnRef>
+          <a:fillRef idx="3">
+            <a:schemeClr val="accent1"/>
+          </a:fillRef>
+          <a:effectRef idx="2">
+            <a:schemeClr val="accent1"/>
+          </a:effectRef>
+          <a:fontRef idx="minor">
+            <a:schemeClr val="lt1"/>
+          </a:fontRef>
+        </p:style>
+        <p:txBody>
+          <a:bodyPr rtlCol="0" anchor="ctr"/>
+          <a:lstStyle/>
+          <a:p>
+            <a:pPr algn="ctr"/>
+          </a:p>
+        </p:txBody>
+      </p:sp>
+      <p:sp>
+        <p:nvSpPr>
+          <p:cNvPr id="8" name="Rectangle 7"/>
+          <p:cNvSpPr/>
+          <p:nvPr/>
+        </p:nvSpPr>
+        <p:spPr>
+          <a:xfrm>
+            <a:off x="457200" y="1655064"/>
+            <a:ext cx="3624986" cy="27432"/>
+          </a:xfrm>
+          <a:prstGeom prst="rect">
+            <a:avLst/>
+          </a:prstGeom>
+          <a:solidFill>
+            <a:srgbClr val="FFD000"/>
+          </a:solidFill>
+          <a:ln>
+            <a:noFill/>
+          </a:ln>
+        </p:spPr>
+        <p:style>
+          <a:lnRef idx="1">
+            <a:schemeClr val="accent1"/>
+          </a:lnRef>
+          <a:fillRef idx="3">
+            <a:schemeClr val="accent1"/>
+          </a:fillRef>
+          <a:effectRef idx="2">
+            <a:schemeClr val="accent1"/>
+          </a:effectRef>
+          <a:fontRef idx="minor">
+            <a:schemeClr val="lt1"/>
+          </a:fontRef>
+        </p:style>
+        <p:txBody>
+          <a:bodyPr rtlCol="0" anchor="ctr"/>
+          <a:lstStyle/>
+          <a:p>
+            <a:pPr algn="ctr"/>
+          </a:p>
+        </p:txBody>
+      </p:sp>
+      <p:pic>
+        <p:nvPicPr>
+          <p:cNvPr id="9" name="Picture 8" descr="github_actions.png"/>
+          <p:cNvPicPr>
+            <a:picLocks noChangeAspect="1"/>
+          </p:cNvPicPr>
+          <p:nvPr/>
+        </p:nvPicPr>
+        <p:blipFill>
+          <a:blip r:embed="rId2"/>
+          <a:stretch>
+            <a:fillRect/>
+          </a:stretch>
+        </p:blipFill>
+        <p:spPr>
+          <a:xfrm>
+            <a:off x="1643329" y="1847087"/>
+            <a:ext cx="1252728" cy="1252728"/>
+          </a:xfrm>
+          <a:prstGeom prst="rect">
+            <a:avLst/>
+          </a:prstGeom>
+        </p:spPr>
+      </p:pic>
+      <p:sp>
+        <p:nvSpPr>
+          <p:cNvPr id="10" name="TextBox 9"/>
+          <p:cNvSpPr txBox="1"/>
+          <p:nvPr/>
+        </p:nvSpPr>
+        <p:spPr>
+          <a:xfrm>
+            <a:off x="530352" y="3191256"/>
+            <a:ext cx="3478682" cy="621792"/>
+          </a:xfrm>
+          <a:prstGeom prst="rect">
+            <a:avLst/>
+          </a:prstGeom>
+          <a:noFill/>
+        </p:spPr>
+        <p:txBody>
+          <a:bodyPr wrap="square" anchor="t"/>
+          <a:lstStyle/>
+          <a:p>
+            <a:pPr algn="ctr"/>
+            <a:r>
+              <a:rPr sz="1300" b="1" i="0">
+                <a:solidFill>
+                  <a:srgbClr val="095292"/>
+                </a:solidFill>
+                <a:latin typeface="Calibri"/>
+              </a:rPr>
+              <a:t>GitHub Actions</a:t>
+            </a:r>
+          </a:p>
+          <a:p>
+            <a:pPr algn="ctr">
+              <a:spcBef>
+                <a:spcPts val="200"/>
+              </a:spcBef>
+            </a:pPr>
+            <a:r>
+              <a:rPr sz="1000" b="0" i="0">
+                <a:solidFill>
+                  <a:srgbClr val="666666"/>
+                </a:solidFill>
+                <a:latin typeface="Calibri"/>
+              </a:rPr>
+              <a:t>CI del PI</a:t>
+            </a:r>
+          </a:p>
+        </p:txBody>
+      </p:sp>
+      <p:sp>
+        <p:nvSpPr>
+          <p:cNvPr id="11" name="Rounded Rectangle 10"/>
+          <p:cNvSpPr/>
+          <p:nvPr/>
+        </p:nvSpPr>
+        <p:spPr>
+          <a:xfrm>
+            <a:off x="4283354" y="1591056"/>
+            <a:ext cx="3624986" cy="2331720"/>
+          </a:xfrm>
+          <a:prstGeom prst="roundRect">
+            <a:avLst>
+              <a:gd name="adj" fmla="val 12000"/>
+            </a:avLst>
+          </a:prstGeom>
+          <a:solidFill>
+            <a:srgbClr val="F2F2F2"/>
+          </a:solidFill>
+          <a:ln>
+            <a:noFill/>
+          </a:ln>
+        </p:spPr>
+        <p:style>
+          <a:lnRef idx="1">
+            <a:schemeClr val="accent1"/>
+          </a:lnRef>
+          <a:fillRef idx="3">
+            <a:schemeClr val="accent1"/>
+          </a:fillRef>
+          <a:effectRef idx="2">
+            <a:schemeClr val="accent1"/>
+          </a:effectRef>
+          <a:fontRef idx="minor">
+            <a:schemeClr val="lt1"/>
+          </a:fontRef>
+        </p:style>
+        <p:txBody>
+          <a:bodyPr rtlCol="0" anchor="ctr"/>
+          <a:lstStyle/>
+          <a:p>
+            <a:pPr algn="ctr"/>
+          </a:p>
+        </p:txBody>
+      </p:sp>
+      <p:sp>
+        <p:nvSpPr>
+          <p:cNvPr id="12" name="Rectangle 11"/>
+          <p:cNvSpPr/>
+          <p:nvPr/>
+        </p:nvSpPr>
+        <p:spPr>
+          <a:xfrm>
+            <a:off x="4283354" y="1591056"/>
+            <a:ext cx="3624986" cy="64008"/>
+          </a:xfrm>
+          <a:prstGeom prst="rect">
+            <a:avLst/>
+          </a:prstGeom>
+          <a:solidFill>
+            <a:srgbClr val="095292"/>
+          </a:solidFill>
+          <a:ln>
+            <a:noFill/>
+          </a:ln>
+        </p:spPr>
+        <p:style>
+          <a:lnRef idx="1">
+            <a:schemeClr val="accent1"/>
+          </a:lnRef>
+          <a:fillRef idx="3">
+            <a:schemeClr val="accent1"/>
+          </a:fillRef>
+          <a:effectRef idx="2">
+            <a:schemeClr val="accent1"/>
+          </a:effectRef>
+          <a:fontRef idx="minor">
+            <a:schemeClr val="lt1"/>
+          </a:fontRef>
+        </p:style>
+        <p:txBody>
+          <a:bodyPr rtlCol="0" anchor="ctr"/>
+          <a:lstStyle/>
+          <a:p>
+            <a:pPr algn="ctr"/>
+          </a:p>
+        </p:txBody>
+      </p:sp>
+      <p:sp>
+        <p:nvSpPr>
+          <p:cNvPr id="13" name="Rectangle 12"/>
+          <p:cNvSpPr/>
+          <p:nvPr/>
+        </p:nvSpPr>
+        <p:spPr>
+          <a:xfrm>
+            <a:off x="4283354" y="1655064"/>
+            <a:ext cx="3624986" cy="27432"/>
+          </a:xfrm>
+          <a:prstGeom prst="rect">
+            <a:avLst/>
+          </a:prstGeom>
+          <a:solidFill>
+            <a:srgbClr val="FFD000"/>
+          </a:solidFill>
+          <a:ln>
+            <a:noFill/>
+          </a:ln>
+        </p:spPr>
+        <p:style>
+          <a:lnRef idx="1">
+            <a:schemeClr val="accent1"/>
+          </a:lnRef>
+          <a:fillRef idx="3">
+            <a:schemeClr val="accent1"/>
+          </a:fillRef>
+          <a:effectRef idx="2">
+            <a:schemeClr val="accent1"/>
+          </a:effectRef>
+          <a:fontRef idx="minor">
+            <a:schemeClr val="lt1"/>
+          </a:fontRef>
+        </p:style>
+        <p:txBody>
+          <a:bodyPr rtlCol="0" anchor="ctr"/>
+          <a:lstStyle/>
+          <a:p>
+            <a:pPr algn="ctr"/>
+          </a:p>
+        </p:txBody>
+      </p:sp>
+      <p:pic>
+        <p:nvPicPr>
+          <p:cNvPr id="14" name="Picture 13" descr="google_docs.png"/>
+          <p:cNvPicPr>
+            <a:picLocks noChangeAspect="1"/>
+          </p:cNvPicPr>
+          <p:nvPr/>
+        </p:nvPicPr>
+        <p:blipFill>
+          <a:blip r:embed="rId3"/>
+          <a:stretch>
+            <a:fillRect/>
+          </a:stretch>
+        </p:blipFill>
+        <p:spPr>
+          <a:xfrm>
+            <a:off x="5469483" y="1847087"/>
+            <a:ext cx="1252728" cy="1252728"/>
+          </a:xfrm>
+          <a:prstGeom prst="rect">
+            <a:avLst/>
+          </a:prstGeom>
+        </p:spPr>
+      </p:pic>
+      <p:sp>
+        <p:nvSpPr>
+          <p:cNvPr id="15" name="TextBox 14"/>
+          <p:cNvSpPr txBox="1"/>
+          <p:nvPr/>
+        </p:nvSpPr>
+        <p:spPr>
+          <a:xfrm>
+            <a:off x="4356506" y="3191256"/>
+            <a:ext cx="3478682" cy="621792"/>
+          </a:xfrm>
+          <a:prstGeom prst="rect">
+            <a:avLst/>
+          </a:prstGeom>
+          <a:noFill/>
+        </p:spPr>
+        <p:txBody>
+          <a:bodyPr wrap="square" anchor="t"/>
+          <a:lstStyle/>
+          <a:p>
+            <a:pPr algn="ctr"/>
+            <a:r>
+              <a:rPr sz="1300" b="1" i="0">
+                <a:solidFill>
+                  <a:srgbClr val="095292"/>
+                </a:solidFill>
+                <a:latin typeface="Calibri"/>
+              </a:rPr>
+              <a:t>Google Docs</a:t>
+            </a:r>
+          </a:p>
+          <a:p>
+            <a:pPr algn="ctr">
+              <a:spcBef>
+                <a:spcPts val="200"/>
+              </a:spcBef>
+            </a:pPr>
+            <a:r>
+              <a:rPr sz="1000" b="0" i="0">
+                <a:solidFill>
+                  <a:srgbClr val="666666"/>
+                </a:solidFill>
+                <a:latin typeface="Calibri"/>
+              </a:rPr>
+              <a:t>Informe PI</a:t>
+            </a:r>
+          </a:p>
+        </p:txBody>
+      </p:sp>
+      <p:sp>
+        <p:nvSpPr>
+          <p:cNvPr id="16" name="Rounded Rectangle 15"/>
+          <p:cNvSpPr/>
+          <p:nvPr/>
+        </p:nvSpPr>
+        <p:spPr>
+          <a:xfrm>
+            <a:off x="8109508" y="1591056"/>
+            <a:ext cx="3624986" cy="2331720"/>
+          </a:xfrm>
+          <a:prstGeom prst="roundRect">
+            <a:avLst>
+              <a:gd name="adj" fmla="val 12000"/>
+            </a:avLst>
+          </a:prstGeom>
+          <a:solidFill>
+            <a:srgbClr val="F2F2F2"/>
+          </a:solidFill>
+          <a:ln>
+            <a:noFill/>
+          </a:ln>
+        </p:spPr>
+        <p:style>
+          <a:lnRef idx="1">
+            <a:schemeClr val="accent1"/>
+          </a:lnRef>
+          <a:fillRef idx="3">
+            <a:schemeClr val="accent1"/>
+          </a:fillRef>
+          <a:effectRef idx="2">
+            <a:schemeClr val="accent1"/>
+          </a:effectRef>
+          <a:fontRef idx="minor">
+            <a:schemeClr val="lt1"/>
+          </a:fontRef>
+        </p:style>
+        <p:txBody>
+          <a:bodyPr rtlCol="0" anchor="ctr"/>
+          <a:lstStyle/>
+          <a:p>
+            <a:pPr algn="ctr"/>
+          </a:p>
+        </p:txBody>
+      </p:sp>
+      <p:sp>
+        <p:nvSpPr>
+          <p:cNvPr id="17" name="Rectangle 16"/>
+          <p:cNvSpPr/>
+          <p:nvPr/>
+        </p:nvSpPr>
+        <p:spPr>
+          <a:xfrm>
+            <a:off x="8109508" y="1591056"/>
+            <a:ext cx="3624986" cy="64008"/>
+          </a:xfrm>
+          <a:prstGeom prst="rect">
+            <a:avLst/>
+          </a:prstGeom>
+          <a:solidFill>
+            <a:srgbClr val="095292"/>
+          </a:solidFill>
+          <a:ln>
+            <a:noFill/>
+          </a:ln>
+        </p:spPr>
+        <p:style>
+          <a:lnRef idx="1">
+            <a:schemeClr val="accent1"/>
+          </a:lnRef>
+          <a:fillRef idx="3">
+            <a:schemeClr val="accent1"/>
+          </a:fillRef>
+          <a:effectRef idx="2">
+            <a:schemeClr val="accent1"/>
+          </a:effectRef>
+          <a:fontRef idx="minor">
+            <a:schemeClr val="lt1"/>
+          </a:fontRef>
+        </p:style>
+        <p:txBody>
+          <a:bodyPr rtlCol="0" anchor="ctr"/>
+          <a:lstStyle/>
+          <a:p>
+            <a:pPr algn="ctr"/>
+          </a:p>
+        </p:txBody>
+      </p:sp>
+      <p:sp>
+        <p:nvSpPr>
+          <p:cNvPr id="18" name="Rectangle 17"/>
+          <p:cNvSpPr/>
+          <p:nvPr/>
+        </p:nvSpPr>
+        <p:spPr>
+          <a:xfrm>
+            <a:off x="8109508" y="1655064"/>
+            <a:ext cx="3624986" cy="27432"/>
+          </a:xfrm>
+          <a:prstGeom prst="rect">
+            <a:avLst/>
+          </a:prstGeom>
+          <a:solidFill>
+            <a:srgbClr val="FFD000"/>
+          </a:solidFill>
+          <a:ln>
+            <a:noFill/>
+          </a:ln>
+        </p:spPr>
+        <p:style>
+          <a:lnRef idx="1">
+            <a:schemeClr val="accent1"/>
+          </a:lnRef>
+          <a:fillRef idx="3">
+            <a:schemeClr val="accent1"/>
+          </a:fillRef>
+          <a:effectRef idx="2">
+            <a:schemeClr val="accent1"/>
+          </a:effectRef>
+          <a:fontRef idx="minor">
+            <a:schemeClr val="lt1"/>
+          </a:fontRef>
+        </p:style>
+        <p:txBody>
+          <a:bodyPr rtlCol="0" anchor="ctr"/>
+          <a:lstStyle/>
+          <a:p>
+            <a:pPr algn="ctr"/>
+          </a:p>
+        </p:txBody>
+      </p:sp>
+      <p:pic>
+        <p:nvPicPr>
+          <p:cNvPr id="19" name="Picture 18" descr="examlab.png"/>
+          <p:cNvPicPr>
+            <a:picLocks noChangeAspect="1"/>
+          </p:cNvPicPr>
+          <p:nvPr/>
+        </p:nvPicPr>
+        <p:blipFill>
+          <a:blip r:embed="rId4"/>
+          <a:stretch>
+            <a:fillRect/>
+          </a:stretch>
+        </p:blipFill>
+        <p:spPr>
+          <a:xfrm>
+            <a:off x="9295638" y="1847087"/>
+            <a:ext cx="1252728" cy="1252728"/>
+          </a:xfrm>
+          <a:prstGeom prst="rect">
+            <a:avLst/>
+          </a:prstGeom>
+        </p:spPr>
+      </p:pic>
+      <p:sp>
+        <p:nvSpPr>
+          <p:cNvPr id="20" name="TextBox 19"/>
+          <p:cNvSpPr txBox="1"/>
+          <p:nvPr/>
+        </p:nvSpPr>
+        <p:spPr>
+          <a:xfrm>
+            <a:off x="8182660" y="3191256"/>
+            <a:ext cx="3478682" cy="621792"/>
+          </a:xfrm>
+          <a:prstGeom prst="rect">
+            <a:avLst/>
+          </a:prstGeom>
+          <a:noFill/>
+        </p:spPr>
+        <p:txBody>
+          <a:bodyPr wrap="square" anchor="t"/>
+          <a:lstStyle/>
+          <a:p>
+            <a:pPr algn="ctr"/>
+            <a:r>
+              <a:rPr sz="1300" b="1" i="0">
+                <a:solidFill>
+                  <a:srgbClr val="095292"/>
+                </a:solidFill>
+                <a:latin typeface="Calibri"/>
+              </a:rPr>
+              <a:t>la plataforma del curso</a:t>
+            </a:r>
+          </a:p>
+          <a:p>
+            <a:pPr algn="ctr">
+              <a:spcBef>
+                <a:spcPts val="200"/>
+              </a:spcBef>
+            </a:pPr>
+            <a:r>
+              <a:rPr sz="1000" b="0" i="0">
+                <a:solidFill>
+                  <a:srgbClr val="666666"/>
+                </a:solidFill>
+                <a:latin typeface="Calibri"/>
+              </a:rPr>
+              <a:t>Donde se entrega</a:t>
+            </a:r>
+          </a:p>
+        </p:txBody>
+      </p:sp>
+      <p:sp>
+        <p:nvSpPr>
+          <p:cNvPr id="21" name="TextBox 20"/>
           <p:cNvSpPr txBox="1"/>
           <p:nvPr/>
         </p:nvSpPr>
@@ -10772,109 +11313,21 @@
                 </a:solidFill>
                 <a:latin typeface="Calibri"/>
               </a:rPr>
-              <a:t>Para continuar (PI)</a:t>
-            </a:r>
-          </a:p>
-        </p:txBody>
-      </p:sp>
-      <p:sp>
-        <p:nvSpPr>
-          <p:cNvPr id="5" name="Rounded Rectangle 4"/>
-          <p:cNvSpPr/>
-          <p:nvPr/>
-        </p:nvSpPr>
-        <p:spPr>
-          <a:xfrm>
-            <a:off x="457200" y="1261872"/>
-            <a:ext cx="11277295" cy="1051560"/>
-          </a:xfrm>
-          <a:prstGeom prst="roundRect">
-            <a:avLst>
-              <a:gd name="adj" fmla="val 12000"/>
-            </a:avLst>
-          </a:prstGeom>
-          <a:solidFill>
-            <a:srgbClr val="E8F4FA"/>
-          </a:solidFill>
-          <a:ln>
-            <a:noFill/>
-          </a:ln>
-        </p:spPr>
-        <p:style>
-          <a:lnRef idx="1">
-            <a:schemeClr val="accent1"/>
-          </a:lnRef>
-          <a:fillRef idx="3">
-            <a:schemeClr val="accent1"/>
-          </a:fillRef>
-          <a:effectRef idx="2">
-            <a:schemeClr val="accent1"/>
-          </a:effectRef>
-          <a:fontRef idx="minor">
-            <a:schemeClr val="lt1"/>
-          </a:fontRef>
-        </p:style>
-        <p:txBody>
-          <a:bodyPr rtlCol="0" anchor="ctr"/>
-          <a:lstStyle/>
-          <a:p>
-            <a:pPr algn="ctr"/>
-          </a:p>
-        </p:txBody>
-      </p:sp>
-      <p:sp>
-        <p:nvSpPr>
-          <p:cNvPr id="6" name="Rectangle 5"/>
-          <p:cNvSpPr/>
-          <p:nvPr/>
-        </p:nvSpPr>
-        <p:spPr>
-          <a:xfrm>
-            <a:off x="457200" y="1261872"/>
-            <a:ext cx="128016" cy="1051560"/>
-          </a:xfrm>
-          <a:prstGeom prst="rect">
-            <a:avLst/>
-          </a:prstGeom>
-          <a:solidFill>
-            <a:srgbClr val="269CCB"/>
-          </a:solidFill>
-          <a:ln>
-            <a:noFill/>
-          </a:ln>
-        </p:spPr>
-        <p:style>
-          <a:lnRef idx="1">
-            <a:schemeClr val="accent1"/>
-          </a:lnRef>
-          <a:fillRef idx="3">
-            <a:schemeClr val="accent1"/>
-          </a:fillRef>
-          <a:effectRef idx="2">
-            <a:schemeClr val="accent1"/>
-          </a:effectRef>
-          <a:fontRef idx="minor">
-            <a:schemeClr val="lt1"/>
-          </a:fontRef>
-        </p:style>
-        <p:txBody>
-          <a:bodyPr rtlCol="0" anchor="ctr"/>
-          <a:lstStyle/>
-          <a:p>
-            <a:pPr algn="ctr"/>
-          </a:p>
-        </p:txBody>
-      </p:sp>
-      <p:sp>
-        <p:nvSpPr>
-          <p:cNvPr id="7" name="TextBox 6"/>
+              <a:t>PI CloudLite — entregable de hoy</a:t>
+            </a:r>
+          </a:p>
+        </p:txBody>
+      </p:sp>
+      <p:sp>
+        <p:nvSpPr>
+          <p:cNvPr id="5" name="TextBox 4"/>
           <p:cNvSpPr txBox="1"/>
           <p:nvPr/>
         </p:nvSpPr>
         <p:spPr>
           <a:xfrm>
-            <a:off x="777240" y="1399031"/>
-            <a:ext cx="10774375" cy="822959"/>
+            <a:off x="457200" y="1170432"/>
+            <a:ext cx="11277295" cy="5230368"/>
           </a:xfrm>
           <a:prstGeom prst="rect">
             <a:avLst/>
@@ -10887,313 +11340,119 @@
           </a:bodyPr>
           <a:lstStyle/>
           <a:p>
-            <a:r>
-              <a:rPr sz="1200" b="1" i="0">
-                <a:solidFill>
-                  <a:srgbClr val="269CCB"/>
-                </a:solidFill>
-                <a:latin typeface="Calibri"/>
-              </a:rPr>
-              <a:t>Info</a:t>
-            </a:r>
-          </a:p>
-          <a:p>
-            <a:pPr>
-              <a:spcBef>
-                <a:spcPts val="400"/>
-              </a:spcBef>
-            </a:pPr>
-            <a:r>
-              <a:rPr sz="1400" b="0" i="0">
-                <a:solidFill>
-                  <a:srgbClr val="333333"/>
-                </a:solidFill>
-                <a:latin typeface="Calibri"/>
-              </a:rPr>
-              <a:t>Entregable: .github/workflows/ci.yml + sección Monitoreo/CI del informe</a:t>
-            </a:r>
-          </a:p>
-        </p:txBody>
-      </p:sp>
-      <p:sp>
-        <p:nvSpPr>
-          <p:cNvPr id="8" name="Rounded Rectangle 7"/>
-          <p:cNvSpPr/>
-          <p:nvPr/>
-        </p:nvSpPr>
-        <p:spPr>
-          <a:xfrm>
-            <a:off x="457200" y="2478024"/>
-            <a:ext cx="11277295" cy="1051560"/>
-          </a:xfrm>
-          <a:prstGeom prst="roundRect">
-            <a:avLst>
-              <a:gd name="adj" fmla="val 12000"/>
-            </a:avLst>
-          </a:prstGeom>
-          <a:solidFill>
-            <a:srgbClr val="FFF8E1"/>
-          </a:solidFill>
-          <a:ln>
-            <a:noFill/>
-          </a:ln>
-        </p:spPr>
-        <p:style>
-          <a:lnRef idx="1">
-            <a:schemeClr val="accent1"/>
-          </a:lnRef>
-          <a:fillRef idx="3">
-            <a:schemeClr val="accent1"/>
-          </a:fillRef>
-          <a:effectRef idx="2">
-            <a:schemeClr val="accent1"/>
-          </a:effectRef>
-          <a:fontRef idx="minor">
-            <a:schemeClr val="lt1"/>
-          </a:fontRef>
-        </p:style>
-        <p:txBody>
-          <a:bodyPr rtlCol="0" anchor="ctr"/>
-          <a:lstStyle/>
-          <a:p>
-            <a:pPr algn="ctr"/>
-          </a:p>
-        </p:txBody>
-      </p:sp>
-      <p:sp>
-        <p:nvSpPr>
-          <p:cNvPr id="9" name="Rectangle 8"/>
-          <p:cNvSpPr/>
-          <p:nvPr/>
-        </p:nvSpPr>
-        <p:spPr>
-          <a:xfrm>
-            <a:off x="457200" y="2478024"/>
-            <a:ext cx="128016" cy="1051560"/>
-          </a:xfrm>
-          <a:prstGeom prst="rect">
-            <a:avLst/>
-          </a:prstGeom>
-          <a:solidFill>
-            <a:srgbClr val="FFD000"/>
-          </a:solidFill>
-          <a:ln>
-            <a:noFill/>
-          </a:ln>
-        </p:spPr>
-        <p:style>
-          <a:lnRef idx="1">
-            <a:schemeClr val="accent1"/>
-          </a:lnRef>
-          <a:fillRef idx="3">
-            <a:schemeClr val="accent1"/>
-          </a:fillRef>
-          <a:effectRef idx="2">
-            <a:schemeClr val="accent1"/>
-          </a:effectRef>
-          <a:fontRef idx="minor">
-            <a:schemeClr val="lt1"/>
-          </a:fontRef>
-        </p:style>
-        <p:txBody>
-          <a:bodyPr rtlCol="0" anchor="ctr"/>
-          <a:lstStyle/>
-          <a:p>
-            <a:pPr algn="ctr"/>
-          </a:p>
-        </p:txBody>
-      </p:sp>
-      <p:sp>
-        <p:nvSpPr>
-          <p:cNvPr id="10" name="TextBox 9"/>
-          <p:cNvSpPr txBox="1"/>
-          <p:nvPr/>
-        </p:nvSpPr>
-        <p:spPr>
-          <a:xfrm>
-            <a:off x="777240" y="2615184"/>
-            <a:ext cx="10774375" cy="822959"/>
-          </a:xfrm>
-          <a:prstGeom prst="rect">
-            <a:avLst/>
-          </a:prstGeom>
-          <a:noFill/>
-        </p:spPr>
-        <p:txBody>
-          <a:bodyPr wrap="square">
-            <a:spAutoFit/>
-          </a:bodyPr>
-          <a:lstStyle/>
-          <a:p>
-            <a:r>
-              <a:rPr sz="1200" b="1" i="0">
-                <a:solidFill>
-                  <a:srgbClr val="FFD000"/>
-                </a:solidFill>
-                <a:latin typeface="Calibri"/>
-              </a:rPr>
-              <a:t>Aclaración</a:t>
-            </a:r>
-          </a:p>
-          <a:p>
-            <a:pPr>
-              <a:spcBef>
-                <a:spcPts val="400"/>
-              </a:spcBef>
-            </a:pPr>
-            <a:r>
-              <a:rPr sz="1400" b="0" i="0">
-                <a:solidFill>
-                  <a:srgbClr val="333333"/>
-                </a:solidFill>
-                <a:latin typeface="Calibri"/>
-              </a:rPr>
-              <a:t>Subir evidencias al paquete CloudLite (Drive/repo) y a la plataforma del curso en la fecha que indique el docente.</a:t>
-            </a:r>
-          </a:p>
-        </p:txBody>
-      </p:sp>
-      <p:sp>
-        <p:nvSpPr>
-          <p:cNvPr id="11" name="Rounded Rectangle 10"/>
-          <p:cNvSpPr/>
-          <p:nvPr/>
-        </p:nvSpPr>
-        <p:spPr>
-          <a:xfrm>
-            <a:off x="457200" y="3694176"/>
-            <a:ext cx="11277295" cy="1051560"/>
-          </a:xfrm>
-          <a:prstGeom prst="roundRect">
-            <a:avLst>
-              <a:gd name="adj" fmla="val 12000"/>
-            </a:avLst>
-          </a:prstGeom>
-          <a:solidFill>
-            <a:srgbClr val="FBE4E4"/>
-          </a:solidFill>
-          <a:ln>
-            <a:noFill/>
-          </a:ln>
-        </p:spPr>
-        <p:style>
-          <a:lnRef idx="1">
-            <a:schemeClr val="accent1"/>
-          </a:lnRef>
-          <a:fillRef idx="3">
-            <a:schemeClr val="accent1"/>
-          </a:fillRef>
-          <a:effectRef idx="2">
-            <a:schemeClr val="accent1"/>
-          </a:effectRef>
-          <a:fontRef idx="minor">
-            <a:schemeClr val="lt1"/>
-          </a:fontRef>
-        </p:style>
-        <p:txBody>
-          <a:bodyPr rtlCol="0" anchor="ctr"/>
-          <a:lstStyle/>
-          <a:p>
-            <a:pPr algn="ctr"/>
-          </a:p>
-        </p:txBody>
-      </p:sp>
-      <p:sp>
-        <p:nvSpPr>
-          <p:cNvPr id="12" name="Rectangle 11"/>
-          <p:cNvSpPr/>
-          <p:nvPr/>
-        </p:nvSpPr>
-        <p:spPr>
-          <a:xfrm>
-            <a:off x="457200" y="3694176"/>
-            <a:ext cx="128016" cy="1051560"/>
-          </a:xfrm>
-          <a:prstGeom prst="rect">
-            <a:avLst/>
-          </a:prstGeom>
-          <a:solidFill>
-            <a:srgbClr val="A02030"/>
-          </a:solidFill>
-          <a:ln>
-            <a:noFill/>
-          </a:ln>
-        </p:spPr>
-        <p:style>
-          <a:lnRef idx="1">
-            <a:schemeClr val="accent1"/>
-          </a:lnRef>
-          <a:fillRef idx="3">
-            <a:schemeClr val="accent1"/>
-          </a:fillRef>
-          <a:effectRef idx="2">
-            <a:schemeClr val="accent1"/>
-          </a:effectRef>
-          <a:fontRef idx="minor">
-            <a:schemeClr val="lt1"/>
-          </a:fontRef>
-        </p:style>
-        <p:txBody>
-          <a:bodyPr rtlCol="0" anchor="ctr"/>
-          <a:lstStyle/>
-          <a:p>
-            <a:pPr algn="ctr"/>
-          </a:p>
-        </p:txBody>
-      </p:sp>
-      <p:sp>
-        <p:nvSpPr>
-          <p:cNvPr id="13" name="TextBox 12"/>
-          <p:cNvSpPr txBox="1"/>
-          <p:nvPr/>
-        </p:nvSpPr>
-        <p:spPr>
-          <a:xfrm>
-            <a:off x="777240" y="3831336"/>
-            <a:ext cx="10774375" cy="822959"/>
-          </a:xfrm>
-          <a:prstGeom prst="rect">
-            <a:avLst/>
-          </a:prstGeom>
-          <a:noFill/>
-        </p:spPr>
-        <p:txBody>
-          <a:bodyPr wrap="square">
-            <a:spAutoFit/>
-          </a:bodyPr>
-          <a:lstStyle/>
-          <a:p>
-            <a:r>
-              <a:rPr sz="1200" b="1" i="0">
-                <a:solidFill>
-                  <a:srgbClr val="A02030"/>
-                </a:solidFill>
-                <a:latin typeface="Calibri"/>
-              </a:rPr>
-              <a:t>Atención</a:t>
-            </a:r>
-          </a:p>
-          <a:p>
-            <a:pPr>
-              <a:spcBef>
-                <a:spcPts val="400"/>
-              </a:spcBef>
-            </a:pPr>
-            <a:r>
-              <a:rPr sz="1400" b="0" i="0">
-                <a:solidFill>
-                  <a:srgbClr val="333333"/>
-                </a:solidFill>
-                <a:latin typeface="Calibri"/>
-              </a:rPr>
-              <a:t>Sin cloud de pago ni instalaciones obligatorias de hipervisores/Docker Desktop.</a:t>
-            </a:r>
-          </a:p>
-        </p:txBody>
-      </p:sp>
-      <p:sp>
-        <p:nvSpPr>
-          <p:cNvPr id="14" name="TextBox 13"/>
+            <a:pPr>
+              <a:spcAft>
+                <a:spcPts val="800"/>
+              </a:spcAft>
+            </a:pPr>
+            <a:r>
+              <a:rPr sz="2000" b="0" i="0">
+                <a:solidFill>
+                  <a:srgbClr val="333333"/>
+                </a:solidFill>
+                <a:latin typeface="Calibri"/>
+              </a:rPr>
+              <a:t>–   </a:t>
+            </a:r>
+            <a:r>
+              <a:rPr sz="2000" b="1" i="0">
+                <a:solidFill>
+                  <a:srgbClr val="333333"/>
+                </a:solidFill>
+                <a:latin typeface="Calibri"/>
+              </a:rPr>
+              <a:t>Entregable:</a:t>
+            </a:r>
+            <a:r>
+              <a:rPr sz="2000" b="0" i="0">
+                <a:solidFill>
+                  <a:srgbClr val="333333"/>
+                </a:solidFill>
+                <a:latin typeface="Calibri"/>
+              </a:rPr>
+              <a:t> .github/workflows/ci.yml + sección Monitoreo/CI del informe</a:t>
+            </a:r>
+          </a:p>
+          <a:p>
+            <a:pPr>
+              <a:spcAft>
+                <a:spcPts val="800"/>
+              </a:spcAft>
+            </a:pPr>
+            <a:r>
+              <a:rPr sz="2000" b="0" i="0">
+                <a:solidFill>
+                  <a:srgbClr val="333333"/>
+                </a:solidFill>
+                <a:latin typeface="Calibri"/>
+              </a:rPr>
+              <a:t>–   Herramienta: </a:t>
+            </a:r>
+            <a:r>
+              <a:rPr sz="2000" b="1" i="0">
+                <a:solidFill>
+                  <a:srgbClr val="333333"/>
+                </a:solidFill>
+                <a:latin typeface="Calibri"/>
+              </a:rPr>
+              <a:t>GitHub Actions · Google Docs</a:t>
+            </a:r>
+          </a:p>
+          <a:p>
+            <a:pPr>
+              <a:spcAft>
+                <a:spcPts val="800"/>
+              </a:spcAft>
+            </a:pPr>
+            <a:r>
+              <a:rPr sz="2000" b="0" i="0">
+                <a:solidFill>
+                  <a:srgbClr val="333333"/>
+                </a:solidFill>
+                <a:latin typeface="Calibri"/>
+              </a:rPr>
+              <a:t>–   Todo lo que construyan hoy entra al </a:t>
+            </a:r>
+            <a:r>
+              <a:rPr sz="2000" b="1" i="0">
+                <a:solidFill>
+                  <a:srgbClr val="333333"/>
+                </a:solidFill>
+                <a:latin typeface="Calibri"/>
+              </a:rPr>
+              <a:t>informe/repo del PI</a:t>
+            </a:r>
+            <a:r>
+              <a:rPr sz="2000" b="0" i="0">
+                <a:solidFill>
+                  <a:srgbClr val="333333"/>
+                </a:solidFill>
+                <a:latin typeface="Calibri"/>
+              </a:rPr>
+              <a:t> (no es lab suelto).</a:t>
+            </a:r>
+          </a:p>
+          <a:p>
+            <a:pPr>
+              <a:spcAft>
+                <a:spcPts val="800"/>
+              </a:spcAft>
+            </a:pPr>
+            <a:r>
+              <a:rPr sz="2000" b="0" i="0">
+                <a:solidFill>
+                  <a:srgbClr val="333333"/>
+                </a:solidFill>
+                <a:latin typeface="Calibri"/>
+              </a:rPr>
+              <a:t>–   Individual por defecto · el docente puede autorizar equipos de 2–3; la entrega en la plataforma del curso siempre es individual.</a:t>
+            </a:r>
+          </a:p>
+        </p:txBody>
+      </p:sp>
+      <p:sp>
+        <p:nvSpPr>
+          <p:cNvPr id="6" name="TextBox 5"/>
           <p:cNvSpPr txBox="1"/>
           <p:nvPr/>
         </p:nvSpPr>
@@ -11235,6 +11494,932 @@
 </file>
 
 <file path=ppt/slides/slide32.xml><?xml version="1.0" encoding="utf-8"?>
+<p:sld xmlns:a="http://schemas.openxmlformats.org/drawingml/2006/main" xmlns:p="http://schemas.openxmlformats.org/presentationml/2006/main" xmlns:r="http://schemas.openxmlformats.org/officeDocument/2006/relationships">
+  <p:cSld>
+    <p:bg>
+      <p:bgPr>
+        <a:solidFill>
+          <a:srgbClr val="FFFFFF"/>
+        </a:solidFill>
+        <a:effectLst/>
+      </p:bgPr>
+    </p:bg>
+    <p:spTree>
+      <p:nvGrpSpPr>
+        <p:cNvPr id="1" name=""/>
+        <p:cNvGrpSpPr/>
+        <p:nvPr/>
+      </p:nvGrpSpPr>
+      <p:grpSpPr/>
+      <p:sp>
+        <p:nvSpPr>
+          <p:cNvPr id="2" name="Rectangle 1"/>
+          <p:cNvSpPr/>
+          <p:nvPr/>
+        </p:nvSpPr>
+        <p:spPr>
+          <a:xfrm>
+            <a:off x="0" y="0"/>
+            <a:ext cx="12191695" cy="960120"/>
+          </a:xfrm>
+          <a:prstGeom prst="rect">
+            <a:avLst/>
+          </a:prstGeom>
+          <a:solidFill>
+            <a:srgbClr val="095292"/>
+          </a:solidFill>
+          <a:ln>
+            <a:noFill/>
+          </a:ln>
+        </p:spPr>
+        <p:style>
+          <a:lnRef idx="1">
+            <a:schemeClr val="accent1"/>
+          </a:lnRef>
+          <a:fillRef idx="3">
+            <a:schemeClr val="accent1"/>
+          </a:fillRef>
+          <a:effectRef idx="2">
+            <a:schemeClr val="accent1"/>
+          </a:effectRef>
+          <a:fontRef idx="minor">
+            <a:schemeClr val="lt1"/>
+          </a:fontRef>
+        </p:style>
+        <p:txBody>
+          <a:bodyPr rtlCol="0" anchor="ctr"/>
+          <a:lstStyle/>
+          <a:p>
+            <a:pPr algn="ctr"/>
+          </a:p>
+        </p:txBody>
+      </p:sp>
+      <p:sp>
+        <p:nvSpPr>
+          <p:cNvPr id="3" name="Rectangle 2"/>
+          <p:cNvSpPr/>
+          <p:nvPr/>
+        </p:nvSpPr>
+        <p:spPr>
+          <a:xfrm>
+            <a:off x="0" y="960120"/>
+            <a:ext cx="12191695" cy="41148"/>
+          </a:xfrm>
+          <a:prstGeom prst="rect">
+            <a:avLst/>
+          </a:prstGeom>
+          <a:solidFill>
+            <a:srgbClr val="FFD000"/>
+          </a:solidFill>
+          <a:ln>
+            <a:noFill/>
+          </a:ln>
+        </p:spPr>
+        <p:style>
+          <a:lnRef idx="1">
+            <a:schemeClr val="accent1"/>
+          </a:lnRef>
+          <a:fillRef idx="3">
+            <a:schemeClr val="accent1"/>
+          </a:fillRef>
+          <a:effectRef idx="2">
+            <a:schemeClr val="accent1"/>
+          </a:effectRef>
+          <a:fontRef idx="minor">
+            <a:schemeClr val="lt1"/>
+          </a:fontRef>
+        </p:style>
+        <p:txBody>
+          <a:bodyPr rtlCol="0" anchor="ctr"/>
+          <a:lstStyle/>
+          <a:p>
+            <a:pPr algn="ctr"/>
+          </a:p>
+        </p:txBody>
+      </p:sp>
+      <p:sp>
+        <p:nvSpPr>
+          <p:cNvPr id="4" name="TextBox 3"/>
+          <p:cNvSpPr txBox="1"/>
+          <p:nvPr/>
+        </p:nvSpPr>
+        <p:spPr>
+          <a:xfrm>
+            <a:off x="457200" y="164592"/>
+            <a:ext cx="11277295" cy="502920"/>
+          </a:xfrm>
+          <a:prstGeom prst="rect">
+            <a:avLst/>
+          </a:prstGeom>
+          <a:noFill/>
+        </p:spPr>
+        <p:txBody>
+          <a:bodyPr wrap="square">
+            <a:spAutoFit/>
+          </a:bodyPr>
+          <a:lstStyle/>
+          <a:p>
+            <a:r>
+              <a:rPr sz="2600" b="1" i="0">
+                <a:solidFill>
+                  <a:srgbClr val="FFFFFF"/>
+                </a:solidFill>
+                <a:latin typeface="Calibri"/>
+              </a:rPr>
+              <a:t>Manos a la obra (paso a paso)</a:t>
+            </a:r>
+          </a:p>
+        </p:txBody>
+      </p:sp>
+      <p:sp>
+        <p:nvSpPr>
+          <p:cNvPr id="5" name="TextBox 4"/>
+          <p:cNvSpPr txBox="1"/>
+          <p:nvPr/>
+        </p:nvSpPr>
+        <p:spPr>
+          <a:xfrm>
+            <a:off x="457200" y="1170432"/>
+            <a:ext cx="11277295" cy="5230368"/>
+          </a:xfrm>
+          <a:prstGeom prst="rect">
+            <a:avLst/>
+          </a:prstGeom>
+          <a:noFill/>
+        </p:spPr>
+        <p:txBody>
+          <a:bodyPr wrap="square">
+            <a:spAutoFit/>
+          </a:bodyPr>
+          <a:lstStyle/>
+          <a:p>
+            <a:pPr>
+              <a:spcAft>
+                <a:spcPts val="800"/>
+              </a:spcAft>
+            </a:pPr>
+            <a:r>
+              <a:rPr sz="2000" b="1" i="0">
+                <a:solidFill>
+                  <a:srgbClr val="333333"/>
+                </a:solidFill>
+                <a:latin typeface="Calibri"/>
+              </a:rPr>
+              <a:t>1.</a:t>
+            </a:r>
+            <a:r>
+              <a:rPr sz="2000" b="0" i="0">
+                <a:solidFill>
+                  <a:srgbClr val="333333"/>
+                </a:solidFill>
+                <a:latin typeface="Calibri"/>
+              </a:rPr>
+              <a:t> Paso 1: escriba en la pregunta 7 el contenido completo del ci.yml con disparadores, entorno y los pasos de construccion, prueba y despliegue simulado, usando la imagen y el puerto del Dockerfile del Corte 1; verifique que ningun secreto quede escrito en claro dentro del YAML.</a:t>
+            </a:r>
+          </a:p>
+          <a:p>
+            <a:pPr>
+              <a:spcAft>
+                <a:spcPts val="800"/>
+              </a:spcAft>
+            </a:pPr>
+            <a:r>
+              <a:rPr sz="2000" b="0" i="0">
+                <a:solidFill>
+                  <a:srgbClr val="333333"/>
+                </a:solidFill>
+                <a:latin typeface="Calibri"/>
+              </a:rPr>
+              <a:t>–   </a:t>
+            </a:r>
+            <a:r>
+              <a:rPr sz="2000" b="1" i="0">
+                <a:solidFill>
+                  <a:srgbClr val="333333"/>
+                </a:solidFill>
+                <a:latin typeface="Calibri"/>
+              </a:rPr>
+              <a:t>2.</a:t>
+            </a:r>
+            <a:r>
+              <a:rPr sz="2000" b="0" i="0">
+                <a:solidFill>
+                  <a:srgbClr val="333333"/>
+                </a:solidFill>
+                <a:latin typeface="Calibri"/>
+              </a:rPr>
+              <a:t> Paso 2: explique en la pregunta 8 que se compila o instala, que se ejecuta en la prueba y con que condicion el pipeline debe fallar; hagase la prueba mental de que error tendria que introducir para que el check salga rojo, y si no encuentra ninguno, su pipeline todavia no valida nada.</a:t>
+            </a:r>
+          </a:p>
+          <a:p>
+            <a:pPr>
+              <a:spcAft>
+                <a:spcPts val="800"/>
+              </a:spcAft>
+            </a:pPr>
+            <a:r>
+              <a:rPr sz="2000" b="0" i="0">
+                <a:solidFill>
+                  <a:srgbClr val="333333"/>
+                </a:solidFill>
+                <a:latin typeface="Calibri"/>
+              </a:rPr>
+              <a:t>–   </a:t>
+            </a:r>
+            <a:r>
+              <a:rPr sz="2000" b="1" i="0">
+                <a:solidFill>
+                  <a:srgbClr val="333333"/>
+                </a:solidFill>
+                <a:latin typeface="Calibri"/>
+              </a:rPr>
+              <a:t>3.</a:t>
+            </a:r>
+            <a:r>
+              <a:rPr sz="2000" b="0" i="0">
+                <a:solidFill>
+                  <a:srgbClr val="333333"/>
+                </a:solidFill>
+                <a:latin typeface="Calibri"/>
+              </a:rPr>
+              <a:t> Paso 3: distinga en la pregunta 9 que valida CI y que hace CD, ubique cual de los dos construyo y diga que le faltaria para CD real; reconocer que su pipeline llega hasta «listo para desplegar» suma puntos, afirmar que ya tiene CD los resta.</a:t>
+            </a:r>
+          </a:p>
+          <a:p>
+            <a:pPr>
+              <a:spcAft>
+                <a:spcPts val="800"/>
+              </a:spcAft>
+            </a:pPr>
+            <a:r>
+              <a:rPr sz="2000" b="0" i="0">
+                <a:solidFill>
+                  <a:srgbClr val="333333"/>
+                </a:solidFill>
+                <a:latin typeface="Calibri"/>
+              </a:rPr>
+              <a:t>–   </a:t>
+            </a:r>
+            <a:r>
+              <a:rPr sz="2000" b="1" i="0">
+                <a:solidFill>
+                  <a:srgbClr val="333333"/>
+                </a:solidFill>
+                <a:latin typeface="Calibri"/>
+              </a:rPr>
+              <a:t>4.</a:t>
+            </a:r>
+            <a:r>
+              <a:rPr sz="2000" b="0" i="0">
+                <a:solidFill>
+                  <a:srgbClr val="333333"/>
+                </a:solidFill>
+                <a:latin typeface="Calibri"/>
+              </a:rPr>
+              <a:t> Paso 4: liste en la pregunta 10 entre 4 y 6 senales con su umbral, atadas a operaciones de su dominio, y verifique que al menos una sea un registro y no una metrica numerica; una senal sin umbral no sirve para operar y no suma.</a:t>
+            </a:r>
+          </a:p>
+        </p:txBody>
+      </p:sp>
+      <p:sp>
+        <p:nvSpPr>
+          <p:cNvPr id="6" name="TextBox 5"/>
+          <p:cNvSpPr txBox="1"/>
+          <p:nvPr/>
+        </p:nvSpPr>
+        <p:spPr>
+          <a:xfrm>
+            <a:off x="11185855" y="6473952"/>
+            <a:ext cx="640080" cy="274320"/>
+          </a:xfrm>
+          <a:prstGeom prst="rect">
+            <a:avLst/>
+          </a:prstGeom>
+          <a:noFill/>
+        </p:spPr>
+        <p:txBody>
+          <a:bodyPr wrap="square">
+            <a:spAutoFit/>
+          </a:bodyPr>
+          <a:lstStyle/>
+          <a:p>
+            <a:pPr algn="r"/>
+            <a:r>
+              <a:rPr sz="1100" b="0" i="0">
+                <a:solidFill>
+                  <a:srgbClr val="666666"/>
+                </a:solidFill>
+                <a:latin typeface="Calibri"/>
+              </a:rPr>
+              <a:t>32</a:t>
+            </a:r>
+          </a:p>
+        </p:txBody>
+      </p:sp>
+    </p:spTree>
+  </p:cSld>
+  <p:clrMapOvr>
+    <a:masterClrMapping/>
+  </p:clrMapOvr>
+</p:sld>
+</file>
+
+<file path=ppt/slides/slide33.xml><?xml version="1.0" encoding="utf-8"?>
+<p:sld xmlns:a="http://schemas.openxmlformats.org/drawingml/2006/main" xmlns:p="http://schemas.openxmlformats.org/presentationml/2006/main" xmlns:r="http://schemas.openxmlformats.org/officeDocument/2006/relationships">
+  <p:cSld>
+    <p:bg>
+      <p:bgPr>
+        <a:solidFill>
+          <a:srgbClr val="FFFFFF"/>
+        </a:solidFill>
+        <a:effectLst/>
+      </p:bgPr>
+    </p:bg>
+    <p:spTree>
+      <p:nvGrpSpPr>
+        <p:cNvPr id="1" name=""/>
+        <p:cNvGrpSpPr/>
+        <p:nvPr/>
+      </p:nvGrpSpPr>
+      <p:grpSpPr/>
+      <p:sp>
+        <p:nvSpPr>
+          <p:cNvPr id="2" name="Rectangle 1"/>
+          <p:cNvSpPr/>
+          <p:nvPr/>
+        </p:nvSpPr>
+        <p:spPr>
+          <a:xfrm>
+            <a:off x="0" y="0"/>
+            <a:ext cx="12191695" cy="960120"/>
+          </a:xfrm>
+          <a:prstGeom prst="rect">
+            <a:avLst/>
+          </a:prstGeom>
+          <a:solidFill>
+            <a:srgbClr val="095292"/>
+          </a:solidFill>
+          <a:ln>
+            <a:noFill/>
+          </a:ln>
+        </p:spPr>
+        <p:style>
+          <a:lnRef idx="1">
+            <a:schemeClr val="accent1"/>
+          </a:lnRef>
+          <a:fillRef idx="3">
+            <a:schemeClr val="accent1"/>
+          </a:fillRef>
+          <a:effectRef idx="2">
+            <a:schemeClr val="accent1"/>
+          </a:effectRef>
+          <a:fontRef idx="minor">
+            <a:schemeClr val="lt1"/>
+          </a:fontRef>
+        </p:style>
+        <p:txBody>
+          <a:bodyPr rtlCol="0" anchor="ctr"/>
+          <a:lstStyle/>
+          <a:p>
+            <a:pPr algn="ctr"/>
+          </a:p>
+        </p:txBody>
+      </p:sp>
+      <p:sp>
+        <p:nvSpPr>
+          <p:cNvPr id="3" name="Rectangle 2"/>
+          <p:cNvSpPr/>
+          <p:nvPr/>
+        </p:nvSpPr>
+        <p:spPr>
+          <a:xfrm>
+            <a:off x="0" y="960120"/>
+            <a:ext cx="12191695" cy="41148"/>
+          </a:xfrm>
+          <a:prstGeom prst="rect">
+            <a:avLst/>
+          </a:prstGeom>
+          <a:solidFill>
+            <a:srgbClr val="FFD000"/>
+          </a:solidFill>
+          <a:ln>
+            <a:noFill/>
+          </a:ln>
+        </p:spPr>
+        <p:style>
+          <a:lnRef idx="1">
+            <a:schemeClr val="accent1"/>
+          </a:lnRef>
+          <a:fillRef idx="3">
+            <a:schemeClr val="accent1"/>
+          </a:fillRef>
+          <a:effectRef idx="2">
+            <a:schemeClr val="accent1"/>
+          </a:effectRef>
+          <a:fontRef idx="minor">
+            <a:schemeClr val="lt1"/>
+          </a:fontRef>
+        </p:style>
+        <p:txBody>
+          <a:bodyPr rtlCol="0" anchor="ctr"/>
+          <a:lstStyle/>
+          <a:p>
+            <a:pPr algn="ctr"/>
+          </a:p>
+        </p:txBody>
+      </p:sp>
+      <p:sp>
+        <p:nvSpPr>
+          <p:cNvPr id="4" name="TextBox 3"/>
+          <p:cNvSpPr txBox="1"/>
+          <p:nvPr/>
+        </p:nvSpPr>
+        <p:spPr>
+          <a:xfrm>
+            <a:off x="457200" y="164592"/>
+            <a:ext cx="11277295" cy="502920"/>
+          </a:xfrm>
+          <a:prstGeom prst="rect">
+            <a:avLst/>
+          </a:prstGeom>
+          <a:noFill/>
+        </p:spPr>
+        <p:txBody>
+          <a:bodyPr wrap="square">
+            <a:spAutoFit/>
+          </a:bodyPr>
+          <a:lstStyle/>
+          <a:p>
+            <a:r>
+              <a:rPr sz="2600" b="1" i="0">
+                <a:solidFill>
+                  <a:srgbClr val="FFFFFF"/>
+                </a:solidFill>
+                <a:latin typeface="Calibri"/>
+              </a:rPr>
+              <a:t>Para continuar (PI)</a:t>
+            </a:r>
+          </a:p>
+        </p:txBody>
+      </p:sp>
+      <p:sp>
+        <p:nvSpPr>
+          <p:cNvPr id="5" name="Rounded Rectangle 4"/>
+          <p:cNvSpPr/>
+          <p:nvPr/>
+        </p:nvSpPr>
+        <p:spPr>
+          <a:xfrm>
+            <a:off x="457200" y="1261872"/>
+            <a:ext cx="11277295" cy="1051560"/>
+          </a:xfrm>
+          <a:prstGeom prst="roundRect">
+            <a:avLst>
+              <a:gd name="adj" fmla="val 12000"/>
+            </a:avLst>
+          </a:prstGeom>
+          <a:solidFill>
+            <a:srgbClr val="E8F4FA"/>
+          </a:solidFill>
+          <a:ln>
+            <a:noFill/>
+          </a:ln>
+        </p:spPr>
+        <p:style>
+          <a:lnRef idx="1">
+            <a:schemeClr val="accent1"/>
+          </a:lnRef>
+          <a:fillRef idx="3">
+            <a:schemeClr val="accent1"/>
+          </a:fillRef>
+          <a:effectRef idx="2">
+            <a:schemeClr val="accent1"/>
+          </a:effectRef>
+          <a:fontRef idx="minor">
+            <a:schemeClr val="lt1"/>
+          </a:fontRef>
+        </p:style>
+        <p:txBody>
+          <a:bodyPr rtlCol="0" anchor="ctr"/>
+          <a:lstStyle/>
+          <a:p>
+            <a:pPr algn="ctr"/>
+          </a:p>
+        </p:txBody>
+      </p:sp>
+      <p:sp>
+        <p:nvSpPr>
+          <p:cNvPr id="6" name="Rectangle 5"/>
+          <p:cNvSpPr/>
+          <p:nvPr/>
+        </p:nvSpPr>
+        <p:spPr>
+          <a:xfrm>
+            <a:off x="457200" y="1261872"/>
+            <a:ext cx="128016" cy="1051560"/>
+          </a:xfrm>
+          <a:prstGeom prst="rect">
+            <a:avLst/>
+          </a:prstGeom>
+          <a:solidFill>
+            <a:srgbClr val="269CCB"/>
+          </a:solidFill>
+          <a:ln>
+            <a:noFill/>
+          </a:ln>
+        </p:spPr>
+        <p:style>
+          <a:lnRef idx="1">
+            <a:schemeClr val="accent1"/>
+          </a:lnRef>
+          <a:fillRef idx="3">
+            <a:schemeClr val="accent1"/>
+          </a:fillRef>
+          <a:effectRef idx="2">
+            <a:schemeClr val="accent1"/>
+          </a:effectRef>
+          <a:fontRef idx="minor">
+            <a:schemeClr val="lt1"/>
+          </a:fontRef>
+        </p:style>
+        <p:txBody>
+          <a:bodyPr rtlCol="0" anchor="ctr"/>
+          <a:lstStyle/>
+          <a:p>
+            <a:pPr algn="ctr"/>
+          </a:p>
+        </p:txBody>
+      </p:sp>
+      <p:sp>
+        <p:nvSpPr>
+          <p:cNvPr id="7" name="TextBox 6"/>
+          <p:cNvSpPr txBox="1"/>
+          <p:nvPr/>
+        </p:nvSpPr>
+        <p:spPr>
+          <a:xfrm>
+            <a:off x="777240" y="1399031"/>
+            <a:ext cx="10774375" cy="822959"/>
+          </a:xfrm>
+          <a:prstGeom prst="rect">
+            <a:avLst/>
+          </a:prstGeom>
+          <a:noFill/>
+        </p:spPr>
+        <p:txBody>
+          <a:bodyPr wrap="square">
+            <a:spAutoFit/>
+          </a:bodyPr>
+          <a:lstStyle/>
+          <a:p>
+            <a:r>
+              <a:rPr sz="1200" b="1" i="0">
+                <a:solidFill>
+                  <a:srgbClr val="269CCB"/>
+                </a:solidFill>
+                <a:latin typeface="Calibri"/>
+              </a:rPr>
+              <a:t>Info</a:t>
+            </a:r>
+          </a:p>
+          <a:p>
+            <a:pPr>
+              <a:spcBef>
+                <a:spcPts val="400"/>
+              </a:spcBef>
+            </a:pPr>
+            <a:r>
+              <a:rPr sz="1400" b="0" i="0">
+                <a:solidFill>
+                  <a:srgbClr val="333333"/>
+                </a:solidFill>
+                <a:latin typeface="Calibri"/>
+              </a:rPr>
+              <a:t>Entregable: .github/workflows/ci.yml + sección Monitoreo/CI del informe</a:t>
+            </a:r>
+          </a:p>
+        </p:txBody>
+      </p:sp>
+      <p:sp>
+        <p:nvSpPr>
+          <p:cNvPr id="8" name="Rounded Rectangle 7"/>
+          <p:cNvSpPr/>
+          <p:nvPr/>
+        </p:nvSpPr>
+        <p:spPr>
+          <a:xfrm>
+            <a:off x="457200" y="2478024"/>
+            <a:ext cx="11277295" cy="1051560"/>
+          </a:xfrm>
+          <a:prstGeom prst="roundRect">
+            <a:avLst>
+              <a:gd name="adj" fmla="val 12000"/>
+            </a:avLst>
+          </a:prstGeom>
+          <a:solidFill>
+            <a:srgbClr val="FFF8E1"/>
+          </a:solidFill>
+          <a:ln>
+            <a:noFill/>
+          </a:ln>
+        </p:spPr>
+        <p:style>
+          <a:lnRef idx="1">
+            <a:schemeClr val="accent1"/>
+          </a:lnRef>
+          <a:fillRef idx="3">
+            <a:schemeClr val="accent1"/>
+          </a:fillRef>
+          <a:effectRef idx="2">
+            <a:schemeClr val="accent1"/>
+          </a:effectRef>
+          <a:fontRef idx="minor">
+            <a:schemeClr val="lt1"/>
+          </a:fontRef>
+        </p:style>
+        <p:txBody>
+          <a:bodyPr rtlCol="0" anchor="ctr"/>
+          <a:lstStyle/>
+          <a:p>
+            <a:pPr algn="ctr"/>
+          </a:p>
+        </p:txBody>
+      </p:sp>
+      <p:sp>
+        <p:nvSpPr>
+          <p:cNvPr id="9" name="Rectangle 8"/>
+          <p:cNvSpPr/>
+          <p:nvPr/>
+        </p:nvSpPr>
+        <p:spPr>
+          <a:xfrm>
+            <a:off x="457200" y="2478024"/>
+            <a:ext cx="128016" cy="1051560"/>
+          </a:xfrm>
+          <a:prstGeom prst="rect">
+            <a:avLst/>
+          </a:prstGeom>
+          <a:solidFill>
+            <a:srgbClr val="FFD000"/>
+          </a:solidFill>
+          <a:ln>
+            <a:noFill/>
+          </a:ln>
+        </p:spPr>
+        <p:style>
+          <a:lnRef idx="1">
+            <a:schemeClr val="accent1"/>
+          </a:lnRef>
+          <a:fillRef idx="3">
+            <a:schemeClr val="accent1"/>
+          </a:fillRef>
+          <a:effectRef idx="2">
+            <a:schemeClr val="accent1"/>
+          </a:effectRef>
+          <a:fontRef idx="minor">
+            <a:schemeClr val="lt1"/>
+          </a:fontRef>
+        </p:style>
+        <p:txBody>
+          <a:bodyPr rtlCol="0" anchor="ctr"/>
+          <a:lstStyle/>
+          <a:p>
+            <a:pPr algn="ctr"/>
+          </a:p>
+        </p:txBody>
+      </p:sp>
+      <p:sp>
+        <p:nvSpPr>
+          <p:cNvPr id="10" name="TextBox 9"/>
+          <p:cNvSpPr txBox="1"/>
+          <p:nvPr/>
+        </p:nvSpPr>
+        <p:spPr>
+          <a:xfrm>
+            <a:off x="777240" y="2615184"/>
+            <a:ext cx="10774375" cy="822959"/>
+          </a:xfrm>
+          <a:prstGeom prst="rect">
+            <a:avLst/>
+          </a:prstGeom>
+          <a:noFill/>
+        </p:spPr>
+        <p:txBody>
+          <a:bodyPr wrap="square">
+            <a:spAutoFit/>
+          </a:bodyPr>
+          <a:lstStyle/>
+          <a:p>
+            <a:r>
+              <a:rPr sz="1200" b="1" i="0">
+                <a:solidFill>
+                  <a:srgbClr val="FFD000"/>
+                </a:solidFill>
+                <a:latin typeface="Calibri"/>
+              </a:rPr>
+              <a:t>Aclaración</a:t>
+            </a:r>
+          </a:p>
+          <a:p>
+            <a:pPr>
+              <a:spcBef>
+                <a:spcPts val="400"/>
+              </a:spcBef>
+            </a:pPr>
+            <a:r>
+              <a:rPr sz="1400" b="0" i="0">
+                <a:solidFill>
+                  <a:srgbClr val="333333"/>
+                </a:solidFill>
+                <a:latin typeface="Calibri"/>
+              </a:rPr>
+              <a:t>Subir evidencias al paquete CloudLite (Drive/repo) y a la plataforma del curso en la fecha que indique el docente.</a:t>
+            </a:r>
+          </a:p>
+        </p:txBody>
+      </p:sp>
+      <p:sp>
+        <p:nvSpPr>
+          <p:cNvPr id="11" name="Rounded Rectangle 10"/>
+          <p:cNvSpPr/>
+          <p:nvPr/>
+        </p:nvSpPr>
+        <p:spPr>
+          <a:xfrm>
+            <a:off x="457200" y="3694176"/>
+            <a:ext cx="11277295" cy="1051560"/>
+          </a:xfrm>
+          <a:prstGeom prst="roundRect">
+            <a:avLst>
+              <a:gd name="adj" fmla="val 12000"/>
+            </a:avLst>
+          </a:prstGeom>
+          <a:solidFill>
+            <a:srgbClr val="FBE4E4"/>
+          </a:solidFill>
+          <a:ln>
+            <a:noFill/>
+          </a:ln>
+        </p:spPr>
+        <p:style>
+          <a:lnRef idx="1">
+            <a:schemeClr val="accent1"/>
+          </a:lnRef>
+          <a:fillRef idx="3">
+            <a:schemeClr val="accent1"/>
+          </a:fillRef>
+          <a:effectRef idx="2">
+            <a:schemeClr val="accent1"/>
+          </a:effectRef>
+          <a:fontRef idx="minor">
+            <a:schemeClr val="lt1"/>
+          </a:fontRef>
+        </p:style>
+        <p:txBody>
+          <a:bodyPr rtlCol="0" anchor="ctr"/>
+          <a:lstStyle/>
+          <a:p>
+            <a:pPr algn="ctr"/>
+          </a:p>
+        </p:txBody>
+      </p:sp>
+      <p:sp>
+        <p:nvSpPr>
+          <p:cNvPr id="12" name="Rectangle 11"/>
+          <p:cNvSpPr/>
+          <p:nvPr/>
+        </p:nvSpPr>
+        <p:spPr>
+          <a:xfrm>
+            <a:off x="457200" y="3694176"/>
+            <a:ext cx="128016" cy="1051560"/>
+          </a:xfrm>
+          <a:prstGeom prst="rect">
+            <a:avLst/>
+          </a:prstGeom>
+          <a:solidFill>
+            <a:srgbClr val="A02030"/>
+          </a:solidFill>
+          <a:ln>
+            <a:noFill/>
+          </a:ln>
+        </p:spPr>
+        <p:style>
+          <a:lnRef idx="1">
+            <a:schemeClr val="accent1"/>
+          </a:lnRef>
+          <a:fillRef idx="3">
+            <a:schemeClr val="accent1"/>
+          </a:fillRef>
+          <a:effectRef idx="2">
+            <a:schemeClr val="accent1"/>
+          </a:effectRef>
+          <a:fontRef idx="minor">
+            <a:schemeClr val="lt1"/>
+          </a:fontRef>
+        </p:style>
+        <p:txBody>
+          <a:bodyPr rtlCol="0" anchor="ctr"/>
+          <a:lstStyle/>
+          <a:p>
+            <a:pPr algn="ctr"/>
+          </a:p>
+        </p:txBody>
+      </p:sp>
+      <p:sp>
+        <p:nvSpPr>
+          <p:cNvPr id="13" name="TextBox 12"/>
+          <p:cNvSpPr txBox="1"/>
+          <p:nvPr/>
+        </p:nvSpPr>
+        <p:spPr>
+          <a:xfrm>
+            <a:off x="777240" y="3831336"/>
+            <a:ext cx="10774375" cy="822959"/>
+          </a:xfrm>
+          <a:prstGeom prst="rect">
+            <a:avLst/>
+          </a:prstGeom>
+          <a:noFill/>
+        </p:spPr>
+        <p:txBody>
+          <a:bodyPr wrap="square">
+            <a:spAutoFit/>
+          </a:bodyPr>
+          <a:lstStyle/>
+          <a:p>
+            <a:r>
+              <a:rPr sz="1200" b="1" i="0">
+                <a:solidFill>
+                  <a:srgbClr val="A02030"/>
+                </a:solidFill>
+                <a:latin typeface="Calibri"/>
+              </a:rPr>
+              <a:t>Atención</a:t>
+            </a:r>
+          </a:p>
+          <a:p>
+            <a:pPr>
+              <a:spcBef>
+                <a:spcPts val="400"/>
+              </a:spcBef>
+            </a:pPr>
+            <a:r>
+              <a:rPr sz="1400" b="0" i="0">
+                <a:solidFill>
+                  <a:srgbClr val="333333"/>
+                </a:solidFill>
+                <a:latin typeface="Calibri"/>
+              </a:rPr>
+              <a:t>Sin cloud de pago ni instalaciones obligatorias de hipervisores/Docker Desktop.</a:t>
+            </a:r>
+          </a:p>
+        </p:txBody>
+      </p:sp>
+      <p:sp>
+        <p:nvSpPr>
+          <p:cNvPr id="14" name="TextBox 13"/>
+          <p:cNvSpPr txBox="1"/>
+          <p:nvPr/>
+        </p:nvSpPr>
+        <p:spPr>
+          <a:xfrm>
+            <a:off x="11185855" y="6473952"/>
+            <a:ext cx="640080" cy="274320"/>
+          </a:xfrm>
+          <a:prstGeom prst="rect">
+            <a:avLst/>
+          </a:prstGeom>
+          <a:noFill/>
+        </p:spPr>
+        <p:txBody>
+          <a:bodyPr wrap="square">
+            <a:spAutoFit/>
+          </a:bodyPr>
+          <a:lstStyle/>
+          <a:p>
+            <a:pPr algn="r"/>
+            <a:r>
+              <a:rPr sz="1100" b="0" i="0">
+                <a:solidFill>
+                  <a:srgbClr val="666666"/>
+                </a:solidFill>
+                <a:latin typeface="Calibri"/>
+              </a:rPr>
+              <a:t>33</a:t>
+            </a:r>
+          </a:p>
+        </p:txBody>
+      </p:sp>
+    </p:spTree>
+  </p:cSld>
+  <p:clrMapOvr>
+    <a:masterClrMapping/>
+  </p:clrMapOvr>
+</p:sld>
+</file>
+
+<file path=ppt/slides/slide34.xml><?xml version="1.0" encoding="utf-8"?>
 <p:sld xmlns:a="http://schemas.openxmlformats.org/drawingml/2006/main" xmlns:p="http://schemas.openxmlformats.org/presentationml/2006/main" xmlns:r="http://schemas.openxmlformats.org/officeDocument/2006/relationships">
   <p:cSld>
     <p:bg>

--- a/Arquitectura de Sistemas Computacionales/Clases/Clase 8 - Monitoreo optimizacion y CI-CD/Presentacion.pptx
+++ b/Arquitectura de Sistemas Computacionales/Clases/Clase 8 - Monitoreo optimizacion y CI-CD/Presentacion.pptx
@@ -9151,7 +9151,7 @@
                 </a:solidFill>
                 <a:latin typeface="Calibri"/>
               </a:rPr>
-              <a:t>Los secretos en el workflow, y hasta donde llega el pipeline</a:t>
+              <a:t>Secretos en el workflow, y hasta donde llega el pipeline</a:t>
             </a:r>
           </a:p>
         </p:txBody>
@@ -11395,7 +11395,7 @@
                 </a:solidFill>
                 <a:latin typeface="Calibri"/>
               </a:rPr>
-              <a:t>GitHub Actions · Google Docs</a:t>
+              <a:t>Navegador · editor de código del curso (YAML)</a:t>
             </a:r>
           </a:p>
           <a:p>
@@ -12233,7 +12233,7 @@
                 </a:solidFill>
                 <a:latin typeface="Calibri"/>
               </a:rPr>
-              <a:t>Subir evidencias al paquete CloudLite (Drive/repo) y a la plataforma del curso en la fecha que indique el docente.</a:t>
+              <a:t>Subir evidencias al paquete CloudLite (Drive/repo) y a la plataforma del curso (la plataforma del curso) en la fecha que indique el docente.</a:t>
             </a:r>
           </a:p>
         </p:txBody>

--- a/Arquitectura de Sistemas Computacionales/Clases/Clase 8 - Monitoreo optimizacion y CI-CD/Presentacion.pptx
+++ b/Arquitectura de Sistemas Computacionales/Clases/Clase 8 - Monitoreo optimizacion y CI-CD/Presentacion.pptx
@@ -12,33 +12,29 @@
     <p:sldId id="260" r:id="rId11"/>
     <p:sldId id="261" r:id="rId12"/>
     <p:sldId id="262" r:id="rId13"/>
-    <p:sldId id="263" r:id="rId14"/>
-    <p:sldId id="264" r:id="rId15"/>
-    <p:sldId id="265" r:id="rId16"/>
-    <p:sldId id="266" r:id="rId17"/>
-    <p:sldId id="267" r:id="rId18"/>
-    <p:sldId id="268" r:id="rId19"/>
-    <p:sldId id="269" r:id="rId20"/>
-    <p:sldId id="270" r:id="rId21"/>
-    <p:sldId id="271" r:id="rId22"/>
-    <p:sldId id="272" r:id="rId23"/>
-    <p:sldId id="273" r:id="rId24"/>
-    <p:sldId id="274" r:id="rId25"/>
-    <p:sldId id="275" r:id="rId26"/>
-    <p:sldId id="276" r:id="rId27"/>
-    <p:sldId id="277" r:id="rId28"/>
-    <p:sldId id="278" r:id="rId29"/>
-    <p:sldId id="279" r:id="rId30"/>
-    <p:sldId id="280" r:id="rId31"/>
-    <p:sldId id="281" r:id="rId32"/>
-    <p:sldId id="282" r:id="rId33"/>
-    <p:sldId id="283" r:id="rId34"/>
-    <p:sldId id="284" r:id="rId35"/>
-    <p:sldId id="285" r:id="rId36"/>
-    <p:sldId id="286" r:id="rId37"/>
-    <p:sldId id="287" r:id="rId38"/>
-    <p:sldId id="288" r:id="rId39"/>
-    <p:sldId id="289" r:id="rId40"/>
+    <p:sldId id="263" r:id="rId15"/>
+    <p:sldId id="264" r:id="rId16"/>
+    <p:sldId id="265" r:id="rId17"/>
+    <p:sldId id="266" r:id="rId18"/>
+    <p:sldId id="267" r:id="rId19"/>
+    <p:sldId id="268" r:id="rId20"/>
+    <p:sldId id="269" r:id="rId21"/>
+    <p:sldId id="270" r:id="rId22"/>
+    <p:sldId id="271" r:id="rId23"/>
+    <p:sldId id="272" r:id="rId24"/>
+    <p:sldId id="273" r:id="rId25"/>
+    <p:sldId id="274" r:id="rId26"/>
+    <p:sldId id="275" r:id="rId27"/>
+    <p:sldId id="276" r:id="rId28"/>
+    <p:sldId id="277" r:id="rId29"/>
+    <p:sldId id="278" r:id="rId30"/>
+    <p:sldId id="279" r:id="rId31"/>
+    <p:sldId id="280" r:id="rId32"/>
+    <p:sldId id="281" r:id="rId33"/>
+    <p:sldId id="282" r:id="rId34"/>
+    <p:sldId id="283" r:id="rId35"/>
+    <p:sldId id="284" r:id="rId36"/>
+    <p:sldId id="285" r:id="rId37"/>
   </p:sldIdLst>
   <p:sldSz cx="12191695" cy="6858000" type="screen4x3"/>
   <p:notesSz cx="6858000" cy="9144000"/>
@@ -138,6 +134,1134 @@
     </a:lvl9pPr>
   </p:defaultTextStyle>
 </p:presentation>
+</file>
+
+<file path=ppt/notesMasters/notesMaster1.xml><?xml version="1.0" encoding="utf-8"?>
+<p:notesMaster xmlns:a="http://schemas.openxmlformats.org/drawingml/2006/main" xmlns:p="http://schemas.openxmlformats.org/presentationml/2006/main" xmlns:r="http://schemas.openxmlformats.org/officeDocument/2006/relationships">
+  <p:cSld>
+    <p:bg>
+      <p:bgRef idx="1001">
+        <a:schemeClr val="bg1"/>
+      </p:bgRef>
+    </p:bg>
+    <p:spTree>
+      <p:nvGrpSpPr>
+        <p:cNvPr id="1" name=""/>
+        <p:cNvGrpSpPr/>
+        <p:nvPr/>
+      </p:nvGrpSpPr>
+      <p:grpSpPr>
+        <a:xfrm>
+          <a:off x="0" y="0"/>
+          <a:ext cx="0" cy="0"/>
+          <a:chOff x="0" y="0"/>
+          <a:chExt cx="0" cy="0"/>
+        </a:xfrm>
+      </p:grpSpPr>
+      <p:sp>
+        <p:nvSpPr>
+          <p:cNvPr id="2" name="Header Placeholder 1"/>
+          <p:cNvSpPr>
+            <a:spLocks noGrp="1"/>
+          </p:cNvSpPr>
+          <p:nvPr>
+            <p:ph type="hdr" sz="quarter"/>
+          </p:nvPr>
+        </p:nvSpPr>
+        <p:spPr>
+          <a:xfrm>
+            <a:off x="0" y="0"/>
+            <a:ext cx="2971800" cy="457200"/>
+          </a:xfrm>
+          <a:prstGeom prst="rect">
+            <a:avLst/>
+          </a:prstGeom>
+        </p:spPr>
+        <p:txBody>
+          <a:bodyPr vert="horz" lIns="91440" tIns="45720" rIns="91440" bIns="45720" rtlCol="0"/>
+          <a:lstStyle>
+            <a:lvl1pPr algn="l">
+              <a:defRPr sz="1200"/>
+            </a:lvl1pPr>
+          </a:lstStyle>
+          <a:p>
+            <a:endParaRPr lang="en-US"/>
+          </a:p>
+        </p:txBody>
+      </p:sp>
+      <p:sp>
+        <p:nvSpPr>
+          <p:cNvPr id="3" name="Date Placeholder 2"/>
+          <p:cNvSpPr>
+            <a:spLocks noGrp="1"/>
+          </p:cNvSpPr>
+          <p:nvPr>
+            <p:ph type="dt" idx="1"/>
+          </p:nvPr>
+        </p:nvSpPr>
+        <p:spPr>
+          <a:xfrm>
+            <a:off x="3884613" y="0"/>
+            <a:ext cx="2971800" cy="457200"/>
+          </a:xfrm>
+          <a:prstGeom prst="rect">
+            <a:avLst/>
+          </a:prstGeom>
+        </p:spPr>
+        <p:txBody>
+          <a:bodyPr vert="horz" lIns="91440" tIns="45720" rIns="91440" bIns="45720" rtlCol="0"/>
+          <a:lstStyle>
+            <a:lvl1pPr algn="r">
+              <a:defRPr sz="1200"/>
+            </a:lvl1pPr>
+          </a:lstStyle>
+          <a:p>
+            <a:fld id="{0F89C1C7-3DCD-1040-A9CF-14679D8B5DDD}" type="datetimeFigureOut">
+              <a:rPr lang="en-US" smtClean="0"/>
+              <a:t>10/17/16</a:t>
+            </a:fld>
+            <a:endParaRPr lang="en-US"/>
+          </a:p>
+        </p:txBody>
+      </p:sp>
+      <p:sp>
+        <p:nvSpPr>
+          <p:cNvPr id="4" name="Slide Image Placeholder 3"/>
+          <p:cNvSpPr>
+            <a:spLocks noGrp="1" noRot="1" noChangeAspect="1"/>
+          </p:cNvSpPr>
+          <p:nvPr>
+            <p:ph type="sldImg" idx="2"/>
+          </p:nvPr>
+        </p:nvSpPr>
+        <p:spPr>
+          <a:xfrm>
+            <a:off x="1143000" y="685800"/>
+            <a:ext cx="4572000" cy="3429000"/>
+          </a:xfrm>
+          <a:prstGeom prst="rect">
+            <a:avLst/>
+          </a:prstGeom>
+          <a:noFill/>
+          <a:ln w="12700">
+            <a:solidFill>
+              <a:prstClr val="black"/>
+            </a:solidFill>
+          </a:ln>
+        </p:spPr>
+        <p:txBody>
+          <a:bodyPr vert="horz" lIns="91440" tIns="45720" rIns="91440" bIns="45720" rtlCol="0" anchor="ctr"/>
+          <a:lstStyle/>
+          <a:p>
+            <a:endParaRPr lang="en-US"/>
+          </a:p>
+        </p:txBody>
+      </p:sp>
+      <p:sp>
+        <p:nvSpPr>
+          <p:cNvPr id="5" name="Notes Placeholder 4"/>
+          <p:cNvSpPr>
+            <a:spLocks noGrp="1"/>
+          </p:cNvSpPr>
+          <p:nvPr>
+            <p:ph type="body" sz="quarter" idx="3"/>
+          </p:nvPr>
+        </p:nvSpPr>
+        <p:spPr>
+          <a:xfrm>
+            <a:off x="685800" y="4343400"/>
+            <a:ext cx="5486400" cy="4114800"/>
+          </a:xfrm>
+          <a:prstGeom prst="rect">
+            <a:avLst/>
+          </a:prstGeom>
+        </p:spPr>
+        <p:txBody>
+          <a:bodyPr vert="horz" lIns="91440" tIns="45720" rIns="91440" bIns="45720" rtlCol="0"/>
+          <a:lstStyle/>
+          <a:p>
+            <a:pPr lvl="0"/>
+            <a:r>
+              <a:rPr lang="en-US" smtClean="0"/>
+              <a:t>Click to edit Master text styles</a:t>
+            </a:r>
+          </a:p>
+          <a:p>
+            <a:pPr lvl="1"/>
+            <a:r>
+              <a:rPr lang="en-US" smtClean="0"/>
+              <a:t>Second level</a:t>
+            </a:r>
+          </a:p>
+          <a:p>
+            <a:pPr lvl="2"/>
+            <a:r>
+              <a:rPr lang="en-US" smtClean="0"/>
+              <a:t>Third level</a:t>
+            </a:r>
+          </a:p>
+          <a:p>
+            <a:pPr lvl="3"/>
+            <a:r>
+              <a:rPr lang="en-US" smtClean="0"/>
+              <a:t>Fourth level</a:t>
+            </a:r>
+          </a:p>
+          <a:p>
+            <a:pPr lvl="4"/>
+            <a:r>
+              <a:rPr lang="en-US" smtClean="0"/>
+              <a:t>Fifth level</a:t>
+            </a:r>
+            <a:endParaRPr lang="en-US"/>
+          </a:p>
+        </p:txBody>
+      </p:sp>
+      <p:sp>
+        <p:nvSpPr>
+          <p:cNvPr id="6" name="Footer Placeholder 5"/>
+          <p:cNvSpPr>
+            <a:spLocks noGrp="1"/>
+          </p:cNvSpPr>
+          <p:nvPr>
+            <p:ph type="ftr" sz="quarter" idx="4"/>
+          </p:nvPr>
+        </p:nvSpPr>
+        <p:spPr>
+          <a:xfrm>
+            <a:off x="0" y="8685213"/>
+            <a:ext cx="2971800" cy="457200"/>
+          </a:xfrm>
+          <a:prstGeom prst="rect">
+            <a:avLst/>
+          </a:prstGeom>
+        </p:spPr>
+        <p:txBody>
+          <a:bodyPr vert="horz" lIns="91440" tIns="45720" rIns="91440" bIns="45720" rtlCol="0" anchor="b"/>
+          <a:lstStyle>
+            <a:lvl1pPr algn="l">
+              <a:defRPr sz="1200"/>
+            </a:lvl1pPr>
+          </a:lstStyle>
+          <a:p>
+            <a:endParaRPr lang="en-US"/>
+          </a:p>
+        </p:txBody>
+      </p:sp>
+      <p:sp>
+        <p:nvSpPr>
+          <p:cNvPr id="7" name="Slide Number Placeholder 6"/>
+          <p:cNvSpPr>
+            <a:spLocks noGrp="1"/>
+          </p:cNvSpPr>
+          <p:nvPr>
+            <p:ph type="sldNum" sz="quarter" idx="5"/>
+          </p:nvPr>
+        </p:nvSpPr>
+        <p:spPr>
+          <a:xfrm>
+            <a:off x="3884613" y="8685213"/>
+            <a:ext cx="2971800" cy="457200"/>
+          </a:xfrm>
+          <a:prstGeom prst="rect">
+            <a:avLst/>
+          </a:prstGeom>
+        </p:spPr>
+        <p:txBody>
+          <a:bodyPr vert="horz" lIns="91440" tIns="45720" rIns="91440" bIns="45720" rtlCol="0" anchor="b"/>
+          <a:lstStyle>
+            <a:lvl1pPr algn="r">
+              <a:defRPr sz="1200"/>
+            </a:lvl1pPr>
+          </a:lstStyle>
+          <a:p>
+            <a:fld id="{BB5E49A5-4136-284D-997B-48E1D791AD67}" type="slidenum">
+              <a:rPr lang="en-US" smtClean="0"/>
+              <a:t>‹#›</a:t>
+            </a:fld>
+            <a:endParaRPr lang="en-US"/>
+          </a:p>
+        </p:txBody>
+      </p:sp>
+    </p:spTree>
+    <p:extLst>
+      <p:ext uri="{BB962C8B-B14F-4D97-AF65-F5344CB8AC3E}">
+        <p14:creationId xmlns:p14="http://schemas.microsoft.com/office/powerpoint/2010/main" val="2623252185"/>
+      </p:ext>
+    </p:extLst>
+  </p:cSld>
+  <p:clrMap bg1="lt1" tx1="dk1" bg2="lt2" tx2="dk2" accent1="accent1" accent2="accent2" accent3="accent3" accent4="accent4" accent5="accent5" accent6="accent6" hlink="hlink" folHlink="folHlink"/>
+  <p:notesStyle>
+    <a:lvl1pPr marL="0" algn="l" defTabSz="457200" rtl="0" eaLnBrk="1" latinLnBrk="0" hangingPunct="1">
+      <a:defRPr sz="1200" kern="1200">
+        <a:solidFill>
+          <a:schemeClr val="tx1"/>
+        </a:solidFill>
+        <a:latin typeface="+mn-lt"/>
+        <a:ea typeface="+mn-ea"/>
+        <a:cs typeface="+mn-cs"/>
+      </a:defRPr>
+    </a:lvl1pPr>
+    <a:lvl2pPr marL="457200" algn="l" defTabSz="457200" rtl="0" eaLnBrk="1" latinLnBrk="0" hangingPunct="1">
+      <a:defRPr sz="1200" kern="1200">
+        <a:solidFill>
+          <a:schemeClr val="tx1"/>
+        </a:solidFill>
+        <a:latin typeface="+mn-lt"/>
+        <a:ea typeface="+mn-ea"/>
+        <a:cs typeface="+mn-cs"/>
+      </a:defRPr>
+    </a:lvl2pPr>
+    <a:lvl3pPr marL="914400" algn="l" defTabSz="457200" rtl="0" eaLnBrk="1" latinLnBrk="0" hangingPunct="1">
+      <a:defRPr sz="1200" kern="1200">
+        <a:solidFill>
+          <a:schemeClr val="tx1"/>
+        </a:solidFill>
+        <a:latin typeface="+mn-lt"/>
+        <a:ea typeface="+mn-ea"/>
+        <a:cs typeface="+mn-cs"/>
+      </a:defRPr>
+    </a:lvl3pPr>
+    <a:lvl4pPr marL="1371600" algn="l" defTabSz="457200" rtl="0" eaLnBrk="1" latinLnBrk="0" hangingPunct="1">
+      <a:defRPr sz="1200" kern="1200">
+        <a:solidFill>
+          <a:schemeClr val="tx1"/>
+        </a:solidFill>
+        <a:latin typeface="+mn-lt"/>
+        <a:ea typeface="+mn-ea"/>
+        <a:cs typeface="+mn-cs"/>
+      </a:defRPr>
+    </a:lvl4pPr>
+    <a:lvl5pPr marL="1828800" algn="l" defTabSz="457200" rtl="0" eaLnBrk="1" latinLnBrk="0" hangingPunct="1">
+      <a:defRPr sz="1200" kern="1200">
+        <a:solidFill>
+          <a:schemeClr val="tx1"/>
+        </a:solidFill>
+        <a:latin typeface="+mn-lt"/>
+        <a:ea typeface="+mn-ea"/>
+        <a:cs typeface="+mn-cs"/>
+      </a:defRPr>
+    </a:lvl5pPr>
+    <a:lvl6pPr marL="2286000" algn="l" defTabSz="457200" rtl="0" eaLnBrk="1" latinLnBrk="0" hangingPunct="1">
+      <a:defRPr sz="1200" kern="1200">
+        <a:solidFill>
+          <a:schemeClr val="tx1"/>
+        </a:solidFill>
+        <a:latin typeface="+mn-lt"/>
+        <a:ea typeface="+mn-ea"/>
+        <a:cs typeface="+mn-cs"/>
+      </a:defRPr>
+    </a:lvl6pPr>
+    <a:lvl7pPr marL="2743200" algn="l" defTabSz="457200" rtl="0" eaLnBrk="1" latinLnBrk="0" hangingPunct="1">
+      <a:defRPr sz="1200" kern="1200">
+        <a:solidFill>
+          <a:schemeClr val="tx1"/>
+        </a:solidFill>
+        <a:latin typeface="+mn-lt"/>
+        <a:ea typeface="+mn-ea"/>
+        <a:cs typeface="+mn-cs"/>
+      </a:defRPr>
+    </a:lvl7pPr>
+    <a:lvl8pPr marL="3200400" algn="l" defTabSz="457200" rtl="0" eaLnBrk="1" latinLnBrk="0" hangingPunct="1">
+      <a:defRPr sz="1200" kern="1200">
+        <a:solidFill>
+          <a:schemeClr val="tx1"/>
+        </a:solidFill>
+        <a:latin typeface="+mn-lt"/>
+        <a:ea typeface="+mn-ea"/>
+        <a:cs typeface="+mn-cs"/>
+      </a:defRPr>
+    </a:lvl8pPr>
+    <a:lvl9pPr marL="3657600" algn="l" defTabSz="457200" rtl="0" eaLnBrk="1" latinLnBrk="0" hangingPunct="1">
+      <a:defRPr sz="1200" kern="1200">
+        <a:solidFill>
+          <a:schemeClr val="tx1"/>
+        </a:solidFill>
+        <a:latin typeface="+mn-lt"/>
+        <a:ea typeface="+mn-ea"/>
+        <a:cs typeface="+mn-cs"/>
+      </a:defRPr>
+    </a:lvl9pPr>
+  </p:notesStyle>
+</p:notesMaster>
+</file>
+
+<file path=ppt/notesSlides/notesSlide1.xml><?xml version="1.0" encoding="utf-8"?>
+<p:notes xmlns:a="http://schemas.openxmlformats.org/drawingml/2006/main" xmlns:p="http://schemas.openxmlformats.org/presentationml/2006/main" xmlns:r="http://schemas.openxmlformats.org/officeDocument/2006/relationships">
+  <p:cSld>
+    <p:spTree>
+      <p:nvGrpSpPr>
+        <p:cNvPr id="1" name=""/>
+        <p:cNvGrpSpPr/>
+        <p:nvPr/>
+      </p:nvGrpSpPr>
+      <p:grpSpPr>
+        <a:xfrm>
+          <a:off x="0" y="0"/>
+          <a:ext cx="0" cy="0"/>
+          <a:chOff x="0" y="0"/>
+          <a:chExt cx="0" cy="0"/>
+        </a:xfrm>
+      </p:grpSpPr>
+      <p:sp>
+        <p:nvSpPr>
+          <p:cNvPr id="2" name="Slide Image Placeholder 1"/>
+          <p:cNvSpPr>
+            <a:spLocks noGrp="1"/>
+          </p:cNvSpPr>
+          <p:nvPr>
+            <p:ph type="sldImg" idx="2"/>
+          </p:nvPr>
+        </p:nvSpPr>
+        <p:spPr/>
+      </p:sp>
+      <p:sp>
+        <p:nvSpPr>
+          <p:cNvPr id="3" name="Notes Placeholder 2"/>
+          <p:cNvSpPr>
+            <a:spLocks noGrp="1"/>
+          </p:cNvSpPr>
+          <p:nvPr>
+            <p:ph type="body" idx="3" sz="quarter"/>
+          </p:nvPr>
+        </p:nvSpPr>
+        <p:spPr/>
+        <p:txBody>
+          <a:bodyPr/>
+          <a:lstStyle/>
+          <a:p>
+            <a:r>
+              <a:t>Lo que se califica hoy son 25 de los 100 puntos de la actividad del Corte 2, en cuatro preguntas: 10 puntos el contenido completo del ci.yml, 5 explicar que hace de verdad la construccion y la prueba y con que condicion el pipeline debe fallar, 4 distinguir CI de CD y ubicar hasta donde llego el propio trabajo, y 6 la tabla de senales de monitoreo con umbral.</a:t>
+            </a:r>
+          </a:p>
+          <a:p/>
+          <a:p>
+            <a:r>
+              <a:t>Conviene decir el reparto al abrir la clase, porque las dos preguntas que el grupo subestima, la 8 y la 10, valen juntas mas que el YAML.</a:t>
+            </a:r>
+          </a:p>
+        </p:txBody>
+      </p:sp>
+      <p:sp>
+        <p:nvSpPr>
+          <p:cNvPr id="4" name="Slide Number Placeholder 3"/>
+          <p:cNvSpPr>
+            <a:spLocks noGrp="1"/>
+          </p:cNvSpPr>
+          <p:nvPr>
+            <p:ph type="sldNum" idx="5" sz="quarter"/>
+          </p:nvPr>
+        </p:nvSpPr>
+        <p:spPr/>
+      </p:sp>
+    </p:spTree>
+  </p:cSld>
+  <p:clrMapOvr>
+    <a:masterClrMapping/>
+  </p:clrMapOvr>
+</p:notes>
+</file>
+
+<file path=ppt/notesSlides/notesSlide10.xml><?xml version="1.0" encoding="utf-8"?>
+<p:notes xmlns:a="http://schemas.openxmlformats.org/drawingml/2006/main" xmlns:p="http://schemas.openxmlformats.org/presentationml/2006/main" xmlns:r="http://schemas.openxmlformats.org/officeDocument/2006/relationships">
+  <p:cSld>
+    <p:spTree>
+      <p:nvGrpSpPr>
+        <p:cNvPr id="1" name=""/>
+        <p:cNvGrpSpPr/>
+        <p:nvPr/>
+      </p:nvGrpSpPr>
+      <p:grpSpPr>
+        <a:xfrm>
+          <a:off x="0" y="0"/>
+          <a:ext cx="0" cy="0"/>
+          <a:chOff x="0" y="0"/>
+          <a:chExt cx="0" cy="0"/>
+        </a:xfrm>
+      </p:grpSpPr>
+      <p:sp>
+        <p:nvSpPr>
+          <p:cNvPr id="2" name="Slide Image Placeholder 1"/>
+          <p:cNvSpPr>
+            <a:spLocks noGrp="1"/>
+          </p:cNvSpPr>
+          <p:nvPr>
+            <p:ph type="sldImg" idx="2"/>
+          </p:nvPr>
+        </p:nvSpPr>
+        <p:spPr/>
+      </p:sp>
+      <p:sp>
+        <p:nvSpPr>
+          <p:cNvPr id="3" name="Notes Placeholder 2"/>
+          <p:cNvSpPr>
+            <a:spLocks noGrp="1"/>
+          </p:cNvSpPr>
+          <p:nvPr>
+            <p:ph type="body" idx="3" sz="quarter"/>
+          </p:nvPr>
+        </p:nvSpPr>
+        <p:spPr/>
+        <p:txBody>
+          <a:bodyPr/>
+          <a:lstStyle/>
+          <a:p>
+            <a:r>
+              <a:t>Cuatro que aparecen todos los semestres.</a:t>
+            </a:r>
+          </a:p>
+          <a:p/>
+          <a:p>
+            <a:r>
+              <a:t>Un umbral justificado asi vale, aunque despues la medicion lo corrija.</a:t>
+            </a:r>
+          </a:p>
+        </p:txBody>
+      </p:sp>
+      <p:sp>
+        <p:nvSpPr>
+          <p:cNvPr id="4" name="Slide Number Placeholder 3"/>
+          <p:cNvSpPr>
+            <a:spLocks noGrp="1"/>
+          </p:cNvSpPr>
+          <p:nvPr>
+            <p:ph type="sldNum" idx="5" sz="quarter"/>
+          </p:nvPr>
+        </p:nvSpPr>
+        <p:spPr/>
+      </p:sp>
+    </p:spTree>
+  </p:cSld>
+  <p:clrMapOvr>
+    <a:masterClrMapping/>
+  </p:clrMapOvr>
+</p:notes>
+</file>
+
+<file path=ppt/notesSlides/notesSlide2.xml><?xml version="1.0" encoding="utf-8"?>
+<p:notes xmlns:a="http://schemas.openxmlformats.org/drawingml/2006/main" xmlns:p="http://schemas.openxmlformats.org/presentationml/2006/main" xmlns:r="http://schemas.openxmlformats.org/officeDocument/2006/relationships">
+  <p:cSld>
+    <p:spTree>
+      <p:nvGrpSpPr>
+        <p:cNvPr id="1" name=""/>
+        <p:cNvGrpSpPr/>
+        <p:nvPr/>
+      </p:nvGrpSpPr>
+      <p:grpSpPr>
+        <a:xfrm>
+          <a:off x="0" y="0"/>
+          <a:ext cx="0" cy="0"/>
+          <a:chOff x="0" y="0"/>
+          <a:chExt cx="0" cy="0"/>
+        </a:xfrm>
+      </p:grpSpPr>
+      <p:sp>
+        <p:nvSpPr>
+          <p:cNvPr id="2" name="Slide Image Placeholder 1"/>
+          <p:cNvSpPr>
+            <a:spLocks noGrp="1"/>
+          </p:cNvSpPr>
+          <p:nvPr>
+            <p:ph type="sldImg" idx="2"/>
+          </p:nvPr>
+        </p:nvSpPr>
+        <p:spPr/>
+      </p:sp>
+      <p:sp>
+        <p:nvSpPr>
+          <p:cNvPr id="3" name="Notes Placeholder 2"/>
+          <p:cNvSpPr>
+            <a:spLocks noGrp="1"/>
+          </p:cNvSpPr>
+          <p:nvPr>
+            <p:ph type="body" idx="3" sz="quarter"/>
+          </p:nvPr>
+        </p:nvSpPr>
+        <p:spPr/>
+        <p:txBody>
+          <a:bodyPr/>
+          <a:lstStyle/>
+          <a:p>
+            <a:r>
+              <a:t>Entrega continua significa que cada cambio que pasa la validacion queda listo para desplegarse, empaquetado y probado, pero un humano decide cuando se aprieta el boton.</a:t>
+            </a:r>
+          </a:p>
+          <a:p/>
+          <a:p>
+            <a:r>
+              <a:t>El pipeline llega hasta «listo para desplegar» y la etapa final imprime un mensaje y publica un artefacto en lugar de subir a un servidor real.</a:t>
+            </a:r>
+          </a:p>
+          <a:p/>
+          <a:p>
+            <a:r>
+              <a:t>Hay que decirlo explicito: lo simulado es el ultimo paso, no el pipeline; todo lo anterior es real y ejecutable.</a:t>
+            </a:r>
+          </a:p>
+        </p:txBody>
+      </p:sp>
+      <p:sp>
+        <p:nvSpPr>
+          <p:cNvPr id="4" name="Slide Number Placeholder 3"/>
+          <p:cNvSpPr>
+            <a:spLocks noGrp="1"/>
+          </p:cNvSpPr>
+          <p:nvPr>
+            <p:ph type="sldNum" idx="5" sz="quarter"/>
+          </p:nvPr>
+        </p:nvSpPr>
+        <p:spPr/>
+      </p:sp>
+    </p:spTree>
+  </p:cSld>
+  <p:clrMapOvr>
+    <a:masterClrMapping/>
+  </p:clrMapOvr>
+</p:notes>
+</file>
+
+<file path=ppt/notesSlides/notesSlide3.xml><?xml version="1.0" encoding="utf-8"?>
+<p:notes xmlns:a="http://schemas.openxmlformats.org/drawingml/2006/main" xmlns:p="http://schemas.openxmlformats.org/presentationml/2006/main" xmlns:r="http://schemas.openxmlformats.org/officeDocument/2006/relationships">
+  <p:cSld>
+    <p:spTree>
+      <p:nvGrpSpPr>
+        <p:cNvPr id="1" name=""/>
+        <p:cNvGrpSpPr/>
+        <p:nvPr/>
+      </p:nvGrpSpPr>
+      <p:grpSpPr>
+        <a:xfrm>
+          <a:off x="0" y="0"/>
+          <a:ext cx="0" cy="0"/>
+          <a:chOff x="0" y="0"/>
+          <a:chExt cx="0" cy="0"/>
+        </a:xfrm>
+      </p:grpSpPr>
+      <p:sp>
+        <p:nvSpPr>
+          <p:cNvPr id="2" name="Slide Image Placeholder 1"/>
+          <p:cNvSpPr>
+            <a:spLocks noGrp="1"/>
+          </p:cNvSpPr>
+          <p:nvPr>
+            <p:ph type="sldImg" idx="2"/>
+          </p:nvPr>
+        </p:nvSpPr>
+        <p:spPr/>
+      </p:sp>
+      <p:sp>
+        <p:nvSpPr>
+          <p:cNvPr id="3" name="Notes Placeholder 2"/>
+          <p:cNvSpPr>
+            <a:spLocks noGrp="1"/>
+          </p:cNvSpPr>
+          <p:nvPr>
+            <p:ph type="body" idx="3" sz="quarter"/>
+          </p:nvPr>
+        </p:nvSpPr>
+        <p:spPr/>
+        <p:txBody>
+          <a:bodyPr/>
+          <a:lstStyle/>
+          <a:p>
+            <a:r>
+              <a:t>Su vocabulario tiene cinco palabras.</a:t>
+            </a:r>
+          </a:p>
+        </p:txBody>
+      </p:sp>
+      <p:sp>
+        <p:nvSpPr>
+          <p:cNvPr id="4" name="Slide Number Placeholder 3"/>
+          <p:cNvSpPr>
+            <a:spLocks noGrp="1"/>
+          </p:cNvSpPr>
+          <p:nvPr>
+            <p:ph type="sldNum" idx="5" sz="quarter"/>
+          </p:nvPr>
+        </p:nvSpPr>
+        <p:spPr/>
+      </p:sp>
+    </p:spTree>
+  </p:cSld>
+  <p:clrMapOvr>
+    <a:masterClrMapping/>
+  </p:clrMapOvr>
+</p:notes>
+</file>
+
+<file path=ppt/notesSlides/notesSlide4.xml><?xml version="1.0" encoding="utf-8"?>
+<p:notes xmlns:a="http://schemas.openxmlformats.org/drawingml/2006/main" xmlns:p="http://schemas.openxmlformats.org/presentationml/2006/main" xmlns:r="http://schemas.openxmlformats.org/officeDocument/2006/relationships">
+  <p:cSld>
+    <p:spTree>
+      <p:nvGrpSpPr>
+        <p:cNvPr id="1" name=""/>
+        <p:cNvGrpSpPr/>
+        <p:nvPr/>
+      </p:nvGrpSpPr>
+      <p:grpSpPr>
+        <a:xfrm>
+          <a:off x="0" y="0"/>
+          <a:ext cx="0" cy="0"/>
+          <a:chOff x="0" y="0"/>
+          <a:chExt cx="0" cy="0"/>
+        </a:xfrm>
+      </p:grpSpPr>
+      <p:sp>
+        <p:nvSpPr>
+          <p:cNvPr id="2" name="Slide Image Placeholder 1"/>
+          <p:cNvSpPr>
+            <a:spLocks noGrp="1"/>
+          </p:cNvSpPr>
+          <p:nvPr>
+            <p:ph type="sldImg" idx="2"/>
+          </p:nvPr>
+        </p:nvSpPr>
+        <p:spPr/>
+      </p:sp>
+      <p:sp>
+        <p:nvSpPr>
+          <p:cNvPr id="3" name="Notes Placeholder 2"/>
+          <p:cNvSpPr>
+            <a:spLocks noGrp="1"/>
+          </p:cNvSpPr>
+          <p:nvPr>
+            <p:ph type="body" idx="3" sz="quarter"/>
+          </p:nvPr>
+        </p:nvSpPr>
+        <p:spPr/>
+        <p:txBody>
+          <a:bodyPr/>
+          <a:lstStyle/>
+          <a:p>
+            <a:r>
+              <a:t>Se apoya en tres tipos de senal.</a:t>
+            </a:r>
+          </a:p>
+        </p:txBody>
+      </p:sp>
+      <p:sp>
+        <p:nvSpPr>
+          <p:cNvPr id="4" name="Slide Number Placeholder 3"/>
+          <p:cNvSpPr>
+            <a:spLocks noGrp="1"/>
+          </p:cNvSpPr>
+          <p:nvPr>
+            <p:ph type="sldNum" idx="5" sz="quarter"/>
+          </p:nvPr>
+        </p:nvSpPr>
+        <p:spPr/>
+      </p:sp>
+    </p:spTree>
+  </p:cSld>
+  <p:clrMapOvr>
+    <a:masterClrMapping/>
+  </p:clrMapOvr>
+</p:notes>
+</file>
+
+<file path=ppt/notesSlides/notesSlide5.xml><?xml version="1.0" encoding="utf-8"?>
+<p:notes xmlns:a="http://schemas.openxmlformats.org/drawingml/2006/main" xmlns:p="http://schemas.openxmlformats.org/presentationml/2006/main" xmlns:r="http://schemas.openxmlformats.org/officeDocument/2006/relationships">
+  <p:cSld>
+    <p:spTree>
+      <p:nvGrpSpPr>
+        <p:cNvPr id="1" name=""/>
+        <p:cNvGrpSpPr/>
+        <p:nvPr/>
+      </p:nvGrpSpPr>
+      <p:grpSpPr>
+        <a:xfrm>
+          <a:off x="0" y="0"/>
+          <a:ext cx="0" cy="0"/>
+          <a:chOff x="0" y="0"/>
+          <a:chExt cx="0" cy="0"/>
+        </a:xfrm>
+      </p:grpSpPr>
+      <p:sp>
+        <p:nvSpPr>
+          <p:cNvPr id="2" name="Slide Image Placeholder 1"/>
+          <p:cNvSpPr>
+            <a:spLocks noGrp="1"/>
+          </p:cNvSpPr>
+          <p:nvPr>
+            <p:ph type="sldImg" idx="2"/>
+          </p:nvPr>
+        </p:nvSpPr>
+        <p:spPr/>
+      </p:sp>
+      <p:sp>
+        <p:nvSpPr>
+          <p:cNvPr id="3" name="Notes Placeholder 2"/>
+          <p:cNvSpPr>
+            <a:spLocks noGrp="1"/>
+          </p:cNvSpPr>
+          <p:nvPr>
+            <p:ph type="body" idx="3" sz="quarter"/>
+          </p:nvPr>
+        </p:nvSpPr>
+        <p:spPr/>
+        <p:txBody>
+          <a:bodyPr/>
+          <a:lstStyle/>
+          <a:p>
+            <a:r>
+              <a:t>Errores es la proporcion de peticiones que fallan, tipicamente el porcentaje de respuestas 5xx; conviene expresarlo como disponibilidad, y aqui hay aritmetica que el docente debe citar: 99,9 por ciento equivale a unos 43 minutos de indisponibilidad al mes y 99,99 por ciento a unos 4 minutos, lo cual no es convencion sino calculo sobre los 43.200 minutos de un mes de treinta dias.</a:t>
+            </a:r>
+          </a:p>
+        </p:txBody>
+      </p:sp>
+      <p:sp>
+        <p:nvSpPr>
+          <p:cNvPr id="4" name="Slide Number Placeholder 3"/>
+          <p:cNvSpPr>
+            <a:spLocks noGrp="1"/>
+          </p:cNvSpPr>
+          <p:nvPr>
+            <p:ph type="sldNum" idx="5" sz="quarter"/>
+          </p:nvPr>
+        </p:nvSpPr>
+        <p:spPr/>
+      </p:sp>
+    </p:spTree>
+  </p:cSld>
+  <p:clrMapOvr>
+    <a:masterClrMapping/>
+  </p:clrMapOvr>
+</p:notes>
+</file>
+
+<file path=ppt/notesSlides/notesSlide6.xml><?xml version="1.0" encoding="utf-8"?>
+<p:notes xmlns:a="http://schemas.openxmlformats.org/drawingml/2006/main" xmlns:p="http://schemas.openxmlformats.org/presentationml/2006/main" xmlns:r="http://schemas.openxmlformats.org/officeDocument/2006/relationships">
+  <p:cSld>
+    <p:spTree>
+      <p:nvGrpSpPr>
+        <p:cNvPr id="1" name=""/>
+        <p:cNvGrpSpPr/>
+        <p:nvPr/>
+      </p:nvGrpSpPr>
+      <p:grpSpPr>
+        <a:xfrm>
+          <a:off x="0" y="0"/>
+          <a:ext cx="0" cy="0"/>
+          <a:chOff x="0" y="0"/>
+          <a:chExt cx="0" cy="0"/>
+        </a:xfrm>
+      </p:grpSpPr>
+      <p:sp>
+        <p:nvSpPr>
+          <p:cNvPr id="2" name="Slide Image Placeholder 1"/>
+          <p:cNvSpPr>
+            <a:spLocks noGrp="1"/>
+          </p:cNvSpPr>
+          <p:nvPr>
+            <p:ph type="sldImg" idx="2"/>
+          </p:nvPr>
+        </p:nvSpPr>
+        <p:spPr/>
+      </p:sp>
+      <p:sp>
+        <p:nvSpPr>
+          <p:cNvPr id="3" name="Notes Placeholder 2"/>
+          <p:cNvSpPr>
+            <a:spLocks noGrp="1"/>
+          </p:cNvSpPr>
+          <p:nvPr>
+            <p:ph type="body" idx="3" sz="quarter"/>
+          </p:nvPr>
+        </p:nvSpPr>
+        <p:spPr/>
+        <p:txBody>
+          <a:bodyPr/>
+          <a:lstStyle/>
+          <a:p>
+            <a:r>
+              <a:t>«Medimos la latencia» no permite decidir nada</a:t>
+            </a:r>
+          </a:p>
+          <a:p/>
+          <a:p>
+            <a:r>
+              <a:t>Una tabla de referencia para CloudLite, que el docente puede llenar en vivo: latencia p95 del inicio de sesion y del listado principal, con objetivo bajo 300 milisegundos; peticiones por minuto en la hora pico, con un valor esperado que sirva de linea base; porcentaje de respuestas 5xx, con alerta sobre el 1 por ciento sostenido; uso del pool de conexiones, con alerta sobre el 80 por ciento; y la fila que casi nadie escribe y vale un punto, un REGISTRO: el log estructurado de cada reserva rechazada y de cada intento de inicio de sesion fallido, con identificador de peticion, ruta y codigo, cuyo umbral es un evento observable, por ejemplo mas de cinco fallos del mismo usuario en diez minutos se revisa.</a:t>
+            </a:r>
+          </a:p>
+          <a:p/>
+          <a:p>
+            <a:r>
+              <a:t>Conviene proyectar esa fila y decir «esta es la que falta en el 80 por ciento de las entregas».</a:t>
+            </a:r>
+          </a:p>
+          <a:p/>
+          <a:p>
+            <a:r>
+              <a:t>Ahi entra la optimizacion de la segunda mitad del tema: paginar, con veinte a cincuenta elementos por pagina, porque un endpoint que devuelve cincuenta mil registros es problema de latencia y de memoria; indexar la columna por la que se filtra, porque sin indice el motor recorre la tabla completa; cachear lecturas repetidas, donde una tasa de acierto del 90 por ciento significa que nueve de cada diez lecturas no llegan a la base; y limitar la tasa de peticiones, el control de denegacion de servicio de la Clase 6.</a:t>
+            </a:r>
+          </a:p>
+        </p:txBody>
+      </p:sp>
+      <p:sp>
+        <p:nvSpPr>
+          <p:cNvPr id="4" name="Slide Number Placeholder 3"/>
+          <p:cNvSpPr>
+            <a:spLocks noGrp="1"/>
+          </p:cNvSpPr>
+          <p:nvPr>
+            <p:ph type="sldNum" idx="5" sz="quarter"/>
+          </p:nvPr>
+        </p:nvSpPr>
+        <p:spPr/>
+      </p:sp>
+    </p:spTree>
+  </p:cSld>
+  <p:clrMapOvr>
+    <a:masterClrMapping/>
+  </p:clrMapOvr>
+</p:notes>
+</file>
+
+<file path=ppt/notesSlides/notesSlide7.xml><?xml version="1.0" encoding="utf-8"?>
+<p:notes xmlns:a="http://schemas.openxmlformats.org/drawingml/2006/main" xmlns:p="http://schemas.openxmlformats.org/presentationml/2006/main" xmlns:r="http://schemas.openxmlformats.org/officeDocument/2006/relationships">
+  <p:cSld>
+    <p:spTree>
+      <p:nvGrpSpPr>
+        <p:cNvPr id="1" name=""/>
+        <p:cNvGrpSpPr/>
+        <p:nvPr/>
+      </p:nvGrpSpPr>
+      <p:grpSpPr>
+        <a:xfrm>
+          <a:off x="0" y="0"/>
+          <a:ext cx="0" cy="0"/>
+          <a:chOff x="0" y="0"/>
+          <a:chExt cx="0" cy="0"/>
+        </a:xfrm>
+      </p:grpSpPr>
+      <p:sp>
+        <p:nvSpPr>
+          <p:cNvPr id="2" name="Slide Image Placeholder 1"/>
+          <p:cNvSpPr>
+            <a:spLocks noGrp="1"/>
+          </p:cNvSpPr>
+          <p:nvPr>
+            <p:ph type="sldImg" idx="2"/>
+          </p:nvPr>
+        </p:nvSpPr>
+        <p:spPr/>
+      </p:sp>
+      <p:sp>
+        <p:nvSpPr>
+          <p:cNvPr id="3" name="Notes Placeholder 2"/>
+          <p:cNvSpPr>
+            <a:spLocks noGrp="1"/>
+          </p:cNvSpPr>
+          <p:nvPr>
+            <p:ph type="body" idx="3" sz="quarter"/>
+          </p:nvPr>
+        </p:nvSpPr>
+        <p:spPr/>
+        <p:txBody>
+          <a:bodyPr/>
+          <a:lstStyle/>
+          <a:p>
+            <a:r>
+              <a:t>El workflow se dispara en push y en pull_request.</a:t>
+            </a:r>
+          </a:p>
+        </p:txBody>
+      </p:sp>
+      <p:sp>
+        <p:nvSpPr>
+          <p:cNvPr id="4" name="Slide Number Placeholder 3"/>
+          <p:cNvSpPr>
+            <a:spLocks noGrp="1"/>
+          </p:cNvSpPr>
+          <p:nvPr>
+            <p:ph type="sldNum" idx="5" sz="quarter"/>
+          </p:nvPr>
+        </p:nvSpPr>
+        <p:spPr/>
+      </p:sp>
+    </p:spTree>
+  </p:cSld>
+  <p:clrMapOvr>
+    <a:masterClrMapping/>
+  </p:clrMapOvr>
+</p:notes>
+</file>
+
+<file path=ppt/notesSlides/notesSlide8.xml><?xml version="1.0" encoding="utf-8"?>
+<p:notes xmlns:a="http://schemas.openxmlformats.org/drawingml/2006/main" xmlns:p="http://schemas.openxmlformats.org/presentationml/2006/main" xmlns:r="http://schemas.openxmlformats.org/officeDocument/2006/relationships">
+  <p:cSld>
+    <p:spTree>
+      <p:nvGrpSpPr>
+        <p:cNvPr id="1" name=""/>
+        <p:cNvGrpSpPr/>
+        <p:nvPr/>
+      </p:nvGrpSpPr>
+      <p:grpSpPr>
+        <a:xfrm>
+          <a:off x="0" y="0"/>
+          <a:ext cx="0" cy="0"/>
+          <a:chOff x="0" y="0"/>
+          <a:chExt cx="0" cy="0"/>
+        </a:xfrm>
+      </p:grpSpPr>
+      <p:sp>
+        <p:nvSpPr>
+          <p:cNvPr id="2" name="Slide Image Placeholder 1"/>
+          <p:cNvSpPr>
+            <a:spLocks noGrp="1"/>
+          </p:cNvSpPr>
+          <p:nvPr>
+            <p:ph type="sldImg" idx="2"/>
+          </p:nvPr>
+        </p:nvSpPr>
+        <p:spPr/>
+      </p:sp>
+      <p:sp>
+        <p:nvSpPr>
+          <p:cNvPr id="3" name="Notes Placeholder 2"/>
+          <p:cNvSpPr>
+            <a:spLocks noGrp="1"/>
+          </p:cNvSpPr>
+          <p:nvPr>
+            <p:ph type="body" idx="3" sz="quarter"/>
+          </p:nvPr>
+        </p:nvSpPr>
+        <p:spPr/>
+        <p:txBody>
+          <a:bodyPr/>
+          <a:lstStyle/>
+          <a:p>
+            <a:r>
+              <a:t>Uno y medio, que se compila o se instala.</a:t>
+            </a:r>
+          </a:p>
+          <a:p/>
+          <a:p>
+            <a:r>
+              <a:t>Uno y medio, que se ejecuta en la prueba y que comprueba exactamente.</a:t>
+            </a:r>
+          </a:p>
+          <a:p/>
+          <a:p>
+            <a:r>
+              <a:t>La forma de responderlo es una prueba mental que el docente debe hacer en voz alta y en vivo: que error tendria que introducir yo en el codigo para que este pipeline lo detecte.</a:t>
+            </a:r>
+          </a:p>
+          <a:p/>
+          <a:p>
+            <a:r>
+              <a:t>Si la respuesta no aparece en diez segundos, el pipeline no valida nada todavia.</a:t>
+            </a:r>
+          </a:p>
+          <a:p/>
+          <a:p>
+            <a:r>
+              <a:t>La respuesta es que una sola prueba que verifique que el endpoint /health responde 200 detecta la clase de error mas costosa en operacion, que la aplicacion ya no arranca; y con eso la condicion de fallo se escribe sola: el check sale rojo si /health deja de responder 200, si falta una dependencia declarada o si el docker build no compila.</a:t>
+            </a:r>
+          </a:p>
+          <a:p/>
+          <a:p>
+            <a:r>
+              <a:t>Conviene romper el pipeline a proposito en la demo, porque un check rojo proyectado ensena mas que el parrafo anterior.</a:t>
+            </a:r>
+          </a:p>
+        </p:txBody>
+      </p:sp>
+      <p:sp>
+        <p:nvSpPr>
+          <p:cNvPr id="4" name="Slide Number Placeholder 3"/>
+          <p:cNvSpPr>
+            <a:spLocks noGrp="1"/>
+          </p:cNvSpPr>
+          <p:nvPr>
+            <p:ph type="sldNum" idx="5" sz="quarter"/>
+          </p:nvPr>
+        </p:nvSpPr>
+        <p:spPr/>
+      </p:sp>
+    </p:spTree>
+  </p:cSld>
+  <p:clrMapOvr>
+    <a:masterClrMapping/>
+  </p:clrMapOvr>
+</p:notes>
+</file>
+
+<file path=ppt/notesSlides/notesSlide9.xml><?xml version="1.0" encoding="utf-8"?>
+<p:notes xmlns:a="http://schemas.openxmlformats.org/drawingml/2006/main" xmlns:p="http://schemas.openxmlformats.org/presentationml/2006/main" xmlns:r="http://schemas.openxmlformats.org/officeDocument/2006/relationships">
+  <p:cSld>
+    <p:spTree>
+      <p:nvGrpSpPr>
+        <p:cNvPr id="1" name=""/>
+        <p:cNvGrpSpPr/>
+        <p:nvPr/>
+      </p:nvGrpSpPr>
+      <p:grpSpPr>
+        <a:xfrm>
+          <a:off x="0" y="0"/>
+          <a:ext cx="0" cy="0"/>
+          <a:chOff x="0" y="0"/>
+          <a:chExt cx="0" cy="0"/>
+        </a:xfrm>
+      </p:grpSpPr>
+      <p:sp>
+        <p:nvSpPr>
+          <p:cNvPr id="2" name="Slide Image Placeholder 1"/>
+          <p:cNvSpPr>
+            <a:spLocks noGrp="1"/>
+          </p:cNvSpPr>
+          <p:nvPr>
+            <p:ph type="sldImg" idx="2"/>
+          </p:nvPr>
+        </p:nvSpPr>
+        <p:spPr/>
+      </p:sp>
+      <p:sp>
+        <p:nvSpPr>
+          <p:cNvPr id="3" name="Notes Placeholder 2"/>
+          <p:cNvSpPr>
+            <a:spLocks noGrp="1"/>
+          </p:cNvSpPr>
+          <p:nvPr>
+            <p:ph type="body" idx="3" sz="quarter"/>
+          </p:nvPr>
+        </p:nvSpPr>
+        <p:spPr/>
+        <p:txBody>
+          <a:bodyPr/>
+          <a:lstStyle/>
+          <a:p>
+            <a:r>
+              <a:t>Los valores sensibles se guardan en el repositorio bajo Settings, Secrets and variables, Actions; el workflow los referencia por nombre y la plataforma los inyecta como variables de entorno solo durante la corrida.</a:t>
+            </a:r>
+          </a:p>
+          <a:p/>
+          <a:p>
+            <a:r>
+              <a:t>Dos detalles evitan sustos.</a:t>
+            </a:r>
+          </a:p>
+        </p:txBody>
+      </p:sp>
+      <p:sp>
+        <p:nvSpPr>
+          <p:cNvPr id="4" name="Slide Number Placeholder 3"/>
+          <p:cNvSpPr>
+            <a:spLocks noGrp="1"/>
+          </p:cNvSpPr>
+          <p:nvPr>
+            <p:ph type="sldNum" idx="5" sz="quarter"/>
+          </p:nvPr>
+        </p:nvSpPr>
+        <p:spPr/>
+      </p:sp>
+    </p:spTree>
+  </p:cSld>
+  <p:clrMapOvr>
+    <a:masterClrMapping/>
+  </p:clrMapOvr>
+</p:notes>
 </file>
 
 <file path=ppt/slideLayouts/slideLayout1.xml><?xml version="1.0" encoding="utf-8"?>
@@ -3351,13 +4475,22 @@
               </a:spcAft>
             </a:pPr>
             <a:r>
+              <a:rPr sz="1500" b="0" i="0">
+                <a:solidFill>
+                  <a:srgbClr val="333333"/>
+                </a:solidFill>
+                <a:latin typeface="Calibri"/>
+              </a:rPr>
+              <a:t>Bloque </a:t>
+            </a:r>
+            <a:r>
               <a:rPr sz="1500" b="1" i="0">
                 <a:solidFill>
                   <a:srgbClr val="333333"/>
                 </a:solidFill>
                 <a:latin typeface="Calibri"/>
               </a:rPr>
-              <a:t>Hoy avanzamos el PI en:</a:t>
+              <a:t>120 min</a:t>
             </a:r>
             <a:r>
               <a:rPr sz="1500" b="0" i="0">
@@ -3366,7 +4499,25 @@
                 </a:solidFill>
                 <a:latin typeface="Calibri"/>
               </a:rPr>
-              <a:t> Workflow Actions (build/test/simulate) + métricas de monitoreo del PI</a:t>
+              <a:t> · sesión </a:t>
+            </a:r>
+            <a:r>
+              <a:rPr sz="1500" b="1" i="0">
+                <a:solidFill>
+                  <a:srgbClr val="333333"/>
+                </a:solidFill>
+                <a:latin typeface="Calibri"/>
+              </a:rPr>
+              <a:t>virtual síncrona</a:t>
+            </a:r>
+            <a:r>
+              <a:rPr sz="1500" b="0" i="0">
+                <a:solidFill>
+                  <a:srgbClr val="333333"/>
+                </a:solidFill>
+                <a:latin typeface="Calibri"/>
+              </a:rPr>
+              <a:t> por Google Meet.</a:t>
             </a:r>
           </a:p>
           <a:p>
@@ -3382,41 +4533,7 @@
                 </a:solidFill>
                 <a:latin typeface="Calibri"/>
               </a:rPr>
-              <a:t>Bloque </a:t>
-            </a:r>
-            <a:r>
-              <a:rPr sz="1500" b="1" i="0">
-                <a:solidFill>
-                  <a:srgbClr val="333333"/>
-                </a:solidFill>
-                <a:latin typeface="Calibri"/>
-              </a:rPr>
-              <a:t>120 min</a:t>
-            </a:r>
-            <a:r>
-              <a:rPr sz="1500" b="0" i="0">
-                <a:solidFill>
-                  <a:srgbClr val="333333"/>
-                </a:solidFill>
-                <a:latin typeface="Calibri"/>
-              </a:rPr>
-              <a:t> · Teoría breve · Taller PI · cierre.</a:t>
-            </a:r>
-          </a:p>
-          <a:p>
-            <a:pPr>
-              <a:spcAft>
-                <a:spcPts val="800"/>
-              </a:spcAft>
-            </a:pPr>
-            <a:r>
-              <a:rPr sz="1500" b="0" i="0">
-                <a:solidFill>
-                  <a:srgbClr val="333333"/>
-                </a:solidFill>
-                <a:latin typeface="Calibri"/>
-              </a:rPr>
-              <a:t>Herramientas gratis + navegador · sin AWS/GCP/Oracle Cloud.</a:t>
+              <a:t>Conceptos del tema, ejemplos resueltos sobre CloudLite y cierre conceptual.</a:t>
             </a:r>
           </a:p>
         </p:txBody>
@@ -6334,7 +7451,7 @@
                 </a:solidFill>
                 <a:latin typeface="Calibri"/>
               </a:rPr>
-              <a:t> Encuadre: hoy avanzamos el PI en… + entregable concreto.</a:t>
+              <a:t> Encuadre del tema y objetivos de la clase.</a:t>
             </a:r>
           </a:p>
           <a:p>
@@ -6350,7 +7467,7 @@
                 </a:solidFill>
                 <a:latin typeface="Calibri"/>
               </a:rPr>
-              <a:t>10–40</a:t>
+              <a:t>10–70</a:t>
             </a:r>
             <a:r>
               <a:rPr sz="2000" b="0" i="0">
@@ -6359,7 +7476,7 @@
                 </a:solidFill>
                 <a:latin typeface="Calibri"/>
               </a:rPr>
-              <a:t> Teoría Core breve (solo lo necesario para el taller PI).</a:t>
+              <a:t> Conceptos del tema, uno por lámina, con ejemplos sobre CloudLite.</a:t>
             </a:r>
           </a:p>
           <a:p>
@@ -6384,7 +7501,7 @@
                 </a:solidFill>
                 <a:latin typeface="Calibri"/>
               </a:rPr>
-              <a:t>40–100</a:t>
+              <a:t>70–100</a:t>
             </a:r>
             <a:r>
               <a:rPr sz="2000" b="0" i="0">
@@ -6393,7 +7510,7 @@
                 </a:solidFill>
                 <a:latin typeface="Calibri"/>
               </a:rPr>
-              <a:t> Trabajo guiado del PI (demo en vivo + avance individual).</a:t>
+              <a:t> Ejemplos resueltos y demo del docente sobre el tema.</a:t>
             </a:r>
           </a:p>
           <a:p>
@@ -6418,7 +7535,7 @@
                 </a:solidFill>
                 <a:latin typeface="Calibri"/>
               </a:rPr>
-              <a:t> Revisión de evidencias del PI.</a:t>
+              <a:t> Práctica (opcional, guía en la carpeta de la clase).</a:t>
             </a:r>
           </a:p>
           <a:p>
@@ -6443,7 +7560,7 @@
                 </a:solidFill>
                 <a:latin typeface="Calibri"/>
               </a:rPr>
-              <a:t> Cierre: criterio de éxito + plazo en la fecha que indique el docente.</a:t>
+              <a:t> Preguntas y cierre conceptual.</a:t>
             </a:r>
           </a:p>
         </p:txBody>
@@ -10380,13 +11497,13 @@
         <p:spPr>
           <a:xfrm>
             <a:off x="0" y="0"/>
-            <a:ext cx="12191695" cy="1170432"/>
+            <a:ext cx="12191695" cy="164592"/>
           </a:xfrm>
           <a:prstGeom prst="rect">
             <a:avLst/>
           </a:prstGeom>
           <a:solidFill>
-            <a:srgbClr val="095292"/>
+            <a:srgbClr val="269CCB"/>
           </a:solidFill>
           <a:ln>
             <a:noFill/>
@@ -10414,251 +11531,9 @@
           </a:p>
         </p:txBody>
       </p:sp>
-      <p:sp>
-        <p:nvSpPr>
-          <p:cNvPr id="3" name="Rectangle 2"/>
-          <p:cNvSpPr/>
-          <p:nvPr/>
-        </p:nvSpPr>
-        <p:spPr>
-          <a:xfrm>
-            <a:off x="0" y="1170432"/>
-            <a:ext cx="12191695" cy="41148"/>
-          </a:xfrm>
-          <a:prstGeom prst="rect">
-            <a:avLst/>
-          </a:prstGeom>
-          <a:solidFill>
-            <a:srgbClr val="FFD000"/>
-          </a:solidFill>
-          <a:ln>
-            <a:noFill/>
-          </a:ln>
-        </p:spPr>
-        <p:style>
-          <a:lnRef idx="1">
-            <a:schemeClr val="accent1"/>
-          </a:lnRef>
-          <a:fillRef idx="3">
-            <a:schemeClr val="accent1"/>
-          </a:fillRef>
-          <a:effectRef idx="2">
-            <a:schemeClr val="accent1"/>
-          </a:effectRef>
-          <a:fontRef idx="minor">
-            <a:schemeClr val="lt1"/>
-          </a:fontRef>
-        </p:style>
-        <p:txBody>
-          <a:bodyPr rtlCol="0" anchor="ctr"/>
-          <a:lstStyle/>
-          <a:p>
-            <a:pPr algn="ctr"/>
-          </a:p>
-        </p:txBody>
-      </p:sp>
-      <p:sp>
-        <p:nvSpPr>
-          <p:cNvPr id="4" name="TextBox 3"/>
-          <p:cNvSpPr txBox="1"/>
-          <p:nvPr/>
-        </p:nvSpPr>
-        <p:spPr>
-          <a:xfrm>
-            <a:off x="457200" y="164592"/>
-            <a:ext cx="11277295" cy="384048"/>
-          </a:xfrm>
-          <a:prstGeom prst="rect">
-            <a:avLst/>
-          </a:prstGeom>
-          <a:noFill/>
-        </p:spPr>
-        <p:txBody>
-          <a:bodyPr wrap="square">
-            <a:spAutoFit/>
-          </a:bodyPr>
-          <a:lstStyle/>
-          <a:p>
-            <a:r>
-              <a:rPr sz="2600" b="1" i="0">
-                <a:solidFill>
-                  <a:srgbClr val="FFFFFF"/>
-                </a:solidFill>
-                <a:latin typeface="Calibri"/>
-              </a:rPr>
-              <a:t>Herramientas de hoy</a:t>
-            </a:r>
-          </a:p>
-        </p:txBody>
-      </p:sp>
-      <p:sp>
-        <p:nvSpPr>
-          <p:cNvPr id="5" name="TextBox 4"/>
-          <p:cNvSpPr txBox="1"/>
-          <p:nvPr/>
-        </p:nvSpPr>
-        <p:spPr>
-          <a:xfrm>
-            <a:off x="457200" y="566928"/>
-            <a:ext cx="11277295" cy="411480"/>
-          </a:xfrm>
-          <a:prstGeom prst="rect">
-            <a:avLst/>
-          </a:prstGeom>
-          <a:noFill/>
-        </p:spPr>
-        <p:txBody>
-          <a:bodyPr wrap="square">
-            <a:spAutoFit/>
-          </a:bodyPr>
-          <a:lstStyle/>
-          <a:p>
-            <a:r>
-              <a:rPr sz="1400" b="0" i="0">
-                <a:solidFill>
-                  <a:srgbClr val="B8D8EE"/>
-                </a:solidFill>
-                <a:latin typeface="Calibri"/>
-              </a:rPr>
-              <a:t>Gratis · navegador o free tier · sin cuenta de pago</a:t>
-            </a:r>
-          </a:p>
-        </p:txBody>
-      </p:sp>
-      <p:sp>
-        <p:nvSpPr>
-          <p:cNvPr id="6" name="Rounded Rectangle 5"/>
-          <p:cNvSpPr/>
-          <p:nvPr/>
-        </p:nvSpPr>
-        <p:spPr>
-          <a:xfrm>
-            <a:off x="457200" y="1591056"/>
-            <a:ext cx="3624986" cy="2331720"/>
-          </a:xfrm>
-          <a:prstGeom prst="roundRect">
-            <a:avLst>
-              <a:gd name="adj" fmla="val 12000"/>
-            </a:avLst>
-          </a:prstGeom>
-          <a:solidFill>
-            <a:srgbClr val="F2F2F2"/>
-          </a:solidFill>
-          <a:ln>
-            <a:noFill/>
-          </a:ln>
-        </p:spPr>
-        <p:style>
-          <a:lnRef idx="1">
-            <a:schemeClr val="accent1"/>
-          </a:lnRef>
-          <a:fillRef idx="3">
-            <a:schemeClr val="accent1"/>
-          </a:fillRef>
-          <a:effectRef idx="2">
-            <a:schemeClr val="accent1"/>
-          </a:effectRef>
-          <a:fontRef idx="minor">
-            <a:schemeClr val="lt1"/>
-          </a:fontRef>
-        </p:style>
-        <p:txBody>
-          <a:bodyPr rtlCol="0" anchor="ctr"/>
-          <a:lstStyle/>
-          <a:p>
-            <a:pPr algn="ctr"/>
-          </a:p>
-        </p:txBody>
-      </p:sp>
-      <p:sp>
-        <p:nvSpPr>
-          <p:cNvPr id="7" name="Rectangle 6"/>
-          <p:cNvSpPr/>
-          <p:nvPr/>
-        </p:nvSpPr>
-        <p:spPr>
-          <a:xfrm>
-            <a:off x="457200" y="1591056"/>
-            <a:ext cx="3624986" cy="64008"/>
-          </a:xfrm>
-          <a:prstGeom prst="rect">
-            <a:avLst/>
-          </a:prstGeom>
-          <a:solidFill>
-            <a:srgbClr val="095292"/>
-          </a:solidFill>
-          <a:ln>
-            <a:noFill/>
-          </a:ln>
-        </p:spPr>
-        <p:style>
-          <a:lnRef idx="1">
-            <a:schemeClr val="accent1"/>
-          </a:lnRef>
-          <a:fillRef idx="3">
-            <a:schemeClr val="accent1"/>
-          </a:fillRef>
-          <a:effectRef idx="2">
-            <a:schemeClr val="accent1"/>
-          </a:effectRef>
-          <a:fontRef idx="minor">
-            <a:schemeClr val="lt1"/>
-          </a:fontRef>
-        </p:style>
-        <p:txBody>
-          <a:bodyPr rtlCol="0" anchor="ctr"/>
-          <a:lstStyle/>
-          <a:p>
-            <a:pPr algn="ctr"/>
-          </a:p>
-        </p:txBody>
-      </p:sp>
-      <p:sp>
-        <p:nvSpPr>
-          <p:cNvPr id="8" name="Rectangle 7"/>
-          <p:cNvSpPr/>
-          <p:nvPr/>
-        </p:nvSpPr>
-        <p:spPr>
-          <a:xfrm>
-            <a:off x="457200" y="1655064"/>
-            <a:ext cx="3624986" cy="27432"/>
-          </a:xfrm>
-          <a:prstGeom prst="rect">
-            <a:avLst/>
-          </a:prstGeom>
-          <a:solidFill>
-            <a:srgbClr val="FFD000"/>
-          </a:solidFill>
-          <a:ln>
-            <a:noFill/>
-          </a:ln>
-        </p:spPr>
-        <p:style>
-          <a:lnRef idx="1">
-            <a:schemeClr val="accent1"/>
-          </a:lnRef>
-          <a:fillRef idx="3">
-            <a:schemeClr val="accent1"/>
-          </a:fillRef>
-          <a:effectRef idx="2">
-            <a:schemeClr val="accent1"/>
-          </a:effectRef>
-          <a:fontRef idx="minor">
-            <a:schemeClr val="lt1"/>
-          </a:fontRef>
-        </p:style>
-        <p:txBody>
-          <a:bodyPr rtlCol="0" anchor="ctr"/>
-          <a:lstStyle/>
-          <a:p>
-            <a:pPr algn="ctr"/>
-          </a:p>
-        </p:txBody>
-      </p:sp>
       <p:pic>
         <p:nvPicPr>
-          <p:cNvPr id="9" name="Picture 8" descr="github_actions.png"/>
+          <p:cNvPr id="3" name="Picture 2" descr="logo_uniajc_color.png"/>
           <p:cNvPicPr>
             <a:picLocks noChangeAspect="1"/>
           </p:cNvPicPr>
@@ -10672,8 +11547,8 @@
         </p:blipFill>
         <p:spPr>
           <a:xfrm>
-            <a:off x="1643329" y="1847087"/>
-            <a:ext cx="1252728" cy="1252728"/>
+            <a:off x="10271455" y="5998464"/>
+            <a:ext cx="1463040" cy="643233"/>
           </a:xfrm>
           <a:prstGeom prst="rect">
             <a:avLst/>
@@ -10682,14 +11557,14 @@
       </p:pic>
       <p:sp>
         <p:nvSpPr>
-          <p:cNvPr id="10" name="TextBox 9"/>
+          <p:cNvPr id="4" name="TextBox 3"/>
           <p:cNvSpPr txBox="1"/>
           <p:nvPr/>
         </p:nvSpPr>
         <p:spPr>
           <a:xfrm>
-            <a:off x="530352" y="3191256"/>
-            <a:ext cx="3478682" cy="621792"/>
+            <a:off x="457200" y="1737360"/>
+            <a:ext cx="11277295" cy="1097280"/>
           </a:xfrm>
           <a:prstGeom prst="rect">
             <a:avLst/>
@@ -10697,456 +11572,32 @@
           <a:noFill/>
         </p:spPr>
         <p:txBody>
-          <a:bodyPr wrap="square" anchor="t"/>
+          <a:bodyPr wrap="square" anchor="ctr"/>
           <a:lstStyle/>
           <a:p>
             <a:pPr algn="ctr"/>
             <a:r>
-              <a:rPr sz="1300" b="1" i="0">
+              <a:rPr sz="3400" b="1" i="0">
                 <a:solidFill>
                   <a:srgbClr val="095292"/>
                 </a:solidFill>
                 <a:latin typeface="Calibri"/>
               </a:rPr>
-              <a:t>GitHub Actions</a:t>
-            </a:r>
-          </a:p>
-          <a:p>
-            <a:pPr algn="ctr">
-              <a:spcBef>
-                <a:spcPts val="200"/>
-              </a:spcBef>
-            </a:pPr>
-            <a:r>
-              <a:rPr sz="1000" b="0" i="0">
-                <a:solidFill>
-                  <a:srgbClr val="666666"/>
-                </a:solidFill>
-                <a:latin typeface="Calibri"/>
-              </a:rPr>
-              <a:t>CI del PI</a:t>
-            </a:r>
-          </a:p>
-        </p:txBody>
-      </p:sp>
-      <p:sp>
-        <p:nvSpPr>
-          <p:cNvPr id="11" name="Rounded Rectangle 10"/>
-          <p:cNvSpPr/>
-          <p:nvPr/>
-        </p:nvSpPr>
-        <p:spPr>
-          <a:xfrm>
-            <a:off x="4283354" y="1591056"/>
-            <a:ext cx="3624986" cy="2331720"/>
-          </a:xfrm>
-          <a:prstGeom prst="roundRect">
-            <a:avLst>
-              <a:gd name="adj" fmla="val 12000"/>
-            </a:avLst>
-          </a:prstGeom>
-          <a:solidFill>
-            <a:srgbClr val="F2F2F2"/>
-          </a:solidFill>
-          <a:ln>
-            <a:noFill/>
-          </a:ln>
-        </p:spPr>
-        <p:style>
-          <a:lnRef idx="1">
-            <a:schemeClr val="accent1"/>
-          </a:lnRef>
-          <a:fillRef idx="3">
-            <a:schemeClr val="accent1"/>
-          </a:fillRef>
-          <a:effectRef idx="2">
-            <a:schemeClr val="accent1"/>
-          </a:effectRef>
-          <a:fontRef idx="minor">
-            <a:schemeClr val="lt1"/>
-          </a:fontRef>
-        </p:style>
-        <p:txBody>
-          <a:bodyPr rtlCol="0" anchor="ctr"/>
-          <a:lstStyle/>
-          <a:p>
-            <a:pPr algn="ctr"/>
-          </a:p>
-        </p:txBody>
-      </p:sp>
-      <p:sp>
-        <p:nvSpPr>
-          <p:cNvPr id="12" name="Rectangle 11"/>
-          <p:cNvSpPr/>
-          <p:nvPr/>
-        </p:nvSpPr>
-        <p:spPr>
-          <a:xfrm>
-            <a:off x="4283354" y="1591056"/>
-            <a:ext cx="3624986" cy="64008"/>
-          </a:xfrm>
-          <a:prstGeom prst="rect">
-            <a:avLst/>
-          </a:prstGeom>
-          <a:solidFill>
-            <a:srgbClr val="095292"/>
-          </a:solidFill>
-          <a:ln>
-            <a:noFill/>
-          </a:ln>
-        </p:spPr>
-        <p:style>
-          <a:lnRef idx="1">
-            <a:schemeClr val="accent1"/>
-          </a:lnRef>
-          <a:fillRef idx="3">
-            <a:schemeClr val="accent1"/>
-          </a:fillRef>
-          <a:effectRef idx="2">
-            <a:schemeClr val="accent1"/>
-          </a:effectRef>
-          <a:fontRef idx="minor">
-            <a:schemeClr val="lt1"/>
-          </a:fontRef>
-        </p:style>
-        <p:txBody>
-          <a:bodyPr rtlCol="0" anchor="ctr"/>
-          <a:lstStyle/>
-          <a:p>
-            <a:pPr algn="ctr"/>
-          </a:p>
-        </p:txBody>
-      </p:sp>
-      <p:sp>
-        <p:nvSpPr>
-          <p:cNvPr id="13" name="Rectangle 12"/>
-          <p:cNvSpPr/>
-          <p:nvPr/>
-        </p:nvSpPr>
-        <p:spPr>
-          <a:xfrm>
-            <a:off x="4283354" y="1655064"/>
-            <a:ext cx="3624986" cy="27432"/>
-          </a:xfrm>
-          <a:prstGeom prst="rect">
-            <a:avLst/>
-          </a:prstGeom>
-          <a:solidFill>
-            <a:srgbClr val="FFD000"/>
-          </a:solidFill>
-          <a:ln>
-            <a:noFill/>
-          </a:ln>
-        </p:spPr>
-        <p:style>
-          <a:lnRef idx="1">
-            <a:schemeClr val="accent1"/>
-          </a:lnRef>
-          <a:fillRef idx="3">
-            <a:schemeClr val="accent1"/>
-          </a:fillRef>
-          <a:effectRef idx="2">
-            <a:schemeClr val="accent1"/>
-          </a:effectRef>
-          <a:fontRef idx="minor">
-            <a:schemeClr val="lt1"/>
-          </a:fontRef>
-        </p:style>
-        <p:txBody>
-          <a:bodyPr rtlCol="0" anchor="ctr"/>
-          <a:lstStyle/>
-          <a:p>
-            <a:pPr algn="ctr"/>
-          </a:p>
-        </p:txBody>
-      </p:sp>
-      <p:pic>
-        <p:nvPicPr>
-          <p:cNvPr id="14" name="Picture 13" descr="google_docs.png"/>
-          <p:cNvPicPr>
-            <a:picLocks noChangeAspect="1"/>
-          </p:cNvPicPr>
-          <p:nvPr/>
-        </p:nvPicPr>
-        <p:blipFill>
-          <a:blip r:embed="rId3"/>
-          <a:stretch>
-            <a:fillRect/>
-          </a:stretch>
-        </p:blipFill>
-        <p:spPr>
-          <a:xfrm>
-            <a:off x="5469483" y="1847087"/>
-            <a:ext cx="1252728" cy="1252728"/>
-          </a:xfrm>
-          <a:prstGeom prst="rect">
-            <a:avLst/>
-          </a:prstGeom>
-        </p:spPr>
-      </p:pic>
-      <p:sp>
-        <p:nvSpPr>
-          <p:cNvPr id="15" name="TextBox 14"/>
+              <a:t>Clase 8 · cierre conceptual</a:t>
+            </a:r>
+          </a:p>
+        </p:txBody>
+      </p:sp>
+      <p:sp>
+        <p:nvSpPr>
+          <p:cNvPr id="5" name="TextBox 4"/>
           <p:cNvSpPr txBox="1"/>
           <p:nvPr/>
         </p:nvSpPr>
         <p:spPr>
           <a:xfrm>
-            <a:off x="4356506" y="3191256"/>
-            <a:ext cx="3478682" cy="621792"/>
-          </a:xfrm>
-          <a:prstGeom prst="rect">
-            <a:avLst/>
-          </a:prstGeom>
-          <a:noFill/>
-        </p:spPr>
-        <p:txBody>
-          <a:bodyPr wrap="square" anchor="t"/>
-          <a:lstStyle/>
-          <a:p>
-            <a:pPr algn="ctr"/>
-            <a:r>
-              <a:rPr sz="1300" b="1" i="0">
-                <a:solidFill>
-                  <a:srgbClr val="095292"/>
-                </a:solidFill>
-                <a:latin typeface="Calibri"/>
-              </a:rPr>
-              <a:t>Google Docs</a:t>
-            </a:r>
-          </a:p>
-          <a:p>
-            <a:pPr algn="ctr">
-              <a:spcBef>
-                <a:spcPts val="200"/>
-              </a:spcBef>
-            </a:pPr>
-            <a:r>
-              <a:rPr sz="1000" b="0" i="0">
-                <a:solidFill>
-                  <a:srgbClr val="666666"/>
-                </a:solidFill>
-                <a:latin typeface="Calibri"/>
-              </a:rPr>
-              <a:t>Informe PI</a:t>
-            </a:r>
-          </a:p>
-        </p:txBody>
-      </p:sp>
-      <p:sp>
-        <p:nvSpPr>
-          <p:cNvPr id="16" name="Rounded Rectangle 15"/>
-          <p:cNvSpPr/>
-          <p:nvPr/>
-        </p:nvSpPr>
-        <p:spPr>
-          <a:xfrm>
-            <a:off x="8109508" y="1591056"/>
-            <a:ext cx="3624986" cy="2331720"/>
-          </a:xfrm>
-          <a:prstGeom prst="roundRect">
-            <a:avLst>
-              <a:gd name="adj" fmla="val 12000"/>
-            </a:avLst>
-          </a:prstGeom>
-          <a:solidFill>
-            <a:srgbClr val="F2F2F2"/>
-          </a:solidFill>
-          <a:ln>
-            <a:noFill/>
-          </a:ln>
-        </p:spPr>
-        <p:style>
-          <a:lnRef idx="1">
-            <a:schemeClr val="accent1"/>
-          </a:lnRef>
-          <a:fillRef idx="3">
-            <a:schemeClr val="accent1"/>
-          </a:fillRef>
-          <a:effectRef idx="2">
-            <a:schemeClr val="accent1"/>
-          </a:effectRef>
-          <a:fontRef idx="minor">
-            <a:schemeClr val="lt1"/>
-          </a:fontRef>
-        </p:style>
-        <p:txBody>
-          <a:bodyPr rtlCol="0" anchor="ctr"/>
-          <a:lstStyle/>
-          <a:p>
-            <a:pPr algn="ctr"/>
-          </a:p>
-        </p:txBody>
-      </p:sp>
-      <p:sp>
-        <p:nvSpPr>
-          <p:cNvPr id="17" name="Rectangle 16"/>
-          <p:cNvSpPr/>
-          <p:nvPr/>
-        </p:nvSpPr>
-        <p:spPr>
-          <a:xfrm>
-            <a:off x="8109508" y="1591056"/>
-            <a:ext cx="3624986" cy="64008"/>
-          </a:xfrm>
-          <a:prstGeom prst="rect">
-            <a:avLst/>
-          </a:prstGeom>
-          <a:solidFill>
-            <a:srgbClr val="095292"/>
-          </a:solidFill>
-          <a:ln>
-            <a:noFill/>
-          </a:ln>
-        </p:spPr>
-        <p:style>
-          <a:lnRef idx="1">
-            <a:schemeClr val="accent1"/>
-          </a:lnRef>
-          <a:fillRef idx="3">
-            <a:schemeClr val="accent1"/>
-          </a:fillRef>
-          <a:effectRef idx="2">
-            <a:schemeClr val="accent1"/>
-          </a:effectRef>
-          <a:fontRef idx="minor">
-            <a:schemeClr val="lt1"/>
-          </a:fontRef>
-        </p:style>
-        <p:txBody>
-          <a:bodyPr rtlCol="0" anchor="ctr"/>
-          <a:lstStyle/>
-          <a:p>
-            <a:pPr algn="ctr"/>
-          </a:p>
-        </p:txBody>
-      </p:sp>
-      <p:sp>
-        <p:nvSpPr>
-          <p:cNvPr id="18" name="Rectangle 17"/>
-          <p:cNvSpPr/>
-          <p:nvPr/>
-        </p:nvSpPr>
-        <p:spPr>
-          <a:xfrm>
-            <a:off x="8109508" y="1655064"/>
-            <a:ext cx="3624986" cy="27432"/>
-          </a:xfrm>
-          <a:prstGeom prst="rect">
-            <a:avLst/>
-          </a:prstGeom>
-          <a:solidFill>
-            <a:srgbClr val="FFD000"/>
-          </a:solidFill>
-          <a:ln>
-            <a:noFill/>
-          </a:ln>
-        </p:spPr>
-        <p:style>
-          <a:lnRef idx="1">
-            <a:schemeClr val="accent1"/>
-          </a:lnRef>
-          <a:fillRef idx="3">
-            <a:schemeClr val="accent1"/>
-          </a:fillRef>
-          <a:effectRef idx="2">
-            <a:schemeClr val="accent1"/>
-          </a:effectRef>
-          <a:fontRef idx="minor">
-            <a:schemeClr val="lt1"/>
-          </a:fontRef>
-        </p:style>
-        <p:txBody>
-          <a:bodyPr rtlCol="0" anchor="ctr"/>
-          <a:lstStyle/>
-          <a:p>
-            <a:pPr algn="ctr"/>
-          </a:p>
-        </p:txBody>
-      </p:sp>
-      <p:pic>
-        <p:nvPicPr>
-          <p:cNvPr id="19" name="Picture 18" descr="examlab.png"/>
-          <p:cNvPicPr>
-            <a:picLocks noChangeAspect="1"/>
-          </p:cNvPicPr>
-          <p:nvPr/>
-        </p:nvPicPr>
-        <p:blipFill>
-          <a:blip r:embed="rId4"/>
-          <a:stretch>
-            <a:fillRect/>
-          </a:stretch>
-        </p:blipFill>
-        <p:spPr>
-          <a:xfrm>
-            <a:off x="9295638" y="1847087"/>
-            <a:ext cx="1252728" cy="1252728"/>
-          </a:xfrm>
-          <a:prstGeom prst="rect">
-            <a:avLst/>
-          </a:prstGeom>
-        </p:spPr>
-      </p:pic>
-      <p:sp>
-        <p:nvSpPr>
-          <p:cNvPr id="20" name="TextBox 19"/>
-          <p:cNvSpPr txBox="1"/>
-          <p:nvPr/>
-        </p:nvSpPr>
-        <p:spPr>
-          <a:xfrm>
-            <a:off x="8182660" y="3191256"/>
-            <a:ext cx="3478682" cy="621792"/>
-          </a:xfrm>
-          <a:prstGeom prst="rect">
-            <a:avLst/>
-          </a:prstGeom>
-          <a:noFill/>
-        </p:spPr>
-        <p:txBody>
-          <a:bodyPr wrap="square" anchor="t"/>
-          <a:lstStyle/>
-          <a:p>
-            <a:pPr algn="ctr"/>
-            <a:r>
-              <a:rPr sz="1300" b="1" i="0">
-                <a:solidFill>
-                  <a:srgbClr val="095292"/>
-                </a:solidFill>
-                <a:latin typeface="Calibri"/>
-              </a:rPr>
-              <a:t>la plataforma del curso</a:t>
-            </a:r>
-          </a:p>
-          <a:p>
-            <a:pPr algn="ctr">
-              <a:spcBef>
-                <a:spcPts val="200"/>
-              </a:spcBef>
-            </a:pPr>
-            <a:r>
-              <a:rPr sz="1000" b="0" i="0">
-                <a:solidFill>
-                  <a:srgbClr val="666666"/>
-                </a:solidFill>
-                <a:latin typeface="Calibri"/>
-              </a:rPr>
-              <a:t>Donde se entrega</a:t>
-            </a:r>
-          </a:p>
-        </p:txBody>
-      </p:sp>
-      <p:sp>
-        <p:nvSpPr>
-          <p:cNvPr id="21" name="TextBox 20"/>
-          <p:cNvSpPr txBox="1"/>
-          <p:nvPr/>
-        </p:nvSpPr>
-        <p:spPr>
-          <a:xfrm>
-            <a:off x="11185855" y="6473952"/>
-            <a:ext cx="640080" cy="274320"/>
+            <a:off x="457200" y="3017520"/>
+            <a:ext cx="11277295" cy="1645920"/>
           </a:xfrm>
           <a:prstGeom prst="rect">
             <a:avLst/>
@@ -11159,141 +11610,65 @@
           </a:bodyPr>
           <a:lstStyle/>
           <a:p>
-            <a:pPr algn="r"/>
-            <a:r>
-              <a:rPr sz="1100" b="0" i="0">
-                <a:solidFill>
-                  <a:srgbClr val="666666"/>
-                </a:solidFill>
-                <a:latin typeface="Calibri"/>
-              </a:rPr>
-              <a:t>30</a:t>
-            </a:r>
-          </a:p>
-        </p:txBody>
-      </p:sp>
-    </p:spTree>
-  </p:cSld>
-  <p:clrMapOvr>
-    <a:masterClrMapping/>
-  </p:clrMapOvr>
-</p:sld>
-</file>
-
-<file path=ppt/slides/slide31.xml><?xml version="1.0" encoding="utf-8"?>
-<p:sld xmlns:a="http://schemas.openxmlformats.org/drawingml/2006/main" xmlns:p="http://schemas.openxmlformats.org/presentationml/2006/main" xmlns:r="http://schemas.openxmlformats.org/officeDocument/2006/relationships">
-  <p:cSld>
-    <p:bg>
-      <p:bgPr>
-        <a:solidFill>
-          <a:srgbClr val="FFFFFF"/>
-        </a:solidFill>
-        <a:effectLst/>
-      </p:bgPr>
-    </p:bg>
-    <p:spTree>
-      <p:nvGrpSpPr>
-        <p:cNvPr id="1" name=""/>
-        <p:cNvGrpSpPr/>
-        <p:nvPr/>
-      </p:nvGrpSpPr>
-      <p:grpSpPr/>
-      <p:sp>
-        <p:nvSpPr>
-          <p:cNvPr id="2" name="Rectangle 1"/>
-          <p:cNvSpPr/>
-          <p:nvPr/>
-        </p:nvSpPr>
-        <p:spPr>
-          <a:xfrm>
-            <a:off x="0" y="0"/>
-            <a:ext cx="12191695" cy="960120"/>
-          </a:xfrm>
-          <a:prstGeom prst="rect">
-            <a:avLst/>
-          </a:prstGeom>
-          <a:solidFill>
-            <a:srgbClr val="095292"/>
-          </a:solidFill>
-          <a:ln>
-            <a:noFill/>
-          </a:ln>
-        </p:spPr>
-        <p:style>
-          <a:lnRef idx="1">
-            <a:schemeClr val="accent1"/>
-          </a:lnRef>
-          <a:fillRef idx="3">
-            <a:schemeClr val="accent1"/>
-          </a:fillRef>
-          <a:effectRef idx="2">
-            <a:schemeClr val="accent1"/>
-          </a:effectRef>
-          <a:fontRef idx="minor">
-            <a:schemeClr val="lt1"/>
-          </a:fontRef>
-        </p:style>
-        <p:txBody>
-          <a:bodyPr rtlCol="0" anchor="ctr"/>
-          <a:lstStyle/>
-          <a:p>
-            <a:pPr algn="ctr"/>
-          </a:p>
-        </p:txBody>
-      </p:sp>
-      <p:sp>
-        <p:nvSpPr>
-          <p:cNvPr id="3" name="Rectangle 2"/>
-          <p:cNvSpPr/>
-          <p:nvPr/>
-        </p:nvSpPr>
-        <p:spPr>
-          <a:xfrm>
-            <a:off x="0" y="960120"/>
-            <a:ext cx="12191695" cy="41148"/>
-          </a:xfrm>
-          <a:prstGeom prst="rect">
-            <a:avLst/>
-          </a:prstGeom>
-          <a:solidFill>
-            <a:srgbClr val="FFD000"/>
-          </a:solidFill>
-          <a:ln>
-            <a:noFill/>
-          </a:ln>
-        </p:spPr>
-        <p:style>
-          <a:lnRef idx="1">
-            <a:schemeClr val="accent1"/>
-          </a:lnRef>
-          <a:fillRef idx="3">
-            <a:schemeClr val="accent1"/>
-          </a:fillRef>
-          <a:effectRef idx="2">
-            <a:schemeClr val="accent1"/>
-          </a:effectRef>
-          <a:fontRef idx="minor">
-            <a:schemeClr val="lt1"/>
-          </a:fontRef>
-        </p:style>
-        <p:txBody>
-          <a:bodyPr rtlCol="0" anchor="ctr"/>
-          <a:lstStyle/>
-          <a:p>
-            <a:pPr algn="ctr"/>
-          </a:p>
-        </p:txBody>
-      </p:sp>
-      <p:sp>
-        <p:nvSpPr>
-          <p:cNvPr id="4" name="TextBox 3"/>
+            <a:pPr algn="ctr">
+              <a:spcAft>
+                <a:spcPts val="600"/>
+              </a:spcAft>
+            </a:pPr>
+            <a:r>
+              <a:rPr sz="1600" b="0" i="0">
+                <a:solidFill>
+                  <a:srgbClr val="333333"/>
+                </a:solidFill>
+                <a:latin typeface="Calibri"/>
+              </a:rPr>
+              <a:t>Explicar pipeline CI vs CD y qué es realista sin cloud de pago.</a:t>
+            </a:r>
+          </a:p>
+          <a:p>
+            <a:pPr algn="ctr">
+              <a:spcAft>
+                <a:spcPts val="600"/>
+              </a:spcAft>
+            </a:pPr>
+            <a:r>
+              <a:rPr sz="1600" b="0" i="0">
+                <a:solidFill>
+                  <a:srgbClr val="333333"/>
+                </a:solidFill>
+                <a:latin typeface="Calibri"/>
+              </a:rPr>
+              <a:t>Crear un workflow Actions que construya/pruebe un stub.</a:t>
+            </a:r>
+          </a:p>
+          <a:p>
+            <a:pPr algn="ctr">
+              <a:spcAft>
+                <a:spcPts val="600"/>
+              </a:spcAft>
+            </a:pPr>
+            <a:r>
+              <a:rPr sz="1600" b="0" i="0">
+                <a:solidFill>
+                  <a:srgbClr val="333333"/>
+                </a:solidFill>
+                <a:latin typeface="Calibri"/>
+              </a:rPr>
+              <a:t>Definir 4–6 señales de monitoreo para CloudLite.</a:t>
+            </a:r>
+          </a:p>
+        </p:txBody>
+      </p:sp>
+      <p:sp>
+        <p:nvSpPr>
+          <p:cNvPr id="6" name="TextBox 5"/>
           <p:cNvSpPr txBox="1"/>
           <p:nvPr/>
         </p:nvSpPr>
         <p:spPr>
           <a:xfrm>
-            <a:off x="457200" y="164592"/>
-            <a:ext cx="11277295" cy="502920"/>
+            <a:off x="457200" y="4754880"/>
+            <a:ext cx="11277295" cy="640080"/>
           </a:xfrm>
           <a:prstGeom prst="rect">
             <a:avLst/>
@@ -11306,1339 +11681,15 @@
           </a:bodyPr>
           <a:lstStyle/>
           <a:p>
-            <a:r>
-              <a:rPr sz="2600" b="1" i="0">
-                <a:solidFill>
-                  <a:srgbClr val="FFFFFF"/>
-                </a:solidFill>
-                <a:latin typeface="Calibri"/>
-              </a:rPr>
-              <a:t>PI CloudLite — entregable de hoy</a:t>
-            </a:r>
-          </a:p>
-        </p:txBody>
-      </p:sp>
-      <p:sp>
-        <p:nvSpPr>
-          <p:cNvPr id="5" name="TextBox 4"/>
-          <p:cNvSpPr txBox="1"/>
-          <p:nvPr/>
-        </p:nvSpPr>
-        <p:spPr>
-          <a:xfrm>
-            <a:off x="457200" y="1170432"/>
-            <a:ext cx="11277295" cy="5230368"/>
-          </a:xfrm>
-          <a:prstGeom prst="rect">
-            <a:avLst/>
-          </a:prstGeom>
-          <a:noFill/>
-        </p:spPr>
-        <p:txBody>
-          <a:bodyPr wrap="square">
-            <a:spAutoFit/>
-          </a:bodyPr>
-          <a:lstStyle/>
-          <a:p>
-            <a:pPr>
-              <a:spcAft>
-                <a:spcPts val="800"/>
-              </a:spcAft>
-            </a:pPr>
-            <a:r>
-              <a:rPr sz="2000" b="0" i="0">
-                <a:solidFill>
-                  <a:srgbClr val="333333"/>
-                </a:solidFill>
-                <a:latin typeface="Calibri"/>
-              </a:rPr>
-              <a:t>–   </a:t>
-            </a:r>
+            <a:pPr algn="ctr"/>
             <a:r>
               <a:rPr sz="2000" b="1" i="0">
                 <a:solidFill>
-                  <a:srgbClr val="333333"/>
-                </a:solidFill>
-                <a:latin typeface="Calibri"/>
-              </a:rPr>
-              <a:t>Entregable:</a:t>
-            </a:r>
-            <a:r>
-              <a:rPr sz="2000" b="0" i="0">
-                <a:solidFill>
-                  <a:srgbClr val="333333"/>
-                </a:solidFill>
-                <a:latin typeface="Calibri"/>
-              </a:rPr>
-              <a:t> .github/workflows/ci.yml + sección Monitoreo/CI del informe</a:t>
-            </a:r>
-          </a:p>
-          <a:p>
-            <a:pPr>
-              <a:spcAft>
-                <a:spcPts val="800"/>
-              </a:spcAft>
-            </a:pPr>
-            <a:r>
-              <a:rPr sz="2000" b="0" i="0">
-                <a:solidFill>
-                  <a:srgbClr val="333333"/>
-                </a:solidFill>
-                <a:latin typeface="Calibri"/>
-              </a:rPr>
-              <a:t>–   Herramienta: </a:t>
-            </a:r>
-            <a:r>
-              <a:rPr sz="2000" b="1" i="0">
-                <a:solidFill>
-                  <a:srgbClr val="333333"/>
-                </a:solidFill>
-                <a:latin typeface="Calibri"/>
-              </a:rPr>
-              <a:t>Navegador · editor de código del curso (YAML)</a:t>
-            </a:r>
-          </a:p>
-          <a:p>
-            <a:pPr>
-              <a:spcAft>
-                <a:spcPts val="800"/>
-              </a:spcAft>
-            </a:pPr>
-            <a:r>
-              <a:rPr sz="2000" b="0" i="0">
-                <a:solidFill>
-                  <a:srgbClr val="333333"/>
-                </a:solidFill>
-                <a:latin typeface="Calibri"/>
-              </a:rPr>
-              <a:t>–   Todo lo que construyan hoy entra al </a:t>
-            </a:r>
-            <a:r>
-              <a:rPr sz="2000" b="1" i="0">
-                <a:solidFill>
-                  <a:srgbClr val="333333"/>
-                </a:solidFill>
-                <a:latin typeface="Calibri"/>
-              </a:rPr>
-              <a:t>informe/repo del PI</a:t>
-            </a:r>
-            <a:r>
-              <a:rPr sz="2000" b="0" i="0">
-                <a:solidFill>
-                  <a:srgbClr val="333333"/>
-                </a:solidFill>
-                <a:latin typeface="Calibri"/>
-              </a:rPr>
-              <a:t> (no es lab suelto).</a:t>
-            </a:r>
-          </a:p>
-          <a:p>
-            <a:pPr>
-              <a:spcAft>
-                <a:spcPts val="800"/>
-              </a:spcAft>
-            </a:pPr>
-            <a:r>
-              <a:rPr sz="2000" b="0" i="0">
-                <a:solidFill>
-                  <a:srgbClr val="333333"/>
-                </a:solidFill>
-                <a:latin typeface="Calibri"/>
-              </a:rPr>
-              <a:t>–   Individual por defecto · el docente puede autorizar equipos de 2–3; la entrega en la plataforma del curso siempre es individual.</a:t>
-            </a:r>
-          </a:p>
-        </p:txBody>
-      </p:sp>
-      <p:sp>
-        <p:nvSpPr>
-          <p:cNvPr id="6" name="TextBox 5"/>
-          <p:cNvSpPr txBox="1"/>
-          <p:nvPr/>
-        </p:nvSpPr>
-        <p:spPr>
-          <a:xfrm>
-            <a:off x="11185855" y="6473952"/>
-            <a:ext cx="640080" cy="274320"/>
-          </a:xfrm>
-          <a:prstGeom prst="rect">
-            <a:avLst/>
-          </a:prstGeom>
-          <a:noFill/>
-        </p:spPr>
-        <p:txBody>
-          <a:bodyPr wrap="square">
-            <a:spAutoFit/>
-          </a:bodyPr>
-          <a:lstStyle/>
-          <a:p>
-            <a:pPr algn="r"/>
-            <a:r>
-              <a:rPr sz="1100" b="0" i="0">
-                <a:solidFill>
-                  <a:srgbClr val="666666"/>
-                </a:solidFill>
-                <a:latin typeface="Calibri"/>
-              </a:rPr>
-              <a:t>31</a:t>
-            </a:r>
-          </a:p>
-        </p:txBody>
-      </p:sp>
-    </p:spTree>
-  </p:cSld>
-  <p:clrMapOvr>
-    <a:masterClrMapping/>
-  </p:clrMapOvr>
-</p:sld>
-</file>
-
-<file path=ppt/slides/slide32.xml><?xml version="1.0" encoding="utf-8"?>
-<p:sld xmlns:a="http://schemas.openxmlformats.org/drawingml/2006/main" xmlns:p="http://schemas.openxmlformats.org/presentationml/2006/main" xmlns:r="http://schemas.openxmlformats.org/officeDocument/2006/relationships">
-  <p:cSld>
-    <p:bg>
-      <p:bgPr>
-        <a:solidFill>
-          <a:srgbClr val="FFFFFF"/>
-        </a:solidFill>
-        <a:effectLst/>
-      </p:bgPr>
-    </p:bg>
-    <p:spTree>
-      <p:nvGrpSpPr>
-        <p:cNvPr id="1" name=""/>
-        <p:cNvGrpSpPr/>
-        <p:nvPr/>
-      </p:nvGrpSpPr>
-      <p:grpSpPr/>
-      <p:sp>
-        <p:nvSpPr>
-          <p:cNvPr id="2" name="Rectangle 1"/>
-          <p:cNvSpPr/>
-          <p:nvPr/>
-        </p:nvSpPr>
-        <p:spPr>
-          <a:xfrm>
-            <a:off x="0" y="0"/>
-            <a:ext cx="12191695" cy="960120"/>
-          </a:xfrm>
-          <a:prstGeom prst="rect">
-            <a:avLst/>
-          </a:prstGeom>
-          <a:solidFill>
-            <a:srgbClr val="095292"/>
-          </a:solidFill>
-          <a:ln>
-            <a:noFill/>
-          </a:ln>
-        </p:spPr>
-        <p:style>
-          <a:lnRef idx="1">
-            <a:schemeClr val="accent1"/>
-          </a:lnRef>
-          <a:fillRef idx="3">
-            <a:schemeClr val="accent1"/>
-          </a:fillRef>
-          <a:effectRef idx="2">
-            <a:schemeClr val="accent1"/>
-          </a:effectRef>
-          <a:fontRef idx="minor">
-            <a:schemeClr val="lt1"/>
-          </a:fontRef>
-        </p:style>
-        <p:txBody>
-          <a:bodyPr rtlCol="0" anchor="ctr"/>
-          <a:lstStyle/>
-          <a:p>
-            <a:pPr algn="ctr"/>
-          </a:p>
-        </p:txBody>
-      </p:sp>
-      <p:sp>
-        <p:nvSpPr>
-          <p:cNvPr id="3" name="Rectangle 2"/>
-          <p:cNvSpPr/>
-          <p:nvPr/>
-        </p:nvSpPr>
-        <p:spPr>
-          <a:xfrm>
-            <a:off x="0" y="960120"/>
-            <a:ext cx="12191695" cy="41148"/>
-          </a:xfrm>
-          <a:prstGeom prst="rect">
-            <a:avLst/>
-          </a:prstGeom>
-          <a:solidFill>
-            <a:srgbClr val="FFD000"/>
-          </a:solidFill>
-          <a:ln>
-            <a:noFill/>
-          </a:ln>
-        </p:spPr>
-        <p:style>
-          <a:lnRef idx="1">
-            <a:schemeClr val="accent1"/>
-          </a:lnRef>
-          <a:fillRef idx="3">
-            <a:schemeClr val="accent1"/>
-          </a:fillRef>
-          <a:effectRef idx="2">
-            <a:schemeClr val="accent1"/>
-          </a:effectRef>
-          <a:fontRef idx="minor">
-            <a:schemeClr val="lt1"/>
-          </a:fontRef>
-        </p:style>
-        <p:txBody>
-          <a:bodyPr rtlCol="0" anchor="ctr"/>
-          <a:lstStyle/>
-          <a:p>
-            <a:pPr algn="ctr"/>
-          </a:p>
-        </p:txBody>
-      </p:sp>
-      <p:sp>
-        <p:nvSpPr>
-          <p:cNvPr id="4" name="TextBox 3"/>
-          <p:cNvSpPr txBox="1"/>
-          <p:nvPr/>
-        </p:nvSpPr>
-        <p:spPr>
-          <a:xfrm>
-            <a:off x="457200" y="164592"/>
-            <a:ext cx="11277295" cy="502920"/>
-          </a:xfrm>
-          <a:prstGeom prst="rect">
-            <a:avLst/>
-          </a:prstGeom>
-          <a:noFill/>
-        </p:spPr>
-        <p:txBody>
-          <a:bodyPr wrap="square">
-            <a:spAutoFit/>
-          </a:bodyPr>
-          <a:lstStyle/>
-          <a:p>
-            <a:r>
-              <a:rPr sz="2600" b="1" i="0">
-                <a:solidFill>
-                  <a:srgbClr val="FFFFFF"/>
-                </a:solidFill>
-                <a:latin typeface="Calibri"/>
-              </a:rPr>
-              <a:t>Manos a la obra (paso a paso)</a:t>
-            </a:r>
-          </a:p>
-        </p:txBody>
-      </p:sp>
-      <p:sp>
-        <p:nvSpPr>
-          <p:cNvPr id="5" name="TextBox 4"/>
-          <p:cNvSpPr txBox="1"/>
-          <p:nvPr/>
-        </p:nvSpPr>
-        <p:spPr>
-          <a:xfrm>
-            <a:off x="457200" y="1170432"/>
-            <a:ext cx="11277295" cy="5230368"/>
-          </a:xfrm>
-          <a:prstGeom prst="rect">
-            <a:avLst/>
-          </a:prstGeom>
-          <a:noFill/>
-        </p:spPr>
-        <p:txBody>
-          <a:bodyPr wrap="square">
-            <a:spAutoFit/>
-          </a:bodyPr>
-          <a:lstStyle/>
-          <a:p>
-            <a:pPr>
-              <a:spcAft>
-                <a:spcPts val="800"/>
-              </a:spcAft>
-            </a:pPr>
-            <a:r>
-              <a:rPr sz="2000" b="1" i="0">
-                <a:solidFill>
-                  <a:srgbClr val="333333"/>
-                </a:solidFill>
-                <a:latin typeface="Calibri"/>
-              </a:rPr>
-              <a:t>1.</a:t>
-            </a:r>
-            <a:r>
-              <a:rPr sz="2000" b="0" i="0">
-                <a:solidFill>
-                  <a:srgbClr val="333333"/>
-                </a:solidFill>
-                <a:latin typeface="Calibri"/>
-              </a:rPr>
-              <a:t> Paso 1: escriba en la pregunta 7 el contenido completo del ci.yml con disparadores, entorno y los pasos de construccion, prueba y despliegue simulado, usando la imagen y el puerto del Dockerfile del Corte 1; verifique que ningun secreto quede escrito en claro dentro del YAML.</a:t>
-            </a:r>
-          </a:p>
-          <a:p>
-            <a:pPr>
-              <a:spcAft>
-                <a:spcPts val="800"/>
-              </a:spcAft>
-            </a:pPr>
-            <a:r>
-              <a:rPr sz="2000" b="0" i="0">
-                <a:solidFill>
-                  <a:srgbClr val="333333"/>
-                </a:solidFill>
-                <a:latin typeface="Calibri"/>
-              </a:rPr>
-              <a:t>–   </a:t>
-            </a:r>
-            <a:r>
-              <a:rPr sz="2000" b="1" i="0">
-                <a:solidFill>
-                  <a:srgbClr val="333333"/>
-                </a:solidFill>
-                <a:latin typeface="Calibri"/>
-              </a:rPr>
-              <a:t>2.</a:t>
-            </a:r>
-            <a:r>
-              <a:rPr sz="2000" b="0" i="0">
-                <a:solidFill>
-                  <a:srgbClr val="333333"/>
-                </a:solidFill>
-                <a:latin typeface="Calibri"/>
-              </a:rPr>
-              <a:t> Paso 2: explique en la pregunta 8 que se compila o instala, que se ejecuta en la prueba y con que condicion el pipeline debe fallar; hagase la prueba mental de que error tendria que introducir para que el check salga rojo, y si no encuentra ninguno, su pipeline todavia no valida nada.</a:t>
-            </a:r>
-          </a:p>
-          <a:p>
-            <a:pPr>
-              <a:spcAft>
-                <a:spcPts val="800"/>
-              </a:spcAft>
-            </a:pPr>
-            <a:r>
-              <a:rPr sz="2000" b="0" i="0">
-                <a:solidFill>
-                  <a:srgbClr val="333333"/>
-                </a:solidFill>
-                <a:latin typeface="Calibri"/>
-              </a:rPr>
-              <a:t>–   </a:t>
-            </a:r>
-            <a:r>
-              <a:rPr sz="2000" b="1" i="0">
-                <a:solidFill>
-                  <a:srgbClr val="333333"/>
-                </a:solidFill>
-                <a:latin typeface="Calibri"/>
-              </a:rPr>
-              <a:t>3.</a:t>
-            </a:r>
-            <a:r>
-              <a:rPr sz="2000" b="0" i="0">
-                <a:solidFill>
-                  <a:srgbClr val="333333"/>
-                </a:solidFill>
-                <a:latin typeface="Calibri"/>
-              </a:rPr>
-              <a:t> Paso 3: distinga en la pregunta 9 que valida CI y que hace CD, ubique cual de los dos construyo y diga que le faltaria para CD real; reconocer que su pipeline llega hasta «listo para desplegar» suma puntos, afirmar que ya tiene CD los resta.</a:t>
-            </a:r>
-          </a:p>
-          <a:p>
-            <a:pPr>
-              <a:spcAft>
-                <a:spcPts val="800"/>
-              </a:spcAft>
-            </a:pPr>
-            <a:r>
-              <a:rPr sz="2000" b="0" i="0">
-                <a:solidFill>
-                  <a:srgbClr val="333333"/>
-                </a:solidFill>
-                <a:latin typeface="Calibri"/>
-              </a:rPr>
-              <a:t>–   </a:t>
-            </a:r>
-            <a:r>
-              <a:rPr sz="2000" b="1" i="0">
-                <a:solidFill>
-                  <a:srgbClr val="333333"/>
-                </a:solidFill>
-                <a:latin typeface="Calibri"/>
-              </a:rPr>
-              <a:t>4.</a:t>
-            </a:r>
-            <a:r>
-              <a:rPr sz="2000" b="0" i="0">
-                <a:solidFill>
-                  <a:srgbClr val="333333"/>
-                </a:solidFill>
-                <a:latin typeface="Calibri"/>
-              </a:rPr>
-              <a:t> Paso 4: liste en la pregunta 10 entre 4 y 6 senales con su umbral, atadas a operaciones de su dominio, y verifique que al menos una sea un registro y no una metrica numerica; una senal sin umbral no sirve para operar y no suma.</a:t>
-            </a:r>
-          </a:p>
-        </p:txBody>
-      </p:sp>
-      <p:sp>
-        <p:nvSpPr>
-          <p:cNvPr id="6" name="TextBox 5"/>
-          <p:cNvSpPr txBox="1"/>
-          <p:nvPr/>
-        </p:nvSpPr>
-        <p:spPr>
-          <a:xfrm>
-            <a:off x="11185855" y="6473952"/>
-            <a:ext cx="640080" cy="274320"/>
-          </a:xfrm>
-          <a:prstGeom prst="rect">
-            <a:avLst/>
-          </a:prstGeom>
-          <a:noFill/>
-        </p:spPr>
-        <p:txBody>
-          <a:bodyPr wrap="square">
-            <a:spAutoFit/>
-          </a:bodyPr>
-          <a:lstStyle/>
-          <a:p>
-            <a:pPr algn="r"/>
-            <a:r>
-              <a:rPr sz="1100" b="0" i="0">
-                <a:solidFill>
-                  <a:srgbClr val="666666"/>
-                </a:solidFill>
-                <a:latin typeface="Calibri"/>
-              </a:rPr>
-              <a:t>32</a:t>
-            </a:r>
-          </a:p>
-        </p:txBody>
-      </p:sp>
-    </p:spTree>
-  </p:cSld>
-  <p:clrMapOvr>
-    <a:masterClrMapping/>
-  </p:clrMapOvr>
-</p:sld>
-</file>
-
-<file path=ppt/slides/slide33.xml><?xml version="1.0" encoding="utf-8"?>
-<p:sld xmlns:a="http://schemas.openxmlformats.org/drawingml/2006/main" xmlns:p="http://schemas.openxmlformats.org/presentationml/2006/main" xmlns:r="http://schemas.openxmlformats.org/officeDocument/2006/relationships">
-  <p:cSld>
-    <p:bg>
-      <p:bgPr>
-        <a:solidFill>
-          <a:srgbClr val="FFFFFF"/>
-        </a:solidFill>
-        <a:effectLst/>
-      </p:bgPr>
-    </p:bg>
-    <p:spTree>
-      <p:nvGrpSpPr>
-        <p:cNvPr id="1" name=""/>
-        <p:cNvGrpSpPr/>
-        <p:nvPr/>
-      </p:nvGrpSpPr>
-      <p:grpSpPr/>
-      <p:sp>
-        <p:nvSpPr>
-          <p:cNvPr id="2" name="Rectangle 1"/>
-          <p:cNvSpPr/>
-          <p:nvPr/>
-        </p:nvSpPr>
-        <p:spPr>
-          <a:xfrm>
-            <a:off x="0" y="0"/>
-            <a:ext cx="12191695" cy="960120"/>
-          </a:xfrm>
-          <a:prstGeom prst="rect">
-            <a:avLst/>
-          </a:prstGeom>
-          <a:solidFill>
-            <a:srgbClr val="095292"/>
-          </a:solidFill>
-          <a:ln>
-            <a:noFill/>
-          </a:ln>
-        </p:spPr>
-        <p:style>
-          <a:lnRef idx="1">
-            <a:schemeClr val="accent1"/>
-          </a:lnRef>
-          <a:fillRef idx="3">
-            <a:schemeClr val="accent1"/>
-          </a:fillRef>
-          <a:effectRef idx="2">
-            <a:schemeClr val="accent1"/>
-          </a:effectRef>
-          <a:fontRef idx="minor">
-            <a:schemeClr val="lt1"/>
-          </a:fontRef>
-        </p:style>
-        <p:txBody>
-          <a:bodyPr rtlCol="0" anchor="ctr"/>
-          <a:lstStyle/>
-          <a:p>
-            <a:pPr algn="ctr"/>
-          </a:p>
-        </p:txBody>
-      </p:sp>
-      <p:sp>
-        <p:nvSpPr>
-          <p:cNvPr id="3" name="Rectangle 2"/>
-          <p:cNvSpPr/>
-          <p:nvPr/>
-        </p:nvSpPr>
-        <p:spPr>
-          <a:xfrm>
-            <a:off x="0" y="960120"/>
-            <a:ext cx="12191695" cy="41148"/>
-          </a:xfrm>
-          <a:prstGeom prst="rect">
-            <a:avLst/>
-          </a:prstGeom>
-          <a:solidFill>
-            <a:srgbClr val="FFD000"/>
-          </a:solidFill>
-          <a:ln>
-            <a:noFill/>
-          </a:ln>
-        </p:spPr>
-        <p:style>
-          <a:lnRef idx="1">
-            <a:schemeClr val="accent1"/>
-          </a:lnRef>
-          <a:fillRef idx="3">
-            <a:schemeClr val="accent1"/>
-          </a:fillRef>
-          <a:effectRef idx="2">
-            <a:schemeClr val="accent1"/>
-          </a:effectRef>
-          <a:fontRef idx="minor">
-            <a:schemeClr val="lt1"/>
-          </a:fontRef>
-        </p:style>
-        <p:txBody>
-          <a:bodyPr rtlCol="0" anchor="ctr"/>
-          <a:lstStyle/>
-          <a:p>
-            <a:pPr algn="ctr"/>
-          </a:p>
-        </p:txBody>
-      </p:sp>
-      <p:sp>
-        <p:nvSpPr>
-          <p:cNvPr id="4" name="TextBox 3"/>
-          <p:cNvSpPr txBox="1"/>
-          <p:nvPr/>
-        </p:nvSpPr>
-        <p:spPr>
-          <a:xfrm>
-            <a:off x="457200" y="164592"/>
-            <a:ext cx="11277295" cy="502920"/>
-          </a:xfrm>
-          <a:prstGeom prst="rect">
-            <a:avLst/>
-          </a:prstGeom>
-          <a:noFill/>
-        </p:spPr>
-        <p:txBody>
-          <a:bodyPr wrap="square">
-            <a:spAutoFit/>
-          </a:bodyPr>
-          <a:lstStyle/>
-          <a:p>
-            <a:r>
-              <a:rPr sz="2600" b="1" i="0">
-                <a:solidFill>
-                  <a:srgbClr val="FFFFFF"/>
-                </a:solidFill>
-                <a:latin typeface="Calibri"/>
-              </a:rPr>
-              <a:t>Para continuar (PI)</a:t>
-            </a:r>
-          </a:p>
-        </p:txBody>
-      </p:sp>
-      <p:sp>
-        <p:nvSpPr>
-          <p:cNvPr id="5" name="Rounded Rectangle 4"/>
-          <p:cNvSpPr/>
-          <p:nvPr/>
-        </p:nvSpPr>
-        <p:spPr>
-          <a:xfrm>
-            <a:off x="457200" y="1261872"/>
-            <a:ext cx="11277295" cy="1051560"/>
-          </a:xfrm>
-          <a:prstGeom prst="roundRect">
-            <a:avLst>
-              <a:gd name="adj" fmla="val 12000"/>
-            </a:avLst>
-          </a:prstGeom>
-          <a:solidFill>
-            <a:srgbClr val="E8F4FA"/>
-          </a:solidFill>
-          <a:ln>
-            <a:noFill/>
-          </a:ln>
-        </p:spPr>
-        <p:style>
-          <a:lnRef idx="1">
-            <a:schemeClr val="accent1"/>
-          </a:lnRef>
-          <a:fillRef idx="3">
-            <a:schemeClr val="accent1"/>
-          </a:fillRef>
-          <a:effectRef idx="2">
-            <a:schemeClr val="accent1"/>
-          </a:effectRef>
-          <a:fontRef idx="minor">
-            <a:schemeClr val="lt1"/>
-          </a:fontRef>
-        </p:style>
-        <p:txBody>
-          <a:bodyPr rtlCol="0" anchor="ctr"/>
-          <a:lstStyle/>
-          <a:p>
-            <a:pPr algn="ctr"/>
-          </a:p>
-        </p:txBody>
-      </p:sp>
-      <p:sp>
-        <p:nvSpPr>
-          <p:cNvPr id="6" name="Rectangle 5"/>
-          <p:cNvSpPr/>
-          <p:nvPr/>
-        </p:nvSpPr>
-        <p:spPr>
-          <a:xfrm>
-            <a:off x="457200" y="1261872"/>
-            <a:ext cx="128016" cy="1051560"/>
-          </a:xfrm>
-          <a:prstGeom prst="rect">
-            <a:avLst/>
-          </a:prstGeom>
-          <a:solidFill>
-            <a:srgbClr val="269CCB"/>
-          </a:solidFill>
-          <a:ln>
-            <a:noFill/>
-          </a:ln>
-        </p:spPr>
-        <p:style>
-          <a:lnRef idx="1">
-            <a:schemeClr val="accent1"/>
-          </a:lnRef>
-          <a:fillRef idx="3">
-            <a:schemeClr val="accent1"/>
-          </a:fillRef>
-          <a:effectRef idx="2">
-            <a:schemeClr val="accent1"/>
-          </a:effectRef>
-          <a:fontRef idx="minor">
-            <a:schemeClr val="lt1"/>
-          </a:fontRef>
-        </p:style>
-        <p:txBody>
-          <a:bodyPr rtlCol="0" anchor="ctr"/>
-          <a:lstStyle/>
-          <a:p>
-            <a:pPr algn="ctr"/>
-          </a:p>
-        </p:txBody>
-      </p:sp>
-      <p:sp>
-        <p:nvSpPr>
-          <p:cNvPr id="7" name="TextBox 6"/>
-          <p:cNvSpPr txBox="1"/>
-          <p:nvPr/>
-        </p:nvSpPr>
-        <p:spPr>
-          <a:xfrm>
-            <a:off x="777240" y="1399031"/>
-            <a:ext cx="10774375" cy="822959"/>
-          </a:xfrm>
-          <a:prstGeom prst="rect">
-            <a:avLst/>
-          </a:prstGeom>
-          <a:noFill/>
-        </p:spPr>
-        <p:txBody>
-          <a:bodyPr wrap="square">
-            <a:spAutoFit/>
-          </a:bodyPr>
-          <a:lstStyle/>
-          <a:p>
-            <a:r>
-              <a:rPr sz="1200" b="1" i="0">
-                <a:solidFill>
                   <a:srgbClr val="269CCB"/>
                 </a:solidFill>
                 <a:latin typeface="Calibri"/>
               </a:rPr>
-              <a:t>Info</a:t>
-            </a:r>
-          </a:p>
-          <a:p>
-            <a:pPr>
-              <a:spcBef>
-                <a:spcPts val="400"/>
-              </a:spcBef>
-            </a:pPr>
-            <a:r>
-              <a:rPr sz="1400" b="0" i="0">
-                <a:solidFill>
-                  <a:srgbClr val="333333"/>
-                </a:solidFill>
-                <a:latin typeface="Calibri"/>
-              </a:rPr>
-              <a:t>Entregable: .github/workflows/ci.yml + sección Monitoreo/CI del informe</a:t>
-            </a:r>
-          </a:p>
-        </p:txBody>
-      </p:sp>
-      <p:sp>
-        <p:nvSpPr>
-          <p:cNvPr id="8" name="Rounded Rectangle 7"/>
-          <p:cNvSpPr/>
-          <p:nvPr/>
-        </p:nvSpPr>
-        <p:spPr>
-          <a:xfrm>
-            <a:off x="457200" y="2478024"/>
-            <a:ext cx="11277295" cy="1051560"/>
-          </a:xfrm>
-          <a:prstGeom prst="roundRect">
-            <a:avLst>
-              <a:gd name="adj" fmla="val 12000"/>
-            </a:avLst>
-          </a:prstGeom>
-          <a:solidFill>
-            <a:srgbClr val="FFF8E1"/>
-          </a:solidFill>
-          <a:ln>
-            <a:noFill/>
-          </a:ln>
-        </p:spPr>
-        <p:style>
-          <a:lnRef idx="1">
-            <a:schemeClr val="accent1"/>
-          </a:lnRef>
-          <a:fillRef idx="3">
-            <a:schemeClr val="accent1"/>
-          </a:fillRef>
-          <a:effectRef idx="2">
-            <a:schemeClr val="accent1"/>
-          </a:effectRef>
-          <a:fontRef idx="minor">
-            <a:schemeClr val="lt1"/>
-          </a:fontRef>
-        </p:style>
-        <p:txBody>
-          <a:bodyPr rtlCol="0" anchor="ctr"/>
-          <a:lstStyle/>
-          <a:p>
-            <a:pPr algn="ctr"/>
-          </a:p>
-        </p:txBody>
-      </p:sp>
-      <p:sp>
-        <p:nvSpPr>
-          <p:cNvPr id="9" name="Rectangle 8"/>
-          <p:cNvSpPr/>
-          <p:nvPr/>
-        </p:nvSpPr>
-        <p:spPr>
-          <a:xfrm>
-            <a:off x="457200" y="2478024"/>
-            <a:ext cx="128016" cy="1051560"/>
-          </a:xfrm>
-          <a:prstGeom prst="rect">
-            <a:avLst/>
-          </a:prstGeom>
-          <a:solidFill>
-            <a:srgbClr val="FFD000"/>
-          </a:solidFill>
-          <a:ln>
-            <a:noFill/>
-          </a:ln>
-        </p:spPr>
-        <p:style>
-          <a:lnRef idx="1">
-            <a:schemeClr val="accent1"/>
-          </a:lnRef>
-          <a:fillRef idx="3">
-            <a:schemeClr val="accent1"/>
-          </a:fillRef>
-          <a:effectRef idx="2">
-            <a:schemeClr val="accent1"/>
-          </a:effectRef>
-          <a:fontRef idx="minor">
-            <a:schemeClr val="lt1"/>
-          </a:fontRef>
-        </p:style>
-        <p:txBody>
-          <a:bodyPr rtlCol="0" anchor="ctr"/>
-          <a:lstStyle/>
-          <a:p>
-            <a:pPr algn="ctr"/>
-          </a:p>
-        </p:txBody>
-      </p:sp>
-      <p:sp>
-        <p:nvSpPr>
-          <p:cNvPr id="10" name="TextBox 9"/>
-          <p:cNvSpPr txBox="1"/>
-          <p:nvPr/>
-        </p:nvSpPr>
-        <p:spPr>
-          <a:xfrm>
-            <a:off x="777240" y="2615184"/>
-            <a:ext cx="10774375" cy="822959"/>
-          </a:xfrm>
-          <a:prstGeom prst="rect">
-            <a:avLst/>
-          </a:prstGeom>
-          <a:noFill/>
-        </p:spPr>
-        <p:txBody>
-          <a:bodyPr wrap="square">
-            <a:spAutoFit/>
-          </a:bodyPr>
-          <a:lstStyle/>
-          <a:p>
-            <a:r>
-              <a:rPr sz="1200" b="1" i="0">
-                <a:solidFill>
-                  <a:srgbClr val="FFD000"/>
-                </a:solidFill>
-                <a:latin typeface="Calibri"/>
-              </a:rPr>
-              <a:t>Aclaración</a:t>
-            </a:r>
-          </a:p>
-          <a:p>
-            <a:pPr>
-              <a:spcBef>
-                <a:spcPts val="400"/>
-              </a:spcBef>
-            </a:pPr>
-            <a:r>
-              <a:rPr sz="1400" b="0" i="0">
-                <a:solidFill>
-                  <a:srgbClr val="333333"/>
-                </a:solidFill>
-                <a:latin typeface="Calibri"/>
-              </a:rPr>
-              <a:t>Subir evidencias al paquete CloudLite (Drive/repo) y a la plataforma del curso (la plataforma del curso) en la fecha que indique el docente.</a:t>
-            </a:r>
-          </a:p>
-        </p:txBody>
-      </p:sp>
-      <p:sp>
-        <p:nvSpPr>
-          <p:cNvPr id="11" name="Rounded Rectangle 10"/>
-          <p:cNvSpPr/>
-          <p:nvPr/>
-        </p:nvSpPr>
-        <p:spPr>
-          <a:xfrm>
-            <a:off x="457200" y="3694176"/>
-            <a:ext cx="11277295" cy="1051560"/>
-          </a:xfrm>
-          <a:prstGeom prst="roundRect">
-            <a:avLst>
-              <a:gd name="adj" fmla="val 12000"/>
-            </a:avLst>
-          </a:prstGeom>
-          <a:solidFill>
-            <a:srgbClr val="FBE4E4"/>
-          </a:solidFill>
-          <a:ln>
-            <a:noFill/>
-          </a:ln>
-        </p:spPr>
-        <p:style>
-          <a:lnRef idx="1">
-            <a:schemeClr val="accent1"/>
-          </a:lnRef>
-          <a:fillRef idx="3">
-            <a:schemeClr val="accent1"/>
-          </a:fillRef>
-          <a:effectRef idx="2">
-            <a:schemeClr val="accent1"/>
-          </a:effectRef>
-          <a:fontRef idx="minor">
-            <a:schemeClr val="lt1"/>
-          </a:fontRef>
-        </p:style>
-        <p:txBody>
-          <a:bodyPr rtlCol="0" anchor="ctr"/>
-          <a:lstStyle/>
-          <a:p>
-            <a:pPr algn="ctr"/>
-          </a:p>
-        </p:txBody>
-      </p:sp>
-      <p:sp>
-        <p:nvSpPr>
-          <p:cNvPr id="12" name="Rectangle 11"/>
-          <p:cNvSpPr/>
-          <p:nvPr/>
-        </p:nvSpPr>
-        <p:spPr>
-          <a:xfrm>
-            <a:off x="457200" y="3694176"/>
-            <a:ext cx="128016" cy="1051560"/>
-          </a:xfrm>
-          <a:prstGeom prst="rect">
-            <a:avLst/>
-          </a:prstGeom>
-          <a:solidFill>
-            <a:srgbClr val="A02030"/>
-          </a:solidFill>
-          <a:ln>
-            <a:noFill/>
-          </a:ln>
-        </p:spPr>
-        <p:style>
-          <a:lnRef idx="1">
-            <a:schemeClr val="accent1"/>
-          </a:lnRef>
-          <a:fillRef idx="3">
-            <a:schemeClr val="accent1"/>
-          </a:fillRef>
-          <a:effectRef idx="2">
-            <a:schemeClr val="accent1"/>
-          </a:effectRef>
-          <a:fontRef idx="minor">
-            <a:schemeClr val="lt1"/>
-          </a:fontRef>
-        </p:style>
-        <p:txBody>
-          <a:bodyPr rtlCol="0" anchor="ctr"/>
-          <a:lstStyle/>
-          <a:p>
-            <a:pPr algn="ctr"/>
-          </a:p>
-        </p:txBody>
-      </p:sp>
-      <p:sp>
-        <p:nvSpPr>
-          <p:cNvPr id="13" name="TextBox 12"/>
-          <p:cNvSpPr txBox="1"/>
-          <p:nvPr/>
-        </p:nvSpPr>
-        <p:spPr>
-          <a:xfrm>
-            <a:off x="777240" y="3831336"/>
-            <a:ext cx="10774375" cy="822959"/>
-          </a:xfrm>
-          <a:prstGeom prst="rect">
-            <a:avLst/>
-          </a:prstGeom>
-          <a:noFill/>
-        </p:spPr>
-        <p:txBody>
-          <a:bodyPr wrap="square">
-            <a:spAutoFit/>
-          </a:bodyPr>
-          <a:lstStyle/>
-          <a:p>
-            <a:r>
-              <a:rPr sz="1200" b="1" i="0">
-                <a:solidFill>
-                  <a:srgbClr val="A02030"/>
-                </a:solidFill>
-                <a:latin typeface="Calibri"/>
-              </a:rPr>
-              <a:t>Atención</a:t>
-            </a:r>
-          </a:p>
-          <a:p>
-            <a:pPr>
-              <a:spcBef>
-                <a:spcPts val="400"/>
-              </a:spcBef>
-            </a:pPr>
-            <a:r>
-              <a:rPr sz="1400" b="0" i="0">
-                <a:solidFill>
-                  <a:srgbClr val="333333"/>
-                </a:solidFill>
-                <a:latin typeface="Calibri"/>
-              </a:rPr>
-              <a:t>Sin cloud de pago ni instalaciones obligatorias de hipervisores/Docker Desktop.</a:t>
-            </a:r>
-          </a:p>
-        </p:txBody>
-      </p:sp>
-      <p:sp>
-        <p:nvSpPr>
-          <p:cNvPr id="14" name="TextBox 13"/>
-          <p:cNvSpPr txBox="1"/>
-          <p:nvPr/>
-        </p:nvSpPr>
-        <p:spPr>
-          <a:xfrm>
-            <a:off x="11185855" y="6473952"/>
-            <a:ext cx="640080" cy="274320"/>
-          </a:xfrm>
-          <a:prstGeom prst="rect">
-            <a:avLst/>
-          </a:prstGeom>
-          <a:noFill/>
-        </p:spPr>
-        <p:txBody>
-          <a:bodyPr wrap="square">
-            <a:spAutoFit/>
-          </a:bodyPr>
-          <a:lstStyle/>
-          <a:p>
-            <a:pPr algn="r"/>
-            <a:r>
-              <a:rPr sz="1100" b="0" i="0">
-                <a:solidFill>
-                  <a:srgbClr val="666666"/>
-                </a:solidFill>
-                <a:latin typeface="Calibri"/>
-              </a:rPr>
-              <a:t>33</a:t>
-            </a:r>
-          </a:p>
-        </p:txBody>
-      </p:sp>
-    </p:spTree>
-  </p:cSld>
-  <p:clrMapOvr>
-    <a:masterClrMapping/>
-  </p:clrMapOvr>
-</p:sld>
-</file>
-
-<file path=ppt/slides/slide34.xml><?xml version="1.0" encoding="utf-8"?>
-<p:sld xmlns:a="http://schemas.openxmlformats.org/drawingml/2006/main" xmlns:p="http://schemas.openxmlformats.org/presentationml/2006/main" xmlns:r="http://schemas.openxmlformats.org/officeDocument/2006/relationships">
-  <p:cSld>
-    <p:bg>
-      <p:bgPr>
-        <a:solidFill>
-          <a:srgbClr val="FFFFFF"/>
-        </a:solidFill>
-        <a:effectLst/>
-      </p:bgPr>
-    </p:bg>
-    <p:spTree>
-      <p:nvGrpSpPr>
-        <p:cNvPr id="1" name=""/>
-        <p:cNvGrpSpPr/>
-        <p:nvPr/>
-      </p:nvGrpSpPr>
-      <p:grpSpPr/>
-      <p:sp>
-        <p:nvSpPr>
-          <p:cNvPr id="2" name="Rectangle 1"/>
-          <p:cNvSpPr/>
-          <p:nvPr/>
-        </p:nvSpPr>
-        <p:spPr>
-          <a:xfrm>
-            <a:off x="0" y="0"/>
-            <a:ext cx="12191695" cy="164592"/>
-          </a:xfrm>
-          <a:prstGeom prst="rect">
-            <a:avLst/>
-          </a:prstGeom>
-          <a:solidFill>
-            <a:srgbClr val="269CCB"/>
-          </a:solidFill>
-          <a:ln>
-            <a:noFill/>
-          </a:ln>
-        </p:spPr>
-        <p:style>
-          <a:lnRef idx="1">
-            <a:schemeClr val="accent1"/>
-          </a:lnRef>
-          <a:fillRef idx="3">
-            <a:schemeClr val="accent1"/>
-          </a:fillRef>
-          <a:effectRef idx="2">
-            <a:schemeClr val="accent1"/>
-          </a:effectRef>
-          <a:fontRef idx="minor">
-            <a:schemeClr val="lt1"/>
-          </a:fontRef>
-        </p:style>
-        <p:txBody>
-          <a:bodyPr rtlCol="0" anchor="ctr"/>
-          <a:lstStyle/>
-          <a:p>
-            <a:pPr algn="ctr"/>
-          </a:p>
-        </p:txBody>
-      </p:sp>
-      <p:pic>
-        <p:nvPicPr>
-          <p:cNvPr id="3" name="Picture 2" descr="logo_uniajc_color.png"/>
-          <p:cNvPicPr>
-            <a:picLocks noChangeAspect="1"/>
-          </p:cNvPicPr>
-          <p:nvPr/>
-        </p:nvPicPr>
-        <p:blipFill>
-          <a:blip r:embed="rId2"/>
-          <a:stretch>
-            <a:fillRect/>
-          </a:stretch>
-        </p:blipFill>
-        <p:spPr>
-          <a:xfrm>
-            <a:off x="10271455" y="5998464"/>
-            <a:ext cx="1463040" cy="643233"/>
-          </a:xfrm>
-          <a:prstGeom prst="rect">
-            <a:avLst/>
-          </a:prstGeom>
-        </p:spPr>
-      </p:pic>
-      <p:sp>
-        <p:nvSpPr>
-          <p:cNvPr id="4" name="TextBox 3"/>
-          <p:cNvSpPr txBox="1"/>
-          <p:nvPr/>
-        </p:nvSpPr>
-        <p:spPr>
-          <a:xfrm>
-            <a:off x="457200" y="1737360"/>
-            <a:ext cx="11277295" cy="1097280"/>
-          </a:xfrm>
-          <a:prstGeom prst="rect">
-            <a:avLst/>
-          </a:prstGeom>
-          <a:noFill/>
-        </p:spPr>
-        <p:txBody>
-          <a:bodyPr wrap="square" anchor="ctr"/>
-          <a:lstStyle/>
-          <a:p>
-            <a:pPr algn="ctr"/>
-            <a:r>
-              <a:rPr sz="3400" b="1" i="0">
-                <a:solidFill>
-                  <a:srgbClr val="095292"/>
-                </a:solidFill>
-                <a:latin typeface="Calibri"/>
-              </a:rPr>
-              <a:t>Clase 8 · PI en movimiento</a:t>
-            </a:r>
-          </a:p>
-        </p:txBody>
-      </p:sp>
-      <p:sp>
-        <p:nvSpPr>
-          <p:cNvPr id="5" name="TextBox 4"/>
-          <p:cNvSpPr txBox="1"/>
-          <p:nvPr/>
-        </p:nvSpPr>
-        <p:spPr>
-          <a:xfrm>
-            <a:off x="457200" y="3017520"/>
-            <a:ext cx="11277295" cy="1645920"/>
-          </a:xfrm>
-          <a:prstGeom prst="rect">
-            <a:avLst/>
-          </a:prstGeom>
-          <a:noFill/>
-        </p:spPr>
-        <p:txBody>
-          <a:bodyPr wrap="square">
-            <a:spAutoFit/>
-          </a:bodyPr>
-          <a:lstStyle/>
-          <a:p>
-            <a:pPr algn="ctr">
-              <a:spcAft>
-                <a:spcPts val="600"/>
-              </a:spcAft>
-            </a:pPr>
-            <a:r>
-              <a:rPr sz="1600" b="0" i="0">
-                <a:solidFill>
-                  <a:srgbClr val="333333"/>
-                </a:solidFill>
-                <a:latin typeface="Calibri"/>
-              </a:rPr>
-              <a:t>Workflow Actions (build/test/simulate) + métricas de monitoreo del PI</a:t>
-            </a:r>
-          </a:p>
-          <a:p>
-            <a:pPr algn="ctr">
-              <a:spcAft>
-                <a:spcPts val="600"/>
-              </a:spcAft>
-            </a:pPr>
-            <a:r>
-              <a:rPr sz="1600" b="0" i="0">
-                <a:solidFill>
-                  <a:srgbClr val="333333"/>
-                </a:solidFill>
-                <a:latin typeface="Calibri"/>
-              </a:rPr>
-              <a:t>Evidencia: .github/workflows/ci.yml + sección Monitoreo/CI del informe</a:t>
-            </a:r>
-          </a:p>
-          <a:p>
-            <a:pPr algn="ctr">
-              <a:spcAft>
-                <a:spcPts val="600"/>
-              </a:spcAft>
-            </a:pPr>
-            <a:r>
-              <a:rPr sz="1600" b="0" i="0">
-                <a:solidFill>
-                  <a:srgbClr val="333333"/>
-                </a:solidFill>
-                <a:latin typeface="Calibri"/>
-              </a:rPr>
-              <a:t>Siguiente paso = siguiente hito del PI CloudLite</a:t>
-            </a:r>
-          </a:p>
-        </p:txBody>
-      </p:sp>
-      <p:sp>
-        <p:nvSpPr>
-          <p:cNvPr id="6" name="TextBox 5"/>
-          <p:cNvSpPr txBox="1"/>
-          <p:nvPr/>
-        </p:nvSpPr>
-        <p:spPr>
-          <a:xfrm>
-            <a:off x="457200" y="4754880"/>
-            <a:ext cx="11277295" cy="640080"/>
-          </a:xfrm>
-          <a:prstGeom prst="rect">
-            <a:avLst/>
-          </a:prstGeom>
-          <a:noFill/>
-        </p:spPr>
-        <p:txBody>
-          <a:bodyPr wrap="square">
-            <a:spAutoFit/>
-          </a:bodyPr>
-          <a:lstStyle/>
-          <a:p>
-            <a:pPr algn="ctr"/>
-            <a:r>
-              <a:rPr sz="2000" b="1" i="0">
-                <a:solidFill>
-                  <a:srgbClr val="269CCB"/>
-                </a:solidFill>
-                <a:latin typeface="Calibri"/>
-              </a:rPr>
-              <a:t>Teoría al servicio del proyecto</a:t>
+              <a:t>Teoría al servicio del diseño</a:t>
             </a:r>
           </a:p>
         </p:txBody>
@@ -14761,4 +13812,324 @@
   </a:objectDefaults>
   <a:extraClrSchemeLst/>
 </a:theme>
+</file>
+
+<file path=ppt/theme/theme2.xml><?xml version="1.0" encoding="utf-8"?>
+<a:theme xmlns:a="http://schemas.openxmlformats.org/drawingml/2006/main" name="Office Theme">
+  <a:themeElements>
+    <a:clrScheme name="Office">
+      <a:dk1>
+        <a:sysClr val="windowText" lastClr="000000"/>
+      </a:dk1>
+      <a:lt1>
+        <a:sysClr val="window" lastClr="FFFFFF"/>
+      </a:lt1>
+      <a:dk2>
+        <a:srgbClr val="1F497D"/>
+      </a:dk2>
+      <a:lt2>
+        <a:srgbClr val="EEECE1"/>
+      </a:lt2>
+      <a:accent1>
+        <a:srgbClr val="4F81BD"/>
+      </a:accent1>
+      <a:accent2>
+        <a:srgbClr val="C0504D"/>
+      </a:accent2>
+      <a:accent3>
+        <a:srgbClr val="9BBB59"/>
+      </a:accent3>
+      <a:accent4>
+        <a:srgbClr val="8064A2"/>
+      </a:accent4>
+      <a:accent5>
+        <a:srgbClr val="4BACC6"/>
+      </a:accent5>
+      <a:accent6>
+        <a:srgbClr val="F79646"/>
+      </a:accent6>
+      <a:hlink>
+        <a:srgbClr val="0000FF"/>
+      </a:hlink>
+      <a:folHlink>
+        <a:srgbClr val="800080"/>
+      </a:folHlink>
+    </a:clrScheme>
+    <a:fontScheme name="Office">
+      <a:majorFont>
+        <a:latin typeface="Calibri"/>
+        <a:ea typeface=""/>
+        <a:cs typeface=""/>
+        <a:font script="Jpan" typeface="ＭＳ Ｐゴシック"/>
+        <a:font script="Hang" typeface="맑은 고딕"/>
+        <a:font script="Hans" typeface="宋体"/>
+        <a:font script="Hant" typeface="新細明體"/>
+        <a:font script="Arab" typeface="Times New Roman"/>
+        <a:font script="Hebr" typeface="Times New Roman"/>
+        <a:font script="Thai" typeface="Angsana New"/>
+        <a:font script="Ethi" typeface="Nyala"/>
+        <a:font script="Beng" typeface="Vrinda"/>
+        <a:font script="Gujr" typeface="Shruti"/>
+        <a:font script="Khmr" typeface="MoolBoran"/>
+        <a:font script="Knda" typeface="Tunga"/>
+        <a:font script="Guru" typeface="Raavi"/>
+        <a:font script="Cans" typeface="Euphemia"/>
+        <a:font script="Cher" typeface="Plantagenet Cherokee"/>
+        <a:font script="Yiii" typeface="Microsoft Yi Baiti"/>
+        <a:font script="Tibt" typeface="Microsoft Himalaya"/>
+        <a:font script="Thaa" typeface="MV Boli"/>
+        <a:font script="Deva" typeface="Mangal"/>
+        <a:font script="Telu" typeface="Gautami"/>
+        <a:font script="Taml" typeface="Latha"/>
+        <a:font script="Syrc" typeface="Estrangelo Edessa"/>
+        <a:font script="Orya" typeface="Kalinga"/>
+        <a:font script="Mlym" typeface="Kartika"/>
+        <a:font script="Laoo" typeface="DokChampa"/>
+        <a:font script="Sinh" typeface="Iskoola Pota"/>
+        <a:font script="Mong" typeface="Mongolian Baiti"/>
+        <a:font script="Viet" typeface="Times New Roman"/>
+        <a:font script="Uigh" typeface="Microsoft Uighur"/>
+        <a:font script="Geor" typeface="Sylfaen"/>
+      </a:majorFont>
+      <a:minorFont>
+        <a:latin typeface="Calibri"/>
+        <a:ea typeface=""/>
+        <a:cs typeface=""/>
+        <a:font script="Jpan" typeface="ＭＳ Ｐゴシック"/>
+        <a:font script="Hang" typeface="맑은 고딕"/>
+        <a:font script="Hans" typeface="宋体"/>
+        <a:font script="Hant" typeface="新細明體"/>
+        <a:font script="Arab" typeface="Arial"/>
+        <a:font script="Hebr" typeface="Arial"/>
+        <a:font script="Thai" typeface="Cordia New"/>
+        <a:font script="Ethi" typeface="Nyala"/>
+        <a:font script="Beng" typeface="Vrinda"/>
+        <a:font script="Gujr" typeface="Shruti"/>
+        <a:font script="Khmr" typeface="DaunPenh"/>
+        <a:font script="Knda" typeface="Tunga"/>
+        <a:font script="Guru" typeface="Raavi"/>
+        <a:font script="Cans" typeface="Euphemia"/>
+        <a:font script="Cher" typeface="Plantagenet Cherokee"/>
+        <a:font script="Yiii" typeface="Microsoft Yi Baiti"/>
+        <a:font script="Tibt" typeface="Microsoft Himalaya"/>
+        <a:font script="Thaa" typeface="MV Boli"/>
+        <a:font script="Deva" typeface="Mangal"/>
+        <a:font script="Telu" typeface="Gautami"/>
+        <a:font script="Taml" typeface="Latha"/>
+        <a:font script="Syrc" typeface="Estrangelo Edessa"/>
+        <a:font script="Orya" typeface="Kalinga"/>
+        <a:font script="Mlym" typeface="Kartika"/>
+        <a:font script="Laoo" typeface="DokChampa"/>
+        <a:font script="Sinh" typeface="Iskoola Pota"/>
+        <a:font script="Mong" typeface="Mongolian Baiti"/>
+        <a:font script="Viet" typeface="Arial"/>
+        <a:font script="Uigh" typeface="Microsoft Uighur"/>
+        <a:font script="Geor" typeface="Sylfaen"/>
+      </a:minorFont>
+    </a:fontScheme>
+    <a:fmtScheme name="Office">
+      <a:fillStyleLst>
+        <a:solidFill>
+          <a:schemeClr val="phClr"/>
+        </a:solidFill>
+        <a:gradFill rotWithShape="1">
+          <a:gsLst>
+            <a:gs pos="0">
+              <a:schemeClr val="phClr">
+                <a:tint val="50000"/>
+                <a:satMod val="300000"/>
+              </a:schemeClr>
+            </a:gs>
+            <a:gs pos="35000">
+              <a:schemeClr val="phClr">
+                <a:tint val="37000"/>
+                <a:satMod val="300000"/>
+              </a:schemeClr>
+            </a:gs>
+            <a:gs pos="100000">
+              <a:schemeClr val="phClr">
+                <a:tint val="15000"/>
+                <a:satMod val="350000"/>
+              </a:schemeClr>
+            </a:gs>
+          </a:gsLst>
+          <a:lin ang="16200000" scaled="1"/>
+        </a:gradFill>
+        <a:gradFill rotWithShape="1">
+          <a:gsLst>
+            <a:gs pos="0">
+              <a:schemeClr val="phClr">
+                <a:tint val="100000"/>
+                <a:shade val="100000"/>
+                <a:satMod val="130000"/>
+              </a:schemeClr>
+            </a:gs>
+            <a:gs pos="100000">
+              <a:schemeClr val="phClr">
+                <a:tint val="50000"/>
+                <a:shade val="100000"/>
+                <a:satMod val="350000"/>
+              </a:schemeClr>
+            </a:gs>
+          </a:gsLst>
+          <a:lin ang="16200000" scaled="0"/>
+        </a:gradFill>
+      </a:fillStyleLst>
+      <a:lnStyleLst>
+        <a:ln w="9525" cap="flat" cmpd="sng" algn="ctr">
+          <a:solidFill>
+            <a:schemeClr val="phClr">
+              <a:shade val="95000"/>
+              <a:satMod val="105000"/>
+            </a:schemeClr>
+          </a:solidFill>
+          <a:prstDash val="solid"/>
+        </a:ln>
+        <a:ln w="25400" cap="flat" cmpd="sng" algn="ctr">
+          <a:solidFill>
+            <a:schemeClr val="phClr"/>
+          </a:solidFill>
+          <a:prstDash val="solid"/>
+        </a:ln>
+        <a:ln w="38100" cap="flat" cmpd="sng" algn="ctr">
+          <a:solidFill>
+            <a:schemeClr val="phClr"/>
+          </a:solidFill>
+          <a:prstDash val="solid"/>
+        </a:ln>
+      </a:lnStyleLst>
+      <a:effectStyleLst>
+        <a:effectStyle>
+          <a:effectLst>
+            <a:outerShdw blurRad="40000" dist="20000" dir="5400000" rotWithShape="0">
+              <a:srgbClr val="000000">
+                <a:alpha val="38000"/>
+              </a:srgbClr>
+            </a:outerShdw>
+          </a:effectLst>
+        </a:effectStyle>
+        <a:effectStyle>
+          <a:effectLst>
+            <a:outerShdw blurRad="40000" dist="23000" dir="5400000" rotWithShape="0">
+              <a:srgbClr val="000000">
+                <a:alpha val="35000"/>
+              </a:srgbClr>
+            </a:outerShdw>
+          </a:effectLst>
+        </a:effectStyle>
+        <a:effectStyle>
+          <a:effectLst>
+            <a:outerShdw blurRad="40000" dist="23000" dir="5400000" rotWithShape="0">
+              <a:srgbClr val="000000">
+                <a:alpha val="35000"/>
+              </a:srgbClr>
+            </a:outerShdw>
+          </a:effectLst>
+          <a:scene3d>
+            <a:camera prst="orthographicFront">
+              <a:rot lat="0" lon="0" rev="0"/>
+            </a:camera>
+            <a:lightRig rig="threePt" dir="t">
+              <a:rot lat="0" lon="0" rev="1200000"/>
+            </a:lightRig>
+          </a:scene3d>
+          <a:sp3d>
+            <a:bevelT w="63500" h="25400"/>
+          </a:sp3d>
+        </a:effectStyle>
+      </a:effectStyleLst>
+      <a:bgFillStyleLst>
+        <a:solidFill>
+          <a:schemeClr val="phClr"/>
+        </a:solidFill>
+        <a:gradFill rotWithShape="1">
+          <a:gsLst>
+            <a:gs pos="0">
+              <a:schemeClr val="phClr">
+                <a:tint val="40000"/>
+                <a:satMod val="350000"/>
+              </a:schemeClr>
+            </a:gs>
+            <a:gs pos="40000">
+              <a:schemeClr val="phClr">
+                <a:tint val="45000"/>
+                <a:shade val="99000"/>
+                <a:satMod val="350000"/>
+              </a:schemeClr>
+            </a:gs>
+            <a:gs pos="100000">
+              <a:schemeClr val="phClr">
+                <a:shade val="20000"/>
+                <a:satMod val="255000"/>
+              </a:schemeClr>
+            </a:gs>
+          </a:gsLst>
+          <a:path path="circle">
+            <a:fillToRect l="50000" t="-80000" r="50000" b="180000"/>
+          </a:path>
+        </a:gradFill>
+        <a:gradFill rotWithShape="1">
+          <a:gsLst>
+            <a:gs pos="0">
+              <a:schemeClr val="phClr">
+                <a:tint val="80000"/>
+                <a:satMod val="300000"/>
+              </a:schemeClr>
+            </a:gs>
+            <a:gs pos="100000">
+              <a:schemeClr val="phClr">
+                <a:shade val="30000"/>
+                <a:satMod val="200000"/>
+              </a:schemeClr>
+            </a:gs>
+          </a:gsLst>
+          <a:path path="circle">
+            <a:fillToRect l="50000" t="50000" r="50000" b="50000"/>
+          </a:path>
+        </a:gradFill>
+      </a:bgFillStyleLst>
+    </a:fmtScheme>
+  </a:themeElements>
+  <a:objectDefaults>
+    <a:spDef>
+      <a:spPr/>
+      <a:bodyPr/>
+      <a:lstStyle/>
+      <a:style>
+        <a:lnRef idx="1">
+          <a:schemeClr val="accent1"/>
+        </a:lnRef>
+        <a:fillRef idx="3">
+          <a:schemeClr val="accent1"/>
+        </a:fillRef>
+        <a:effectRef idx="2">
+          <a:schemeClr val="accent1"/>
+        </a:effectRef>
+        <a:fontRef idx="minor">
+          <a:schemeClr val="lt1"/>
+        </a:fontRef>
+      </a:style>
+    </a:spDef>
+    <a:lnDef>
+      <a:spPr/>
+      <a:bodyPr/>
+      <a:lstStyle/>
+      <a:style>
+        <a:lnRef idx="2">
+          <a:schemeClr val="accent1"/>
+        </a:lnRef>
+        <a:fillRef idx="0">
+          <a:schemeClr val="accent1"/>
+        </a:fillRef>
+        <a:effectRef idx="1">
+          <a:schemeClr val="accent1"/>
+        </a:effectRef>
+        <a:fontRef idx="minor">
+          <a:schemeClr val="tx1"/>
+        </a:fontRef>
+      </a:style>
+    </a:lnDef>
+  </a:objectDefaults>
+  <a:extraClrSchemeLst/>
+</a:theme>
 </file>
--- a/Arquitectura de Sistemas Computacionales/Clases/Clase 8 - Monitoreo optimizacion y CI-CD/Presentacion.pptx
+++ b/Arquitectura de Sistemas Computacionales/Clases/Clase 8 - Monitoreo optimizacion y CI-CD/Presentacion.pptx
@@ -34,7 +34,6 @@
     <p:sldId id="282" r:id="rId34"/>
     <p:sldId id="283" r:id="rId35"/>
     <p:sldId id="284" r:id="rId36"/>
-    <p:sldId id="285" r:id="rId37"/>
   </p:sldIdLst>
   <p:sldSz cx="12191695" cy="6858000" type="screen4x3"/>
   <p:notesSz cx="6858000" cy="9144000"/>
@@ -531,13 +530,13 @@
           <a:lstStyle/>
           <a:p>
             <a:r>
-              <a:t>Lo que se califica hoy son 25 de los 100 puntos de la actividad del Corte 2, en cuatro preguntas: 10 puntos el contenido completo del ci.yml, 5 explicar que hace de verdad la construccion y la prueba y con que condicion el pipeline debe fallar, 4 distinguir CI de CD y ubicar hasta donde llego el propio trabajo, y 6 la tabla de senales de monitoreo con umbral.</a:t>
+              <a:t>Conviene decir el reparto al abrir la clase, porque las dos preguntas que el grupo subestima, la 8 y la 10, valen juntas mas que el YAML.</a:t>
             </a:r>
           </a:p>
           <a:p/>
           <a:p>
             <a:r>
-              <a:t>Conviene decir el reparto al abrir la clase, porque las dos preguntas que el grupo subestima, la 8 y la 10, valen juntas mas que el YAML.</a:t>
+              <a:t>(Sobre la actividad, no se proyecta) Lo que se califica hoy son 25 de los 100 puntos de la actividad del Corte 2, en cuatro preguntas: 10 puntos el contenido completo del ci.yml, 5 explicar que hace de verdad la construccion y la prueba y con que condicion el pipeline debe fallar, 4 distinguir CI de CD y ubicar hasta donde llego el propio trabajo, y 6 la tabla de senales de monitoreo con umbral.</a:t>
             </a:r>
           </a:p>
         </p:txBody>
@@ -607,6 +606,88 @@
           <a:lstStyle/>
           <a:p>
             <a:r>
+              <a:t>Los valores sensibles se guardan en el repositorio bajo Settings, Secrets and variables, Actions; el workflow los referencia por nombre y la plataforma los inyecta como variables de entorno solo durante la corrida.</a:t>
+            </a:r>
+          </a:p>
+          <a:p/>
+          <a:p>
+            <a:r>
+              <a:t>Dos detalles evitan sustos.</a:t>
+            </a:r>
+          </a:p>
+          <a:p/>
+          <a:p>
+            <a:r>
+              <a:t>(Sobre la actividad, no se proyecta) Y el recordatorio de calificacion: un secreto en claro en el YAML no descuenta, anula la pregunta 7 entera.</a:t>
+            </a:r>
+          </a:p>
+        </p:txBody>
+      </p:sp>
+      <p:sp>
+        <p:nvSpPr>
+          <p:cNvPr id="4" name="Slide Number Placeholder 3"/>
+          <p:cNvSpPr>
+            <a:spLocks noGrp="1"/>
+          </p:cNvSpPr>
+          <p:nvPr>
+            <p:ph type="sldNum" idx="5" sz="quarter"/>
+          </p:nvPr>
+        </p:nvSpPr>
+        <p:spPr/>
+      </p:sp>
+    </p:spTree>
+  </p:cSld>
+  <p:clrMapOvr>
+    <a:masterClrMapping/>
+  </p:clrMapOvr>
+</p:notes>
+</file>
+
+<file path=ppt/notesSlides/notesSlide11.xml><?xml version="1.0" encoding="utf-8"?>
+<p:notes xmlns:a="http://schemas.openxmlformats.org/drawingml/2006/main" xmlns:p="http://schemas.openxmlformats.org/presentationml/2006/main" xmlns:r="http://schemas.openxmlformats.org/officeDocument/2006/relationships">
+  <p:cSld>
+    <p:spTree>
+      <p:nvGrpSpPr>
+        <p:cNvPr id="1" name=""/>
+        <p:cNvGrpSpPr/>
+        <p:nvPr/>
+      </p:nvGrpSpPr>
+      <p:grpSpPr>
+        <a:xfrm>
+          <a:off x="0" y="0"/>
+          <a:ext cx="0" cy="0"/>
+          <a:chOff x="0" y="0"/>
+          <a:chExt cx="0" cy="0"/>
+        </a:xfrm>
+      </p:grpSpPr>
+      <p:sp>
+        <p:nvSpPr>
+          <p:cNvPr id="2" name="Slide Image Placeholder 1"/>
+          <p:cNvSpPr>
+            <a:spLocks noGrp="1"/>
+          </p:cNvSpPr>
+          <p:nvPr>
+            <p:ph type="sldImg" idx="2"/>
+          </p:nvPr>
+        </p:nvSpPr>
+        <p:spPr/>
+      </p:sp>
+      <p:sp>
+        <p:nvSpPr>
+          <p:cNvPr id="3" name="Notes Placeholder 2"/>
+          <p:cNvSpPr>
+            <a:spLocks noGrp="1"/>
+          </p:cNvSpPr>
+          <p:nvPr>
+            <p:ph type="body" idx="3" sz="quarter"/>
+          </p:nvPr>
+        </p:nvSpPr>
+        <p:spPr/>
+        <p:txBody>
+          <a:bodyPr/>
+          <a:lstStyle/>
+          <a:p>
+            <a:r>
               <a:t>Cuatro que aparecen todos los semestres.</a:t>
             </a:r>
           </a:p>
@@ -614,6 +695,18 @@
           <a:p>
             <a:r>
               <a:t>Un umbral justificado asi vale, aunque despues la medicion lo corrija.</a:t>
+            </a:r>
+          </a:p>
+          <a:p/>
+          <a:p>
+            <a:r>
+              <a:t>(Sobre la actividad, no se proyecta) «Si no tenemos usuarios reales, que monitoreamos?» El entregable es el plan, no los datos: la pregunta pide que senales observaria en una produccion hipotetica, con sus umbrales.</a:t>
+            </a:r>
+          </a:p>
+          <a:p/>
+          <a:p>
+            <a:r>
+              <a:t>(Sobre la actividad, no se proyecta) Es preferible una prueba real y pequena a tres pruebas inventadas que no se ejecutan, porque la pregunta 8 evalua si el pipeline puede fallar.</a:t>
             </a:r>
           </a:p>
         </p:txBody>
@@ -698,6 +791,12 @@
               <a:t>Hay que decirlo explicito: lo simulado es el ultimo paso, no el pipeline; todo lo anterior es real y ejecutable.</a:t>
             </a:r>
           </a:p>
+          <a:p/>
+          <a:p>
+            <a:r>
+              <a:t>(Sobre la actividad, no se proyecta) Y hay que anunciar como se califica esa frontera, porque es contraintuitivo para el estudiante que cree que reconocer un limite es admitir una carencia: la pregunta 9 SUMA un punto por ubicar correctamente el propio trabajo y decir que llega hasta «listo para desplegar», y DESCUENTA la mitad de la pregunta a quien afirme haber construido CD.</a:t>
+            </a:r>
+          </a:p>
         </p:txBody>
       </p:sp>
       <p:sp>
@@ -835,7 +934,13 @@
           <a:lstStyle/>
           <a:p>
             <a:r>
-              <a:t>Se apoya en tres tipos de senal.</a:t>
+              <a:t>(Sobre la actividad, no se proyecta) Falta la sancion, que conviene anunciar dos veces: la pregunta vale CERO completa si aparece un secreto escrito en claro dentro del YAML, sin importar lo bien que este el resto.</a:t>
+            </a:r>
+          </a:p>
+          <a:p/>
+          <a:p>
+            <a:r>
+              <a:t>(Sobre la actividad, no se proyecta) Es la misma politica que el estudiante escribio en la pregunta 3 del Corte 2, y esta es la clase donde se comprueba si la cumple.</a:t>
             </a:r>
           </a:p>
         </p:txBody>
@@ -905,7 +1010,7 @@
           <a:lstStyle/>
           <a:p>
             <a:r>
-              <a:t>Errores es la proporcion de peticiones que fallan, tipicamente el porcentaje de respuestas 5xx; conviene expresarlo como disponibilidad, y aqui hay aritmetica que el docente debe citar: 99,9 por ciento equivale a unos 43 minutos de indisponibilidad al mes y 99,99 por ciento a unos 4 minutos, lo cual no es convencion sino calculo sobre los 43.200 minutos de un mes de treinta dias.</a:t>
+              <a:t>Se apoya en tres tipos de senal.</a:t>
             </a:r>
           </a:p>
         </p:txBody>
@@ -975,25 +1080,7 @@
           <a:lstStyle/>
           <a:p>
             <a:r>
-              <a:t>«Medimos la latencia» no permite decidir nada</a:t>
-            </a:r>
-          </a:p>
-          <a:p/>
-          <a:p>
-            <a:r>
-              <a:t>Una tabla de referencia para CloudLite, que el docente puede llenar en vivo: latencia p95 del inicio de sesion y del listado principal, con objetivo bajo 300 milisegundos; peticiones por minuto en la hora pico, con un valor esperado que sirva de linea base; porcentaje de respuestas 5xx, con alerta sobre el 1 por ciento sostenido; uso del pool de conexiones, con alerta sobre el 80 por ciento; y la fila que casi nadie escribe y vale un punto, un REGISTRO: el log estructurado de cada reserva rechazada y de cada intento de inicio de sesion fallido, con identificador de peticion, ruta y codigo, cuyo umbral es un evento observable, por ejemplo mas de cinco fallos del mismo usuario en diez minutos se revisa.</a:t>
-            </a:r>
-          </a:p>
-          <a:p/>
-          <a:p>
-            <a:r>
-              <a:t>Conviene proyectar esa fila y decir «esta es la que falta en el 80 por ciento de las entregas».</a:t>
-            </a:r>
-          </a:p>
-          <a:p/>
-          <a:p>
-            <a:r>
-              <a:t>Ahi entra la optimizacion de la segunda mitad del tema: paginar, con veinte a cincuenta elementos por pagina, porque un endpoint que devuelve cincuenta mil registros es problema de latencia y de memoria; indexar la columna por la que se filtra, porque sin indice el motor recorre la tabla completa; cachear lecturas repetidas, donde una tasa de acierto del 90 por ciento significa que nueve de cada diez lecturas no llegan a la base; y limitar la tasa de peticiones, el control de denegacion de servicio de la Clase 6.</a:t>
+              <a:t>Errores es la proporcion de peticiones que fallan, tipicamente el porcentaje de respuestas 5xx; conviene expresarlo como disponibilidad, y aqui hay aritmetica que el docente debe citar: 99,9 por ciento equivale a unos 43 minutos de indisponibilidad al mes y 99,99 por ciento a unos 4 minutos, lo cual no es convencion sino calculo sobre los 43.200 minutos de un mes de treinta dias.</a:t>
             </a:r>
           </a:p>
         </p:txBody>
@@ -1063,7 +1150,31 @@
           <a:lstStyle/>
           <a:p>
             <a:r>
-              <a:t>El workflow se dispara en push y en pull_request.</a:t>
+              <a:t>«Medimos la latencia» no permite decidir nada</a:t>
+            </a:r>
+          </a:p>
+          <a:p/>
+          <a:p>
+            <a:r>
+              <a:t>Una tabla de referencia para CloudLite, que el docente puede llenar en vivo: latencia p95 del inicio de sesion y del listado principal, con objetivo bajo 300 milisegundos; peticiones por minuto en la hora pico, con un valor esperado que sirva de linea base; porcentaje de respuestas 5xx, con alerta sobre el 1 por ciento sostenido; uso del pool de conexiones, con alerta sobre el 80 por ciento; y la fila que casi nadie escribe y vale un punto, un REGISTRO: el log estructurado de cada reserva rechazada y de cada intento de inicio de sesion fallido, con identificador de peticion, ruta y codigo, cuyo umbral es un evento observable, por ejemplo mas de cinco fallos del mismo usuario en diez minutos se revisa.</a:t>
+            </a:r>
+          </a:p>
+          <a:p/>
+          <a:p>
+            <a:r>
+              <a:t>Conviene proyectar esa fila y decir «esta es la que falta en el 80 por ciento de las entregas».</a:t>
+            </a:r>
+          </a:p>
+          <a:p/>
+          <a:p>
+            <a:r>
+              <a:t>Ahi entra la optimizacion de la segunda mitad del tema: paginar, con veinte a cincuenta elementos por pagina, porque un endpoint que devuelve cincuenta mil registros es problema de latencia y de memoria; indexar la columna por la que se filtra, porque sin indice el motor recorre la tabla completa; cachear lecturas repetidas, donde una tasa de acierto del 90 por ciento significa que nueve de cada diez lecturas no llegan a la base; y limitar la tasa de peticiones, el control de denegacion de servicio de la Clase 6.</a:t>
+            </a:r>
+          </a:p>
+          <a:p/>
+          <a:p>
+            <a:r>
+              <a:t>(Sobre la actividad, no se proyecta) El reparto de sus 6 puntos es un punto por senal bien formada con su umbral hasta la cuarta, hasta un punto adicional entre las senales quinta y sexta, y un punto por que al menos una sea un registro.</a:t>
             </a:r>
           </a:p>
         </p:txBody>
@@ -1133,37 +1244,13 @@
           <a:lstStyle/>
           <a:p>
             <a:r>
-              <a:t>Uno y medio, que se compila o se instala.</a:t>
+              <a:t>El workflow se dispara en push y en pull_request.</a:t>
             </a:r>
           </a:p>
           <a:p/>
           <a:p>
             <a:r>
-              <a:t>Uno y medio, que se ejecuta en la prueba y que comprueba exactamente.</a:t>
-            </a:r>
-          </a:p>
-          <a:p/>
-          <a:p>
-            <a:r>
-              <a:t>La forma de responderlo es una prueba mental que el docente debe hacer en voz alta y en vivo: que error tendria que introducir yo en el codigo para que este pipeline lo detecte.</a:t>
-            </a:r>
-          </a:p>
-          <a:p/>
-          <a:p>
-            <a:r>
-              <a:t>Si la respuesta no aparece en diez segundos, el pipeline no valida nada todavia.</a:t>
-            </a:r>
-          </a:p>
-          <a:p/>
-          <a:p>
-            <a:r>
-              <a:t>La respuesta es que una sola prueba que verifique que el endpoint /health responde 200 detecta la clase de error mas costosa en operacion, que la aplicacion ya no arranca; y con eso la condicion de fallo se escribe sola: el check sale rojo si /health deja de responder 200, si falta una dependencia declarada o si el docker build no compila.</a:t>
-            </a:r>
-          </a:p>
-          <a:p/>
-          <a:p>
-            <a:r>
-              <a:t>Conviene romper el pipeline a proposito en la demo, porque un check rojo proyectado ensena mas que el parrafo anterior.</a:t>
+              <a:t>(Sobre la actividad, no se proyecta) La evidencia del entregable es doble: el archivo ci.yml en el repositorio y la captura de una corrida en verde con los nombres de los pasos visibles; si Actions falla por cuota o por red se acepta el YAML con la explicacion paso por paso, pero eso es plan B y hay que decir que lo es.</a:t>
             </a:r>
           </a:p>
         </p:txBody>
@@ -1233,13 +1320,37 @@
           <a:lstStyle/>
           <a:p>
             <a:r>
-              <a:t>Los valores sensibles se guardan en el repositorio bajo Settings, Secrets and variables, Actions; el workflow los referencia por nombre y la plataforma los inyecta como variables de entorno solo durante la corrida.</a:t>
+              <a:t>Uno y medio, que se compila o se instala.</a:t>
             </a:r>
           </a:p>
           <a:p/>
           <a:p>
             <a:r>
-              <a:t>Dos detalles evitan sustos.</a:t>
+              <a:t>Uno y medio, que se ejecuta en la prueba y que comprueba exactamente.</a:t>
+            </a:r>
+          </a:p>
+          <a:p/>
+          <a:p>
+            <a:r>
+              <a:t>La forma de responderlo es una prueba mental que el docente debe hacer en voz alta y en vivo: que error tendria que introducir yo en el codigo para que este pipeline lo detecte.</a:t>
+            </a:r>
+          </a:p>
+          <a:p/>
+          <a:p>
+            <a:r>
+              <a:t>Si la respuesta no aparece en diez segundos, el pipeline no valida nada todavia.</a:t>
+            </a:r>
+          </a:p>
+          <a:p/>
+          <a:p>
+            <a:r>
+              <a:t>La respuesta es que una sola prueba que verifique que el endpoint /health responde 200 detecta la clase de error mas costosa en operacion, que la aplicacion ya no arranca; y con eso la condicion de fallo se escribe sola: el check sale rojo si /health deja de responder 200, si falta una dependencia declarada o si el docker build no compila.</a:t>
+            </a:r>
+          </a:p>
+          <a:p/>
+          <a:p>
+            <a:r>
+              <a:t>Conviene romper el pipeline a proposito en la demo, porque un check rojo proyectado ensena mas que el parrafo anterior.</a:t>
             </a:r>
           </a:p>
         </p:txBody>
@@ -5250,7 +5361,7 @@
                 </a:solidFill>
                 <a:latin typeface="Calibri"/>
               </a:rPr>
-              <a:t>Los tres bloques que la pregunta 7 califica, y el orden de los pasos (1/2)</a:t>
+              <a:t>Los tres bloques de un workflow, y el orden de los pasos (1/2)</a:t>
             </a:r>
           </a:p>
         </p:txBody>
@@ -5289,7 +5400,7 @@
                 </a:solidFill>
                 <a:latin typeface="Calibri"/>
               </a:rPr>
-              <a:t>–   La pregunta 7 no pide «un workflow»: pide tres bloques nombrados y tres pasos en orden, y el reparto de sus 10 puntos hay que dictarlo tal cual porque decide como se estudia.</a:t>
+              <a:t>–   Un workflow no es un archivo cualquiera: tiene tres bloques nombrados y tres pasos en orden.</a:t>
             </a:r>
           </a:p>
           <a:p>
@@ -5305,7 +5416,7 @@
                 </a:solidFill>
                 <a:latin typeface="Calibri"/>
               </a:rPr>
-              <a:t>–   Dos puntos son los DISPARADORES, es decir la clave on, y basta con on push y pull_request bien escritos.</a:t>
+              <a:t>–   El primer bloque son los DISPARADORES, es decir la clave on, y basta con on push y pull_request bien escritos.</a:t>
             </a:r>
           </a:p>
           <a:p>
@@ -5337,7 +5448,7 @@
                 </a:solidFill>
                 <a:latin typeface="Calibri"/>
               </a:rPr>
-              <a:t>–   Cuatro puntos, casi la mitad, son los tres PASOS presentes y en ORDEN: construccion, prueba y despliegue simulado.</a:t>
+              <a:t>–   Los tres PASOS van presentes y en ORDEN: construccion, prueba y despliegue simulado.</a:t>
             </a:r>
           </a:p>
           <a:p>
@@ -5534,7 +5645,7 @@
                 </a:solidFill>
                 <a:latin typeface="Calibri"/>
               </a:rPr>
-              <a:t>Los tres bloques que la pregunta 7 califica, y el orden de los pasos (2/2)</a:t>
+              <a:t>Los tres bloques de un workflow, y el orden de los pasos (2/2)</a:t>
             </a:r>
           </a:p>
         </p:txBody>
@@ -5590,38 +5701,6 @@
                 <a:latin typeface="Calibri"/>
               </a:rPr>
               <a:t>–   Y un punto es la coherencia con el Dockerfile del Corte 1: la misma imagen y el mismo puerto, es decir cloudlite-api con su etiqueta 0.1.0 y el 8080 del EXPOSE de la Clase 3.</a:t>
-            </a:r>
-          </a:p>
-          <a:p>
-            <a:pPr>
-              <a:spcAft>
-                <a:spcPts val="800"/>
-              </a:spcAft>
-            </a:pPr>
-            <a:r>
-              <a:rPr sz="2000" b="0" i="0">
-                <a:solidFill>
-                  <a:srgbClr val="333333"/>
-                </a:solidFill>
-                <a:latin typeface="Calibri"/>
-              </a:rPr>
-              <a:t>–   Falta la sancion, que conviene anunciar dos veces: la pregunta vale CERO completa si aparece un secreto escrito en claro dentro del YAML, sin importar lo bien que este el resto.</a:t>
-            </a:r>
-          </a:p>
-          <a:p>
-            <a:pPr>
-              <a:spcAft>
-                <a:spcPts val="800"/>
-              </a:spcAft>
-            </a:pPr>
-            <a:r>
-              <a:rPr sz="2000" b="0" i="0">
-                <a:solidFill>
-                  <a:srgbClr val="333333"/>
-                </a:solidFill>
-                <a:latin typeface="Calibri"/>
-              </a:rPr>
-              <a:t>–   Es la misma politica que el estudiante escribio en la pregunta 3 del Corte 2, y esta es la clase donde se comprueba si la cumple.</a:t>
             </a:r>
           </a:p>
         </p:txBody>
@@ -6125,7 +6204,7 @@
                 </a:solidFill>
                 <a:latin typeface="Calibri"/>
               </a:rPr>
-              <a:t>–   La distincion entre metrica y registro no es teorica hoy: la pregunta 10 da un punto por que al menos una de las senales listadas sea un REGISTRO y no una metrica numerica, es decir algo que se escribe para poder reconstruir que paso despues.</a:t>
+              <a:t>–   La distincion entre metrica y registro importa: al menos una de las senales de un plan deberia ser un REGISTRO y no una metrica numerica, es decir algo que se escribe para poder reconstruir que paso despues.</a:t>
             </a:r>
           </a:p>
           <a:p>
@@ -6858,7 +6937,7 @@
                 </a:solidFill>
                 <a:latin typeface="Calibri"/>
               </a:rPr>
-              <a:t>La tabla de senales de la pregunta 10, con sus tres columnas exactas (1/2)</a:t>
+              <a:t>La tabla de senales, con sus tres columnas (1/2)</a:t>
             </a:r>
           </a:p>
         </p:txBody>
@@ -6897,7 +6976,7 @@
                 </a:solidFill>
                 <a:latin typeface="Calibri"/>
               </a:rPr>
-              <a:t>–   El entregable de la segunda mitad es una tabla de entre 4 y 6 filas, y el formato que califica la pregunta 10 tiene TRES columnas cuyos nombres hay que dictar: «Senal», «Que se mide en MI dominio» y «Umbral u objetivo».</a:t>
+              <a:t>–   El plan de monitoreo es una tabla de entre 4 y 6 filas con TRES columnas: «Senal», «Que se mide en MI dominio» y «Umbral u objetivo».</a:t>
             </a:r>
           </a:p>
           <a:p>
@@ -6913,7 +6992,7 @@
                 </a:solidFill>
                 <a:latin typeface="Calibri"/>
               </a:rPr>
-              <a:t>–   El reparto de sus 6 puntos es un punto por senal bien formada con su umbral hasta la cuarta, hasta un punto adicional entre las senales quinta y sexta, y un punto por que al menos una sea un registro.</a:t>
+              <a:t>–   La regla que decide la mitad de la nota se dice en una frase: una senal sin umbral NO SUMA, aunque este bien elegida.</a:t>
             </a:r>
           </a:p>
           <a:p>
@@ -6929,7 +7008,7 @@
                 </a:solidFill>
                 <a:latin typeface="Calibri"/>
               </a:rPr>
-              <a:t>–   La regla que decide la mitad de la nota se dice en una frase: una senal sin umbral NO SUMA, aunque este bien elegida.</a:t>
+              <a:t>–   «el listado de disponibilidad debe responder en menos de 400 milisegundos y si pasa de 800 se revisa» si, porque define cuando hay que actuar.</a:t>
             </a:r>
           </a:p>
           <a:p>
@@ -6945,7 +7024,23 @@
                 </a:solidFill>
                 <a:latin typeface="Calibri"/>
               </a:rPr>
-              <a:t>–   «el listado de disponibilidad debe responder en menos de 400 milisegundos y si pasa de 800 se revisa» si, porque define cuando hay que actuar.</a:t>
+              <a:t>–   El umbral puede ser discutible, y hay que decir que se acepta discutible: lo que no puede es faltar.</a:t>
+            </a:r>
+          </a:p>
+          <a:p>
+            <a:pPr>
+              <a:spcAft>
+                <a:spcPts val="800"/>
+              </a:spcAft>
+            </a:pPr>
+            <a:r>
+              <a:rPr sz="2000" b="0" i="0">
+                <a:solidFill>
+                  <a:srgbClr val="333333"/>
+                </a:solidFill>
+                <a:latin typeface="Calibri"/>
+              </a:rPr>
+              <a:t>–   La segunda columna tiene que referirse a operaciones del dominio propio, asi que «el sistema» no es una respuesta y «el listado de disponibilidad de canchas» o «el registro de una reserva» si.</a:t>
             </a:r>
           </a:p>
         </p:txBody>
@@ -7126,7 +7221,7 @@
                 </a:solidFill>
                 <a:latin typeface="Calibri"/>
               </a:rPr>
-              <a:t>La tabla de senales de la pregunta 10, con sus tres columnas exactas (2/2)</a:t>
+              <a:t>La tabla de senales, con sus tres columnas (2/2)</a:t>
             </a:r>
           </a:p>
         </p:txBody>
@@ -7152,38 +7247,6 @@
             <a:spAutoFit/>
           </a:bodyPr>
           <a:lstStyle/>
-          <a:p>
-            <a:pPr>
-              <a:spcAft>
-                <a:spcPts val="800"/>
-              </a:spcAft>
-            </a:pPr>
-            <a:r>
-              <a:rPr sz="2000" b="0" i="0">
-                <a:solidFill>
-                  <a:srgbClr val="333333"/>
-                </a:solidFill>
-                <a:latin typeface="Calibri"/>
-              </a:rPr>
-              <a:t>–   El umbral puede ser discutible, y hay que decir que se acepta discutible: lo que no puede es faltar.</a:t>
-            </a:r>
-          </a:p>
-          <a:p>
-            <a:pPr>
-              <a:spcAft>
-                <a:spcPts val="800"/>
-              </a:spcAft>
-            </a:pPr>
-            <a:r>
-              <a:rPr sz="2000" b="0" i="0">
-                <a:solidFill>
-                  <a:srgbClr val="333333"/>
-                </a:solidFill>
-                <a:latin typeface="Calibri"/>
-              </a:rPr>
-              <a:t>–   La segunda columna tambien se califica: se descuenta si las senales no se refieren a operaciones del dominio propio, asi que «el sistema» no es una respuesta y «el listado de disponibilidad de canchas» o «el registro de una reserva» si.</a:t>
-            </a:r>
-          </a:p>
           <a:p>
             <a:pPr>
               <a:spcAft>
@@ -7815,22 +7878,6 @@
               <a:t>–   Un paso Construir que instala dependencias y ejecuta docker build con la imagen etiquetada, un paso Probar que corre las pruebas</a:t>
             </a:r>
           </a:p>
-          <a:p>
-            <a:pPr>
-              <a:spcAft>
-                <a:spcPts val="800"/>
-              </a:spcAft>
-            </a:pPr>
-            <a:r>
-              <a:rPr sz="2000" b="0" i="0">
-                <a:solidFill>
-                  <a:srgbClr val="333333"/>
-                </a:solidFill>
-                <a:latin typeface="Calibri"/>
-              </a:rPr>
-              <a:t>–   Y un paso final rotulado como despliegue simulado que imprime la etiqueta de version y publica un artefacto, un archivo que queda guardado junto a la corrida.</a:t>
-            </a:r>
-          </a:p>
         </p:txBody>
       </p:sp>
       <p:sp>
@@ -8048,7 +8095,7 @@
                 </a:solidFill>
                 <a:latin typeface="Calibri"/>
               </a:rPr>
-              <a:t>–   Que docker build forme parte de la construccion tiene un valor extra que conviene senalar: comprueba en cada cambio que el Dockerfile sigue siendo valido, que es una de las cosas que se rompen en silencio.</a:t>
+              <a:t>–   Y un paso final rotulado como despliegue simulado que imprime la etiqueta de version y publica un artefacto, un archivo que queda guardado junto a la corrida.</a:t>
             </a:r>
           </a:p>
           <a:p>
@@ -8064,23 +8111,7 @@
                 </a:solidFill>
                 <a:latin typeface="Calibri"/>
               </a:rPr>
-              <a:t>–   La evidencia del entregable es doble: el archivo ci.yml en el repositorio y la captura de una corrida en verde con los nombres de los pasos visibles</a:t>
-            </a:r>
-          </a:p>
-          <a:p>
-            <a:pPr>
-              <a:spcAft>
-                <a:spcPts val="800"/>
-              </a:spcAft>
-            </a:pPr>
-            <a:r>
-              <a:rPr sz="2000" b="0" i="0">
-                <a:solidFill>
-                  <a:srgbClr val="333333"/>
-                </a:solidFill>
-                <a:latin typeface="Calibri"/>
-              </a:rPr>
-              <a:t>–   Si Actions falla por cuota o por red se acepta el YAML con la explicacion paso por paso, pero eso es plan B y hay que decir que lo es.</a:t>
+              <a:t>–   Que docker build forme parte de la construccion tiene un valor extra que conviene senalar: comprueba en cada cambio que el Dockerfile sigue siendo valido, que es una de las cosas que se rompen en silencio.</a:t>
             </a:r>
           </a:p>
         </p:txBody>
@@ -8300,7 +8331,7 @@
                 </a:solidFill>
                 <a:latin typeface="Calibri"/>
               </a:rPr>
-              <a:t>–   La pregunta 8 vale 5 puntos y no pregunta por CI en general: pregunta por el ci.yml del estudiante, en tres campos.</a:t>
+              <a:t>–   Un ci.yml propio se explica en tres campos.</a:t>
             </a:r>
           </a:p>
           <a:p>
@@ -8316,7 +8347,7 @@
                 </a:solidFill>
                 <a:latin typeface="Calibri"/>
               </a:rPr>
-              <a:t>–   Y dos puntos, el corazon de la pregunta, con que condicion el pipeline debe FALLAR.</a:t>
+              <a:t>–   Y el tercero, el corazon del asunto: con que condicion el pipeline debe FALLAR.</a:t>
             </a:r>
           </a:p>
           <a:p>
@@ -8332,23 +8363,7 @@
                 </a:solidFill>
                 <a:latin typeface="Calibri"/>
               </a:rPr>
-              <a:t>–   Ese ultimo campo vale CERO si el pipeline no puede fallar nunca, y hay que explicar por que no es una crueldad de la rubrica: un workflow cuyo unico paso imprime un mensaje de exito siempre sale verde</a:t>
-            </a:r>
-          </a:p>
-          <a:p>
-            <a:pPr>
-              <a:spcAft>
-                <a:spcPts val="800"/>
-              </a:spcAft>
-            </a:pPr>
-            <a:r>
-              <a:rPr sz="2000" b="0" i="0">
-                <a:solidFill>
-                  <a:srgbClr val="333333"/>
-                </a:solidFill>
-                <a:latin typeface="Calibri"/>
-              </a:rPr>
-              <a:t>–   Y un check que siempre sale verde no aporta ninguna informacion; es una decoracion.</a:t>
+              <a:t>–   Un pipeline que no puede fallar nunca no sirve: un workflow cuyo unico paso imprime un mensaje de exito siempre sale verde, y un check que siempre sale verde no aporta ninguna informacion; es una decoracion.</a:t>
             </a:r>
           </a:p>
           <a:p>
@@ -8545,7 +8560,7 @@
                 </a:solidFill>
                 <a:latin typeface="Calibri"/>
               </a:rPr>
-              <a:t>Donde se ejecuta de verdad la politica de secretos de la Clase 6 (1/2)</a:t>
+              <a:t>Donde se ejecuta de verdad la politica de secretos de la Clase 6</a:t>
             </a:r>
           </a:p>
         </p:txBody>
@@ -8617,6 +8632,22 @@
                 <a:latin typeface="Calibri"/>
               </a:rPr>
               <a:t>–   Y por diseno los secretos no se entregan a las corridas disparadas por un pull_request que viene de un fork, para que un extrano no pueda proponer un cambio que los imprima.</a:t>
+            </a:r>
+          </a:p>
+          <a:p>
+            <a:pPr>
+              <a:spcAft>
+                <a:spcPts val="800"/>
+              </a:spcAft>
+            </a:pPr>
+            <a:r>
+              <a:rPr sz="2000" b="0" i="0">
+                <a:solidFill>
+                  <a:srgbClr val="333333"/>
+                </a:solidFill>
+                <a:latin typeface="Calibri"/>
+              </a:rPr>
+              <a:t>–   La consecuencia practica es que la validacion de un cambio externo no puede depender de credenciales, y por eso las pruebas del stub deben correr sin acceso a servicios reales, con valores ficticios o un doble simulado.</a:t>
             </a:r>
           </a:p>
         </p:txBody>
@@ -8797,7 +8828,7 @@
                 </a:solidFill>
                 <a:latin typeface="Calibri"/>
               </a:rPr>
-              <a:t>Donde se ejecuta de verdad la politica de secretos de la Clase 6 (2/2)</a:t>
+              <a:t>Preguntas frecuentes del grupo (1/2)</a:t>
             </a:r>
           </a:p>
         </p:txBody>
@@ -8836,7 +8867,7 @@
                 </a:solidFill>
                 <a:latin typeface="Calibri"/>
               </a:rPr>
-              <a:t>–   La consecuencia practica es que la validacion de un cambio externo no puede depender de credenciales, y por eso las pruebas del stub deben correr sin acceso a servicios reales, con valores ficticios o un doble simulado.</a:t>
+              <a:t>–   Y algo si es real: el chequeo de salud que consulta el balanceador de la Clase 7 ya es monitoreo, y el check de Actions ya es una senal de que el sistema construye.</a:t>
             </a:r>
           </a:p>
           <a:p>
@@ -8852,7 +8883,23 @@
                 </a:solidFill>
                 <a:latin typeface="Calibri"/>
               </a:rPr>
-              <a:t>–   Y el recordatorio de calificacion: un secreto en claro en el YAML no descuenta, anula la pregunta 7 entera.</a:t>
+              <a:t>–   «De donde saco los umbrales si nunca he medido?» De tres fuentes legitimas, y conviene nombrarlas: una convencion del oficio citada como tal, por ejemplo 300 milisegundos de p95 o el 80 por ciento de saturacion</a:t>
+            </a:r>
+          </a:p>
+          <a:p>
+            <a:pPr>
+              <a:spcAft>
+                <a:spcPts val="800"/>
+              </a:spcAft>
+            </a:pPr>
+            <a:r>
+              <a:rPr sz="2000" b="0" i="0">
+                <a:solidFill>
+                  <a:srgbClr val="333333"/>
+                </a:solidFill>
+                <a:latin typeface="Calibri"/>
+              </a:rPr>
+              <a:t>–   Una expectativa del usuario redactada en el dominio, por ejemplo que una reserva no tarde mas de dos segundos; o una aritmetica de servilleta a partir del escenario de carga, que es justamente lo que se formaliza en la Clase 12.</a:t>
             </a:r>
           </a:p>
         </p:txBody>
@@ -9033,7 +9080,7 @@
                 </a:solidFill>
                 <a:latin typeface="Calibri"/>
               </a:rPr>
-              <a:t>Preguntas frecuentes del grupo (1/2)</a:t>
+              <a:t>Preguntas frecuentes del grupo (2/2)</a:t>
             </a:r>
           </a:p>
         </p:txBody>
@@ -9072,7 +9119,7 @@
                 </a:solidFill>
                 <a:latin typeface="Calibri"/>
               </a:rPr>
-              <a:t>–   «Si no tenemos usuarios reales, que monitoreamos?» El entregable es el plan, no los datos: la pregunta pide que senales observaria en una produccion hipotetica, con sus umbrales.</a:t>
+              <a:t>–   «Mi proyecto no tiene pruebas automatizadas, que pongo en el paso Probar?» Una prueba, aunque sea una: que el proceso arranca y que /health responde 200.</a:t>
             </a:r>
           </a:p>
           <a:p>
@@ -9088,7 +9135,7 @@
                 </a:solidFill>
                 <a:latin typeface="Calibri"/>
               </a:rPr>
-              <a:t>–   Y algo si es real: el chequeo de salud que consulta el balanceador de la Clase 7 ya es monitoreo, y el check de Actions ya es una senal de que el sistema construye.</a:t>
+              <a:t>–   «Puedo poner solo metricas numericas?» No sin perder un punto: al menos una senal tiene que ser un registro.</a:t>
             </a:r>
           </a:p>
           <a:p>
@@ -9104,23 +9151,7 @@
                 </a:solidFill>
                 <a:latin typeface="Calibri"/>
               </a:rPr>
-              <a:t>–   «De donde saco los umbrales si nunca he medido?» De tres fuentes legitimas, y conviene nombrarlas: una convencion del oficio citada como tal, por ejemplo 300 milisegundos de p95 o el 80 por ciento de saturacion</a:t>
-            </a:r>
-          </a:p>
-          <a:p>
-            <a:pPr>
-              <a:spcAft>
-                <a:spcPts val="800"/>
-              </a:spcAft>
-            </a:pPr>
-            <a:r>
-              <a:rPr sz="2000" b="0" i="0">
-                <a:solidFill>
-                  <a:srgbClr val="333333"/>
-                </a:solidFill>
-                <a:latin typeface="Calibri"/>
-              </a:rPr>
-              <a:t>–   Una expectativa del usuario redactada en el dominio, por ejemplo que una reserva no tarde mas de dos segundos; o una aritmetica de servilleta a partir del escenario de carga, que es justamente lo que se formaliza en la Clase 12.</a:t>
+              <a:t>–   La mas facil de justificar es el log de los rechazos de negocio del propio dominio, que ademas es la unica forma de contestar despues por que se rechazo una operacion concreta.</a:t>
             </a:r>
           </a:p>
         </p:txBody>
@@ -9301,21 +9332,141 @@
                 </a:solidFill>
                 <a:latin typeface="Calibri"/>
               </a:rPr>
-              <a:t>Preguntas frecuentes del grupo (2/2)</a:t>
-            </a:r>
-          </a:p>
-        </p:txBody>
-      </p:sp>
-      <p:sp>
-        <p:nvSpPr>
-          <p:cNvPr id="5" name="TextBox 4"/>
+              <a:t>El workflow de CI: el archivo completo</a:t>
+            </a:r>
+          </a:p>
+        </p:txBody>
+      </p:sp>
+      <p:sp>
+        <p:nvSpPr>
+          <p:cNvPr id="5" name="Rounded Rectangle 4"/>
+          <p:cNvSpPr/>
+          <p:nvPr/>
+        </p:nvSpPr>
+        <p:spPr>
+          <a:xfrm>
+            <a:off x="457200" y="1261872"/>
+            <a:ext cx="11277295" cy="5093208"/>
+          </a:xfrm>
+          <a:prstGeom prst="roundRect">
+            <a:avLst>
+              <a:gd name="adj" fmla="val 12000"/>
+            </a:avLst>
+          </a:prstGeom>
+          <a:solidFill>
+            <a:srgbClr val="1E2A38"/>
+          </a:solidFill>
+          <a:ln>
+            <a:noFill/>
+          </a:ln>
+        </p:spPr>
+        <p:style>
+          <a:lnRef idx="1">
+            <a:schemeClr val="accent1"/>
+          </a:lnRef>
+          <a:fillRef idx="3">
+            <a:schemeClr val="accent1"/>
+          </a:fillRef>
+          <a:effectRef idx="2">
+            <a:schemeClr val="accent1"/>
+          </a:effectRef>
+          <a:fontRef idx="minor">
+            <a:schemeClr val="lt1"/>
+          </a:fontRef>
+        </p:style>
+        <p:txBody>
+          <a:bodyPr rtlCol="0" anchor="ctr"/>
+          <a:lstStyle/>
+          <a:p>
+            <a:pPr algn="ctr"/>
+          </a:p>
+        </p:txBody>
+      </p:sp>
+      <p:sp>
+        <p:nvSpPr>
+          <p:cNvPr id="6" name="Rectangle 5"/>
+          <p:cNvSpPr/>
+          <p:nvPr/>
+        </p:nvSpPr>
+        <p:spPr>
+          <a:xfrm>
+            <a:off x="457200" y="1261872"/>
+            <a:ext cx="11277295" cy="320040"/>
+          </a:xfrm>
+          <a:prstGeom prst="rect">
+            <a:avLst/>
+          </a:prstGeom>
+          <a:solidFill>
+            <a:srgbClr val="095292"/>
+          </a:solidFill>
+          <a:ln>
+            <a:noFill/>
+          </a:ln>
+        </p:spPr>
+        <p:style>
+          <a:lnRef idx="1">
+            <a:schemeClr val="accent1"/>
+          </a:lnRef>
+          <a:fillRef idx="3">
+            <a:schemeClr val="accent1"/>
+          </a:fillRef>
+          <a:effectRef idx="2">
+            <a:schemeClr val="accent1"/>
+          </a:effectRef>
+          <a:fontRef idx="minor">
+            <a:schemeClr val="lt1"/>
+          </a:fontRef>
+        </p:style>
+        <p:txBody>
+          <a:bodyPr rtlCol="0" anchor="ctr"/>
+          <a:lstStyle/>
+          <a:p>
+            <a:pPr algn="ctr"/>
+          </a:p>
+        </p:txBody>
+      </p:sp>
+      <p:sp>
+        <p:nvSpPr>
+          <p:cNvPr id="7" name="TextBox 6"/>
           <p:cNvSpPr txBox="1"/>
           <p:nvPr/>
         </p:nvSpPr>
         <p:spPr>
           <a:xfrm>
-            <a:off x="457200" y="1170432"/>
-            <a:ext cx="11277295" cy="5230368"/>
+            <a:off x="685800" y="1307592"/>
+            <a:ext cx="10820095" cy="256032"/>
+          </a:xfrm>
+          <a:prstGeom prst="rect">
+            <a:avLst/>
+          </a:prstGeom>
+          <a:noFill/>
+        </p:spPr>
+        <p:txBody>
+          <a:bodyPr wrap="square" anchor="ctr"/>
+          <a:lstStyle/>
+          <a:p>
+            <a:r>
+              <a:rPr sz="1000" b="1" i="0">
+                <a:solidFill>
+                  <a:srgbClr val="269CCB"/>
+                </a:solidFill>
+                <a:latin typeface="Calibri"/>
+              </a:rPr>
+              <a:t>● ● ●</a:t>
+            </a:r>
+          </a:p>
+        </p:txBody>
+      </p:sp>
+      <p:sp>
+        <p:nvSpPr>
+          <p:cNvPr id="8" name="TextBox 7"/>
+          <p:cNvSpPr txBox="1"/>
+          <p:nvPr/>
+        </p:nvSpPr>
+        <p:spPr>
+          <a:xfrm>
+            <a:off x="777240" y="1719072"/>
+            <a:ext cx="5181447" cy="4453128"/>
           </a:xfrm>
           <a:prstGeom prst="rect">
             <a:avLst/>
@@ -9330,72 +9481,383 @@
           <a:p>
             <a:pPr>
               <a:spcAft>
-                <a:spcPts val="800"/>
+                <a:spcPts val="400"/>
               </a:spcAft>
             </a:pPr>
             <a:r>
-              <a:rPr sz="2000" b="0" i="0">
-                <a:solidFill>
-                  <a:srgbClr val="333333"/>
-                </a:solidFill>
-                <a:latin typeface="Calibri"/>
-              </a:rPr>
-              <a:t>–   «Mi proyecto no tiene pruebas automatizadas, que pongo en el paso Probar?» Una prueba, aunque sea una: que el proceso arranca y que /health responde 200.</a:t>
+              <a:rPr sz="1400" b="0" i="0">
+                <a:solidFill>
+                  <a:srgbClr val="FFFFFF"/>
+                </a:solidFill>
+                <a:latin typeface="Calibri"/>
+              </a:rPr>
+              <a:t># .github/workflows/ci.yml</a:t>
             </a:r>
           </a:p>
           <a:p>
             <a:pPr>
               <a:spcAft>
-                <a:spcPts val="800"/>
+                <a:spcPts val="400"/>
               </a:spcAft>
             </a:pPr>
             <a:r>
-              <a:rPr sz="2000" b="0" i="0">
-                <a:solidFill>
-                  <a:srgbClr val="333333"/>
-                </a:solidFill>
-                <a:latin typeface="Calibri"/>
-              </a:rPr>
-              <a:t>–   Es preferible una prueba real y pequena a tres pruebas inventadas que no se ejecutan, porque la pregunta 8 evalua si el pipeline puede fallar.</a:t>
+              <a:rPr sz="1400" b="0" i="0">
+                <a:solidFill>
+                  <a:srgbClr val="FFFFFF"/>
+                </a:solidFill>
+                <a:latin typeface="Calibri"/>
+              </a:rPr>
+              <a:t>name: CI</a:t>
             </a:r>
           </a:p>
           <a:p>
             <a:pPr>
               <a:spcAft>
-                <a:spcPts val="800"/>
+                <a:spcPts val="400"/>
               </a:spcAft>
             </a:pPr>
             <a:r>
-              <a:rPr sz="2000" b="0" i="0">
-                <a:solidFill>
-                  <a:srgbClr val="333333"/>
-                </a:solidFill>
-                <a:latin typeface="Calibri"/>
-              </a:rPr>
-              <a:t>–   «Puedo poner solo metricas numericas?» No sin perder un punto: al menos una senal tiene que ser un registro.</a:t>
+              <a:rPr sz="1400" b="0" i="0">
+                <a:solidFill>
+                  <a:srgbClr val="FFFFFF"/>
+                </a:solidFill>
+                <a:latin typeface="Calibri"/>
+              </a:rPr>
+              <a:t/>
             </a:r>
           </a:p>
           <a:p>
             <a:pPr>
               <a:spcAft>
-                <a:spcPts val="800"/>
+                <a:spcPts val="400"/>
               </a:spcAft>
             </a:pPr>
             <a:r>
-              <a:rPr sz="2000" b="0" i="0">
-                <a:solidFill>
-                  <a:srgbClr val="333333"/>
-                </a:solidFill>
-                <a:latin typeface="Calibri"/>
-              </a:rPr>
-              <a:t>–   La mas facil de justificar es el log de los rechazos de negocio del propio dominio, que ademas es la unica forma de contestar despues por que se rechazo una operacion concreta.</a:t>
-            </a:r>
-          </a:p>
-        </p:txBody>
-      </p:sp>
-      <p:sp>
-        <p:nvSpPr>
-          <p:cNvPr id="6" name="TextBox 5"/>
+              <a:rPr sz="1400" b="0" i="0">
+                <a:solidFill>
+                  <a:srgbClr val="FFFFFF"/>
+                </a:solidFill>
+                <a:latin typeface="Calibri"/>
+              </a:rPr>
+              <a:t>on:</a:t>
+            </a:r>
+          </a:p>
+          <a:p>
+            <a:pPr>
+              <a:spcAft>
+                <a:spcPts val="400"/>
+              </a:spcAft>
+            </a:pPr>
+            <a:r>
+              <a:rPr sz="1400" b="0" i="0">
+                <a:solidFill>
+                  <a:srgbClr val="FFFFFF"/>
+                </a:solidFill>
+                <a:latin typeface="Calibri"/>
+              </a:rPr>
+              <a:t>  push:</a:t>
+            </a:r>
+          </a:p>
+          <a:p>
+            <a:pPr>
+              <a:spcAft>
+                <a:spcPts val="400"/>
+              </a:spcAft>
+            </a:pPr>
+            <a:r>
+              <a:rPr sz="1400" b="0" i="0">
+                <a:solidFill>
+                  <a:srgbClr val="FFFFFF"/>
+                </a:solidFill>
+                <a:latin typeface="Calibri"/>
+              </a:rPr>
+              <a:t>    branches: [main]</a:t>
+            </a:r>
+          </a:p>
+          <a:p>
+            <a:pPr>
+              <a:spcAft>
+                <a:spcPts val="400"/>
+              </a:spcAft>
+            </a:pPr>
+            <a:r>
+              <a:rPr sz="1400" b="0" i="0">
+                <a:solidFill>
+                  <a:srgbClr val="FFFFFF"/>
+                </a:solidFill>
+                <a:latin typeface="Calibri"/>
+              </a:rPr>
+              <a:t>  pull_request:</a:t>
+            </a:r>
+          </a:p>
+          <a:p>
+            <a:pPr>
+              <a:spcAft>
+                <a:spcPts val="400"/>
+              </a:spcAft>
+            </a:pPr>
+            <a:r>
+              <a:rPr sz="1400" b="0" i="0">
+                <a:solidFill>
+                  <a:srgbClr val="FFFFFF"/>
+                </a:solidFill>
+                <a:latin typeface="Calibri"/>
+              </a:rPr>
+              <a:t/>
+            </a:r>
+          </a:p>
+          <a:p>
+            <a:pPr>
+              <a:spcAft>
+                <a:spcPts val="400"/>
+              </a:spcAft>
+            </a:pPr>
+            <a:r>
+              <a:rPr sz="1400" b="0" i="0">
+                <a:solidFill>
+                  <a:srgbClr val="FFFFFF"/>
+                </a:solidFill>
+                <a:latin typeface="Calibri"/>
+              </a:rPr>
+              <a:t>jobs:</a:t>
+            </a:r>
+          </a:p>
+          <a:p>
+            <a:pPr>
+              <a:spcAft>
+                <a:spcPts val="400"/>
+              </a:spcAft>
+            </a:pPr>
+            <a:r>
+              <a:rPr sz="1400" b="0" i="0">
+                <a:solidFill>
+                  <a:srgbClr val="FFFFFF"/>
+                </a:solidFill>
+                <a:latin typeface="Calibri"/>
+              </a:rPr>
+              <a:t>  construir-y-probar:</a:t>
+            </a:r>
+          </a:p>
+          <a:p>
+            <a:pPr>
+              <a:spcAft>
+                <a:spcPts val="400"/>
+              </a:spcAft>
+            </a:pPr>
+            <a:r>
+              <a:rPr sz="1400" b="0" i="0">
+                <a:solidFill>
+                  <a:srgbClr val="FFFFFF"/>
+                </a:solidFill>
+                <a:latin typeface="Calibri"/>
+              </a:rPr>
+              <a:t>    runs-on: ubuntu-latest</a:t>
+            </a:r>
+          </a:p>
+        </p:txBody>
+      </p:sp>
+      <p:sp>
+        <p:nvSpPr>
+          <p:cNvPr id="9" name="TextBox 8"/>
+          <p:cNvSpPr txBox="1"/>
+          <p:nvPr/>
+        </p:nvSpPr>
+        <p:spPr>
+          <a:xfrm>
+            <a:off x="6233007" y="1719072"/>
+            <a:ext cx="5181447" cy="4453128"/>
+          </a:xfrm>
+          <a:prstGeom prst="rect">
+            <a:avLst/>
+          </a:prstGeom>
+          <a:noFill/>
+        </p:spPr>
+        <p:txBody>
+          <a:bodyPr wrap="square">
+            <a:spAutoFit/>
+          </a:bodyPr>
+          <a:lstStyle/>
+          <a:p>
+            <a:pPr>
+              <a:spcAft>
+                <a:spcPts val="400"/>
+              </a:spcAft>
+            </a:pPr>
+            <a:r>
+              <a:rPr sz="1400" b="0" i="0">
+                <a:solidFill>
+                  <a:srgbClr val="FFFFFF"/>
+                </a:solidFill>
+                <a:latin typeface="Calibri"/>
+              </a:rPr>
+              <a:t>    steps:</a:t>
+            </a:r>
+          </a:p>
+          <a:p>
+            <a:pPr>
+              <a:spcAft>
+                <a:spcPts val="400"/>
+              </a:spcAft>
+            </a:pPr>
+            <a:r>
+              <a:rPr sz="1400" b="0" i="0">
+                <a:solidFill>
+                  <a:srgbClr val="FFFFFF"/>
+                </a:solidFill>
+                <a:latin typeface="Calibri"/>
+              </a:rPr>
+              <a:t>      - uses: actions/checkout@v4</a:t>
+            </a:r>
+          </a:p>
+          <a:p>
+            <a:pPr>
+              <a:spcAft>
+                <a:spcPts val="400"/>
+              </a:spcAft>
+            </a:pPr>
+            <a:r>
+              <a:rPr sz="1400" b="0" i="0">
+                <a:solidFill>
+                  <a:srgbClr val="FFFFFF"/>
+                </a:solidFill>
+                <a:latin typeface="Calibri"/>
+              </a:rPr>
+              <a:t/>
+            </a:r>
+          </a:p>
+          <a:p>
+            <a:pPr>
+              <a:spcAft>
+                <a:spcPts val="400"/>
+              </a:spcAft>
+            </a:pPr>
+            <a:r>
+              <a:rPr sz="1400" b="0" i="0">
+                <a:solidFill>
+                  <a:srgbClr val="FFFFFF"/>
+                </a:solidFill>
+                <a:latin typeface="Calibri"/>
+              </a:rPr>
+              <a:t>      - uses: actions/setup-node@v4</a:t>
+            </a:r>
+          </a:p>
+          <a:p>
+            <a:pPr>
+              <a:spcAft>
+                <a:spcPts val="400"/>
+              </a:spcAft>
+            </a:pPr>
+            <a:r>
+              <a:rPr sz="1400" b="0" i="0">
+                <a:solidFill>
+                  <a:srgbClr val="FFFFFF"/>
+                </a:solidFill>
+                <a:latin typeface="Calibri"/>
+              </a:rPr>
+              <a:t>        with:</a:t>
+            </a:r>
+          </a:p>
+          <a:p>
+            <a:pPr>
+              <a:spcAft>
+                <a:spcPts val="400"/>
+              </a:spcAft>
+            </a:pPr>
+            <a:r>
+              <a:rPr sz="1400" b="0" i="0">
+                <a:solidFill>
+                  <a:srgbClr val="FFFFFF"/>
+                </a:solidFill>
+                <a:latin typeface="Calibri"/>
+              </a:rPr>
+              <a:t>          node-version: '20'</a:t>
+            </a:r>
+          </a:p>
+          <a:p>
+            <a:pPr>
+              <a:spcAft>
+                <a:spcPts val="400"/>
+              </a:spcAft>
+            </a:pPr>
+            <a:r>
+              <a:rPr sz="1400" b="0" i="0">
+                <a:solidFill>
+                  <a:srgbClr val="FFFFFF"/>
+                </a:solidFill>
+                <a:latin typeface="Calibri"/>
+              </a:rPr>
+              <a:t>          cache: 'npm'</a:t>
+            </a:r>
+          </a:p>
+          <a:p>
+            <a:pPr>
+              <a:spcAft>
+                <a:spcPts val="400"/>
+              </a:spcAft>
+            </a:pPr>
+            <a:r>
+              <a:rPr sz="1400" b="0" i="0">
+                <a:solidFill>
+                  <a:srgbClr val="FFFFFF"/>
+                </a:solidFill>
+                <a:latin typeface="Calibri"/>
+              </a:rPr>
+              <a:t/>
+            </a:r>
+          </a:p>
+          <a:p>
+            <a:pPr>
+              <a:spcAft>
+                <a:spcPts val="400"/>
+              </a:spcAft>
+            </a:pPr>
+            <a:r>
+              <a:rPr sz="1400" b="0" i="0">
+                <a:solidFill>
+                  <a:srgbClr val="FFFFFF"/>
+                </a:solidFill>
+                <a:latin typeface="Calibri"/>
+              </a:rPr>
+              <a:t>      - run: npm ci</a:t>
+            </a:r>
+          </a:p>
+          <a:p>
+            <a:pPr>
+              <a:spcAft>
+                <a:spcPts val="400"/>
+              </a:spcAft>
+            </a:pPr>
+            <a:r>
+              <a:rPr sz="1400" b="0" i="0">
+                <a:solidFill>
+                  <a:srgbClr val="FFFFFF"/>
+                </a:solidFill>
+                <a:latin typeface="Calibri"/>
+              </a:rPr>
+              <a:t>      - run: npm test -- --ci</a:t>
+            </a:r>
+          </a:p>
+          <a:p>
+            <a:pPr>
+              <a:spcAft>
+                <a:spcPts val="400"/>
+              </a:spcAft>
+            </a:pPr>
+            <a:r>
+              <a:rPr sz="1400" b="0" i="0">
+                <a:solidFill>
+                  <a:srgbClr val="FFFFFF"/>
+                </a:solidFill>
+                <a:latin typeface="Calibri"/>
+              </a:rPr>
+              <a:t>      - run: docker build -t cloudlite-api:${{ github.sha }}.</a:t>
+            </a:r>
+          </a:p>
+        </p:txBody>
+      </p:sp>
+      <p:sp>
+        <p:nvSpPr>
+          <p:cNvPr id="10" name="TextBox 9"/>
           <p:cNvSpPr txBox="1"/>
           <p:nvPr/>
         </p:nvSpPr>
@@ -9569,7 +10031,7 @@
                 </a:solidFill>
                 <a:latin typeface="Calibri"/>
               </a:rPr>
-              <a:t>El workflow de CI: el archivo completo</a:t>
+              <a:t>Secretos en el workflow, y hasta donde llega el pipeline</a:t>
             </a:r>
           </a:p>
         </p:txBody>
@@ -9703,7 +10165,7 @@
         <p:spPr>
           <a:xfrm>
             <a:off x="777240" y="1719072"/>
-            <a:ext cx="5181447" cy="4453128"/>
+            <a:ext cx="10637215" cy="4453128"/>
           </a:xfrm>
           <a:prstGeom prst="rect">
             <a:avLst/>
@@ -9728,7 +10190,7 @@
                 </a:solidFill>
                 <a:latin typeface="Calibri"/>
               </a:rPr>
-              <a:t># .github/workflows/ci.yml</a:t>
+              <a:t>      - name: Desplegar</a:t>
             </a:r>
           </a:p>
           <a:p>
@@ -9744,7 +10206,7 @@
                 </a:solidFill>
                 <a:latin typeface="Calibri"/>
               </a:rPr>
-              <a:t>name: CI</a:t>
+              <a:t>        env:</a:t>
             </a:r>
           </a:p>
           <a:p>
@@ -9760,7 +10222,7 @@
                 </a:solidFill>
                 <a:latin typeface="Calibri"/>
               </a:rPr>
-              <a:t/>
+              <a:t>          TOKEN: ${{ secrets.DEPLOY_TOKEN }}   # del almacen, nunca en claro</a:t>
             </a:r>
           </a:p>
           <a:p>
@@ -9776,7 +10238,7 @@
                 </a:solidFill>
                 <a:latin typeface="Calibri"/>
               </a:rPr>
-              <a:t>on:</a:t>
+              <a:t>        run: ./deploy.sh</a:t>
             </a:r>
           </a:p>
           <a:p>
@@ -9792,7 +10254,7 @@
                 </a:solidFill>
                 <a:latin typeface="Calibri"/>
               </a:rPr>
-              <a:t>  push:</a:t>
+              <a:t/>
             </a:r>
           </a:p>
           <a:p>
@@ -9808,7 +10270,7 @@
                 </a:solidFill>
                 <a:latin typeface="Calibri"/>
               </a:rPr>
-              <a:t>    branches: [main]</a:t>
+              <a:t># CI  = construir y probar en cada push. Esto SI es realista aqui.</a:t>
             </a:r>
           </a:p>
           <a:p>
@@ -9824,7 +10286,7 @@
                 </a:solidFill>
                 <a:latin typeface="Calibri"/>
               </a:rPr>
-              <a:t>  pull_request:</a:t>
+              <a:t># CD  = desplegar automaticamente a produccion. Necesita un proveedor</a:t>
             </a:r>
           </a:p>
           <a:p>
@@ -9840,7 +10302,7 @@
                 </a:solidFill>
                 <a:latin typeface="Calibri"/>
               </a:rPr>
-              <a:t/>
+              <a:t>#       con credenciales, asi que en el PI se declara como SIMULADO</a:t>
             </a:r>
           </a:p>
           <a:p>
@@ -9856,7 +10318,7 @@
                 </a:solidFill>
                 <a:latin typeface="Calibri"/>
               </a:rPr>
-              <a:t>jobs:</a:t>
+              <a:t>#       y el ultimo paso se rotula como tal. Decirlo es honesto;</a:t>
             </a:r>
           </a:p>
           <a:p>
@@ -9872,23 +10334,7 @@
                 </a:solidFill>
                 <a:latin typeface="Calibri"/>
               </a:rPr>
-              <a:t>  construir-y-probar:</a:t>
-            </a:r>
-          </a:p>
-          <a:p>
-            <a:pPr>
-              <a:spcAft>
-                <a:spcPts val="400"/>
-              </a:spcAft>
-            </a:pPr>
-            <a:r>
-              <a:rPr sz="1400" b="0" i="0">
-                <a:solidFill>
-                  <a:srgbClr val="FFFFFF"/>
-                </a:solidFill>
-                <a:latin typeface="Calibri"/>
-              </a:rPr>
-              <a:t>    runs-on: ubuntu-latest</a:t>
+              <a:t>#       fingirlo es un error.</a:t>
             </a:r>
           </a:p>
         </p:txBody>
@@ -9896,205 +10342,6 @@
       <p:sp>
         <p:nvSpPr>
           <p:cNvPr id="9" name="TextBox 8"/>
-          <p:cNvSpPr txBox="1"/>
-          <p:nvPr/>
-        </p:nvSpPr>
-        <p:spPr>
-          <a:xfrm>
-            <a:off x="6233007" y="1719072"/>
-            <a:ext cx="5181447" cy="4453128"/>
-          </a:xfrm>
-          <a:prstGeom prst="rect">
-            <a:avLst/>
-          </a:prstGeom>
-          <a:noFill/>
-        </p:spPr>
-        <p:txBody>
-          <a:bodyPr wrap="square">
-            <a:spAutoFit/>
-          </a:bodyPr>
-          <a:lstStyle/>
-          <a:p>
-            <a:pPr>
-              <a:spcAft>
-                <a:spcPts val="400"/>
-              </a:spcAft>
-            </a:pPr>
-            <a:r>
-              <a:rPr sz="1400" b="0" i="0">
-                <a:solidFill>
-                  <a:srgbClr val="FFFFFF"/>
-                </a:solidFill>
-                <a:latin typeface="Calibri"/>
-              </a:rPr>
-              <a:t>    steps:</a:t>
-            </a:r>
-          </a:p>
-          <a:p>
-            <a:pPr>
-              <a:spcAft>
-                <a:spcPts val="400"/>
-              </a:spcAft>
-            </a:pPr>
-            <a:r>
-              <a:rPr sz="1400" b="0" i="0">
-                <a:solidFill>
-                  <a:srgbClr val="FFFFFF"/>
-                </a:solidFill>
-                <a:latin typeface="Calibri"/>
-              </a:rPr>
-              <a:t>      - uses: actions/checkout@v4</a:t>
-            </a:r>
-          </a:p>
-          <a:p>
-            <a:pPr>
-              <a:spcAft>
-                <a:spcPts val="400"/>
-              </a:spcAft>
-            </a:pPr>
-            <a:r>
-              <a:rPr sz="1400" b="0" i="0">
-                <a:solidFill>
-                  <a:srgbClr val="FFFFFF"/>
-                </a:solidFill>
-                <a:latin typeface="Calibri"/>
-              </a:rPr>
-              <a:t/>
-            </a:r>
-          </a:p>
-          <a:p>
-            <a:pPr>
-              <a:spcAft>
-                <a:spcPts val="400"/>
-              </a:spcAft>
-            </a:pPr>
-            <a:r>
-              <a:rPr sz="1400" b="0" i="0">
-                <a:solidFill>
-                  <a:srgbClr val="FFFFFF"/>
-                </a:solidFill>
-                <a:latin typeface="Calibri"/>
-              </a:rPr>
-              <a:t>      - uses: actions/setup-node@v4</a:t>
-            </a:r>
-          </a:p>
-          <a:p>
-            <a:pPr>
-              <a:spcAft>
-                <a:spcPts val="400"/>
-              </a:spcAft>
-            </a:pPr>
-            <a:r>
-              <a:rPr sz="1400" b="0" i="0">
-                <a:solidFill>
-                  <a:srgbClr val="FFFFFF"/>
-                </a:solidFill>
-                <a:latin typeface="Calibri"/>
-              </a:rPr>
-              <a:t>        with:</a:t>
-            </a:r>
-          </a:p>
-          <a:p>
-            <a:pPr>
-              <a:spcAft>
-                <a:spcPts val="400"/>
-              </a:spcAft>
-            </a:pPr>
-            <a:r>
-              <a:rPr sz="1400" b="0" i="0">
-                <a:solidFill>
-                  <a:srgbClr val="FFFFFF"/>
-                </a:solidFill>
-                <a:latin typeface="Calibri"/>
-              </a:rPr>
-              <a:t>          node-version: '20'</a:t>
-            </a:r>
-          </a:p>
-          <a:p>
-            <a:pPr>
-              <a:spcAft>
-                <a:spcPts val="400"/>
-              </a:spcAft>
-            </a:pPr>
-            <a:r>
-              <a:rPr sz="1400" b="0" i="0">
-                <a:solidFill>
-                  <a:srgbClr val="FFFFFF"/>
-                </a:solidFill>
-                <a:latin typeface="Calibri"/>
-              </a:rPr>
-              <a:t>          cache: 'npm'</a:t>
-            </a:r>
-          </a:p>
-          <a:p>
-            <a:pPr>
-              <a:spcAft>
-                <a:spcPts val="400"/>
-              </a:spcAft>
-            </a:pPr>
-            <a:r>
-              <a:rPr sz="1400" b="0" i="0">
-                <a:solidFill>
-                  <a:srgbClr val="FFFFFF"/>
-                </a:solidFill>
-                <a:latin typeface="Calibri"/>
-              </a:rPr>
-              <a:t/>
-            </a:r>
-          </a:p>
-          <a:p>
-            <a:pPr>
-              <a:spcAft>
-                <a:spcPts val="400"/>
-              </a:spcAft>
-            </a:pPr>
-            <a:r>
-              <a:rPr sz="1400" b="0" i="0">
-                <a:solidFill>
-                  <a:srgbClr val="FFFFFF"/>
-                </a:solidFill>
-                <a:latin typeface="Calibri"/>
-              </a:rPr>
-              <a:t>      - run: npm ci</a:t>
-            </a:r>
-          </a:p>
-          <a:p>
-            <a:pPr>
-              <a:spcAft>
-                <a:spcPts val="400"/>
-              </a:spcAft>
-            </a:pPr>
-            <a:r>
-              <a:rPr sz="1400" b="0" i="0">
-                <a:solidFill>
-                  <a:srgbClr val="FFFFFF"/>
-                </a:solidFill>
-                <a:latin typeface="Calibri"/>
-              </a:rPr>
-              <a:t>      - run: npm test -- --ci</a:t>
-            </a:r>
-          </a:p>
-          <a:p>
-            <a:pPr>
-              <a:spcAft>
-                <a:spcPts val="400"/>
-              </a:spcAft>
-            </a:pPr>
-            <a:r>
-              <a:rPr sz="1400" b="0" i="0">
-                <a:solidFill>
-                  <a:srgbClr val="FFFFFF"/>
-                </a:solidFill>
-                <a:latin typeface="Calibri"/>
-              </a:rPr>
-              <a:t>      - run: docker build -t cloudlite-api:${{ github.sha }}.</a:t>
-            </a:r>
-          </a:p>
-        </p:txBody>
-      </p:sp>
-      <p:sp>
-        <p:nvSpPr>
-          <p:cNvPr id="10" name="TextBox 9"/>
           <p:cNvSpPr txBox="1"/>
           <p:nvPr/>
         </p:nvSpPr>
@@ -10268,7 +10515,7 @@
                 </a:solidFill>
                 <a:latin typeface="Calibri"/>
               </a:rPr>
-              <a:t>Secretos en el workflow, y hasta donde llega el pipeline</a:t>
+              <a:t>.github/workflows/ci.yml — CI real, no un echo</a:t>
             </a:r>
           </a:p>
         </p:txBody>
@@ -10282,7 +10529,7 @@
         <p:spPr>
           <a:xfrm>
             <a:off x="457200" y="1261872"/>
-            <a:ext cx="11277295" cy="5093208"/>
+            <a:ext cx="11277295" cy="4773168"/>
           </a:xfrm>
           <a:prstGeom prst="roundRect">
             <a:avLst>
@@ -10402,7 +10649,7 @@
         <p:spPr>
           <a:xfrm>
             <a:off x="777240" y="1719072"/>
-            <a:ext cx="10637215" cy="4453128"/>
+            <a:ext cx="10637215" cy="4133087"/>
           </a:xfrm>
           <a:prstGeom prst="rect">
             <a:avLst/>
@@ -10427,7 +10674,7 @@
                 </a:solidFill>
                 <a:latin typeface="Calibri"/>
               </a:rPr>
-              <a:t>      - name: Desplegar</a:t>
+              <a:t>name: CI</a:t>
             </a:r>
           </a:p>
           <a:p>
@@ -10443,7 +10690,7 @@
                 </a:solidFill>
                 <a:latin typeface="Calibri"/>
               </a:rPr>
-              <a:t>        env:</a:t>
+              <a:t>on: [push, pull_request]          # 1. disparadores</a:t>
             </a:r>
           </a:p>
           <a:p>
@@ -10459,7 +10706,7 @@
                 </a:solidFill>
                 <a:latin typeface="Calibri"/>
               </a:rPr>
-              <a:t>          TOKEN: ${{ secrets.DEPLOY_TOKEN }}   # del almacen, nunca en claro</a:t>
+              <a:t>jobs:</a:t>
             </a:r>
           </a:p>
           <a:p>
@@ -10475,7 +10722,7 @@
                 </a:solidFill>
                 <a:latin typeface="Calibri"/>
               </a:rPr>
-              <a:t>        run: ./deploy.sh</a:t>
+              <a:t>  build:</a:t>
             </a:r>
           </a:p>
           <a:p>
@@ -10491,7 +10738,7 @@
                 </a:solidFill>
                 <a:latin typeface="Calibri"/>
               </a:rPr>
-              <a:t/>
+              <a:t>    runs-on: ubuntu-latest        # 2. entorno de ejecucion</a:t>
             </a:r>
           </a:p>
           <a:p>
@@ -10507,7 +10754,7 @@
                 </a:solidFill>
                 <a:latin typeface="Calibri"/>
               </a:rPr>
-              <a:t># CI  = construir y probar en cada push. Esto SI es realista aqui.</a:t>
+              <a:t>    steps:</a:t>
             </a:r>
           </a:p>
           <a:p>
@@ -10523,7 +10770,7 @@
                 </a:solidFill>
                 <a:latin typeface="Calibri"/>
               </a:rPr>
-              <a:t># CD  = desplegar automaticamente a produccion. Necesita un proveedor</a:t>
+              <a:t>      - uses: actions/checkout@v4</a:t>
             </a:r>
           </a:p>
           <a:p>
@@ -10539,7 +10786,7 @@
                 </a:solidFill>
                 <a:latin typeface="Calibri"/>
               </a:rPr>
-              <a:t>#       con credenciales, asi que en el PI se declara como SIMULADO</a:t>
+              <a:t>      - uses: actions/setup-node@v4</a:t>
             </a:r>
           </a:p>
           <a:p>
@@ -10555,7 +10802,7 @@
                 </a:solidFill>
                 <a:latin typeface="Calibri"/>
               </a:rPr>
-              <a:t>#       y el ultimo paso se rotula como tal. Decirlo vale puntos;</a:t>
+              <a:t>        with: { node-version: '20' }</a:t>
             </a:r>
           </a:p>
           <a:p>
@@ -10571,7 +10818,87 @@
                 </a:solidFill>
                 <a:latin typeface="Calibri"/>
               </a:rPr>
-              <a:t>#       fingirlo los quita.</a:t>
+              <a:t>      - name: Construir</a:t>
+            </a:r>
+          </a:p>
+          <a:p>
+            <a:pPr>
+              <a:spcAft>
+                <a:spcPts val="400"/>
+              </a:spcAft>
+            </a:pPr>
+            <a:r>
+              <a:rPr sz="1400" b="0" i="0">
+                <a:solidFill>
+                  <a:srgbClr val="FFFFFF"/>
+                </a:solidFill>
+                <a:latin typeface="Calibri"/>
+              </a:rPr>
+              <a:t>        run: npm ci &amp;&amp; docker build -t cloudlite-api:0.1.0.</a:t>
+            </a:r>
+          </a:p>
+          <a:p>
+            <a:pPr>
+              <a:spcAft>
+                <a:spcPts val="400"/>
+              </a:spcAft>
+            </a:pPr>
+            <a:r>
+              <a:rPr sz="1400" b="0" i="0">
+                <a:solidFill>
+                  <a:srgbClr val="FFFFFF"/>
+                </a:solidFill>
+                <a:latin typeface="Calibri"/>
+              </a:rPr>
+              <a:t>      - name: Probar</a:t>
+            </a:r>
+          </a:p>
+          <a:p>
+            <a:pPr>
+              <a:spcAft>
+                <a:spcPts val="400"/>
+              </a:spcAft>
+            </a:pPr>
+            <a:r>
+              <a:rPr sz="1400" b="0" i="0">
+                <a:solidFill>
+                  <a:srgbClr val="FFFFFF"/>
+                </a:solidFill>
+                <a:latin typeface="Calibri"/>
+              </a:rPr>
+              <a:t>        run: npm test              # &lt;- si esto no puede fallar, no es CI</a:t>
+            </a:r>
+          </a:p>
+          <a:p>
+            <a:pPr>
+              <a:spcAft>
+                <a:spcPts val="400"/>
+              </a:spcAft>
+            </a:pPr>
+            <a:r>
+              <a:rPr sz="1400" b="0" i="0">
+                <a:solidFill>
+                  <a:srgbClr val="FFFFFF"/>
+                </a:solidFill>
+                <a:latin typeface="Calibri"/>
+              </a:rPr>
+              <a:t>      - name: Despliegue SIMULADO (no despliega a ningun servidor)</a:t>
+            </a:r>
+          </a:p>
+          <a:p>
+            <a:pPr>
+              <a:spcAft>
+                <a:spcPts val="400"/>
+              </a:spcAft>
+            </a:pPr>
+            <a:r>
+              <a:rPr sz="1400" b="0" i="0">
+                <a:solidFill>
+                  <a:srgbClr val="FFFFFF"/>
+                </a:solidFill>
+                <a:latin typeface="Calibri"/>
+              </a:rPr>
+              <a:t>        run: echo "Artefacto cloudlite-api:0.1.0 listo para desplegar"</a:t>
             </a:r>
           </a:p>
         </p:txBody>
@@ -10579,6 +10906,41 @@
       <p:sp>
         <p:nvSpPr>
           <p:cNvPr id="9" name="TextBox 8"/>
+          <p:cNvSpPr txBox="1"/>
+          <p:nvPr/>
+        </p:nvSpPr>
+        <p:spPr>
+          <a:xfrm>
+            <a:off x="457200" y="6080760"/>
+            <a:ext cx="11277295" cy="320040"/>
+          </a:xfrm>
+          <a:prstGeom prst="rect">
+            <a:avLst/>
+          </a:prstGeom>
+          <a:noFill/>
+        </p:spPr>
+        <p:txBody>
+          <a:bodyPr wrap="square">
+            <a:spAutoFit/>
+          </a:bodyPr>
+          <a:lstStyle/>
+          <a:p>
+            <a:pPr algn="ctr"/>
+            <a:r>
+              <a:rPr sz="1200" b="0" i="1">
+                <a:solidFill>
+                  <a:srgbClr val="666666"/>
+                </a:solidFill>
+                <a:latin typeface="Calibri"/>
+              </a:rPr>
+              <a:t>Los tres pasos, en orden, y el ultimo rotulado como simulado. Secretos con ${{ secrets.NOMBRE }}, NUNCA en claro dentro del YAML.</a:t>
+            </a:r>
+          </a:p>
+        </p:txBody>
+      </p:sp>
+      <p:sp>
+        <p:nvSpPr>
+          <p:cNvPr id="10" name="TextBox 9"/>
           <p:cNvSpPr txBox="1"/>
           <p:nvPr/>
         </p:nvSpPr>
@@ -10646,13 +11008,13 @@
         <p:spPr>
           <a:xfrm>
             <a:off x="0" y="0"/>
-            <a:ext cx="12191695" cy="960120"/>
+            <a:ext cx="12191695" cy="164592"/>
           </a:xfrm>
           <a:prstGeom prst="rect">
             <a:avLst/>
           </a:prstGeom>
           <a:solidFill>
-            <a:srgbClr val="095292"/>
+            <a:srgbClr val="269CCB"/>
           </a:solidFill>
           <a:ln>
             <a:noFill/>
@@ -10680,49 +11042,30 @@
           </a:p>
         </p:txBody>
       </p:sp>
-      <p:sp>
-        <p:nvSpPr>
-          <p:cNvPr id="3" name="Rectangle 2"/>
-          <p:cNvSpPr/>
-          <p:nvPr/>
-        </p:nvSpPr>
-        <p:spPr>
-          <a:xfrm>
-            <a:off x="0" y="960120"/>
-            <a:ext cx="12191695" cy="41148"/>
-          </a:xfrm>
-          <a:prstGeom prst="rect">
-            <a:avLst/>
-          </a:prstGeom>
-          <a:solidFill>
-            <a:srgbClr val="FFD000"/>
-          </a:solidFill>
-          <a:ln>
-            <a:noFill/>
-          </a:ln>
-        </p:spPr>
-        <p:style>
-          <a:lnRef idx="1">
-            <a:schemeClr val="accent1"/>
-          </a:lnRef>
-          <a:fillRef idx="3">
-            <a:schemeClr val="accent1"/>
-          </a:fillRef>
-          <a:effectRef idx="2">
-            <a:schemeClr val="accent1"/>
-          </a:effectRef>
-          <a:fontRef idx="minor">
-            <a:schemeClr val="lt1"/>
-          </a:fontRef>
-        </p:style>
-        <p:txBody>
-          <a:bodyPr rtlCol="0" anchor="ctr"/>
-          <a:lstStyle/>
-          <a:p>
-            <a:pPr algn="ctr"/>
-          </a:p>
-        </p:txBody>
-      </p:sp>
+      <p:pic>
+        <p:nvPicPr>
+          <p:cNvPr id="3" name="Picture 2" descr="logo_uniajc_color.png"/>
+          <p:cNvPicPr>
+            <a:picLocks noChangeAspect="1"/>
+          </p:cNvPicPr>
+          <p:nvPr/>
+        </p:nvPicPr>
+        <p:blipFill>
+          <a:blip r:embed="rId2"/>
+          <a:stretch>
+            <a:fillRect/>
+          </a:stretch>
+        </p:blipFill>
+        <p:spPr>
+          <a:xfrm>
+            <a:off x="10271455" y="5998464"/>
+            <a:ext cx="1463040" cy="643233"/>
+          </a:xfrm>
+          <a:prstGeom prst="rect">
+            <a:avLst/>
+          </a:prstGeom>
+        </p:spPr>
+      </p:pic>
       <p:sp>
         <p:nvSpPr>
           <p:cNvPr id="4" name="TextBox 3"/>
@@ -10731,8 +11074,41 @@
         </p:nvSpPr>
         <p:spPr>
           <a:xfrm>
-            <a:off x="457200" y="164592"/>
-            <a:ext cx="11277295" cy="502920"/>
+            <a:off x="457200" y="1737360"/>
+            <a:ext cx="11277295" cy="1097280"/>
+          </a:xfrm>
+          <a:prstGeom prst="rect">
+            <a:avLst/>
+          </a:prstGeom>
+          <a:noFill/>
+        </p:spPr>
+        <p:txBody>
+          <a:bodyPr wrap="square" anchor="ctr"/>
+          <a:lstStyle/>
+          <a:p>
+            <a:pPr algn="ctr"/>
+            <a:r>
+              <a:rPr sz="3400" b="1" i="0">
+                <a:solidFill>
+                  <a:srgbClr val="095292"/>
+                </a:solidFill>
+                <a:latin typeface="Calibri"/>
+              </a:rPr>
+              <a:t>Clase 8 · cierre conceptual</a:t>
+            </a:r>
+          </a:p>
+        </p:txBody>
+      </p:sp>
+      <p:sp>
+        <p:nvSpPr>
+          <p:cNvPr id="5" name="TextBox 4"/>
+          <p:cNvSpPr txBox="1"/>
+          <p:nvPr/>
+        </p:nvSpPr>
+        <p:spPr>
+          <a:xfrm>
+            <a:off x="457200" y="3017520"/>
+            <a:ext cx="11277295" cy="1645920"/>
           </a:xfrm>
           <a:prstGeom prst="rect">
             <a:avLst/>
@@ -10745,148 +11121,65 @@
           </a:bodyPr>
           <a:lstStyle/>
           <a:p>
-            <a:r>
-              <a:rPr sz="2600" b="1" i="0">
-                <a:solidFill>
-                  <a:srgbClr val="FFFFFF"/>
-                </a:solidFill>
-                <a:latin typeface="Calibri"/>
-              </a:rPr>
-              <a:t>.github/workflows/ci.yml — CI real, no un echo</a:t>
-            </a:r>
-          </a:p>
-        </p:txBody>
-      </p:sp>
-      <p:sp>
-        <p:nvSpPr>
-          <p:cNvPr id="5" name="Rounded Rectangle 4"/>
-          <p:cNvSpPr/>
-          <p:nvPr/>
-        </p:nvSpPr>
-        <p:spPr>
-          <a:xfrm>
-            <a:off x="457200" y="1261872"/>
-            <a:ext cx="11277295" cy="4773168"/>
-          </a:xfrm>
-          <a:prstGeom prst="roundRect">
-            <a:avLst>
-              <a:gd name="adj" fmla="val 12000"/>
-            </a:avLst>
-          </a:prstGeom>
-          <a:solidFill>
-            <a:srgbClr val="1E2A38"/>
-          </a:solidFill>
-          <a:ln>
-            <a:noFill/>
-          </a:ln>
-        </p:spPr>
-        <p:style>
-          <a:lnRef idx="1">
-            <a:schemeClr val="accent1"/>
-          </a:lnRef>
-          <a:fillRef idx="3">
-            <a:schemeClr val="accent1"/>
-          </a:fillRef>
-          <a:effectRef idx="2">
-            <a:schemeClr val="accent1"/>
-          </a:effectRef>
-          <a:fontRef idx="minor">
-            <a:schemeClr val="lt1"/>
-          </a:fontRef>
-        </p:style>
-        <p:txBody>
-          <a:bodyPr rtlCol="0" anchor="ctr"/>
-          <a:lstStyle/>
-          <a:p>
-            <a:pPr algn="ctr"/>
-          </a:p>
-        </p:txBody>
-      </p:sp>
-      <p:sp>
-        <p:nvSpPr>
-          <p:cNvPr id="6" name="Rectangle 5"/>
-          <p:cNvSpPr/>
-          <p:nvPr/>
-        </p:nvSpPr>
-        <p:spPr>
-          <a:xfrm>
-            <a:off x="457200" y="1261872"/>
-            <a:ext cx="11277295" cy="320040"/>
-          </a:xfrm>
-          <a:prstGeom prst="rect">
-            <a:avLst/>
-          </a:prstGeom>
-          <a:solidFill>
-            <a:srgbClr val="095292"/>
-          </a:solidFill>
-          <a:ln>
-            <a:noFill/>
-          </a:ln>
-        </p:spPr>
-        <p:style>
-          <a:lnRef idx="1">
-            <a:schemeClr val="accent1"/>
-          </a:lnRef>
-          <a:fillRef idx="3">
-            <a:schemeClr val="accent1"/>
-          </a:fillRef>
-          <a:effectRef idx="2">
-            <a:schemeClr val="accent1"/>
-          </a:effectRef>
-          <a:fontRef idx="minor">
-            <a:schemeClr val="lt1"/>
-          </a:fontRef>
-        </p:style>
-        <p:txBody>
-          <a:bodyPr rtlCol="0" anchor="ctr"/>
-          <a:lstStyle/>
-          <a:p>
-            <a:pPr algn="ctr"/>
-          </a:p>
-        </p:txBody>
-      </p:sp>
-      <p:sp>
-        <p:nvSpPr>
-          <p:cNvPr id="7" name="TextBox 6"/>
+            <a:pPr algn="ctr">
+              <a:spcAft>
+                <a:spcPts val="600"/>
+              </a:spcAft>
+            </a:pPr>
+            <a:r>
+              <a:rPr sz="1600" b="0" i="0">
+                <a:solidFill>
+                  <a:srgbClr val="333333"/>
+                </a:solidFill>
+                <a:latin typeface="Calibri"/>
+              </a:rPr>
+              <a:t>Explicar pipeline CI vs CD y qué es realista sin cloud de pago.</a:t>
+            </a:r>
+          </a:p>
+          <a:p>
+            <a:pPr algn="ctr">
+              <a:spcAft>
+                <a:spcPts val="600"/>
+              </a:spcAft>
+            </a:pPr>
+            <a:r>
+              <a:rPr sz="1600" b="0" i="0">
+                <a:solidFill>
+                  <a:srgbClr val="333333"/>
+                </a:solidFill>
+                <a:latin typeface="Calibri"/>
+              </a:rPr>
+              <a:t>Crear un workflow Actions que construya/pruebe un stub.</a:t>
+            </a:r>
+          </a:p>
+          <a:p>
+            <a:pPr algn="ctr">
+              <a:spcAft>
+                <a:spcPts val="600"/>
+              </a:spcAft>
+            </a:pPr>
+            <a:r>
+              <a:rPr sz="1600" b="0" i="0">
+                <a:solidFill>
+                  <a:srgbClr val="333333"/>
+                </a:solidFill>
+                <a:latin typeface="Calibri"/>
+              </a:rPr>
+              <a:t>Definir 4–6 señales de monitoreo para CloudLite.</a:t>
+            </a:r>
+          </a:p>
+        </p:txBody>
+      </p:sp>
+      <p:sp>
+        <p:nvSpPr>
+          <p:cNvPr id="6" name="TextBox 5"/>
           <p:cNvSpPr txBox="1"/>
           <p:nvPr/>
         </p:nvSpPr>
         <p:spPr>
           <a:xfrm>
-            <a:off x="685800" y="1307592"/>
-            <a:ext cx="10820095" cy="256032"/>
-          </a:xfrm>
-          <a:prstGeom prst="rect">
-            <a:avLst/>
-          </a:prstGeom>
-          <a:noFill/>
-        </p:spPr>
-        <p:txBody>
-          <a:bodyPr wrap="square" anchor="ctr"/>
-          <a:lstStyle/>
-          <a:p>
-            <a:r>
-              <a:rPr sz="1000" b="1" i="0">
-                <a:solidFill>
-                  <a:srgbClr val="269CCB"/>
-                </a:solidFill>
-                <a:latin typeface="Calibri"/>
-              </a:rPr>
-              <a:t>● ● ●</a:t>
-            </a:r>
-          </a:p>
-        </p:txBody>
-      </p:sp>
-      <p:sp>
-        <p:nvSpPr>
-          <p:cNvPr id="8" name="TextBox 7"/>
-          <p:cNvSpPr txBox="1"/>
-          <p:nvPr/>
-        </p:nvSpPr>
-        <p:spPr>
-          <a:xfrm>
-            <a:off x="777240" y="1719072"/>
-            <a:ext cx="10637215" cy="4133087"/>
+            <a:off x="457200" y="4754880"/>
+            <a:ext cx="11277295" cy="640080"/>
           </a:xfrm>
           <a:prstGeom prst="rect">
             <a:avLst/>
@@ -10899,313 +11192,15 @@
           </a:bodyPr>
           <a:lstStyle/>
           <a:p>
-            <a:pPr>
-              <a:spcAft>
-                <a:spcPts val="400"/>
-              </a:spcAft>
-            </a:pPr>
-            <a:r>
-              <a:rPr sz="1400" b="0" i="0">
-                <a:solidFill>
-                  <a:srgbClr val="FFFFFF"/>
-                </a:solidFill>
-                <a:latin typeface="Calibri"/>
-              </a:rPr>
-              <a:t>name: CI</a:t>
-            </a:r>
-          </a:p>
-          <a:p>
-            <a:pPr>
-              <a:spcAft>
-                <a:spcPts val="400"/>
-              </a:spcAft>
-            </a:pPr>
-            <a:r>
-              <a:rPr sz="1400" b="0" i="0">
-                <a:solidFill>
-                  <a:srgbClr val="FFFFFF"/>
-                </a:solidFill>
-                <a:latin typeface="Calibri"/>
-              </a:rPr>
-              <a:t>on: [push, pull_request]          # 1. disparadores</a:t>
-            </a:r>
-          </a:p>
-          <a:p>
-            <a:pPr>
-              <a:spcAft>
-                <a:spcPts val="400"/>
-              </a:spcAft>
-            </a:pPr>
-            <a:r>
-              <a:rPr sz="1400" b="0" i="0">
-                <a:solidFill>
-                  <a:srgbClr val="FFFFFF"/>
-                </a:solidFill>
-                <a:latin typeface="Calibri"/>
-              </a:rPr>
-              <a:t>jobs:</a:t>
-            </a:r>
-          </a:p>
-          <a:p>
-            <a:pPr>
-              <a:spcAft>
-                <a:spcPts val="400"/>
-              </a:spcAft>
-            </a:pPr>
-            <a:r>
-              <a:rPr sz="1400" b="0" i="0">
-                <a:solidFill>
-                  <a:srgbClr val="FFFFFF"/>
-                </a:solidFill>
-                <a:latin typeface="Calibri"/>
-              </a:rPr>
-              <a:t>  build:</a:t>
-            </a:r>
-          </a:p>
-          <a:p>
-            <a:pPr>
-              <a:spcAft>
-                <a:spcPts val="400"/>
-              </a:spcAft>
-            </a:pPr>
-            <a:r>
-              <a:rPr sz="1400" b="0" i="0">
-                <a:solidFill>
-                  <a:srgbClr val="FFFFFF"/>
-                </a:solidFill>
-                <a:latin typeface="Calibri"/>
-              </a:rPr>
-              <a:t>    runs-on: ubuntu-latest        # 2. entorno de ejecucion</a:t>
-            </a:r>
-          </a:p>
-          <a:p>
-            <a:pPr>
-              <a:spcAft>
-                <a:spcPts val="400"/>
-              </a:spcAft>
-            </a:pPr>
-            <a:r>
-              <a:rPr sz="1400" b="0" i="0">
-                <a:solidFill>
-                  <a:srgbClr val="FFFFFF"/>
-                </a:solidFill>
-                <a:latin typeface="Calibri"/>
-              </a:rPr>
-              <a:t>    steps:</a:t>
-            </a:r>
-          </a:p>
-          <a:p>
-            <a:pPr>
-              <a:spcAft>
-                <a:spcPts val="400"/>
-              </a:spcAft>
-            </a:pPr>
-            <a:r>
-              <a:rPr sz="1400" b="0" i="0">
-                <a:solidFill>
-                  <a:srgbClr val="FFFFFF"/>
-                </a:solidFill>
-                <a:latin typeface="Calibri"/>
-              </a:rPr>
-              <a:t>      - uses: actions/checkout@v4</a:t>
-            </a:r>
-          </a:p>
-          <a:p>
-            <a:pPr>
-              <a:spcAft>
-                <a:spcPts val="400"/>
-              </a:spcAft>
-            </a:pPr>
-            <a:r>
-              <a:rPr sz="1400" b="0" i="0">
-                <a:solidFill>
-                  <a:srgbClr val="FFFFFF"/>
-                </a:solidFill>
-                <a:latin typeface="Calibri"/>
-              </a:rPr>
-              <a:t>      - uses: actions/setup-node@v4</a:t>
-            </a:r>
-          </a:p>
-          <a:p>
-            <a:pPr>
-              <a:spcAft>
-                <a:spcPts val="400"/>
-              </a:spcAft>
-            </a:pPr>
-            <a:r>
-              <a:rPr sz="1400" b="0" i="0">
-                <a:solidFill>
-                  <a:srgbClr val="FFFFFF"/>
-                </a:solidFill>
-                <a:latin typeface="Calibri"/>
-              </a:rPr>
-              <a:t>        with: { node-version: '20' }</a:t>
-            </a:r>
-          </a:p>
-          <a:p>
-            <a:pPr>
-              <a:spcAft>
-                <a:spcPts val="400"/>
-              </a:spcAft>
-            </a:pPr>
-            <a:r>
-              <a:rPr sz="1400" b="0" i="0">
-                <a:solidFill>
-                  <a:srgbClr val="FFFFFF"/>
-                </a:solidFill>
-                <a:latin typeface="Calibri"/>
-              </a:rPr>
-              <a:t>      - name: Construir</a:t>
-            </a:r>
-          </a:p>
-          <a:p>
-            <a:pPr>
-              <a:spcAft>
-                <a:spcPts val="400"/>
-              </a:spcAft>
-            </a:pPr>
-            <a:r>
-              <a:rPr sz="1400" b="0" i="0">
-                <a:solidFill>
-                  <a:srgbClr val="FFFFFF"/>
-                </a:solidFill>
-                <a:latin typeface="Calibri"/>
-              </a:rPr>
-              <a:t>        run: npm ci &amp;&amp; docker build -t cloudlite-api:0.1.0.</a:t>
-            </a:r>
-          </a:p>
-          <a:p>
-            <a:pPr>
-              <a:spcAft>
-                <a:spcPts val="400"/>
-              </a:spcAft>
-            </a:pPr>
-            <a:r>
-              <a:rPr sz="1400" b="0" i="0">
-                <a:solidFill>
-                  <a:srgbClr val="FFFFFF"/>
-                </a:solidFill>
-                <a:latin typeface="Calibri"/>
-              </a:rPr>
-              <a:t>      - name: Probar</a:t>
-            </a:r>
-          </a:p>
-          <a:p>
-            <a:pPr>
-              <a:spcAft>
-                <a:spcPts val="400"/>
-              </a:spcAft>
-            </a:pPr>
-            <a:r>
-              <a:rPr sz="1400" b="0" i="0">
-                <a:solidFill>
-                  <a:srgbClr val="FFFFFF"/>
-                </a:solidFill>
-                <a:latin typeface="Calibri"/>
-              </a:rPr>
-              <a:t>        run: npm test              # &lt;- si esto no puede fallar, no es CI</a:t>
-            </a:r>
-          </a:p>
-          <a:p>
-            <a:pPr>
-              <a:spcAft>
-                <a:spcPts val="400"/>
-              </a:spcAft>
-            </a:pPr>
-            <a:r>
-              <a:rPr sz="1400" b="0" i="0">
-                <a:solidFill>
-                  <a:srgbClr val="FFFFFF"/>
-                </a:solidFill>
-                <a:latin typeface="Calibri"/>
-              </a:rPr>
-              <a:t>      - name: Despliegue SIMULADO (no despliega a ningun servidor)</a:t>
-            </a:r>
-          </a:p>
-          <a:p>
-            <a:pPr>
-              <a:spcAft>
-                <a:spcPts val="400"/>
-              </a:spcAft>
-            </a:pPr>
-            <a:r>
-              <a:rPr sz="1400" b="0" i="0">
-                <a:solidFill>
-                  <a:srgbClr val="FFFFFF"/>
-                </a:solidFill>
-                <a:latin typeface="Calibri"/>
-              </a:rPr>
-              <a:t>        run: echo "Artefacto cloudlite-api:0.1.0 listo para desplegar"</a:t>
-            </a:r>
-          </a:p>
-        </p:txBody>
-      </p:sp>
-      <p:sp>
-        <p:nvSpPr>
-          <p:cNvPr id="9" name="TextBox 8"/>
-          <p:cNvSpPr txBox="1"/>
-          <p:nvPr/>
-        </p:nvSpPr>
-        <p:spPr>
-          <a:xfrm>
-            <a:off x="457200" y="6080760"/>
-            <a:ext cx="11277295" cy="320040"/>
-          </a:xfrm>
-          <a:prstGeom prst="rect">
-            <a:avLst/>
-          </a:prstGeom>
-          <a:noFill/>
-        </p:spPr>
-        <p:txBody>
-          <a:bodyPr wrap="square">
-            <a:spAutoFit/>
-          </a:bodyPr>
-          <a:lstStyle/>
-          <a:p>
             <a:pPr algn="ctr"/>
             <a:r>
-              <a:rPr sz="1200" b="0" i="1">
-                <a:solidFill>
-                  <a:srgbClr val="666666"/>
-                </a:solidFill>
-                <a:latin typeface="Calibri"/>
-              </a:rPr>
-              <a:t>Los tres pasos, en orden, y el ultimo rotulado como simulado. Secretos con ${{ secrets.NOMBRE }}, NUNCA en claro dentro del YAML.</a:t>
-            </a:r>
-          </a:p>
-        </p:txBody>
-      </p:sp>
-      <p:sp>
-        <p:nvSpPr>
-          <p:cNvPr id="10" name="TextBox 9"/>
-          <p:cNvSpPr txBox="1"/>
-          <p:nvPr/>
-        </p:nvSpPr>
-        <p:spPr>
-          <a:xfrm>
-            <a:off x="11185855" y="6473952"/>
-            <a:ext cx="640080" cy="274320"/>
-          </a:xfrm>
-          <a:prstGeom prst="rect">
-            <a:avLst/>
-          </a:prstGeom>
-          <a:noFill/>
-        </p:spPr>
-        <p:txBody>
-          <a:bodyPr wrap="square">
-            <a:spAutoFit/>
-          </a:bodyPr>
-          <a:lstStyle/>
-          <a:p>
-            <a:pPr algn="r"/>
-            <a:r>
-              <a:rPr sz="1100" b="0" i="0">
-                <a:solidFill>
-                  <a:srgbClr val="666666"/>
-                </a:solidFill>
-                <a:latin typeface="Calibri"/>
-              </a:rPr>
-              <a:t>29</a:t>
+              <a:rPr sz="2000" b="1" i="0">
+                <a:solidFill>
+                  <a:srgbClr val="269CCB"/>
+                </a:solidFill>
+                <a:latin typeface="Calibri"/>
+              </a:rPr>
+              <a:t>Teoría al servicio del diseño</a:t>
             </a:r>
           </a:p>
         </p:txBody>
@@ -11470,238 +11465,6 @@
 </p:sld>
 </file>
 
-<file path=ppt/slides/slide30.xml><?xml version="1.0" encoding="utf-8"?>
-<p:sld xmlns:a="http://schemas.openxmlformats.org/drawingml/2006/main" xmlns:p="http://schemas.openxmlformats.org/presentationml/2006/main" xmlns:r="http://schemas.openxmlformats.org/officeDocument/2006/relationships">
-  <p:cSld>
-    <p:bg>
-      <p:bgPr>
-        <a:solidFill>
-          <a:srgbClr val="FFFFFF"/>
-        </a:solidFill>
-        <a:effectLst/>
-      </p:bgPr>
-    </p:bg>
-    <p:spTree>
-      <p:nvGrpSpPr>
-        <p:cNvPr id="1" name=""/>
-        <p:cNvGrpSpPr/>
-        <p:nvPr/>
-      </p:nvGrpSpPr>
-      <p:grpSpPr/>
-      <p:sp>
-        <p:nvSpPr>
-          <p:cNvPr id="2" name="Rectangle 1"/>
-          <p:cNvSpPr/>
-          <p:nvPr/>
-        </p:nvSpPr>
-        <p:spPr>
-          <a:xfrm>
-            <a:off x="0" y="0"/>
-            <a:ext cx="12191695" cy="164592"/>
-          </a:xfrm>
-          <a:prstGeom prst="rect">
-            <a:avLst/>
-          </a:prstGeom>
-          <a:solidFill>
-            <a:srgbClr val="269CCB"/>
-          </a:solidFill>
-          <a:ln>
-            <a:noFill/>
-          </a:ln>
-        </p:spPr>
-        <p:style>
-          <a:lnRef idx="1">
-            <a:schemeClr val="accent1"/>
-          </a:lnRef>
-          <a:fillRef idx="3">
-            <a:schemeClr val="accent1"/>
-          </a:fillRef>
-          <a:effectRef idx="2">
-            <a:schemeClr val="accent1"/>
-          </a:effectRef>
-          <a:fontRef idx="minor">
-            <a:schemeClr val="lt1"/>
-          </a:fontRef>
-        </p:style>
-        <p:txBody>
-          <a:bodyPr rtlCol="0" anchor="ctr"/>
-          <a:lstStyle/>
-          <a:p>
-            <a:pPr algn="ctr"/>
-          </a:p>
-        </p:txBody>
-      </p:sp>
-      <p:pic>
-        <p:nvPicPr>
-          <p:cNvPr id="3" name="Picture 2" descr="logo_uniajc_color.png"/>
-          <p:cNvPicPr>
-            <a:picLocks noChangeAspect="1"/>
-          </p:cNvPicPr>
-          <p:nvPr/>
-        </p:nvPicPr>
-        <p:blipFill>
-          <a:blip r:embed="rId2"/>
-          <a:stretch>
-            <a:fillRect/>
-          </a:stretch>
-        </p:blipFill>
-        <p:spPr>
-          <a:xfrm>
-            <a:off x="10271455" y="5998464"/>
-            <a:ext cx="1463040" cy="643233"/>
-          </a:xfrm>
-          <a:prstGeom prst="rect">
-            <a:avLst/>
-          </a:prstGeom>
-        </p:spPr>
-      </p:pic>
-      <p:sp>
-        <p:nvSpPr>
-          <p:cNvPr id="4" name="TextBox 3"/>
-          <p:cNvSpPr txBox="1"/>
-          <p:nvPr/>
-        </p:nvSpPr>
-        <p:spPr>
-          <a:xfrm>
-            <a:off x="457200" y="1737360"/>
-            <a:ext cx="11277295" cy="1097280"/>
-          </a:xfrm>
-          <a:prstGeom prst="rect">
-            <a:avLst/>
-          </a:prstGeom>
-          <a:noFill/>
-        </p:spPr>
-        <p:txBody>
-          <a:bodyPr wrap="square" anchor="ctr"/>
-          <a:lstStyle/>
-          <a:p>
-            <a:pPr algn="ctr"/>
-            <a:r>
-              <a:rPr sz="3400" b="1" i="0">
-                <a:solidFill>
-                  <a:srgbClr val="095292"/>
-                </a:solidFill>
-                <a:latin typeface="Calibri"/>
-              </a:rPr>
-              <a:t>Clase 8 · cierre conceptual</a:t>
-            </a:r>
-          </a:p>
-        </p:txBody>
-      </p:sp>
-      <p:sp>
-        <p:nvSpPr>
-          <p:cNvPr id="5" name="TextBox 4"/>
-          <p:cNvSpPr txBox="1"/>
-          <p:nvPr/>
-        </p:nvSpPr>
-        <p:spPr>
-          <a:xfrm>
-            <a:off x="457200" y="3017520"/>
-            <a:ext cx="11277295" cy="1645920"/>
-          </a:xfrm>
-          <a:prstGeom prst="rect">
-            <a:avLst/>
-          </a:prstGeom>
-          <a:noFill/>
-        </p:spPr>
-        <p:txBody>
-          <a:bodyPr wrap="square">
-            <a:spAutoFit/>
-          </a:bodyPr>
-          <a:lstStyle/>
-          <a:p>
-            <a:pPr algn="ctr">
-              <a:spcAft>
-                <a:spcPts val="600"/>
-              </a:spcAft>
-            </a:pPr>
-            <a:r>
-              <a:rPr sz="1600" b="0" i="0">
-                <a:solidFill>
-                  <a:srgbClr val="333333"/>
-                </a:solidFill>
-                <a:latin typeface="Calibri"/>
-              </a:rPr>
-              <a:t>Explicar pipeline CI vs CD y qué es realista sin cloud de pago.</a:t>
-            </a:r>
-          </a:p>
-          <a:p>
-            <a:pPr algn="ctr">
-              <a:spcAft>
-                <a:spcPts val="600"/>
-              </a:spcAft>
-            </a:pPr>
-            <a:r>
-              <a:rPr sz="1600" b="0" i="0">
-                <a:solidFill>
-                  <a:srgbClr val="333333"/>
-                </a:solidFill>
-                <a:latin typeface="Calibri"/>
-              </a:rPr>
-              <a:t>Crear un workflow Actions que construya/pruebe un stub.</a:t>
-            </a:r>
-          </a:p>
-          <a:p>
-            <a:pPr algn="ctr">
-              <a:spcAft>
-                <a:spcPts val="600"/>
-              </a:spcAft>
-            </a:pPr>
-            <a:r>
-              <a:rPr sz="1600" b="0" i="0">
-                <a:solidFill>
-                  <a:srgbClr val="333333"/>
-                </a:solidFill>
-                <a:latin typeface="Calibri"/>
-              </a:rPr>
-              <a:t>Definir 4–6 señales de monitoreo para CloudLite.</a:t>
-            </a:r>
-          </a:p>
-        </p:txBody>
-      </p:sp>
-      <p:sp>
-        <p:nvSpPr>
-          <p:cNvPr id="6" name="TextBox 5"/>
-          <p:cNvSpPr txBox="1"/>
-          <p:nvPr/>
-        </p:nvSpPr>
-        <p:spPr>
-          <a:xfrm>
-            <a:off x="457200" y="4754880"/>
-            <a:ext cx="11277295" cy="640080"/>
-          </a:xfrm>
-          <a:prstGeom prst="rect">
-            <a:avLst/>
-          </a:prstGeom>
-          <a:noFill/>
-        </p:spPr>
-        <p:txBody>
-          <a:bodyPr wrap="square">
-            <a:spAutoFit/>
-          </a:bodyPr>
-          <a:lstStyle/>
-          <a:p>
-            <a:pPr algn="ctr"/>
-            <a:r>
-              <a:rPr sz="2000" b="1" i="0">
-                <a:solidFill>
-                  <a:srgbClr val="269CCB"/>
-                </a:solidFill>
-                <a:latin typeface="Calibri"/>
-              </a:rPr>
-              <a:t>Teoría al servicio del diseño</a:t>
-            </a:r>
-          </a:p>
-        </p:txBody>
-      </p:sp>
-    </p:spTree>
-  </p:cSld>
-  <p:clrMapOvr>
-    <a:masterClrMapping/>
-  </p:clrMapOvr>
-</p:sld>
-</file>
-
 <file path=ppt/slides/slide4.xml><?xml version="1.0" encoding="utf-8"?>
 <p:sld xmlns:a="http://schemas.openxmlformats.org/drawingml/2006/main" xmlns:p="http://schemas.openxmlformats.org/presentationml/2006/main" xmlns:r="http://schemas.openxmlformats.org/officeDocument/2006/relationships">
   <p:cSld>
@@ -11933,7 +11696,7 @@
                 </a:solidFill>
                 <a:latin typeface="Calibri"/>
               </a:rPr>
-              <a:t>«Ya tenemos CD» porque el YAML tiene un paso «deploy» resta puntos.</a:t>
+              <a:t>«Ya tenemos CD» porque el YAML tiene un paso «deploy» es falso.</a:t>
             </a:r>
             <a:r>
               <a:rPr sz="2000" b="0" i="0">
@@ -12162,7 +11925,7 @@
                 </a:solidFill>
                 <a:latin typeface="Calibri"/>
               </a:rPr>
-              <a:t>–   Tres bloques que se califican: </a:t>
+              <a:t>–   Tres bloques obligatorios: </a:t>
             </a:r>
             <a:r>
               <a:rPr sz="2000" b="1" i="0">
@@ -13415,22 +13178,6 @@
                 <a:latin typeface="Calibri"/>
               </a:rPr>
               <a:t>–   Se puede tener CI sin nada de CD, y es lo que se construye hoy porque el curso no usa infraestructura de pago ni pide tarjeta de credito.</a:t>
-            </a:r>
-          </a:p>
-          <a:p>
-            <a:pPr>
-              <a:spcAft>
-                <a:spcPts val="800"/>
-              </a:spcAft>
-            </a:pPr>
-            <a:r>
-              <a:rPr sz="2000" b="0" i="0">
-                <a:solidFill>
-                  <a:srgbClr val="333333"/>
-                </a:solidFill>
-                <a:latin typeface="Calibri"/>
-              </a:rPr>
-              <a:t>–   Y hay que anunciar como se califica esa frontera, porque es contraintuitivo para el estudiante que cree que reconocer un limite es admitir una carencia: la pregunta 9 SUMA un punto por ubicar correctamente el propio trabajo y decir que llega hasta «listo para desplegar», y DESCUENTA la mitad de la pregunta a quien afirme haber construido CD.</a:t>
             </a:r>
           </a:p>
           <a:p>

--- a/Arquitectura de Sistemas Computacionales/Clases/Clase 8 - Monitoreo optimizacion y CI-CD/Presentacion.pptx
+++ b/Arquitectura de Sistemas Computacionales/Clases/Clase 8 - Monitoreo optimizacion y CI-CD/Presentacion.pptx
@@ -1168,7 +1168,19 @@
           <a:p/>
           <a:p>
             <a:r>
+              <a:t>Esa accion no es una cuarta columna: se escribe dentro del umbral, como en el ejemplo del listado.</a:t>
+            </a:r>
+          </a:p>
+          <a:p/>
+          <a:p>
+            <a:r>
               <a:t>Ahi entra la optimizacion de la segunda mitad del tema: paginar, con veinte a cincuenta elementos por pagina, porque un endpoint que devuelve cincuenta mil registros es problema de latencia y de memoria; indexar la columna por la que se filtra, porque sin indice el motor recorre la tabla completa; cachear lecturas repetidas, donde una tasa de acierto del 90 por ciento significa que nueve de cada diez lecturas no llegan a la base; y limitar la tasa de peticiones, el control de denegacion de servicio de la Clase 6.</a:t>
+            </a:r>
+          </a:p>
+          <a:p/>
+          <a:p>
+            <a:r>
+              <a:t>La fila tiene senal, objeto concreto del dominio y una accion atada al umbral.</a:t>
             </a:r>
           </a:p>
           <a:p/>
@@ -6523,6 +6535,22 @@
               <a:t>–   Latencia merece explicacion aparte porque introduce el percentil, el valor por debajo del cual cae un porcentaje dado de las mediciones: si el p95 de la API es 300 milisegundos</a:t>
             </a:r>
           </a:p>
+          <a:p>
+            <a:pPr>
+              <a:spcAft>
+                <a:spcPts val="800"/>
+              </a:spcAft>
+            </a:pPr>
+            <a:r>
+              <a:rPr sz="2000" b="0" i="0">
+                <a:solidFill>
+                  <a:srgbClr val="333333"/>
+                </a:solidFill>
+                <a:latin typeface="Calibri"/>
+              </a:rPr>
+              <a:t>–   95 de cada 100 peticiones respondieron en 300 milisegundos o menos y 5 tardaron mas.</a:t>
+            </a:r>
+          </a:p>
         </p:txBody>
       </p:sp>
       <p:sp>
@@ -6740,7 +6768,7 @@
                 </a:solidFill>
                 <a:latin typeface="Calibri"/>
               </a:rPr>
-              <a:t>–   95 de cada 100 peticiones respondieron en 300 milisegundos o menos y 5 tardaron mas.</a:t>
+              <a:t>–   Es mas honesto que el promedio, y el ejemplo lo prueba: 99 peticiones de 50 milisegundos y una de 5 segundos dan un promedio de 99 milisegundos, que parece excelente, mientras el p99 es 5 segundos y corresponde a un usuario mirando una pantalla congelada.</a:t>
             </a:r>
           </a:p>
           <a:p>
@@ -6756,7 +6784,23 @@
                 </a:solidFill>
                 <a:latin typeface="Calibri"/>
               </a:rPr>
-              <a:t>–   Es mas honesto que el promedio, y el ejemplo lo prueba: 99 peticiones de 50 milisegundos y una de 5 segundos dan un promedio de 99 milisegundos, que parece excelente, mientras el p99 es 5 segundos y corresponde a un usuario mirando una pantalla congelada.</a:t>
+              <a:t>–   En CloudLite Turnos las cuatro senales son: latencia, el p95 del endpoint de reserva; trafico, las reservas por minuto; errores, el porcentaje de respuestas 5xx; saturacion, el uso del pool de conexiones a la base de datos.</a:t>
+            </a:r>
+          </a:p>
+          <a:p>
+            <a:pPr>
+              <a:spcAft>
+                <a:spcPts val="800"/>
+              </a:spcAft>
+            </a:pPr>
+            <a:r>
+              <a:rPr sz="2000" b="0" i="0">
+                <a:solidFill>
+                  <a:srgbClr val="333333"/>
+                </a:solidFill>
+                <a:latin typeface="Calibri"/>
+              </a:rPr>
+              <a:t>–   Un error comun es medir solo la CPU: es una senal de saturacion entre varias, y en una API que espera a la base de datos casi nunca es la primera en agotarse.</a:t>
             </a:r>
           </a:p>
         </p:txBody>
@@ -7260,7 +7304,7 @@
                 </a:solidFill>
                 <a:latin typeface="Calibri"/>
               </a:rPr>
-              <a:t>–   Falta una advertencia de formato: en clase vale la pena preguntar siempre que se HACE cuando se cruza el umbral, porque es lo que convierte una lista de metricas en un plan de operacion</a:t>
+              <a:t>–   Cada umbral necesita su accion: que se HACE cuando se cruza es lo que convierte una lista de metricas en un plan de operacion.</a:t>
             </a:r>
           </a:p>
           <a:p>
@@ -7276,7 +7320,71 @@
                 </a:solidFill>
                 <a:latin typeface="Calibri"/>
               </a:rPr>
-              <a:t>–   Pero ese «que se hace» NO es una cuarta columna de la respuesta; se escribe dentro del umbral, como en el ejemplo del listado.</a:t>
+              <a:t>–   Un ejemplo de fila completa es: Senal «latencia del listado de turnos»</a:t>
+            </a:r>
+          </a:p>
+          <a:p>
+            <a:pPr>
+              <a:spcAft>
+                <a:spcPts val="800"/>
+              </a:spcAft>
+            </a:pPr>
+            <a:r>
+              <a:rPr sz="2000" b="0" i="0">
+                <a:solidFill>
+                  <a:srgbClr val="333333"/>
+                </a:solidFill>
+                <a:latin typeface="Calibri"/>
+              </a:rPr>
+              <a:t>–   Que se mide «p95 del GET /turnos»</a:t>
+            </a:r>
+          </a:p>
+          <a:p>
+            <a:pPr>
+              <a:spcAft>
+                <a:spcPts val="800"/>
+              </a:spcAft>
+            </a:pPr>
+            <a:r>
+              <a:rPr sz="2000" b="0" i="0">
+                <a:solidFill>
+                  <a:srgbClr val="333333"/>
+                </a:solidFill>
+                <a:latin typeface="Calibri"/>
+              </a:rPr>
+              <a:t>–   Umbral «menos de 300 ms; si se supera durante 5 minutos, se revisa el indice de la consulta».</a:t>
+            </a:r>
+          </a:p>
+          <a:p>
+            <a:pPr>
+              <a:spcAft>
+                <a:spcPts val="800"/>
+              </a:spcAft>
+            </a:pPr>
+            <a:r>
+              <a:rPr sz="2000" b="0" i="0">
+                <a:solidFill>
+                  <a:srgbClr val="333333"/>
+                </a:solidFill>
+                <a:latin typeface="Calibri"/>
+              </a:rPr>
+              <a:t>–   Un error comun es un umbral sin numero, como «latencia alta»: no dice cuando actuar.</a:t>
+            </a:r>
+          </a:p>
+          <a:p>
+            <a:pPr>
+              <a:spcAft>
+                <a:spcPts val="800"/>
+              </a:spcAft>
+            </a:pPr>
+            <a:r>
+              <a:rPr sz="2000" b="0" i="0">
+                <a:solidFill>
+                  <a:srgbClr val="333333"/>
+                </a:solidFill>
+                <a:latin typeface="Calibri"/>
+              </a:rPr>
+              <a:t>–   Otro es una senal generica, como «el sistema»: la fila tiene que nombrar una operacion concreta del dominio.</a:t>
             </a:r>
           </a:p>
         </p:txBody>
@@ -7878,6 +7986,22 @@
               <a:t>–   Un paso Construir que instala dependencias y ejecuta docker build con la imagen etiquetada, un paso Probar que corre las pruebas</a:t>
             </a:r>
           </a:p>
+          <a:p>
+            <a:pPr>
+              <a:spcAft>
+                <a:spcPts val="800"/>
+              </a:spcAft>
+            </a:pPr>
+            <a:r>
+              <a:rPr sz="2000" b="0" i="0">
+                <a:solidFill>
+                  <a:srgbClr val="333333"/>
+                </a:solidFill>
+                <a:latin typeface="Calibri"/>
+              </a:rPr>
+              <a:t>–   Y un paso final rotulado como despliegue simulado que imprime la etiqueta de version y publica un artefacto, un archivo que queda guardado junto a la corrida.</a:t>
+            </a:r>
+          </a:p>
         </p:txBody>
       </p:sp>
       <p:sp>
@@ -8095,7 +8219,7 @@
                 </a:solidFill>
                 <a:latin typeface="Calibri"/>
               </a:rPr>
-              <a:t>–   Y un paso final rotulado como despliegue simulado que imprime la etiqueta de version y publica un artefacto, un archivo que queda guardado junto a la corrida.</a:t>
+              <a:t>–   Que docker build forme parte de la construccion tiene un valor extra: comprueba en cada cambio que el Dockerfile sigue siendo valido, que es una de las cosas que se rompen en silencio.</a:t>
             </a:r>
           </a:p>
           <a:p>
@@ -8111,7 +8235,23 @@
                 </a:solidFill>
                 <a:latin typeface="Calibri"/>
               </a:rPr>
-              <a:t>–   Que docker build forme parte de la construccion tiene un valor extra que conviene senalar: comprueba en cada cambio que el Dockerfile sigue siendo valido, que es una de las cosas que se rompen en silencio.</a:t>
+              <a:t>–   Un pipeline sano falla rapido: si la construccion falla, la prueba no se ejecuta, y el autor del cambio recibe el aviso en minutos.</a:t>
+            </a:r>
+          </a:p>
+          <a:p>
+            <a:pPr>
+              <a:spcAft>
+                <a:spcPts val="800"/>
+              </a:spcAft>
+            </a:pPr>
+            <a:r>
+              <a:rPr sz="2000" b="0" i="0">
+                <a:solidFill>
+                  <a:srgbClr val="333333"/>
+                </a:solidFill>
+                <a:latin typeface="Calibri"/>
+              </a:rPr>
+              <a:t>–   En GitHub Actions cada paso que termina con un codigo de salida distinto de 0 detiene el job y lo marca en rojo: esa es la condicion de fallo que convierte el workflow en una verificacion real.</a:t>
             </a:r>
           </a:p>
         </p:txBody>
@@ -11696,6 +11836,58 @@
                 </a:solidFill>
                 <a:latin typeface="Calibri"/>
               </a:rPr>
+              <a:t>CI</a:t>
+            </a:r>
+            <a:r>
+              <a:rPr sz="2000" b="0" i="0">
+                <a:solidFill>
+                  <a:srgbClr val="333333"/>
+                </a:solidFill>
+                <a:latin typeface="Calibri"/>
+              </a:rPr>
+              <a:t> = integración continua: cada cambio se construye y se prueba solo. </a:t>
+            </a:r>
+            <a:r>
+              <a:rPr sz="2000" b="1" i="0">
+                <a:solidFill>
+                  <a:srgbClr val="333333"/>
+                </a:solidFill>
+                <a:latin typeface="Calibri"/>
+              </a:rPr>
+              <a:t>CD</a:t>
+            </a:r>
+            <a:r>
+              <a:rPr sz="2000" b="0" i="0">
+                <a:solidFill>
+                  <a:srgbClr val="333333"/>
+                </a:solidFill>
+                <a:latin typeface="Calibri"/>
+              </a:rPr>
+              <a:t> = entrega continua (queda listo para desplegar) o despliegue continuo (llega solo a producción).</a:t>
+            </a:r>
+          </a:p>
+          <a:p>
+            <a:pPr>
+              <a:spcAft>
+                <a:spcPts val="800"/>
+              </a:spcAft>
+            </a:pPr>
+            <a:r>
+              <a:rPr sz="2000" b="0" i="0">
+                <a:solidFill>
+                  <a:srgbClr val="333333"/>
+                </a:solidFill>
+                <a:latin typeface="Calibri"/>
+              </a:rPr>
+              <a:t>–   </a:t>
+            </a:r>
+            <a:r>
+              <a:rPr sz="2000" b="1" i="0">
+                <a:solidFill>
+                  <a:srgbClr val="333333"/>
+                </a:solidFill>
+                <a:latin typeface="Calibri"/>
+              </a:rPr>
               <a:t>«Ya tenemos CD» porque el YAML tiene un paso «deploy» es falso.</a:t>
             </a:r>
             <a:r>
@@ -12065,25 +12257,23 @@
                 </a:solidFill>
                 <a:latin typeface="Calibri"/>
               </a:rPr>
-              <a:t>–   Secrets solo vía Settings; nunca en el YAML en claro (</a:t>
-            </a:r>
-            <a:r>
-              <a:rPr sz="2000" b="1" i="0">
+              <a:t>–   Ejemplo: «on: [push, pull_request]» · «runs-on: ubuntu-latest» · pasos checkout, build, test, deploy simulado.</a:t>
+            </a:r>
+          </a:p>
+          <a:p>
+            <a:pPr>
+              <a:spcAft>
+                <a:spcPts val="800"/>
+              </a:spcAft>
+            </a:pPr>
+            <a:r>
+              <a:rPr sz="2000" b="0" i="0">
                 <a:solidFill>
                   <a:srgbClr val="333333"/>
                 </a:solidFill>
                 <a:latin typeface="Calibri"/>
               </a:rPr>
-              <a:t>cero en la pregunta si aparece uno</a:t>
-            </a:r>
-            <a:r>
-              <a:rPr sz="2000" b="0" i="0">
-                <a:solidFill>
-                  <a:srgbClr val="333333"/>
-                </a:solidFill>
-                <a:latin typeface="Calibri"/>
-              </a:rPr>
-              <a:t>).</a:t>
+              <a:t>–   Secrets solo vía Settings; nunca en el YAML en claro: un secreto escrito queda en el historial del repositorio.</a:t>
             </a:r>
           </a:p>
           <a:p>
@@ -12421,7 +12611,23 @@
                 </a:solidFill>
                 <a:latin typeface="Calibri"/>
               </a:rPr>
-              <a:t>–   Optimización: caché conceptual, paginación, límites de rate (anotar en informe).</a:t>
+              <a:t>–   Optimización: caché conceptual, paginación, límites de tasa, documentados en el diseño.</a:t>
+            </a:r>
+          </a:p>
+          <a:p>
+            <a:pPr>
+              <a:spcAft>
+                <a:spcPts val="800"/>
+              </a:spcAft>
+            </a:pPr>
+            <a:r>
+              <a:rPr sz="2000" b="0" i="0">
+                <a:solidFill>
+                  <a:srgbClr val="333333"/>
+                </a:solidFill>
+                <a:latin typeface="Calibri"/>
+              </a:rPr>
+              <a:t>–   Ejemplo: p95 del «GET /turnos» &lt; 300 ms; si se supera 5 minutos seguidos, se revisa el índice de la consulta.</a:t>
             </a:r>
           </a:p>
         </p:txBody>

--- a/Arquitectura de Sistemas Computacionales/Clases/Clase 8 - Monitoreo optimizacion y CI-CD/Presentacion.pptx
+++ b/Arquitectura de Sistemas Computacionales/Clases/Clase 8 - Monitoreo optimizacion y CI-CD/Presentacion.pptx
@@ -4656,7 +4656,7 @@
                 </a:solidFill>
                 <a:latin typeface="Calibri"/>
               </a:rPr>
-              <a:t>Conceptos del tema, ejemplos resueltos sobre CloudLite y cierre conceptual.</a:t>
+              <a:t>Conceptos del tema, ejemplos resueltos sobre la app y cierre conceptual.</a:t>
             </a:r>
           </a:p>
         </p:txBody>
@@ -5712,7 +5712,7 @@
                 </a:solidFill>
                 <a:latin typeface="Calibri"/>
               </a:rPr>
-              <a:t>–   Y un punto es la coherencia con el Dockerfile del Corte 1: la misma imagen y el mismo puerto, es decir cloudlite-api con su etiqueta 0.1.0 y el 8080 del EXPOSE de la Clase 3.</a:t>
+              <a:t>–   Y un punto es la coherencia con el Dockerfile del Corte 1: la misma imagen y el mismo puerto, es decir turnos-api con su etiqueta 0.1.0 y el 8080 del EXPOSE de la Clase 3.</a:t>
             </a:r>
           </a:p>
         </p:txBody>
@@ -6784,7 +6784,7 @@
                 </a:solidFill>
                 <a:latin typeface="Calibri"/>
               </a:rPr>
-              <a:t>–   En CloudLite Turnos las cuatro senales son: latencia, el p95 del endpoint de reserva; trafico, las reservas por minuto; errores, el porcentaje de respuestas 5xx; saturacion, el uso del pool de conexiones a la base de datos.</a:t>
+              <a:t>–   En la app de turnos las cuatro senales son: latencia, el p95 del endpoint de reserva; trafico, las reservas por minuto; errores, el porcentaje de respuestas 5xx; saturacion, el uso del pool de conexiones a la base de datos.</a:t>
             </a:r>
           </a:p>
           <a:p>
@@ -7647,7 +7647,7 @@
                 </a:solidFill>
                 <a:latin typeface="Calibri"/>
               </a:rPr>
-              <a:t> Conceptos del tema, uno por lámina, con ejemplos sobre CloudLite.</a:t>
+              <a:t> Conceptos del tema, uno por lámina, con ejemplos sobre la app.</a:t>
             </a:r>
           </a:p>
           <a:p>
@@ -7912,7 +7912,7 @@
                 </a:solidFill>
                 <a:latin typeface="Calibri"/>
               </a:rPr>
-              <a:t>El pipeline del stub de CloudLite, paso por paso (1/2)</a:t>
+              <a:t>El pipeline del stub de la app, paso por paso (1/2)</a:t>
             </a:r>
           </a:p>
         </p:txBody>
@@ -7951,7 +7951,7 @@
                 </a:solidFill>
                 <a:latin typeface="Calibri"/>
               </a:rPr>
-              <a:t>–   El ejemplo concreto es el pipeline del stub de CloudLite, que ya existe desde la Clase 3 como Dockerfile y contenedor, y la diapositiva del ci.yml es el molde que se puede copiar.</a:t>
+              <a:t>–   El ejemplo concreto es el pipeline del stub de la app, que ya existe desde la Clase 3 como Dockerfile y contenedor, y la diapositiva del ci.yml es el molde que se puede copiar.</a:t>
             </a:r>
           </a:p>
           <a:p>
@@ -8180,7 +8180,7 @@
                 </a:solidFill>
                 <a:latin typeface="Calibri"/>
               </a:rPr>
-              <a:t>El pipeline del stub de CloudLite, paso por paso (2/2)</a:t>
+              <a:t>El pipeline del stub de la app, paso por paso (2/2)</a:t>
             </a:r>
           </a:p>
         </p:txBody>
@@ -9990,7 +9990,7 @@
                 </a:solidFill>
                 <a:latin typeface="Calibri"/>
               </a:rPr>
-              <a:t>      - run: docker build -t cloudlite-api:${{ github.sha }}.</a:t>
+              <a:t>      - run: docker build -t turnos-api:${{ github.sha }}.</a:t>
             </a:r>
           </a:p>
         </p:txBody>
@@ -10442,7 +10442,7 @@
                 </a:solidFill>
                 <a:latin typeface="Calibri"/>
               </a:rPr>
-              <a:t>#       con credenciales, asi que en el PI se declara como SIMULADO</a:t>
+              <a:t>#       con credenciales, asi que se declara como SIMULADO</a:t>
             </a:r>
           </a:p>
           <a:p>
@@ -10974,7 +10974,7 @@
                 </a:solidFill>
                 <a:latin typeface="Calibri"/>
               </a:rPr>
-              <a:t>        run: npm ci &amp;&amp; docker build -t cloudlite-api:0.1.0.</a:t>
+              <a:t>        run: npm ci &amp;&amp; docker build -t turnos-api:0.1.0.</a:t>
             </a:r>
           </a:p>
           <a:p>
@@ -11038,7 +11038,7 @@
                 </a:solidFill>
                 <a:latin typeface="Calibri"/>
               </a:rPr>
-              <a:t>        run: echo "Artefacto cloudlite-api:0.1.0 listo para desplegar"</a:t>
+              <a:t>        run: echo "Artefacto turnos-api:0.1.0 listo para desplegar"</a:t>
             </a:r>
           </a:p>
         </p:txBody>
@@ -11305,7 +11305,7 @@
                 </a:solidFill>
                 <a:latin typeface="Calibri"/>
               </a:rPr>
-              <a:t>Definir 4–6 señales de monitoreo para CloudLite.</a:t>
+              <a:t>Definir 4–6 señales de monitoreo para la app.</a:t>
             </a:r>
           </a:p>
         </p:txBody>
@@ -11557,7 +11557,7 @@
                 </a:solidFill>
                 <a:latin typeface="Calibri"/>
               </a:rPr>
-              <a:t>–   Definir 4–6 señales de monitoreo para CloudLite.</a:t>
+              <a:t>–   Definir 4–6 señales de monitoreo para la app.</a:t>
             </a:r>
           </a:p>
         </p:txBody>

--- a/Arquitectura de Sistemas Computacionales/Clases/Clase 8 - Monitoreo optimizacion y CI-CD/Presentacion.pptx
+++ b/Arquitectura de Sistemas Computacionales/Clases/Clase 8 - Monitoreo optimizacion y CI-CD/Presentacion.pptx
@@ -30,10 +30,6 @@
     <p:sldId id="278" r:id="rId30"/>
     <p:sldId id="279" r:id="rId31"/>
     <p:sldId id="280" r:id="rId32"/>
-    <p:sldId id="281" r:id="rId33"/>
-    <p:sldId id="282" r:id="rId34"/>
-    <p:sldId id="283" r:id="rId35"/>
-    <p:sldId id="284" r:id="rId36"/>
   </p:sldIdLst>
   <p:sldSz cx="12191695" cy="6858000" type="screen4x3"/>
   <p:notesSz cx="6858000" cy="9144000"/>
@@ -530,13 +526,19 @@
           <a:lstStyle/>
           <a:p>
             <a:r>
-              <a:t>Conviene decir el reparto al abrir la clase, porque las dos preguntas que el grupo subestima, la 8 y la 10, valen juntas mas que el YAML.</a:t>
+              <a:t>(No se proyecta) Esta clase junta dos temas que parecen distintos y son el mismo asunto en dos momentos: automatizar la verificacion antes de que un cambio llegue a los usuarios, y observar el sistema despues de que llego.</a:t>
             </a:r>
           </a:p>
           <a:p/>
           <a:p>
             <a:r>
-              <a:t>(Sobre la actividad, no se proyecta) Lo que se califica hoy son 25 de los 100 puntos de la actividad del Corte 2, en cuatro preguntas: 10 puntos el contenido completo del ci.yml, 5 explicar que hace de verdad la construccion y la prueba y con que condicion el pipeline debe fallar, 4 distinguir CI de CD y ubicar hasta donde llego el propio trabajo, y 6 la tabla de senales de monitoreo con umbral.</a:t>
+              <a:t>(No se proyecta) Lo que se califica hoy son 25 de los 100 puntos de la actividad del Corte 2, en cuatro preguntas: 10 puntos el contenido completo del ci.yml, 5 explicar que hace de verdad la construccion y la prueba y con que condicion el pipeline debe fallar, 4 distinguir CI de CD y ubicar hasta donde llego el propio trabajo, y 6 la tabla de senales de monitoreo con umbral.</a:t>
+            </a:r>
+          </a:p>
+          <a:p/>
+          <a:p>
+            <a:r>
+              <a:t>(No se proyecta) Conviene decir el reparto al abrir la clase, porque las dos preguntas que el grupo subestima, la 8 y la 10, valen juntas mas que el YAML.</a:t>
             </a:r>
           </a:p>
         </p:txBody>
@@ -618,7 +620,13 @@
           <a:p/>
           <a:p>
             <a:r>
-              <a:t>(Sobre la actividad, no se proyecta) Y el recordatorio de calificacion: un secreto en claro en el YAML no descuenta, anula la pregunta 7 entera.</a:t>
+              <a:t>(No se proyecta) El pipeline es tambien donde se ejecuta de verdad la politica de secretos escrita en la Clase 6.</a:t>
+            </a:r>
+          </a:p>
+          <a:p/>
+          <a:p>
+            <a:r>
+              <a:t>(No se proyecta) Y el recordatorio de calificacion: un secreto en claro en el YAML no descuenta, anula la pregunta 7 entera.</a:t>
             </a:r>
           </a:p>
         </p:txBody>
@@ -700,13 +708,25 @@
           <a:p/>
           <a:p>
             <a:r>
-              <a:t>(Sobre la actividad, no se proyecta) «Si no tenemos usuarios reales, que monitoreamos?» El entregable es el plan, no los datos: la pregunta pide que senales observaria en una produccion hipotetica, con sus umbrales.</a:t>
+              <a:t>(No se proyecta) «Si no tenemos usuarios reales, que monitoreamos?» El entregable es el plan, no los datos: la pregunta pide que senales observaria en una produccion hipotetica, con sus umbrales.</a:t>
             </a:r>
           </a:p>
           <a:p/>
           <a:p>
             <a:r>
-              <a:t>(Sobre la actividad, no se proyecta) Es preferible una prueba real y pequena a tres pruebas inventadas que no se ejecutan, porque la pregunta 8 evalua si el pipeline puede fallar.</a:t>
+              <a:t>(No se proyecta) Y algo si es real: el chequeo de salud que consulta el balanceador de la Clase 7 ya es monitoreo, y el check de Actions ya es una senal de que el sistema construye.</a:t>
+            </a:r>
+          </a:p>
+          <a:p/>
+          <a:p>
+            <a:r>
+              <a:t>(No se proyecta) «De donde saco los umbrales si nunca he medido?» De tres fuentes legitimas, y conviene nombrarlas: una convencion del oficio citada como tal, por ejemplo 300 milisegundos de p95 o el 80 por ciento de saturacion; una expectativa del usuario redactada en el dominio, por ejemplo que una reserva no tarde mas de dos segundos; o una aritmetica de servilleta a partir del escenario de carga, que es justamente lo que se formaliza en la Clase 12.</a:t>
+            </a:r>
+          </a:p>
+          <a:p/>
+          <a:p>
+            <a:r>
+              <a:t>(No se proyecta) Es preferible una prueba real y pequena a tres pruebas inventadas que no se ejecutan, porque la pregunta 8 evalua si el pipeline puede fallar.</a:t>
             </a:r>
           </a:p>
         </p:txBody>
@@ -788,13 +808,13 @@
           <a:p/>
           <a:p>
             <a:r>
-              <a:t>Hay que decirlo explicito: lo simulado es el ultimo paso, no el pipeline; todo lo anterior es real y ejecutable.</a:t>
+              <a:t>(No se proyecta) Hay que decirlo explicito: lo simulado es el ultimo paso, no el pipeline; todo lo anterior es real y ejecutable.</a:t>
             </a:r>
           </a:p>
           <a:p/>
           <a:p>
             <a:r>
-              <a:t>(Sobre la actividad, no se proyecta) Y hay que anunciar como se califica esa frontera, porque es contraintuitivo para el estudiante que cree que reconocer un limite es admitir una carencia: la pregunta 9 SUMA un punto por ubicar correctamente el propio trabajo y decir que llega hasta «listo para desplegar», y DESCUENTA la mitad de la pregunta a quien afirme haber construido CD.</a:t>
+              <a:t>(No se proyecta) Y hay que anunciar como se califica esa frontera, porque es contraintuitivo para el estudiante que cree que reconocer un limite es admitir una carencia: la pregunta 9 SUMA un punto por ubicar correctamente el propio trabajo y decir que llega hasta «listo para desplegar», y DESCUENTA la mitad de la pregunta a quien afirme haber construido CD.</a:t>
             </a:r>
           </a:p>
         </p:txBody>
@@ -867,6 +887,12 @@
               <a:t>Su vocabulario tiene cinco palabras.</a:t>
             </a:r>
           </a:p>
+          <a:p/>
+          <a:p>
+            <a:r>
+              <a:t>(No se proyecta) Advertencias: el YAML se indenta con espacios y nunca con tabulaciones, causa numero uno de un pipeline que no arranca; y en el nivel gratuito los repositorios publicos tienen minutos ilimitados mientras los privados tienen una cuota del orden de 2000 minutos al mes, cifra que conviene confirmar en la pagina de facturacion porque el proveedor la cambia.</a:t>
+            </a:r>
+          </a:p>
         </p:txBody>
       </p:sp>
       <p:sp>
@@ -934,13 +960,25 @@
           <a:lstStyle/>
           <a:p>
             <a:r>
-              <a:t>(Sobre la actividad, no se proyecta) Falta la sancion, que conviene anunciar dos veces: la pregunta vale CERO completa si aparece un secreto escrito en claro dentro del YAML, sin importar lo bien que este el resto.</a:t>
+              <a:t>(No se proyecta) Un punto y medio es el ENTORNO de ejecucion, la clave runs-on, tipicamente ubuntu-latest; es el bloque que el estudiante omite mas y el mas facil de recuperar.</a:t>
             </a:r>
           </a:p>
           <a:p/>
           <a:p>
             <a:r>
-              <a:t>(Sobre la actividad, no se proyecta) Es la misma politica que el estudiante escribio en la pregunta 3 del Corte 2, y esta es la clase donde se comprueba si la cumple.</a:t>
+              <a:t>(No se proyecta) Y un punto es la coherencia con el Dockerfile del Corte 1: la misma imagen y el mismo puerto, es decir cloudlite-api con su etiqueta 0.1.0 y el 8080 del EXPOSE de la Clase 3.</a:t>
+            </a:r>
+          </a:p>
+          <a:p/>
+          <a:p>
+            <a:r>
+              <a:t>(No se proyecta) Falta la sancion, que conviene anunciar dos veces: la pregunta vale CERO completa si aparece un secreto escrito en claro dentro del YAML, sin importar lo bien que este el resto.</a:t>
+            </a:r>
+          </a:p>
+          <a:p/>
+          <a:p>
+            <a:r>
+              <a:t>(No se proyecta) Es la misma politica que el estudiante escribio en la pregunta 3 del Corte 2, y esta es la clase donde se comprueba si la cumple.</a:t>
             </a:r>
           </a:p>
         </p:txBody>
@@ -1013,6 +1051,18 @@
               <a:t>Se apoya en tres tipos de senal.</a:t>
             </a:r>
           </a:p>
+          <a:p/>
+          <a:p>
+            <a:r>
+              <a:t>(No se proyecta) La segunda mitad de la clase cambia de lado: ya no se trata de validar antes, sino de saber que pasa despues.</a:t>
+            </a:r>
+          </a:p>
+          <a:p/>
+          <a:p>
+            <a:r>
+              <a:t>(No se proyecta) Las trazas siguen el recorrido de una sola peticion por varios servicios y son necesarias porque la Clase 4 convirtio el sistema en distribuido: cuando la peticion pasa por la API y por el servicio de notificaciones, saber cual de los dos tardo es imposible con metricas agregadas.</a:t>
+            </a:r>
+          </a:p>
         </p:txBody>
       </p:sp>
       <p:sp>
@@ -1080,7 +1130,7 @@
           <a:lstStyle/>
           <a:p>
             <a:r>
-              <a:t>Errores es la proporcion de peticiones que fallan, tipicamente el porcentaje de respuestas 5xx; conviene expresarlo como disponibilidad, y aqui hay aritmetica que el docente debe citar: 99,9 por ciento equivale a unos 43 minutos de indisponibilidad al mes y 99,99 por ciento a unos 4 minutos, lo cual no es convencion sino calculo sobre los 43.200 minutos de un mes de treinta dias.</a:t>
+              <a:t>(No se proyecta) Errores es la proporcion de peticiones que fallan, tipicamente el porcentaje de respuestas 5xx; conviene expresarlo como disponibilidad, y aqui hay aritmetica que el docente debe citar: 99,9 por ciento equivale a unos 43 minutos de indisponibilidad al mes y 99,99 por ciento a unos 4 minutos, lo cual no es convencion sino calculo sobre los 43.200 minutos de un mes de treinta dias.</a:t>
             </a:r>
           </a:p>
         </p:txBody>
@@ -1156,37 +1206,43 @@
           <a:p/>
           <a:p>
             <a:r>
-              <a:t>Una tabla de referencia para CloudLite, que el docente puede llenar en vivo: latencia p95 del inicio de sesion y del listado principal, con objetivo bajo 300 milisegundos; peticiones por minuto en la hora pico, con un valor esperado que sirva de linea base; porcentaje de respuestas 5xx, con alerta sobre el 1 por ciento sostenido; uso del pool de conexiones, con alerta sobre el 80 por ciento; y la fila que casi nadie escribe y vale un punto, un REGISTRO: el log estructurado de cada reserva rechazada y de cada intento de inicio de sesion fallido, con identificador de peticion, ruta y codigo, cuyo umbral es un evento observable, por ejemplo mas de cinco fallos del mismo usuario en diez minutos se revisa.</a:t>
+              <a:t>Esa accion no es una cuarta columna: se escribe dentro del umbral, como en el ejemplo del listado.</a:t>
             </a:r>
           </a:p>
           <a:p/>
           <a:p>
             <a:r>
-              <a:t>Conviene proyectar esa fila y decir «esta es la que falta en el 80 por ciento de las entregas».</a:t>
+              <a:t>La fila tiene senal, objeto concreto del dominio y una accion atada al umbral.</a:t>
             </a:r>
           </a:p>
           <a:p/>
           <a:p>
             <a:r>
-              <a:t>Esa accion no es una cuarta columna: se escribe dentro del umbral, como en el ejemplo del listado.</a:t>
+              <a:t>(No se proyecta) El reparto de sus 6 puntos es un punto por senal bien formada con su umbral hasta la cuarta, hasta un punto adicional entre las senales quinta y sexta, y un punto por que al menos una sea un registro.</a:t>
             </a:r>
           </a:p>
           <a:p/>
           <a:p>
             <a:r>
-              <a:t>Ahi entra la optimizacion de la segunda mitad del tema: paginar, con veinte a cincuenta elementos por pagina, porque un endpoint que devuelve cincuenta mil registros es problema de latencia y de memoria; indexar la columna por la que se filtra, porque sin indice el motor recorre la tabla completa; cachear lecturas repetidas, donde una tasa de acierto del 90 por ciento significa que nueve de cada diez lecturas no llegan a la base; y limitar la tasa de peticiones, el control de denegacion de servicio de la Clase 6.</a:t>
+              <a:t>(No se proyecta) El umbral puede ser discutible, y hay que decir que se acepta discutible: lo que no puede es faltar.</a:t>
             </a:r>
           </a:p>
           <a:p/>
           <a:p>
             <a:r>
-              <a:t>La fila tiene senal, objeto concreto del dominio y una accion atada al umbral.</a:t>
+              <a:t>(No se proyecta) Una tabla de referencia para CloudLite, que el docente puede llenar en vivo: latencia p95 del inicio de sesion y del listado principal, con objetivo bajo 300 milisegundos; peticiones por minuto en la hora pico, con un valor esperado que sirva de linea base; porcentaje de respuestas 5xx, con alerta sobre el 1 por ciento sostenido; uso del pool de conexiones, con alerta sobre el 80 por ciento; y la fila que casi nadie escribe y vale un punto, un REGISTRO: el log estructurado de cada reserva rechazada y de cada intento de inicio de sesion fallido, con identificador de peticion, ruta y codigo, cuyo umbral es un evento observable, por ejemplo mas de cinco fallos del mismo usuario en diez minutos se revisa.</a:t>
             </a:r>
           </a:p>
           <a:p/>
           <a:p>
             <a:r>
-              <a:t>(Sobre la actividad, no se proyecta) El reparto de sus 6 puntos es un punto por senal bien formada con su umbral hasta la cuarta, hasta un punto adicional entre las senales quinta y sexta, y un punto por que al menos una sea un registro.</a:t>
+              <a:t>(No se proyecta) Conviene proyectar esa fila y decir «esta es la que falta en el 80 por ciento de las entregas».</a:t>
+            </a:r>
+          </a:p>
+          <a:p/>
+          <a:p>
+            <a:r>
+              <a:t>(No se proyecta) Ahi entra la optimizacion de la segunda mitad del tema: paginar, con veinte a cincuenta elementos por pagina, porque un endpoint que devuelve cincuenta mil registros es problema de latencia y de memoria; indexar la columna por la que se filtra, porque sin indice el motor recorre la tabla completa; cachear lecturas repetidas, donde una tasa de acierto del 90 por ciento significa que nueve de cada diez lecturas no llegan a la base; y limitar la tasa de peticiones, el control de denegacion de servicio de la Clase 6.</a:t>
             </a:r>
           </a:p>
         </p:txBody>
@@ -1262,7 +1318,13 @@
           <a:p/>
           <a:p>
             <a:r>
-              <a:t>(Sobre la actividad, no se proyecta) La evidencia del entregable es doble: el archivo ci.yml en el repositorio y la captura de una corrida en verde con los nombres de los pasos visibles; si Actions falla por cuota o por red se acepta el YAML con la explicacion paso por paso, pero eso es plan B y hay que decir que lo es.</a:t>
+              <a:t>(No se proyecta) El ejemplo concreto es el pipeline del stub de CloudLite, que ya existe desde la Clase 3 como Dockerfile y contenedor, y la diapositiva del ci.yml es el molde que se puede copiar.</a:t>
+            </a:r>
+          </a:p>
+          <a:p/>
+          <a:p>
+            <a:r>
+              <a:t>(No se proyecta) La evidencia del entregable es doble: el archivo ci.yml en el repositorio y la captura de una corrida en verde con los nombres de los pasos visibles; si Actions falla por cuota o por red se acepta el YAML con la explicacion paso por paso, pero eso es plan B y hay que decir que lo es.</a:t>
             </a:r>
           </a:p>
         </p:txBody>
@@ -1344,25 +1406,31 @@
           <a:p/>
           <a:p>
             <a:r>
-              <a:t>La forma de responderlo es una prueba mental que el docente debe hacer en voz alta y en vivo: que error tendria que introducir yo en el codigo para que este pipeline lo detecte.</a:t>
+              <a:t>Si la respuesta no aparece en diez segundos, el pipeline no valida nada todavia.</a:t>
             </a:r>
           </a:p>
           <a:p/>
           <a:p>
             <a:r>
-              <a:t>Si la respuesta no aparece en diez segundos, el pipeline no valida nada todavia.</a:t>
+              <a:t>(No se proyecta) La forma de responderlo es una prueba mental que el docente debe hacer en voz alta y en vivo: que error tendria que introducir yo en el codigo para que este pipeline lo detecte.</a:t>
             </a:r>
           </a:p>
           <a:p/>
           <a:p>
             <a:r>
-              <a:t>La respuesta es que una sola prueba que verifique que el endpoint /health responde 200 detecta la clase de error mas costosa en operacion, que la aplicacion ya no arranca; y con eso la condicion de fallo se escribe sola: el check sale rojo si /health deja de responder 200, si falta una dependencia declarada o si el docker build no compila.</a:t>
+              <a:t>(No se proyecta) Aqui es donde aparece la pregunta previsible del grupo, y hay que salir a su encuentro: para que escribir pruebas de un stub que casi no hace nada.</a:t>
             </a:r>
           </a:p>
           <a:p/>
           <a:p>
             <a:r>
-              <a:t>Conviene romper el pipeline a proposito en la demo, porque un check rojo proyectado ensena mas que el parrafo anterior.</a:t>
+              <a:t>(No se proyecta) La respuesta es que una sola prueba que verifique que el endpoint /health responde 200 detecta la clase de error mas costosa en operacion, que la aplicacion ya no arranca; y con eso la condicion de fallo se escribe sola: el check sale rojo si /health deja de responder 200, si falta una dependencia declarada o si el docker build no compila.</a:t>
+            </a:r>
+          </a:p>
+          <a:p/>
+          <a:p>
+            <a:r>
+              <a:t>(No se proyecta) Conviene romper el pipeline a proposito en la demo, porque un check rojo proyectado ensena mas que el parrafo anterior.</a:t>
             </a:r>
           </a:p>
         </p:txBody>
@@ -4837,7 +4905,7 @@
                 </a:solidFill>
                 <a:latin typeface="Calibri"/>
               </a:rPr>
-              <a:t>GitHub Actions en cinco palabras (1/2)</a:t>
+              <a:t>Los tres bloques de un workflow, y el orden de los pasos</a:t>
             </a:r>
           </a:p>
         </p:txBody>
@@ -4876,7 +4944,7 @@
                 </a:solidFill>
                 <a:latin typeface="Calibri"/>
               </a:rPr>
-              <a:t>–   GitHub Actions es la herramienta del dia porque es gratis, corre en el navegador y produce evidencia verificable.</a:t>
+              <a:t>–   Un workflow no es un archivo cualquiera: tiene tres bloques nombrados y tres pasos en orden.</a:t>
             </a:r>
           </a:p>
           <a:p>
@@ -4892,7 +4960,7 @@
                 </a:solidFill>
                 <a:latin typeface="Calibri"/>
               </a:rPr>
-              <a:t>–   Un workflow es un archivo YAML en la carpeta.github/workflows; el nombre es libre y ci.yml es la convencion.</a:t>
+              <a:t>–   El primer bloque son los DISPARADORES, es decir la clave on, y basta con on push y pull_request bien escritos.</a:t>
             </a:r>
           </a:p>
           <a:p>
@@ -4908,7 +4976,7 @@
                 </a:solidFill>
                 <a:latin typeface="Calibri"/>
               </a:rPr>
-              <a:t>–   El evento o disparador declara cuando corre: on push para cada subida, on pull_request para cada propuesta de cambio, workflow_dispatch para un boton manual, schedule para una hora fija.</a:t>
+              <a:t>–   Los tres PASOS van presentes y en ORDEN: construccion, prueba y despliegue simulado.</a:t>
             </a:r>
           </a:p>
           <a:p>
@@ -4924,7 +4992,7 @@
                 </a:solidFill>
                 <a:latin typeface="Calibri"/>
               </a:rPr>
-              <a:t>–   Un job es un conjunto de pasos que corre en un runner, una maquina virtual limpia que se crea para esa ejecucion y se destruye al terminar.</a:t>
+              <a:t>–   El orden no es capricho ni estetica: probar antes de construir no prueba el artefacto que se va a entregar, y desplegar antes de probar es exactamente lo que la integracion continua existe para impedir.</a:t>
             </a:r>
           </a:p>
           <a:p>
@@ -4940,7 +5008,7 @@
                 </a:solidFill>
                 <a:latin typeface="Calibri"/>
               </a:rPr>
-              <a:t>–   Un step es un comando o el uso de una action, unidad reutilizable publicada por otros.</a:t>
+              <a:t>–   Un punto y medio adicional es que el paso de despliegue este ROTULADO como simulado y no prometa un despliegue real; con escribir «Despliegue SIMULADO (no despliega a ningun servidor)» en el nombre del paso se cumple.</a:t>
             </a:r>
           </a:p>
         </p:txBody>
@@ -5121,7 +5189,7 @@
                 </a:solidFill>
                 <a:latin typeface="Calibri"/>
               </a:rPr>
-              <a:t>GitHub Actions en cinco palabras (2/2)</a:t>
+              <a:t>Monitorear y observar: la segunda mitad cambia de lado (1/2)</a:t>
             </a:r>
           </a:p>
         </p:txBody>
@@ -5160,7 +5228,7 @@
                 </a:solidFill>
                 <a:latin typeface="Calibri"/>
               </a:rPr>
-              <a:t>–   Que el runner sea limpio y efimero es el punto pedagogico central: demuestra que la construccion no depende de nada instalado a mano en el portatil de nadie.</a:t>
+              <a:t>–   Monitorear es vigilar indicadores decididos de antemano; observabilidad es la capacidad de responder preguntas nuevas sobre el sistema a partir de lo que el sistema emite, sin agregar codigo por cada duda.</a:t>
             </a:r>
           </a:p>
           <a:p>
@@ -5176,7 +5244,7 @@
                 </a:solidFill>
                 <a:latin typeface="Calibri"/>
               </a:rPr>
-              <a:t>–   Advertencias: el YAML se indenta con espacios y nunca con tabulaciones, causa numero uno de un pipeline que no arranca</a:t>
+              <a:t>–   Las metricas son numeros medidos en el tiempo, baratas porque se agregan, y detectan que algo cambio.</a:t>
             </a:r>
           </a:p>
           <a:p>
@@ -5192,7 +5260,23 @@
                 </a:solidFill>
                 <a:latin typeface="Calibri"/>
               </a:rPr>
-              <a:t>–   Y en el nivel gratuito los repositorios publicos tienen minutos ilimitados mientras los privados tienen una cuota del orden de 2000 minutos al mes, cifra que conviene confirmar en la pagina de facturacion porque el proveedor la cambia.</a:t>
+              <a:t>–   Los logs, o registros, son eventos discretos con contexto, caros en volumen, y explican por que cambio.</a:t>
+            </a:r>
+          </a:p>
+          <a:p>
+            <a:pPr>
+              <a:spcAft>
+                <a:spcPts val="800"/>
+              </a:spcAft>
+            </a:pPr>
+            <a:r>
+              <a:rPr sz="2000" b="0" i="0">
+                <a:solidFill>
+                  <a:srgbClr val="333333"/>
+                </a:solidFill>
+                <a:latin typeface="Calibri"/>
+              </a:rPr>
+              <a:t>–   La distincion entre metrica y registro importa: al menos una de las senales de un plan deberia ser un REGISTRO y no una metrica numerica, es decir algo que se escribe para poder reconstruir que paso despues.</a:t>
             </a:r>
           </a:p>
         </p:txBody>
@@ -5373,7 +5457,7 @@
                 </a:solidFill>
                 <a:latin typeface="Calibri"/>
               </a:rPr>
-              <a:t>Los tres bloques de un workflow, y el orden de los pasos (1/2)</a:t>
+              <a:t>Monitorear y observar: la segunda mitad cambia de lado (2/2)</a:t>
             </a:r>
           </a:p>
         </p:txBody>
@@ -5412,7 +5496,7 @@
                 </a:solidFill>
                 <a:latin typeface="Calibri"/>
               </a:rPr>
-              <a:t>–   Un workflow no es un archivo cualquiera: tiene tres bloques nombrados y tres pasos en orden.</a:t>
+              <a:t>–   La practica minima documentable es el log estructurado: cada linea es un objeto con campos fijos como fecha, nivel, identificador de peticion, ruta, codigo de estado y duracion en milisegundos.</a:t>
             </a:r>
           </a:p>
           <a:p>
@@ -5428,7 +5512,7 @@
                 </a:solidFill>
                 <a:latin typeface="Calibri"/>
               </a:rPr>
-              <a:t>–   El primer bloque son los DISPARADORES, es decir la clave on, y basta con on push y pull_request bien escritos.</a:t>
+              <a:t>–   Con ese identificador propagado entre servicios se reconstruye el recorrido: una traza pobre, pero real.</a:t>
             </a:r>
           </a:p>
           <a:p>
@@ -5444,7 +5528,7 @@
                 </a:solidFill>
                 <a:latin typeface="Calibri"/>
               </a:rPr>
-              <a:t>–   Un punto y medio es el ENTORNO de ejecucion, la clave runs-on, tipicamente ubuntu-latest; es el bloque que el estudiante omite mas y el mas facil de recuperar.</a:t>
+              <a:t>–   Un ejemplo de linea estructurada es: fecha 2026-10-03 10:15:02, nivel INFO, peticion a91f, ruta POST /turnos, estado 201, duracion 84 ms.</a:t>
             </a:r>
           </a:p>
           <a:p>
@@ -5460,23 +5544,7 @@
                 </a:solidFill>
                 <a:latin typeface="Calibri"/>
               </a:rPr>
-              <a:t>–   Los tres PASOS van presentes y en ORDEN: construccion, prueba y despliegue simulado.</a:t>
-            </a:r>
-          </a:p>
-          <a:p>
-            <a:pPr>
-              <a:spcAft>
-                <a:spcPts val="800"/>
-              </a:spcAft>
-            </a:pPr>
-            <a:r>
-              <a:rPr sz="2000" b="0" i="0">
-                <a:solidFill>
-                  <a:srgbClr val="333333"/>
-                </a:solidFill>
-                <a:latin typeface="Calibri"/>
-              </a:rPr>
-              <a:t>–   El orden no es capricho ni estetica: probar antes de construir no prueba el artefacto que se va a entregar, y desplegar antes de probar es exactamente lo que la integracion continua existe para impedir.</a:t>
+              <a:t>–   Un error comun es escribir logs como frases libres: se leen bien, pero no se pueden filtrar ni contar.</a:t>
             </a:r>
           </a:p>
         </p:txBody>
@@ -5657,7 +5725,7 @@
                 </a:solidFill>
                 <a:latin typeface="Calibri"/>
               </a:rPr>
-              <a:t>Los tres bloques de un workflow, y el orden de los pasos (2/2)</a:t>
+              <a:t>Las cuatro senales de oro, con definicion operativa (1/2)</a:t>
             </a:r>
           </a:p>
         </p:txBody>
@@ -5696,7 +5764,7 @@
                 </a:solidFill>
                 <a:latin typeface="Calibri"/>
               </a:rPr>
-              <a:t>–   Un punto y medio adicional es que el paso de despliegue este ROTULADO como simulado y no prometa un despliegue real; con escribir «Despliegue SIMULADO (no despliega a ningun servidor)» en el nombre del paso se cumple.</a:t>
+              <a:t>–   Las cuatro senales de oro son latencia, trafico, errores y saturacion, y cada una necesita definicion operativa.</a:t>
             </a:r>
           </a:p>
           <a:p>
@@ -5712,7 +5780,71 @@
                 </a:solidFill>
                 <a:latin typeface="Calibri"/>
               </a:rPr>
-              <a:t>–   Y un punto es la coherencia con el Dockerfile del Corte 1: la misma imagen y el mismo puerto, es decir turnos-api con su etiqueta 0.1.0 y el 8080 del EXPOSE de la Clase 3.</a:t>
+              <a:t>–   Trafico es cuanta demanda llega, en peticiones por segundo o por minuto.</a:t>
+            </a:r>
+          </a:p>
+          <a:p>
+            <a:pPr>
+              <a:spcAft>
+                <a:spcPts val="800"/>
+              </a:spcAft>
+            </a:pPr>
+            <a:r>
+              <a:rPr sz="2000" b="0" i="0">
+                <a:solidFill>
+                  <a:srgbClr val="333333"/>
+                </a:solidFill>
+                <a:latin typeface="Calibri"/>
+              </a:rPr>
+              <a:t>–   Saturacion es que tan cerca esta el recurso mas escaso de su limite: CPU, memoria, disco o, en la mayoria de las APIs reales, las conexiones libres del pool de la base de datos</a:t>
+            </a:r>
+          </a:p>
+          <a:p>
+            <a:pPr>
+              <a:spcAft>
+                <a:spcPts val="800"/>
+              </a:spcAft>
+            </a:pPr>
+            <a:r>
+              <a:rPr sz="2000" b="0" i="0">
+                <a:solidFill>
+                  <a:srgbClr val="333333"/>
+                </a:solidFill>
+                <a:latin typeface="Calibri"/>
+              </a:rPr>
+              <a:t>–   La convencion es alertar cuando un recurso pasa del 70 u 80 por ciento sostenido, y es convencion, no ley.</a:t>
+            </a:r>
+          </a:p>
+          <a:p>
+            <a:pPr>
+              <a:spcAft>
+                <a:spcPts val="800"/>
+              </a:spcAft>
+            </a:pPr>
+            <a:r>
+              <a:rPr sz="2000" b="0" i="0">
+                <a:solidFill>
+                  <a:srgbClr val="333333"/>
+                </a:solidFill>
+                <a:latin typeface="Calibri"/>
+              </a:rPr>
+              <a:t>–   Latencia merece explicacion aparte porque introduce el percentil, el valor por debajo del cual cae un porcentaje dado de las mediciones: si el p95 de la API es 300 milisegundos</a:t>
+            </a:r>
+          </a:p>
+          <a:p>
+            <a:pPr>
+              <a:spcAft>
+                <a:spcPts val="800"/>
+              </a:spcAft>
+            </a:pPr>
+            <a:r>
+              <a:rPr sz="2000" b="0" i="0">
+                <a:solidFill>
+                  <a:srgbClr val="333333"/>
+                </a:solidFill>
+                <a:latin typeface="Calibri"/>
+              </a:rPr>
+              <a:t>–   95 de cada 100 peticiones respondieron en 300 milisegundos o menos y 5 tardaron mas.</a:t>
             </a:r>
           </a:p>
         </p:txBody>
@@ -5893,7 +6025,7 @@
                 </a:solidFill>
                 <a:latin typeface="Calibri"/>
               </a:rPr>
-              <a:t>Monitorear y observar: la segunda mitad cambia de lado (1/2)</a:t>
+              <a:t>Las cuatro senales de oro, con definicion operativa (2/2)</a:t>
             </a:r>
           </a:p>
         </p:txBody>
@@ -5932,7 +6064,7 @@
                 </a:solidFill>
                 <a:latin typeface="Calibri"/>
               </a:rPr>
-              <a:t>–   La segunda mitad de la clase cambia de lado: ya no se trata de validar antes, sino de saber que pasa despues.</a:t>
+              <a:t>–   Es mas honesto que el promedio, y el ejemplo lo prueba: 99 peticiones de 50 milisegundos y una de 5 segundos dan un promedio de 99 milisegundos, que parece excelente, mientras el p99 es 5 segundos y corresponde a un usuario mirando una pantalla congelada.</a:t>
             </a:r>
           </a:p>
           <a:p>
@@ -5948,7 +6080,7 @@
                 </a:solidFill>
                 <a:latin typeface="Calibri"/>
               </a:rPr>
-              <a:t>–   Monitorear es vigilar indicadores decididos de antemano; observabilidad es la capacidad de responder preguntas nuevas sobre el sistema a partir de lo que el sistema emite, sin agregar codigo por cada duda.</a:t>
+              <a:t>–   En la app de turnos las cuatro senales son: latencia, el p95 del endpoint de reserva; trafico, las reservas por minuto; errores, el porcentaje de respuestas 5xx; saturacion, el uso del pool de conexiones a la base de datos.</a:t>
             </a:r>
           </a:p>
           <a:p>
@@ -5964,39 +6096,7 @@
                 </a:solidFill>
                 <a:latin typeface="Calibri"/>
               </a:rPr>
-              <a:t>–   Las metricas son numeros medidos en el tiempo, baratas porque se agregan, y detectan que algo cambio.</a:t>
-            </a:r>
-          </a:p>
-          <a:p>
-            <a:pPr>
-              <a:spcAft>
-                <a:spcPts val="800"/>
-              </a:spcAft>
-            </a:pPr>
-            <a:r>
-              <a:rPr sz="2000" b="0" i="0">
-                <a:solidFill>
-                  <a:srgbClr val="333333"/>
-                </a:solidFill>
-                <a:latin typeface="Calibri"/>
-              </a:rPr>
-              <a:t>–   Los logs, o registros, son eventos discretos con contexto, caros en volumen, y explican por que cambio.</a:t>
-            </a:r>
-          </a:p>
-          <a:p>
-            <a:pPr>
-              <a:spcAft>
-                <a:spcPts val="800"/>
-              </a:spcAft>
-            </a:pPr>
-            <a:r>
-              <a:rPr sz="2000" b="0" i="0">
-                <a:solidFill>
-                  <a:srgbClr val="333333"/>
-                </a:solidFill>
-                <a:latin typeface="Calibri"/>
-              </a:rPr>
-              <a:t>–   Las trazas siguen el recorrido de una sola peticion por varios servicios y son necesarias porque la Clase 4 convirtio el sistema en distribuido: cuando la peticion pasa por la API y por el servicio de notificaciones, saber cual de los dos tardo es imposible con metricas agregadas.</a:t>
+              <a:t>–   Un error comun es medir solo la CPU: es una senal de saturacion entre varias, y en una API que espera a la base de datos casi nunca es la primera en agotarse.</a:t>
             </a:r>
           </a:p>
         </p:txBody>
@@ -6177,7 +6277,7 @@
                 </a:solidFill>
                 <a:latin typeface="Calibri"/>
               </a:rPr>
-              <a:t>Monitorear y observar: la segunda mitad cambia de lado (2/2)</a:t>
+              <a:t>La tabla de senales, con sus tres columnas (1/2)</a:t>
             </a:r>
           </a:p>
         </p:txBody>
@@ -6216,7 +6316,7 @@
                 </a:solidFill>
                 <a:latin typeface="Calibri"/>
               </a:rPr>
-              <a:t>–   La distincion entre metrica y registro importa: al menos una de las senales de un plan deberia ser un REGISTRO y no una metrica numerica, es decir algo que se escribe para poder reconstruir que paso despues.</a:t>
+              <a:t>–   El plan de monitoreo es una tabla de entre 4 y 6 filas con TRES columnas: «Senal», «Que se mide en MI dominio» y «Umbral u objetivo».</a:t>
             </a:r>
           </a:p>
           <a:p>
@@ -6232,7 +6332,7 @@
                 </a:solidFill>
                 <a:latin typeface="Calibri"/>
               </a:rPr>
-              <a:t>–   La practica minima documentable es el log estructurado: cada linea es un objeto con campos fijos como fecha, nivel, identificador de peticion, ruta, codigo de estado y duracion en milisegundos.</a:t>
+              <a:t>–   La regla que decide la mitad de la nota se dice en una frase: una senal sin umbral NO SUMA, aunque este bien elegida.</a:t>
             </a:r>
           </a:p>
           <a:p>
@@ -6248,7 +6348,23 @@
                 </a:solidFill>
                 <a:latin typeface="Calibri"/>
               </a:rPr>
-              <a:t>–   Con ese identificador propagado entre servicios se reconstruye el recorrido: una traza pobre, pero real.</a:t>
+              <a:t>–   «el listado de disponibilidad debe responder en menos de 400 milisegundos y si pasa de 800 se revisa» si, porque define cuando hay que actuar.</a:t>
+            </a:r>
+          </a:p>
+          <a:p>
+            <a:pPr>
+              <a:spcAft>
+                <a:spcPts val="800"/>
+              </a:spcAft>
+            </a:pPr>
+            <a:r>
+              <a:rPr sz="2000" b="0" i="0">
+                <a:solidFill>
+                  <a:srgbClr val="333333"/>
+                </a:solidFill>
+                <a:latin typeface="Calibri"/>
+              </a:rPr>
+              <a:t>–   La segunda columna tiene que referirse a operaciones del dominio propio, asi que «el sistema» no es una respuesta y «el listado de disponibilidad de canchas» o «el registro de una reserva» si.</a:t>
             </a:r>
           </a:p>
         </p:txBody>
@@ -6429,7 +6545,7 @@
                 </a:solidFill>
                 <a:latin typeface="Calibri"/>
               </a:rPr>
-              <a:t>Las cuatro senales de oro, con definicion operativa (1/2)</a:t>
+              <a:t>La tabla de senales, con sus tres columnas (2/2)</a:t>
             </a:r>
           </a:p>
         </p:txBody>
@@ -6468,7 +6584,7 @@
                 </a:solidFill>
                 <a:latin typeface="Calibri"/>
               </a:rPr>
-              <a:t>–   Las cuatro senales de oro son latencia, trafico, errores y saturacion, y cada una necesita definicion operativa.</a:t>
+              <a:t>–   Cada umbral necesita su accion: que se HACE cuando se cruza es lo que convierte una lista de metricas en un plan de operacion.</a:t>
             </a:r>
           </a:p>
           <a:p>
@@ -6484,7 +6600,7 @@
                 </a:solidFill>
                 <a:latin typeface="Calibri"/>
               </a:rPr>
-              <a:t>–   Trafico es cuanta demanda llega, en peticiones por segundo o por minuto.</a:t>
+              <a:t>–   Un ejemplo de fila completa es: Senal «latencia del listado de turnos»</a:t>
             </a:r>
           </a:p>
           <a:p>
@@ -6500,7 +6616,7 @@
                 </a:solidFill>
                 <a:latin typeface="Calibri"/>
               </a:rPr>
-              <a:t>–   Saturacion es que tan cerca esta el recurso mas escaso de su limite: CPU, memoria, disco o, en la mayoria de las APIs reales, las conexiones libres del pool de la base de datos</a:t>
+              <a:t>–   Que se mide «p95 del GET /turnos»</a:t>
             </a:r>
           </a:p>
           <a:p>
@@ -6516,7 +6632,7 @@
                 </a:solidFill>
                 <a:latin typeface="Calibri"/>
               </a:rPr>
-              <a:t>–   La convencion es alertar cuando un recurso pasa del 70 u 80 por ciento sostenido, y es convencion, no ley.</a:t>
+              <a:t>–   Umbral «menos de 300 ms; si se supera durante 5 minutos, se revisa el indice de la consulta».</a:t>
             </a:r>
           </a:p>
           <a:p>
@@ -6532,7 +6648,7 @@
                 </a:solidFill>
                 <a:latin typeface="Calibri"/>
               </a:rPr>
-              <a:t>–   Latencia merece explicacion aparte porque introduce el percentil, el valor por debajo del cual cae un porcentaje dado de las mediciones: si el p95 de la API es 300 milisegundos</a:t>
+              <a:t>–   Un error comun es un umbral sin numero, como «latencia alta»: no dice cuando actuar.</a:t>
             </a:r>
           </a:p>
           <a:p>
@@ -6548,7 +6664,7 @@
                 </a:solidFill>
                 <a:latin typeface="Calibri"/>
               </a:rPr>
-              <a:t>–   95 de cada 100 peticiones respondieron en 300 milisegundos o menos y 5 tardaron mas.</a:t>
+              <a:t>–   Otro es una senal generica, como «el sistema»: la fila tiene que nombrar una operacion concreta del dominio.</a:t>
             </a:r>
           </a:p>
         </p:txBody>
@@ -6729,7 +6845,7 @@
                 </a:solidFill>
                 <a:latin typeface="Calibri"/>
               </a:rPr>
-              <a:t>Las cuatro senales de oro, con definicion operativa (2/2)</a:t>
+              <a:t>El pipeline del stub de la app, paso por paso (1/2)</a:t>
             </a:r>
           </a:p>
         </p:txBody>
@@ -6768,7 +6884,7 @@
                 </a:solidFill>
                 <a:latin typeface="Calibri"/>
               </a:rPr>
-              <a:t>–   Es mas honesto que el promedio, y el ejemplo lo prueba: 99 peticiones de 50 milisegundos y una de 5 segundos dan un promedio de 99 milisegundos, que parece excelente, mientras el p99 es 5 segundos y corresponde a un usuario mirando una pantalla congelada.</a:t>
+              <a:t>–   Un job corre en ubuntu-latest y hace, en este orden: descargar el codigo con la action de checkout, instalar el runtime con la action de setup del lenguaje</a:t>
             </a:r>
           </a:p>
           <a:p>
@@ -6784,7 +6900,7 @@
                 </a:solidFill>
                 <a:latin typeface="Calibri"/>
               </a:rPr>
-              <a:t>–   En la app de turnos las cuatro senales son: latencia, el p95 del endpoint de reserva; trafico, las reservas por minuto; errores, el porcentaje de respuestas 5xx; saturacion, el uso del pool de conexiones a la base de datos.</a:t>
+              <a:t>–   Un paso Construir que instala dependencias y ejecuta docker build con la imagen etiquetada, un paso Probar que corre las pruebas</a:t>
             </a:r>
           </a:p>
           <a:p>
@@ -6800,7 +6916,23 @@
                 </a:solidFill>
                 <a:latin typeface="Calibri"/>
               </a:rPr>
-              <a:t>–   Un error comun es medir solo la CPU: es una senal de saturacion entre varias, y en una API que espera a la base de datos casi nunca es la primera en agotarse.</a:t>
+              <a:t>–   Y un paso final rotulado como despliegue simulado que imprime la etiqueta de version y publica un artefacto, un archivo que queda guardado junto a la corrida.</a:t>
+            </a:r>
+          </a:p>
+          <a:p>
+            <a:pPr>
+              <a:spcAft>
+                <a:spcPts val="800"/>
+              </a:spcAft>
+            </a:pPr>
+            <a:r>
+              <a:rPr sz="2000" b="0" i="0">
+                <a:solidFill>
+                  <a:srgbClr val="333333"/>
+                </a:solidFill>
+                <a:latin typeface="Calibri"/>
+              </a:rPr>
+              <a:t>–   Que docker build forme parte de la construccion tiene un valor extra: comprueba en cada cambio que el Dockerfile sigue siendo valido, que es una de las cosas que se rompen en silencio.</a:t>
             </a:r>
           </a:p>
         </p:txBody>
@@ -6981,7 +7113,7 @@
                 </a:solidFill>
                 <a:latin typeface="Calibri"/>
               </a:rPr>
-              <a:t>La tabla de senales, con sus tres columnas (1/2)</a:t>
+              <a:t>El pipeline del stub de la app, paso por paso (2/2)</a:t>
             </a:r>
           </a:p>
         </p:txBody>
@@ -7020,7 +7152,7 @@
                 </a:solidFill>
                 <a:latin typeface="Calibri"/>
               </a:rPr>
-              <a:t>–   El plan de monitoreo es una tabla de entre 4 y 6 filas con TRES columnas: «Senal», «Que se mide en MI dominio» y «Umbral u objetivo».</a:t>
+              <a:t>–   Un pipeline sano falla rapido: si la construccion falla, la prueba no se ejecuta, y el autor del cambio recibe el aviso en minutos.</a:t>
             </a:r>
           </a:p>
           <a:p>
@@ -7036,7 +7168,7 @@
                 </a:solidFill>
                 <a:latin typeface="Calibri"/>
               </a:rPr>
-              <a:t>–   La regla que decide la mitad de la nota se dice en una frase: una senal sin umbral NO SUMA, aunque este bien elegida.</a:t>
+              <a:t>–   En GitHub Actions cada paso que termina con un codigo de salida distinto de 0 detiene el job y lo marca en rojo: esa es la condicion de fallo que convierte el workflow en una verificacion real.</a:t>
             </a:r>
           </a:p>
           <a:p>
@@ -7052,39 +7184,7 @@
                 </a:solidFill>
                 <a:latin typeface="Calibri"/>
               </a:rPr>
-              <a:t>–   «el listado de disponibilidad debe responder en menos de 400 milisegundos y si pasa de 800 se revisa» si, porque define cuando hay que actuar.</a:t>
-            </a:r>
-          </a:p>
-          <a:p>
-            <a:pPr>
-              <a:spcAft>
-                <a:spcPts val="800"/>
-              </a:spcAft>
-            </a:pPr>
-            <a:r>
-              <a:rPr sz="2000" b="0" i="0">
-                <a:solidFill>
-                  <a:srgbClr val="333333"/>
-                </a:solidFill>
-                <a:latin typeface="Calibri"/>
-              </a:rPr>
-              <a:t>–   El umbral puede ser discutible, y hay que decir que se acepta discutible: lo que no puede es faltar.</a:t>
-            </a:r>
-          </a:p>
-          <a:p>
-            <a:pPr>
-              <a:spcAft>
-                <a:spcPts val="800"/>
-              </a:spcAft>
-            </a:pPr>
-            <a:r>
-              <a:rPr sz="2000" b="0" i="0">
-                <a:solidFill>
-                  <a:srgbClr val="333333"/>
-                </a:solidFill>
-                <a:latin typeface="Calibri"/>
-              </a:rPr>
-              <a:t>–   La segunda columna tiene que referirse a operaciones del dominio propio, asi que «el sistema» no es una respuesta y «el listado de disponibilidad de canchas» o «el registro de una reserva» si.</a:t>
+              <a:t>–   Un ejemplo de fallo util: alguien cambia la respuesta de /health y no actualiza la prueba; el paso de prueba termina con codigo 1, la corrida queda en rojo y el cambio no se integra hasta corregirlo.</a:t>
             </a:r>
           </a:p>
         </p:txBody>
@@ -7265,7 +7365,7 @@
                 </a:solidFill>
                 <a:latin typeface="Calibri"/>
               </a:rPr>
-              <a:t>La tabla de senales, con sus tres columnas (2/2)</a:t>
+              <a:t>La condicion de fallo: la pregunta que separa un CI de una decoracion verde</a:t>
             </a:r>
           </a:p>
         </p:txBody>
@@ -7304,7 +7404,7 @@
                 </a:solidFill>
                 <a:latin typeface="Calibri"/>
               </a:rPr>
-              <a:t>–   Cada umbral necesita su accion: que se HACE cuando se cruza es lo que convierte una lista de metricas en un plan de operacion.</a:t>
+              <a:t>–   Un ci.yml propio se explica en tres campos.</a:t>
             </a:r>
           </a:p>
           <a:p>
@@ -7320,7 +7420,7 @@
                 </a:solidFill>
                 <a:latin typeface="Calibri"/>
               </a:rPr>
-              <a:t>–   Un ejemplo de fila completa es: Senal «latencia del listado de turnos»</a:t>
+              <a:t>–   Y el tercero, el corazon del asunto: con que condicion el pipeline debe FALLAR.</a:t>
             </a:r>
           </a:p>
           <a:p>
@@ -7336,7 +7436,7 @@
                 </a:solidFill>
                 <a:latin typeface="Calibri"/>
               </a:rPr>
-              <a:t>–   Que se mide «p95 del GET /turnos»</a:t>
+              <a:t>–   Un pipeline que no puede fallar nunca no sirve: un workflow cuyo unico paso imprime un mensaje de exito siempre sale verde, y un check que siempre sale verde no aporta ninguna informacion; es una decoracion.</a:t>
             </a:r>
           </a:p>
           <a:p>
@@ -7352,7 +7452,7 @@
                 </a:solidFill>
                 <a:latin typeface="Calibri"/>
               </a:rPr>
-              <a:t>–   Umbral «menos de 300 ms; si se supera durante 5 minutos, se revisa el indice de la consulta».</a:t>
+              <a:t>–   Los tres campos son: que se construye, que se prueba y que condicion vuelve rojo el pipeline.</a:t>
             </a:r>
           </a:p>
           <a:p>
@@ -7368,23 +7468,7 @@
                 </a:solidFill>
                 <a:latin typeface="Calibri"/>
               </a:rPr>
-              <a:t>–   Un error comun es un umbral sin numero, como «latencia alta»: no dice cuando actuar.</a:t>
-            </a:r>
-          </a:p>
-          <a:p>
-            <a:pPr>
-              <a:spcAft>
-                <a:spcPts val="800"/>
-              </a:spcAft>
-            </a:pPr>
-            <a:r>
-              <a:rPr sz="2000" b="0" i="0">
-                <a:solidFill>
-                  <a:srgbClr val="333333"/>
-                </a:solidFill>
-                <a:latin typeface="Calibri"/>
-              </a:rPr>
-              <a:t>–   Otro es una senal generica, como «el sistema»: la fila tiene que nombrar una operacion concreta del dominio.</a:t>
+              <a:t>–   Un ejemplo de condicion real es: la corrida falla si npm test devuelve un codigo distinto de 0, por ejemplo cuando GET /health no responde 200.</a:t>
             </a:r>
           </a:p>
         </p:txBody>
@@ -7681,7 +7765,7 @@
                 </a:solidFill>
                 <a:latin typeface="Calibri"/>
               </a:rPr>
-              <a:t> Ejemplos resueltos y demo del docente sobre el tema.</a:t>
+              <a:t> Ejemplos resueltos y demostración sobre el tema.</a:t>
             </a:r>
           </a:p>
           <a:p>
@@ -7912,7 +7996,7 @@
                 </a:solidFill>
                 <a:latin typeface="Calibri"/>
               </a:rPr>
-              <a:t>El pipeline del stub de la app, paso por paso (1/2)</a:t>
+              <a:t>Donde se ejecuta de verdad la politica de secretos de la Clase 6</a:t>
             </a:r>
           </a:p>
         </p:txBody>
@@ -7951,7 +8035,7 @@
                 </a:solidFill>
                 <a:latin typeface="Calibri"/>
               </a:rPr>
-              <a:t>–   El ejemplo concreto es el pipeline del stub de la app, que ya existe desde la Clase 3 como Dockerfile y contenedor, y la diapositiva del ci.yml es el molde que se puede copiar.</a:t>
+              <a:t>–   La plataforma enmascara los secretos en el registro de salida, pero enmascarar no es impedir la fuga: si un paso imprime el valor transformado, por ejemplo codificado, sale en claro; la regla es no imprimir secretos nunca.</a:t>
             </a:r>
           </a:p>
           <a:p>
@@ -7967,7 +8051,7 @@
                 </a:solidFill>
                 <a:latin typeface="Calibri"/>
               </a:rPr>
-              <a:t>–   Un job corre en ubuntu-latest y hace, en este orden: descargar el codigo con la action de checkout, instalar el runtime con la action de setup del lenguaje</a:t>
+              <a:t>–   Y por diseno los secretos no se entregan a las corridas disparadas por un pull_request que viene de un fork, para que un extrano no pueda proponer un cambio que los imprima.</a:t>
             </a:r>
           </a:p>
           <a:p>
@@ -7983,23 +8067,7 @@
                 </a:solidFill>
                 <a:latin typeface="Calibri"/>
               </a:rPr>
-              <a:t>–   Un paso Construir que instala dependencias y ejecuta docker build con la imagen etiquetada, un paso Probar que corre las pruebas</a:t>
-            </a:r>
-          </a:p>
-          <a:p>
-            <a:pPr>
-              <a:spcAft>
-                <a:spcPts val="800"/>
-              </a:spcAft>
-            </a:pPr>
-            <a:r>
-              <a:rPr sz="2000" b="0" i="0">
-                <a:solidFill>
-                  <a:srgbClr val="333333"/>
-                </a:solidFill>
-                <a:latin typeface="Calibri"/>
-              </a:rPr>
-              <a:t>–   Y un paso final rotulado como despliegue simulado que imprime la etiqueta de version y publica un artefacto, un archivo que queda guardado junto a la corrida.</a:t>
+              <a:t>–   La consecuencia practica es que la validacion de un cambio externo no puede depender de credenciales, y por eso las pruebas del stub deben correr sin acceso a servicios reales, con valores ficticios o un doble simulado.</a:t>
             </a:r>
           </a:p>
         </p:txBody>
@@ -8180,7 +8248,7 @@
                 </a:solidFill>
                 <a:latin typeface="Calibri"/>
               </a:rPr>
-              <a:t>El pipeline del stub de la app, paso por paso (2/2)</a:t>
+              <a:t>Preguntas frecuentes del grupo</a:t>
             </a:r>
           </a:p>
         </p:txBody>
@@ -8219,7 +8287,7 @@
                 </a:solidFill>
                 <a:latin typeface="Calibri"/>
               </a:rPr>
-              <a:t>–   Que docker build forme parte de la construccion tiene un valor extra: comprueba en cada cambio que el Dockerfile sigue siendo valido, que es una de las cosas que se rompen en silencio.</a:t>
+              <a:t>–   «Mi proyecto no tiene pruebas automatizadas, que pongo en el paso Probar?» Una prueba, aunque sea una: que el proceso arranca y que /health responde 200.</a:t>
             </a:r>
           </a:p>
           <a:p>
@@ -8235,7 +8303,7 @@
                 </a:solidFill>
                 <a:latin typeface="Calibri"/>
               </a:rPr>
-              <a:t>–   Un pipeline sano falla rapido: si la construccion falla, la prueba no se ejecuta, y el autor del cambio recibe el aviso en minutos.</a:t>
+              <a:t>–   «Puedo poner solo metricas numericas?» No sin perder un punto: al menos una senal tiene que ser un registro.</a:t>
             </a:r>
           </a:p>
           <a:p>
@@ -8251,7 +8319,7 @@
                 </a:solidFill>
                 <a:latin typeface="Calibri"/>
               </a:rPr>
-              <a:t>–   En GitHub Actions cada paso que termina con un codigo de salida distinto de 0 detiene el job y lo marca en rojo: esa es la condicion de fallo que convierte el workflow en una verificacion real.</a:t>
+              <a:t>–   La mas facil de justificar es el log de los rechazos de negocio del propio dominio, que ademas es la unica forma de contestar despues por que se rechazo una operacion concreta.</a:t>
             </a:r>
           </a:p>
         </p:txBody>
@@ -8432,21 +8500,141 @@
                 </a:solidFill>
                 <a:latin typeface="Calibri"/>
               </a:rPr>
-              <a:t>La condicion de fallo: la pregunta que separa un CI de una decoracion verde</a:t>
-            </a:r>
-          </a:p>
-        </p:txBody>
-      </p:sp>
-      <p:sp>
-        <p:nvSpPr>
-          <p:cNvPr id="5" name="TextBox 4"/>
+              <a:t>El workflow de CI: el archivo completo</a:t>
+            </a:r>
+          </a:p>
+        </p:txBody>
+      </p:sp>
+      <p:sp>
+        <p:nvSpPr>
+          <p:cNvPr id="5" name="Rounded Rectangle 4"/>
+          <p:cNvSpPr/>
+          <p:nvPr/>
+        </p:nvSpPr>
+        <p:spPr>
+          <a:xfrm>
+            <a:off x="457200" y="1261872"/>
+            <a:ext cx="11277295" cy="5093208"/>
+          </a:xfrm>
+          <a:prstGeom prst="roundRect">
+            <a:avLst>
+              <a:gd name="adj" fmla="val 12000"/>
+            </a:avLst>
+          </a:prstGeom>
+          <a:solidFill>
+            <a:srgbClr val="1E2A38"/>
+          </a:solidFill>
+          <a:ln>
+            <a:noFill/>
+          </a:ln>
+        </p:spPr>
+        <p:style>
+          <a:lnRef idx="1">
+            <a:schemeClr val="accent1"/>
+          </a:lnRef>
+          <a:fillRef idx="3">
+            <a:schemeClr val="accent1"/>
+          </a:fillRef>
+          <a:effectRef idx="2">
+            <a:schemeClr val="accent1"/>
+          </a:effectRef>
+          <a:fontRef idx="minor">
+            <a:schemeClr val="lt1"/>
+          </a:fontRef>
+        </p:style>
+        <p:txBody>
+          <a:bodyPr rtlCol="0" anchor="ctr"/>
+          <a:lstStyle/>
+          <a:p>
+            <a:pPr algn="ctr"/>
+          </a:p>
+        </p:txBody>
+      </p:sp>
+      <p:sp>
+        <p:nvSpPr>
+          <p:cNvPr id="6" name="Rectangle 5"/>
+          <p:cNvSpPr/>
+          <p:nvPr/>
+        </p:nvSpPr>
+        <p:spPr>
+          <a:xfrm>
+            <a:off x="457200" y="1261872"/>
+            <a:ext cx="11277295" cy="320040"/>
+          </a:xfrm>
+          <a:prstGeom prst="rect">
+            <a:avLst/>
+          </a:prstGeom>
+          <a:solidFill>
+            <a:srgbClr val="095292"/>
+          </a:solidFill>
+          <a:ln>
+            <a:noFill/>
+          </a:ln>
+        </p:spPr>
+        <p:style>
+          <a:lnRef idx="1">
+            <a:schemeClr val="accent1"/>
+          </a:lnRef>
+          <a:fillRef idx="3">
+            <a:schemeClr val="accent1"/>
+          </a:fillRef>
+          <a:effectRef idx="2">
+            <a:schemeClr val="accent1"/>
+          </a:effectRef>
+          <a:fontRef idx="minor">
+            <a:schemeClr val="lt1"/>
+          </a:fontRef>
+        </p:style>
+        <p:txBody>
+          <a:bodyPr rtlCol="0" anchor="ctr"/>
+          <a:lstStyle/>
+          <a:p>
+            <a:pPr algn="ctr"/>
+          </a:p>
+        </p:txBody>
+      </p:sp>
+      <p:sp>
+        <p:nvSpPr>
+          <p:cNvPr id="7" name="TextBox 6"/>
           <p:cNvSpPr txBox="1"/>
           <p:nvPr/>
         </p:nvSpPr>
         <p:spPr>
           <a:xfrm>
-            <a:off x="457200" y="1170432"/>
-            <a:ext cx="11277295" cy="5230368"/>
+            <a:off x="685800" y="1307592"/>
+            <a:ext cx="10820095" cy="256032"/>
+          </a:xfrm>
+          <a:prstGeom prst="rect">
+            <a:avLst/>
+          </a:prstGeom>
+          <a:noFill/>
+        </p:spPr>
+        <p:txBody>
+          <a:bodyPr wrap="square" anchor="ctr"/>
+          <a:lstStyle/>
+          <a:p>
+            <a:r>
+              <a:rPr sz="1000" b="1" i="0">
+                <a:solidFill>
+                  <a:srgbClr val="269CCB"/>
+                </a:solidFill>
+                <a:latin typeface="Calibri"/>
+              </a:rPr>
+              <a:t>● ● ●</a:t>
+            </a:r>
+          </a:p>
+        </p:txBody>
+      </p:sp>
+      <p:sp>
+        <p:nvSpPr>
+          <p:cNvPr id="8" name="TextBox 7"/>
+          <p:cNvSpPr txBox="1"/>
+          <p:nvPr/>
+        </p:nvSpPr>
+        <p:spPr>
+          <a:xfrm>
+            <a:off x="777240" y="1719072"/>
+            <a:ext cx="5181447" cy="4453128"/>
           </a:xfrm>
           <a:prstGeom prst="rect">
             <a:avLst/>
@@ -8461,72 +8649,383 @@
           <a:p>
             <a:pPr>
               <a:spcAft>
-                <a:spcPts val="800"/>
-              </a:spcAft>
-            </a:pPr>
-            <a:r>
-              <a:rPr sz="2000" b="0" i="0">
-                <a:solidFill>
-                  <a:srgbClr val="333333"/>
-                </a:solidFill>
-                <a:latin typeface="Calibri"/>
-              </a:rPr>
-              <a:t>–   Un ci.yml propio se explica en tres campos.</a:t>
-            </a:r>
-          </a:p>
-          <a:p>
-            <a:pPr>
-              <a:spcAft>
-                <a:spcPts val="800"/>
-              </a:spcAft>
-            </a:pPr>
-            <a:r>
-              <a:rPr sz="2000" b="0" i="0">
-                <a:solidFill>
-                  <a:srgbClr val="333333"/>
-                </a:solidFill>
-                <a:latin typeface="Calibri"/>
-              </a:rPr>
-              <a:t>–   Y el tercero, el corazon del asunto: con que condicion el pipeline debe FALLAR.</a:t>
-            </a:r>
-          </a:p>
-          <a:p>
-            <a:pPr>
-              <a:spcAft>
-                <a:spcPts val="800"/>
-              </a:spcAft>
-            </a:pPr>
-            <a:r>
-              <a:rPr sz="2000" b="0" i="0">
-                <a:solidFill>
-                  <a:srgbClr val="333333"/>
-                </a:solidFill>
-                <a:latin typeface="Calibri"/>
-              </a:rPr>
-              <a:t>–   Un pipeline que no puede fallar nunca no sirve: un workflow cuyo unico paso imprime un mensaje de exito siempre sale verde, y un check que siempre sale verde no aporta ninguna informacion; es una decoracion.</a:t>
-            </a:r>
-          </a:p>
-          <a:p>
-            <a:pPr>
-              <a:spcAft>
-                <a:spcPts val="800"/>
-              </a:spcAft>
-            </a:pPr>
-            <a:r>
-              <a:rPr sz="2000" b="0" i="0">
-                <a:solidFill>
-                  <a:srgbClr val="333333"/>
-                </a:solidFill>
-                <a:latin typeface="Calibri"/>
-              </a:rPr>
-              <a:t>–   Aqui es donde aparece la pregunta previsible del grupo, y hay que salir a su encuentro: para que escribir pruebas de un stub que casi no hace nada.</a:t>
-            </a:r>
-          </a:p>
-        </p:txBody>
-      </p:sp>
-      <p:sp>
-        <p:nvSpPr>
-          <p:cNvPr id="6" name="TextBox 5"/>
+                <a:spcPts val="400"/>
+              </a:spcAft>
+            </a:pPr>
+            <a:r>
+              <a:rPr sz="1400" b="0" i="0">
+                <a:solidFill>
+                  <a:srgbClr val="FFFFFF"/>
+                </a:solidFill>
+                <a:latin typeface="Calibri"/>
+              </a:rPr>
+              <a:t># .github/workflows/ci.yml</a:t>
+            </a:r>
+          </a:p>
+          <a:p>
+            <a:pPr>
+              <a:spcAft>
+                <a:spcPts val="400"/>
+              </a:spcAft>
+            </a:pPr>
+            <a:r>
+              <a:rPr sz="1400" b="0" i="0">
+                <a:solidFill>
+                  <a:srgbClr val="FFFFFF"/>
+                </a:solidFill>
+                <a:latin typeface="Calibri"/>
+              </a:rPr>
+              <a:t>name: CI</a:t>
+            </a:r>
+          </a:p>
+          <a:p>
+            <a:pPr>
+              <a:spcAft>
+                <a:spcPts val="400"/>
+              </a:spcAft>
+            </a:pPr>
+            <a:r>
+              <a:rPr sz="1400" b="0" i="0">
+                <a:solidFill>
+                  <a:srgbClr val="FFFFFF"/>
+                </a:solidFill>
+                <a:latin typeface="Calibri"/>
+              </a:rPr>
+              <a:t/>
+            </a:r>
+          </a:p>
+          <a:p>
+            <a:pPr>
+              <a:spcAft>
+                <a:spcPts val="400"/>
+              </a:spcAft>
+            </a:pPr>
+            <a:r>
+              <a:rPr sz="1400" b="0" i="0">
+                <a:solidFill>
+                  <a:srgbClr val="FFFFFF"/>
+                </a:solidFill>
+                <a:latin typeface="Calibri"/>
+              </a:rPr>
+              <a:t>on:</a:t>
+            </a:r>
+          </a:p>
+          <a:p>
+            <a:pPr>
+              <a:spcAft>
+                <a:spcPts val="400"/>
+              </a:spcAft>
+            </a:pPr>
+            <a:r>
+              <a:rPr sz="1400" b="0" i="0">
+                <a:solidFill>
+                  <a:srgbClr val="FFFFFF"/>
+                </a:solidFill>
+                <a:latin typeface="Calibri"/>
+              </a:rPr>
+              <a:t>  push:</a:t>
+            </a:r>
+          </a:p>
+          <a:p>
+            <a:pPr>
+              <a:spcAft>
+                <a:spcPts val="400"/>
+              </a:spcAft>
+            </a:pPr>
+            <a:r>
+              <a:rPr sz="1400" b="0" i="0">
+                <a:solidFill>
+                  <a:srgbClr val="FFFFFF"/>
+                </a:solidFill>
+                <a:latin typeface="Calibri"/>
+              </a:rPr>
+              <a:t>    branches: [main]</a:t>
+            </a:r>
+          </a:p>
+          <a:p>
+            <a:pPr>
+              <a:spcAft>
+                <a:spcPts val="400"/>
+              </a:spcAft>
+            </a:pPr>
+            <a:r>
+              <a:rPr sz="1400" b="0" i="0">
+                <a:solidFill>
+                  <a:srgbClr val="FFFFFF"/>
+                </a:solidFill>
+                <a:latin typeface="Calibri"/>
+              </a:rPr>
+              <a:t>  pull_request:</a:t>
+            </a:r>
+          </a:p>
+          <a:p>
+            <a:pPr>
+              <a:spcAft>
+                <a:spcPts val="400"/>
+              </a:spcAft>
+            </a:pPr>
+            <a:r>
+              <a:rPr sz="1400" b="0" i="0">
+                <a:solidFill>
+                  <a:srgbClr val="FFFFFF"/>
+                </a:solidFill>
+                <a:latin typeface="Calibri"/>
+              </a:rPr>
+              <a:t/>
+            </a:r>
+          </a:p>
+          <a:p>
+            <a:pPr>
+              <a:spcAft>
+                <a:spcPts val="400"/>
+              </a:spcAft>
+            </a:pPr>
+            <a:r>
+              <a:rPr sz="1400" b="0" i="0">
+                <a:solidFill>
+                  <a:srgbClr val="FFFFFF"/>
+                </a:solidFill>
+                <a:latin typeface="Calibri"/>
+              </a:rPr>
+              <a:t>jobs:</a:t>
+            </a:r>
+          </a:p>
+          <a:p>
+            <a:pPr>
+              <a:spcAft>
+                <a:spcPts val="400"/>
+              </a:spcAft>
+            </a:pPr>
+            <a:r>
+              <a:rPr sz="1400" b="0" i="0">
+                <a:solidFill>
+                  <a:srgbClr val="FFFFFF"/>
+                </a:solidFill>
+                <a:latin typeface="Calibri"/>
+              </a:rPr>
+              <a:t>  construir-y-probar:</a:t>
+            </a:r>
+          </a:p>
+          <a:p>
+            <a:pPr>
+              <a:spcAft>
+                <a:spcPts val="400"/>
+              </a:spcAft>
+            </a:pPr>
+            <a:r>
+              <a:rPr sz="1400" b="0" i="0">
+                <a:solidFill>
+                  <a:srgbClr val="FFFFFF"/>
+                </a:solidFill>
+                <a:latin typeface="Calibri"/>
+              </a:rPr>
+              <a:t>    runs-on: ubuntu-latest</a:t>
+            </a:r>
+          </a:p>
+        </p:txBody>
+      </p:sp>
+      <p:sp>
+        <p:nvSpPr>
+          <p:cNvPr id="9" name="TextBox 8"/>
+          <p:cNvSpPr txBox="1"/>
+          <p:nvPr/>
+        </p:nvSpPr>
+        <p:spPr>
+          <a:xfrm>
+            <a:off x="6233007" y="1719072"/>
+            <a:ext cx="5181447" cy="4453128"/>
+          </a:xfrm>
+          <a:prstGeom prst="rect">
+            <a:avLst/>
+          </a:prstGeom>
+          <a:noFill/>
+        </p:spPr>
+        <p:txBody>
+          <a:bodyPr wrap="square">
+            <a:spAutoFit/>
+          </a:bodyPr>
+          <a:lstStyle/>
+          <a:p>
+            <a:pPr>
+              <a:spcAft>
+                <a:spcPts val="400"/>
+              </a:spcAft>
+            </a:pPr>
+            <a:r>
+              <a:rPr sz="1400" b="0" i="0">
+                <a:solidFill>
+                  <a:srgbClr val="FFFFFF"/>
+                </a:solidFill>
+                <a:latin typeface="Calibri"/>
+              </a:rPr>
+              <a:t>    steps:</a:t>
+            </a:r>
+          </a:p>
+          <a:p>
+            <a:pPr>
+              <a:spcAft>
+                <a:spcPts val="400"/>
+              </a:spcAft>
+            </a:pPr>
+            <a:r>
+              <a:rPr sz="1400" b="0" i="0">
+                <a:solidFill>
+                  <a:srgbClr val="FFFFFF"/>
+                </a:solidFill>
+                <a:latin typeface="Calibri"/>
+              </a:rPr>
+              <a:t>      - uses: actions/checkout@v4</a:t>
+            </a:r>
+          </a:p>
+          <a:p>
+            <a:pPr>
+              <a:spcAft>
+                <a:spcPts val="400"/>
+              </a:spcAft>
+            </a:pPr>
+            <a:r>
+              <a:rPr sz="1400" b="0" i="0">
+                <a:solidFill>
+                  <a:srgbClr val="FFFFFF"/>
+                </a:solidFill>
+                <a:latin typeface="Calibri"/>
+              </a:rPr>
+              <a:t/>
+            </a:r>
+          </a:p>
+          <a:p>
+            <a:pPr>
+              <a:spcAft>
+                <a:spcPts val="400"/>
+              </a:spcAft>
+            </a:pPr>
+            <a:r>
+              <a:rPr sz="1400" b="0" i="0">
+                <a:solidFill>
+                  <a:srgbClr val="FFFFFF"/>
+                </a:solidFill>
+                <a:latin typeface="Calibri"/>
+              </a:rPr>
+              <a:t>      - uses: actions/setup-node@v4</a:t>
+            </a:r>
+          </a:p>
+          <a:p>
+            <a:pPr>
+              <a:spcAft>
+                <a:spcPts val="400"/>
+              </a:spcAft>
+            </a:pPr>
+            <a:r>
+              <a:rPr sz="1400" b="0" i="0">
+                <a:solidFill>
+                  <a:srgbClr val="FFFFFF"/>
+                </a:solidFill>
+                <a:latin typeface="Calibri"/>
+              </a:rPr>
+              <a:t>        with:</a:t>
+            </a:r>
+          </a:p>
+          <a:p>
+            <a:pPr>
+              <a:spcAft>
+                <a:spcPts val="400"/>
+              </a:spcAft>
+            </a:pPr>
+            <a:r>
+              <a:rPr sz="1400" b="0" i="0">
+                <a:solidFill>
+                  <a:srgbClr val="FFFFFF"/>
+                </a:solidFill>
+                <a:latin typeface="Calibri"/>
+              </a:rPr>
+              <a:t>          node-version: '20'</a:t>
+            </a:r>
+          </a:p>
+          <a:p>
+            <a:pPr>
+              <a:spcAft>
+                <a:spcPts val="400"/>
+              </a:spcAft>
+            </a:pPr>
+            <a:r>
+              <a:rPr sz="1400" b="0" i="0">
+                <a:solidFill>
+                  <a:srgbClr val="FFFFFF"/>
+                </a:solidFill>
+                <a:latin typeface="Calibri"/>
+              </a:rPr>
+              <a:t>          cache: 'npm'</a:t>
+            </a:r>
+          </a:p>
+          <a:p>
+            <a:pPr>
+              <a:spcAft>
+                <a:spcPts val="400"/>
+              </a:spcAft>
+            </a:pPr>
+            <a:r>
+              <a:rPr sz="1400" b="0" i="0">
+                <a:solidFill>
+                  <a:srgbClr val="FFFFFF"/>
+                </a:solidFill>
+                <a:latin typeface="Calibri"/>
+              </a:rPr>
+              <a:t/>
+            </a:r>
+          </a:p>
+          <a:p>
+            <a:pPr>
+              <a:spcAft>
+                <a:spcPts val="400"/>
+              </a:spcAft>
+            </a:pPr>
+            <a:r>
+              <a:rPr sz="1400" b="0" i="0">
+                <a:solidFill>
+                  <a:srgbClr val="FFFFFF"/>
+                </a:solidFill>
+                <a:latin typeface="Calibri"/>
+              </a:rPr>
+              <a:t>      - run: npm ci</a:t>
+            </a:r>
+          </a:p>
+          <a:p>
+            <a:pPr>
+              <a:spcAft>
+                <a:spcPts val="400"/>
+              </a:spcAft>
+            </a:pPr>
+            <a:r>
+              <a:rPr sz="1400" b="0" i="0">
+                <a:solidFill>
+                  <a:srgbClr val="FFFFFF"/>
+                </a:solidFill>
+                <a:latin typeface="Calibri"/>
+              </a:rPr>
+              <a:t>      - run: npm test -- --ci</a:t>
+            </a:r>
+          </a:p>
+          <a:p>
+            <a:pPr>
+              <a:spcAft>
+                <a:spcPts val="400"/>
+              </a:spcAft>
+            </a:pPr>
+            <a:r>
+              <a:rPr sz="1400" b="0" i="0">
+                <a:solidFill>
+                  <a:srgbClr val="FFFFFF"/>
+                </a:solidFill>
+                <a:latin typeface="Calibri"/>
+              </a:rPr>
+              <a:t>      - run: docker build -t turnos-api:${{ github.sha }}.</a:t>
+            </a:r>
+          </a:p>
+        </p:txBody>
+      </p:sp>
+      <p:sp>
+        <p:nvSpPr>
+          <p:cNvPr id="10" name="TextBox 9"/>
           <p:cNvSpPr txBox="1"/>
           <p:nvPr/>
         </p:nvSpPr>
@@ -8700,21 +9199,141 @@
                 </a:solidFill>
                 <a:latin typeface="Calibri"/>
               </a:rPr>
-              <a:t>Donde se ejecuta de verdad la politica de secretos de la Clase 6</a:t>
-            </a:r>
-          </a:p>
-        </p:txBody>
-      </p:sp>
-      <p:sp>
-        <p:nvSpPr>
-          <p:cNvPr id="5" name="TextBox 4"/>
+              <a:t>Secretos en el workflow, y hasta donde llega el pipeline</a:t>
+            </a:r>
+          </a:p>
+        </p:txBody>
+      </p:sp>
+      <p:sp>
+        <p:nvSpPr>
+          <p:cNvPr id="5" name="Rounded Rectangle 4"/>
+          <p:cNvSpPr/>
+          <p:nvPr/>
+        </p:nvSpPr>
+        <p:spPr>
+          <a:xfrm>
+            <a:off x="457200" y="1261872"/>
+            <a:ext cx="11277295" cy="5093208"/>
+          </a:xfrm>
+          <a:prstGeom prst="roundRect">
+            <a:avLst>
+              <a:gd name="adj" fmla="val 12000"/>
+            </a:avLst>
+          </a:prstGeom>
+          <a:solidFill>
+            <a:srgbClr val="1E2A38"/>
+          </a:solidFill>
+          <a:ln>
+            <a:noFill/>
+          </a:ln>
+        </p:spPr>
+        <p:style>
+          <a:lnRef idx="1">
+            <a:schemeClr val="accent1"/>
+          </a:lnRef>
+          <a:fillRef idx="3">
+            <a:schemeClr val="accent1"/>
+          </a:fillRef>
+          <a:effectRef idx="2">
+            <a:schemeClr val="accent1"/>
+          </a:effectRef>
+          <a:fontRef idx="minor">
+            <a:schemeClr val="lt1"/>
+          </a:fontRef>
+        </p:style>
+        <p:txBody>
+          <a:bodyPr rtlCol="0" anchor="ctr"/>
+          <a:lstStyle/>
+          <a:p>
+            <a:pPr algn="ctr"/>
+          </a:p>
+        </p:txBody>
+      </p:sp>
+      <p:sp>
+        <p:nvSpPr>
+          <p:cNvPr id="6" name="Rectangle 5"/>
+          <p:cNvSpPr/>
+          <p:nvPr/>
+        </p:nvSpPr>
+        <p:spPr>
+          <a:xfrm>
+            <a:off x="457200" y="1261872"/>
+            <a:ext cx="11277295" cy="320040"/>
+          </a:xfrm>
+          <a:prstGeom prst="rect">
+            <a:avLst/>
+          </a:prstGeom>
+          <a:solidFill>
+            <a:srgbClr val="095292"/>
+          </a:solidFill>
+          <a:ln>
+            <a:noFill/>
+          </a:ln>
+        </p:spPr>
+        <p:style>
+          <a:lnRef idx="1">
+            <a:schemeClr val="accent1"/>
+          </a:lnRef>
+          <a:fillRef idx="3">
+            <a:schemeClr val="accent1"/>
+          </a:fillRef>
+          <a:effectRef idx="2">
+            <a:schemeClr val="accent1"/>
+          </a:effectRef>
+          <a:fontRef idx="minor">
+            <a:schemeClr val="lt1"/>
+          </a:fontRef>
+        </p:style>
+        <p:txBody>
+          <a:bodyPr rtlCol="0" anchor="ctr"/>
+          <a:lstStyle/>
+          <a:p>
+            <a:pPr algn="ctr"/>
+          </a:p>
+        </p:txBody>
+      </p:sp>
+      <p:sp>
+        <p:nvSpPr>
+          <p:cNvPr id="7" name="TextBox 6"/>
           <p:cNvSpPr txBox="1"/>
           <p:nvPr/>
         </p:nvSpPr>
         <p:spPr>
           <a:xfrm>
-            <a:off x="457200" y="1170432"/>
-            <a:ext cx="11277295" cy="5230368"/>
+            <a:off x="685800" y="1307592"/>
+            <a:ext cx="10820095" cy="256032"/>
+          </a:xfrm>
+          <a:prstGeom prst="rect">
+            <a:avLst/>
+          </a:prstGeom>
+          <a:noFill/>
+        </p:spPr>
+        <p:txBody>
+          <a:bodyPr wrap="square" anchor="ctr"/>
+          <a:lstStyle/>
+          <a:p>
+            <a:r>
+              <a:rPr sz="1000" b="1" i="0">
+                <a:solidFill>
+                  <a:srgbClr val="269CCB"/>
+                </a:solidFill>
+                <a:latin typeface="Calibri"/>
+              </a:rPr>
+              <a:t>● ● ●</a:t>
+            </a:r>
+          </a:p>
+        </p:txBody>
+      </p:sp>
+      <p:sp>
+        <p:nvSpPr>
+          <p:cNvPr id="8" name="TextBox 7"/>
+          <p:cNvSpPr txBox="1"/>
+          <p:nvPr/>
+        </p:nvSpPr>
+        <p:spPr>
+          <a:xfrm>
+            <a:off x="777240" y="1719072"/>
+            <a:ext cx="10637215" cy="4453128"/>
           </a:xfrm>
           <a:prstGeom prst="rect">
             <a:avLst/>
@@ -8729,72 +9348,168 @@
           <a:p>
             <a:pPr>
               <a:spcAft>
-                <a:spcPts val="800"/>
-              </a:spcAft>
-            </a:pPr>
-            <a:r>
-              <a:rPr sz="2000" b="0" i="0">
-                <a:solidFill>
-                  <a:srgbClr val="333333"/>
-                </a:solidFill>
-                <a:latin typeface="Calibri"/>
-              </a:rPr>
-              <a:t>–   El pipeline es tambien donde se ejecuta de verdad la politica de secretos escrita en la Clase 6.</a:t>
-            </a:r>
-          </a:p>
-          <a:p>
-            <a:pPr>
-              <a:spcAft>
-                <a:spcPts val="800"/>
-              </a:spcAft>
-            </a:pPr>
-            <a:r>
-              <a:rPr sz="2000" b="0" i="0">
-                <a:solidFill>
-                  <a:srgbClr val="333333"/>
-                </a:solidFill>
-                <a:latin typeface="Calibri"/>
-              </a:rPr>
-              <a:t>–   La plataforma enmascara los secretos en el registro de salida, pero enmascarar no es impedir la fuga: si un paso imprime el valor transformado, por ejemplo codificado, sale en claro; la regla es no imprimir secretos nunca.</a:t>
-            </a:r>
-          </a:p>
-          <a:p>
-            <a:pPr>
-              <a:spcAft>
-                <a:spcPts val="800"/>
-              </a:spcAft>
-            </a:pPr>
-            <a:r>
-              <a:rPr sz="2000" b="0" i="0">
-                <a:solidFill>
-                  <a:srgbClr val="333333"/>
-                </a:solidFill>
-                <a:latin typeface="Calibri"/>
-              </a:rPr>
-              <a:t>–   Y por diseno los secretos no se entregan a las corridas disparadas por un pull_request que viene de un fork, para que un extrano no pueda proponer un cambio que los imprima.</a:t>
-            </a:r>
-          </a:p>
-          <a:p>
-            <a:pPr>
-              <a:spcAft>
-                <a:spcPts val="800"/>
-              </a:spcAft>
-            </a:pPr>
-            <a:r>
-              <a:rPr sz="2000" b="0" i="0">
-                <a:solidFill>
-                  <a:srgbClr val="333333"/>
-                </a:solidFill>
-                <a:latin typeface="Calibri"/>
-              </a:rPr>
-              <a:t>–   La consecuencia practica es que la validacion de un cambio externo no puede depender de credenciales, y por eso las pruebas del stub deben correr sin acceso a servicios reales, con valores ficticios o un doble simulado.</a:t>
-            </a:r>
-          </a:p>
-        </p:txBody>
-      </p:sp>
-      <p:sp>
-        <p:nvSpPr>
-          <p:cNvPr id="6" name="TextBox 5"/>
+                <a:spcPts val="400"/>
+              </a:spcAft>
+            </a:pPr>
+            <a:r>
+              <a:rPr sz="1400" b="0" i="0">
+                <a:solidFill>
+                  <a:srgbClr val="FFFFFF"/>
+                </a:solidFill>
+                <a:latin typeface="Calibri"/>
+              </a:rPr>
+              <a:t>      - name: Desplegar</a:t>
+            </a:r>
+          </a:p>
+          <a:p>
+            <a:pPr>
+              <a:spcAft>
+                <a:spcPts val="400"/>
+              </a:spcAft>
+            </a:pPr>
+            <a:r>
+              <a:rPr sz="1400" b="0" i="0">
+                <a:solidFill>
+                  <a:srgbClr val="FFFFFF"/>
+                </a:solidFill>
+                <a:latin typeface="Calibri"/>
+              </a:rPr>
+              <a:t>        env:</a:t>
+            </a:r>
+          </a:p>
+          <a:p>
+            <a:pPr>
+              <a:spcAft>
+                <a:spcPts val="400"/>
+              </a:spcAft>
+            </a:pPr>
+            <a:r>
+              <a:rPr sz="1400" b="0" i="0">
+                <a:solidFill>
+                  <a:srgbClr val="FFFFFF"/>
+                </a:solidFill>
+                <a:latin typeface="Calibri"/>
+              </a:rPr>
+              <a:t>          TOKEN: ${{ secrets.DEPLOY_TOKEN }}   # del almacen, nunca en claro</a:t>
+            </a:r>
+          </a:p>
+          <a:p>
+            <a:pPr>
+              <a:spcAft>
+                <a:spcPts val="400"/>
+              </a:spcAft>
+            </a:pPr>
+            <a:r>
+              <a:rPr sz="1400" b="0" i="0">
+                <a:solidFill>
+                  <a:srgbClr val="FFFFFF"/>
+                </a:solidFill>
+                <a:latin typeface="Calibri"/>
+              </a:rPr>
+              <a:t>        run: ./deploy.sh</a:t>
+            </a:r>
+          </a:p>
+          <a:p>
+            <a:pPr>
+              <a:spcAft>
+                <a:spcPts val="400"/>
+              </a:spcAft>
+            </a:pPr>
+            <a:r>
+              <a:rPr sz="1400" b="0" i="0">
+                <a:solidFill>
+                  <a:srgbClr val="FFFFFF"/>
+                </a:solidFill>
+                <a:latin typeface="Calibri"/>
+              </a:rPr>
+              <a:t/>
+            </a:r>
+          </a:p>
+          <a:p>
+            <a:pPr>
+              <a:spcAft>
+                <a:spcPts val="400"/>
+              </a:spcAft>
+            </a:pPr>
+            <a:r>
+              <a:rPr sz="1400" b="0" i="0">
+                <a:solidFill>
+                  <a:srgbClr val="FFFFFF"/>
+                </a:solidFill>
+                <a:latin typeface="Calibri"/>
+              </a:rPr>
+              <a:t># CI  = construir y probar en cada push. Esto SI es realista aqui.</a:t>
+            </a:r>
+          </a:p>
+          <a:p>
+            <a:pPr>
+              <a:spcAft>
+                <a:spcPts val="400"/>
+              </a:spcAft>
+            </a:pPr>
+            <a:r>
+              <a:rPr sz="1400" b="0" i="0">
+                <a:solidFill>
+                  <a:srgbClr val="FFFFFF"/>
+                </a:solidFill>
+                <a:latin typeface="Calibri"/>
+              </a:rPr>
+              <a:t># CD  = desplegar automaticamente a produccion. Necesita un proveedor</a:t>
+            </a:r>
+          </a:p>
+          <a:p>
+            <a:pPr>
+              <a:spcAft>
+                <a:spcPts val="400"/>
+              </a:spcAft>
+            </a:pPr>
+            <a:r>
+              <a:rPr sz="1400" b="0" i="0">
+                <a:solidFill>
+                  <a:srgbClr val="FFFFFF"/>
+                </a:solidFill>
+                <a:latin typeface="Calibri"/>
+              </a:rPr>
+              <a:t>#       con credenciales, asi que se declara como SIMULADO</a:t>
+            </a:r>
+          </a:p>
+          <a:p>
+            <a:pPr>
+              <a:spcAft>
+                <a:spcPts val="400"/>
+              </a:spcAft>
+            </a:pPr>
+            <a:r>
+              <a:rPr sz="1400" b="0" i="0">
+                <a:solidFill>
+                  <a:srgbClr val="FFFFFF"/>
+                </a:solidFill>
+                <a:latin typeface="Calibri"/>
+              </a:rPr>
+              <a:t>#       y el ultimo paso se rotula como tal. Decirlo es honesto;</a:t>
+            </a:r>
+          </a:p>
+          <a:p>
+            <a:pPr>
+              <a:spcAft>
+                <a:spcPts val="400"/>
+              </a:spcAft>
+            </a:pPr>
+            <a:r>
+              <a:rPr sz="1400" b="0" i="0">
+                <a:solidFill>
+                  <a:srgbClr val="FFFFFF"/>
+                </a:solidFill>
+                <a:latin typeface="Calibri"/>
+              </a:rPr>
+              <a:t>#       fingirlo es un error.</a:t>
+            </a:r>
+          </a:p>
+        </p:txBody>
+      </p:sp>
+      <p:sp>
+        <p:nvSpPr>
+          <p:cNvPr id="9" name="TextBox 8"/>
           <p:cNvSpPr txBox="1"/>
           <p:nvPr/>
         </p:nvSpPr>
@@ -8968,21 +9683,141 @@
                 </a:solidFill>
                 <a:latin typeface="Calibri"/>
               </a:rPr>
-              <a:t>Preguntas frecuentes del grupo (1/2)</a:t>
-            </a:r>
-          </a:p>
-        </p:txBody>
-      </p:sp>
-      <p:sp>
-        <p:nvSpPr>
-          <p:cNvPr id="5" name="TextBox 4"/>
+              <a:t>.github/workflows/ci.yml — CI real, no un echo</a:t>
+            </a:r>
+          </a:p>
+        </p:txBody>
+      </p:sp>
+      <p:sp>
+        <p:nvSpPr>
+          <p:cNvPr id="5" name="Rounded Rectangle 4"/>
+          <p:cNvSpPr/>
+          <p:nvPr/>
+        </p:nvSpPr>
+        <p:spPr>
+          <a:xfrm>
+            <a:off x="457200" y="1261872"/>
+            <a:ext cx="11277295" cy="4773168"/>
+          </a:xfrm>
+          <a:prstGeom prst="roundRect">
+            <a:avLst>
+              <a:gd name="adj" fmla="val 12000"/>
+            </a:avLst>
+          </a:prstGeom>
+          <a:solidFill>
+            <a:srgbClr val="1E2A38"/>
+          </a:solidFill>
+          <a:ln>
+            <a:noFill/>
+          </a:ln>
+        </p:spPr>
+        <p:style>
+          <a:lnRef idx="1">
+            <a:schemeClr val="accent1"/>
+          </a:lnRef>
+          <a:fillRef idx="3">
+            <a:schemeClr val="accent1"/>
+          </a:fillRef>
+          <a:effectRef idx="2">
+            <a:schemeClr val="accent1"/>
+          </a:effectRef>
+          <a:fontRef idx="minor">
+            <a:schemeClr val="lt1"/>
+          </a:fontRef>
+        </p:style>
+        <p:txBody>
+          <a:bodyPr rtlCol="0" anchor="ctr"/>
+          <a:lstStyle/>
+          <a:p>
+            <a:pPr algn="ctr"/>
+          </a:p>
+        </p:txBody>
+      </p:sp>
+      <p:sp>
+        <p:nvSpPr>
+          <p:cNvPr id="6" name="Rectangle 5"/>
+          <p:cNvSpPr/>
+          <p:nvPr/>
+        </p:nvSpPr>
+        <p:spPr>
+          <a:xfrm>
+            <a:off x="457200" y="1261872"/>
+            <a:ext cx="11277295" cy="320040"/>
+          </a:xfrm>
+          <a:prstGeom prst="rect">
+            <a:avLst/>
+          </a:prstGeom>
+          <a:solidFill>
+            <a:srgbClr val="095292"/>
+          </a:solidFill>
+          <a:ln>
+            <a:noFill/>
+          </a:ln>
+        </p:spPr>
+        <p:style>
+          <a:lnRef idx="1">
+            <a:schemeClr val="accent1"/>
+          </a:lnRef>
+          <a:fillRef idx="3">
+            <a:schemeClr val="accent1"/>
+          </a:fillRef>
+          <a:effectRef idx="2">
+            <a:schemeClr val="accent1"/>
+          </a:effectRef>
+          <a:fontRef idx="minor">
+            <a:schemeClr val="lt1"/>
+          </a:fontRef>
+        </p:style>
+        <p:txBody>
+          <a:bodyPr rtlCol="0" anchor="ctr"/>
+          <a:lstStyle/>
+          <a:p>
+            <a:pPr algn="ctr"/>
+          </a:p>
+        </p:txBody>
+      </p:sp>
+      <p:sp>
+        <p:nvSpPr>
+          <p:cNvPr id="7" name="TextBox 6"/>
           <p:cNvSpPr txBox="1"/>
           <p:nvPr/>
         </p:nvSpPr>
         <p:spPr>
           <a:xfrm>
-            <a:off x="457200" y="1170432"/>
-            <a:ext cx="11277295" cy="5230368"/>
+            <a:off x="685800" y="1307592"/>
+            <a:ext cx="10820095" cy="256032"/>
+          </a:xfrm>
+          <a:prstGeom prst="rect">
+            <a:avLst/>
+          </a:prstGeom>
+          <a:noFill/>
+        </p:spPr>
+        <p:txBody>
+          <a:bodyPr wrap="square" anchor="ctr"/>
+          <a:lstStyle/>
+          <a:p>
+            <a:r>
+              <a:rPr sz="1000" b="1" i="0">
+                <a:solidFill>
+                  <a:srgbClr val="269CCB"/>
+                </a:solidFill>
+                <a:latin typeface="Calibri"/>
+              </a:rPr>
+              <a:t>● ● ●</a:t>
+            </a:r>
+          </a:p>
+        </p:txBody>
+      </p:sp>
+      <p:sp>
+        <p:nvSpPr>
+          <p:cNvPr id="8" name="TextBox 7"/>
+          <p:cNvSpPr txBox="1"/>
+          <p:nvPr/>
+        </p:nvSpPr>
+        <p:spPr>
+          <a:xfrm>
+            <a:off x="777240" y="1719072"/>
+            <a:ext cx="10637215" cy="4133087"/>
           </a:xfrm>
           <a:prstGeom prst="rect">
             <a:avLst/>
@@ -8997,56 +9832,283 @@
           <a:p>
             <a:pPr>
               <a:spcAft>
-                <a:spcPts val="800"/>
-              </a:spcAft>
-            </a:pPr>
-            <a:r>
-              <a:rPr sz="2000" b="0" i="0">
-                <a:solidFill>
-                  <a:srgbClr val="333333"/>
-                </a:solidFill>
-                <a:latin typeface="Calibri"/>
-              </a:rPr>
-              <a:t>–   Y algo si es real: el chequeo de salud que consulta el balanceador de la Clase 7 ya es monitoreo, y el check de Actions ya es una senal de que el sistema construye.</a:t>
-            </a:r>
-          </a:p>
-          <a:p>
-            <a:pPr>
-              <a:spcAft>
-                <a:spcPts val="800"/>
-              </a:spcAft>
-            </a:pPr>
-            <a:r>
-              <a:rPr sz="2000" b="0" i="0">
-                <a:solidFill>
-                  <a:srgbClr val="333333"/>
-                </a:solidFill>
-                <a:latin typeface="Calibri"/>
-              </a:rPr>
-              <a:t>–   «De donde saco los umbrales si nunca he medido?» De tres fuentes legitimas, y conviene nombrarlas: una convencion del oficio citada como tal, por ejemplo 300 milisegundos de p95 o el 80 por ciento de saturacion</a:t>
-            </a:r>
-          </a:p>
-          <a:p>
-            <a:pPr>
-              <a:spcAft>
-                <a:spcPts val="800"/>
-              </a:spcAft>
-            </a:pPr>
-            <a:r>
-              <a:rPr sz="2000" b="0" i="0">
-                <a:solidFill>
-                  <a:srgbClr val="333333"/>
-                </a:solidFill>
-                <a:latin typeface="Calibri"/>
-              </a:rPr>
-              <a:t>–   Una expectativa del usuario redactada en el dominio, por ejemplo que una reserva no tarde mas de dos segundos; o una aritmetica de servilleta a partir del escenario de carga, que es justamente lo que se formaliza en la Clase 12.</a:t>
-            </a:r>
-          </a:p>
-        </p:txBody>
-      </p:sp>
-      <p:sp>
-        <p:nvSpPr>
-          <p:cNvPr id="6" name="TextBox 5"/>
+                <a:spcPts val="400"/>
+              </a:spcAft>
+            </a:pPr>
+            <a:r>
+              <a:rPr sz="1400" b="0" i="0">
+                <a:solidFill>
+                  <a:srgbClr val="FFFFFF"/>
+                </a:solidFill>
+                <a:latin typeface="Calibri"/>
+              </a:rPr>
+              <a:t>name: CI</a:t>
+            </a:r>
+          </a:p>
+          <a:p>
+            <a:pPr>
+              <a:spcAft>
+                <a:spcPts val="400"/>
+              </a:spcAft>
+            </a:pPr>
+            <a:r>
+              <a:rPr sz="1400" b="0" i="0">
+                <a:solidFill>
+                  <a:srgbClr val="FFFFFF"/>
+                </a:solidFill>
+                <a:latin typeface="Calibri"/>
+              </a:rPr>
+              <a:t>on: [push, pull_request]          # 1. disparadores</a:t>
+            </a:r>
+          </a:p>
+          <a:p>
+            <a:pPr>
+              <a:spcAft>
+                <a:spcPts val="400"/>
+              </a:spcAft>
+            </a:pPr>
+            <a:r>
+              <a:rPr sz="1400" b="0" i="0">
+                <a:solidFill>
+                  <a:srgbClr val="FFFFFF"/>
+                </a:solidFill>
+                <a:latin typeface="Calibri"/>
+              </a:rPr>
+              <a:t>jobs:</a:t>
+            </a:r>
+          </a:p>
+          <a:p>
+            <a:pPr>
+              <a:spcAft>
+                <a:spcPts val="400"/>
+              </a:spcAft>
+            </a:pPr>
+            <a:r>
+              <a:rPr sz="1400" b="0" i="0">
+                <a:solidFill>
+                  <a:srgbClr val="FFFFFF"/>
+                </a:solidFill>
+                <a:latin typeface="Calibri"/>
+              </a:rPr>
+              <a:t>  build:</a:t>
+            </a:r>
+          </a:p>
+          <a:p>
+            <a:pPr>
+              <a:spcAft>
+                <a:spcPts val="400"/>
+              </a:spcAft>
+            </a:pPr>
+            <a:r>
+              <a:rPr sz="1400" b="0" i="0">
+                <a:solidFill>
+                  <a:srgbClr val="FFFFFF"/>
+                </a:solidFill>
+                <a:latin typeface="Calibri"/>
+              </a:rPr>
+              <a:t>    runs-on: ubuntu-latest        # 2. entorno de ejecucion</a:t>
+            </a:r>
+          </a:p>
+          <a:p>
+            <a:pPr>
+              <a:spcAft>
+                <a:spcPts val="400"/>
+              </a:spcAft>
+            </a:pPr>
+            <a:r>
+              <a:rPr sz="1400" b="0" i="0">
+                <a:solidFill>
+                  <a:srgbClr val="FFFFFF"/>
+                </a:solidFill>
+                <a:latin typeface="Calibri"/>
+              </a:rPr>
+              <a:t>    steps:</a:t>
+            </a:r>
+          </a:p>
+          <a:p>
+            <a:pPr>
+              <a:spcAft>
+                <a:spcPts val="400"/>
+              </a:spcAft>
+            </a:pPr>
+            <a:r>
+              <a:rPr sz="1400" b="0" i="0">
+                <a:solidFill>
+                  <a:srgbClr val="FFFFFF"/>
+                </a:solidFill>
+                <a:latin typeface="Calibri"/>
+              </a:rPr>
+              <a:t>      - uses: actions/checkout@v4</a:t>
+            </a:r>
+          </a:p>
+          <a:p>
+            <a:pPr>
+              <a:spcAft>
+                <a:spcPts val="400"/>
+              </a:spcAft>
+            </a:pPr>
+            <a:r>
+              <a:rPr sz="1400" b="0" i="0">
+                <a:solidFill>
+                  <a:srgbClr val="FFFFFF"/>
+                </a:solidFill>
+                <a:latin typeface="Calibri"/>
+              </a:rPr>
+              <a:t>      - uses: actions/setup-node@v4</a:t>
+            </a:r>
+          </a:p>
+          <a:p>
+            <a:pPr>
+              <a:spcAft>
+                <a:spcPts val="400"/>
+              </a:spcAft>
+            </a:pPr>
+            <a:r>
+              <a:rPr sz="1400" b="0" i="0">
+                <a:solidFill>
+                  <a:srgbClr val="FFFFFF"/>
+                </a:solidFill>
+                <a:latin typeface="Calibri"/>
+              </a:rPr>
+              <a:t>        with: { node-version: '20' }</a:t>
+            </a:r>
+          </a:p>
+          <a:p>
+            <a:pPr>
+              <a:spcAft>
+                <a:spcPts val="400"/>
+              </a:spcAft>
+            </a:pPr>
+            <a:r>
+              <a:rPr sz="1400" b="0" i="0">
+                <a:solidFill>
+                  <a:srgbClr val="FFFFFF"/>
+                </a:solidFill>
+                <a:latin typeface="Calibri"/>
+              </a:rPr>
+              <a:t>      - name: Construir</a:t>
+            </a:r>
+          </a:p>
+          <a:p>
+            <a:pPr>
+              <a:spcAft>
+                <a:spcPts val="400"/>
+              </a:spcAft>
+            </a:pPr>
+            <a:r>
+              <a:rPr sz="1400" b="0" i="0">
+                <a:solidFill>
+                  <a:srgbClr val="FFFFFF"/>
+                </a:solidFill>
+                <a:latin typeface="Calibri"/>
+              </a:rPr>
+              <a:t>        run: npm ci &amp;&amp; docker build -t turnos-api:0.1.0.</a:t>
+            </a:r>
+          </a:p>
+          <a:p>
+            <a:pPr>
+              <a:spcAft>
+                <a:spcPts val="400"/>
+              </a:spcAft>
+            </a:pPr>
+            <a:r>
+              <a:rPr sz="1400" b="0" i="0">
+                <a:solidFill>
+                  <a:srgbClr val="FFFFFF"/>
+                </a:solidFill>
+                <a:latin typeface="Calibri"/>
+              </a:rPr>
+              <a:t>      - name: Probar</a:t>
+            </a:r>
+          </a:p>
+          <a:p>
+            <a:pPr>
+              <a:spcAft>
+                <a:spcPts val="400"/>
+              </a:spcAft>
+            </a:pPr>
+            <a:r>
+              <a:rPr sz="1400" b="0" i="0">
+                <a:solidFill>
+                  <a:srgbClr val="FFFFFF"/>
+                </a:solidFill>
+                <a:latin typeface="Calibri"/>
+              </a:rPr>
+              <a:t>        run: npm test              # &lt;- si esto no puede fallar, no es CI</a:t>
+            </a:r>
+          </a:p>
+          <a:p>
+            <a:pPr>
+              <a:spcAft>
+                <a:spcPts val="400"/>
+              </a:spcAft>
+            </a:pPr>
+            <a:r>
+              <a:rPr sz="1400" b="0" i="0">
+                <a:solidFill>
+                  <a:srgbClr val="FFFFFF"/>
+                </a:solidFill>
+                <a:latin typeface="Calibri"/>
+              </a:rPr>
+              <a:t>      - name: Despliegue SIMULADO (no despliega a ningun servidor)</a:t>
+            </a:r>
+          </a:p>
+          <a:p>
+            <a:pPr>
+              <a:spcAft>
+                <a:spcPts val="400"/>
+              </a:spcAft>
+            </a:pPr>
+            <a:r>
+              <a:rPr sz="1400" b="0" i="0">
+                <a:solidFill>
+                  <a:srgbClr val="FFFFFF"/>
+                </a:solidFill>
+                <a:latin typeface="Calibri"/>
+              </a:rPr>
+              <a:t>        run: echo "Artefacto turnos-api:0.1.0 listo para desplegar"</a:t>
+            </a:r>
+          </a:p>
+        </p:txBody>
+      </p:sp>
+      <p:sp>
+        <p:nvSpPr>
+          <p:cNvPr id="9" name="TextBox 8"/>
+          <p:cNvSpPr txBox="1"/>
+          <p:nvPr/>
+        </p:nvSpPr>
+        <p:spPr>
+          <a:xfrm>
+            <a:off x="457200" y="6080760"/>
+            <a:ext cx="11277295" cy="320040"/>
+          </a:xfrm>
+          <a:prstGeom prst="rect">
+            <a:avLst/>
+          </a:prstGeom>
+          <a:noFill/>
+        </p:spPr>
+        <p:txBody>
+          <a:bodyPr wrap="square">
+            <a:spAutoFit/>
+          </a:bodyPr>
+          <a:lstStyle/>
+          <a:p>
+            <a:pPr algn="ctr"/>
+            <a:r>
+              <a:rPr sz="1200" b="0" i="1">
+                <a:solidFill>
+                  <a:srgbClr val="666666"/>
+                </a:solidFill>
+                <a:latin typeface="Calibri"/>
+              </a:rPr>
+              <a:t>Los tres pasos, en orden, y el ultimo rotulado como simulado. Secretos con ${{ secrets.NOMBRE }}, NUNCA en claro dentro del YAML.</a:t>
+            </a:r>
+          </a:p>
+        </p:txBody>
+      </p:sp>
+      <p:sp>
+        <p:nvSpPr>
+          <p:cNvPr id="10" name="TextBox 9"/>
           <p:cNvSpPr txBox="1"/>
           <p:nvPr/>
         </p:nvSpPr>
@@ -9114,2040 +10176,6 @@
         <p:spPr>
           <a:xfrm>
             <a:off x="0" y="0"/>
-            <a:ext cx="12191695" cy="960120"/>
-          </a:xfrm>
-          <a:prstGeom prst="rect">
-            <a:avLst/>
-          </a:prstGeom>
-          <a:solidFill>
-            <a:srgbClr val="095292"/>
-          </a:solidFill>
-          <a:ln>
-            <a:noFill/>
-          </a:ln>
-        </p:spPr>
-        <p:style>
-          <a:lnRef idx="1">
-            <a:schemeClr val="accent1"/>
-          </a:lnRef>
-          <a:fillRef idx="3">
-            <a:schemeClr val="accent1"/>
-          </a:fillRef>
-          <a:effectRef idx="2">
-            <a:schemeClr val="accent1"/>
-          </a:effectRef>
-          <a:fontRef idx="minor">
-            <a:schemeClr val="lt1"/>
-          </a:fontRef>
-        </p:style>
-        <p:txBody>
-          <a:bodyPr rtlCol="0" anchor="ctr"/>
-          <a:lstStyle/>
-          <a:p>
-            <a:pPr algn="ctr"/>
-          </a:p>
-        </p:txBody>
-      </p:sp>
-      <p:sp>
-        <p:nvSpPr>
-          <p:cNvPr id="3" name="Rectangle 2"/>
-          <p:cNvSpPr/>
-          <p:nvPr/>
-        </p:nvSpPr>
-        <p:spPr>
-          <a:xfrm>
-            <a:off x="0" y="960120"/>
-            <a:ext cx="12191695" cy="41148"/>
-          </a:xfrm>
-          <a:prstGeom prst="rect">
-            <a:avLst/>
-          </a:prstGeom>
-          <a:solidFill>
-            <a:srgbClr val="FFD000"/>
-          </a:solidFill>
-          <a:ln>
-            <a:noFill/>
-          </a:ln>
-        </p:spPr>
-        <p:style>
-          <a:lnRef idx="1">
-            <a:schemeClr val="accent1"/>
-          </a:lnRef>
-          <a:fillRef idx="3">
-            <a:schemeClr val="accent1"/>
-          </a:fillRef>
-          <a:effectRef idx="2">
-            <a:schemeClr val="accent1"/>
-          </a:effectRef>
-          <a:fontRef idx="minor">
-            <a:schemeClr val="lt1"/>
-          </a:fontRef>
-        </p:style>
-        <p:txBody>
-          <a:bodyPr rtlCol="0" anchor="ctr"/>
-          <a:lstStyle/>
-          <a:p>
-            <a:pPr algn="ctr"/>
-          </a:p>
-        </p:txBody>
-      </p:sp>
-      <p:sp>
-        <p:nvSpPr>
-          <p:cNvPr id="4" name="TextBox 3"/>
-          <p:cNvSpPr txBox="1"/>
-          <p:nvPr/>
-        </p:nvSpPr>
-        <p:spPr>
-          <a:xfrm>
-            <a:off x="457200" y="164592"/>
-            <a:ext cx="11277295" cy="502920"/>
-          </a:xfrm>
-          <a:prstGeom prst="rect">
-            <a:avLst/>
-          </a:prstGeom>
-          <a:noFill/>
-        </p:spPr>
-        <p:txBody>
-          <a:bodyPr wrap="square">
-            <a:spAutoFit/>
-          </a:bodyPr>
-          <a:lstStyle/>
-          <a:p>
-            <a:r>
-              <a:rPr sz="2600" b="1" i="0">
-                <a:solidFill>
-                  <a:srgbClr val="FFFFFF"/>
-                </a:solidFill>
-                <a:latin typeface="Calibri"/>
-              </a:rPr>
-              <a:t>Preguntas frecuentes del grupo (2/2)</a:t>
-            </a:r>
-          </a:p>
-        </p:txBody>
-      </p:sp>
-      <p:sp>
-        <p:nvSpPr>
-          <p:cNvPr id="5" name="TextBox 4"/>
-          <p:cNvSpPr txBox="1"/>
-          <p:nvPr/>
-        </p:nvSpPr>
-        <p:spPr>
-          <a:xfrm>
-            <a:off x="457200" y="1170432"/>
-            <a:ext cx="11277295" cy="5230368"/>
-          </a:xfrm>
-          <a:prstGeom prst="rect">
-            <a:avLst/>
-          </a:prstGeom>
-          <a:noFill/>
-        </p:spPr>
-        <p:txBody>
-          <a:bodyPr wrap="square">
-            <a:spAutoFit/>
-          </a:bodyPr>
-          <a:lstStyle/>
-          <a:p>
-            <a:pPr>
-              <a:spcAft>
-                <a:spcPts val="800"/>
-              </a:spcAft>
-            </a:pPr>
-            <a:r>
-              <a:rPr sz="2000" b="0" i="0">
-                <a:solidFill>
-                  <a:srgbClr val="333333"/>
-                </a:solidFill>
-                <a:latin typeface="Calibri"/>
-              </a:rPr>
-              <a:t>–   «Mi proyecto no tiene pruebas automatizadas, que pongo en el paso Probar?» Una prueba, aunque sea una: que el proceso arranca y que /health responde 200.</a:t>
-            </a:r>
-          </a:p>
-          <a:p>
-            <a:pPr>
-              <a:spcAft>
-                <a:spcPts val="800"/>
-              </a:spcAft>
-            </a:pPr>
-            <a:r>
-              <a:rPr sz="2000" b="0" i="0">
-                <a:solidFill>
-                  <a:srgbClr val="333333"/>
-                </a:solidFill>
-                <a:latin typeface="Calibri"/>
-              </a:rPr>
-              <a:t>–   «Puedo poner solo metricas numericas?» No sin perder un punto: al menos una senal tiene que ser un registro.</a:t>
-            </a:r>
-          </a:p>
-          <a:p>
-            <a:pPr>
-              <a:spcAft>
-                <a:spcPts val="800"/>
-              </a:spcAft>
-            </a:pPr>
-            <a:r>
-              <a:rPr sz="2000" b="0" i="0">
-                <a:solidFill>
-                  <a:srgbClr val="333333"/>
-                </a:solidFill>
-                <a:latin typeface="Calibri"/>
-              </a:rPr>
-              <a:t>–   La mas facil de justificar es el log de los rechazos de negocio del propio dominio, que ademas es la unica forma de contestar despues por que se rechazo una operacion concreta.</a:t>
-            </a:r>
-          </a:p>
-        </p:txBody>
-      </p:sp>
-      <p:sp>
-        <p:nvSpPr>
-          <p:cNvPr id="6" name="TextBox 5"/>
-          <p:cNvSpPr txBox="1"/>
-          <p:nvPr/>
-        </p:nvSpPr>
-        <p:spPr>
-          <a:xfrm>
-            <a:off x="11185855" y="6473952"/>
-            <a:ext cx="640080" cy="274320"/>
-          </a:xfrm>
-          <a:prstGeom prst="rect">
-            <a:avLst/>
-          </a:prstGeom>
-          <a:noFill/>
-        </p:spPr>
-        <p:txBody>
-          <a:bodyPr wrap="square">
-            <a:spAutoFit/>
-          </a:bodyPr>
-          <a:lstStyle/>
-          <a:p>
-            <a:pPr algn="r"/>
-            <a:r>
-              <a:rPr sz="1100" b="0" i="0">
-                <a:solidFill>
-                  <a:srgbClr val="666666"/>
-                </a:solidFill>
-                <a:latin typeface="Calibri"/>
-              </a:rPr>
-              <a:t>25</a:t>
-            </a:r>
-          </a:p>
-        </p:txBody>
-      </p:sp>
-    </p:spTree>
-  </p:cSld>
-  <p:clrMapOvr>
-    <a:masterClrMapping/>
-  </p:clrMapOvr>
-</p:sld>
-</file>
-
-<file path=ppt/slides/slide26.xml><?xml version="1.0" encoding="utf-8"?>
-<p:sld xmlns:a="http://schemas.openxmlformats.org/drawingml/2006/main" xmlns:p="http://schemas.openxmlformats.org/presentationml/2006/main" xmlns:r="http://schemas.openxmlformats.org/officeDocument/2006/relationships">
-  <p:cSld>
-    <p:bg>
-      <p:bgPr>
-        <a:solidFill>
-          <a:srgbClr val="FFFFFF"/>
-        </a:solidFill>
-        <a:effectLst/>
-      </p:bgPr>
-    </p:bg>
-    <p:spTree>
-      <p:nvGrpSpPr>
-        <p:cNvPr id="1" name=""/>
-        <p:cNvGrpSpPr/>
-        <p:nvPr/>
-      </p:nvGrpSpPr>
-      <p:grpSpPr/>
-      <p:sp>
-        <p:nvSpPr>
-          <p:cNvPr id="2" name="Rectangle 1"/>
-          <p:cNvSpPr/>
-          <p:nvPr/>
-        </p:nvSpPr>
-        <p:spPr>
-          <a:xfrm>
-            <a:off x="0" y="0"/>
-            <a:ext cx="12191695" cy="960120"/>
-          </a:xfrm>
-          <a:prstGeom prst="rect">
-            <a:avLst/>
-          </a:prstGeom>
-          <a:solidFill>
-            <a:srgbClr val="095292"/>
-          </a:solidFill>
-          <a:ln>
-            <a:noFill/>
-          </a:ln>
-        </p:spPr>
-        <p:style>
-          <a:lnRef idx="1">
-            <a:schemeClr val="accent1"/>
-          </a:lnRef>
-          <a:fillRef idx="3">
-            <a:schemeClr val="accent1"/>
-          </a:fillRef>
-          <a:effectRef idx="2">
-            <a:schemeClr val="accent1"/>
-          </a:effectRef>
-          <a:fontRef idx="minor">
-            <a:schemeClr val="lt1"/>
-          </a:fontRef>
-        </p:style>
-        <p:txBody>
-          <a:bodyPr rtlCol="0" anchor="ctr"/>
-          <a:lstStyle/>
-          <a:p>
-            <a:pPr algn="ctr"/>
-          </a:p>
-        </p:txBody>
-      </p:sp>
-      <p:sp>
-        <p:nvSpPr>
-          <p:cNvPr id="3" name="Rectangle 2"/>
-          <p:cNvSpPr/>
-          <p:nvPr/>
-        </p:nvSpPr>
-        <p:spPr>
-          <a:xfrm>
-            <a:off x="0" y="960120"/>
-            <a:ext cx="12191695" cy="41148"/>
-          </a:xfrm>
-          <a:prstGeom prst="rect">
-            <a:avLst/>
-          </a:prstGeom>
-          <a:solidFill>
-            <a:srgbClr val="FFD000"/>
-          </a:solidFill>
-          <a:ln>
-            <a:noFill/>
-          </a:ln>
-        </p:spPr>
-        <p:style>
-          <a:lnRef idx="1">
-            <a:schemeClr val="accent1"/>
-          </a:lnRef>
-          <a:fillRef idx="3">
-            <a:schemeClr val="accent1"/>
-          </a:fillRef>
-          <a:effectRef idx="2">
-            <a:schemeClr val="accent1"/>
-          </a:effectRef>
-          <a:fontRef idx="minor">
-            <a:schemeClr val="lt1"/>
-          </a:fontRef>
-        </p:style>
-        <p:txBody>
-          <a:bodyPr rtlCol="0" anchor="ctr"/>
-          <a:lstStyle/>
-          <a:p>
-            <a:pPr algn="ctr"/>
-          </a:p>
-        </p:txBody>
-      </p:sp>
-      <p:sp>
-        <p:nvSpPr>
-          <p:cNvPr id="4" name="TextBox 3"/>
-          <p:cNvSpPr txBox="1"/>
-          <p:nvPr/>
-        </p:nvSpPr>
-        <p:spPr>
-          <a:xfrm>
-            <a:off x="457200" y="164592"/>
-            <a:ext cx="11277295" cy="502920"/>
-          </a:xfrm>
-          <a:prstGeom prst="rect">
-            <a:avLst/>
-          </a:prstGeom>
-          <a:noFill/>
-        </p:spPr>
-        <p:txBody>
-          <a:bodyPr wrap="square">
-            <a:spAutoFit/>
-          </a:bodyPr>
-          <a:lstStyle/>
-          <a:p>
-            <a:r>
-              <a:rPr sz="2600" b="1" i="0">
-                <a:solidFill>
-                  <a:srgbClr val="FFFFFF"/>
-                </a:solidFill>
-                <a:latin typeface="Calibri"/>
-              </a:rPr>
-              <a:t>El workflow de CI: el archivo completo</a:t>
-            </a:r>
-          </a:p>
-        </p:txBody>
-      </p:sp>
-      <p:sp>
-        <p:nvSpPr>
-          <p:cNvPr id="5" name="Rounded Rectangle 4"/>
-          <p:cNvSpPr/>
-          <p:nvPr/>
-        </p:nvSpPr>
-        <p:spPr>
-          <a:xfrm>
-            <a:off x="457200" y="1261872"/>
-            <a:ext cx="11277295" cy="5093208"/>
-          </a:xfrm>
-          <a:prstGeom prst="roundRect">
-            <a:avLst>
-              <a:gd name="adj" fmla="val 12000"/>
-            </a:avLst>
-          </a:prstGeom>
-          <a:solidFill>
-            <a:srgbClr val="1E2A38"/>
-          </a:solidFill>
-          <a:ln>
-            <a:noFill/>
-          </a:ln>
-        </p:spPr>
-        <p:style>
-          <a:lnRef idx="1">
-            <a:schemeClr val="accent1"/>
-          </a:lnRef>
-          <a:fillRef idx="3">
-            <a:schemeClr val="accent1"/>
-          </a:fillRef>
-          <a:effectRef idx="2">
-            <a:schemeClr val="accent1"/>
-          </a:effectRef>
-          <a:fontRef idx="minor">
-            <a:schemeClr val="lt1"/>
-          </a:fontRef>
-        </p:style>
-        <p:txBody>
-          <a:bodyPr rtlCol="0" anchor="ctr"/>
-          <a:lstStyle/>
-          <a:p>
-            <a:pPr algn="ctr"/>
-          </a:p>
-        </p:txBody>
-      </p:sp>
-      <p:sp>
-        <p:nvSpPr>
-          <p:cNvPr id="6" name="Rectangle 5"/>
-          <p:cNvSpPr/>
-          <p:nvPr/>
-        </p:nvSpPr>
-        <p:spPr>
-          <a:xfrm>
-            <a:off x="457200" y="1261872"/>
-            <a:ext cx="11277295" cy="320040"/>
-          </a:xfrm>
-          <a:prstGeom prst="rect">
-            <a:avLst/>
-          </a:prstGeom>
-          <a:solidFill>
-            <a:srgbClr val="095292"/>
-          </a:solidFill>
-          <a:ln>
-            <a:noFill/>
-          </a:ln>
-        </p:spPr>
-        <p:style>
-          <a:lnRef idx="1">
-            <a:schemeClr val="accent1"/>
-          </a:lnRef>
-          <a:fillRef idx="3">
-            <a:schemeClr val="accent1"/>
-          </a:fillRef>
-          <a:effectRef idx="2">
-            <a:schemeClr val="accent1"/>
-          </a:effectRef>
-          <a:fontRef idx="minor">
-            <a:schemeClr val="lt1"/>
-          </a:fontRef>
-        </p:style>
-        <p:txBody>
-          <a:bodyPr rtlCol="0" anchor="ctr"/>
-          <a:lstStyle/>
-          <a:p>
-            <a:pPr algn="ctr"/>
-          </a:p>
-        </p:txBody>
-      </p:sp>
-      <p:sp>
-        <p:nvSpPr>
-          <p:cNvPr id="7" name="TextBox 6"/>
-          <p:cNvSpPr txBox="1"/>
-          <p:nvPr/>
-        </p:nvSpPr>
-        <p:spPr>
-          <a:xfrm>
-            <a:off x="685800" y="1307592"/>
-            <a:ext cx="10820095" cy="256032"/>
-          </a:xfrm>
-          <a:prstGeom prst="rect">
-            <a:avLst/>
-          </a:prstGeom>
-          <a:noFill/>
-        </p:spPr>
-        <p:txBody>
-          <a:bodyPr wrap="square" anchor="ctr"/>
-          <a:lstStyle/>
-          <a:p>
-            <a:r>
-              <a:rPr sz="1000" b="1" i="0">
-                <a:solidFill>
-                  <a:srgbClr val="269CCB"/>
-                </a:solidFill>
-                <a:latin typeface="Calibri"/>
-              </a:rPr>
-              <a:t>● ● ●</a:t>
-            </a:r>
-          </a:p>
-        </p:txBody>
-      </p:sp>
-      <p:sp>
-        <p:nvSpPr>
-          <p:cNvPr id="8" name="TextBox 7"/>
-          <p:cNvSpPr txBox="1"/>
-          <p:nvPr/>
-        </p:nvSpPr>
-        <p:spPr>
-          <a:xfrm>
-            <a:off x="777240" y="1719072"/>
-            <a:ext cx="5181447" cy="4453128"/>
-          </a:xfrm>
-          <a:prstGeom prst="rect">
-            <a:avLst/>
-          </a:prstGeom>
-          <a:noFill/>
-        </p:spPr>
-        <p:txBody>
-          <a:bodyPr wrap="square">
-            <a:spAutoFit/>
-          </a:bodyPr>
-          <a:lstStyle/>
-          <a:p>
-            <a:pPr>
-              <a:spcAft>
-                <a:spcPts val="400"/>
-              </a:spcAft>
-            </a:pPr>
-            <a:r>
-              <a:rPr sz="1400" b="0" i="0">
-                <a:solidFill>
-                  <a:srgbClr val="FFFFFF"/>
-                </a:solidFill>
-                <a:latin typeface="Calibri"/>
-              </a:rPr>
-              <a:t># .github/workflows/ci.yml</a:t>
-            </a:r>
-          </a:p>
-          <a:p>
-            <a:pPr>
-              <a:spcAft>
-                <a:spcPts val="400"/>
-              </a:spcAft>
-            </a:pPr>
-            <a:r>
-              <a:rPr sz="1400" b="0" i="0">
-                <a:solidFill>
-                  <a:srgbClr val="FFFFFF"/>
-                </a:solidFill>
-                <a:latin typeface="Calibri"/>
-              </a:rPr>
-              <a:t>name: CI</a:t>
-            </a:r>
-          </a:p>
-          <a:p>
-            <a:pPr>
-              <a:spcAft>
-                <a:spcPts val="400"/>
-              </a:spcAft>
-            </a:pPr>
-            <a:r>
-              <a:rPr sz="1400" b="0" i="0">
-                <a:solidFill>
-                  <a:srgbClr val="FFFFFF"/>
-                </a:solidFill>
-                <a:latin typeface="Calibri"/>
-              </a:rPr>
-              <a:t/>
-            </a:r>
-          </a:p>
-          <a:p>
-            <a:pPr>
-              <a:spcAft>
-                <a:spcPts val="400"/>
-              </a:spcAft>
-            </a:pPr>
-            <a:r>
-              <a:rPr sz="1400" b="0" i="0">
-                <a:solidFill>
-                  <a:srgbClr val="FFFFFF"/>
-                </a:solidFill>
-                <a:latin typeface="Calibri"/>
-              </a:rPr>
-              <a:t>on:</a:t>
-            </a:r>
-          </a:p>
-          <a:p>
-            <a:pPr>
-              <a:spcAft>
-                <a:spcPts val="400"/>
-              </a:spcAft>
-            </a:pPr>
-            <a:r>
-              <a:rPr sz="1400" b="0" i="0">
-                <a:solidFill>
-                  <a:srgbClr val="FFFFFF"/>
-                </a:solidFill>
-                <a:latin typeface="Calibri"/>
-              </a:rPr>
-              <a:t>  push:</a:t>
-            </a:r>
-          </a:p>
-          <a:p>
-            <a:pPr>
-              <a:spcAft>
-                <a:spcPts val="400"/>
-              </a:spcAft>
-            </a:pPr>
-            <a:r>
-              <a:rPr sz="1400" b="0" i="0">
-                <a:solidFill>
-                  <a:srgbClr val="FFFFFF"/>
-                </a:solidFill>
-                <a:latin typeface="Calibri"/>
-              </a:rPr>
-              <a:t>    branches: [main]</a:t>
-            </a:r>
-          </a:p>
-          <a:p>
-            <a:pPr>
-              <a:spcAft>
-                <a:spcPts val="400"/>
-              </a:spcAft>
-            </a:pPr>
-            <a:r>
-              <a:rPr sz="1400" b="0" i="0">
-                <a:solidFill>
-                  <a:srgbClr val="FFFFFF"/>
-                </a:solidFill>
-                <a:latin typeface="Calibri"/>
-              </a:rPr>
-              <a:t>  pull_request:</a:t>
-            </a:r>
-          </a:p>
-          <a:p>
-            <a:pPr>
-              <a:spcAft>
-                <a:spcPts val="400"/>
-              </a:spcAft>
-            </a:pPr>
-            <a:r>
-              <a:rPr sz="1400" b="0" i="0">
-                <a:solidFill>
-                  <a:srgbClr val="FFFFFF"/>
-                </a:solidFill>
-                <a:latin typeface="Calibri"/>
-              </a:rPr>
-              <a:t/>
-            </a:r>
-          </a:p>
-          <a:p>
-            <a:pPr>
-              <a:spcAft>
-                <a:spcPts val="400"/>
-              </a:spcAft>
-            </a:pPr>
-            <a:r>
-              <a:rPr sz="1400" b="0" i="0">
-                <a:solidFill>
-                  <a:srgbClr val="FFFFFF"/>
-                </a:solidFill>
-                <a:latin typeface="Calibri"/>
-              </a:rPr>
-              <a:t>jobs:</a:t>
-            </a:r>
-          </a:p>
-          <a:p>
-            <a:pPr>
-              <a:spcAft>
-                <a:spcPts val="400"/>
-              </a:spcAft>
-            </a:pPr>
-            <a:r>
-              <a:rPr sz="1400" b="0" i="0">
-                <a:solidFill>
-                  <a:srgbClr val="FFFFFF"/>
-                </a:solidFill>
-                <a:latin typeface="Calibri"/>
-              </a:rPr>
-              <a:t>  construir-y-probar:</a:t>
-            </a:r>
-          </a:p>
-          <a:p>
-            <a:pPr>
-              <a:spcAft>
-                <a:spcPts val="400"/>
-              </a:spcAft>
-            </a:pPr>
-            <a:r>
-              <a:rPr sz="1400" b="0" i="0">
-                <a:solidFill>
-                  <a:srgbClr val="FFFFFF"/>
-                </a:solidFill>
-                <a:latin typeface="Calibri"/>
-              </a:rPr>
-              <a:t>    runs-on: ubuntu-latest</a:t>
-            </a:r>
-          </a:p>
-        </p:txBody>
-      </p:sp>
-      <p:sp>
-        <p:nvSpPr>
-          <p:cNvPr id="9" name="TextBox 8"/>
-          <p:cNvSpPr txBox="1"/>
-          <p:nvPr/>
-        </p:nvSpPr>
-        <p:spPr>
-          <a:xfrm>
-            <a:off x="6233007" y="1719072"/>
-            <a:ext cx="5181447" cy="4453128"/>
-          </a:xfrm>
-          <a:prstGeom prst="rect">
-            <a:avLst/>
-          </a:prstGeom>
-          <a:noFill/>
-        </p:spPr>
-        <p:txBody>
-          <a:bodyPr wrap="square">
-            <a:spAutoFit/>
-          </a:bodyPr>
-          <a:lstStyle/>
-          <a:p>
-            <a:pPr>
-              <a:spcAft>
-                <a:spcPts val="400"/>
-              </a:spcAft>
-            </a:pPr>
-            <a:r>
-              <a:rPr sz="1400" b="0" i="0">
-                <a:solidFill>
-                  <a:srgbClr val="FFFFFF"/>
-                </a:solidFill>
-                <a:latin typeface="Calibri"/>
-              </a:rPr>
-              <a:t>    steps:</a:t>
-            </a:r>
-          </a:p>
-          <a:p>
-            <a:pPr>
-              <a:spcAft>
-                <a:spcPts val="400"/>
-              </a:spcAft>
-            </a:pPr>
-            <a:r>
-              <a:rPr sz="1400" b="0" i="0">
-                <a:solidFill>
-                  <a:srgbClr val="FFFFFF"/>
-                </a:solidFill>
-                <a:latin typeface="Calibri"/>
-              </a:rPr>
-              <a:t>      - uses: actions/checkout@v4</a:t>
-            </a:r>
-          </a:p>
-          <a:p>
-            <a:pPr>
-              <a:spcAft>
-                <a:spcPts val="400"/>
-              </a:spcAft>
-            </a:pPr>
-            <a:r>
-              <a:rPr sz="1400" b="0" i="0">
-                <a:solidFill>
-                  <a:srgbClr val="FFFFFF"/>
-                </a:solidFill>
-                <a:latin typeface="Calibri"/>
-              </a:rPr>
-              <a:t/>
-            </a:r>
-          </a:p>
-          <a:p>
-            <a:pPr>
-              <a:spcAft>
-                <a:spcPts val="400"/>
-              </a:spcAft>
-            </a:pPr>
-            <a:r>
-              <a:rPr sz="1400" b="0" i="0">
-                <a:solidFill>
-                  <a:srgbClr val="FFFFFF"/>
-                </a:solidFill>
-                <a:latin typeface="Calibri"/>
-              </a:rPr>
-              <a:t>      - uses: actions/setup-node@v4</a:t>
-            </a:r>
-          </a:p>
-          <a:p>
-            <a:pPr>
-              <a:spcAft>
-                <a:spcPts val="400"/>
-              </a:spcAft>
-            </a:pPr>
-            <a:r>
-              <a:rPr sz="1400" b="0" i="0">
-                <a:solidFill>
-                  <a:srgbClr val="FFFFFF"/>
-                </a:solidFill>
-                <a:latin typeface="Calibri"/>
-              </a:rPr>
-              <a:t>        with:</a:t>
-            </a:r>
-          </a:p>
-          <a:p>
-            <a:pPr>
-              <a:spcAft>
-                <a:spcPts val="400"/>
-              </a:spcAft>
-            </a:pPr>
-            <a:r>
-              <a:rPr sz="1400" b="0" i="0">
-                <a:solidFill>
-                  <a:srgbClr val="FFFFFF"/>
-                </a:solidFill>
-                <a:latin typeface="Calibri"/>
-              </a:rPr>
-              <a:t>          node-version: '20'</a:t>
-            </a:r>
-          </a:p>
-          <a:p>
-            <a:pPr>
-              <a:spcAft>
-                <a:spcPts val="400"/>
-              </a:spcAft>
-            </a:pPr>
-            <a:r>
-              <a:rPr sz="1400" b="0" i="0">
-                <a:solidFill>
-                  <a:srgbClr val="FFFFFF"/>
-                </a:solidFill>
-                <a:latin typeface="Calibri"/>
-              </a:rPr>
-              <a:t>          cache: 'npm'</a:t>
-            </a:r>
-          </a:p>
-          <a:p>
-            <a:pPr>
-              <a:spcAft>
-                <a:spcPts val="400"/>
-              </a:spcAft>
-            </a:pPr>
-            <a:r>
-              <a:rPr sz="1400" b="0" i="0">
-                <a:solidFill>
-                  <a:srgbClr val="FFFFFF"/>
-                </a:solidFill>
-                <a:latin typeface="Calibri"/>
-              </a:rPr>
-              <a:t/>
-            </a:r>
-          </a:p>
-          <a:p>
-            <a:pPr>
-              <a:spcAft>
-                <a:spcPts val="400"/>
-              </a:spcAft>
-            </a:pPr>
-            <a:r>
-              <a:rPr sz="1400" b="0" i="0">
-                <a:solidFill>
-                  <a:srgbClr val="FFFFFF"/>
-                </a:solidFill>
-                <a:latin typeface="Calibri"/>
-              </a:rPr>
-              <a:t>      - run: npm ci</a:t>
-            </a:r>
-          </a:p>
-          <a:p>
-            <a:pPr>
-              <a:spcAft>
-                <a:spcPts val="400"/>
-              </a:spcAft>
-            </a:pPr>
-            <a:r>
-              <a:rPr sz="1400" b="0" i="0">
-                <a:solidFill>
-                  <a:srgbClr val="FFFFFF"/>
-                </a:solidFill>
-                <a:latin typeface="Calibri"/>
-              </a:rPr>
-              <a:t>      - run: npm test -- --ci</a:t>
-            </a:r>
-          </a:p>
-          <a:p>
-            <a:pPr>
-              <a:spcAft>
-                <a:spcPts val="400"/>
-              </a:spcAft>
-            </a:pPr>
-            <a:r>
-              <a:rPr sz="1400" b="0" i="0">
-                <a:solidFill>
-                  <a:srgbClr val="FFFFFF"/>
-                </a:solidFill>
-                <a:latin typeface="Calibri"/>
-              </a:rPr>
-              <a:t>      - run: docker build -t turnos-api:${{ github.sha }}.</a:t>
-            </a:r>
-          </a:p>
-        </p:txBody>
-      </p:sp>
-      <p:sp>
-        <p:nvSpPr>
-          <p:cNvPr id="10" name="TextBox 9"/>
-          <p:cNvSpPr txBox="1"/>
-          <p:nvPr/>
-        </p:nvSpPr>
-        <p:spPr>
-          <a:xfrm>
-            <a:off x="11185855" y="6473952"/>
-            <a:ext cx="640080" cy="274320"/>
-          </a:xfrm>
-          <a:prstGeom prst="rect">
-            <a:avLst/>
-          </a:prstGeom>
-          <a:noFill/>
-        </p:spPr>
-        <p:txBody>
-          <a:bodyPr wrap="square">
-            <a:spAutoFit/>
-          </a:bodyPr>
-          <a:lstStyle/>
-          <a:p>
-            <a:pPr algn="r"/>
-            <a:r>
-              <a:rPr sz="1100" b="0" i="0">
-                <a:solidFill>
-                  <a:srgbClr val="666666"/>
-                </a:solidFill>
-                <a:latin typeface="Calibri"/>
-              </a:rPr>
-              <a:t>26</a:t>
-            </a:r>
-          </a:p>
-        </p:txBody>
-      </p:sp>
-    </p:spTree>
-  </p:cSld>
-  <p:clrMapOvr>
-    <a:masterClrMapping/>
-  </p:clrMapOvr>
-</p:sld>
-</file>
-
-<file path=ppt/slides/slide27.xml><?xml version="1.0" encoding="utf-8"?>
-<p:sld xmlns:a="http://schemas.openxmlformats.org/drawingml/2006/main" xmlns:p="http://schemas.openxmlformats.org/presentationml/2006/main" xmlns:r="http://schemas.openxmlformats.org/officeDocument/2006/relationships">
-  <p:cSld>
-    <p:bg>
-      <p:bgPr>
-        <a:solidFill>
-          <a:srgbClr val="FFFFFF"/>
-        </a:solidFill>
-        <a:effectLst/>
-      </p:bgPr>
-    </p:bg>
-    <p:spTree>
-      <p:nvGrpSpPr>
-        <p:cNvPr id="1" name=""/>
-        <p:cNvGrpSpPr/>
-        <p:nvPr/>
-      </p:nvGrpSpPr>
-      <p:grpSpPr/>
-      <p:sp>
-        <p:nvSpPr>
-          <p:cNvPr id="2" name="Rectangle 1"/>
-          <p:cNvSpPr/>
-          <p:nvPr/>
-        </p:nvSpPr>
-        <p:spPr>
-          <a:xfrm>
-            <a:off x="0" y="0"/>
-            <a:ext cx="12191695" cy="960120"/>
-          </a:xfrm>
-          <a:prstGeom prst="rect">
-            <a:avLst/>
-          </a:prstGeom>
-          <a:solidFill>
-            <a:srgbClr val="095292"/>
-          </a:solidFill>
-          <a:ln>
-            <a:noFill/>
-          </a:ln>
-        </p:spPr>
-        <p:style>
-          <a:lnRef idx="1">
-            <a:schemeClr val="accent1"/>
-          </a:lnRef>
-          <a:fillRef idx="3">
-            <a:schemeClr val="accent1"/>
-          </a:fillRef>
-          <a:effectRef idx="2">
-            <a:schemeClr val="accent1"/>
-          </a:effectRef>
-          <a:fontRef idx="minor">
-            <a:schemeClr val="lt1"/>
-          </a:fontRef>
-        </p:style>
-        <p:txBody>
-          <a:bodyPr rtlCol="0" anchor="ctr"/>
-          <a:lstStyle/>
-          <a:p>
-            <a:pPr algn="ctr"/>
-          </a:p>
-        </p:txBody>
-      </p:sp>
-      <p:sp>
-        <p:nvSpPr>
-          <p:cNvPr id="3" name="Rectangle 2"/>
-          <p:cNvSpPr/>
-          <p:nvPr/>
-        </p:nvSpPr>
-        <p:spPr>
-          <a:xfrm>
-            <a:off x="0" y="960120"/>
-            <a:ext cx="12191695" cy="41148"/>
-          </a:xfrm>
-          <a:prstGeom prst="rect">
-            <a:avLst/>
-          </a:prstGeom>
-          <a:solidFill>
-            <a:srgbClr val="FFD000"/>
-          </a:solidFill>
-          <a:ln>
-            <a:noFill/>
-          </a:ln>
-        </p:spPr>
-        <p:style>
-          <a:lnRef idx="1">
-            <a:schemeClr val="accent1"/>
-          </a:lnRef>
-          <a:fillRef idx="3">
-            <a:schemeClr val="accent1"/>
-          </a:fillRef>
-          <a:effectRef idx="2">
-            <a:schemeClr val="accent1"/>
-          </a:effectRef>
-          <a:fontRef idx="minor">
-            <a:schemeClr val="lt1"/>
-          </a:fontRef>
-        </p:style>
-        <p:txBody>
-          <a:bodyPr rtlCol="0" anchor="ctr"/>
-          <a:lstStyle/>
-          <a:p>
-            <a:pPr algn="ctr"/>
-          </a:p>
-        </p:txBody>
-      </p:sp>
-      <p:sp>
-        <p:nvSpPr>
-          <p:cNvPr id="4" name="TextBox 3"/>
-          <p:cNvSpPr txBox="1"/>
-          <p:nvPr/>
-        </p:nvSpPr>
-        <p:spPr>
-          <a:xfrm>
-            <a:off x="457200" y="164592"/>
-            <a:ext cx="11277295" cy="502920"/>
-          </a:xfrm>
-          <a:prstGeom prst="rect">
-            <a:avLst/>
-          </a:prstGeom>
-          <a:noFill/>
-        </p:spPr>
-        <p:txBody>
-          <a:bodyPr wrap="square">
-            <a:spAutoFit/>
-          </a:bodyPr>
-          <a:lstStyle/>
-          <a:p>
-            <a:r>
-              <a:rPr sz="2600" b="1" i="0">
-                <a:solidFill>
-                  <a:srgbClr val="FFFFFF"/>
-                </a:solidFill>
-                <a:latin typeface="Calibri"/>
-              </a:rPr>
-              <a:t>Secretos en el workflow, y hasta donde llega el pipeline</a:t>
-            </a:r>
-          </a:p>
-        </p:txBody>
-      </p:sp>
-      <p:sp>
-        <p:nvSpPr>
-          <p:cNvPr id="5" name="Rounded Rectangle 4"/>
-          <p:cNvSpPr/>
-          <p:nvPr/>
-        </p:nvSpPr>
-        <p:spPr>
-          <a:xfrm>
-            <a:off x="457200" y="1261872"/>
-            <a:ext cx="11277295" cy="5093208"/>
-          </a:xfrm>
-          <a:prstGeom prst="roundRect">
-            <a:avLst>
-              <a:gd name="adj" fmla="val 12000"/>
-            </a:avLst>
-          </a:prstGeom>
-          <a:solidFill>
-            <a:srgbClr val="1E2A38"/>
-          </a:solidFill>
-          <a:ln>
-            <a:noFill/>
-          </a:ln>
-        </p:spPr>
-        <p:style>
-          <a:lnRef idx="1">
-            <a:schemeClr val="accent1"/>
-          </a:lnRef>
-          <a:fillRef idx="3">
-            <a:schemeClr val="accent1"/>
-          </a:fillRef>
-          <a:effectRef idx="2">
-            <a:schemeClr val="accent1"/>
-          </a:effectRef>
-          <a:fontRef idx="minor">
-            <a:schemeClr val="lt1"/>
-          </a:fontRef>
-        </p:style>
-        <p:txBody>
-          <a:bodyPr rtlCol="0" anchor="ctr"/>
-          <a:lstStyle/>
-          <a:p>
-            <a:pPr algn="ctr"/>
-          </a:p>
-        </p:txBody>
-      </p:sp>
-      <p:sp>
-        <p:nvSpPr>
-          <p:cNvPr id="6" name="Rectangle 5"/>
-          <p:cNvSpPr/>
-          <p:nvPr/>
-        </p:nvSpPr>
-        <p:spPr>
-          <a:xfrm>
-            <a:off x="457200" y="1261872"/>
-            <a:ext cx="11277295" cy="320040"/>
-          </a:xfrm>
-          <a:prstGeom prst="rect">
-            <a:avLst/>
-          </a:prstGeom>
-          <a:solidFill>
-            <a:srgbClr val="095292"/>
-          </a:solidFill>
-          <a:ln>
-            <a:noFill/>
-          </a:ln>
-        </p:spPr>
-        <p:style>
-          <a:lnRef idx="1">
-            <a:schemeClr val="accent1"/>
-          </a:lnRef>
-          <a:fillRef idx="3">
-            <a:schemeClr val="accent1"/>
-          </a:fillRef>
-          <a:effectRef idx="2">
-            <a:schemeClr val="accent1"/>
-          </a:effectRef>
-          <a:fontRef idx="minor">
-            <a:schemeClr val="lt1"/>
-          </a:fontRef>
-        </p:style>
-        <p:txBody>
-          <a:bodyPr rtlCol="0" anchor="ctr"/>
-          <a:lstStyle/>
-          <a:p>
-            <a:pPr algn="ctr"/>
-          </a:p>
-        </p:txBody>
-      </p:sp>
-      <p:sp>
-        <p:nvSpPr>
-          <p:cNvPr id="7" name="TextBox 6"/>
-          <p:cNvSpPr txBox="1"/>
-          <p:nvPr/>
-        </p:nvSpPr>
-        <p:spPr>
-          <a:xfrm>
-            <a:off x="685800" y="1307592"/>
-            <a:ext cx="10820095" cy="256032"/>
-          </a:xfrm>
-          <a:prstGeom prst="rect">
-            <a:avLst/>
-          </a:prstGeom>
-          <a:noFill/>
-        </p:spPr>
-        <p:txBody>
-          <a:bodyPr wrap="square" anchor="ctr"/>
-          <a:lstStyle/>
-          <a:p>
-            <a:r>
-              <a:rPr sz="1000" b="1" i="0">
-                <a:solidFill>
-                  <a:srgbClr val="269CCB"/>
-                </a:solidFill>
-                <a:latin typeface="Calibri"/>
-              </a:rPr>
-              <a:t>● ● ●</a:t>
-            </a:r>
-          </a:p>
-        </p:txBody>
-      </p:sp>
-      <p:sp>
-        <p:nvSpPr>
-          <p:cNvPr id="8" name="TextBox 7"/>
-          <p:cNvSpPr txBox="1"/>
-          <p:nvPr/>
-        </p:nvSpPr>
-        <p:spPr>
-          <a:xfrm>
-            <a:off x="777240" y="1719072"/>
-            <a:ext cx="10637215" cy="4453128"/>
-          </a:xfrm>
-          <a:prstGeom prst="rect">
-            <a:avLst/>
-          </a:prstGeom>
-          <a:noFill/>
-        </p:spPr>
-        <p:txBody>
-          <a:bodyPr wrap="square">
-            <a:spAutoFit/>
-          </a:bodyPr>
-          <a:lstStyle/>
-          <a:p>
-            <a:pPr>
-              <a:spcAft>
-                <a:spcPts val="400"/>
-              </a:spcAft>
-            </a:pPr>
-            <a:r>
-              <a:rPr sz="1400" b="0" i="0">
-                <a:solidFill>
-                  <a:srgbClr val="FFFFFF"/>
-                </a:solidFill>
-                <a:latin typeface="Calibri"/>
-              </a:rPr>
-              <a:t>      - name: Desplegar</a:t>
-            </a:r>
-          </a:p>
-          <a:p>
-            <a:pPr>
-              <a:spcAft>
-                <a:spcPts val="400"/>
-              </a:spcAft>
-            </a:pPr>
-            <a:r>
-              <a:rPr sz="1400" b="0" i="0">
-                <a:solidFill>
-                  <a:srgbClr val="FFFFFF"/>
-                </a:solidFill>
-                <a:latin typeface="Calibri"/>
-              </a:rPr>
-              <a:t>        env:</a:t>
-            </a:r>
-          </a:p>
-          <a:p>
-            <a:pPr>
-              <a:spcAft>
-                <a:spcPts val="400"/>
-              </a:spcAft>
-            </a:pPr>
-            <a:r>
-              <a:rPr sz="1400" b="0" i="0">
-                <a:solidFill>
-                  <a:srgbClr val="FFFFFF"/>
-                </a:solidFill>
-                <a:latin typeface="Calibri"/>
-              </a:rPr>
-              <a:t>          TOKEN: ${{ secrets.DEPLOY_TOKEN }}   # del almacen, nunca en claro</a:t>
-            </a:r>
-          </a:p>
-          <a:p>
-            <a:pPr>
-              <a:spcAft>
-                <a:spcPts val="400"/>
-              </a:spcAft>
-            </a:pPr>
-            <a:r>
-              <a:rPr sz="1400" b="0" i="0">
-                <a:solidFill>
-                  <a:srgbClr val="FFFFFF"/>
-                </a:solidFill>
-                <a:latin typeface="Calibri"/>
-              </a:rPr>
-              <a:t>        run: ./deploy.sh</a:t>
-            </a:r>
-          </a:p>
-          <a:p>
-            <a:pPr>
-              <a:spcAft>
-                <a:spcPts val="400"/>
-              </a:spcAft>
-            </a:pPr>
-            <a:r>
-              <a:rPr sz="1400" b="0" i="0">
-                <a:solidFill>
-                  <a:srgbClr val="FFFFFF"/>
-                </a:solidFill>
-                <a:latin typeface="Calibri"/>
-              </a:rPr>
-              <a:t/>
-            </a:r>
-          </a:p>
-          <a:p>
-            <a:pPr>
-              <a:spcAft>
-                <a:spcPts val="400"/>
-              </a:spcAft>
-            </a:pPr>
-            <a:r>
-              <a:rPr sz="1400" b="0" i="0">
-                <a:solidFill>
-                  <a:srgbClr val="FFFFFF"/>
-                </a:solidFill>
-                <a:latin typeface="Calibri"/>
-              </a:rPr>
-              <a:t># CI  = construir y probar en cada push. Esto SI es realista aqui.</a:t>
-            </a:r>
-          </a:p>
-          <a:p>
-            <a:pPr>
-              <a:spcAft>
-                <a:spcPts val="400"/>
-              </a:spcAft>
-            </a:pPr>
-            <a:r>
-              <a:rPr sz="1400" b="0" i="0">
-                <a:solidFill>
-                  <a:srgbClr val="FFFFFF"/>
-                </a:solidFill>
-                <a:latin typeface="Calibri"/>
-              </a:rPr>
-              <a:t># CD  = desplegar automaticamente a produccion. Necesita un proveedor</a:t>
-            </a:r>
-          </a:p>
-          <a:p>
-            <a:pPr>
-              <a:spcAft>
-                <a:spcPts val="400"/>
-              </a:spcAft>
-            </a:pPr>
-            <a:r>
-              <a:rPr sz="1400" b="0" i="0">
-                <a:solidFill>
-                  <a:srgbClr val="FFFFFF"/>
-                </a:solidFill>
-                <a:latin typeface="Calibri"/>
-              </a:rPr>
-              <a:t>#       con credenciales, asi que se declara como SIMULADO</a:t>
-            </a:r>
-          </a:p>
-          <a:p>
-            <a:pPr>
-              <a:spcAft>
-                <a:spcPts val="400"/>
-              </a:spcAft>
-            </a:pPr>
-            <a:r>
-              <a:rPr sz="1400" b="0" i="0">
-                <a:solidFill>
-                  <a:srgbClr val="FFFFFF"/>
-                </a:solidFill>
-                <a:latin typeface="Calibri"/>
-              </a:rPr>
-              <a:t>#       y el ultimo paso se rotula como tal. Decirlo es honesto;</a:t>
-            </a:r>
-          </a:p>
-          <a:p>
-            <a:pPr>
-              <a:spcAft>
-                <a:spcPts val="400"/>
-              </a:spcAft>
-            </a:pPr>
-            <a:r>
-              <a:rPr sz="1400" b="0" i="0">
-                <a:solidFill>
-                  <a:srgbClr val="FFFFFF"/>
-                </a:solidFill>
-                <a:latin typeface="Calibri"/>
-              </a:rPr>
-              <a:t>#       fingirlo es un error.</a:t>
-            </a:r>
-          </a:p>
-        </p:txBody>
-      </p:sp>
-      <p:sp>
-        <p:nvSpPr>
-          <p:cNvPr id="9" name="TextBox 8"/>
-          <p:cNvSpPr txBox="1"/>
-          <p:nvPr/>
-        </p:nvSpPr>
-        <p:spPr>
-          <a:xfrm>
-            <a:off x="11185855" y="6473952"/>
-            <a:ext cx="640080" cy="274320"/>
-          </a:xfrm>
-          <a:prstGeom prst="rect">
-            <a:avLst/>
-          </a:prstGeom>
-          <a:noFill/>
-        </p:spPr>
-        <p:txBody>
-          <a:bodyPr wrap="square">
-            <a:spAutoFit/>
-          </a:bodyPr>
-          <a:lstStyle/>
-          <a:p>
-            <a:pPr algn="r"/>
-            <a:r>
-              <a:rPr sz="1100" b="0" i="0">
-                <a:solidFill>
-                  <a:srgbClr val="666666"/>
-                </a:solidFill>
-                <a:latin typeface="Calibri"/>
-              </a:rPr>
-              <a:t>27</a:t>
-            </a:r>
-          </a:p>
-        </p:txBody>
-      </p:sp>
-    </p:spTree>
-  </p:cSld>
-  <p:clrMapOvr>
-    <a:masterClrMapping/>
-  </p:clrMapOvr>
-</p:sld>
-</file>
-
-<file path=ppt/slides/slide28.xml><?xml version="1.0" encoding="utf-8"?>
-<p:sld xmlns:a="http://schemas.openxmlformats.org/drawingml/2006/main" xmlns:p="http://schemas.openxmlformats.org/presentationml/2006/main" xmlns:r="http://schemas.openxmlformats.org/officeDocument/2006/relationships">
-  <p:cSld>
-    <p:bg>
-      <p:bgPr>
-        <a:solidFill>
-          <a:srgbClr val="FFFFFF"/>
-        </a:solidFill>
-        <a:effectLst/>
-      </p:bgPr>
-    </p:bg>
-    <p:spTree>
-      <p:nvGrpSpPr>
-        <p:cNvPr id="1" name=""/>
-        <p:cNvGrpSpPr/>
-        <p:nvPr/>
-      </p:nvGrpSpPr>
-      <p:grpSpPr/>
-      <p:sp>
-        <p:nvSpPr>
-          <p:cNvPr id="2" name="Rectangle 1"/>
-          <p:cNvSpPr/>
-          <p:nvPr/>
-        </p:nvSpPr>
-        <p:spPr>
-          <a:xfrm>
-            <a:off x="0" y="0"/>
-            <a:ext cx="12191695" cy="960120"/>
-          </a:xfrm>
-          <a:prstGeom prst="rect">
-            <a:avLst/>
-          </a:prstGeom>
-          <a:solidFill>
-            <a:srgbClr val="095292"/>
-          </a:solidFill>
-          <a:ln>
-            <a:noFill/>
-          </a:ln>
-        </p:spPr>
-        <p:style>
-          <a:lnRef idx="1">
-            <a:schemeClr val="accent1"/>
-          </a:lnRef>
-          <a:fillRef idx="3">
-            <a:schemeClr val="accent1"/>
-          </a:fillRef>
-          <a:effectRef idx="2">
-            <a:schemeClr val="accent1"/>
-          </a:effectRef>
-          <a:fontRef idx="minor">
-            <a:schemeClr val="lt1"/>
-          </a:fontRef>
-        </p:style>
-        <p:txBody>
-          <a:bodyPr rtlCol="0" anchor="ctr"/>
-          <a:lstStyle/>
-          <a:p>
-            <a:pPr algn="ctr"/>
-          </a:p>
-        </p:txBody>
-      </p:sp>
-      <p:sp>
-        <p:nvSpPr>
-          <p:cNvPr id="3" name="Rectangle 2"/>
-          <p:cNvSpPr/>
-          <p:nvPr/>
-        </p:nvSpPr>
-        <p:spPr>
-          <a:xfrm>
-            <a:off x="0" y="960120"/>
-            <a:ext cx="12191695" cy="41148"/>
-          </a:xfrm>
-          <a:prstGeom prst="rect">
-            <a:avLst/>
-          </a:prstGeom>
-          <a:solidFill>
-            <a:srgbClr val="FFD000"/>
-          </a:solidFill>
-          <a:ln>
-            <a:noFill/>
-          </a:ln>
-        </p:spPr>
-        <p:style>
-          <a:lnRef idx="1">
-            <a:schemeClr val="accent1"/>
-          </a:lnRef>
-          <a:fillRef idx="3">
-            <a:schemeClr val="accent1"/>
-          </a:fillRef>
-          <a:effectRef idx="2">
-            <a:schemeClr val="accent1"/>
-          </a:effectRef>
-          <a:fontRef idx="minor">
-            <a:schemeClr val="lt1"/>
-          </a:fontRef>
-        </p:style>
-        <p:txBody>
-          <a:bodyPr rtlCol="0" anchor="ctr"/>
-          <a:lstStyle/>
-          <a:p>
-            <a:pPr algn="ctr"/>
-          </a:p>
-        </p:txBody>
-      </p:sp>
-      <p:sp>
-        <p:nvSpPr>
-          <p:cNvPr id="4" name="TextBox 3"/>
-          <p:cNvSpPr txBox="1"/>
-          <p:nvPr/>
-        </p:nvSpPr>
-        <p:spPr>
-          <a:xfrm>
-            <a:off x="457200" y="164592"/>
-            <a:ext cx="11277295" cy="502920"/>
-          </a:xfrm>
-          <a:prstGeom prst="rect">
-            <a:avLst/>
-          </a:prstGeom>
-          <a:noFill/>
-        </p:spPr>
-        <p:txBody>
-          <a:bodyPr wrap="square">
-            <a:spAutoFit/>
-          </a:bodyPr>
-          <a:lstStyle/>
-          <a:p>
-            <a:r>
-              <a:rPr sz="2600" b="1" i="0">
-                <a:solidFill>
-                  <a:srgbClr val="FFFFFF"/>
-                </a:solidFill>
-                <a:latin typeface="Calibri"/>
-              </a:rPr>
-              <a:t>.github/workflows/ci.yml — CI real, no un echo</a:t>
-            </a:r>
-          </a:p>
-        </p:txBody>
-      </p:sp>
-      <p:sp>
-        <p:nvSpPr>
-          <p:cNvPr id="5" name="Rounded Rectangle 4"/>
-          <p:cNvSpPr/>
-          <p:nvPr/>
-        </p:nvSpPr>
-        <p:spPr>
-          <a:xfrm>
-            <a:off x="457200" y="1261872"/>
-            <a:ext cx="11277295" cy="4773168"/>
-          </a:xfrm>
-          <a:prstGeom prst="roundRect">
-            <a:avLst>
-              <a:gd name="adj" fmla="val 12000"/>
-            </a:avLst>
-          </a:prstGeom>
-          <a:solidFill>
-            <a:srgbClr val="1E2A38"/>
-          </a:solidFill>
-          <a:ln>
-            <a:noFill/>
-          </a:ln>
-        </p:spPr>
-        <p:style>
-          <a:lnRef idx="1">
-            <a:schemeClr val="accent1"/>
-          </a:lnRef>
-          <a:fillRef idx="3">
-            <a:schemeClr val="accent1"/>
-          </a:fillRef>
-          <a:effectRef idx="2">
-            <a:schemeClr val="accent1"/>
-          </a:effectRef>
-          <a:fontRef idx="minor">
-            <a:schemeClr val="lt1"/>
-          </a:fontRef>
-        </p:style>
-        <p:txBody>
-          <a:bodyPr rtlCol="0" anchor="ctr"/>
-          <a:lstStyle/>
-          <a:p>
-            <a:pPr algn="ctr"/>
-          </a:p>
-        </p:txBody>
-      </p:sp>
-      <p:sp>
-        <p:nvSpPr>
-          <p:cNvPr id="6" name="Rectangle 5"/>
-          <p:cNvSpPr/>
-          <p:nvPr/>
-        </p:nvSpPr>
-        <p:spPr>
-          <a:xfrm>
-            <a:off x="457200" y="1261872"/>
-            <a:ext cx="11277295" cy="320040"/>
-          </a:xfrm>
-          <a:prstGeom prst="rect">
-            <a:avLst/>
-          </a:prstGeom>
-          <a:solidFill>
-            <a:srgbClr val="095292"/>
-          </a:solidFill>
-          <a:ln>
-            <a:noFill/>
-          </a:ln>
-        </p:spPr>
-        <p:style>
-          <a:lnRef idx="1">
-            <a:schemeClr val="accent1"/>
-          </a:lnRef>
-          <a:fillRef idx="3">
-            <a:schemeClr val="accent1"/>
-          </a:fillRef>
-          <a:effectRef idx="2">
-            <a:schemeClr val="accent1"/>
-          </a:effectRef>
-          <a:fontRef idx="minor">
-            <a:schemeClr val="lt1"/>
-          </a:fontRef>
-        </p:style>
-        <p:txBody>
-          <a:bodyPr rtlCol="0" anchor="ctr"/>
-          <a:lstStyle/>
-          <a:p>
-            <a:pPr algn="ctr"/>
-          </a:p>
-        </p:txBody>
-      </p:sp>
-      <p:sp>
-        <p:nvSpPr>
-          <p:cNvPr id="7" name="TextBox 6"/>
-          <p:cNvSpPr txBox="1"/>
-          <p:nvPr/>
-        </p:nvSpPr>
-        <p:spPr>
-          <a:xfrm>
-            <a:off x="685800" y="1307592"/>
-            <a:ext cx="10820095" cy="256032"/>
-          </a:xfrm>
-          <a:prstGeom prst="rect">
-            <a:avLst/>
-          </a:prstGeom>
-          <a:noFill/>
-        </p:spPr>
-        <p:txBody>
-          <a:bodyPr wrap="square" anchor="ctr"/>
-          <a:lstStyle/>
-          <a:p>
-            <a:r>
-              <a:rPr sz="1000" b="1" i="0">
-                <a:solidFill>
-                  <a:srgbClr val="269CCB"/>
-                </a:solidFill>
-                <a:latin typeface="Calibri"/>
-              </a:rPr>
-              <a:t>● ● ●</a:t>
-            </a:r>
-          </a:p>
-        </p:txBody>
-      </p:sp>
-      <p:sp>
-        <p:nvSpPr>
-          <p:cNvPr id="8" name="TextBox 7"/>
-          <p:cNvSpPr txBox="1"/>
-          <p:nvPr/>
-        </p:nvSpPr>
-        <p:spPr>
-          <a:xfrm>
-            <a:off x="777240" y="1719072"/>
-            <a:ext cx="10637215" cy="4133087"/>
-          </a:xfrm>
-          <a:prstGeom prst="rect">
-            <a:avLst/>
-          </a:prstGeom>
-          <a:noFill/>
-        </p:spPr>
-        <p:txBody>
-          <a:bodyPr wrap="square">
-            <a:spAutoFit/>
-          </a:bodyPr>
-          <a:lstStyle/>
-          <a:p>
-            <a:pPr>
-              <a:spcAft>
-                <a:spcPts val="400"/>
-              </a:spcAft>
-            </a:pPr>
-            <a:r>
-              <a:rPr sz="1400" b="0" i="0">
-                <a:solidFill>
-                  <a:srgbClr val="FFFFFF"/>
-                </a:solidFill>
-                <a:latin typeface="Calibri"/>
-              </a:rPr>
-              <a:t>name: CI</a:t>
-            </a:r>
-          </a:p>
-          <a:p>
-            <a:pPr>
-              <a:spcAft>
-                <a:spcPts val="400"/>
-              </a:spcAft>
-            </a:pPr>
-            <a:r>
-              <a:rPr sz="1400" b="0" i="0">
-                <a:solidFill>
-                  <a:srgbClr val="FFFFFF"/>
-                </a:solidFill>
-                <a:latin typeface="Calibri"/>
-              </a:rPr>
-              <a:t>on: [push, pull_request]          # 1. disparadores</a:t>
-            </a:r>
-          </a:p>
-          <a:p>
-            <a:pPr>
-              <a:spcAft>
-                <a:spcPts val="400"/>
-              </a:spcAft>
-            </a:pPr>
-            <a:r>
-              <a:rPr sz="1400" b="0" i="0">
-                <a:solidFill>
-                  <a:srgbClr val="FFFFFF"/>
-                </a:solidFill>
-                <a:latin typeface="Calibri"/>
-              </a:rPr>
-              <a:t>jobs:</a:t>
-            </a:r>
-          </a:p>
-          <a:p>
-            <a:pPr>
-              <a:spcAft>
-                <a:spcPts val="400"/>
-              </a:spcAft>
-            </a:pPr>
-            <a:r>
-              <a:rPr sz="1400" b="0" i="0">
-                <a:solidFill>
-                  <a:srgbClr val="FFFFFF"/>
-                </a:solidFill>
-                <a:latin typeface="Calibri"/>
-              </a:rPr>
-              <a:t>  build:</a:t>
-            </a:r>
-          </a:p>
-          <a:p>
-            <a:pPr>
-              <a:spcAft>
-                <a:spcPts val="400"/>
-              </a:spcAft>
-            </a:pPr>
-            <a:r>
-              <a:rPr sz="1400" b="0" i="0">
-                <a:solidFill>
-                  <a:srgbClr val="FFFFFF"/>
-                </a:solidFill>
-                <a:latin typeface="Calibri"/>
-              </a:rPr>
-              <a:t>    runs-on: ubuntu-latest        # 2. entorno de ejecucion</a:t>
-            </a:r>
-          </a:p>
-          <a:p>
-            <a:pPr>
-              <a:spcAft>
-                <a:spcPts val="400"/>
-              </a:spcAft>
-            </a:pPr>
-            <a:r>
-              <a:rPr sz="1400" b="0" i="0">
-                <a:solidFill>
-                  <a:srgbClr val="FFFFFF"/>
-                </a:solidFill>
-                <a:latin typeface="Calibri"/>
-              </a:rPr>
-              <a:t>    steps:</a:t>
-            </a:r>
-          </a:p>
-          <a:p>
-            <a:pPr>
-              <a:spcAft>
-                <a:spcPts val="400"/>
-              </a:spcAft>
-            </a:pPr>
-            <a:r>
-              <a:rPr sz="1400" b="0" i="0">
-                <a:solidFill>
-                  <a:srgbClr val="FFFFFF"/>
-                </a:solidFill>
-                <a:latin typeface="Calibri"/>
-              </a:rPr>
-              <a:t>      - uses: actions/checkout@v4</a:t>
-            </a:r>
-          </a:p>
-          <a:p>
-            <a:pPr>
-              <a:spcAft>
-                <a:spcPts val="400"/>
-              </a:spcAft>
-            </a:pPr>
-            <a:r>
-              <a:rPr sz="1400" b="0" i="0">
-                <a:solidFill>
-                  <a:srgbClr val="FFFFFF"/>
-                </a:solidFill>
-                <a:latin typeface="Calibri"/>
-              </a:rPr>
-              <a:t>      - uses: actions/setup-node@v4</a:t>
-            </a:r>
-          </a:p>
-          <a:p>
-            <a:pPr>
-              <a:spcAft>
-                <a:spcPts val="400"/>
-              </a:spcAft>
-            </a:pPr>
-            <a:r>
-              <a:rPr sz="1400" b="0" i="0">
-                <a:solidFill>
-                  <a:srgbClr val="FFFFFF"/>
-                </a:solidFill>
-                <a:latin typeface="Calibri"/>
-              </a:rPr>
-              <a:t>        with: { node-version: '20' }</a:t>
-            </a:r>
-          </a:p>
-          <a:p>
-            <a:pPr>
-              <a:spcAft>
-                <a:spcPts val="400"/>
-              </a:spcAft>
-            </a:pPr>
-            <a:r>
-              <a:rPr sz="1400" b="0" i="0">
-                <a:solidFill>
-                  <a:srgbClr val="FFFFFF"/>
-                </a:solidFill>
-                <a:latin typeface="Calibri"/>
-              </a:rPr>
-              <a:t>      - name: Construir</a:t>
-            </a:r>
-          </a:p>
-          <a:p>
-            <a:pPr>
-              <a:spcAft>
-                <a:spcPts val="400"/>
-              </a:spcAft>
-            </a:pPr>
-            <a:r>
-              <a:rPr sz="1400" b="0" i="0">
-                <a:solidFill>
-                  <a:srgbClr val="FFFFFF"/>
-                </a:solidFill>
-                <a:latin typeface="Calibri"/>
-              </a:rPr>
-              <a:t>        run: npm ci &amp;&amp; docker build -t turnos-api:0.1.0.</a:t>
-            </a:r>
-          </a:p>
-          <a:p>
-            <a:pPr>
-              <a:spcAft>
-                <a:spcPts val="400"/>
-              </a:spcAft>
-            </a:pPr>
-            <a:r>
-              <a:rPr sz="1400" b="0" i="0">
-                <a:solidFill>
-                  <a:srgbClr val="FFFFFF"/>
-                </a:solidFill>
-                <a:latin typeface="Calibri"/>
-              </a:rPr>
-              <a:t>      - name: Probar</a:t>
-            </a:r>
-          </a:p>
-          <a:p>
-            <a:pPr>
-              <a:spcAft>
-                <a:spcPts val="400"/>
-              </a:spcAft>
-            </a:pPr>
-            <a:r>
-              <a:rPr sz="1400" b="0" i="0">
-                <a:solidFill>
-                  <a:srgbClr val="FFFFFF"/>
-                </a:solidFill>
-                <a:latin typeface="Calibri"/>
-              </a:rPr>
-              <a:t>        run: npm test              # &lt;- si esto no puede fallar, no es CI</a:t>
-            </a:r>
-          </a:p>
-          <a:p>
-            <a:pPr>
-              <a:spcAft>
-                <a:spcPts val="400"/>
-              </a:spcAft>
-            </a:pPr>
-            <a:r>
-              <a:rPr sz="1400" b="0" i="0">
-                <a:solidFill>
-                  <a:srgbClr val="FFFFFF"/>
-                </a:solidFill>
-                <a:latin typeface="Calibri"/>
-              </a:rPr>
-              <a:t>      - name: Despliegue SIMULADO (no despliega a ningun servidor)</a:t>
-            </a:r>
-          </a:p>
-          <a:p>
-            <a:pPr>
-              <a:spcAft>
-                <a:spcPts val="400"/>
-              </a:spcAft>
-            </a:pPr>
-            <a:r>
-              <a:rPr sz="1400" b="0" i="0">
-                <a:solidFill>
-                  <a:srgbClr val="FFFFFF"/>
-                </a:solidFill>
-                <a:latin typeface="Calibri"/>
-              </a:rPr>
-              <a:t>        run: echo "Artefacto turnos-api:0.1.0 listo para desplegar"</a:t>
-            </a:r>
-          </a:p>
-        </p:txBody>
-      </p:sp>
-      <p:sp>
-        <p:nvSpPr>
-          <p:cNvPr id="9" name="TextBox 8"/>
-          <p:cNvSpPr txBox="1"/>
-          <p:nvPr/>
-        </p:nvSpPr>
-        <p:spPr>
-          <a:xfrm>
-            <a:off x="457200" y="6080760"/>
-            <a:ext cx="11277295" cy="320040"/>
-          </a:xfrm>
-          <a:prstGeom prst="rect">
-            <a:avLst/>
-          </a:prstGeom>
-          <a:noFill/>
-        </p:spPr>
-        <p:txBody>
-          <a:bodyPr wrap="square">
-            <a:spAutoFit/>
-          </a:bodyPr>
-          <a:lstStyle/>
-          <a:p>
-            <a:pPr algn="ctr"/>
-            <a:r>
-              <a:rPr sz="1200" b="0" i="1">
-                <a:solidFill>
-                  <a:srgbClr val="666666"/>
-                </a:solidFill>
-                <a:latin typeface="Calibri"/>
-              </a:rPr>
-              <a:t>Los tres pasos, en orden, y el ultimo rotulado como simulado. Secretos con ${{ secrets.NOMBRE }}, NUNCA en claro dentro del YAML.</a:t>
-            </a:r>
-          </a:p>
-        </p:txBody>
-      </p:sp>
-      <p:sp>
-        <p:nvSpPr>
-          <p:cNvPr id="10" name="TextBox 9"/>
-          <p:cNvSpPr txBox="1"/>
-          <p:nvPr/>
-        </p:nvSpPr>
-        <p:spPr>
-          <a:xfrm>
-            <a:off x="11185855" y="6473952"/>
-            <a:ext cx="640080" cy="274320"/>
-          </a:xfrm>
-          <a:prstGeom prst="rect">
-            <a:avLst/>
-          </a:prstGeom>
-          <a:noFill/>
-        </p:spPr>
-        <p:txBody>
-          <a:bodyPr wrap="square">
-            <a:spAutoFit/>
-          </a:bodyPr>
-          <a:lstStyle/>
-          <a:p>
-            <a:pPr algn="r"/>
-            <a:r>
-              <a:rPr sz="1100" b="0" i="0">
-                <a:solidFill>
-                  <a:srgbClr val="666666"/>
-                </a:solidFill>
-                <a:latin typeface="Calibri"/>
-              </a:rPr>
-              <a:t>28</a:t>
-            </a:r>
-          </a:p>
-        </p:txBody>
-      </p:sp>
-    </p:spTree>
-  </p:cSld>
-  <p:clrMapOvr>
-    <a:masterClrMapping/>
-  </p:clrMapOvr>
-</p:sld>
-</file>
-
-<file path=ppt/slides/slide29.xml><?xml version="1.0" encoding="utf-8"?>
-<p:sld xmlns:a="http://schemas.openxmlformats.org/drawingml/2006/main" xmlns:p="http://schemas.openxmlformats.org/presentationml/2006/main" xmlns:r="http://schemas.openxmlformats.org/officeDocument/2006/relationships">
-  <p:cSld>
-    <p:bg>
-      <p:bgPr>
-        <a:solidFill>
-          <a:srgbClr val="FFFFFF"/>
-        </a:solidFill>
-        <a:effectLst/>
-      </p:bgPr>
-    </p:bg>
-    <p:spTree>
-      <p:nvGrpSpPr>
-        <p:cNvPr id="1" name=""/>
-        <p:cNvGrpSpPr/>
-        <p:nvPr/>
-      </p:nvGrpSpPr>
-      <p:grpSpPr/>
-      <p:sp>
-        <p:nvSpPr>
-          <p:cNvPr id="2" name="Rectangle 1"/>
-          <p:cNvSpPr/>
-          <p:nvPr/>
-        </p:nvSpPr>
-        <p:spPr>
-          <a:xfrm>
-            <a:off x="0" y="0"/>
             <a:ext cx="12191695" cy="164592"/>
           </a:xfrm>
           <a:prstGeom prst="rect">
@@ -12808,7 +11836,7 @@
                 </a:solidFill>
                 <a:latin typeface="Calibri"/>
               </a:rPr>
-              <a:t>Integracion continua: el problema que resuelve, en definicion operativa (1/2)</a:t>
+              <a:t>Integracion continua: el problema que resuelve, en definicion operativa</a:t>
             </a:r>
           </a:p>
         </p:txBody>
@@ -12847,7 +11875,7 @@
                 </a:solidFill>
                 <a:latin typeface="Calibri"/>
               </a:rPr>
-              <a:t>–   Esta clase junta dos temas que parecen distintos y son el mismo asunto en dos momentos: automatizar la verificacion antes de que un cambio llegue a los usuarios, y observar el sistema despues de que llego.</a:t>
+              <a:t>–   El problema que resuelve la integracion continua tiene nombre historico, infierno de integracion: varios desarrolladores trabajan semanas por separado y al juntar el codigo aparecen conflictos y fallas que nadie sabe de donde vienen.</a:t>
             </a:r>
           </a:p>
           <a:p>
@@ -12863,7 +11891,7 @@
                 </a:solidFill>
                 <a:latin typeface="Calibri"/>
               </a:rPr>
-              <a:t>–   El problema que resuelve la integracion continua tiene nombre historico, infierno de integracion: varios desarrolladores trabajan semanas por separado y al juntar el codigo aparecen conflictos y fallas que nadie sabe de donde vienen.</a:t>
+              <a:t>–   Su version cotidiana en un equipo de estudiantes es la frase «en mi maquina funciona».</a:t>
             </a:r>
           </a:p>
           <a:p>
@@ -12879,7 +11907,23 @@
                 </a:solidFill>
                 <a:latin typeface="Calibri"/>
               </a:rPr>
-              <a:t>–   Su version cotidiana en un equipo de estudiantes es la frase «en mi maquina funciona».</a:t>
+              <a:t>–   Integracion continua, definida operativamente, es esto: cada vez que alguien sube un cambio al repositorio, un servidor automatico toma el codigo en un entorno limpio, lo construye, le corre las pruebas y avisa en minutos si algo se rompio.</a:t>
+            </a:r>
+          </a:p>
+          <a:p>
+            <a:pPr>
+              <a:spcAft>
+                <a:spcPts val="800"/>
+              </a:spcAft>
+            </a:pPr>
+            <a:r>
+              <a:rPr sz="2000" b="0" i="0">
+                <a:solidFill>
+                  <a:srgbClr val="333333"/>
+                </a:solidFill>
+                <a:latin typeface="Calibri"/>
+              </a:rPr>
+              <a:t>–   El valor no esta en la automatizacion sino en el intervalo de retroalimentacion: encontrar el error tres minutos despues de escribirlo, cuando el autor recuerda que hizo, cuesta una fraccion de hallarlo tres semanas despues en el computador de otra persona.</a:t>
             </a:r>
           </a:p>
         </p:txBody>
@@ -13060,7 +12104,7 @@
                 </a:solidFill>
                 <a:latin typeface="Calibri"/>
               </a:rPr>
-              <a:t>Integracion continua: el problema que resuelve, en definicion operativa (2/2)</a:t>
+              <a:t>Entrega continua y despliegue continuo: la sigla CD es ambigua</a:t>
             </a:r>
           </a:p>
         </p:txBody>
@@ -13099,7 +12143,7 @@
                 </a:solidFill>
                 <a:latin typeface="Calibri"/>
               </a:rPr>
-              <a:t>–   Integracion continua, definida operativamente, es esto: cada vez que alguien sube un cambio al repositorio, un servidor automatico toma el codigo en un entorno limpio, lo construye, le corre las pruebas y avisa en minutos si algo se rompio.</a:t>
+              <a:t>–   La sigla CD es ambigua y ahi esta la confusion que hay que desarmar en el primer minuto.</a:t>
             </a:r>
           </a:p>
           <a:p>
@@ -13115,7 +12159,55 @@
                 </a:solidFill>
                 <a:latin typeface="Calibri"/>
               </a:rPr>
-              <a:t>–   El valor no esta en la automatizacion sino en el intervalo de retroalimentacion: encontrar el error tres minutos despues de escribirlo, cuando el autor recuerda que hizo, cuesta una fraccion de hallarlo tres semanas despues en el computador de otra persona.</a:t>
+              <a:t>–   Despliegue continuo significa que ese ultimo paso tambien es automatico y el cambio llega a produccion sin intervencion.</a:t>
+            </a:r>
+          </a:p>
+          <a:p>
+            <a:pPr>
+              <a:spcAft>
+                <a:spcPts val="800"/>
+              </a:spcAft>
+            </a:pPr>
+            <a:r>
+              <a:rPr sz="2000" b="0" i="0">
+                <a:solidFill>
+                  <a:srgbClr val="333333"/>
+                </a:solidFill>
+                <a:latin typeface="Calibri"/>
+              </a:rPr>
+              <a:t>–   Las dos comparten la sigla CD, no son lo mismo, y ninguna es sinonimo de integracion continua: CI valida, CD entrega o despliega.</a:t>
+            </a:r>
+          </a:p>
+          <a:p>
+            <a:pPr>
+              <a:spcAft>
+                <a:spcPts val="800"/>
+              </a:spcAft>
+            </a:pPr>
+            <a:r>
+              <a:rPr sz="2000" b="0" i="0">
+                <a:solidFill>
+                  <a:srgbClr val="333333"/>
+                </a:solidFill>
+                <a:latin typeface="Calibri"/>
+              </a:rPr>
+              <a:t>–   Se puede tener CI sin nada de CD, y es lo que se construye hoy porque el curso no usa infraestructura de pago ni pide tarjeta de credito.</a:t>
+            </a:r>
+          </a:p>
+          <a:p>
+            <a:pPr>
+              <a:spcAft>
+                <a:spcPts val="800"/>
+              </a:spcAft>
+            </a:pPr>
+            <a:r>
+              <a:rPr sz="2000" b="0" i="0">
+                <a:solidFill>
+                  <a:srgbClr val="333333"/>
+                </a:solidFill>
+                <a:latin typeface="Calibri"/>
+              </a:rPr>
+              <a:t>–   La forma tipica del error es tener un paso llamado deploy que solo imprime un mensaje y concluir que ya hay despliegue continuo; el nombre del paso no despliega nada.</a:t>
             </a:r>
           </a:p>
         </p:txBody>
@@ -13296,7 +12388,7 @@
                 </a:solidFill>
                 <a:latin typeface="Calibri"/>
               </a:rPr>
-              <a:t>Entrega continua y despliegue continuo: la sigla CD es ambigua</a:t>
+              <a:t>GitHub Actions en cinco palabras</a:t>
             </a:r>
           </a:p>
         </p:txBody>
@@ -13335,7 +12427,7 @@
                 </a:solidFill>
                 <a:latin typeface="Calibri"/>
               </a:rPr>
-              <a:t>–   La sigla CD es ambigua y ahi esta la confusion que hay que desarmar en el primer minuto.</a:t>
+              <a:t>–   GitHub Actions es la herramienta del dia porque es gratis, corre en el navegador y produce evidencia verificable.</a:t>
             </a:r>
           </a:p>
           <a:p>
@@ -13351,7 +12443,7 @@
                 </a:solidFill>
                 <a:latin typeface="Calibri"/>
               </a:rPr>
-              <a:t>–   Despliegue continuo significa que ese ultimo paso tambien es automatico y el cambio llega a produccion sin intervencion.</a:t>
+              <a:t>–   Un workflow es un archivo YAML en la carpeta.github/workflows; el nombre es libre y ci.yml es la convencion.</a:t>
             </a:r>
           </a:p>
           <a:p>
@@ -13367,7 +12459,7 @@
                 </a:solidFill>
                 <a:latin typeface="Calibri"/>
               </a:rPr>
-              <a:t>–   Las dos comparten la sigla CD, no son lo mismo, y ninguna es sinonimo de integracion continua: CI valida, CD entrega o despliega.</a:t>
+              <a:t>–   El evento o disparador declara cuando corre: on push para cada subida, on pull_request para cada propuesta de cambio, workflow_dispatch para un boton manual, schedule para una hora fija.</a:t>
             </a:r>
           </a:p>
           <a:p>
@@ -13383,7 +12475,7 @@
                 </a:solidFill>
                 <a:latin typeface="Calibri"/>
               </a:rPr>
-              <a:t>–   Se puede tener CI sin nada de CD, y es lo que se construye hoy porque el curso no usa infraestructura de pago ni pide tarjeta de credito.</a:t>
+              <a:t>–   Un job es un conjunto de pasos que corre en un runner, una maquina virtual limpia que se crea para esa ejecucion y se destruye al terminar.</a:t>
             </a:r>
           </a:p>
           <a:p>
@@ -13399,7 +12491,23 @@
                 </a:solidFill>
                 <a:latin typeface="Calibri"/>
               </a:rPr>
-              <a:t>–   La forma tipica del error es tener un paso llamado deploy que solo imprime un mensaje y concluir que ya hay despliegue continuo; el nombre del paso no despliega nada.</a:t>
+              <a:t>–   Un step es un comando o el uso de una action, unidad reutilizable publicada por otros.</a:t>
+            </a:r>
+          </a:p>
+          <a:p>
+            <a:pPr>
+              <a:spcAft>
+                <a:spcPts val="800"/>
+              </a:spcAft>
+            </a:pPr>
+            <a:r>
+              <a:rPr sz="2000" b="0" i="0">
+                <a:solidFill>
+                  <a:srgbClr val="333333"/>
+                </a:solidFill>
+                <a:latin typeface="Calibri"/>
+              </a:rPr>
+              <a:t>–   Que el runner sea limpio y efimero es el punto pedagogico central: demuestra que la construccion no depende de nada instalado a mano en el portatil de nadie.</a:t>
             </a:r>
           </a:p>
         </p:txBody>

--- a/Arquitectura de Sistemas Computacionales/Clases/Clase 8 - Monitoreo optimizacion y CI-CD/Presentacion.pptx
+++ b/Arquitectura de Sistemas Computacionales/Clases/Clase 8 - Monitoreo optimizacion y CI-CD/Presentacion.pptx
@@ -638,492 +638,6 @@
           <a:p/>
           <a:p>
             <a:r>
-              <a:t>El plan de monitoreo es una tabla de entre 4 y 6 filas con TRES columnas: «Senal», «Que se mide en MI dominio» y «Umbral u objetivo».</a:t>
-            </a:r>
-          </a:p>
-          <a:p/>
-          <a:p>
-            <a:r>
-              <a:t>La regla que decide la mitad de la nota se dice en una frase: una senal sin umbral NO SUMA, aunque este bien elegida.</a:t>
-            </a:r>
-          </a:p>
-          <a:p/>
-          <a:p>
-            <a:r>
-              <a:t>«el listado de disponibilidad debe responder en menos de 400 milisegundos y si pasa de 800 se revisa» si, porque define cuando hay que actuar.</a:t>
-            </a:r>
-          </a:p>
-          <a:p/>
-          <a:p>
-            <a:r>
-              <a:t>La segunda columna tiene que referirse a operaciones del dominio propio, asi que «el sistema» no es una respuesta y «el listado de disponibilidad de canchas» o «el registro de una reserva» si.</a:t>
-            </a:r>
-          </a:p>
-          <a:p/>
-          <a:p>
-            <a:r>
-              <a:t>Cada umbral necesita su accion: que se HACE cuando se cruza es lo que convierte una lista de metricas en un plan de operacion.</a:t>
-            </a:r>
-          </a:p>
-          <a:p/>
-          <a:p>
-            <a:r>
-              <a:t>Un ejemplo de fila completa es: Senal «latencia del listado de turnos»</a:t>
-            </a:r>
-          </a:p>
-          <a:p/>
-          <a:p>
-            <a:r>
-              <a:t>Que se mide «p95 del GET /turnos»</a:t>
-            </a:r>
-          </a:p>
-          <a:p/>
-          <a:p>
-            <a:r>
-              <a:t>Umbral «menos de 300 ms; si se supera durante 5 minutos, se revisa el indice de la consulta».</a:t>
-            </a:r>
-          </a:p>
-          <a:p/>
-          <a:p>
-            <a:r>
-              <a:t>Un error comun es un umbral sin numero, como «latencia alta»: no dice cuando actuar.</a:t>
-            </a:r>
-          </a:p>
-          <a:p/>
-          <a:p>
-            <a:r>
-              <a:t>Otro es una senal generica, como «el sistema»: la fila tiene que nombrar una operacion concreta del dominio.</a:t>
-            </a:r>
-          </a:p>
-          <a:p/>
-          <a:p>
-            <a:r>
-              <a:t>NOTAS:</a:t>
-            </a:r>
-          </a:p>
-          <a:p/>
-          <a:p>
-            <a:r>
-              <a:t>«Medimos la latencia» no permite decidir nada</a:t>
-            </a:r>
-          </a:p>
-          <a:p/>
-          <a:p>
-            <a:r>
-              <a:t>Esa accion no es una cuarta columna: se escribe dentro del umbral, como en el ejemplo del listado.</a:t>
-            </a:r>
-          </a:p>
-          <a:p/>
-          <a:p>
-            <a:r>
-              <a:t>La fila tiene senal, objeto concreto del dominio y una accion atada al umbral.</a:t>
-            </a:r>
-          </a:p>
-          <a:p/>
-          <a:p>
-            <a:r>
-              <a:t>(No se proyecta) El reparto de sus 6 puntos es un punto por senal bien formada con su umbral hasta la cuarta, hasta un punto adicional entre las senales quinta y sexta, y un punto por que al menos una sea un registro.</a:t>
-            </a:r>
-          </a:p>
-          <a:p/>
-          <a:p>
-            <a:r>
-              <a:t>(No se proyecta) El umbral puede ser discutible, y hay que decir que se acepta discutible: lo que no puede es faltar.</a:t>
-            </a:r>
-          </a:p>
-          <a:p/>
-          <a:p>
-            <a:r>
-              <a:t>(No se proyecta) Una tabla de referencia para CloudLite, que el docente puede llenar en vivo: latencia p95 del inicio de sesion y del listado principal, con objetivo bajo 300 milisegundos; peticiones por minuto en la hora pico, con un valor esperado que sirva de linea base; porcentaje de respuestas 5xx, con alerta sobre el 1 por ciento sostenido; uso del pool de conexiones, con alerta sobre el 80 por ciento; y la fila que casi nadie escribe y vale un punto, un REGISTRO: el log estructurado de cada reserva rechazada y de cada intento de inicio de sesion fallido, con identificador de peticion, ruta y codigo, cuyo umbral es un evento observable, por ejemplo mas de cinco fallos del mismo usuario en diez minutos se revisa.</a:t>
-            </a:r>
-          </a:p>
-          <a:p/>
-          <a:p>
-            <a:r>
-              <a:t>(No se proyecta) Conviene proyectar esa fila y decir «esta es la que falta en el 80 por ciento de las entregas».</a:t>
-            </a:r>
-          </a:p>
-          <a:p/>
-          <a:p>
-            <a:r>
-              <a:t>(No se proyecta) Ahi entra la optimizacion de la segunda mitad del tema: paginar, con veinte a cincuenta elementos por pagina, porque un endpoint que devuelve cincuenta mil registros es problema de latencia y de memoria; indexar la columna por la que se filtra, porque sin indice el motor recorre la tabla completa; cachear lecturas repetidas, donde una tasa de acierto del 90 por ciento significa que nueve de cada diez lecturas no llegan a la base; y limitar la tasa de peticiones, el control de denegacion de servicio de la Clase 6.</a:t>
-            </a:r>
-          </a:p>
-        </p:txBody>
-      </p:sp>
-      <p:sp>
-        <p:nvSpPr>
-          <p:cNvPr id="4" name="Slide Number Placeholder 3"/>
-          <p:cNvSpPr>
-            <a:spLocks noGrp="1"/>
-          </p:cNvSpPr>
-          <p:nvPr>
-            <p:ph type="sldNum" idx="5" sz="quarter"/>
-          </p:nvPr>
-        </p:nvSpPr>
-        <p:spPr/>
-      </p:sp>
-    </p:spTree>
-  </p:cSld>
-  <p:clrMapOvr>
-    <a:masterClrMapping/>
-  </p:clrMapOvr>
-</p:notes>
-</file>
-
-<file path=ppt/notesSlides/notesSlide11.xml><?xml version="1.0" encoding="utf-8"?>
-<p:notes xmlns:a="http://schemas.openxmlformats.org/drawingml/2006/main" xmlns:p="http://schemas.openxmlformats.org/presentationml/2006/main" xmlns:r="http://schemas.openxmlformats.org/officeDocument/2006/relationships">
-  <p:cSld>
-    <p:spTree>
-      <p:nvGrpSpPr>
-        <p:cNvPr id="1" name=""/>
-        <p:cNvGrpSpPr/>
-        <p:nvPr/>
-      </p:nvGrpSpPr>
-      <p:grpSpPr>
-        <a:xfrm>
-          <a:off x="0" y="0"/>
-          <a:ext cx="0" cy="0"/>
-          <a:chOff x="0" y="0"/>
-          <a:chExt cx="0" cy="0"/>
-        </a:xfrm>
-      </p:grpSpPr>
-      <p:sp>
-        <p:nvSpPr>
-          <p:cNvPr id="2" name="Slide Image Placeholder 1"/>
-          <p:cNvSpPr>
-            <a:spLocks noGrp="1"/>
-          </p:cNvSpPr>
-          <p:nvPr>
-            <p:ph type="sldImg" idx="2"/>
-          </p:nvPr>
-        </p:nvSpPr>
-        <p:spPr/>
-      </p:sp>
-      <p:sp>
-        <p:nvSpPr>
-          <p:cNvPr id="3" name="Notes Placeholder 2"/>
-          <p:cNvSpPr>
-            <a:spLocks noGrp="1"/>
-          </p:cNvSpPr>
-          <p:nvPr>
-            <p:ph type="body" idx="3" sz="quarter"/>
-          </p:nvPr>
-        </p:nvSpPr>
-        <p:spPr/>
-        <p:txBody>
-          <a:bodyPr/>
-          <a:lstStyle/>
-          <a:p>
-            <a:r>
-              <a:t>TEXTO COMPLETO DE LA LÁMINA (se proyecta resumido):</a:t>
-            </a:r>
-          </a:p>
-          <a:p/>
-          <a:p>
-            <a:r>
-              <a:t>Un pipeline sano falla rapido: si la construccion falla, la prueba no se ejecuta, y el autor del cambio recibe el aviso en minutos.</a:t>
-            </a:r>
-          </a:p>
-          <a:p/>
-          <a:p>
-            <a:r>
-              <a:t>En GitHub Actions cada paso que termina con un codigo de salida distinto de 0 detiene el job y lo marca en rojo: esa es la condicion de fallo que convierte el workflow en una verificacion real.</a:t>
-            </a:r>
-          </a:p>
-          <a:p/>
-          <a:p>
-            <a:r>
-              <a:t>DESARROLLO (para explicarlo, no se proyecta):</a:t>
-            </a:r>
-          </a:p>
-          <a:p/>
-          <a:p>
-            <a:r>
-              <a:t>Un job corre en ubuntu-latest y hace, en este orden: descargar el codigo con la action de checkout, instalar el runtime con la action de setup del lenguaje</a:t>
-            </a:r>
-          </a:p>
-          <a:p/>
-          <a:p>
-            <a:r>
-              <a:t>Un paso Construir que instala dependencias y ejecuta docker build con la imagen etiquetada, un paso Probar que corre las pruebas</a:t>
-            </a:r>
-          </a:p>
-          <a:p/>
-          <a:p>
-            <a:r>
-              <a:t>Y un paso final rotulado como despliegue simulado que imprime la etiqueta de version y publica un artefacto, un archivo que queda guardado junto a la corrida.</a:t>
-            </a:r>
-          </a:p>
-          <a:p/>
-          <a:p>
-            <a:r>
-              <a:t>Que docker build forme parte de la construccion tiene un valor extra: comprueba en cada cambio que el Dockerfile sigue siendo valido, que es una de las cosas que se rompen en silencio.</a:t>
-            </a:r>
-          </a:p>
-          <a:p/>
-          <a:p>
-            <a:r>
-              <a:t>Un pipeline sano falla rapido: si la construccion falla, la prueba no se ejecuta, y el autor del cambio recibe el aviso en minutos.</a:t>
-            </a:r>
-          </a:p>
-          <a:p/>
-          <a:p>
-            <a:r>
-              <a:t>En GitHub Actions cada paso que termina con un codigo de salida distinto de 0 detiene el job y lo marca en rojo: esa es la condicion de fallo que convierte el workflow en una verificacion real.</a:t>
-            </a:r>
-          </a:p>
-          <a:p/>
-          <a:p>
-            <a:r>
-              <a:t>Un ejemplo de fallo util: alguien cambia la respuesta de /health y no actualiza la prueba; el paso de prueba termina con codigo 1, la corrida queda en rojo y el cambio no se integra hasta corregirlo.</a:t>
-            </a:r>
-          </a:p>
-          <a:p/>
-          <a:p>
-            <a:r>
-              <a:t>NOTAS:</a:t>
-            </a:r>
-          </a:p>
-          <a:p/>
-          <a:p>
-            <a:r>
-              <a:t>El workflow se dispara en push y en pull_request.</a:t>
-            </a:r>
-          </a:p>
-          <a:p/>
-          <a:p>
-            <a:r>
-              <a:t>(No se proyecta) El ejemplo concreto es el pipeline del stub de CloudLite, que ya existe desde la Clase 3 como Dockerfile y contenedor, y la diapositiva del ci.yml es el molde que se puede copiar.</a:t>
-            </a:r>
-          </a:p>
-          <a:p/>
-          <a:p>
-            <a:r>
-              <a:t>(No se proyecta) La evidencia del entregable es doble: el archivo ci.yml en el repositorio y la captura de una corrida en verde con los nombres de los pasos visibles; si Actions falla por cuota o por red se acepta el YAML con la explicacion paso por paso, pero eso es plan B y hay que decir que lo es.</a:t>
-            </a:r>
-          </a:p>
-        </p:txBody>
-      </p:sp>
-      <p:sp>
-        <p:nvSpPr>
-          <p:cNvPr id="4" name="Slide Number Placeholder 3"/>
-          <p:cNvSpPr>
-            <a:spLocks noGrp="1"/>
-          </p:cNvSpPr>
-          <p:nvPr>
-            <p:ph type="sldNum" idx="5" sz="quarter"/>
-          </p:nvPr>
-        </p:nvSpPr>
-        <p:spPr/>
-      </p:sp>
-    </p:spTree>
-  </p:cSld>
-  <p:clrMapOvr>
-    <a:masterClrMapping/>
-  </p:clrMapOvr>
-</p:notes>
-</file>
-
-<file path=ppt/notesSlides/notesSlide12.xml><?xml version="1.0" encoding="utf-8"?>
-<p:notes xmlns:a="http://schemas.openxmlformats.org/drawingml/2006/main" xmlns:p="http://schemas.openxmlformats.org/presentationml/2006/main" xmlns:r="http://schemas.openxmlformats.org/officeDocument/2006/relationships">
-  <p:cSld>
-    <p:spTree>
-      <p:nvGrpSpPr>
-        <p:cNvPr id="1" name=""/>
-        <p:cNvGrpSpPr/>
-        <p:nvPr/>
-      </p:nvGrpSpPr>
-      <p:grpSpPr>
-        <a:xfrm>
-          <a:off x="0" y="0"/>
-          <a:ext cx="0" cy="0"/>
-          <a:chOff x="0" y="0"/>
-          <a:chExt cx="0" cy="0"/>
-        </a:xfrm>
-      </p:grpSpPr>
-      <p:sp>
-        <p:nvSpPr>
-          <p:cNvPr id="2" name="Slide Image Placeholder 1"/>
-          <p:cNvSpPr>
-            <a:spLocks noGrp="1"/>
-          </p:cNvSpPr>
-          <p:nvPr>
-            <p:ph type="sldImg" idx="2"/>
-          </p:nvPr>
-        </p:nvSpPr>
-        <p:spPr/>
-      </p:sp>
-      <p:sp>
-        <p:nvSpPr>
-          <p:cNvPr id="3" name="Notes Placeholder 2"/>
-          <p:cNvSpPr>
-            <a:spLocks noGrp="1"/>
-          </p:cNvSpPr>
-          <p:nvPr>
-            <p:ph type="body" idx="3" sz="quarter"/>
-          </p:nvPr>
-        </p:nvSpPr>
-        <p:spPr/>
-        <p:txBody>
-          <a:bodyPr/>
-          <a:lstStyle/>
-          <a:p>
-            <a:r>
-              <a:t>DESARROLLO (para explicarlo, no se proyecta):</a:t>
-            </a:r>
-          </a:p>
-          <a:p/>
-          <a:p>
-            <a:r>
-              <a:t>Un ci.yml propio se explica en tres campos.</a:t>
-            </a:r>
-          </a:p>
-          <a:p/>
-          <a:p>
-            <a:r>
-              <a:t>Y el tercero, el corazon del asunto: con que condicion el pipeline debe FALLAR.</a:t>
-            </a:r>
-          </a:p>
-          <a:p/>
-          <a:p>
-            <a:r>
-              <a:t>Un pipeline que no puede fallar nunca no sirve: un workflow cuyo unico paso imprime un mensaje de exito siempre sale verde, y un check que siempre sale verde no aporta ninguna informacion; es una decoracion.</a:t>
-            </a:r>
-          </a:p>
-          <a:p/>
-          <a:p>
-            <a:r>
-              <a:t>Los tres campos son: que se construye, que se prueba y que condicion vuelve rojo el pipeline.</a:t>
-            </a:r>
-          </a:p>
-          <a:p/>
-          <a:p>
-            <a:r>
-              <a:t>Un ejemplo de condicion real es: la corrida falla si npm test devuelve un codigo distinto de 0, por ejemplo cuando GET /health no responde 200.</a:t>
-            </a:r>
-          </a:p>
-          <a:p/>
-          <a:p>
-            <a:r>
-              <a:t>NOTAS:</a:t>
-            </a:r>
-          </a:p>
-          <a:p/>
-          <a:p>
-            <a:r>
-              <a:t>Uno y medio, que se compila o se instala.</a:t>
-            </a:r>
-          </a:p>
-          <a:p/>
-          <a:p>
-            <a:r>
-              <a:t>Uno y medio, que se ejecuta en la prueba y que comprueba exactamente.</a:t>
-            </a:r>
-          </a:p>
-          <a:p/>
-          <a:p>
-            <a:r>
-              <a:t>Si la respuesta no aparece en diez segundos, el pipeline no valida nada todavia.</a:t>
-            </a:r>
-          </a:p>
-          <a:p/>
-          <a:p>
-            <a:r>
-              <a:t>(No se proyecta) La forma de responderlo es una prueba mental que el docente debe hacer en voz alta y en vivo: que error tendria que introducir yo en el codigo para que este pipeline lo detecte.</a:t>
-            </a:r>
-          </a:p>
-          <a:p/>
-          <a:p>
-            <a:r>
-              <a:t>(No se proyecta) Aqui es donde aparece la pregunta previsible del grupo, y hay que salir a su encuentro: para que escribir pruebas de un stub que casi no hace nada.</a:t>
-            </a:r>
-          </a:p>
-          <a:p/>
-          <a:p>
-            <a:r>
-              <a:t>(No se proyecta) La respuesta es que una sola prueba que verifique que el endpoint /health responde 200 detecta la clase de error mas costosa en operacion, que la aplicacion ya no arranca; y con eso la condicion de fallo se escribe sola: el check sale rojo si /health deja de responder 200, si falta una dependencia declarada o si el docker build no compila.</a:t>
-            </a:r>
-          </a:p>
-          <a:p/>
-          <a:p>
-            <a:r>
-              <a:t>(No se proyecta) Conviene romper el pipeline a proposito en la demo, porque un check rojo proyectado ensena mas que el parrafo anterior.</a:t>
-            </a:r>
-          </a:p>
-        </p:txBody>
-      </p:sp>
-      <p:sp>
-        <p:nvSpPr>
-          <p:cNvPr id="4" name="Slide Number Placeholder 3"/>
-          <p:cNvSpPr>
-            <a:spLocks noGrp="1"/>
-          </p:cNvSpPr>
-          <p:nvPr>
-            <p:ph type="sldNum" idx="5" sz="quarter"/>
-          </p:nvPr>
-        </p:nvSpPr>
-        <p:spPr/>
-      </p:sp>
-    </p:spTree>
-  </p:cSld>
-  <p:clrMapOvr>
-    <a:masterClrMapping/>
-  </p:clrMapOvr>
-</p:notes>
-</file>
-
-<file path=ppt/notesSlides/notesSlide13.xml><?xml version="1.0" encoding="utf-8"?>
-<p:notes xmlns:a="http://schemas.openxmlformats.org/drawingml/2006/main" xmlns:p="http://schemas.openxmlformats.org/presentationml/2006/main" xmlns:r="http://schemas.openxmlformats.org/officeDocument/2006/relationships">
-  <p:cSld>
-    <p:spTree>
-      <p:nvGrpSpPr>
-        <p:cNvPr id="1" name=""/>
-        <p:cNvGrpSpPr/>
-        <p:nvPr/>
-      </p:nvGrpSpPr>
-      <p:grpSpPr>
-        <a:xfrm>
-          <a:off x="0" y="0"/>
-          <a:ext cx="0" cy="0"/>
-          <a:chOff x="0" y="0"/>
-          <a:chExt cx="0" cy="0"/>
-        </a:xfrm>
-      </p:grpSpPr>
-      <p:sp>
-        <p:nvSpPr>
-          <p:cNvPr id="2" name="Slide Image Placeholder 1"/>
-          <p:cNvSpPr>
-            <a:spLocks noGrp="1"/>
-          </p:cNvSpPr>
-          <p:nvPr>
-            <p:ph type="sldImg" idx="2"/>
-          </p:nvPr>
-        </p:nvSpPr>
-        <p:spPr/>
-      </p:sp>
-      <p:sp>
-        <p:nvSpPr>
-          <p:cNvPr id="3" name="Notes Placeholder 2"/>
-          <p:cNvSpPr>
-            <a:spLocks noGrp="1"/>
-          </p:cNvSpPr>
-          <p:nvPr>
-            <p:ph type="body" idx="3" sz="quarter"/>
-          </p:nvPr>
-        </p:nvSpPr>
-        <p:spPr/>
-        <p:txBody>
-          <a:bodyPr/>
-          <a:lstStyle/>
-          <a:p>
-            <a:r>
-              <a:t>DESARROLLO (para explicarlo, no se proyecta):</a:t>
-            </a:r>
-          </a:p>
-          <a:p/>
-          <a:p>
-            <a:r>
               <a:t>La plataforma enmascara los secretos en el registro de salida, pero enmascarar no es impedir la fuga: si un paso imprime el valor transformado, por ejemplo codificado, sale en claro; la regla es no imprimir secretos nunca.</a:t>
             </a:r>
           </a:p>
@@ -1402,31 +916,61 @@
           <a:lstStyle/>
           <a:p>
             <a:r>
-              <a:t>TEXTO COMPLETO DE LA LÁMINA (se proyecta resumido):</a:t>
+              <a:t>DESARROLLO (para explicarlo, no se proyecta):</a:t>
             </a:r>
           </a:p>
           <a:p/>
           <a:p>
             <a:r>
-              <a:t>CI: build + test en cada push. CD: deploy — aquí simulado (echo/artifact).</a:t>
+              <a:t>GitHub Actions es la herramienta del dia porque es gratis, corre en el navegador y produce evidencia verificable.</a:t>
             </a:r>
           </a:p>
           <a:p/>
           <a:p>
             <a:r>
-              <a:t>GitHub Actions free: runners hosted; YAML en `.github/workflows/`.</a:t>
+              <a:t>Un workflow es un archivo YAML en la carpeta.github/workflows; el nombre es libre y ci.yml es la convencion.</a:t>
             </a:r>
           </a:p>
           <a:p/>
           <a:p>
             <a:r>
-              <a:t>CI = integración continua: cada cambio se construye y se prueba solo. CD = entrega continua (queda listo para desplegar) o despliegue continuo (llega solo a producción).</a:t>
+              <a:t>El evento o disparador declara cuando corre: on push para cada subida, on pull_request para cada propuesta de cambio, workflow_dispatch para un boton manual, schedule para una hora fija.</a:t>
             </a:r>
           </a:p>
           <a:p/>
           <a:p>
             <a:r>
-              <a:t>«Ya tenemos CD» porque el YAML tiene un paso `deploy` es falso. Aquí llega a «listo para desplegar».</a:t>
+              <a:t>Un job es un conjunto de pasos que corre en un runner, una maquina virtual limpia que se crea para esa ejecucion y se destruye al terminar.</a:t>
+            </a:r>
+          </a:p>
+          <a:p/>
+          <a:p>
+            <a:r>
+              <a:t>Un step es un comando o el uso de una action, unidad reutilizable publicada por otros.</a:t>
+            </a:r>
+          </a:p>
+          <a:p/>
+          <a:p>
+            <a:r>
+              <a:t>Que el runner sea limpio y efimero es el punto pedagogico central: demuestra que la construccion no depende de nada instalado a mano en el portatil de nadie.</a:t>
+            </a:r>
+          </a:p>
+          <a:p/>
+          <a:p>
+            <a:r>
+              <a:t>NOTAS:</a:t>
+            </a:r>
+          </a:p>
+          <a:p/>
+          <a:p>
+            <a:r>
+              <a:t>Su vocabulario tiene cinco palabras.</a:t>
+            </a:r>
+          </a:p>
+          <a:p/>
+          <a:p>
+            <a:r>
+              <a:t>(No se proyecta) Advertencias: el YAML se indenta con espacios y nunca con tabulaciones, causa numero uno de un pipeline que no arranca; y en el nivel gratuito los repositorios publicos tienen minutos ilimitados mientras los privados tienen una cuota del orden de 2000 minutos al mes, cifra que conviene confirmar en la pagina de facturacion porque el proveedor la cambia.</a:t>
             </a:r>
           </a:p>
         </p:txBody>
@@ -1502,55 +1046,55 @@
           <a:p/>
           <a:p>
             <a:r>
-              <a:t>GitHub Actions es la herramienta del dia porque es gratis, corre en el navegador y produce evidencia verificable.</a:t>
+              <a:t>Un workflow no es un archivo cualquiera: tiene tres bloques nombrados y tres pasos en orden.</a:t>
             </a:r>
           </a:p>
           <a:p/>
           <a:p>
             <a:r>
-              <a:t>Un workflow es un archivo YAML en la carpeta.github/workflows; el nombre es libre y ci.yml es la convencion.</a:t>
+              <a:t>El primer bloque son los DISPARADORES, es decir la clave on, y basta con on push y pull_request bien escritos.</a:t>
             </a:r>
           </a:p>
           <a:p/>
           <a:p>
             <a:r>
-              <a:t>El evento o disparador declara cuando corre: on push para cada subida, on pull_request para cada propuesta de cambio, workflow_dispatch para un boton manual, schedule para una hora fija.</a:t>
+              <a:t>Los tres PASOS van presentes y en ORDEN: construccion, prueba y despliegue simulado.</a:t>
             </a:r>
           </a:p>
           <a:p/>
           <a:p>
             <a:r>
-              <a:t>Un job es un conjunto de pasos que corre en un runner, una maquina virtual limpia que se crea para esa ejecucion y se destruye al terminar.</a:t>
+              <a:t>El orden no es capricho ni estetica: probar antes de construir no prueba el artefacto que se va a entregar, y desplegar antes de probar es exactamente lo que la integracion continua existe para impedir.</a:t>
             </a:r>
           </a:p>
           <a:p/>
           <a:p>
             <a:r>
-              <a:t>Un step es un comando o el uso de una action, unidad reutilizable publicada por otros.</a:t>
+              <a:t>Un punto y medio adicional es que el paso de despliegue este ROTULADO como simulado y no prometa un despliegue real; con escribir «Despliegue SIMULADO (no despliega a ningun servidor)» en el nombre del paso se cumple.</a:t>
             </a:r>
           </a:p>
           <a:p/>
           <a:p>
             <a:r>
-              <a:t>Que el runner sea limpio y efimero es el punto pedagogico central: demuestra que la construccion no depende de nada instalado a mano en el portatil de nadie.</a:t>
+              <a:t>(No se proyecta) Un punto y medio es el ENTORNO de ejecucion, la clave runs-on, tipicamente ubuntu-latest; es el bloque que el estudiante omite mas y el mas facil de recuperar.</a:t>
             </a:r>
           </a:p>
           <a:p/>
           <a:p>
             <a:r>
-              <a:t>NOTAS:</a:t>
+              <a:t>(No se proyecta) Y un punto es la coherencia con el Dockerfile del Corte 1: la misma imagen y el mismo puerto, es decir cloudlite-api con su etiqueta 0.1.0 y el 8080 del EXPOSE de la Clase 3.</a:t>
             </a:r>
           </a:p>
           <a:p/>
           <a:p>
             <a:r>
-              <a:t>Su vocabulario tiene cinco palabras.</a:t>
+              <a:t>(No se proyecta) Falta la sancion, que conviene anunciar dos veces: la pregunta vale CERO completa si aparece un secreto escrito en claro dentro del YAML, sin importar lo bien que este el resto.</a:t>
             </a:r>
           </a:p>
           <a:p/>
           <a:p>
             <a:r>
-              <a:t>(No se proyecta) Advertencias: el YAML se indenta con espacios y nunca con tabulaciones, causa numero uno de un pipeline que no arranca; y en el nivel gratuito los repositorios publicos tienen minutos ilimitados mientras los privados tienen una cuota del orden de 2000 minutos al mes, cifra que conviene confirmar en la pagina de facturacion porque el proveedor la cambia.</a:t>
+              <a:t>(No se proyecta) Es la misma politica que el estudiante escribio en la pregunta 3 del Corte 2, y esta es la clase donde se comprueba si la cumple.</a:t>
             </a:r>
           </a:p>
         </p:txBody>
@@ -1626,55 +1170,73 @@
           <a:p/>
           <a:p>
             <a:r>
-              <a:t>Un workflow no es un archivo cualquiera: tiene tres bloques nombrados y tres pasos en orden.</a:t>
+              <a:t>Monitorear es vigilar indicadores decididos de antemano; observabilidad es la capacidad de responder preguntas nuevas sobre el sistema a partir de lo que el sistema emite, sin agregar codigo por cada duda.</a:t>
             </a:r>
           </a:p>
           <a:p/>
           <a:p>
             <a:r>
-              <a:t>El primer bloque son los DISPARADORES, es decir la clave on, y basta con on push y pull_request bien escritos.</a:t>
+              <a:t>Las metricas son numeros medidos en el tiempo, baratas porque se agregan, y detectan que algo cambio.</a:t>
             </a:r>
           </a:p>
           <a:p/>
           <a:p>
             <a:r>
-              <a:t>Los tres PASOS van presentes y en ORDEN: construccion, prueba y despliegue simulado.</a:t>
+              <a:t>Los logs, o registros, son eventos discretos con contexto, caros en volumen, y explican por que cambio.</a:t>
             </a:r>
           </a:p>
           <a:p/>
           <a:p>
             <a:r>
-              <a:t>El orden no es capricho ni estetica: probar antes de construir no prueba el artefacto que se va a entregar, y desplegar antes de probar es exactamente lo que la integracion continua existe para impedir.</a:t>
+              <a:t>La distincion entre metrica y registro importa: al menos una de las senales de un plan deberia ser un REGISTRO y no una metrica numerica, es decir algo que se escribe para poder reconstruir que paso despues.</a:t>
             </a:r>
           </a:p>
           <a:p/>
           <a:p>
             <a:r>
-              <a:t>Un punto y medio adicional es que el paso de despliegue este ROTULADO como simulado y no prometa un despliegue real; con escribir «Despliegue SIMULADO (no despliega a ningun servidor)» en el nombre del paso se cumple.</a:t>
+              <a:t>La practica minima documentable es el log estructurado: cada linea es un objeto con campos fijos como fecha, nivel, identificador de peticion, ruta, codigo de estado y duracion en milisegundos.</a:t>
             </a:r>
           </a:p>
           <a:p/>
           <a:p>
             <a:r>
-              <a:t>(No se proyecta) Un punto y medio es el ENTORNO de ejecucion, la clave runs-on, tipicamente ubuntu-latest; es el bloque que el estudiante omite mas y el mas facil de recuperar.</a:t>
+              <a:t>Con ese identificador propagado entre servicios se reconstruye el recorrido: una traza pobre, pero real.</a:t>
             </a:r>
           </a:p>
           <a:p/>
           <a:p>
             <a:r>
-              <a:t>(No se proyecta) Y un punto es la coherencia con el Dockerfile del Corte 1: la misma imagen y el mismo puerto, es decir cloudlite-api con su etiqueta 0.1.0 y el 8080 del EXPOSE de la Clase 3.</a:t>
+              <a:t>Un ejemplo de linea estructurada es: fecha 2026-10-03 10:15:02, nivel INFO, peticion a91f, ruta POST /turnos, estado 201, duracion 84 ms.</a:t>
             </a:r>
           </a:p>
           <a:p/>
           <a:p>
             <a:r>
-              <a:t>(No se proyecta) Falta la sancion, que conviene anunciar dos veces: la pregunta vale CERO completa si aparece un secreto escrito en claro dentro del YAML, sin importar lo bien que este el resto.</a:t>
+              <a:t>Un error comun es escribir logs como frases libres: se leen bien, pero no se pueden filtrar ni contar.</a:t>
             </a:r>
           </a:p>
           <a:p/>
           <a:p>
             <a:r>
-              <a:t>(No se proyecta) Es la misma politica que el estudiante escribio en la pregunta 3 del Corte 2, y esta es la clase donde se comprueba si la cumple.</a:t>
+              <a:t>NOTAS:</a:t>
+            </a:r>
+          </a:p>
+          <a:p/>
+          <a:p>
+            <a:r>
+              <a:t>Se apoya en tres tipos de senal.</a:t>
+            </a:r>
+          </a:p>
+          <a:p/>
+          <a:p>
+            <a:r>
+              <a:t>(No se proyecta) La segunda mitad de la clase cambia de lado: ya no se trata de validar antes, sino de saber que pasa despues.</a:t>
+            </a:r>
+          </a:p>
+          <a:p/>
+          <a:p>
+            <a:r>
+              <a:t>(No se proyecta) Las trazas siguen el recorrido de una sola peticion por varios servicios y son necesarias porque la Clase 4 convirtio el sistema en distribuido: cuando la peticion pasa por la API y por el servicio de notificaciones, saber cual de los dos tardo es imposible con metricas agregadas.</a:t>
             </a:r>
           </a:p>
         </p:txBody>
@@ -1744,37 +1306,67 @@
           <a:lstStyle/>
           <a:p>
             <a:r>
-              <a:t>TEXTO COMPLETO DE LA LÁMINA (se proyecta resumido):</a:t>
+              <a:t>DESARROLLO (para explicarlo, no se proyecta):</a:t>
             </a:r>
           </a:p>
           <a:p/>
           <a:p>
             <a:r>
-              <a:t>Tres bloques obligatorios: disparadores (`on`) · entorno (`runs-on`) · pasos.</a:t>
+              <a:t>Las cuatro senales de oro son latencia, trafico, errores y saturacion, y cada una necesita definicion operativa.</a:t>
             </a:r>
           </a:p>
           <a:p/>
           <a:p>
             <a:r>
-              <a:t>Los pasos, en este orden: construcción → prueba → despliegue simulado.</a:t>
+              <a:t>Trafico es cuanta demanda llega, en peticiones por segundo o por minuto.</a:t>
             </a:r>
           </a:p>
           <a:p/>
           <a:p>
             <a:r>
-              <a:t>Ejemplo: `on: [push, pull_request]` · `runs-on: ubuntu-latest` · pasos checkout, build, test, deploy simulado.</a:t>
+              <a:t>Saturacion es que tan cerca esta el recurso mas escaso de su limite: CPU, memoria, disco o, en la mayoria de las APIs reales, las conexiones libres del pool de la base de datos</a:t>
             </a:r>
           </a:p>
           <a:p/>
           <a:p>
             <a:r>
-              <a:t>Secrets solo vía Settings; nunca en el YAML en claro: un secreto escrito queda en el historial del repositorio.</a:t>
+              <a:t>La convencion es alertar cuando un recurso pasa del 70 u 80 por ciento sostenido, y es convencion, no ley.</a:t>
             </a:r>
           </a:p>
           <a:p/>
           <a:p>
             <a:r>
-              <a:t>Un CI que solo imprime «OK» no es CI: tienes que poder decir qué error lo pondría rojo.</a:t>
+              <a:t>Latencia merece explicacion aparte porque introduce el percentil, el valor por debajo del cual cae un porcentaje dado de las mediciones: si el p95 de la API es 300 milisegundos</a:t>
+            </a:r>
+          </a:p>
+          <a:p/>
+          <a:p>
+            <a:r>
+              <a:t>95 de cada 100 peticiones respondieron en 300 milisegundos o menos y 5 tardaron mas.</a:t>
+            </a:r>
+          </a:p>
+          <a:p/>
+          <a:p>
+            <a:r>
+              <a:t>Es mas honesto que el promedio, y el ejemplo lo prueba: 99 peticiones de 50 milisegundos y una de 5 segundos dan un promedio de 99 milisegundos, que parece excelente, mientras el p99 es 5 segundos y corresponde a un usuario mirando una pantalla congelada.</a:t>
+            </a:r>
+          </a:p>
+          <a:p/>
+          <a:p>
+            <a:r>
+              <a:t>En CloudLite Turnos las cuatro senales son: latencia, el p95 del endpoint de reserva; trafico, las reservas por minuto; errores, el porcentaje de respuestas 5xx; saturacion, el uso del pool de conexiones a la base de datos.</a:t>
+            </a:r>
+          </a:p>
+          <a:p/>
+          <a:p>
+            <a:r>
+              <a:t>Un error comun es medir solo la CPU: es una senal de saturacion entre varias, y en una API que espera a la base de datos casi nunca es la primera en agotarse.</a:t>
+            </a:r>
+          </a:p>
+          <a:p/>
+          <a:p>
+            <a:r>
+              <a:t>(No se proyecta) Errores es la proporcion de peticiones que fallan, tipicamente el porcentaje de respuestas 5xx; conviene expresarlo como disponibilidad, y aqui hay aritmetica que el docente debe citar: 99,9 por ciento equivale a unos 43 minutos de indisponibilidad al mes y 99,99 por ciento a unos 4 minutos, lo cual no es convencion sino calculo sobre los 43.200 minutos de un mes de treinta dias.</a:t>
             </a:r>
           </a:p>
         </p:txBody>
@@ -1850,73 +1442,115 @@
           <a:p/>
           <a:p>
             <a:r>
-              <a:t>Monitorear es vigilar indicadores decididos de antemano; observabilidad es la capacidad de responder preguntas nuevas sobre el sistema a partir de lo que el sistema emite, sin agregar codigo por cada duda.</a:t>
+              <a:t>El plan de monitoreo es una tabla de entre 4 y 6 filas con TRES columnas: «Senal», «Que se mide en MI dominio» y «Umbral u objetivo».</a:t>
             </a:r>
           </a:p>
           <a:p/>
           <a:p>
             <a:r>
-              <a:t>Las metricas son numeros medidos en el tiempo, baratas porque se agregan, y detectan que algo cambio.</a:t>
+              <a:t>La regla que decide la mitad de la nota se dice en una frase: una senal sin umbral NO SUMA, aunque este bien elegida.</a:t>
             </a:r>
           </a:p>
           <a:p/>
           <a:p>
             <a:r>
-              <a:t>Los logs, o registros, son eventos discretos con contexto, caros en volumen, y explican por que cambio.</a:t>
+              <a:t>«el listado de disponibilidad debe responder en menos de 400 milisegundos y si pasa de 800 se revisa» si, porque define cuando hay que actuar.</a:t>
             </a:r>
           </a:p>
           <a:p/>
           <a:p>
             <a:r>
-              <a:t>La distincion entre metrica y registro importa: al menos una de las senales de un plan deberia ser un REGISTRO y no una metrica numerica, es decir algo que se escribe para poder reconstruir que paso despues.</a:t>
+              <a:t>La segunda columna tiene que referirse a operaciones del dominio propio, asi que «el sistema» no es una respuesta y «el listado de disponibilidad de canchas» o «el registro de una reserva» si.</a:t>
             </a:r>
           </a:p>
           <a:p/>
           <a:p>
             <a:r>
-              <a:t>La practica minima documentable es el log estructurado: cada linea es un objeto con campos fijos como fecha, nivel, identificador de peticion, ruta, codigo de estado y duracion en milisegundos.</a:t>
+              <a:t>Cada umbral necesita su accion: que se HACE cuando se cruza es lo que convierte una lista de metricas en un plan de operacion.</a:t>
             </a:r>
           </a:p>
           <a:p/>
           <a:p>
             <a:r>
-              <a:t>Con ese identificador propagado entre servicios se reconstruye el recorrido: una traza pobre, pero real.</a:t>
+              <a:t>Un ejemplo de fila completa es: Senal «latencia del listado de turnos»</a:t>
             </a:r>
           </a:p>
           <a:p/>
           <a:p>
             <a:r>
-              <a:t>Un ejemplo de linea estructurada es: fecha 2026-10-03 10:15:02, nivel INFO, peticion a91f, ruta POST /turnos, estado 201, duracion 84 ms.</a:t>
+              <a:t>Que se mide «p95 del GET /turnos»</a:t>
             </a:r>
           </a:p>
           <a:p/>
           <a:p>
             <a:r>
-              <a:t>Un error comun es escribir logs como frases libres: se leen bien, pero no se pueden filtrar ni contar.</a:t>
+              <a:t>Umbral «menos de 300 ms; si se supera durante 5 minutos, se revisa el indice de la consulta».</a:t>
             </a:r>
           </a:p>
           <a:p/>
           <a:p>
             <a:r>
+              <a:t>Un error comun es un umbral sin numero, como «latencia alta»: no dice cuando actuar.</a:t>
+            </a:r>
+          </a:p>
+          <a:p/>
+          <a:p>
+            <a:r>
+              <a:t>Otro es una senal generica, como «el sistema»: la fila tiene que nombrar una operacion concreta del dominio.</a:t>
+            </a:r>
+          </a:p>
+          <a:p/>
+          <a:p>
+            <a:r>
               <a:t>NOTAS:</a:t>
             </a:r>
           </a:p>
           <a:p/>
           <a:p>
             <a:r>
-              <a:t>Se apoya en tres tipos de senal.</a:t>
+              <a:t>«Medimos la latencia» no permite decidir nada</a:t>
             </a:r>
           </a:p>
           <a:p/>
           <a:p>
             <a:r>
-              <a:t>(No se proyecta) La segunda mitad de la clase cambia de lado: ya no se trata de validar antes, sino de saber que pasa despues.</a:t>
+              <a:t>Esa accion no es una cuarta columna: se escribe dentro del umbral, como en el ejemplo del listado.</a:t>
             </a:r>
           </a:p>
           <a:p/>
           <a:p>
             <a:r>
-              <a:t>(No se proyecta) Las trazas siguen el recorrido de una sola peticion por varios servicios y son necesarias porque la Clase 4 convirtio el sistema en distribuido: cuando la peticion pasa por la API y por el servicio de notificaciones, saber cual de los dos tardo es imposible con metricas agregadas.</a:t>
+              <a:t>La fila tiene senal, objeto concreto del dominio y una accion atada al umbral.</a:t>
+            </a:r>
+          </a:p>
+          <a:p/>
+          <a:p>
+            <a:r>
+              <a:t>(No se proyecta) El reparto de sus 6 puntos es un punto por senal bien formada con su umbral hasta la cuarta, hasta un punto adicional entre las senales quinta y sexta, y un punto por que al menos una sea un registro.</a:t>
+            </a:r>
+          </a:p>
+          <a:p/>
+          <a:p>
+            <a:r>
+              <a:t>(No se proyecta) El umbral puede ser discutible, y hay que decir que se acepta discutible: lo que no puede es faltar.</a:t>
+            </a:r>
+          </a:p>
+          <a:p/>
+          <a:p>
+            <a:r>
+              <a:t>(No se proyecta) Una tabla de referencia para CloudLite, que el docente puede llenar en vivo: latencia p95 del inicio de sesion y del listado principal, con objetivo bajo 300 milisegundos; peticiones por minuto en la hora pico, con un valor esperado que sirva de linea base; porcentaje de respuestas 5xx, con alerta sobre el 1 por ciento sostenido; uso del pool de conexiones, con alerta sobre el 80 por ciento; y la fila que casi nadie escribe y vale un punto, un REGISTRO: el log estructurado de cada reserva rechazada y de cada intento de inicio de sesion fallido, con identificador de peticion, ruta y codigo, cuyo umbral es un evento observable, por ejemplo mas de cinco fallos del mismo usuario en diez minutos se revisa.</a:t>
+            </a:r>
+          </a:p>
+          <a:p/>
+          <a:p>
+            <a:r>
+              <a:t>(No se proyecta) Conviene proyectar esa fila y decir «esta es la que falta en el 80 por ciento de las entregas».</a:t>
+            </a:r>
+          </a:p>
+          <a:p/>
+          <a:p>
+            <a:r>
+              <a:t>(No se proyecta) Ahi entra la optimizacion de la segunda mitad del tema: paginar, con veinte a cincuenta elementos por pagina, porque un endpoint que devuelve cincuenta mil registros es problema de latencia y de memoria; indexar la columna por la que se filtra, porque sin indice el motor recorre la tabla completa; cachear lecturas repetidas, donde una tasa de acierto del 90 por ciento significa que nueve de cada diez lecturas no llegan a la base; y limitar la tasa de peticiones, el control de denegacion de servicio de la Clase 6.</a:t>
             </a:r>
           </a:p>
         </p:txBody>
@@ -1992,61 +1626,67 @@
           <a:p/>
           <a:p>
             <a:r>
-              <a:t>Las cuatro senales de oro son latencia, trafico, errores y saturacion, y cada una necesita definicion operativa.</a:t>
+              <a:t>Un job corre en ubuntu-latest y hace, en este orden: descargar el codigo con la action de checkout, instalar el runtime con la action de setup del lenguaje</a:t>
             </a:r>
           </a:p>
           <a:p/>
           <a:p>
             <a:r>
-              <a:t>Trafico es cuanta demanda llega, en peticiones por segundo o por minuto.</a:t>
+              <a:t>Un paso Construir que instala dependencias y ejecuta docker build con la imagen etiquetada, un paso Probar que corre las pruebas</a:t>
             </a:r>
           </a:p>
           <a:p/>
           <a:p>
             <a:r>
-              <a:t>Saturacion es que tan cerca esta el recurso mas escaso de su limite: CPU, memoria, disco o, en la mayoria de las APIs reales, las conexiones libres del pool de la base de datos</a:t>
+              <a:t>Y un paso final rotulado como despliegue simulado que imprime la etiqueta de version y publica un artefacto, un archivo que queda guardado junto a la corrida.</a:t>
             </a:r>
           </a:p>
           <a:p/>
           <a:p>
             <a:r>
-              <a:t>La convencion es alertar cuando un recurso pasa del 70 u 80 por ciento sostenido, y es convencion, no ley.</a:t>
+              <a:t>Que docker build forme parte de la construccion tiene un valor extra: comprueba en cada cambio que el Dockerfile sigue siendo valido, que es una de las cosas que se rompen en silencio.</a:t>
             </a:r>
           </a:p>
           <a:p/>
           <a:p>
             <a:r>
-              <a:t>Latencia merece explicacion aparte porque introduce el percentil, el valor por debajo del cual cae un porcentaje dado de las mediciones: si el p95 de la API es 300 milisegundos</a:t>
+              <a:t>Un pipeline sano falla rapido: si la construccion falla, la prueba no se ejecuta, y el autor del cambio recibe el aviso en minutos.</a:t>
             </a:r>
           </a:p>
           <a:p/>
           <a:p>
             <a:r>
-              <a:t>95 de cada 100 peticiones respondieron en 300 milisegundos o menos y 5 tardaron mas.</a:t>
+              <a:t>En GitHub Actions cada paso que termina con un codigo de salida distinto de 0 detiene el job y lo marca en rojo: esa es la condicion de fallo que convierte el workflow en una verificacion real.</a:t>
             </a:r>
           </a:p>
           <a:p/>
           <a:p>
             <a:r>
-              <a:t>Es mas honesto que el promedio, y el ejemplo lo prueba: 99 peticiones de 50 milisegundos y una de 5 segundos dan un promedio de 99 milisegundos, que parece excelente, mientras el p99 es 5 segundos y corresponde a un usuario mirando una pantalla congelada.</a:t>
+              <a:t>Un ejemplo de fallo util: alguien cambia la respuesta de /health y no actualiza la prueba; el paso de prueba termina con codigo 1, la corrida queda en rojo y el cambio no se integra hasta corregirlo.</a:t>
             </a:r>
           </a:p>
           <a:p/>
           <a:p>
             <a:r>
-              <a:t>En CloudLite Turnos las cuatro senales son: latencia, el p95 del endpoint de reserva; trafico, las reservas por minuto; errores, el porcentaje de respuestas 5xx; saturacion, el uso del pool de conexiones a la base de datos.</a:t>
+              <a:t>NOTAS:</a:t>
             </a:r>
           </a:p>
           <a:p/>
           <a:p>
             <a:r>
-              <a:t>Un error comun es medir solo la CPU: es una senal de saturacion entre varias, y en una API que espera a la base de datos casi nunca es la primera en agotarse.</a:t>
+              <a:t>El workflow se dispara en push y en pull_request.</a:t>
             </a:r>
           </a:p>
           <a:p/>
           <a:p>
             <a:r>
-              <a:t>(No se proyecta) Errores es la proporcion de peticiones que fallan, tipicamente el porcentaje de respuestas 5xx; conviene expresarlo como disponibilidad, y aqui hay aritmetica que el docente debe citar: 99,9 por ciento equivale a unos 43 minutos de indisponibilidad al mes y 99,99 por ciento a unos 4 minutos, lo cual no es convencion sino calculo sobre los 43.200 minutos de un mes de treinta dias.</a:t>
+              <a:t>(No se proyecta) El ejemplo concreto es el pipeline del stub de CloudLite, que ya existe desde la Clase 3 como Dockerfile y contenedor, y la diapositiva del ci.yml es el molde que se puede copiar.</a:t>
+            </a:r>
+          </a:p>
+          <a:p/>
+          <a:p>
+            <a:r>
+              <a:t>(No se proyecta) La evidencia del entregable es doble: el archivo ci.yml en el repositorio y la captura de una corrida en verde con los nombres de los pasos visibles; si Actions falla por cuota o por red se acepta el YAML con la explicacion paso por paso, pero eso es plan B y hay que decir que lo es.</a:t>
             </a:r>
           </a:p>
         </p:txBody>
@@ -2116,37 +1756,85 @@
           <a:lstStyle/>
           <a:p>
             <a:r>
-              <a:t>TEXTO COMPLETO DE LA LÁMINA (se proyecta resumido):</a:t>
+              <a:t>DESARROLLO (para explicarlo, no se proyecta):</a:t>
             </a:r>
           </a:p>
           <a:p/>
           <a:p>
             <a:r>
-              <a:t>Golden signals-lite: latencia, tráfico, errores, saturación.</a:t>
+              <a:t>Un ci.yml propio se explica en tres campos.</a:t>
             </a:r>
           </a:p>
           <a:p/>
           <a:p>
             <a:r>
-              <a:t>Cada señal va con su umbral: «medimos la latencia» no permite decidir nada.</a:t>
+              <a:t>Y el tercero, el corazon del asunto: con que condicion el pipeline debe FALLAR.</a:t>
             </a:r>
           </a:p>
           <a:p/>
           <a:p>
             <a:r>
-              <a:t>Al menos una debe ser un registro (log), no una métrica numérica.</a:t>
+              <a:t>Un pipeline que no puede fallar nunca no sirve: un workflow cuyo unico paso imprime un mensaje de exito siempre sale verde, y un check que siempre sale verde no aporta ninguna informacion; es una decoracion.</a:t>
             </a:r>
           </a:p>
           <a:p/>
           <a:p>
             <a:r>
-              <a:t>Optimización: caché conceptual, paginación, límites de tasa, documentados en el diseño.</a:t>
+              <a:t>Los tres campos son: que se construye, que se prueba y que condicion vuelve rojo el pipeline.</a:t>
             </a:r>
           </a:p>
           <a:p/>
           <a:p>
             <a:r>
-              <a:t>Ejemplo: p95 del `GET /turnos` &lt; 300 ms; si se supera 5 minutos seguidos, se revisa el índice de la consulta.</a:t>
+              <a:t>Un ejemplo de condicion real es: la corrida falla si npm test devuelve un codigo distinto de 0, por ejemplo cuando GET /health no responde 200.</a:t>
+            </a:r>
+          </a:p>
+          <a:p/>
+          <a:p>
+            <a:r>
+              <a:t>NOTAS:</a:t>
+            </a:r>
+          </a:p>
+          <a:p/>
+          <a:p>
+            <a:r>
+              <a:t>Uno y medio, que se compila o se instala.</a:t>
+            </a:r>
+          </a:p>
+          <a:p/>
+          <a:p>
+            <a:r>
+              <a:t>Uno y medio, que se ejecuta en la prueba y que comprueba exactamente.</a:t>
+            </a:r>
+          </a:p>
+          <a:p/>
+          <a:p>
+            <a:r>
+              <a:t>Si la respuesta no aparece en diez segundos, el pipeline no valida nada todavia.</a:t>
+            </a:r>
+          </a:p>
+          <a:p/>
+          <a:p>
+            <a:r>
+              <a:t>(No se proyecta) La forma de responderlo es una prueba mental que el docente debe hacer en voz alta y en vivo: que error tendria que introducir yo en el codigo para que este pipeline lo detecte.</a:t>
+            </a:r>
+          </a:p>
+          <a:p/>
+          <a:p>
+            <a:r>
+              <a:t>(No se proyecta) Aqui es donde aparece la pregunta previsible del grupo, y hay que salir a su encuentro: para que escribir pruebas de un stub que casi no hace nada.</a:t>
+            </a:r>
+          </a:p>
+          <a:p/>
+          <a:p>
+            <a:r>
+              <a:t>(No se proyecta) La respuesta es que una sola prueba que verifique que el endpoint /health responde 200 detecta la clase de error mas costosa en operacion, que la aplicacion ya no arranca; y con eso la condicion de fallo se escribe sola: el check sale rojo si /health deja de responder 200, si falta una dependencia declarada o si el docker build no compila.</a:t>
+            </a:r>
+          </a:p>
+          <a:p/>
+          <a:p>
+            <a:r>
+              <a:t>(No se proyecta) Conviene romper el pipeline a proposito en la demo, porque un check rojo proyectado ensena mas que el parrafo anterior.</a:t>
             </a:r>
           </a:p>
         </p:txBody>
@@ -8616,118 +8304,14 @@
       </p:sp>
       <p:sp>
         <p:nvSpPr>
-          <p:cNvPr id="5" name="Rounded Rectangle 4"/>
-          <p:cNvSpPr/>
-          <p:nvPr/>
-        </p:nvSpPr>
-        <p:spPr>
-          <a:xfrm>
-            <a:off x="5797149" y="1573813"/>
-            <a:ext cx="6010497" cy="4057845"/>
-          </a:xfrm>
-          <a:prstGeom prst="roundRect">
-            <a:avLst>
-              <a:gd name="adj" fmla="val 4000"/>
-            </a:avLst>
-          </a:prstGeom>
-          <a:solidFill>
-            <a:srgbClr val="E8EEF4"/>
-          </a:solidFill>
-          <a:ln>
-            <a:noFill/>
-          </a:ln>
-        </p:spPr>
-        <p:style>
-          <a:lnRef idx="1">
-            <a:schemeClr val="accent1"/>
-          </a:lnRef>
-          <a:fillRef idx="3">
-            <a:schemeClr val="accent1"/>
-          </a:fillRef>
-          <a:effectRef idx="2">
-            <a:schemeClr val="accent1"/>
-          </a:effectRef>
-          <a:fontRef idx="minor">
-            <a:schemeClr val="lt1"/>
-          </a:fontRef>
-        </p:style>
-        <p:txBody>
-          <a:bodyPr rtlCol="0" anchor="ctr"/>
-          <a:lstStyle/>
-          <a:p>
-            <a:pPr algn="ctr"/>
-          </a:p>
-        </p:txBody>
-      </p:sp>
-      <p:pic>
-        <p:nvPicPr>
-          <p:cNvPr id="6" name="Picture 5" descr="monitoring-dashboard-screens.jpg"/>
-          <p:cNvPicPr>
-            <a:picLocks noChangeAspect="1"/>
-          </p:cNvPicPr>
-          <p:nvPr/>
-        </p:nvPicPr>
-        <p:blipFill>
-          <a:blip r:embed="rId2"/>
-          <a:stretch>
-            <a:fillRect/>
-          </a:stretch>
-        </p:blipFill>
-        <p:spPr>
-          <a:xfrm>
-            <a:off x="5870301" y="1646965"/>
-            <a:ext cx="5864193" cy="3911541"/>
-          </a:xfrm>
-          <a:prstGeom prst="rect">
-            <a:avLst/>
-          </a:prstGeom>
-        </p:spPr>
-      </p:pic>
-      <p:sp>
-        <p:nvSpPr>
-          <p:cNvPr id="7" name="TextBox 6"/>
+          <p:cNvPr id="5" name="TextBox 4"/>
           <p:cNvSpPr txBox="1"/>
           <p:nvPr/>
         </p:nvSpPr>
         <p:spPr>
           <a:xfrm>
-            <a:off x="5870301" y="5961888"/>
-            <a:ext cx="5864193" cy="320040"/>
-          </a:xfrm>
-          <a:prstGeom prst="rect">
-            <a:avLst/>
-          </a:prstGeom>
-          <a:noFill/>
-        </p:spPr>
-        <p:txBody>
-          <a:bodyPr wrap="square">
-            <a:spAutoFit/>
-          </a:bodyPr>
-          <a:lstStyle/>
-          <a:p>
-            <a:pPr algn="ctr"/>
-            <a:r>
-              <a:rPr sz="1100" b="0" i="1">
-                <a:solidFill>
-                  <a:srgbClr val="666666"/>
-                </a:solidFill>
-                <a:latin typeface="Calibri"/>
-              </a:rPr>
-              <a:t>Foto: Keysi Estrada · Pexels</a:t>
-            </a:r>
-          </a:p>
-        </p:txBody>
-      </p:sp>
-      <p:sp>
-        <p:nvSpPr>
-          <p:cNvPr id="8" name="TextBox 7"/>
-          <p:cNvSpPr txBox="1"/>
-          <p:nvPr/>
-        </p:nvSpPr>
-        <p:spPr>
-          <a:xfrm>
-            <a:off x="457200" y="1353312"/>
-            <a:ext cx="5093061" cy="5047488"/>
+            <a:off x="457200" y="1170432"/>
+            <a:ext cx="11277295" cy="5230368"/>
           </a:xfrm>
           <a:prstGeom prst="rect">
             <a:avLst/>
@@ -8786,7 +8370,7 @@
                 </a:solidFill>
                 <a:latin typeface="Calibri"/>
               </a:rPr>
-              <a:t>:</a:t>
+              <a:t>: «medimos la latencia» no permite decidir nada.</a:t>
             </a:r>
           </a:p>
           <a:p>
@@ -8839,11 +8423,27 @@
               <a:t>–   Optimización: caché conceptual, paginación, límites de tasa, documentados en el diseño.</a:t>
             </a:r>
           </a:p>
-        </p:txBody>
-      </p:sp>
-      <p:sp>
-        <p:nvSpPr>
-          <p:cNvPr id="9" name="TextBox 8"/>
+          <a:p>
+            <a:pPr>
+              <a:spcAft>
+                <a:spcPts val="800"/>
+              </a:spcAft>
+            </a:pPr>
+            <a:r>
+              <a:rPr sz="2000" b="0" i="0">
+                <a:solidFill>
+                  <a:srgbClr val="333333"/>
+                </a:solidFill>
+                <a:latin typeface="Calibri"/>
+              </a:rPr>
+              <a:t>–   Ejemplo: p95 del «GET /turnos» &lt; 300 ms; si se supera 5 minutos seguidos, se revisa el índice de la consulta.</a:t>
+            </a:r>
+          </a:p>
+        </p:txBody>
+      </p:sp>
+      <p:sp>
+        <p:nvSpPr>
+          <p:cNvPr id="6" name="TextBox 5"/>
           <p:cNvSpPr txBox="1"/>
           <p:nvPr/>
         </p:nvSpPr>
@@ -9564,118 +9164,14 @@
       </p:sp>
       <p:sp>
         <p:nvSpPr>
-          <p:cNvPr id="5" name="Rounded Rectangle 4"/>
-          <p:cNvSpPr/>
-          <p:nvPr/>
-        </p:nvSpPr>
-        <p:spPr>
-          <a:xfrm>
-            <a:off x="5797149" y="1331356"/>
-            <a:ext cx="6010497" cy="4542758"/>
-          </a:xfrm>
-          <a:prstGeom prst="roundRect">
-            <a:avLst>
-              <a:gd name="adj" fmla="val 4000"/>
-            </a:avLst>
-          </a:prstGeom>
-          <a:solidFill>
-            <a:srgbClr val="E8EEF4"/>
-          </a:solidFill>
-          <a:ln>
-            <a:noFill/>
-          </a:ln>
-        </p:spPr>
-        <p:style>
-          <a:lnRef idx="1">
-            <a:schemeClr val="accent1"/>
-          </a:lnRef>
-          <a:fillRef idx="3">
-            <a:schemeClr val="accent1"/>
-          </a:fillRef>
-          <a:effectRef idx="2">
-            <a:schemeClr val="accent1"/>
-          </a:effectRef>
-          <a:fontRef idx="minor">
-            <a:schemeClr val="lt1"/>
-          </a:fontRef>
-        </p:style>
-        <p:txBody>
-          <a:bodyPr rtlCol="0" anchor="ctr"/>
-          <a:lstStyle/>
-          <a:p>
-            <a:pPr algn="ctr"/>
-          </a:p>
-        </p:txBody>
-      </p:sp>
-      <p:pic>
-        <p:nvPicPr>
-          <p:cNvPr id="6" name="Picture 5" descr="pipeline-industrial-pipes.jpg"/>
-          <p:cNvPicPr>
-            <a:picLocks noChangeAspect="1"/>
-          </p:cNvPicPr>
-          <p:nvPr/>
-        </p:nvPicPr>
-        <p:blipFill>
-          <a:blip r:embed="rId2"/>
-          <a:stretch>
-            <a:fillRect/>
-          </a:stretch>
-        </p:blipFill>
-        <p:spPr>
-          <a:xfrm>
-            <a:off x="5870301" y="1404508"/>
-            <a:ext cx="5864193" cy="4396454"/>
-          </a:xfrm>
-          <a:prstGeom prst="rect">
-            <a:avLst/>
-          </a:prstGeom>
-        </p:spPr>
-      </p:pic>
-      <p:sp>
-        <p:nvSpPr>
-          <p:cNvPr id="7" name="TextBox 6"/>
+          <p:cNvPr id="5" name="TextBox 4"/>
           <p:cNvSpPr txBox="1"/>
           <p:nvPr/>
         </p:nvSpPr>
         <p:spPr>
           <a:xfrm>
-            <a:off x="5870301" y="5961888"/>
-            <a:ext cx="5864193" cy="320040"/>
-          </a:xfrm>
-          <a:prstGeom prst="rect">
-            <a:avLst/>
-          </a:prstGeom>
-          <a:noFill/>
-        </p:spPr>
-        <p:txBody>
-          <a:bodyPr wrap="square">
-            <a:spAutoFit/>
-          </a:bodyPr>
-          <a:lstStyle/>
-          <a:p>
-            <a:pPr algn="ctr"/>
-            <a:r>
-              <a:rPr sz="1100" b="0" i="1">
-                <a:solidFill>
-                  <a:srgbClr val="666666"/>
-                </a:solidFill>
-                <a:latin typeface="Calibri"/>
-              </a:rPr>
-              <a:t>Foto: Mumtaz  Niazi · Pexels</a:t>
-            </a:r>
-          </a:p>
-        </p:txBody>
-      </p:sp>
-      <p:sp>
-        <p:nvSpPr>
-          <p:cNvPr id="8" name="TextBox 7"/>
-          <p:cNvSpPr txBox="1"/>
-          <p:nvPr/>
-        </p:nvSpPr>
-        <p:spPr>
-          <a:xfrm>
-            <a:off x="457200" y="1353312"/>
-            <a:ext cx="5093061" cy="5047488"/>
+            <a:off x="457200" y="1170432"/>
+            <a:ext cx="11277295" cy="5230368"/>
           </a:xfrm>
           <a:prstGeom prst="rect">
             <a:avLst/>
@@ -9716,14 +9212,14 @@
                 </a:solidFill>
                 <a:latin typeface="Calibri"/>
               </a:rPr>
-              <a:t>–   En GitHub Actions cada paso que termina con un codigo de salida distinto de 0 detiene el job y lo marca en rojo: esa es la condicion de fallo que…</a:t>
-            </a:r>
-          </a:p>
-        </p:txBody>
-      </p:sp>
-      <p:sp>
-        <p:nvSpPr>
-          <p:cNvPr id="9" name="TextBox 8"/>
+              <a:t>–   En GitHub Actions cada paso que termina con un codigo de salida distinto de 0 detiene el job y lo marca en rojo: esa es la condicion de fallo que convierte el workflow en una verificacion real.</a:t>
+            </a:r>
+          </a:p>
+        </p:txBody>
+      </p:sp>
+      <p:sp>
+        <p:nvSpPr>
+          <p:cNvPr id="6" name="TextBox 5"/>
           <p:cNvSpPr txBox="1"/>
           <p:nvPr/>
         </p:nvSpPr>
@@ -13041,118 +12537,14 @@
       </p:sp>
       <p:sp>
         <p:nvSpPr>
-          <p:cNvPr id="5" name="Rounded Rectangle 4"/>
-          <p:cNvSpPr/>
-          <p:nvPr/>
-        </p:nvSpPr>
-        <p:spPr>
-          <a:xfrm>
-            <a:off x="5797149" y="1573813"/>
-            <a:ext cx="6010497" cy="4057845"/>
-          </a:xfrm>
-          <a:prstGeom prst="roundRect">
-            <a:avLst>
-              <a:gd name="adj" fmla="val 4000"/>
-            </a:avLst>
-          </a:prstGeom>
-          <a:solidFill>
-            <a:srgbClr val="E8EEF4"/>
-          </a:solidFill>
-          <a:ln>
-            <a:noFill/>
-          </a:ln>
-        </p:spPr>
-        <p:style>
-          <a:lnRef idx="1">
-            <a:schemeClr val="accent1"/>
-          </a:lnRef>
-          <a:fillRef idx="3">
-            <a:schemeClr val="accent1"/>
-          </a:fillRef>
-          <a:effectRef idx="2">
-            <a:schemeClr val="accent1"/>
-          </a:effectRef>
-          <a:fontRef idx="minor">
-            <a:schemeClr val="lt1"/>
-          </a:fontRef>
-        </p:style>
-        <p:txBody>
-          <a:bodyPr rtlCol="0" anchor="ctr"/>
-          <a:lstStyle/>
-          <a:p>
-            <a:pPr algn="ctr"/>
-          </a:p>
-        </p:txBody>
-      </p:sp>
-      <p:pic>
-        <p:nvPicPr>
-          <p:cNvPr id="6" name="Picture 5" descr="students-learning-laptops-classroom.jpg"/>
-          <p:cNvPicPr>
-            <a:picLocks noChangeAspect="1"/>
-          </p:cNvPicPr>
-          <p:nvPr/>
-        </p:nvPicPr>
-        <p:blipFill>
-          <a:blip r:embed="rId2"/>
-          <a:stretch>
-            <a:fillRect/>
-          </a:stretch>
-        </p:blipFill>
-        <p:spPr>
-          <a:xfrm>
-            <a:off x="5870301" y="1646965"/>
-            <a:ext cx="5864193" cy="3911541"/>
-          </a:xfrm>
-          <a:prstGeom prst="rect">
-            <a:avLst/>
-          </a:prstGeom>
-        </p:spPr>
-      </p:pic>
-      <p:sp>
-        <p:nvSpPr>
-          <p:cNvPr id="7" name="TextBox 6"/>
+          <p:cNvPr id="5" name="TextBox 4"/>
           <p:cNvSpPr txBox="1"/>
           <p:nvPr/>
         </p:nvSpPr>
         <p:spPr>
           <a:xfrm>
-            <a:off x="5870301" y="5961888"/>
-            <a:ext cx="5864193" cy="320040"/>
-          </a:xfrm>
-          <a:prstGeom prst="rect">
-            <a:avLst/>
-          </a:prstGeom>
-          <a:noFill/>
-        </p:spPr>
-        <p:txBody>
-          <a:bodyPr wrap="square">
-            <a:spAutoFit/>
-          </a:bodyPr>
-          <a:lstStyle/>
-          <a:p>
-            <a:pPr algn="ctr"/>
-            <a:r>
-              <a:rPr sz="1100" b="0" i="1">
-                <a:solidFill>
-                  <a:srgbClr val="666666"/>
-                </a:solidFill>
-                <a:latin typeface="Calibri"/>
-              </a:rPr>
-              <a:t>Foto: Mikhail Nilov · Pexels</a:t>
-            </a:r>
-          </a:p>
-        </p:txBody>
-      </p:sp>
-      <p:sp>
-        <p:nvSpPr>
-          <p:cNvPr id="8" name="TextBox 7"/>
-          <p:cNvSpPr txBox="1"/>
-          <p:nvPr/>
-        </p:nvSpPr>
-        <p:spPr>
-          <a:xfrm>
-            <a:off x="457200" y="1353312"/>
-            <a:ext cx="5093061" cy="5047488"/>
+            <a:off x="457200" y="1170432"/>
+            <a:ext cx="11277295" cy="5230368"/>
           </a:xfrm>
           <a:prstGeom prst="rect">
             <a:avLst/>
@@ -13216,7 +12608,7 @@
       </p:sp>
       <p:sp>
         <p:nvSpPr>
-          <p:cNvPr id="9" name="TextBox 8"/>
+          <p:cNvPr id="6" name="TextBox 5"/>
           <p:cNvSpPr txBox="1"/>
           <p:nvPr/>
         </p:nvSpPr>
@@ -14477,118 +13869,14 @@
       </p:sp>
       <p:sp>
         <p:nvSpPr>
-          <p:cNvPr id="5" name="Rounded Rectangle 4"/>
-          <p:cNvSpPr/>
-          <p:nvPr/>
-        </p:nvSpPr>
-        <p:spPr>
-          <a:xfrm>
-            <a:off x="5797149" y="1573813"/>
-            <a:ext cx="6010497" cy="4057845"/>
-          </a:xfrm>
-          <a:prstGeom prst="roundRect">
-            <a:avLst>
-              <a:gd name="adj" fmla="val 4000"/>
-            </a:avLst>
-          </a:prstGeom>
-          <a:solidFill>
-            <a:srgbClr val="E8EEF4"/>
-          </a:solidFill>
-          <a:ln>
-            <a:noFill/>
-          </a:ln>
-        </p:spPr>
-        <p:style>
-          <a:lnRef idx="1">
-            <a:schemeClr val="accent1"/>
-          </a:lnRef>
-          <a:fillRef idx="3">
-            <a:schemeClr val="accent1"/>
-          </a:fillRef>
-          <a:effectRef idx="2">
-            <a:schemeClr val="accent1"/>
-          </a:effectRef>
-          <a:fontRef idx="minor">
-            <a:schemeClr val="lt1"/>
-          </a:fontRef>
-        </p:style>
-        <p:txBody>
-          <a:bodyPr rtlCol="0" anchor="ctr"/>
-          <a:lstStyle/>
-          <a:p>
-            <a:pPr algn="ctr"/>
-          </a:p>
-        </p:txBody>
-      </p:sp>
-      <p:pic>
-        <p:nvPicPr>
-          <p:cNvPr id="6" name="Picture 5" descr="assembly-line-automation.jpg"/>
-          <p:cNvPicPr>
-            <a:picLocks noChangeAspect="1"/>
-          </p:cNvPicPr>
-          <p:nvPr/>
-        </p:nvPicPr>
-        <p:blipFill>
-          <a:blip r:embed="rId2"/>
-          <a:stretch>
-            <a:fillRect/>
-          </a:stretch>
-        </p:blipFill>
-        <p:spPr>
-          <a:xfrm>
-            <a:off x="5870301" y="1646965"/>
-            <a:ext cx="5864193" cy="3911541"/>
-          </a:xfrm>
-          <a:prstGeom prst="rect">
-            <a:avLst/>
-          </a:prstGeom>
-        </p:spPr>
-      </p:pic>
-      <p:sp>
-        <p:nvSpPr>
-          <p:cNvPr id="7" name="TextBox 6"/>
+          <p:cNvPr id="5" name="TextBox 4"/>
           <p:cNvSpPr txBox="1"/>
           <p:nvPr/>
         </p:nvSpPr>
         <p:spPr>
           <a:xfrm>
-            <a:off x="5870301" y="5961888"/>
-            <a:ext cx="5864193" cy="320040"/>
-          </a:xfrm>
-          <a:prstGeom prst="rect">
-            <a:avLst/>
-          </a:prstGeom>
-          <a:noFill/>
-        </p:spPr>
-        <p:txBody>
-          <a:bodyPr wrap="square">
-            <a:spAutoFit/>
-          </a:bodyPr>
-          <a:lstStyle/>
-          <a:p>
-            <a:pPr algn="ctr"/>
-            <a:r>
-              <a:rPr sz="1100" b="0" i="1">
-                <a:solidFill>
-                  <a:srgbClr val="666666"/>
-                </a:solidFill>
-                <a:latin typeface="Calibri"/>
-              </a:rPr>
-              <a:t>Foto: Freek Wolsink · Pexels</a:t>
-            </a:r>
-          </a:p>
-        </p:txBody>
-      </p:sp>
-      <p:sp>
-        <p:nvSpPr>
-          <p:cNvPr id="8" name="TextBox 7"/>
-          <p:cNvSpPr txBox="1"/>
-          <p:nvPr/>
-        </p:nvSpPr>
-        <p:spPr>
-          <a:xfrm>
-            <a:off x="457200" y="1353312"/>
-            <a:ext cx="5093061" cy="5047488"/>
+            <a:off x="457200" y="1170432"/>
+            <a:ext cx="11277295" cy="5230368"/>
           </a:xfrm>
           <a:prstGeom prst="rect">
             <a:avLst/>
@@ -14681,7 +13969,25 @@
                 </a:solidFill>
                 <a:latin typeface="Calibri"/>
               </a:rPr>
-              <a:t> = integración continua:</a:t>
+              <a:t> = integración continua: cada cambio se construye y se prueba solo. </a:t>
+            </a:r>
+            <a:r>
+              <a:rPr sz="2000" b="1" i="0">
+                <a:solidFill>
+                  <a:srgbClr val="333333"/>
+                </a:solidFill>
+                <a:latin typeface="Calibri"/>
+              </a:rPr>
+              <a:t>CD</a:t>
+            </a:r>
+            <a:r>
+              <a:rPr sz="2000" b="0" i="0">
+                <a:solidFill>
+                  <a:srgbClr val="333333"/>
+                </a:solidFill>
+                <a:latin typeface="Calibri"/>
+              </a:rPr>
+              <a:t> = entrega continua (queda listo para desplegar) o despliegue continuo (llega solo a producción).</a:t>
             </a:r>
           </a:p>
           <a:p>
@@ -14722,7 +14028,7 @@
       </p:sp>
       <p:sp>
         <p:nvSpPr>
-          <p:cNvPr id="9" name="TextBox 8"/>
+          <p:cNvPr id="6" name="TextBox 5"/>
           <p:cNvSpPr txBox="1"/>
           <p:nvPr/>
         </p:nvSpPr>
@@ -15983,118 +15289,14 @@
       </p:sp>
       <p:sp>
         <p:nvSpPr>
-          <p:cNvPr id="5" name="Rounded Rectangle 4"/>
-          <p:cNvSpPr/>
-          <p:nvPr/>
-        </p:nvSpPr>
-        <p:spPr>
-          <a:xfrm>
-            <a:off x="5797149" y="1966838"/>
-            <a:ext cx="6010497" cy="3271794"/>
-          </a:xfrm>
-          <a:prstGeom prst="roundRect">
-            <a:avLst>
-              <a:gd name="adj" fmla="val 4000"/>
-            </a:avLst>
-          </a:prstGeom>
-          <a:solidFill>
-            <a:srgbClr val="E8EEF4"/>
-          </a:solidFill>
-          <a:ln>
-            <a:noFill/>
-          </a:ln>
-        </p:spPr>
-        <p:style>
-          <a:lnRef idx="1">
-            <a:schemeClr val="accent1"/>
-          </a:lnRef>
-          <a:fillRef idx="3">
-            <a:schemeClr val="accent1"/>
-          </a:fillRef>
-          <a:effectRef idx="2">
-            <a:schemeClr val="accent1"/>
-          </a:effectRef>
-          <a:fontRef idx="minor">
-            <a:schemeClr val="lt1"/>
-          </a:fontRef>
-        </p:style>
-        <p:txBody>
-          <a:bodyPr rtlCol="0" anchor="ctr"/>
-          <a:lstStyle/>
-          <a:p>
-            <a:pPr algn="ctr"/>
-          </a:p>
-        </p:txBody>
-      </p:sp>
-      <p:pic>
-        <p:nvPicPr>
-          <p:cNvPr id="6" name="Picture 5" descr="configuration-code-screen.jpg"/>
-          <p:cNvPicPr>
-            <a:picLocks noChangeAspect="1"/>
-          </p:cNvPicPr>
-          <p:nvPr/>
-        </p:nvPicPr>
-        <p:blipFill>
-          <a:blip r:embed="rId2"/>
-          <a:stretch>
-            <a:fillRect/>
-          </a:stretch>
-        </p:blipFill>
-        <p:spPr>
-          <a:xfrm>
-            <a:off x="5870301" y="2039990"/>
-            <a:ext cx="5864193" cy="3125490"/>
-          </a:xfrm>
-          <a:prstGeom prst="rect">
-            <a:avLst/>
-          </a:prstGeom>
-        </p:spPr>
-      </p:pic>
-      <p:sp>
-        <p:nvSpPr>
-          <p:cNvPr id="7" name="TextBox 6"/>
+          <p:cNvPr id="5" name="TextBox 4"/>
           <p:cNvSpPr txBox="1"/>
           <p:nvPr/>
         </p:nvSpPr>
         <p:spPr>
           <a:xfrm>
-            <a:off x="5870301" y="5961888"/>
-            <a:ext cx="5864193" cy="320040"/>
-          </a:xfrm>
-          <a:prstGeom prst="rect">
-            <a:avLst/>
-          </a:prstGeom>
-          <a:noFill/>
-        </p:spPr>
-        <p:txBody>
-          <a:bodyPr wrap="square">
-            <a:spAutoFit/>
-          </a:bodyPr>
-          <a:lstStyle/>
-          <a:p>
-            <a:pPr algn="ctr"/>
-            <a:r>
-              <a:rPr sz="1100" b="0" i="1">
-                <a:solidFill>
-                  <a:srgbClr val="666666"/>
-                </a:solidFill>
-                <a:latin typeface="Calibri"/>
-              </a:rPr>
-              <a:t>Foto: Pixabay · Pexels</a:t>
-            </a:r>
-          </a:p>
-        </p:txBody>
-      </p:sp>
-      <p:sp>
-        <p:nvSpPr>
-          <p:cNvPr id="8" name="TextBox 7"/>
-          <p:cNvSpPr txBox="1"/>
-          <p:nvPr/>
-        </p:nvSpPr>
-        <p:spPr>
-          <a:xfrm>
-            <a:off x="457200" y="1353312"/>
-            <a:ext cx="5093061" cy="5047488"/>
+            <a:off x="457200" y="1170432"/>
+            <a:ext cx="11277295" cy="5230368"/>
           </a:xfrm>
           <a:prstGeom prst="rect">
             <a:avLst/>
@@ -16278,11 +15480,45 @@
               <a:t>–   Secrets solo vía Settings; nunca en el YAML en claro: un secreto escrito queda en el historial del repositorio.</a:t>
             </a:r>
           </a:p>
-        </p:txBody>
-      </p:sp>
-      <p:sp>
-        <p:nvSpPr>
-          <p:cNvPr id="9" name="TextBox 8"/>
+          <a:p>
+            <a:pPr>
+              <a:spcAft>
+                <a:spcPts val="800"/>
+              </a:spcAft>
+            </a:pPr>
+            <a:r>
+              <a:rPr sz="2000" b="0" i="0">
+                <a:solidFill>
+                  <a:srgbClr val="333333"/>
+                </a:solidFill>
+                <a:latin typeface="Calibri"/>
+              </a:rPr>
+              <a:t>–   </a:t>
+            </a:r>
+            <a:r>
+              <a:rPr sz="2000" b="1" i="0">
+                <a:solidFill>
+                  <a:srgbClr val="333333"/>
+                </a:solidFill>
+                <a:latin typeface="Calibri"/>
+              </a:rPr>
+              <a:t>Un CI que solo imprime «OK» no es CI:</a:t>
+            </a:r>
+            <a:r>
+              <a:rPr sz="2000" b="0" i="0">
+                <a:solidFill>
+                  <a:srgbClr val="333333"/>
+                </a:solidFill>
+                <a:latin typeface="Calibri"/>
+              </a:rPr>
+              <a:t> tienes que poder decir qué error lo pondría rojo.</a:t>
+            </a:r>
+          </a:p>
+        </p:txBody>
+      </p:sp>
+      <p:sp>
+        <p:nvSpPr>
+          <p:cNvPr id="6" name="TextBox 5"/>
           <p:cNvSpPr txBox="1"/>
           <p:nvPr/>
         </p:nvSpPr>

--- a/Arquitectura de Sistemas Computacionales/Clases/Clase 8 - Monitoreo optimizacion y CI-CD/Presentacion.pptx
+++ b/Arquitectura de Sistemas Computacionales/Clases/Clase 8 - Monitoreo optimizacion y CI-CD/Presentacion.pptx
@@ -638,6 +638,492 @@
           <a:p/>
           <a:p>
             <a:r>
+              <a:t>El plan de monitoreo es una tabla de entre 4 y 6 filas con TRES columnas: «Senal», «Que se mide en MI dominio» y «Umbral u objetivo».</a:t>
+            </a:r>
+          </a:p>
+          <a:p/>
+          <a:p>
+            <a:r>
+              <a:t>La regla que decide la mitad de la nota se dice en una frase: una senal sin umbral NO SUMA, aunque este bien elegida.</a:t>
+            </a:r>
+          </a:p>
+          <a:p/>
+          <a:p>
+            <a:r>
+              <a:t>«el listado de disponibilidad debe responder en menos de 400 milisegundos y si pasa de 800 se revisa» si, porque define cuando hay que actuar.</a:t>
+            </a:r>
+          </a:p>
+          <a:p/>
+          <a:p>
+            <a:r>
+              <a:t>La segunda columna tiene que referirse a operaciones del dominio propio, asi que «el sistema» no es una respuesta y «el listado de disponibilidad de canchas» o «el registro de una reserva» si.</a:t>
+            </a:r>
+          </a:p>
+          <a:p/>
+          <a:p>
+            <a:r>
+              <a:t>Cada umbral necesita su accion: que se HACE cuando se cruza es lo que convierte una lista de metricas en un plan de operacion.</a:t>
+            </a:r>
+          </a:p>
+          <a:p/>
+          <a:p>
+            <a:r>
+              <a:t>Un ejemplo de fila completa es: Senal «latencia del listado de turnos»</a:t>
+            </a:r>
+          </a:p>
+          <a:p/>
+          <a:p>
+            <a:r>
+              <a:t>Que se mide «p95 del GET /turnos»</a:t>
+            </a:r>
+          </a:p>
+          <a:p/>
+          <a:p>
+            <a:r>
+              <a:t>Umbral «menos de 300 ms; si se supera durante 5 minutos, se revisa el indice de la consulta».</a:t>
+            </a:r>
+          </a:p>
+          <a:p/>
+          <a:p>
+            <a:r>
+              <a:t>Un error comun es un umbral sin numero, como «latencia alta»: no dice cuando actuar.</a:t>
+            </a:r>
+          </a:p>
+          <a:p/>
+          <a:p>
+            <a:r>
+              <a:t>Otro es una senal generica, como «el sistema»: la fila tiene que nombrar una operacion concreta del dominio.</a:t>
+            </a:r>
+          </a:p>
+          <a:p/>
+          <a:p>
+            <a:r>
+              <a:t>NOTAS:</a:t>
+            </a:r>
+          </a:p>
+          <a:p/>
+          <a:p>
+            <a:r>
+              <a:t>«Medimos la latencia» no permite decidir nada</a:t>
+            </a:r>
+          </a:p>
+          <a:p/>
+          <a:p>
+            <a:r>
+              <a:t>Esa accion no es una cuarta columna: se escribe dentro del umbral, como en el ejemplo del listado.</a:t>
+            </a:r>
+          </a:p>
+          <a:p/>
+          <a:p>
+            <a:r>
+              <a:t>La fila tiene senal, objeto concreto del dominio y una accion atada al umbral.</a:t>
+            </a:r>
+          </a:p>
+          <a:p/>
+          <a:p>
+            <a:r>
+              <a:t>(No se proyecta) El reparto de sus 6 puntos es un punto por senal bien formada con su umbral hasta la cuarta, hasta un punto adicional entre las senales quinta y sexta, y un punto por que al menos una sea un registro.</a:t>
+            </a:r>
+          </a:p>
+          <a:p/>
+          <a:p>
+            <a:r>
+              <a:t>(No se proyecta) El umbral puede ser discutible, y hay que decir que se acepta discutible: lo que no puede es faltar.</a:t>
+            </a:r>
+          </a:p>
+          <a:p/>
+          <a:p>
+            <a:r>
+              <a:t>(No se proyecta) Una tabla de referencia para CloudLite, que el docente puede llenar en vivo: latencia p95 del inicio de sesion y del listado principal, con objetivo bajo 300 milisegundos; peticiones por minuto en la hora pico, con un valor esperado que sirva de linea base; porcentaje de respuestas 5xx, con alerta sobre el 1 por ciento sostenido; uso del pool de conexiones, con alerta sobre el 80 por ciento; y la fila que casi nadie escribe y vale un punto, un REGISTRO: el log estructurado de cada reserva rechazada y de cada intento de inicio de sesion fallido, con identificador de peticion, ruta y codigo, cuyo umbral es un evento observable, por ejemplo mas de cinco fallos del mismo usuario en diez minutos se revisa.</a:t>
+            </a:r>
+          </a:p>
+          <a:p/>
+          <a:p>
+            <a:r>
+              <a:t>(No se proyecta) Conviene proyectar esa fila y decir «esta es la que falta en el 80 por ciento de las entregas».</a:t>
+            </a:r>
+          </a:p>
+          <a:p/>
+          <a:p>
+            <a:r>
+              <a:t>(No se proyecta) Ahi entra la optimizacion de la segunda mitad del tema: paginar, con veinte a cincuenta elementos por pagina, porque un endpoint que devuelve cincuenta mil registros es problema de latencia y de memoria; indexar la columna por la que se filtra, porque sin indice el motor recorre la tabla completa; cachear lecturas repetidas, donde una tasa de acierto del 90 por ciento significa que nueve de cada diez lecturas no llegan a la base; y limitar la tasa de peticiones, el control de denegacion de servicio de la Clase 6.</a:t>
+            </a:r>
+          </a:p>
+        </p:txBody>
+      </p:sp>
+      <p:sp>
+        <p:nvSpPr>
+          <p:cNvPr id="4" name="Slide Number Placeholder 3"/>
+          <p:cNvSpPr>
+            <a:spLocks noGrp="1"/>
+          </p:cNvSpPr>
+          <p:nvPr>
+            <p:ph type="sldNum" idx="5" sz="quarter"/>
+          </p:nvPr>
+        </p:nvSpPr>
+        <p:spPr/>
+      </p:sp>
+    </p:spTree>
+  </p:cSld>
+  <p:clrMapOvr>
+    <a:masterClrMapping/>
+  </p:clrMapOvr>
+</p:notes>
+</file>
+
+<file path=ppt/notesSlides/notesSlide11.xml><?xml version="1.0" encoding="utf-8"?>
+<p:notes xmlns:a="http://schemas.openxmlformats.org/drawingml/2006/main" xmlns:p="http://schemas.openxmlformats.org/presentationml/2006/main" xmlns:r="http://schemas.openxmlformats.org/officeDocument/2006/relationships">
+  <p:cSld>
+    <p:spTree>
+      <p:nvGrpSpPr>
+        <p:cNvPr id="1" name=""/>
+        <p:cNvGrpSpPr/>
+        <p:nvPr/>
+      </p:nvGrpSpPr>
+      <p:grpSpPr>
+        <a:xfrm>
+          <a:off x="0" y="0"/>
+          <a:ext cx="0" cy="0"/>
+          <a:chOff x="0" y="0"/>
+          <a:chExt cx="0" cy="0"/>
+        </a:xfrm>
+      </p:grpSpPr>
+      <p:sp>
+        <p:nvSpPr>
+          <p:cNvPr id="2" name="Slide Image Placeholder 1"/>
+          <p:cNvSpPr>
+            <a:spLocks noGrp="1"/>
+          </p:cNvSpPr>
+          <p:nvPr>
+            <p:ph type="sldImg" idx="2"/>
+          </p:nvPr>
+        </p:nvSpPr>
+        <p:spPr/>
+      </p:sp>
+      <p:sp>
+        <p:nvSpPr>
+          <p:cNvPr id="3" name="Notes Placeholder 2"/>
+          <p:cNvSpPr>
+            <a:spLocks noGrp="1"/>
+          </p:cNvSpPr>
+          <p:nvPr>
+            <p:ph type="body" idx="3" sz="quarter"/>
+          </p:nvPr>
+        </p:nvSpPr>
+        <p:spPr/>
+        <p:txBody>
+          <a:bodyPr/>
+          <a:lstStyle/>
+          <a:p>
+            <a:r>
+              <a:t>TEXTO COMPLETO DE LA LÁMINA (se proyecta resumido):</a:t>
+            </a:r>
+          </a:p>
+          <a:p/>
+          <a:p>
+            <a:r>
+              <a:t>Un pipeline sano falla rapido: si la construccion falla, la prueba no se ejecuta, y el autor del cambio recibe el aviso en minutos.</a:t>
+            </a:r>
+          </a:p>
+          <a:p/>
+          <a:p>
+            <a:r>
+              <a:t>En GitHub Actions cada paso que termina con un codigo de salida distinto de 0 detiene el job y lo marca en rojo: esa es la condicion de fallo que convierte el workflow en una verificacion real.</a:t>
+            </a:r>
+          </a:p>
+          <a:p/>
+          <a:p>
+            <a:r>
+              <a:t>DESARROLLO (para explicarlo, no se proyecta):</a:t>
+            </a:r>
+          </a:p>
+          <a:p/>
+          <a:p>
+            <a:r>
+              <a:t>Un job corre en ubuntu-latest y hace, en este orden: descargar el codigo con la action de checkout, instalar el runtime con la action de setup del lenguaje</a:t>
+            </a:r>
+          </a:p>
+          <a:p/>
+          <a:p>
+            <a:r>
+              <a:t>Un paso Construir que instala dependencias y ejecuta docker build con la imagen etiquetada, un paso Probar que corre las pruebas</a:t>
+            </a:r>
+          </a:p>
+          <a:p/>
+          <a:p>
+            <a:r>
+              <a:t>Y un paso final rotulado como despliegue simulado que imprime la etiqueta de version y publica un artefacto, un archivo que queda guardado junto a la corrida.</a:t>
+            </a:r>
+          </a:p>
+          <a:p/>
+          <a:p>
+            <a:r>
+              <a:t>Que docker build forme parte de la construccion tiene un valor extra: comprueba en cada cambio que el Dockerfile sigue siendo valido, que es una de las cosas que se rompen en silencio.</a:t>
+            </a:r>
+          </a:p>
+          <a:p/>
+          <a:p>
+            <a:r>
+              <a:t>Un pipeline sano falla rapido: si la construccion falla, la prueba no se ejecuta, y el autor del cambio recibe el aviso en minutos.</a:t>
+            </a:r>
+          </a:p>
+          <a:p/>
+          <a:p>
+            <a:r>
+              <a:t>En GitHub Actions cada paso que termina con un codigo de salida distinto de 0 detiene el job y lo marca en rojo: esa es la condicion de fallo que convierte el workflow en una verificacion real.</a:t>
+            </a:r>
+          </a:p>
+          <a:p/>
+          <a:p>
+            <a:r>
+              <a:t>Un ejemplo de fallo util: alguien cambia la respuesta de /health y no actualiza la prueba; el paso de prueba termina con codigo 1, la corrida queda en rojo y el cambio no se integra hasta corregirlo.</a:t>
+            </a:r>
+          </a:p>
+          <a:p/>
+          <a:p>
+            <a:r>
+              <a:t>NOTAS:</a:t>
+            </a:r>
+          </a:p>
+          <a:p/>
+          <a:p>
+            <a:r>
+              <a:t>El workflow se dispara en push y en pull_request.</a:t>
+            </a:r>
+          </a:p>
+          <a:p/>
+          <a:p>
+            <a:r>
+              <a:t>(No se proyecta) El ejemplo concreto es el pipeline del stub de CloudLite, que ya existe desde la Clase 3 como Dockerfile y contenedor, y la diapositiva del ci.yml es el molde que se puede copiar.</a:t>
+            </a:r>
+          </a:p>
+          <a:p/>
+          <a:p>
+            <a:r>
+              <a:t>(No se proyecta) La evidencia del entregable es doble: el archivo ci.yml en el repositorio y la captura de una corrida en verde con los nombres de los pasos visibles; si Actions falla por cuota o por red se acepta el YAML con la explicacion paso por paso, pero eso es plan B y hay que decir que lo es.</a:t>
+            </a:r>
+          </a:p>
+        </p:txBody>
+      </p:sp>
+      <p:sp>
+        <p:nvSpPr>
+          <p:cNvPr id="4" name="Slide Number Placeholder 3"/>
+          <p:cNvSpPr>
+            <a:spLocks noGrp="1"/>
+          </p:cNvSpPr>
+          <p:nvPr>
+            <p:ph type="sldNum" idx="5" sz="quarter"/>
+          </p:nvPr>
+        </p:nvSpPr>
+        <p:spPr/>
+      </p:sp>
+    </p:spTree>
+  </p:cSld>
+  <p:clrMapOvr>
+    <a:masterClrMapping/>
+  </p:clrMapOvr>
+</p:notes>
+</file>
+
+<file path=ppt/notesSlides/notesSlide12.xml><?xml version="1.0" encoding="utf-8"?>
+<p:notes xmlns:a="http://schemas.openxmlformats.org/drawingml/2006/main" xmlns:p="http://schemas.openxmlformats.org/presentationml/2006/main" xmlns:r="http://schemas.openxmlformats.org/officeDocument/2006/relationships">
+  <p:cSld>
+    <p:spTree>
+      <p:nvGrpSpPr>
+        <p:cNvPr id="1" name=""/>
+        <p:cNvGrpSpPr/>
+        <p:nvPr/>
+      </p:nvGrpSpPr>
+      <p:grpSpPr>
+        <a:xfrm>
+          <a:off x="0" y="0"/>
+          <a:ext cx="0" cy="0"/>
+          <a:chOff x="0" y="0"/>
+          <a:chExt cx="0" cy="0"/>
+        </a:xfrm>
+      </p:grpSpPr>
+      <p:sp>
+        <p:nvSpPr>
+          <p:cNvPr id="2" name="Slide Image Placeholder 1"/>
+          <p:cNvSpPr>
+            <a:spLocks noGrp="1"/>
+          </p:cNvSpPr>
+          <p:nvPr>
+            <p:ph type="sldImg" idx="2"/>
+          </p:nvPr>
+        </p:nvSpPr>
+        <p:spPr/>
+      </p:sp>
+      <p:sp>
+        <p:nvSpPr>
+          <p:cNvPr id="3" name="Notes Placeholder 2"/>
+          <p:cNvSpPr>
+            <a:spLocks noGrp="1"/>
+          </p:cNvSpPr>
+          <p:nvPr>
+            <p:ph type="body" idx="3" sz="quarter"/>
+          </p:nvPr>
+        </p:nvSpPr>
+        <p:spPr/>
+        <p:txBody>
+          <a:bodyPr/>
+          <a:lstStyle/>
+          <a:p>
+            <a:r>
+              <a:t>DESARROLLO (para explicarlo, no se proyecta):</a:t>
+            </a:r>
+          </a:p>
+          <a:p/>
+          <a:p>
+            <a:r>
+              <a:t>Un ci.yml propio se explica en tres campos.</a:t>
+            </a:r>
+          </a:p>
+          <a:p/>
+          <a:p>
+            <a:r>
+              <a:t>Y el tercero, el corazon del asunto: con que condicion el pipeline debe FALLAR.</a:t>
+            </a:r>
+          </a:p>
+          <a:p/>
+          <a:p>
+            <a:r>
+              <a:t>Un pipeline que no puede fallar nunca no sirve: un workflow cuyo unico paso imprime un mensaje de exito siempre sale verde, y un check que siempre sale verde no aporta ninguna informacion; es una decoracion.</a:t>
+            </a:r>
+          </a:p>
+          <a:p/>
+          <a:p>
+            <a:r>
+              <a:t>Los tres campos son: que se construye, que se prueba y que condicion vuelve rojo el pipeline.</a:t>
+            </a:r>
+          </a:p>
+          <a:p/>
+          <a:p>
+            <a:r>
+              <a:t>Un ejemplo de condicion real es: la corrida falla si npm test devuelve un codigo distinto de 0, por ejemplo cuando GET /health no responde 200.</a:t>
+            </a:r>
+          </a:p>
+          <a:p/>
+          <a:p>
+            <a:r>
+              <a:t>NOTAS:</a:t>
+            </a:r>
+          </a:p>
+          <a:p/>
+          <a:p>
+            <a:r>
+              <a:t>Uno y medio, que se compila o se instala.</a:t>
+            </a:r>
+          </a:p>
+          <a:p/>
+          <a:p>
+            <a:r>
+              <a:t>Uno y medio, que se ejecuta en la prueba y que comprueba exactamente.</a:t>
+            </a:r>
+          </a:p>
+          <a:p/>
+          <a:p>
+            <a:r>
+              <a:t>Si la respuesta no aparece en diez segundos, el pipeline no valida nada todavia.</a:t>
+            </a:r>
+          </a:p>
+          <a:p/>
+          <a:p>
+            <a:r>
+              <a:t>(No se proyecta) La forma de responderlo es una prueba mental que el docente debe hacer en voz alta y en vivo: que error tendria que introducir yo en el codigo para que este pipeline lo detecte.</a:t>
+            </a:r>
+          </a:p>
+          <a:p/>
+          <a:p>
+            <a:r>
+              <a:t>(No se proyecta) Aqui es donde aparece la pregunta previsible del grupo, y hay que salir a su encuentro: para que escribir pruebas de un stub que casi no hace nada.</a:t>
+            </a:r>
+          </a:p>
+          <a:p/>
+          <a:p>
+            <a:r>
+              <a:t>(No se proyecta) La respuesta es que una sola prueba que verifique que el endpoint /health responde 200 detecta la clase de error mas costosa en operacion, que la aplicacion ya no arranca; y con eso la condicion de fallo se escribe sola: el check sale rojo si /health deja de responder 200, si falta una dependencia declarada o si el docker build no compila.</a:t>
+            </a:r>
+          </a:p>
+          <a:p/>
+          <a:p>
+            <a:r>
+              <a:t>(No se proyecta) Conviene romper el pipeline a proposito en la demo, porque un check rojo proyectado ensena mas que el parrafo anterior.</a:t>
+            </a:r>
+          </a:p>
+        </p:txBody>
+      </p:sp>
+      <p:sp>
+        <p:nvSpPr>
+          <p:cNvPr id="4" name="Slide Number Placeholder 3"/>
+          <p:cNvSpPr>
+            <a:spLocks noGrp="1"/>
+          </p:cNvSpPr>
+          <p:nvPr>
+            <p:ph type="sldNum" idx="5" sz="quarter"/>
+          </p:nvPr>
+        </p:nvSpPr>
+        <p:spPr/>
+      </p:sp>
+    </p:spTree>
+  </p:cSld>
+  <p:clrMapOvr>
+    <a:masterClrMapping/>
+  </p:clrMapOvr>
+</p:notes>
+</file>
+
+<file path=ppt/notesSlides/notesSlide13.xml><?xml version="1.0" encoding="utf-8"?>
+<p:notes xmlns:a="http://schemas.openxmlformats.org/drawingml/2006/main" xmlns:p="http://schemas.openxmlformats.org/presentationml/2006/main" xmlns:r="http://schemas.openxmlformats.org/officeDocument/2006/relationships">
+  <p:cSld>
+    <p:spTree>
+      <p:nvGrpSpPr>
+        <p:cNvPr id="1" name=""/>
+        <p:cNvGrpSpPr/>
+        <p:nvPr/>
+      </p:nvGrpSpPr>
+      <p:grpSpPr>
+        <a:xfrm>
+          <a:off x="0" y="0"/>
+          <a:ext cx="0" cy="0"/>
+          <a:chOff x="0" y="0"/>
+          <a:chExt cx="0" cy="0"/>
+        </a:xfrm>
+      </p:grpSpPr>
+      <p:sp>
+        <p:nvSpPr>
+          <p:cNvPr id="2" name="Slide Image Placeholder 1"/>
+          <p:cNvSpPr>
+            <a:spLocks noGrp="1"/>
+          </p:cNvSpPr>
+          <p:nvPr>
+            <p:ph type="sldImg" idx="2"/>
+          </p:nvPr>
+        </p:nvSpPr>
+        <p:spPr/>
+      </p:sp>
+      <p:sp>
+        <p:nvSpPr>
+          <p:cNvPr id="3" name="Notes Placeholder 2"/>
+          <p:cNvSpPr>
+            <a:spLocks noGrp="1"/>
+          </p:cNvSpPr>
+          <p:nvPr>
+            <p:ph type="body" idx="3" sz="quarter"/>
+          </p:nvPr>
+        </p:nvSpPr>
+        <p:spPr/>
+        <p:txBody>
+          <a:bodyPr/>
+          <a:lstStyle/>
+          <a:p>
+            <a:r>
+              <a:t>DESARROLLO (para explicarlo, no se proyecta):</a:t>
+            </a:r>
+          </a:p>
+          <a:p/>
+          <a:p>
+            <a:r>
               <a:t>La plataforma enmascara los secretos en el registro de salida, pero enmascarar no es impedir la fuga: si un paso imprime el valor transformado, por ejemplo codificado, sale en claro; la regla es no imprimir secretos nunca.</a:t>
             </a:r>
           </a:p>
@@ -916,61 +1402,31 @@
           <a:lstStyle/>
           <a:p>
             <a:r>
-              <a:t>DESARROLLO (para explicarlo, no se proyecta):</a:t>
+              <a:t>TEXTO COMPLETO DE LA LÁMINA (se proyecta resumido):</a:t>
             </a:r>
           </a:p>
           <a:p/>
           <a:p>
             <a:r>
-              <a:t>GitHub Actions es la herramienta del dia porque es gratis, corre en el navegador y produce evidencia verificable.</a:t>
+              <a:t>CI: build + test en cada push. CD: deploy — aquí simulado (echo/artifact).</a:t>
             </a:r>
           </a:p>
           <a:p/>
           <a:p>
             <a:r>
-              <a:t>Un workflow es un archivo YAML en la carpeta.github/workflows; el nombre es libre y ci.yml es la convencion.</a:t>
+              <a:t>GitHub Actions free: runners hosted; YAML en `.github/workflows/`.</a:t>
             </a:r>
           </a:p>
           <a:p/>
           <a:p>
             <a:r>
-              <a:t>El evento o disparador declara cuando corre: on push para cada subida, on pull_request para cada propuesta de cambio, workflow_dispatch para un boton manual, schedule para una hora fija.</a:t>
+              <a:t>CI = integración continua: cada cambio se construye y se prueba solo. CD = entrega continua (queda listo para desplegar) o despliegue continuo (llega solo a producción).</a:t>
             </a:r>
           </a:p>
           <a:p/>
           <a:p>
             <a:r>
-              <a:t>Un job es un conjunto de pasos que corre en un runner, una maquina virtual limpia que se crea para esa ejecucion y se destruye al terminar.</a:t>
-            </a:r>
-          </a:p>
-          <a:p/>
-          <a:p>
-            <a:r>
-              <a:t>Un step es un comando o el uso de una action, unidad reutilizable publicada por otros.</a:t>
-            </a:r>
-          </a:p>
-          <a:p/>
-          <a:p>
-            <a:r>
-              <a:t>Que el runner sea limpio y efimero es el punto pedagogico central: demuestra que la construccion no depende de nada instalado a mano en el portatil de nadie.</a:t>
-            </a:r>
-          </a:p>
-          <a:p/>
-          <a:p>
-            <a:r>
-              <a:t>NOTAS:</a:t>
-            </a:r>
-          </a:p>
-          <a:p/>
-          <a:p>
-            <a:r>
-              <a:t>Su vocabulario tiene cinco palabras.</a:t>
-            </a:r>
-          </a:p>
-          <a:p/>
-          <a:p>
-            <a:r>
-              <a:t>(No se proyecta) Advertencias: el YAML se indenta con espacios y nunca con tabulaciones, causa numero uno de un pipeline que no arranca; y en el nivel gratuito los repositorios publicos tienen minutos ilimitados mientras los privados tienen una cuota del orden de 2000 minutos al mes, cifra que conviene confirmar en la pagina de facturacion porque el proveedor la cambia.</a:t>
+              <a:t>«Ya tenemos CD» porque el YAML tiene un paso `deploy` es falso. Aquí llega a «listo para desplegar».</a:t>
             </a:r>
           </a:p>
         </p:txBody>
@@ -1046,55 +1502,55 @@
           <a:p/>
           <a:p>
             <a:r>
-              <a:t>Un workflow no es un archivo cualquiera: tiene tres bloques nombrados y tres pasos en orden.</a:t>
+              <a:t>GitHub Actions es la herramienta del dia porque es gratis, corre en el navegador y produce evidencia verificable.</a:t>
             </a:r>
           </a:p>
           <a:p/>
           <a:p>
             <a:r>
-              <a:t>El primer bloque son los DISPARADORES, es decir la clave on, y basta con on push y pull_request bien escritos.</a:t>
+              <a:t>Un workflow es un archivo YAML en la carpeta.github/workflows; el nombre es libre y ci.yml es la convencion.</a:t>
             </a:r>
           </a:p>
           <a:p/>
           <a:p>
             <a:r>
-              <a:t>Los tres PASOS van presentes y en ORDEN: construccion, prueba y despliegue simulado.</a:t>
+              <a:t>El evento o disparador declara cuando corre: on push para cada subida, on pull_request para cada propuesta de cambio, workflow_dispatch para un boton manual, schedule para una hora fija.</a:t>
             </a:r>
           </a:p>
           <a:p/>
           <a:p>
             <a:r>
-              <a:t>El orden no es capricho ni estetica: probar antes de construir no prueba el artefacto que se va a entregar, y desplegar antes de probar es exactamente lo que la integracion continua existe para impedir.</a:t>
+              <a:t>Un job es un conjunto de pasos que corre en un runner, una maquina virtual limpia que se crea para esa ejecucion y se destruye al terminar.</a:t>
             </a:r>
           </a:p>
           <a:p/>
           <a:p>
             <a:r>
-              <a:t>Un punto y medio adicional es que el paso de despliegue este ROTULADO como simulado y no prometa un despliegue real; con escribir «Despliegue SIMULADO (no despliega a ningun servidor)» en el nombre del paso se cumple.</a:t>
+              <a:t>Un step es un comando o el uso de una action, unidad reutilizable publicada por otros.</a:t>
             </a:r>
           </a:p>
           <a:p/>
           <a:p>
             <a:r>
-              <a:t>(No se proyecta) Un punto y medio es el ENTORNO de ejecucion, la clave runs-on, tipicamente ubuntu-latest; es el bloque que el estudiante omite mas y el mas facil de recuperar.</a:t>
+              <a:t>Que el runner sea limpio y efimero es el punto pedagogico central: demuestra que la construccion no depende de nada instalado a mano en el portatil de nadie.</a:t>
             </a:r>
           </a:p>
           <a:p/>
           <a:p>
             <a:r>
-              <a:t>(No se proyecta) Y un punto es la coherencia con el Dockerfile del Corte 1: la misma imagen y el mismo puerto, es decir cloudlite-api con su etiqueta 0.1.0 y el 8080 del EXPOSE de la Clase 3.</a:t>
+              <a:t>NOTAS:</a:t>
             </a:r>
           </a:p>
           <a:p/>
           <a:p>
             <a:r>
-              <a:t>(No se proyecta) Falta la sancion, que conviene anunciar dos veces: la pregunta vale CERO completa si aparece un secreto escrito en claro dentro del YAML, sin importar lo bien que este el resto.</a:t>
+              <a:t>Su vocabulario tiene cinco palabras.</a:t>
             </a:r>
           </a:p>
           <a:p/>
           <a:p>
             <a:r>
-              <a:t>(No se proyecta) Es la misma politica que el estudiante escribio en la pregunta 3 del Corte 2, y esta es la clase donde se comprueba si la cumple.</a:t>
+              <a:t>(No se proyecta) Advertencias: el YAML se indenta con espacios y nunca con tabulaciones, causa numero uno de un pipeline que no arranca; y en el nivel gratuito los repositorios publicos tienen minutos ilimitados mientras los privados tienen una cuota del orden de 2000 minutos al mes, cifra que conviene confirmar en la pagina de facturacion porque el proveedor la cambia.</a:t>
             </a:r>
           </a:p>
         </p:txBody>
@@ -1170,73 +1626,55 @@
           <a:p/>
           <a:p>
             <a:r>
-              <a:t>Monitorear es vigilar indicadores decididos de antemano; observabilidad es la capacidad de responder preguntas nuevas sobre el sistema a partir de lo que el sistema emite, sin agregar codigo por cada duda.</a:t>
+              <a:t>Un workflow no es un archivo cualquiera: tiene tres bloques nombrados y tres pasos en orden.</a:t>
             </a:r>
           </a:p>
           <a:p/>
           <a:p>
             <a:r>
-              <a:t>Las metricas son numeros medidos en el tiempo, baratas porque se agregan, y detectan que algo cambio.</a:t>
+              <a:t>El primer bloque son los DISPARADORES, es decir la clave on, y basta con on push y pull_request bien escritos.</a:t>
             </a:r>
           </a:p>
           <a:p/>
           <a:p>
             <a:r>
-              <a:t>Los logs, o registros, son eventos discretos con contexto, caros en volumen, y explican por que cambio.</a:t>
+              <a:t>Los tres PASOS van presentes y en ORDEN: construccion, prueba y despliegue simulado.</a:t>
             </a:r>
           </a:p>
           <a:p/>
           <a:p>
             <a:r>
-              <a:t>La distincion entre metrica y registro importa: al menos una de las senales de un plan deberia ser un REGISTRO y no una metrica numerica, es decir algo que se escribe para poder reconstruir que paso despues.</a:t>
+              <a:t>El orden no es capricho ni estetica: probar antes de construir no prueba el artefacto que se va a entregar, y desplegar antes de probar es exactamente lo que la integracion continua existe para impedir.</a:t>
             </a:r>
           </a:p>
           <a:p/>
           <a:p>
             <a:r>
-              <a:t>La practica minima documentable es el log estructurado: cada linea es un objeto con campos fijos como fecha, nivel, identificador de peticion, ruta, codigo de estado y duracion en milisegundos.</a:t>
+              <a:t>Un punto y medio adicional es que el paso de despliegue este ROTULADO como simulado y no prometa un despliegue real; con escribir «Despliegue SIMULADO (no despliega a ningun servidor)» en el nombre del paso se cumple.</a:t>
             </a:r>
           </a:p>
           <a:p/>
           <a:p>
             <a:r>
-              <a:t>Con ese identificador propagado entre servicios se reconstruye el recorrido: una traza pobre, pero real.</a:t>
+              <a:t>(No se proyecta) Un punto y medio es el ENTORNO de ejecucion, la clave runs-on, tipicamente ubuntu-latest; es el bloque que el estudiante omite mas y el mas facil de recuperar.</a:t>
             </a:r>
           </a:p>
           <a:p/>
           <a:p>
             <a:r>
-              <a:t>Un ejemplo de linea estructurada es: fecha 2026-10-03 10:15:02, nivel INFO, peticion a91f, ruta POST /turnos, estado 201, duracion 84 ms.</a:t>
+              <a:t>(No se proyecta) Y un punto es la coherencia con el Dockerfile del Corte 1: la misma imagen y el mismo puerto, es decir cloudlite-api con su etiqueta 0.1.0 y el 8080 del EXPOSE de la Clase 3.</a:t>
             </a:r>
           </a:p>
           <a:p/>
           <a:p>
             <a:r>
-              <a:t>Un error comun es escribir logs como frases libres: se leen bien, pero no se pueden filtrar ni contar.</a:t>
+              <a:t>(No se proyecta) Falta la sancion, que conviene anunciar dos veces: la pregunta vale CERO completa si aparece un secreto escrito en claro dentro del YAML, sin importar lo bien que este el resto.</a:t>
             </a:r>
           </a:p>
           <a:p/>
           <a:p>
             <a:r>
-              <a:t>NOTAS:</a:t>
-            </a:r>
-          </a:p>
-          <a:p/>
-          <a:p>
-            <a:r>
-              <a:t>Se apoya en tres tipos de senal.</a:t>
-            </a:r>
-          </a:p>
-          <a:p/>
-          <a:p>
-            <a:r>
-              <a:t>(No se proyecta) La segunda mitad de la clase cambia de lado: ya no se trata de validar antes, sino de saber que pasa despues.</a:t>
-            </a:r>
-          </a:p>
-          <a:p/>
-          <a:p>
-            <a:r>
-              <a:t>(No se proyecta) Las trazas siguen el recorrido de una sola peticion por varios servicios y son necesarias porque la Clase 4 convirtio el sistema en distribuido: cuando la peticion pasa por la API y por el servicio de notificaciones, saber cual de los dos tardo es imposible con metricas agregadas.</a:t>
+              <a:t>(No se proyecta) Es la misma politica que el estudiante escribio en la pregunta 3 del Corte 2, y esta es la clase donde se comprueba si la cumple.</a:t>
             </a:r>
           </a:p>
         </p:txBody>
@@ -1306,67 +1744,37 @@
           <a:lstStyle/>
           <a:p>
             <a:r>
-              <a:t>DESARROLLO (para explicarlo, no se proyecta):</a:t>
+              <a:t>TEXTO COMPLETO DE LA LÁMINA (se proyecta resumido):</a:t>
             </a:r>
           </a:p>
           <a:p/>
           <a:p>
             <a:r>
-              <a:t>Las cuatro senales de oro son latencia, trafico, errores y saturacion, y cada una necesita definicion operativa.</a:t>
+              <a:t>Tres bloques obligatorios: disparadores (`on`) · entorno (`runs-on`) · pasos.</a:t>
             </a:r>
           </a:p>
           <a:p/>
           <a:p>
             <a:r>
-              <a:t>Trafico es cuanta demanda llega, en peticiones por segundo o por minuto.</a:t>
+              <a:t>Los pasos, en este orden: construcción → prueba → despliegue simulado.</a:t>
             </a:r>
           </a:p>
           <a:p/>
           <a:p>
             <a:r>
-              <a:t>Saturacion es que tan cerca esta el recurso mas escaso de su limite: CPU, memoria, disco o, en la mayoria de las APIs reales, las conexiones libres del pool de la base de datos</a:t>
+              <a:t>Ejemplo: `on: [push, pull_request]` · `runs-on: ubuntu-latest` · pasos checkout, build, test, deploy simulado.</a:t>
             </a:r>
           </a:p>
           <a:p/>
           <a:p>
             <a:r>
-              <a:t>La convencion es alertar cuando un recurso pasa del 70 u 80 por ciento sostenido, y es convencion, no ley.</a:t>
+              <a:t>Secrets solo vía Settings; nunca en el YAML en claro: un secreto escrito queda en el historial del repositorio.</a:t>
             </a:r>
           </a:p>
           <a:p/>
           <a:p>
             <a:r>
-              <a:t>Latencia merece explicacion aparte porque introduce el percentil, el valor por debajo del cual cae un porcentaje dado de las mediciones: si el p95 de la API es 300 milisegundos</a:t>
-            </a:r>
-          </a:p>
-          <a:p/>
-          <a:p>
-            <a:r>
-              <a:t>95 de cada 100 peticiones respondieron en 300 milisegundos o menos y 5 tardaron mas.</a:t>
-            </a:r>
-          </a:p>
-          <a:p/>
-          <a:p>
-            <a:r>
-              <a:t>Es mas honesto que el promedio, y el ejemplo lo prueba: 99 peticiones de 50 milisegundos y una de 5 segundos dan un promedio de 99 milisegundos, que parece excelente, mientras el p99 es 5 segundos y corresponde a un usuario mirando una pantalla congelada.</a:t>
-            </a:r>
-          </a:p>
-          <a:p/>
-          <a:p>
-            <a:r>
-              <a:t>En CloudLite Turnos las cuatro senales son: latencia, el p95 del endpoint de reserva; trafico, las reservas por minuto; errores, el porcentaje de respuestas 5xx; saturacion, el uso del pool de conexiones a la base de datos.</a:t>
-            </a:r>
-          </a:p>
-          <a:p/>
-          <a:p>
-            <a:r>
-              <a:t>Un error comun es medir solo la CPU: es una senal de saturacion entre varias, y en una API que espera a la base de datos casi nunca es la primera en agotarse.</a:t>
-            </a:r>
-          </a:p>
-          <a:p/>
-          <a:p>
-            <a:r>
-              <a:t>(No se proyecta) Errores es la proporcion de peticiones que fallan, tipicamente el porcentaje de respuestas 5xx; conviene expresarlo como disponibilidad, y aqui hay aritmetica que el docente debe citar: 99,9 por ciento equivale a unos 43 minutos de indisponibilidad al mes y 99,99 por ciento a unos 4 minutos, lo cual no es convencion sino calculo sobre los 43.200 minutos de un mes de treinta dias.</a:t>
+              <a:t>Un CI que solo imprime «OK» no es CI: tienes que poder decir qué error lo pondría rojo.</a:t>
             </a:r>
           </a:p>
         </p:txBody>
@@ -1442,115 +1850,73 @@
           <a:p/>
           <a:p>
             <a:r>
-              <a:t>El plan de monitoreo es una tabla de entre 4 y 6 filas con TRES columnas: «Senal», «Que se mide en MI dominio» y «Umbral u objetivo».</a:t>
+              <a:t>Monitorear es vigilar indicadores decididos de antemano; observabilidad es la capacidad de responder preguntas nuevas sobre el sistema a partir de lo que el sistema emite, sin agregar codigo por cada duda.</a:t>
             </a:r>
           </a:p>
           <a:p/>
           <a:p>
             <a:r>
-              <a:t>La regla que decide la mitad de la nota se dice en una frase: una senal sin umbral NO SUMA, aunque este bien elegida.</a:t>
+              <a:t>Las metricas son numeros medidos en el tiempo, baratas porque se agregan, y detectan que algo cambio.</a:t>
             </a:r>
           </a:p>
           <a:p/>
           <a:p>
             <a:r>
-              <a:t>«el listado de disponibilidad debe responder en menos de 400 milisegundos y si pasa de 800 se revisa» si, porque define cuando hay que actuar.</a:t>
+              <a:t>Los logs, o registros, son eventos discretos con contexto, caros en volumen, y explican por que cambio.</a:t>
             </a:r>
           </a:p>
           <a:p/>
           <a:p>
             <a:r>
-              <a:t>La segunda columna tiene que referirse a operaciones del dominio propio, asi que «el sistema» no es una respuesta y «el listado de disponibilidad de canchas» o «el registro de una reserva» si.</a:t>
+              <a:t>La distincion entre metrica y registro importa: al menos una de las senales de un plan deberia ser un REGISTRO y no una metrica numerica, es decir algo que se escribe para poder reconstruir que paso despues.</a:t>
             </a:r>
           </a:p>
           <a:p/>
           <a:p>
             <a:r>
-              <a:t>Cada umbral necesita su accion: que se HACE cuando se cruza es lo que convierte una lista de metricas en un plan de operacion.</a:t>
+              <a:t>La practica minima documentable es el log estructurado: cada linea es un objeto con campos fijos como fecha, nivel, identificador de peticion, ruta, codigo de estado y duracion en milisegundos.</a:t>
             </a:r>
           </a:p>
           <a:p/>
           <a:p>
             <a:r>
-              <a:t>Un ejemplo de fila completa es: Senal «latencia del listado de turnos»</a:t>
+              <a:t>Con ese identificador propagado entre servicios se reconstruye el recorrido: una traza pobre, pero real.</a:t>
             </a:r>
           </a:p>
           <a:p/>
           <a:p>
             <a:r>
-              <a:t>Que se mide «p95 del GET /turnos»</a:t>
+              <a:t>Un ejemplo de linea estructurada es: fecha 2026-10-03 10:15:02, nivel INFO, peticion a91f, ruta POST /turnos, estado 201, duracion 84 ms.</a:t>
             </a:r>
           </a:p>
           <a:p/>
           <a:p>
             <a:r>
-              <a:t>Umbral «menos de 300 ms; si se supera durante 5 minutos, se revisa el indice de la consulta».</a:t>
+              <a:t>Un error comun es escribir logs como frases libres: se leen bien, pero no se pueden filtrar ni contar.</a:t>
             </a:r>
           </a:p>
           <a:p/>
           <a:p>
             <a:r>
-              <a:t>Un error comun es un umbral sin numero, como «latencia alta»: no dice cuando actuar.</a:t>
+              <a:t>NOTAS:</a:t>
             </a:r>
           </a:p>
           <a:p/>
           <a:p>
             <a:r>
-              <a:t>Otro es una senal generica, como «el sistema»: la fila tiene que nombrar una operacion concreta del dominio.</a:t>
+              <a:t>Se apoya en tres tipos de senal.</a:t>
             </a:r>
           </a:p>
           <a:p/>
           <a:p>
             <a:r>
-              <a:t>NOTAS:</a:t>
+              <a:t>(No se proyecta) La segunda mitad de la clase cambia de lado: ya no se trata de validar antes, sino de saber que pasa despues.</a:t>
             </a:r>
           </a:p>
           <a:p/>
           <a:p>
             <a:r>
-              <a:t>«Medimos la latencia» no permite decidir nada</a:t>
-            </a:r>
-          </a:p>
-          <a:p/>
-          <a:p>
-            <a:r>
-              <a:t>Esa accion no es una cuarta columna: se escribe dentro del umbral, como en el ejemplo del listado.</a:t>
-            </a:r>
-          </a:p>
-          <a:p/>
-          <a:p>
-            <a:r>
-              <a:t>La fila tiene senal, objeto concreto del dominio y una accion atada al umbral.</a:t>
-            </a:r>
-          </a:p>
-          <a:p/>
-          <a:p>
-            <a:r>
-              <a:t>(No se proyecta) El reparto de sus 6 puntos es un punto por senal bien formada con su umbral hasta la cuarta, hasta un punto adicional entre las senales quinta y sexta, y un punto por que al menos una sea un registro.</a:t>
-            </a:r>
-          </a:p>
-          <a:p/>
-          <a:p>
-            <a:r>
-              <a:t>(No se proyecta) El umbral puede ser discutible, y hay que decir que se acepta discutible: lo que no puede es faltar.</a:t>
-            </a:r>
-          </a:p>
-          <a:p/>
-          <a:p>
-            <a:r>
-              <a:t>(No se proyecta) Una tabla de referencia para CloudLite, que el docente puede llenar en vivo: latencia p95 del inicio de sesion y del listado principal, con objetivo bajo 300 milisegundos; peticiones por minuto en la hora pico, con un valor esperado que sirva de linea base; porcentaje de respuestas 5xx, con alerta sobre el 1 por ciento sostenido; uso del pool de conexiones, con alerta sobre el 80 por ciento; y la fila que casi nadie escribe y vale un punto, un REGISTRO: el log estructurado de cada reserva rechazada y de cada intento de inicio de sesion fallido, con identificador de peticion, ruta y codigo, cuyo umbral es un evento observable, por ejemplo mas de cinco fallos del mismo usuario en diez minutos se revisa.</a:t>
-            </a:r>
-          </a:p>
-          <a:p/>
-          <a:p>
-            <a:r>
-              <a:t>(No se proyecta) Conviene proyectar esa fila y decir «esta es la que falta en el 80 por ciento de las entregas».</a:t>
-            </a:r>
-          </a:p>
-          <a:p/>
-          <a:p>
-            <a:r>
-              <a:t>(No se proyecta) Ahi entra la optimizacion de la segunda mitad del tema: paginar, con veinte a cincuenta elementos por pagina, porque un endpoint que devuelve cincuenta mil registros es problema de latencia y de memoria; indexar la columna por la que se filtra, porque sin indice el motor recorre la tabla completa; cachear lecturas repetidas, donde una tasa de acierto del 90 por ciento significa que nueve de cada diez lecturas no llegan a la base; y limitar la tasa de peticiones, el control de denegacion de servicio de la Clase 6.</a:t>
+              <a:t>(No se proyecta) Las trazas siguen el recorrido de una sola peticion por varios servicios y son necesarias porque la Clase 4 convirtio el sistema en distribuido: cuando la peticion pasa por la API y por el servicio de notificaciones, saber cual de los dos tardo es imposible con metricas agregadas.</a:t>
             </a:r>
           </a:p>
         </p:txBody>
@@ -1626,67 +1992,61 @@
           <a:p/>
           <a:p>
             <a:r>
-              <a:t>Un job corre en ubuntu-latest y hace, en este orden: descargar el codigo con la action de checkout, instalar el runtime con la action de setup del lenguaje</a:t>
+              <a:t>Las cuatro senales de oro son latencia, trafico, errores y saturacion, y cada una necesita definicion operativa.</a:t>
             </a:r>
           </a:p>
           <a:p/>
           <a:p>
             <a:r>
-              <a:t>Un paso Construir que instala dependencias y ejecuta docker build con la imagen etiquetada, un paso Probar que corre las pruebas</a:t>
+              <a:t>Trafico es cuanta demanda llega, en peticiones por segundo o por minuto.</a:t>
             </a:r>
           </a:p>
           <a:p/>
           <a:p>
             <a:r>
-              <a:t>Y un paso final rotulado como despliegue simulado que imprime la etiqueta de version y publica un artefacto, un archivo que queda guardado junto a la corrida.</a:t>
+              <a:t>Saturacion es que tan cerca esta el recurso mas escaso de su limite: CPU, memoria, disco o, en la mayoria de las APIs reales, las conexiones libres del pool de la base de datos</a:t>
             </a:r>
           </a:p>
           <a:p/>
           <a:p>
             <a:r>
-              <a:t>Que docker build forme parte de la construccion tiene un valor extra: comprueba en cada cambio que el Dockerfile sigue siendo valido, que es una de las cosas que se rompen en silencio.</a:t>
+              <a:t>La convencion es alertar cuando un recurso pasa del 70 u 80 por ciento sostenido, y es convencion, no ley.</a:t>
             </a:r>
           </a:p>
           <a:p/>
           <a:p>
             <a:r>
-              <a:t>Un pipeline sano falla rapido: si la construccion falla, la prueba no se ejecuta, y el autor del cambio recibe el aviso en minutos.</a:t>
+              <a:t>Latencia merece explicacion aparte porque introduce el percentil, el valor por debajo del cual cae un porcentaje dado de las mediciones: si el p95 de la API es 300 milisegundos</a:t>
             </a:r>
           </a:p>
           <a:p/>
           <a:p>
             <a:r>
-              <a:t>En GitHub Actions cada paso que termina con un codigo de salida distinto de 0 detiene el job y lo marca en rojo: esa es la condicion de fallo que convierte el workflow en una verificacion real.</a:t>
+              <a:t>95 de cada 100 peticiones respondieron en 300 milisegundos o menos y 5 tardaron mas.</a:t>
             </a:r>
           </a:p>
           <a:p/>
           <a:p>
             <a:r>
-              <a:t>Un ejemplo de fallo util: alguien cambia la respuesta de /health y no actualiza la prueba; el paso de prueba termina con codigo 1, la corrida queda en rojo y el cambio no se integra hasta corregirlo.</a:t>
+              <a:t>Es mas honesto que el promedio, y el ejemplo lo prueba: 99 peticiones de 50 milisegundos y una de 5 segundos dan un promedio de 99 milisegundos, que parece excelente, mientras el p99 es 5 segundos y corresponde a un usuario mirando una pantalla congelada.</a:t>
             </a:r>
           </a:p>
           <a:p/>
           <a:p>
             <a:r>
-              <a:t>NOTAS:</a:t>
+              <a:t>En CloudLite Turnos las cuatro senales son: latencia, el p95 del endpoint de reserva; trafico, las reservas por minuto; errores, el porcentaje de respuestas 5xx; saturacion, el uso del pool de conexiones a la base de datos.</a:t>
             </a:r>
           </a:p>
           <a:p/>
           <a:p>
             <a:r>
-              <a:t>El workflow se dispara en push y en pull_request.</a:t>
+              <a:t>Un error comun es medir solo la CPU: es una senal de saturacion entre varias, y en una API que espera a la base de datos casi nunca es la primera en agotarse.</a:t>
             </a:r>
           </a:p>
           <a:p/>
           <a:p>
             <a:r>
-              <a:t>(No se proyecta) El ejemplo concreto es el pipeline del stub de CloudLite, que ya existe desde la Clase 3 como Dockerfile y contenedor, y la diapositiva del ci.yml es el molde que se puede copiar.</a:t>
-            </a:r>
-          </a:p>
-          <a:p/>
-          <a:p>
-            <a:r>
-              <a:t>(No se proyecta) La evidencia del entregable es doble: el archivo ci.yml en el repositorio y la captura de una corrida en verde con los nombres de los pasos visibles; si Actions falla por cuota o por red se acepta el YAML con la explicacion paso por paso, pero eso es plan B y hay que decir que lo es.</a:t>
+              <a:t>(No se proyecta) Errores es la proporcion de peticiones que fallan, tipicamente el porcentaje de respuestas 5xx; conviene expresarlo como disponibilidad, y aqui hay aritmetica que el docente debe citar: 99,9 por ciento equivale a unos 43 minutos de indisponibilidad al mes y 99,99 por ciento a unos 4 minutos, lo cual no es convencion sino calculo sobre los 43.200 minutos de un mes de treinta dias.</a:t>
             </a:r>
           </a:p>
         </p:txBody>
@@ -1756,85 +2116,37 @@
           <a:lstStyle/>
           <a:p>
             <a:r>
-              <a:t>DESARROLLO (para explicarlo, no se proyecta):</a:t>
+              <a:t>TEXTO COMPLETO DE LA LÁMINA (se proyecta resumido):</a:t>
             </a:r>
           </a:p>
           <a:p/>
           <a:p>
             <a:r>
-              <a:t>Un ci.yml propio se explica en tres campos.</a:t>
+              <a:t>Golden signals-lite: latencia, tráfico, errores, saturación.</a:t>
             </a:r>
           </a:p>
           <a:p/>
           <a:p>
             <a:r>
-              <a:t>Y el tercero, el corazon del asunto: con que condicion el pipeline debe FALLAR.</a:t>
+              <a:t>Cada señal va con su umbral: «medimos la latencia» no permite decidir nada.</a:t>
             </a:r>
           </a:p>
           <a:p/>
           <a:p>
             <a:r>
-              <a:t>Un pipeline que no puede fallar nunca no sirve: un workflow cuyo unico paso imprime un mensaje de exito siempre sale verde, y un check que siempre sale verde no aporta ninguna informacion; es una decoracion.</a:t>
+              <a:t>Al menos una debe ser un registro (log), no una métrica numérica.</a:t>
             </a:r>
           </a:p>
           <a:p/>
           <a:p>
             <a:r>
-              <a:t>Los tres campos son: que se construye, que se prueba y que condicion vuelve rojo el pipeline.</a:t>
+              <a:t>Optimización: caché conceptual, paginación, límites de tasa, documentados en el diseño.</a:t>
             </a:r>
           </a:p>
           <a:p/>
           <a:p>
             <a:r>
-              <a:t>Un ejemplo de condicion real es: la corrida falla si npm test devuelve un codigo distinto de 0, por ejemplo cuando GET /health no responde 200.</a:t>
-            </a:r>
-          </a:p>
-          <a:p/>
-          <a:p>
-            <a:r>
-              <a:t>NOTAS:</a:t>
-            </a:r>
-          </a:p>
-          <a:p/>
-          <a:p>
-            <a:r>
-              <a:t>Uno y medio, que se compila o se instala.</a:t>
-            </a:r>
-          </a:p>
-          <a:p/>
-          <a:p>
-            <a:r>
-              <a:t>Uno y medio, que se ejecuta en la prueba y que comprueba exactamente.</a:t>
-            </a:r>
-          </a:p>
-          <a:p/>
-          <a:p>
-            <a:r>
-              <a:t>Si la respuesta no aparece en diez segundos, el pipeline no valida nada todavia.</a:t>
-            </a:r>
-          </a:p>
-          <a:p/>
-          <a:p>
-            <a:r>
-              <a:t>(No se proyecta) La forma de responderlo es una prueba mental que el docente debe hacer en voz alta y en vivo: que error tendria que introducir yo en el codigo para que este pipeline lo detecte.</a:t>
-            </a:r>
-          </a:p>
-          <a:p/>
-          <a:p>
-            <a:r>
-              <a:t>(No se proyecta) Aqui es donde aparece la pregunta previsible del grupo, y hay que salir a su encuentro: para que escribir pruebas de un stub que casi no hace nada.</a:t>
-            </a:r>
-          </a:p>
-          <a:p/>
-          <a:p>
-            <a:r>
-              <a:t>(No se proyecta) La respuesta es que una sola prueba que verifique que el endpoint /health responde 200 detecta la clase de error mas costosa en operacion, que la aplicacion ya no arranca; y con eso la condicion de fallo se escribe sola: el check sale rojo si /health deja de responder 200, si falta una dependencia declarada o si el docker build no compila.</a:t>
-            </a:r>
-          </a:p>
-          <a:p/>
-          <a:p>
-            <a:r>
-              <a:t>(No se proyecta) Conviene romper el pipeline a proposito en la demo, porque un check rojo proyectado ensena mas que el parrafo anterior.</a:t>
+              <a:t>Ejemplo: p95 del `GET /turnos` &lt; 300 ms; si se supera 5 minutos seguidos, se revisa el índice de la consulta.</a:t>
             </a:r>
           </a:p>
         </p:txBody>
@@ -8304,14 +8616,83 @@
       </p:sp>
       <p:sp>
         <p:nvSpPr>
-          <p:cNvPr id="5" name="TextBox 4"/>
+          <p:cNvPr id="5" name="Rounded Rectangle 4"/>
+          <p:cNvSpPr/>
+          <p:nvPr/>
+        </p:nvSpPr>
+        <p:spPr>
+          <a:xfrm>
+            <a:off x="5797149" y="1343926"/>
+            <a:ext cx="6010497" cy="4837658"/>
+          </a:xfrm>
+          <a:prstGeom prst="roundRect">
+            <a:avLst>
+              <a:gd name="adj" fmla="val 4000"/>
+            </a:avLst>
+          </a:prstGeom>
+          <a:solidFill>
+            <a:srgbClr val="E8EEF4"/>
+          </a:solidFill>
+          <a:ln>
+            <a:noFill/>
+          </a:ln>
+        </p:spPr>
+        <p:style>
+          <a:lnRef idx="1">
+            <a:schemeClr val="accent1"/>
+          </a:lnRef>
+          <a:fillRef idx="3">
+            <a:schemeClr val="accent1"/>
+          </a:fillRef>
+          <a:effectRef idx="2">
+            <a:schemeClr val="accent1"/>
+          </a:effectRef>
+          <a:fontRef idx="minor">
+            <a:schemeClr val="lt1"/>
+          </a:fontRef>
+        </p:style>
+        <p:txBody>
+          <a:bodyPr rtlCol="0" anchor="ctr"/>
+          <a:lstStyle/>
+          <a:p>
+            <a:pPr algn="ctr"/>
+          </a:p>
+        </p:txBody>
+      </p:sp>
+      <p:pic>
+        <p:nvPicPr>
+          <p:cNvPr id="6" name="Picture 5" descr="ilus-monitoreo-ciclo-paso1.png"/>
+          <p:cNvPicPr>
+            <a:picLocks noChangeAspect="1"/>
+          </p:cNvPicPr>
+          <p:nvPr/>
+        </p:nvPicPr>
+        <p:blipFill>
+          <a:blip r:embed="rId2"/>
+          <a:stretch>
+            <a:fillRect/>
+          </a:stretch>
+        </p:blipFill>
+        <p:spPr>
+          <a:xfrm>
+            <a:off x="5870301" y="1417078"/>
+            <a:ext cx="5864193" cy="4691354"/>
+          </a:xfrm>
+          <a:prstGeom prst="rect">
+            <a:avLst/>
+          </a:prstGeom>
+        </p:spPr>
+      </p:pic>
+      <p:sp>
+        <p:nvSpPr>
+          <p:cNvPr id="7" name="TextBox 6"/>
           <p:cNvSpPr txBox="1"/>
           <p:nvPr/>
         </p:nvSpPr>
         <p:spPr>
           <a:xfrm>
-            <a:off x="457200" y="1170432"/>
-            <a:ext cx="11277295" cy="5230368"/>
+            <a:off x="457200" y="1353312"/>
+            <a:ext cx="5093061" cy="5047488"/>
           </a:xfrm>
           <a:prstGeom prst="rect">
             <a:avLst/>
@@ -8423,27 +8804,11 @@
               <a:t>–   Optimización: caché conceptual, paginación, límites de tasa, documentados en el diseño.</a:t>
             </a:r>
           </a:p>
-          <a:p>
-            <a:pPr>
-              <a:spcAft>
-                <a:spcPts val="800"/>
-              </a:spcAft>
-            </a:pPr>
-            <a:r>
-              <a:rPr sz="2000" b="0" i="0">
-                <a:solidFill>
-                  <a:srgbClr val="333333"/>
-                </a:solidFill>
-                <a:latin typeface="Calibri"/>
-              </a:rPr>
-              <a:t>–   Ejemplo: p95 del «GET /turnos» &lt; 300 ms; si se supera 5 minutos seguidos, se revisa el índice de la consulta.</a:t>
-            </a:r>
-          </a:p>
-        </p:txBody>
-      </p:sp>
-      <p:sp>
-        <p:nvSpPr>
-          <p:cNvPr id="6" name="TextBox 5"/>
+        </p:txBody>
+      </p:sp>
+      <p:sp>
+        <p:nvSpPr>
+          <p:cNvPr id="8" name="TextBox 7"/>
           <p:cNvSpPr txBox="1"/>
           <p:nvPr/>
         </p:nvSpPr>
@@ -9164,14 +9529,83 @@
       </p:sp>
       <p:sp>
         <p:nvSpPr>
-          <p:cNvPr id="5" name="TextBox 4"/>
+          <p:cNvPr id="5" name="Rounded Rectangle 4"/>
+          <p:cNvSpPr/>
+          <p:nvPr/>
+        </p:nvSpPr>
+        <p:spPr>
+          <a:xfrm>
+            <a:off x="5797149" y="1343926"/>
+            <a:ext cx="6010497" cy="4837658"/>
+          </a:xfrm>
+          <a:prstGeom prst="roundRect">
+            <a:avLst>
+              <a:gd name="adj" fmla="val 4000"/>
+            </a:avLst>
+          </a:prstGeom>
+          <a:solidFill>
+            <a:srgbClr val="E8EEF4"/>
+          </a:solidFill>
+          <a:ln>
+            <a:noFill/>
+          </a:ln>
+        </p:spPr>
+        <p:style>
+          <a:lnRef idx="1">
+            <a:schemeClr val="accent1"/>
+          </a:lnRef>
+          <a:fillRef idx="3">
+            <a:schemeClr val="accent1"/>
+          </a:fillRef>
+          <a:effectRef idx="2">
+            <a:schemeClr val="accent1"/>
+          </a:effectRef>
+          <a:fontRef idx="minor">
+            <a:schemeClr val="lt1"/>
+          </a:fontRef>
+        </p:style>
+        <p:txBody>
+          <a:bodyPr rtlCol="0" anchor="ctr"/>
+          <a:lstStyle/>
+          <a:p>
+            <a:pPr algn="ctr"/>
+          </a:p>
+        </p:txBody>
+      </p:sp>
+      <p:pic>
+        <p:nvPicPr>
+          <p:cNvPr id="6" name="Picture 5" descr="ilus-pipeline-falla-paso1.png"/>
+          <p:cNvPicPr>
+            <a:picLocks noChangeAspect="1"/>
+          </p:cNvPicPr>
+          <p:nvPr/>
+        </p:nvPicPr>
+        <p:blipFill>
+          <a:blip r:embed="rId2"/>
+          <a:stretch>
+            <a:fillRect/>
+          </a:stretch>
+        </p:blipFill>
+        <p:spPr>
+          <a:xfrm>
+            <a:off x="5870301" y="1417078"/>
+            <a:ext cx="5864193" cy="4691354"/>
+          </a:xfrm>
+          <a:prstGeom prst="rect">
+            <a:avLst/>
+          </a:prstGeom>
+        </p:spPr>
+      </p:pic>
+      <p:sp>
+        <p:nvSpPr>
+          <p:cNvPr id="7" name="TextBox 6"/>
           <p:cNvSpPr txBox="1"/>
           <p:nvPr/>
         </p:nvSpPr>
         <p:spPr>
           <a:xfrm>
-            <a:off x="457200" y="1170432"/>
-            <a:ext cx="11277295" cy="5230368"/>
+            <a:off x="457200" y="1353312"/>
+            <a:ext cx="5093061" cy="5047488"/>
           </a:xfrm>
           <a:prstGeom prst="rect">
             <a:avLst/>
@@ -9212,14 +9646,14 @@
                 </a:solidFill>
                 <a:latin typeface="Calibri"/>
               </a:rPr>
-              <a:t>–   En GitHub Actions cada paso que termina con un codigo de salida distinto de 0 detiene el job y lo marca en rojo: esa es la condicion de fallo que convierte el workflow en una verificacion real.</a:t>
-            </a:r>
-          </a:p>
-        </p:txBody>
-      </p:sp>
-      <p:sp>
-        <p:nvSpPr>
-          <p:cNvPr id="6" name="TextBox 5"/>
+              <a:t>–   En GitHub Actions cada paso que termina con un codigo de salida distinto de 0 detiene el job y lo marca en rojo: esa es la condicion de fallo que…</a:t>
+            </a:r>
+          </a:p>
+        </p:txBody>
+      </p:sp>
+      <p:sp>
+        <p:nvSpPr>
+          <p:cNvPr id="8" name="TextBox 7"/>
           <p:cNvSpPr txBox="1"/>
           <p:nvPr/>
         </p:nvSpPr>
@@ -13869,14 +14303,83 @@
       </p:sp>
       <p:sp>
         <p:nvSpPr>
-          <p:cNvPr id="5" name="TextBox 4"/>
+          <p:cNvPr id="5" name="Rounded Rectangle 4"/>
+          <p:cNvSpPr/>
+          <p:nvPr/>
+        </p:nvSpPr>
+        <p:spPr>
+          <a:xfrm>
+            <a:off x="5797149" y="1343926"/>
+            <a:ext cx="6010497" cy="4837658"/>
+          </a:xfrm>
+          <a:prstGeom prst="roundRect">
+            <a:avLst>
+              <a:gd name="adj" fmla="val 4000"/>
+            </a:avLst>
+          </a:prstGeom>
+          <a:solidFill>
+            <a:srgbClr val="E8EEF4"/>
+          </a:solidFill>
+          <a:ln>
+            <a:noFill/>
+          </a:ln>
+        </p:spPr>
+        <p:style>
+          <a:lnRef idx="1">
+            <a:schemeClr val="accent1"/>
+          </a:lnRef>
+          <a:fillRef idx="3">
+            <a:schemeClr val="accent1"/>
+          </a:fillRef>
+          <a:effectRef idx="2">
+            <a:schemeClr val="accent1"/>
+          </a:effectRef>
+          <a:fontRef idx="minor">
+            <a:schemeClr val="lt1"/>
+          </a:fontRef>
+        </p:style>
+        <p:txBody>
+          <a:bodyPr rtlCol="0" anchor="ctr"/>
+          <a:lstStyle/>
+          <a:p>
+            <a:pPr algn="ctr"/>
+          </a:p>
+        </p:txBody>
+      </p:sp>
+      <p:pic>
+        <p:nvPicPr>
+          <p:cNvPr id="6" name="Picture 5" descr="ilus-ci-cd-paso1.png"/>
+          <p:cNvPicPr>
+            <a:picLocks noChangeAspect="1"/>
+          </p:cNvPicPr>
+          <p:nvPr/>
+        </p:nvPicPr>
+        <p:blipFill>
+          <a:blip r:embed="rId2"/>
+          <a:stretch>
+            <a:fillRect/>
+          </a:stretch>
+        </p:blipFill>
+        <p:spPr>
+          <a:xfrm>
+            <a:off x="5870301" y="1417078"/>
+            <a:ext cx="5864193" cy="4691354"/>
+          </a:xfrm>
+          <a:prstGeom prst="rect">
+            <a:avLst/>
+          </a:prstGeom>
+        </p:spPr>
+      </p:pic>
+      <p:sp>
+        <p:nvSpPr>
+          <p:cNvPr id="7" name="TextBox 6"/>
           <p:cNvSpPr txBox="1"/>
           <p:nvPr/>
         </p:nvSpPr>
         <p:spPr>
           <a:xfrm>
-            <a:off x="457200" y="1170432"/>
-            <a:ext cx="11277295" cy="5230368"/>
+            <a:off x="457200" y="1353312"/>
+            <a:ext cx="5093061" cy="5047488"/>
           </a:xfrm>
           <a:prstGeom prst="rect">
             <a:avLst/>
@@ -13969,25 +14472,7 @@
                 </a:solidFill>
                 <a:latin typeface="Calibri"/>
               </a:rPr>
-              <a:t> = integración continua: cada cambio se construye y se prueba solo. </a:t>
-            </a:r>
-            <a:r>
-              <a:rPr sz="2000" b="1" i="0">
-                <a:solidFill>
-                  <a:srgbClr val="333333"/>
-                </a:solidFill>
-                <a:latin typeface="Calibri"/>
-              </a:rPr>
-              <a:t>CD</a:t>
-            </a:r>
-            <a:r>
-              <a:rPr sz="2000" b="0" i="0">
-                <a:solidFill>
-                  <a:srgbClr val="333333"/>
-                </a:solidFill>
-                <a:latin typeface="Calibri"/>
-              </a:rPr>
-              <a:t> = entrega continua (queda listo para desplegar) o despliegue continuo (llega solo a producción).</a:t>
+              <a:t> = integración continua:</a:t>
             </a:r>
           </a:p>
           <a:p>
@@ -14028,7 +14513,7 @@
       </p:sp>
       <p:sp>
         <p:nvSpPr>
-          <p:cNvPr id="6" name="TextBox 5"/>
+          <p:cNvPr id="8" name="TextBox 7"/>
           <p:cNvSpPr txBox="1"/>
           <p:nvPr/>
         </p:nvSpPr>
@@ -15289,14 +15774,83 @@
       </p:sp>
       <p:sp>
         <p:nvSpPr>
-          <p:cNvPr id="5" name="TextBox 4"/>
+          <p:cNvPr id="5" name="Rounded Rectangle 4"/>
+          <p:cNvSpPr/>
+          <p:nvPr/>
+        </p:nvSpPr>
+        <p:spPr>
+          <a:xfrm>
+            <a:off x="5797149" y="1343926"/>
+            <a:ext cx="6010497" cy="4837658"/>
+          </a:xfrm>
+          <a:prstGeom prst="roundRect">
+            <a:avLst>
+              <a:gd name="adj" fmla="val 4000"/>
+            </a:avLst>
+          </a:prstGeom>
+          <a:solidFill>
+            <a:srgbClr val="E8EEF4"/>
+          </a:solidFill>
+          <a:ln>
+            <a:noFill/>
+          </a:ln>
+        </p:spPr>
+        <p:style>
+          <a:lnRef idx="1">
+            <a:schemeClr val="accent1"/>
+          </a:lnRef>
+          <a:fillRef idx="3">
+            <a:schemeClr val="accent1"/>
+          </a:fillRef>
+          <a:effectRef idx="2">
+            <a:schemeClr val="accent1"/>
+          </a:effectRef>
+          <a:fontRef idx="minor">
+            <a:schemeClr val="lt1"/>
+          </a:fontRef>
+        </p:style>
+        <p:txBody>
+          <a:bodyPr rtlCol="0" anchor="ctr"/>
+          <a:lstStyle/>
+          <a:p>
+            <a:pPr algn="ctr"/>
+          </a:p>
+        </p:txBody>
+      </p:sp>
+      <p:pic>
+        <p:nvPicPr>
+          <p:cNvPr id="6" name="Picture 5" descr="ilus-yaml-minimo-paso1.png"/>
+          <p:cNvPicPr>
+            <a:picLocks noChangeAspect="1"/>
+          </p:cNvPicPr>
+          <p:nvPr/>
+        </p:nvPicPr>
+        <p:blipFill>
+          <a:blip r:embed="rId2"/>
+          <a:stretch>
+            <a:fillRect/>
+          </a:stretch>
+        </p:blipFill>
+        <p:spPr>
+          <a:xfrm>
+            <a:off x="5870301" y="1417078"/>
+            <a:ext cx="5864193" cy="4691354"/>
+          </a:xfrm>
+          <a:prstGeom prst="rect">
+            <a:avLst/>
+          </a:prstGeom>
+        </p:spPr>
+      </p:pic>
+      <p:sp>
+        <p:nvSpPr>
+          <p:cNvPr id="7" name="TextBox 6"/>
           <p:cNvSpPr txBox="1"/>
           <p:nvPr/>
         </p:nvSpPr>
         <p:spPr>
           <a:xfrm>
-            <a:off x="457200" y="1170432"/>
-            <a:ext cx="11277295" cy="5230368"/>
+            <a:off x="457200" y="1353312"/>
+            <a:ext cx="5093061" cy="5047488"/>
           </a:xfrm>
           <a:prstGeom prst="rect">
             <a:avLst/>
@@ -15480,45 +16034,11 @@
               <a:t>–   Secrets solo vía Settings; nunca en el YAML en claro: un secreto escrito queda en el historial del repositorio.</a:t>
             </a:r>
           </a:p>
-          <a:p>
-            <a:pPr>
-              <a:spcAft>
-                <a:spcPts val="800"/>
-              </a:spcAft>
-            </a:pPr>
-            <a:r>
-              <a:rPr sz="2000" b="0" i="0">
-                <a:solidFill>
-                  <a:srgbClr val="333333"/>
-                </a:solidFill>
-                <a:latin typeface="Calibri"/>
-              </a:rPr>
-              <a:t>–   </a:t>
-            </a:r>
-            <a:r>
-              <a:rPr sz="2000" b="1" i="0">
-                <a:solidFill>
-                  <a:srgbClr val="333333"/>
-                </a:solidFill>
-                <a:latin typeface="Calibri"/>
-              </a:rPr>
-              <a:t>Un CI que solo imprime «OK» no es CI:</a:t>
-            </a:r>
-            <a:r>
-              <a:rPr sz="2000" b="0" i="0">
-                <a:solidFill>
-                  <a:srgbClr val="333333"/>
-                </a:solidFill>
-                <a:latin typeface="Calibri"/>
-              </a:rPr>
-              <a:t> tienes que poder decir qué error lo pondría rojo.</a:t>
-            </a:r>
-          </a:p>
-        </p:txBody>
-      </p:sp>
-      <p:sp>
-        <p:nvSpPr>
-          <p:cNvPr id="6" name="TextBox 5"/>
+        </p:txBody>
+      </p:sp>
+      <p:sp>
+        <p:nvSpPr>
+          <p:cNvPr id="8" name="TextBox 7"/>
           <p:cNvSpPr txBox="1"/>
           <p:nvPr/>
         </p:nvSpPr>

--- a/Arquitectura de Sistemas Computacionales/Clases/Clase 8 - Monitoreo optimizacion y CI-CD/Presentacion.pptx
+++ b/Arquitectura de Sistemas Computacionales/Clases/Clase 8 - Monitoreo optimizacion y CI-CD/Presentacion.pptx
@@ -538,7 +538,7 @@
           <a:p/>
           <a:p>
             <a:r>
-              <a:t>Integracion continua, definida operativamente, es esto: cada vez que alguien sube un cambio al repositorio, un servidor automatico toma el codigo en un entorno limpio, lo construye, le corre las pruebas y avisa en minutos si algo se rompio.</a:t>
+              <a:t>Integracion continua, en la practica, es esto: cada vez que alguien sube un cambio al repositorio, un servidor automatico toma el codigo en un entorno limpio, lo construye, le corre las pruebas y avisa en minutos si algo se rompio.</a:t>
             </a:r>
           </a:p>
           <a:p/>
@@ -1332,7 +1332,7 @@
           <a:p/>
           <a:p>
             <a:r>
-              <a:t>(No se proyecta) Y hay que anunciar como se califica esa frontera, porque es contraintuitivo para el estudiante que cree que reconocer un limite es admitir una carencia: la pregunta 9 SUMA un punto por ubicar correctamente el propio trabajo y decir que llega hasta «listo para desplegar», y DESCUENTA la mitad de la pregunta a quien afirme haber construido CD.</a:t>
+              <a:t>(No se proyecta) Y hay que anunciar como se califica esa frontera, porque le parece raro al estudiante que cree que reconocer un limite es admitir una carencia: la pregunta 9 SUMA un punto por ubicar correctamente el propio trabajo y decir que llega hasta «listo para desplegar», y DESCUENTA la mitad de la pregunta a quien afirme haber construido CD.</a:t>
             </a:r>
           </a:p>
         </p:txBody>
